--- a/Week_6/02_Hibernate_JPA_&_REST.pptx
+++ b/Week_6/02_Hibernate_JPA_&_REST.pptx
@@ -7,7 +7,15 @@
   <p:sldIdLst>
     <p:sldId id="256" r:id="rId2"/>
     <p:sldId id="314" r:id="rId3"/>
-    <p:sldId id="313" r:id="rId4"/>
+    <p:sldId id="315" r:id="rId4"/>
+    <p:sldId id="316" r:id="rId5"/>
+    <p:sldId id="317" r:id="rId6"/>
+    <p:sldId id="318" r:id="rId7"/>
+    <p:sldId id="321" r:id="rId8"/>
+    <p:sldId id="319" r:id="rId9"/>
+    <p:sldId id="320" r:id="rId10"/>
+    <p:sldId id="322" r:id="rId11"/>
+    <p:sldId id="313" r:id="rId12"/>
   </p:sldIdLst>
   <p:sldSz cx="12192000" cy="6858000"/>
   <p:notesSz cx="6858000" cy="9144000"/>
@@ -374,7 +382,7 @@
             <a:fld id="{B61BEF0D-F0BB-DE4B-95CE-6DB70DBA9567}" type="datetimeFigureOut">
               <a:rPr lang="en-US" dirty="0"/>
               <a:pPr/>
-              <a:t>9/28/2026</a:t>
+              <a:t>9/29/2026</a:t>
             </a:fld>
             <a:endParaRPr lang="en-US" dirty="0"/>
           </a:p>
@@ -636,7 +644,7 @@
             <a:fld id="{B61BEF0D-F0BB-DE4B-95CE-6DB70DBA9567}" type="datetimeFigureOut">
               <a:rPr lang="en-US" dirty="0"/>
               <a:pPr/>
-              <a:t>9/28/2026</a:t>
+              <a:t>9/29/2026</a:t>
             </a:fld>
             <a:endParaRPr lang="en-US" dirty="0"/>
           </a:p>
@@ -871,7 +879,7 @@
             <a:fld id="{B61BEF0D-F0BB-DE4B-95CE-6DB70DBA9567}" type="datetimeFigureOut">
               <a:rPr lang="en-US" dirty="0"/>
               <a:pPr/>
-              <a:t>9/28/2026</a:t>
+              <a:t>9/29/2026</a:t>
             </a:fld>
             <a:endParaRPr lang="en-US" dirty="0"/>
           </a:p>
@@ -1118,7 +1126,7 @@
             <a:fld id="{B61BEF0D-F0BB-DE4B-95CE-6DB70DBA9567}" type="datetimeFigureOut">
               <a:rPr lang="en-US" dirty="0"/>
               <a:pPr/>
-              <a:t>9/28/2026</a:t>
+              <a:t>9/29/2026</a:t>
             </a:fld>
             <a:endParaRPr lang="en-US" dirty="0"/>
           </a:p>
@@ -1426,7 +1434,7 @@
             <a:fld id="{B61BEF0D-F0BB-DE4B-95CE-6DB70DBA9567}" type="datetimeFigureOut">
               <a:rPr lang="en-US" dirty="0"/>
               <a:pPr/>
-              <a:t>9/28/2026</a:t>
+              <a:t>9/29/2026</a:t>
             </a:fld>
             <a:endParaRPr lang="en-US" dirty="0"/>
           </a:p>
@@ -1727,7 +1735,7 @@
             <a:fld id="{B61BEF0D-F0BB-DE4B-95CE-6DB70DBA9567}" type="datetimeFigureOut">
               <a:rPr lang="en-US" dirty="0"/>
               <a:pPr/>
-              <a:t>9/28/2026</a:t>
+              <a:t>9/29/2026</a:t>
             </a:fld>
             <a:endParaRPr lang="en-US" dirty="0"/>
           </a:p>
@@ -2148,7 +2156,7 @@
             <a:fld id="{B61BEF0D-F0BB-DE4B-95CE-6DB70DBA9567}" type="datetimeFigureOut">
               <a:rPr lang="en-US" dirty="0"/>
               <a:pPr/>
-              <a:t>9/28/2026</a:t>
+              <a:t>9/29/2026</a:t>
             </a:fld>
             <a:endParaRPr lang="en-US" dirty="0"/>
           </a:p>
@@ -2311,7 +2319,7 @@
             <a:fld id="{B61BEF0D-F0BB-DE4B-95CE-6DB70DBA9567}" type="datetimeFigureOut">
               <a:rPr lang="en-US" dirty="0"/>
               <a:pPr/>
-              <a:t>9/28/2026</a:t>
+              <a:t>9/29/2026</a:t>
             </a:fld>
             <a:endParaRPr lang="en-US" dirty="0"/>
           </a:p>
@@ -2408,7 +2416,7 @@
             <a:fld id="{B61BEF0D-F0BB-DE4B-95CE-6DB70DBA9567}" type="datetimeFigureOut">
               <a:rPr lang="en-US" dirty="0"/>
               <a:pPr/>
-              <a:t>9/28/2026</a:t>
+              <a:t>9/29/2026</a:t>
             </a:fld>
             <a:endParaRPr lang="en-US" dirty="0"/>
           </a:p>
@@ -2786,7 +2794,7 @@
             <a:fld id="{B61BEF0D-F0BB-DE4B-95CE-6DB70DBA9567}" type="datetimeFigureOut">
               <a:rPr lang="en-US" dirty="0"/>
               <a:pPr/>
-              <a:t>9/28/2026</a:t>
+              <a:t>9/29/2026</a:t>
             </a:fld>
             <a:endParaRPr lang="en-US" dirty="0"/>
           </a:p>
@@ -3072,7 +3080,7 @@
             <a:fld id="{B61BEF0D-F0BB-DE4B-95CE-6DB70DBA9567}" type="datetimeFigureOut">
               <a:rPr lang="en-US" dirty="0"/>
               <a:pPr/>
-              <a:t>9/28/2026</a:t>
+              <a:t>9/29/2026</a:t>
             </a:fld>
             <a:endParaRPr lang="en-US" dirty="0"/>
           </a:p>
@@ -3311,7 +3319,7 @@
             <a:fld id="{B61BEF0D-F0BB-DE4B-95CE-6DB70DBA9567}" type="datetimeFigureOut">
               <a:rPr lang="en-US" dirty="0"/>
               <a:pPr/>
-              <a:t>9/28/2026</a:t>
+              <a:t>9/29/2026</a:t>
             </a:fld>
             <a:endParaRPr lang="en-US" dirty="0"/>
           </a:p>
@@ -3969,7 +3977,7 @@
 </p:sld>
 </file>
 
-<file path=ppt/slides/slide2.xml><?xml version="1.0" encoding="utf-8"?>
+<file path=ppt/slides/slide10.xml><?xml version="1.0" encoding="utf-8"?>
 <p:sld xmlns:a="http://schemas.openxmlformats.org/drawingml/2006/main" xmlns:r="http://schemas.openxmlformats.org/officeDocument/2006/relationships" xmlns:p="http://schemas.openxmlformats.org/presentationml/2006/main">
   <p:cSld>
     <p:spTree>
@@ -3991,7 +3999,7 @@
           <p:cNvPr id="2" name="Title 1">
             <a:extLst>
               <a:ext uri="{FF2B5EF4-FFF2-40B4-BE49-F238E27FC236}">
-                <a16:creationId xmlns:a16="http://schemas.microsoft.com/office/drawing/2014/main" id="{41E12A36-4588-5F59-79E8-D52E4D63C35F}"/>
+                <a16:creationId xmlns:a16="http://schemas.microsoft.com/office/drawing/2014/main" id="{BB23CB1D-38E9-88B1-4DE6-3E50454DB880}"/>
               </a:ext>
             </a:extLst>
           </p:cNvPr>
@@ -4007,7 +4015,10 @@
           <a:bodyPr/>
           <a:lstStyle/>
           <a:p>
-            <a:endParaRPr lang="en-US"/>
+            <a:r>
+              <a:rPr lang="en-US" dirty="0"/>
+              <a:t>STOP</a:t>
+            </a:r>
           </a:p>
         </p:txBody>
       </p:sp>
@@ -4016,7 +4027,7 @@
           <p:cNvPr id="3" name="Content Placeholder 2">
             <a:extLst>
               <a:ext uri="{FF2B5EF4-FFF2-40B4-BE49-F238E27FC236}">
-                <a16:creationId xmlns:a16="http://schemas.microsoft.com/office/drawing/2014/main" id="{27AFFFA9-069D-DDF5-94A0-23E98E258204}"/>
+                <a16:creationId xmlns:a16="http://schemas.microsoft.com/office/drawing/2014/main" id="{CF5BF0EC-9B89-4A87-A203-4B32191C1C9C}"/>
               </a:ext>
             </a:extLst>
           </p:cNvPr>
@@ -4032,14 +4043,42 @@
           <a:bodyPr/>
           <a:lstStyle/>
           <a:p>
-            <a:endParaRPr lang="en-US"/>
+            <a:r>
+              <a:rPr lang="en-US" dirty="0"/>
+              <a:t>Let’s put theory into practice with a code-along</a:t>
+            </a:r>
+          </a:p>
+          <a:p>
+            <a:r>
+              <a:rPr lang="en-US" dirty="0"/>
+              <a:t>After, you will see the completed CRUD app with code comments in your course materials</a:t>
+            </a:r>
+          </a:p>
+          <a:p>
+            <a:r>
+              <a:rPr lang="en-US" dirty="0"/>
+              <a:t>We will stick with </a:t>
+            </a:r>
+            <a:r>
+              <a:rPr lang="en-US" dirty="0" err="1"/>
+              <a:t>EntityManager</a:t>
+            </a:r>
+            <a:r>
+              <a:rPr lang="en-US" dirty="0"/>
+              <a:t> for now, and later create another concretion for our repo/DAO layer that uses </a:t>
+            </a:r>
+            <a:r>
+              <a:rPr lang="en-US" dirty="0" err="1"/>
+              <a:t>JpaRepository</a:t>
+            </a:r>
+            <a:endParaRPr lang="en-US" dirty="0"/>
           </a:p>
         </p:txBody>
       </p:sp>
     </p:spTree>
     <p:extLst>
       <p:ext uri="{BB962C8B-B14F-4D97-AF65-F5344CB8AC3E}">
-        <p14:creationId xmlns:p14="http://schemas.microsoft.com/office/powerpoint/2010/main" val="1508837499"/>
+        <p14:creationId xmlns:p14="http://schemas.microsoft.com/office/powerpoint/2010/main" val="4118949446"/>
       </p:ext>
     </p:extLst>
   </p:cSld>
@@ -4049,8 +4088,8 @@
 </p:sld>
 </file>
 
-<file path=ppt/slides/slide3.xml><?xml version="1.0" encoding="utf-8"?>
-<p:sld xmlns:a="http://schemas.openxmlformats.org/drawingml/2006/main" xmlns:r="http://schemas.openxmlformats.org/officeDocument/2006/relationships" xmlns:p="http://schemas.openxmlformats.org/presentationml/2006/main">
+<file path=ppt/slides/slide11.xml><?xml version="1.0" encoding="utf-8"?>
+<p:sld xmlns:a="http://schemas.openxmlformats.org/drawingml/2006/main" xmlns:r="http://schemas.openxmlformats.org/officeDocument/2006/relationships" xmlns:p="http://schemas.openxmlformats.org/presentationml/2006/main" show="0">
   <p:cSld>
     <p:spTree>
       <p:nvGrpSpPr>
@@ -4470,6 +4509,2676 @@
     <p:extLst>
       <p:ext uri="{BB962C8B-B14F-4D97-AF65-F5344CB8AC3E}">
         <p14:creationId xmlns:p14="http://schemas.microsoft.com/office/powerpoint/2010/main" val="2532014160"/>
+      </p:ext>
+    </p:extLst>
+  </p:cSld>
+  <p:clrMapOvr>
+    <a:masterClrMapping/>
+  </p:clrMapOvr>
+</p:sld>
+</file>
+
+<file path=ppt/slides/slide2.xml><?xml version="1.0" encoding="utf-8"?>
+<p:sld xmlns:a="http://schemas.openxmlformats.org/drawingml/2006/main" xmlns:r="http://schemas.openxmlformats.org/officeDocument/2006/relationships" xmlns:p="http://schemas.openxmlformats.org/presentationml/2006/main">
+  <p:cSld>
+    <p:spTree>
+      <p:nvGrpSpPr>
+        <p:cNvPr id="1" name=""/>
+        <p:cNvGrpSpPr/>
+        <p:nvPr/>
+      </p:nvGrpSpPr>
+      <p:grpSpPr>
+        <a:xfrm>
+          <a:off x="0" y="0"/>
+          <a:ext cx="0" cy="0"/>
+          <a:chOff x="0" y="0"/>
+          <a:chExt cx="0" cy="0"/>
+        </a:xfrm>
+      </p:grpSpPr>
+      <p:sp>
+        <p:nvSpPr>
+          <p:cNvPr id="2" name="Title 1">
+            <a:extLst>
+              <a:ext uri="{FF2B5EF4-FFF2-40B4-BE49-F238E27FC236}">
+                <a16:creationId xmlns:a16="http://schemas.microsoft.com/office/drawing/2014/main" id="{41E12A36-4588-5F59-79E8-D52E4D63C35F}"/>
+              </a:ext>
+            </a:extLst>
+          </p:cNvPr>
+          <p:cNvSpPr>
+            <a:spLocks noGrp="1"/>
+          </p:cNvSpPr>
+          <p:nvPr>
+            <p:ph type="title"/>
+          </p:nvPr>
+        </p:nvSpPr>
+        <p:spPr/>
+        <p:txBody>
+          <a:bodyPr/>
+          <a:lstStyle/>
+          <a:p>
+            <a:r>
+              <a:rPr lang="en-US" dirty="0"/>
+              <a:t>What is hibernate?</a:t>
+            </a:r>
+          </a:p>
+        </p:txBody>
+      </p:sp>
+      <p:sp>
+        <p:nvSpPr>
+          <p:cNvPr id="3" name="Content Placeholder 2">
+            <a:extLst>
+              <a:ext uri="{FF2B5EF4-FFF2-40B4-BE49-F238E27FC236}">
+                <a16:creationId xmlns:a16="http://schemas.microsoft.com/office/drawing/2014/main" id="{27AFFFA9-069D-DDF5-94A0-23E98E258204}"/>
+              </a:ext>
+            </a:extLst>
+          </p:cNvPr>
+          <p:cNvSpPr>
+            <a:spLocks noGrp="1"/>
+          </p:cNvSpPr>
+          <p:nvPr>
+            <p:ph idx="1"/>
+          </p:nvPr>
+        </p:nvSpPr>
+        <p:spPr>
+          <a:xfrm>
+            <a:off x="581192" y="2180496"/>
+            <a:ext cx="11029615" cy="2859337"/>
+          </a:xfrm>
+        </p:spPr>
+        <p:txBody>
+          <a:bodyPr>
+            <a:normAutofit fontScale="92500" lnSpcReduction="20000"/>
+          </a:bodyPr>
+          <a:lstStyle/>
+          <a:p>
+            <a:r>
+              <a:rPr lang="en-US" dirty="0"/>
+              <a:t>A framework for saving /persisting java objects in a database</a:t>
+            </a:r>
+          </a:p>
+          <a:p>
+            <a:r>
+              <a:rPr lang="en-US" b="1" dirty="0"/>
+              <a:t>Object-Relational Mapping (ORM):</a:t>
+            </a:r>
+            <a:r>
+              <a:rPr lang="en-US" dirty="0"/>
+              <a:t> Bridges the gap between the object-oriented world of Java and the relational world of SQL databases. It allows developers to store and retrieve Java objects directly as database tables and rows without writing complex, boilerplate SQL queries.</a:t>
+            </a:r>
+          </a:p>
+          <a:p>
+            <a:pPr lvl="1"/>
+            <a:r>
+              <a:rPr lang="en-US" b="1" dirty="0"/>
+              <a:t>Productivity Boost:</a:t>
+            </a:r>
+            <a:r>
+              <a:rPr lang="en-US" dirty="0"/>
+              <a:t> Eliminates massive amounts of tedious JDBC code, connection management, and manual result-set mapping.</a:t>
+            </a:r>
+          </a:p>
+          <a:p>
+            <a:pPr lvl="1"/>
+            <a:r>
+              <a:rPr lang="en-US" b="1" dirty="0"/>
+              <a:t>Database Independence:</a:t>
+            </a:r>
+            <a:r>
+              <a:rPr lang="en-US" dirty="0"/>
+              <a:t> By abstracting SQL dialects, Hibernate allows your application to switch underlying databases with minimal configuration changes.</a:t>
+            </a:r>
+          </a:p>
+          <a:p>
+            <a:pPr lvl="1"/>
+            <a:r>
+              <a:rPr lang="en-US" b="1" dirty="0"/>
+              <a:t>Built-in Caching:</a:t>
+            </a:r>
+            <a:r>
+              <a:rPr lang="en-US" dirty="0"/>
+              <a:t> Features a first-level cache (associated with the Session) and an optional second-level cache (shared across sessions) to significantly reduce database round-trips and improve performance.</a:t>
+            </a:r>
+          </a:p>
+          <a:p>
+            <a:pPr lvl="1"/>
+            <a:r>
+              <a:rPr lang="en-US" b="1" dirty="0"/>
+              <a:t>Automatic Transaction Management:</a:t>
+            </a:r>
+            <a:r>
+              <a:rPr lang="en-US" dirty="0"/>
+              <a:t> Handles database transactions and connection pooling efficiently, ensuring data integrity.</a:t>
+            </a:r>
+          </a:p>
+          <a:p>
+            <a:endParaRPr lang="en-US" dirty="0"/>
+          </a:p>
+        </p:txBody>
+      </p:sp>
+      <p:pic>
+        <p:nvPicPr>
+          <p:cNvPr id="7" name="Picture 6">
+            <a:extLst>
+              <a:ext uri="{FF2B5EF4-FFF2-40B4-BE49-F238E27FC236}">
+                <a16:creationId xmlns:a16="http://schemas.microsoft.com/office/drawing/2014/main" id="{DA5C0503-D2A8-4E1B-DA9A-63E949012BEB}"/>
+              </a:ext>
+            </a:extLst>
+          </p:cNvPr>
+          <p:cNvPicPr>
+            <a:picLocks noChangeAspect="1"/>
+          </p:cNvPicPr>
+          <p:nvPr/>
+        </p:nvPicPr>
+        <p:blipFill>
+          <a:blip r:embed="rId2"/>
+          <a:stretch>
+            <a:fillRect/>
+          </a:stretch>
+        </p:blipFill>
+        <p:spPr>
+          <a:xfrm>
+            <a:off x="2375967" y="4868462"/>
+            <a:ext cx="7440063" cy="1609950"/>
+          </a:xfrm>
+          <a:prstGeom prst="rect">
+            <a:avLst/>
+          </a:prstGeom>
+        </p:spPr>
+      </p:pic>
+    </p:spTree>
+    <p:extLst>
+      <p:ext uri="{BB962C8B-B14F-4D97-AF65-F5344CB8AC3E}">
+        <p14:creationId xmlns:p14="http://schemas.microsoft.com/office/powerpoint/2010/main" val="1508837499"/>
+      </p:ext>
+    </p:extLst>
+  </p:cSld>
+  <p:clrMapOvr>
+    <a:masterClrMapping/>
+  </p:clrMapOvr>
+</p:sld>
+</file>
+
+<file path=ppt/slides/slide3.xml><?xml version="1.0" encoding="utf-8"?>
+<p:sld xmlns:a="http://schemas.openxmlformats.org/drawingml/2006/main" xmlns:r="http://schemas.openxmlformats.org/officeDocument/2006/relationships" xmlns:p="http://schemas.openxmlformats.org/presentationml/2006/main">
+  <p:cSld>
+    <p:spTree>
+      <p:nvGrpSpPr>
+        <p:cNvPr id="1" name=""/>
+        <p:cNvGrpSpPr/>
+        <p:nvPr/>
+      </p:nvGrpSpPr>
+      <p:grpSpPr>
+        <a:xfrm>
+          <a:off x="0" y="0"/>
+          <a:ext cx="0" cy="0"/>
+          <a:chOff x="0" y="0"/>
+          <a:chExt cx="0" cy="0"/>
+        </a:xfrm>
+      </p:grpSpPr>
+      <p:sp>
+        <p:nvSpPr>
+          <p:cNvPr id="2" name="Title 1">
+            <a:extLst>
+              <a:ext uri="{FF2B5EF4-FFF2-40B4-BE49-F238E27FC236}">
+                <a16:creationId xmlns:a16="http://schemas.microsoft.com/office/drawing/2014/main" id="{B6E07699-A587-AD13-366E-8CC5FF4CEEF7}"/>
+              </a:ext>
+            </a:extLst>
+          </p:cNvPr>
+          <p:cNvSpPr>
+            <a:spLocks noGrp="1"/>
+          </p:cNvSpPr>
+          <p:nvPr>
+            <p:ph type="title"/>
+          </p:nvPr>
+        </p:nvSpPr>
+        <p:spPr/>
+        <p:txBody>
+          <a:bodyPr/>
+          <a:lstStyle/>
+          <a:p>
+            <a:r>
+              <a:rPr lang="en-US" dirty="0"/>
+              <a:t>What is JPA?</a:t>
+            </a:r>
+          </a:p>
+        </p:txBody>
+      </p:sp>
+      <p:sp>
+        <p:nvSpPr>
+          <p:cNvPr id="3" name="Content Placeholder 2">
+            <a:extLst>
+              <a:ext uri="{FF2B5EF4-FFF2-40B4-BE49-F238E27FC236}">
+                <a16:creationId xmlns:a16="http://schemas.microsoft.com/office/drawing/2014/main" id="{D64CCE71-301C-D88A-5A4C-8AD9189506E6}"/>
+              </a:ext>
+            </a:extLst>
+          </p:cNvPr>
+          <p:cNvSpPr>
+            <a:spLocks noGrp="1"/>
+          </p:cNvSpPr>
+          <p:nvPr>
+            <p:ph idx="1"/>
+          </p:nvPr>
+        </p:nvSpPr>
+        <p:spPr>
+          <a:xfrm>
+            <a:off x="581193" y="2180496"/>
+            <a:ext cx="5096586" cy="4092713"/>
+          </a:xfrm>
+        </p:spPr>
+        <p:txBody>
+          <a:bodyPr/>
+          <a:lstStyle/>
+          <a:p>
+            <a:r>
+              <a:rPr lang="en-US" dirty="0"/>
+              <a:t>Jakarta Persistence API (JPA) – previously known as Java Persistence API</a:t>
+            </a:r>
+          </a:p>
+          <a:p>
+            <a:pPr lvl="1"/>
+            <a:r>
+              <a:rPr lang="en-US" dirty="0"/>
+              <a:t>Standard API for Object Relational Mapping</a:t>
+            </a:r>
+          </a:p>
+          <a:p>
+            <a:pPr lvl="1"/>
+            <a:r>
+              <a:rPr lang="en-US" dirty="0"/>
+              <a:t>Is a specification</a:t>
+            </a:r>
+          </a:p>
+          <a:p>
+            <a:pPr lvl="1"/>
+            <a:r>
+              <a:rPr lang="en-US" dirty="0"/>
+              <a:t>Includes interfaces</a:t>
+            </a:r>
+          </a:p>
+          <a:p>
+            <a:pPr lvl="1"/>
+            <a:r>
+              <a:rPr lang="en-US" dirty="0"/>
+              <a:t>Requires implementations to use</a:t>
+            </a:r>
+          </a:p>
+          <a:p>
+            <a:pPr lvl="1"/>
+            <a:r>
+              <a:rPr lang="en-US" dirty="0"/>
+              <a:t>Hibernate is one way we can implement JPA </a:t>
+            </a:r>
+          </a:p>
+        </p:txBody>
+      </p:sp>
+      <p:pic>
+        <p:nvPicPr>
+          <p:cNvPr id="5" name="Picture 4">
+            <a:extLst>
+              <a:ext uri="{FF2B5EF4-FFF2-40B4-BE49-F238E27FC236}">
+                <a16:creationId xmlns:a16="http://schemas.microsoft.com/office/drawing/2014/main" id="{88D308B2-5C8A-3D8B-DC61-D9EEB618683C}"/>
+              </a:ext>
+            </a:extLst>
+          </p:cNvPr>
+          <p:cNvPicPr>
+            <a:picLocks noChangeAspect="1"/>
+          </p:cNvPicPr>
+          <p:nvPr/>
+        </p:nvPicPr>
+        <p:blipFill>
+          <a:blip r:embed="rId2"/>
+          <a:stretch>
+            <a:fillRect/>
+          </a:stretch>
+        </p:blipFill>
+        <p:spPr>
+          <a:xfrm>
+            <a:off x="6096000" y="3212298"/>
+            <a:ext cx="5096586" cy="2029108"/>
+          </a:xfrm>
+          <a:prstGeom prst="rect">
+            <a:avLst/>
+          </a:prstGeom>
+        </p:spPr>
+      </p:pic>
+    </p:spTree>
+    <p:extLst>
+      <p:ext uri="{BB962C8B-B14F-4D97-AF65-F5344CB8AC3E}">
+        <p14:creationId xmlns:p14="http://schemas.microsoft.com/office/powerpoint/2010/main" val="989935227"/>
+      </p:ext>
+    </p:extLst>
+  </p:cSld>
+  <p:clrMapOvr>
+    <a:masterClrMapping/>
+  </p:clrMapOvr>
+</p:sld>
+</file>
+
+<file path=ppt/slides/slide4.xml><?xml version="1.0" encoding="utf-8"?>
+<p:sld xmlns:a="http://schemas.openxmlformats.org/drawingml/2006/main" xmlns:r="http://schemas.openxmlformats.org/officeDocument/2006/relationships" xmlns:p="http://schemas.openxmlformats.org/presentationml/2006/main">
+  <p:cSld>
+    <p:spTree>
+      <p:nvGrpSpPr>
+        <p:cNvPr id="1" name=""/>
+        <p:cNvGrpSpPr/>
+        <p:nvPr/>
+      </p:nvGrpSpPr>
+      <p:grpSpPr>
+        <a:xfrm>
+          <a:off x="0" y="0"/>
+          <a:ext cx="0" cy="0"/>
+          <a:chOff x="0" y="0"/>
+          <a:chExt cx="0" cy="0"/>
+        </a:xfrm>
+      </p:grpSpPr>
+      <p:sp>
+        <p:nvSpPr>
+          <p:cNvPr id="2" name="Title 1">
+            <a:extLst>
+              <a:ext uri="{FF2B5EF4-FFF2-40B4-BE49-F238E27FC236}">
+                <a16:creationId xmlns:a16="http://schemas.microsoft.com/office/drawing/2014/main" id="{20021588-B4AB-0930-D937-3C5629B35CEC}"/>
+              </a:ext>
+            </a:extLst>
+          </p:cNvPr>
+          <p:cNvSpPr>
+            <a:spLocks noGrp="1"/>
+          </p:cNvSpPr>
+          <p:nvPr>
+            <p:ph type="title"/>
+          </p:nvPr>
+        </p:nvSpPr>
+        <p:spPr/>
+        <p:txBody>
+          <a:bodyPr/>
+          <a:lstStyle/>
+          <a:p>
+            <a:r>
+              <a:rPr lang="en-US" dirty="0"/>
+              <a:t>Hibernate/JPA – concrete benefit</a:t>
+            </a:r>
+          </a:p>
+        </p:txBody>
+      </p:sp>
+      <p:pic>
+        <p:nvPicPr>
+          <p:cNvPr id="5" name="Content Placeholder 4">
+            <a:extLst>
+              <a:ext uri="{FF2B5EF4-FFF2-40B4-BE49-F238E27FC236}">
+                <a16:creationId xmlns:a16="http://schemas.microsoft.com/office/drawing/2014/main" id="{DE53D90B-C52E-02C9-58EA-C1F6BA2852EA}"/>
+              </a:ext>
+            </a:extLst>
+          </p:cNvPr>
+          <p:cNvPicPr>
+            <a:picLocks noGrp="1" noChangeAspect="1"/>
+          </p:cNvPicPr>
+          <p:nvPr>
+            <p:ph idx="1"/>
+          </p:nvPr>
+        </p:nvPicPr>
+        <p:blipFill>
+          <a:blip r:embed="rId2"/>
+          <a:stretch>
+            <a:fillRect/>
+          </a:stretch>
+        </p:blipFill>
+        <p:spPr>
+          <a:xfrm>
+            <a:off x="2821342" y="2707531"/>
+            <a:ext cx="6549314" cy="1766871"/>
+          </a:xfrm>
+          <a:prstGeom prst="rect">
+            <a:avLst/>
+          </a:prstGeom>
+        </p:spPr>
+      </p:pic>
+      <p:sp>
+        <p:nvSpPr>
+          <p:cNvPr id="6" name="TextBox 5">
+            <a:extLst>
+              <a:ext uri="{FF2B5EF4-FFF2-40B4-BE49-F238E27FC236}">
+                <a16:creationId xmlns:a16="http://schemas.microsoft.com/office/drawing/2014/main" id="{19B55E4D-06A2-388D-C33A-D7610C995E8B}"/>
+              </a:ext>
+            </a:extLst>
+          </p:cNvPr>
+          <p:cNvSpPr txBox="1"/>
+          <p:nvPr/>
+        </p:nvSpPr>
+        <p:spPr>
+          <a:xfrm>
+            <a:off x="3790047" y="2137558"/>
+            <a:ext cx="4611904" cy="369332"/>
+          </a:xfrm>
+          <a:prstGeom prst="rect">
+            <a:avLst/>
+          </a:prstGeom>
+          <a:noFill/>
+        </p:spPr>
+        <p:txBody>
+          <a:bodyPr wrap="none" rtlCol="0">
+            <a:spAutoFit/>
+          </a:bodyPr>
+          <a:lstStyle/>
+          <a:p>
+            <a:r>
+              <a:rPr lang="en-US" dirty="0"/>
+              <a:t>No JDBC required! It happens under the hood!</a:t>
+            </a:r>
+          </a:p>
+        </p:txBody>
+      </p:sp>
+      <p:pic>
+        <p:nvPicPr>
+          <p:cNvPr id="8" name="Picture 7">
+            <a:extLst>
+              <a:ext uri="{FF2B5EF4-FFF2-40B4-BE49-F238E27FC236}">
+                <a16:creationId xmlns:a16="http://schemas.microsoft.com/office/drawing/2014/main" id="{BB5D8FF5-ABF8-B1D9-FAD9-05F24D003391}"/>
+              </a:ext>
+            </a:extLst>
+          </p:cNvPr>
+          <p:cNvPicPr>
+            <a:picLocks noChangeAspect="1"/>
+          </p:cNvPicPr>
+          <p:nvPr/>
+        </p:nvPicPr>
+        <p:blipFill>
+          <a:blip r:embed="rId3"/>
+          <a:stretch>
+            <a:fillRect/>
+          </a:stretch>
+        </p:blipFill>
+        <p:spPr>
+          <a:xfrm>
+            <a:off x="2821342" y="4675043"/>
+            <a:ext cx="6549314" cy="1845789"/>
+          </a:xfrm>
+          <a:prstGeom prst="rect">
+            <a:avLst/>
+          </a:prstGeom>
+        </p:spPr>
+      </p:pic>
+    </p:spTree>
+    <p:extLst>
+      <p:ext uri="{BB962C8B-B14F-4D97-AF65-F5344CB8AC3E}">
+        <p14:creationId xmlns:p14="http://schemas.microsoft.com/office/powerpoint/2010/main" val="1905037944"/>
+      </p:ext>
+    </p:extLst>
+  </p:cSld>
+  <p:clrMapOvr>
+    <a:masterClrMapping/>
+  </p:clrMapOvr>
+</p:sld>
+</file>
+
+<file path=ppt/slides/slide5.xml><?xml version="1.0" encoding="utf-8"?>
+<p:sld xmlns:a="http://schemas.openxmlformats.org/drawingml/2006/main" xmlns:r="http://schemas.openxmlformats.org/officeDocument/2006/relationships" xmlns:p="http://schemas.openxmlformats.org/presentationml/2006/main">
+  <p:cSld>
+    <p:spTree>
+      <p:nvGrpSpPr>
+        <p:cNvPr id="1" name=""/>
+        <p:cNvGrpSpPr/>
+        <p:nvPr/>
+      </p:nvGrpSpPr>
+      <p:grpSpPr>
+        <a:xfrm>
+          <a:off x="0" y="0"/>
+          <a:ext cx="0" cy="0"/>
+          <a:chOff x="0" y="0"/>
+          <a:chExt cx="0" cy="0"/>
+        </a:xfrm>
+      </p:grpSpPr>
+      <p:sp>
+        <p:nvSpPr>
+          <p:cNvPr id="2" name="Title 1">
+            <a:extLst>
+              <a:ext uri="{FF2B5EF4-FFF2-40B4-BE49-F238E27FC236}">
+                <a16:creationId xmlns:a16="http://schemas.microsoft.com/office/drawing/2014/main" id="{219A5A21-1B4E-0EC7-55B0-DC8F5336AE71}"/>
+              </a:ext>
+            </a:extLst>
+          </p:cNvPr>
+          <p:cNvSpPr>
+            <a:spLocks noGrp="1"/>
+          </p:cNvSpPr>
+          <p:nvPr>
+            <p:ph type="title"/>
+          </p:nvPr>
+        </p:nvSpPr>
+        <p:spPr/>
+        <p:txBody>
+          <a:bodyPr/>
+          <a:lstStyle/>
+          <a:p>
+            <a:r>
+              <a:rPr lang="en-US" dirty="0"/>
+              <a:t>Setup Overview</a:t>
+            </a:r>
+          </a:p>
+        </p:txBody>
+      </p:sp>
+      <p:sp>
+        <p:nvSpPr>
+          <p:cNvPr id="3" name="Content Placeholder 2">
+            <a:extLst>
+              <a:ext uri="{FF2B5EF4-FFF2-40B4-BE49-F238E27FC236}">
+                <a16:creationId xmlns:a16="http://schemas.microsoft.com/office/drawing/2014/main" id="{A04DAB88-973E-8175-D4A1-B7DD117195E3}"/>
+              </a:ext>
+            </a:extLst>
+          </p:cNvPr>
+          <p:cNvSpPr>
+            <a:spLocks noGrp="1"/>
+          </p:cNvSpPr>
+          <p:nvPr>
+            <p:ph idx="1"/>
+          </p:nvPr>
+        </p:nvSpPr>
+        <p:spPr>
+          <a:xfrm>
+            <a:off x="581193" y="1948226"/>
+            <a:ext cx="11029615" cy="2429214"/>
+          </a:xfrm>
+        </p:spPr>
+        <p:txBody>
+          <a:bodyPr>
+            <a:normAutofit/>
+          </a:bodyPr>
+          <a:lstStyle/>
+          <a:p>
+            <a:r>
+              <a:rPr lang="en-US" dirty="0"/>
+              <a:t>In Spring Boot, Hibernate is the default implementation of JPA</a:t>
+            </a:r>
+          </a:p>
+          <a:p>
+            <a:r>
+              <a:rPr lang="en-US" dirty="0"/>
+              <a:t>With Spring </a:t>
+            </a:r>
+            <a:r>
+              <a:rPr lang="en-US" dirty="0" err="1"/>
+              <a:t>Initializr</a:t>
+            </a:r>
+            <a:r>
+              <a:rPr lang="en-US" dirty="0"/>
+              <a:t>:</a:t>
+            </a:r>
+          </a:p>
+          <a:p>
+            <a:pPr lvl="1"/>
+            <a:r>
+              <a:rPr lang="en-US" dirty="0"/>
+              <a:t>Postgres Driver: </a:t>
+            </a:r>
+            <a:r>
+              <a:rPr lang="en-US" dirty="0" err="1"/>
+              <a:t>org.postgresql:postgresql</a:t>
+            </a:r>
+            <a:endParaRPr lang="en-US" dirty="0"/>
+          </a:p>
+          <a:p>
+            <a:pPr lvl="1"/>
+            <a:r>
+              <a:rPr lang="en-US" dirty="0"/>
+              <a:t>Spring Data JPA: spring-boot-starter-data-</a:t>
+            </a:r>
+            <a:r>
+              <a:rPr lang="en-US" dirty="0" err="1"/>
+              <a:t>jpa</a:t>
+            </a:r>
+            <a:endParaRPr lang="en-US" dirty="0"/>
+          </a:p>
+          <a:p>
+            <a:r>
+              <a:rPr lang="en-US" dirty="0"/>
+              <a:t>Spring Boot will automatically configure our data source for us based on the above </a:t>
+            </a:r>
+          </a:p>
+          <a:p>
+            <a:pPr lvl="1"/>
+            <a:r>
+              <a:rPr lang="en-US" dirty="0"/>
+              <a:t>Also, our connection details in ‘</a:t>
+            </a:r>
+            <a:r>
+              <a:rPr lang="en-US" dirty="0" err="1"/>
+              <a:t>application.properties</a:t>
+            </a:r>
+            <a:r>
+              <a:rPr lang="en-US" dirty="0"/>
+              <a:t>’</a:t>
+            </a:r>
+          </a:p>
+        </p:txBody>
+      </p:sp>
+      <p:pic>
+        <p:nvPicPr>
+          <p:cNvPr id="7" name="Picture 6">
+            <a:extLst>
+              <a:ext uri="{FF2B5EF4-FFF2-40B4-BE49-F238E27FC236}">
+                <a16:creationId xmlns:a16="http://schemas.microsoft.com/office/drawing/2014/main" id="{D0724A1C-52A6-C1A5-9C27-F26577C4EF92}"/>
+              </a:ext>
+            </a:extLst>
+          </p:cNvPr>
+          <p:cNvPicPr>
+            <a:picLocks noChangeAspect="1"/>
+          </p:cNvPicPr>
+          <p:nvPr/>
+        </p:nvPicPr>
+        <p:blipFill>
+          <a:blip r:embed="rId2"/>
+          <a:stretch>
+            <a:fillRect/>
+          </a:stretch>
+        </p:blipFill>
+        <p:spPr>
+          <a:xfrm>
+            <a:off x="748920" y="4377440"/>
+            <a:ext cx="7925906" cy="2429214"/>
+          </a:xfrm>
+          <a:prstGeom prst="rect">
+            <a:avLst/>
+          </a:prstGeom>
+        </p:spPr>
+      </p:pic>
+      <p:pic>
+        <p:nvPicPr>
+          <p:cNvPr id="9" name="Picture 8">
+            <a:extLst>
+              <a:ext uri="{FF2B5EF4-FFF2-40B4-BE49-F238E27FC236}">
+                <a16:creationId xmlns:a16="http://schemas.microsoft.com/office/drawing/2014/main" id="{C42DFC67-AB62-DB86-1B14-68969966D916}"/>
+              </a:ext>
+            </a:extLst>
+          </p:cNvPr>
+          <p:cNvPicPr>
+            <a:picLocks noChangeAspect="1"/>
+          </p:cNvPicPr>
+          <p:nvPr/>
+        </p:nvPicPr>
+        <p:blipFill>
+          <a:blip r:embed="rId3"/>
+          <a:stretch>
+            <a:fillRect/>
+          </a:stretch>
+        </p:blipFill>
+        <p:spPr>
+          <a:xfrm>
+            <a:off x="6352274" y="5079453"/>
+            <a:ext cx="5258534" cy="657317"/>
+          </a:xfrm>
+          <a:prstGeom prst="rect">
+            <a:avLst/>
+          </a:prstGeom>
+        </p:spPr>
+      </p:pic>
+      <p:sp>
+        <p:nvSpPr>
+          <p:cNvPr id="10" name="TextBox 9">
+            <a:extLst>
+              <a:ext uri="{FF2B5EF4-FFF2-40B4-BE49-F238E27FC236}">
+                <a16:creationId xmlns:a16="http://schemas.microsoft.com/office/drawing/2014/main" id="{4D81AB22-FD75-B44C-5790-86207A5D390D}"/>
+              </a:ext>
+            </a:extLst>
+          </p:cNvPr>
+          <p:cNvSpPr txBox="1"/>
+          <p:nvPr/>
+        </p:nvSpPr>
+        <p:spPr>
+          <a:xfrm>
+            <a:off x="8610285" y="4556233"/>
+            <a:ext cx="2940741" cy="523220"/>
+          </a:xfrm>
+          <a:prstGeom prst="rect">
+            <a:avLst/>
+          </a:prstGeom>
+          <a:noFill/>
+        </p:spPr>
+        <p:txBody>
+          <a:bodyPr wrap="none" rtlCol="0">
+            <a:spAutoFit/>
+          </a:bodyPr>
+          <a:lstStyle/>
+          <a:p>
+            <a:r>
+              <a:rPr lang="en-US" sz="2800" b="1" dirty="0">
+                <a:solidFill>
+                  <a:srgbClr val="FF0000"/>
+                </a:solidFill>
+              </a:rPr>
+              <a:t>OR for </a:t>
+            </a:r>
+            <a:r>
+              <a:rPr lang="en-US" sz="2800" b="1" dirty="0" err="1">
+                <a:solidFill>
+                  <a:srgbClr val="FF0000"/>
+                </a:solidFill>
+              </a:rPr>
+              <a:t>postgres</a:t>
+            </a:r>
+            <a:r>
+              <a:rPr lang="en-US" sz="2800" b="1" dirty="0">
+                <a:solidFill>
+                  <a:srgbClr val="FF0000"/>
+                </a:solidFill>
+              </a:rPr>
+              <a:t>:</a:t>
+            </a:r>
+          </a:p>
+        </p:txBody>
+      </p:sp>
+    </p:spTree>
+    <p:extLst>
+      <p:ext uri="{BB962C8B-B14F-4D97-AF65-F5344CB8AC3E}">
+        <p14:creationId xmlns:p14="http://schemas.microsoft.com/office/powerpoint/2010/main" val="2860410399"/>
+      </p:ext>
+    </p:extLst>
+  </p:cSld>
+  <p:clrMapOvr>
+    <a:masterClrMapping/>
+  </p:clrMapOvr>
+</p:sld>
+</file>
+
+<file path=ppt/slides/slide6.xml><?xml version="1.0" encoding="utf-8"?>
+<p:sld xmlns:a="http://schemas.openxmlformats.org/drawingml/2006/main" xmlns:r="http://schemas.openxmlformats.org/officeDocument/2006/relationships" xmlns:p="http://schemas.openxmlformats.org/presentationml/2006/main">
+  <p:cSld>
+    <p:spTree>
+      <p:nvGrpSpPr>
+        <p:cNvPr id="1" name=""/>
+        <p:cNvGrpSpPr/>
+        <p:nvPr/>
+      </p:nvGrpSpPr>
+      <p:grpSpPr>
+        <a:xfrm>
+          <a:off x="0" y="0"/>
+          <a:ext cx="0" cy="0"/>
+          <a:chOff x="0" y="0"/>
+          <a:chExt cx="0" cy="0"/>
+        </a:xfrm>
+      </p:grpSpPr>
+      <p:sp>
+        <p:nvSpPr>
+          <p:cNvPr id="2" name="Title 1">
+            <a:extLst>
+              <a:ext uri="{FF2B5EF4-FFF2-40B4-BE49-F238E27FC236}">
+                <a16:creationId xmlns:a16="http://schemas.microsoft.com/office/drawing/2014/main" id="{72F111FE-A749-109A-A58E-30AF8D865F9E}"/>
+              </a:ext>
+            </a:extLst>
+          </p:cNvPr>
+          <p:cNvSpPr>
+            <a:spLocks noGrp="1"/>
+          </p:cNvSpPr>
+          <p:nvPr>
+            <p:ph type="title"/>
+          </p:nvPr>
+        </p:nvSpPr>
+        <p:spPr/>
+        <p:txBody>
+          <a:bodyPr/>
+          <a:lstStyle/>
+          <a:p>
+            <a:r>
+              <a:rPr lang="en-US" dirty="0" err="1"/>
+              <a:t>EntityManager</a:t>
+            </a:r>
+            <a:r>
+              <a:rPr lang="en-US" dirty="0"/>
+              <a:t> vs </a:t>
+            </a:r>
+            <a:r>
+              <a:rPr lang="en-US" dirty="0" err="1"/>
+              <a:t>JpaRepository</a:t>
+            </a:r>
+            <a:endParaRPr lang="en-US" dirty="0"/>
+          </a:p>
+        </p:txBody>
+      </p:sp>
+      <p:sp>
+        <p:nvSpPr>
+          <p:cNvPr id="3" name="Content Placeholder 2">
+            <a:extLst>
+              <a:ext uri="{FF2B5EF4-FFF2-40B4-BE49-F238E27FC236}">
+                <a16:creationId xmlns:a16="http://schemas.microsoft.com/office/drawing/2014/main" id="{CF664EAA-1D44-76F6-2F01-9982BB5CB94E}"/>
+              </a:ext>
+            </a:extLst>
+          </p:cNvPr>
+          <p:cNvSpPr>
+            <a:spLocks noGrp="1"/>
+          </p:cNvSpPr>
+          <p:nvPr>
+            <p:ph idx="1"/>
+          </p:nvPr>
+        </p:nvSpPr>
+        <p:spPr>
+          <a:xfrm>
+            <a:off x="581193" y="2139989"/>
+            <a:ext cx="11029615" cy="2110636"/>
+          </a:xfrm>
+        </p:spPr>
+        <p:txBody>
+          <a:bodyPr>
+            <a:normAutofit fontScale="70000" lnSpcReduction="20000"/>
+          </a:bodyPr>
+          <a:lstStyle/>
+          <a:p>
+            <a:pPr lvl="0"/>
+            <a:r>
+              <a:rPr lang="en-US" dirty="0" err="1">
+                <a:solidFill>
+                  <a:srgbClr val="92D050"/>
+                </a:solidFill>
+              </a:rPr>
+              <a:t>EntityManager</a:t>
+            </a:r>
+            <a:r>
+              <a:rPr lang="en-US" dirty="0"/>
+              <a:t> is the low-level JPA API for directly managing entities and interacting with the persistence context.</a:t>
+            </a:r>
+          </a:p>
+          <a:p>
+            <a:pPr lvl="0"/>
+            <a:r>
+              <a:rPr lang="en-US" dirty="0" err="1">
+                <a:solidFill>
+                  <a:srgbClr val="92D050"/>
+                </a:solidFill>
+              </a:rPr>
+              <a:t>JpaRepository</a:t>
+            </a:r>
+            <a:r>
+              <a:rPr lang="en-US" dirty="0"/>
+              <a:t> is a Spring Data abstraction that gives you a ready-made repository with CRUD, pagination, sorting, and query methods—without writing most of the boilerplate yourself.</a:t>
+            </a:r>
+          </a:p>
+          <a:p>
+            <a:pPr lvl="0"/>
+            <a:r>
+              <a:rPr lang="en-US" dirty="0"/>
+              <a:t>We will cover BOTH, starting with </a:t>
+            </a:r>
+            <a:r>
+              <a:rPr lang="en-US" dirty="0" err="1"/>
+              <a:t>EntityManager</a:t>
+            </a:r>
+            <a:endParaRPr lang="en-US" dirty="0"/>
+          </a:p>
+          <a:p>
+            <a:pPr lvl="0"/>
+            <a:r>
+              <a:rPr lang="en-US" dirty="0">
+                <a:solidFill>
+                  <a:srgbClr val="92D050"/>
+                </a:solidFill>
+              </a:rPr>
+              <a:t>Java Persistence Query Language (JPQL) </a:t>
+            </a:r>
+            <a:r>
+              <a:rPr lang="en-US" dirty="0"/>
+              <a:t>– used for querying entities and their fields, rather than database tables and columns, part of JPA standard and can be used by any JPA provider, i.e. Hibernate, </a:t>
+            </a:r>
+            <a:r>
+              <a:rPr lang="en-US" dirty="0" err="1"/>
+              <a:t>EclipseLink</a:t>
+            </a:r>
+            <a:r>
+              <a:rPr lang="en-US" dirty="0"/>
+              <a:t>, etc. </a:t>
+            </a:r>
+          </a:p>
+          <a:p>
+            <a:pPr lvl="0"/>
+            <a:r>
+              <a:rPr lang="en-US" dirty="0">
+                <a:solidFill>
+                  <a:srgbClr val="92D050"/>
+                </a:solidFill>
+              </a:rPr>
+              <a:t>Hibernate Query Language (HQL) </a:t>
+            </a:r>
+            <a:r>
+              <a:rPr lang="en-US" dirty="0"/>
+              <a:t>– Operates similar as above, but is Hibernate specific and thus may come with features unique to Hibernate  </a:t>
+            </a:r>
+          </a:p>
+          <a:p>
+            <a:pPr lvl="0"/>
+            <a:r>
+              <a:rPr lang="en-US" dirty="0"/>
+              <a:t>We will cover BOTH, starting with JPQL…. And… BOTH are accessible from </a:t>
+            </a:r>
+            <a:r>
+              <a:rPr lang="en-US" dirty="0" err="1"/>
+              <a:t>EntityManager</a:t>
+            </a:r>
+            <a:r>
+              <a:rPr lang="en-US" dirty="0"/>
+              <a:t> OR </a:t>
+            </a:r>
+            <a:r>
+              <a:rPr lang="en-US" dirty="0" err="1"/>
+              <a:t>JpaRepository</a:t>
+            </a:r>
+            <a:endParaRPr lang="en-US" dirty="0"/>
+          </a:p>
+          <a:p>
+            <a:pPr lvl="0"/>
+            <a:endParaRPr lang="en-US" dirty="0"/>
+          </a:p>
+          <a:p>
+            <a:endParaRPr lang="en-US" dirty="0"/>
+          </a:p>
+        </p:txBody>
+      </p:sp>
+      <p:graphicFrame>
+        <p:nvGraphicFramePr>
+          <p:cNvPr id="4" name="Table 3">
+            <a:extLst>
+              <a:ext uri="{FF2B5EF4-FFF2-40B4-BE49-F238E27FC236}">
+                <a16:creationId xmlns:a16="http://schemas.microsoft.com/office/drawing/2014/main" id="{8C362A85-186A-115C-1EF5-8A0206339B13}"/>
+              </a:ext>
+            </a:extLst>
+          </p:cNvPr>
+          <p:cNvGraphicFramePr>
+            <a:graphicFrameLocks noGrp="1"/>
+          </p:cNvGraphicFramePr>
+          <p:nvPr>
+            <p:extLst>
+              <p:ext uri="{D42A27DB-BD31-4B8C-83A1-F6EECF244321}">
+                <p14:modId xmlns:p14="http://schemas.microsoft.com/office/powerpoint/2010/main" val="1523063154"/>
+              </p:ext>
+            </p:extLst>
+          </p:nvPr>
+        </p:nvGraphicFramePr>
+        <p:xfrm>
+          <a:off x="581192" y="4094050"/>
+          <a:ext cx="11029950" cy="2567940"/>
+        </p:xfrm>
+        <a:graphic>
+          <a:graphicData uri="http://schemas.openxmlformats.org/drawingml/2006/table">
+            <a:tbl>
+              <a:tblPr>
+                <a:tableStyleId>{5C22544A-7EE6-4342-B048-85BDC9FD1C3A}</a:tableStyleId>
+              </a:tblPr>
+              <a:tblGrid>
+                <a:gridCol w="3676650">
+                  <a:extLst>
+                    <a:ext uri="{9D8B030D-6E8A-4147-A177-3AD203B41FA5}">
+                      <a16:colId xmlns:a16="http://schemas.microsoft.com/office/drawing/2014/main" val="2155962822"/>
+                    </a:ext>
+                  </a:extLst>
+                </a:gridCol>
+                <a:gridCol w="3676650">
+                  <a:extLst>
+                    <a:ext uri="{9D8B030D-6E8A-4147-A177-3AD203B41FA5}">
+                      <a16:colId xmlns:a16="http://schemas.microsoft.com/office/drawing/2014/main" val="1810830742"/>
+                    </a:ext>
+                  </a:extLst>
+                </a:gridCol>
+                <a:gridCol w="3676650">
+                  <a:extLst>
+                    <a:ext uri="{9D8B030D-6E8A-4147-A177-3AD203B41FA5}">
+                      <a16:colId xmlns:a16="http://schemas.microsoft.com/office/drawing/2014/main" val="3309991933"/>
+                    </a:ext>
+                  </a:extLst>
+                </a:gridCol>
+              </a:tblGrid>
+              <a:tr h="0">
+                <a:tc>
+                  <a:txBody>
+                    <a:bodyPr/>
+                    <a:lstStyle/>
+                    <a:p>
+                      <a:pPr marL="0" marR="0" algn="l">
+                        <a:buNone/>
+                      </a:pPr>
+                      <a:endParaRPr lang="en-US" sz="1400" b="1" i="0" dirty="0">
+                        <a:solidFill>
+                          <a:srgbClr val="FFFFFF"/>
+                        </a:solidFill>
+                        <a:effectLst/>
+                        <a:latin typeface="-apple-system-body"/>
+                      </a:endParaRPr>
+                    </a:p>
+                  </a:txBody>
+                  <a:tcPr anchor="ctr"/>
+                </a:tc>
+                <a:tc>
+                  <a:txBody>
+                    <a:bodyPr/>
+                    <a:lstStyle/>
+                    <a:p>
+                      <a:pPr marL="0" marR="0" lvl="0" indent="0" algn="l" defTabSz="457200" rtl="0" eaLnBrk="1" fontAlgn="auto" latinLnBrk="0" hangingPunct="1">
+                        <a:lnSpc>
+                          <a:spcPct val="100000"/>
+                        </a:lnSpc>
+                        <a:spcBef>
+                          <a:spcPts val="0"/>
+                        </a:spcBef>
+                        <a:spcAft>
+                          <a:spcPts val="0"/>
+                        </a:spcAft>
+                        <a:buClrTx/>
+                        <a:buSzTx/>
+                        <a:buFontTx/>
+                        <a:buNone/>
+                        <a:tabLst/>
+                        <a:defRPr/>
+                      </a:pPr>
+                      <a:r>
+                        <a:rPr lang="en-US" sz="1400" b="1" dirty="0" err="1">
+                          <a:effectLst/>
+                        </a:rPr>
+                        <a:t>EntityManager</a:t>
+                      </a:r>
+                      <a:endParaRPr lang="en-US" sz="1400" b="1" i="0" dirty="0">
+                        <a:solidFill>
+                          <a:srgbClr val="FFFFFF"/>
+                        </a:solidFill>
+                        <a:effectLst/>
+                        <a:latin typeface="-apple-system-body"/>
+                      </a:endParaRPr>
+                    </a:p>
+                  </a:txBody>
+                  <a:tcPr anchor="ctr"/>
+                </a:tc>
+                <a:tc>
+                  <a:txBody>
+                    <a:bodyPr/>
+                    <a:lstStyle/>
+                    <a:p>
+                      <a:pPr marL="0" marR="0" lvl="0" indent="0" algn="l" defTabSz="457200" rtl="0" eaLnBrk="1" fontAlgn="auto" latinLnBrk="0" hangingPunct="1">
+                        <a:lnSpc>
+                          <a:spcPct val="100000"/>
+                        </a:lnSpc>
+                        <a:spcBef>
+                          <a:spcPts val="0"/>
+                        </a:spcBef>
+                        <a:spcAft>
+                          <a:spcPts val="0"/>
+                        </a:spcAft>
+                        <a:buClrTx/>
+                        <a:buSzTx/>
+                        <a:buFontTx/>
+                        <a:buNone/>
+                        <a:tabLst/>
+                        <a:defRPr/>
+                      </a:pPr>
+                      <a:r>
+                        <a:rPr lang="en-US" sz="1400" b="1" dirty="0" err="1">
+                          <a:effectLst/>
+                        </a:rPr>
+                        <a:t>JpaRepository</a:t>
+                      </a:r>
+                      <a:endParaRPr lang="en-US" sz="1400" b="1" i="0" dirty="0">
+                        <a:solidFill>
+                          <a:srgbClr val="FFFFFF"/>
+                        </a:solidFill>
+                        <a:effectLst/>
+                        <a:latin typeface="-apple-system-body"/>
+                      </a:endParaRPr>
+                    </a:p>
+                  </a:txBody>
+                  <a:tcPr anchor="ctr"/>
+                </a:tc>
+                <a:extLst>
+                  <a:ext uri="{0D108BD9-81ED-4DB2-BD59-A6C34878D82A}">
+                    <a16:rowId xmlns:a16="http://schemas.microsoft.com/office/drawing/2014/main" val="609020007"/>
+                  </a:ext>
+                </a:extLst>
+              </a:tr>
+              <a:tr h="0">
+                <a:tc>
+                  <a:txBody>
+                    <a:bodyPr/>
+                    <a:lstStyle/>
+                    <a:p>
+                      <a:pPr marL="0" marR="0" algn="l">
+                        <a:buNone/>
+                      </a:pPr>
+                      <a:r>
+                        <a:rPr lang="en-US" sz="1050" b="1" dirty="0">
+                          <a:effectLst/>
+                        </a:rPr>
+                        <a:t>Comes from</a:t>
+                      </a:r>
+                      <a:endParaRPr lang="en-US" sz="1050" b="1" i="0" dirty="0">
+                        <a:solidFill>
+                          <a:srgbClr val="FFFFFF"/>
+                        </a:solidFill>
+                        <a:effectLst/>
+                        <a:latin typeface="-apple-system-body"/>
+                      </a:endParaRPr>
+                    </a:p>
+                  </a:txBody>
+                  <a:tcPr anchor="ctr"/>
+                </a:tc>
+                <a:tc>
+                  <a:txBody>
+                    <a:bodyPr/>
+                    <a:lstStyle/>
+                    <a:p>
+                      <a:pPr marL="0" marR="0" algn="l">
+                        <a:buNone/>
+                      </a:pPr>
+                      <a:r>
+                        <a:rPr lang="en-US" sz="1050" dirty="0">
+                          <a:effectLst/>
+                        </a:rPr>
+                        <a:t>JPA</a:t>
+                      </a:r>
+                      <a:endParaRPr lang="en-US" sz="1050" b="0" i="0" dirty="0">
+                        <a:solidFill>
+                          <a:srgbClr val="FFFFFF"/>
+                        </a:solidFill>
+                        <a:effectLst/>
+                        <a:latin typeface="-apple-system-body"/>
+                      </a:endParaRPr>
+                    </a:p>
+                  </a:txBody>
+                  <a:tcPr anchor="ctr"/>
+                </a:tc>
+                <a:tc>
+                  <a:txBody>
+                    <a:bodyPr/>
+                    <a:lstStyle/>
+                    <a:p>
+                      <a:pPr marL="0" marR="0" algn="l">
+                        <a:buNone/>
+                      </a:pPr>
+                      <a:r>
+                        <a:rPr lang="en-US" sz="1050">
+                          <a:effectLst/>
+                        </a:rPr>
+                        <a:t>Spring Data JPA</a:t>
+                      </a:r>
+                      <a:endParaRPr lang="en-US" sz="1050" b="0" i="0">
+                        <a:solidFill>
+                          <a:srgbClr val="FFFFFF"/>
+                        </a:solidFill>
+                        <a:effectLst/>
+                        <a:latin typeface="-apple-system-body"/>
+                      </a:endParaRPr>
+                    </a:p>
+                  </a:txBody>
+                  <a:tcPr anchor="ctr"/>
+                </a:tc>
+                <a:extLst>
+                  <a:ext uri="{0D108BD9-81ED-4DB2-BD59-A6C34878D82A}">
+                    <a16:rowId xmlns:a16="http://schemas.microsoft.com/office/drawing/2014/main" val="870512413"/>
+                  </a:ext>
+                </a:extLst>
+              </a:tr>
+              <a:tr h="0">
+                <a:tc>
+                  <a:txBody>
+                    <a:bodyPr/>
+                    <a:lstStyle/>
+                    <a:p>
+                      <a:pPr marL="0" marR="0" algn="l">
+                        <a:buNone/>
+                      </a:pPr>
+                      <a:r>
+                        <a:rPr lang="en-US" sz="1050" b="1" dirty="0">
+                          <a:effectLst/>
+                        </a:rPr>
+                        <a:t>Abstraction level</a:t>
+                      </a:r>
+                      <a:endParaRPr lang="en-US" sz="1050" b="1" i="0" dirty="0">
+                        <a:solidFill>
+                          <a:srgbClr val="FFFFFF"/>
+                        </a:solidFill>
+                        <a:effectLst/>
+                        <a:latin typeface="-apple-system-body"/>
+                      </a:endParaRPr>
+                    </a:p>
+                  </a:txBody>
+                  <a:tcPr anchor="ctr"/>
+                </a:tc>
+                <a:tc>
+                  <a:txBody>
+                    <a:bodyPr/>
+                    <a:lstStyle/>
+                    <a:p>
+                      <a:pPr marL="0" marR="0" algn="l">
+                        <a:buNone/>
+                      </a:pPr>
+                      <a:r>
+                        <a:rPr lang="en-US" sz="1050">
+                          <a:effectLst/>
+                        </a:rPr>
+                        <a:t>Low</a:t>
+                      </a:r>
+                      <a:endParaRPr lang="en-US" sz="1050" b="0" i="0">
+                        <a:solidFill>
+                          <a:srgbClr val="FFFFFF"/>
+                        </a:solidFill>
+                        <a:effectLst/>
+                        <a:latin typeface="-apple-system-body"/>
+                      </a:endParaRPr>
+                    </a:p>
+                  </a:txBody>
+                  <a:tcPr anchor="ctr"/>
+                </a:tc>
+                <a:tc>
+                  <a:txBody>
+                    <a:bodyPr/>
+                    <a:lstStyle/>
+                    <a:p>
+                      <a:pPr marL="0" marR="0" algn="l">
+                        <a:buNone/>
+                      </a:pPr>
+                      <a:r>
+                        <a:rPr lang="en-US" sz="1050">
+                          <a:effectLst/>
+                        </a:rPr>
+                        <a:t>High</a:t>
+                      </a:r>
+                      <a:endParaRPr lang="en-US" sz="1050" b="0" i="0">
+                        <a:solidFill>
+                          <a:srgbClr val="FFFFFF"/>
+                        </a:solidFill>
+                        <a:effectLst/>
+                        <a:latin typeface="-apple-system-body"/>
+                      </a:endParaRPr>
+                    </a:p>
+                  </a:txBody>
+                  <a:tcPr anchor="ctr"/>
+                </a:tc>
+                <a:extLst>
+                  <a:ext uri="{0D108BD9-81ED-4DB2-BD59-A6C34878D82A}">
+                    <a16:rowId xmlns:a16="http://schemas.microsoft.com/office/drawing/2014/main" val="511902263"/>
+                  </a:ext>
+                </a:extLst>
+              </a:tr>
+              <a:tr h="0">
+                <a:tc>
+                  <a:txBody>
+                    <a:bodyPr/>
+                    <a:lstStyle/>
+                    <a:p>
+                      <a:pPr marL="0" marR="0" algn="l">
+                        <a:buNone/>
+                      </a:pPr>
+                      <a:r>
+                        <a:rPr lang="en-US" sz="1050" b="1" dirty="0">
+                          <a:effectLst/>
+                        </a:rPr>
+                        <a:t>CRUD boilerplate</a:t>
+                      </a:r>
+                      <a:endParaRPr lang="en-US" sz="1050" b="1" i="0" dirty="0">
+                        <a:solidFill>
+                          <a:srgbClr val="FFFFFF"/>
+                        </a:solidFill>
+                        <a:effectLst/>
+                        <a:latin typeface="-apple-system-body"/>
+                      </a:endParaRPr>
+                    </a:p>
+                  </a:txBody>
+                  <a:tcPr anchor="ctr"/>
+                </a:tc>
+                <a:tc>
+                  <a:txBody>
+                    <a:bodyPr/>
+                    <a:lstStyle/>
+                    <a:p>
+                      <a:pPr marL="0" marR="0" algn="l">
+                        <a:buNone/>
+                      </a:pPr>
+                      <a:r>
+                        <a:rPr lang="en-US" sz="1050">
+                          <a:effectLst/>
+                        </a:rPr>
+                        <a:t>You write it</a:t>
+                      </a:r>
+                      <a:endParaRPr lang="en-US" sz="1050" b="0" i="0">
+                        <a:solidFill>
+                          <a:srgbClr val="FFFFFF"/>
+                        </a:solidFill>
+                        <a:effectLst/>
+                        <a:latin typeface="-apple-system-body"/>
+                      </a:endParaRPr>
+                    </a:p>
+                  </a:txBody>
+                  <a:tcPr anchor="ctr"/>
+                </a:tc>
+                <a:tc>
+                  <a:txBody>
+                    <a:bodyPr/>
+                    <a:lstStyle/>
+                    <a:p>
+                      <a:pPr marL="0" marR="0" algn="l">
+                        <a:buNone/>
+                      </a:pPr>
+                      <a:r>
+                        <a:rPr lang="en-US" sz="1050">
+                          <a:effectLst/>
+                        </a:rPr>
+                        <a:t>Mostly provided</a:t>
+                      </a:r>
+                      <a:endParaRPr lang="en-US" sz="1050" b="0" i="0">
+                        <a:solidFill>
+                          <a:srgbClr val="FFFFFF"/>
+                        </a:solidFill>
+                        <a:effectLst/>
+                        <a:latin typeface="-apple-system-body"/>
+                      </a:endParaRPr>
+                    </a:p>
+                  </a:txBody>
+                  <a:tcPr anchor="ctr"/>
+                </a:tc>
+                <a:extLst>
+                  <a:ext uri="{0D108BD9-81ED-4DB2-BD59-A6C34878D82A}">
+                    <a16:rowId xmlns:a16="http://schemas.microsoft.com/office/drawing/2014/main" val="2112053371"/>
+                  </a:ext>
+                </a:extLst>
+              </a:tr>
+              <a:tr h="0">
+                <a:tc>
+                  <a:txBody>
+                    <a:bodyPr/>
+                    <a:lstStyle/>
+                    <a:p>
+                      <a:pPr marL="0" marR="0" algn="l">
+                        <a:buNone/>
+                      </a:pPr>
+                      <a:r>
+                        <a:rPr lang="en-US" sz="1050" b="1" dirty="0">
+                          <a:effectLst/>
+                        </a:rPr>
+                        <a:t>Custom JPQL</a:t>
+                      </a:r>
+                      <a:endParaRPr lang="en-US" sz="1050" b="1" i="0" dirty="0">
+                        <a:solidFill>
+                          <a:srgbClr val="FFFFFF"/>
+                        </a:solidFill>
+                        <a:effectLst/>
+                        <a:latin typeface="-apple-system-body"/>
+                      </a:endParaRPr>
+                    </a:p>
+                  </a:txBody>
+                  <a:tcPr anchor="ctr"/>
+                </a:tc>
+                <a:tc>
+                  <a:txBody>
+                    <a:bodyPr/>
+                    <a:lstStyle/>
+                    <a:p>
+                      <a:pPr marL="0" marR="0" algn="l">
+                        <a:buNone/>
+                      </a:pPr>
+                      <a:r>
+                        <a:rPr lang="en-US" sz="1050">
+                          <a:effectLst/>
+                        </a:rPr>
+                        <a:t>Directly</a:t>
+                      </a:r>
+                      <a:endParaRPr lang="en-US" sz="1050" b="0" i="0">
+                        <a:solidFill>
+                          <a:srgbClr val="FFFFFF"/>
+                        </a:solidFill>
+                        <a:effectLst/>
+                        <a:latin typeface="-apple-system-body"/>
+                      </a:endParaRPr>
+                    </a:p>
+                  </a:txBody>
+                  <a:tcPr anchor="ctr"/>
+                </a:tc>
+                <a:tc>
+                  <a:txBody>
+                    <a:bodyPr/>
+                    <a:lstStyle/>
+                    <a:p>
+                      <a:pPr marL="0" marR="0" algn="l">
+                        <a:buNone/>
+                      </a:pPr>
+                      <a:r>
+                        <a:rPr lang="en-US" sz="1050">
+                          <a:effectLst/>
+                        </a:rPr>
+                        <a:t>@Query, specifications, etc.</a:t>
+                      </a:r>
+                      <a:endParaRPr lang="en-US" sz="1050" b="0" i="0">
+                        <a:solidFill>
+                          <a:srgbClr val="FFFFFF"/>
+                        </a:solidFill>
+                        <a:effectLst/>
+                        <a:latin typeface="-apple-system-body"/>
+                      </a:endParaRPr>
+                    </a:p>
+                  </a:txBody>
+                  <a:tcPr anchor="ctr"/>
+                </a:tc>
+                <a:extLst>
+                  <a:ext uri="{0D108BD9-81ED-4DB2-BD59-A6C34878D82A}">
+                    <a16:rowId xmlns:a16="http://schemas.microsoft.com/office/drawing/2014/main" val="785226202"/>
+                  </a:ext>
+                </a:extLst>
+              </a:tr>
+              <a:tr h="0">
+                <a:tc>
+                  <a:txBody>
+                    <a:bodyPr/>
+                    <a:lstStyle/>
+                    <a:p>
+                      <a:pPr marL="0" marR="0" algn="l">
+                        <a:buNone/>
+                      </a:pPr>
+                      <a:r>
+                        <a:rPr lang="en-US" sz="1050" b="1" dirty="0">
+                          <a:effectLst/>
+                        </a:rPr>
+                        <a:t>Persistence-context control</a:t>
+                      </a:r>
+                      <a:endParaRPr lang="en-US" sz="1050" b="1" i="0" dirty="0">
+                        <a:solidFill>
+                          <a:srgbClr val="FFFFFF"/>
+                        </a:solidFill>
+                        <a:effectLst/>
+                        <a:latin typeface="-apple-system-body"/>
+                      </a:endParaRPr>
+                    </a:p>
+                  </a:txBody>
+                  <a:tcPr anchor="ctr"/>
+                </a:tc>
+                <a:tc>
+                  <a:txBody>
+                    <a:bodyPr/>
+                    <a:lstStyle/>
+                    <a:p>
+                      <a:pPr marL="0" marR="0" algn="l">
+                        <a:buNone/>
+                      </a:pPr>
+                      <a:r>
+                        <a:rPr lang="en-US" sz="1050">
+                          <a:effectLst/>
+                        </a:rPr>
+                        <a:t>Excellent</a:t>
+                      </a:r>
+                      <a:endParaRPr lang="en-US" sz="1050" b="0" i="0">
+                        <a:solidFill>
+                          <a:srgbClr val="FFFFFF"/>
+                        </a:solidFill>
+                        <a:effectLst/>
+                        <a:latin typeface="-apple-system-body"/>
+                      </a:endParaRPr>
+                    </a:p>
+                  </a:txBody>
+                  <a:tcPr anchor="ctr"/>
+                </a:tc>
+                <a:tc>
+                  <a:txBody>
+                    <a:bodyPr/>
+                    <a:lstStyle/>
+                    <a:p>
+                      <a:pPr marL="0" marR="0" algn="l">
+                        <a:buNone/>
+                      </a:pPr>
+                      <a:r>
+                        <a:rPr lang="en-US" sz="1050">
+                          <a:effectLst/>
+                        </a:rPr>
+                        <a:t>Limited/direct access not its purpose</a:t>
+                      </a:r>
+                      <a:endParaRPr lang="en-US" sz="1050" b="0" i="0">
+                        <a:solidFill>
+                          <a:srgbClr val="FFFFFF"/>
+                        </a:solidFill>
+                        <a:effectLst/>
+                        <a:latin typeface="-apple-system-body"/>
+                      </a:endParaRPr>
+                    </a:p>
+                  </a:txBody>
+                  <a:tcPr anchor="ctr"/>
+                </a:tc>
+                <a:extLst>
+                  <a:ext uri="{0D108BD9-81ED-4DB2-BD59-A6C34878D82A}">
+                    <a16:rowId xmlns:a16="http://schemas.microsoft.com/office/drawing/2014/main" val="3624453493"/>
+                  </a:ext>
+                </a:extLst>
+              </a:tr>
+              <a:tr h="0">
+                <a:tc>
+                  <a:txBody>
+                    <a:bodyPr/>
+                    <a:lstStyle/>
+                    <a:p>
+                      <a:pPr marL="0" marR="0" algn="l">
+                        <a:buNone/>
+                      </a:pPr>
+                      <a:r>
+                        <a:rPr lang="en-US" sz="1050" b="1" dirty="0">
+                          <a:effectLst/>
+                        </a:rPr>
+                        <a:t>Pagination/sorting</a:t>
+                      </a:r>
+                      <a:endParaRPr lang="en-US" sz="1050" b="1" i="0" dirty="0">
+                        <a:solidFill>
+                          <a:srgbClr val="FFFFFF"/>
+                        </a:solidFill>
+                        <a:effectLst/>
+                        <a:latin typeface="-apple-system-body"/>
+                      </a:endParaRPr>
+                    </a:p>
+                  </a:txBody>
+                  <a:tcPr anchor="ctr"/>
+                </a:tc>
+                <a:tc>
+                  <a:txBody>
+                    <a:bodyPr/>
+                    <a:lstStyle/>
+                    <a:p>
+                      <a:pPr marL="0" marR="0" algn="l">
+                        <a:buNone/>
+                      </a:pPr>
+                      <a:r>
+                        <a:rPr lang="en-US" sz="1050">
+                          <a:effectLst/>
+                        </a:rPr>
+                        <a:t>Manual</a:t>
+                      </a:r>
+                      <a:endParaRPr lang="en-US" sz="1050" b="0" i="0">
+                        <a:solidFill>
+                          <a:srgbClr val="FFFFFF"/>
+                        </a:solidFill>
+                        <a:effectLst/>
+                        <a:latin typeface="-apple-system-body"/>
+                      </a:endParaRPr>
+                    </a:p>
+                  </a:txBody>
+                  <a:tcPr anchor="ctr"/>
+                </a:tc>
+                <a:tc>
+                  <a:txBody>
+                    <a:bodyPr/>
+                    <a:lstStyle/>
+                    <a:p>
+                      <a:pPr marL="0" marR="0" algn="l">
+                        <a:buNone/>
+                      </a:pPr>
+                      <a:r>
+                        <a:rPr lang="en-US" sz="1050">
+                          <a:effectLst/>
+                        </a:rPr>
+                        <a:t>Built in</a:t>
+                      </a:r>
+                      <a:endParaRPr lang="en-US" sz="1050" b="0" i="0">
+                        <a:solidFill>
+                          <a:srgbClr val="FFFFFF"/>
+                        </a:solidFill>
+                        <a:effectLst/>
+                        <a:latin typeface="-apple-system-body"/>
+                      </a:endParaRPr>
+                    </a:p>
+                  </a:txBody>
+                  <a:tcPr anchor="ctr"/>
+                </a:tc>
+                <a:extLst>
+                  <a:ext uri="{0D108BD9-81ED-4DB2-BD59-A6C34878D82A}">
+                    <a16:rowId xmlns:a16="http://schemas.microsoft.com/office/drawing/2014/main" val="4046422720"/>
+                  </a:ext>
+                </a:extLst>
+              </a:tr>
+              <a:tr h="0">
+                <a:tc>
+                  <a:txBody>
+                    <a:bodyPr/>
+                    <a:lstStyle/>
+                    <a:p>
+                      <a:pPr marL="0" marR="0" algn="l">
+                        <a:buNone/>
+                      </a:pPr>
+                      <a:r>
+                        <a:rPr lang="en-US" sz="1050" b="1" dirty="0">
+                          <a:effectLst/>
+                        </a:rPr>
+                        <a:t>Derived queries</a:t>
+                      </a:r>
+                      <a:endParaRPr lang="en-US" sz="1050" b="1" i="0" dirty="0">
+                        <a:solidFill>
+                          <a:srgbClr val="FFFFFF"/>
+                        </a:solidFill>
+                        <a:effectLst/>
+                        <a:latin typeface="-apple-system-body"/>
+                      </a:endParaRPr>
+                    </a:p>
+                  </a:txBody>
+                  <a:tcPr anchor="ctr"/>
+                </a:tc>
+                <a:tc>
+                  <a:txBody>
+                    <a:bodyPr/>
+                    <a:lstStyle/>
+                    <a:p>
+                      <a:pPr marL="0" marR="0" algn="l">
+                        <a:buNone/>
+                      </a:pPr>
+                      <a:r>
+                        <a:rPr lang="en-US" sz="1050">
+                          <a:effectLst/>
+                        </a:rPr>
+                        <a:t>No</a:t>
+                      </a:r>
+                      <a:endParaRPr lang="en-US" sz="1050" b="0" i="0">
+                        <a:solidFill>
+                          <a:srgbClr val="FFFFFF"/>
+                        </a:solidFill>
+                        <a:effectLst/>
+                        <a:latin typeface="-apple-system-body"/>
+                      </a:endParaRPr>
+                    </a:p>
+                  </a:txBody>
+                  <a:tcPr anchor="ctr"/>
+                </a:tc>
+                <a:tc>
+                  <a:txBody>
+                    <a:bodyPr/>
+                    <a:lstStyle/>
+                    <a:p>
+                      <a:pPr marL="0" marR="0" algn="l">
+                        <a:buNone/>
+                      </a:pPr>
+                      <a:r>
+                        <a:rPr lang="en-US" sz="1050">
+                          <a:effectLst/>
+                        </a:rPr>
+                        <a:t>Yes</a:t>
+                      </a:r>
+                      <a:endParaRPr lang="en-US" sz="1050" b="0" i="0">
+                        <a:solidFill>
+                          <a:srgbClr val="FFFFFF"/>
+                        </a:solidFill>
+                        <a:effectLst/>
+                        <a:latin typeface="-apple-system-body"/>
+                      </a:endParaRPr>
+                    </a:p>
+                  </a:txBody>
+                  <a:tcPr anchor="ctr"/>
+                </a:tc>
+                <a:extLst>
+                  <a:ext uri="{0D108BD9-81ED-4DB2-BD59-A6C34878D82A}">
+                    <a16:rowId xmlns:a16="http://schemas.microsoft.com/office/drawing/2014/main" val="1752053743"/>
+                  </a:ext>
+                </a:extLst>
+              </a:tr>
+              <a:tr h="0">
+                <a:tc>
+                  <a:txBody>
+                    <a:bodyPr/>
+                    <a:lstStyle/>
+                    <a:p>
+                      <a:pPr marL="0" marR="0" algn="l">
+                        <a:buNone/>
+                      </a:pPr>
+                      <a:r>
+                        <a:rPr lang="en-US" sz="1050" b="1" dirty="0">
+                          <a:effectLst/>
+                        </a:rPr>
+                        <a:t>JPA portability</a:t>
+                      </a:r>
+                      <a:endParaRPr lang="en-US" sz="1050" b="1" i="0" dirty="0">
+                        <a:solidFill>
+                          <a:srgbClr val="FFFFFF"/>
+                        </a:solidFill>
+                        <a:effectLst/>
+                        <a:latin typeface="-apple-system-body"/>
+                      </a:endParaRPr>
+                    </a:p>
+                  </a:txBody>
+                  <a:tcPr anchor="ctr"/>
+                </a:tc>
+                <a:tc>
+                  <a:txBody>
+                    <a:bodyPr/>
+                    <a:lstStyle/>
+                    <a:p>
+                      <a:pPr marL="0" marR="0" algn="l">
+                        <a:buNone/>
+                      </a:pPr>
+                      <a:r>
+                        <a:rPr lang="en-US" sz="1050">
+                          <a:effectLst/>
+                        </a:rPr>
+                        <a:t>Yes</a:t>
+                      </a:r>
+                      <a:endParaRPr lang="en-US" sz="1050" b="0" i="0">
+                        <a:solidFill>
+                          <a:srgbClr val="FFFFFF"/>
+                        </a:solidFill>
+                        <a:effectLst/>
+                        <a:latin typeface="-apple-system-body"/>
+                      </a:endParaRPr>
+                    </a:p>
+                  </a:txBody>
+                  <a:tcPr anchor="ctr"/>
+                </a:tc>
+                <a:tc>
+                  <a:txBody>
+                    <a:bodyPr/>
+                    <a:lstStyle/>
+                    <a:p>
+                      <a:pPr marL="0" marR="0" algn="l">
+                        <a:buNone/>
+                      </a:pPr>
+                      <a:r>
+                        <a:rPr lang="en-US" sz="1050">
+                          <a:effectLst/>
+                        </a:rPr>
+                        <a:t>Tied to Spring Data</a:t>
+                      </a:r>
+                      <a:endParaRPr lang="en-US" sz="1050" b="0" i="0">
+                        <a:solidFill>
+                          <a:srgbClr val="FFFFFF"/>
+                        </a:solidFill>
+                        <a:effectLst/>
+                        <a:latin typeface="-apple-system-body"/>
+                      </a:endParaRPr>
+                    </a:p>
+                  </a:txBody>
+                  <a:tcPr anchor="ctr"/>
+                </a:tc>
+                <a:extLst>
+                  <a:ext uri="{0D108BD9-81ED-4DB2-BD59-A6C34878D82A}">
+                    <a16:rowId xmlns:a16="http://schemas.microsoft.com/office/drawing/2014/main" val="3687287676"/>
+                  </a:ext>
+                </a:extLst>
+              </a:tr>
+              <a:tr h="0">
+                <a:tc>
+                  <a:txBody>
+                    <a:bodyPr/>
+                    <a:lstStyle/>
+                    <a:p>
+                      <a:pPr marL="0" marR="0" algn="l">
+                        <a:buNone/>
+                      </a:pPr>
+                      <a:r>
+                        <a:rPr lang="en-US" sz="1050" b="1" dirty="0">
+                          <a:effectLst/>
+                        </a:rPr>
+                        <a:t>Best for</a:t>
+                      </a:r>
+                      <a:endParaRPr lang="en-US" sz="1050" b="1" i="0" dirty="0">
+                        <a:solidFill>
+                          <a:srgbClr val="FFFFFF"/>
+                        </a:solidFill>
+                        <a:effectLst/>
+                        <a:latin typeface="-apple-system-body"/>
+                      </a:endParaRPr>
+                    </a:p>
+                  </a:txBody>
+                  <a:tcPr anchor="ctr"/>
+                </a:tc>
+                <a:tc>
+                  <a:txBody>
+                    <a:bodyPr/>
+                    <a:lstStyle/>
+                    <a:p>
+                      <a:pPr marL="0" marR="0" algn="l">
+                        <a:buNone/>
+                      </a:pPr>
+                      <a:r>
+                        <a:rPr lang="en-US" sz="1050">
+                          <a:effectLst/>
+                        </a:rPr>
+                        <a:t>Complex/custom persistence logic</a:t>
+                      </a:r>
+                      <a:endParaRPr lang="en-US" sz="1050" b="0" i="0">
+                        <a:solidFill>
+                          <a:srgbClr val="FFFFFF"/>
+                        </a:solidFill>
+                        <a:effectLst/>
+                        <a:latin typeface="-apple-system-body"/>
+                      </a:endParaRPr>
+                    </a:p>
+                  </a:txBody>
+                  <a:tcPr anchor="ctr"/>
+                </a:tc>
+                <a:tc>
+                  <a:txBody>
+                    <a:bodyPr/>
+                    <a:lstStyle/>
+                    <a:p>
+                      <a:pPr marL="0" marR="0" algn="l">
+                        <a:buNone/>
+                      </a:pPr>
+                      <a:r>
+                        <a:rPr lang="en-US" sz="1050" dirty="0">
+                          <a:effectLst/>
+                        </a:rPr>
+                        <a:t>Typical application CRUD</a:t>
+                      </a:r>
+                      <a:endParaRPr lang="en-US" sz="1050" b="0" i="0" dirty="0">
+                        <a:solidFill>
+                          <a:srgbClr val="FFFFFF"/>
+                        </a:solidFill>
+                        <a:effectLst/>
+                        <a:latin typeface="-apple-system-body"/>
+                      </a:endParaRPr>
+                    </a:p>
+                  </a:txBody>
+                  <a:tcPr anchor="ctr"/>
+                </a:tc>
+                <a:extLst>
+                  <a:ext uri="{0D108BD9-81ED-4DB2-BD59-A6C34878D82A}">
+                    <a16:rowId xmlns:a16="http://schemas.microsoft.com/office/drawing/2014/main" val="3217419162"/>
+                  </a:ext>
+                </a:extLst>
+              </a:tr>
+            </a:tbl>
+          </a:graphicData>
+        </a:graphic>
+      </p:graphicFrame>
+    </p:spTree>
+    <p:extLst>
+      <p:ext uri="{BB962C8B-B14F-4D97-AF65-F5344CB8AC3E}">
+        <p14:creationId xmlns:p14="http://schemas.microsoft.com/office/powerpoint/2010/main" val="1725810155"/>
+      </p:ext>
+    </p:extLst>
+  </p:cSld>
+  <p:clrMapOvr>
+    <a:masterClrMapping/>
+  </p:clrMapOvr>
+</p:sld>
+</file>
+
+<file path=ppt/slides/slide7.xml><?xml version="1.0" encoding="utf-8"?>
+<p:sld xmlns:a="http://schemas.openxmlformats.org/drawingml/2006/main" xmlns:r="http://schemas.openxmlformats.org/officeDocument/2006/relationships" xmlns:p="http://schemas.openxmlformats.org/presentationml/2006/main">
+  <p:cSld>
+    <p:spTree>
+      <p:nvGrpSpPr>
+        <p:cNvPr id="1" name=""/>
+        <p:cNvGrpSpPr/>
+        <p:nvPr/>
+      </p:nvGrpSpPr>
+      <p:grpSpPr>
+        <a:xfrm>
+          <a:off x="0" y="0"/>
+          <a:ext cx="0" cy="0"/>
+          <a:chOff x="0" y="0"/>
+          <a:chExt cx="0" cy="0"/>
+        </a:xfrm>
+      </p:grpSpPr>
+      <p:sp>
+        <p:nvSpPr>
+          <p:cNvPr id="2" name="Title 1">
+            <a:extLst>
+              <a:ext uri="{FF2B5EF4-FFF2-40B4-BE49-F238E27FC236}">
+                <a16:creationId xmlns:a16="http://schemas.microsoft.com/office/drawing/2014/main" id="{072BDCBF-5D78-C5BA-D809-7F7F3FC0A4AA}"/>
+              </a:ext>
+            </a:extLst>
+          </p:cNvPr>
+          <p:cNvSpPr>
+            <a:spLocks noGrp="1"/>
+          </p:cNvSpPr>
+          <p:nvPr>
+            <p:ph type="title"/>
+          </p:nvPr>
+        </p:nvSpPr>
+        <p:spPr/>
+        <p:txBody>
+          <a:bodyPr/>
+          <a:lstStyle/>
+          <a:p>
+            <a:r>
+              <a:rPr lang="en-US" dirty="0"/>
+              <a:t>Typical stack</a:t>
+            </a:r>
+          </a:p>
+        </p:txBody>
+      </p:sp>
+      <p:sp>
+        <p:nvSpPr>
+          <p:cNvPr id="5" name="TextBox 4">
+            <a:extLst>
+              <a:ext uri="{FF2B5EF4-FFF2-40B4-BE49-F238E27FC236}">
+                <a16:creationId xmlns:a16="http://schemas.microsoft.com/office/drawing/2014/main" id="{88CFE19A-50B1-8913-AE67-1C9B68684A46}"/>
+              </a:ext>
+            </a:extLst>
+          </p:cNvPr>
+          <p:cNvSpPr txBox="1"/>
+          <p:nvPr/>
+        </p:nvSpPr>
+        <p:spPr>
+          <a:xfrm>
+            <a:off x="3336620" y="2623428"/>
+            <a:ext cx="2212410" cy="3139321"/>
+          </a:xfrm>
+          <a:prstGeom prst="rect">
+            <a:avLst/>
+          </a:prstGeom>
+          <a:noFill/>
+        </p:spPr>
+        <p:txBody>
+          <a:bodyPr wrap="square">
+            <a:spAutoFit/>
+          </a:bodyPr>
+          <a:lstStyle/>
+          <a:p>
+            <a:pPr algn="ctr"/>
+            <a:r>
+              <a:rPr lang="en-US" dirty="0"/>
+              <a:t>Spring Data JPA</a:t>
+            </a:r>
+          </a:p>
+          <a:p>
+            <a:pPr algn="ctr"/>
+            <a:r>
+              <a:rPr lang="en-US" dirty="0"/>
+              <a:t>      ↓</a:t>
+            </a:r>
+          </a:p>
+          <a:p>
+            <a:pPr algn="ctr"/>
+            <a:r>
+              <a:rPr lang="en-US" dirty="0"/>
+              <a:t>  </a:t>
+            </a:r>
+            <a:r>
+              <a:rPr lang="en-US" dirty="0" err="1"/>
+              <a:t>JpaRepository</a:t>
+            </a:r>
+            <a:endParaRPr lang="en-US" dirty="0"/>
+          </a:p>
+          <a:p>
+            <a:pPr algn="ctr"/>
+            <a:r>
+              <a:rPr lang="en-US" dirty="0"/>
+              <a:t>      ↓</a:t>
+            </a:r>
+          </a:p>
+          <a:p>
+            <a:pPr algn="ctr"/>
+            <a:r>
+              <a:rPr lang="en-US" dirty="0"/>
+              <a:t> </a:t>
+            </a:r>
+            <a:r>
+              <a:rPr lang="en-US" dirty="0" err="1"/>
+              <a:t>EntityManager</a:t>
+            </a:r>
+            <a:endParaRPr lang="en-US" dirty="0"/>
+          </a:p>
+          <a:p>
+            <a:pPr algn="ctr"/>
+            <a:r>
+              <a:rPr lang="en-US" dirty="0"/>
+              <a:t>      ↓</a:t>
+            </a:r>
+          </a:p>
+          <a:p>
+            <a:pPr algn="ctr"/>
+            <a:r>
+              <a:rPr lang="en-US" dirty="0"/>
+              <a:t>   Hibernate</a:t>
+            </a:r>
+          </a:p>
+          <a:p>
+            <a:pPr algn="ctr"/>
+            <a:r>
+              <a:rPr lang="en-US" dirty="0"/>
+              <a:t>      ↓</a:t>
+            </a:r>
+          </a:p>
+          <a:p>
+            <a:pPr algn="ctr"/>
+            <a:r>
+              <a:rPr lang="en-US" dirty="0"/>
+              <a:t>    Session</a:t>
+            </a:r>
+          </a:p>
+          <a:p>
+            <a:pPr algn="ctr"/>
+            <a:r>
+              <a:rPr lang="en-US" dirty="0"/>
+              <a:t>      ↓</a:t>
+            </a:r>
+          </a:p>
+          <a:p>
+            <a:pPr algn="ctr"/>
+            <a:r>
+              <a:rPr lang="en-US" dirty="0"/>
+              <a:t>   Database</a:t>
+            </a:r>
+          </a:p>
+        </p:txBody>
+      </p:sp>
+      <p:sp>
+        <p:nvSpPr>
+          <p:cNvPr id="6" name="TextBox 5">
+            <a:extLst>
+              <a:ext uri="{FF2B5EF4-FFF2-40B4-BE49-F238E27FC236}">
+                <a16:creationId xmlns:a16="http://schemas.microsoft.com/office/drawing/2014/main" id="{D2A814FD-D449-EC97-F6A1-90B628648FEE}"/>
+              </a:ext>
+            </a:extLst>
+          </p:cNvPr>
+          <p:cNvSpPr txBox="1"/>
+          <p:nvPr/>
+        </p:nvSpPr>
+        <p:spPr>
+          <a:xfrm>
+            <a:off x="6200383" y="2623428"/>
+            <a:ext cx="2013885" cy="3139321"/>
+          </a:xfrm>
+          <a:prstGeom prst="rect">
+            <a:avLst/>
+          </a:prstGeom>
+          <a:noFill/>
+        </p:spPr>
+        <p:txBody>
+          <a:bodyPr wrap="none" rtlCol="0">
+            <a:spAutoFit/>
+          </a:bodyPr>
+          <a:lstStyle/>
+          <a:p>
+            <a:pPr marL="285750" indent="-285750">
+              <a:buFont typeface="Wingdings" panose="05000000000000000000" pitchFamily="2" charset="2"/>
+              <a:buChar char="ß"/>
+            </a:pPr>
+            <a:r>
+              <a:rPr lang="en-US" dirty="0">
+                <a:sym typeface="Wingdings" panose="05000000000000000000" pitchFamily="2" charset="2"/>
+              </a:rPr>
+              <a:t>More abstracted</a:t>
+            </a:r>
+          </a:p>
+          <a:p>
+            <a:pPr marL="285750" indent="-285750">
+              <a:buFont typeface="Wingdings" panose="05000000000000000000" pitchFamily="2" charset="2"/>
+              <a:buChar char="ß"/>
+            </a:pPr>
+            <a:endParaRPr lang="en-US" dirty="0">
+              <a:sym typeface="Wingdings" panose="05000000000000000000" pitchFamily="2" charset="2"/>
+            </a:endParaRPr>
+          </a:p>
+          <a:p>
+            <a:pPr marL="285750" indent="-285750">
+              <a:buFont typeface="Wingdings" panose="05000000000000000000" pitchFamily="2" charset="2"/>
+              <a:buChar char="ß"/>
+            </a:pPr>
+            <a:endParaRPr lang="en-US" dirty="0">
+              <a:sym typeface="Wingdings" panose="05000000000000000000" pitchFamily="2" charset="2"/>
+            </a:endParaRPr>
+          </a:p>
+          <a:p>
+            <a:pPr marL="285750" indent="-285750">
+              <a:buFont typeface="Wingdings" panose="05000000000000000000" pitchFamily="2" charset="2"/>
+              <a:buChar char="ß"/>
+            </a:pPr>
+            <a:endParaRPr lang="en-US" dirty="0">
+              <a:sym typeface="Wingdings" panose="05000000000000000000" pitchFamily="2" charset="2"/>
+            </a:endParaRPr>
+          </a:p>
+          <a:p>
+            <a:pPr marL="285750" indent="-285750">
+              <a:buFont typeface="Wingdings" panose="05000000000000000000" pitchFamily="2" charset="2"/>
+              <a:buChar char="ß"/>
+            </a:pPr>
+            <a:endParaRPr lang="en-US" dirty="0">
+              <a:sym typeface="Wingdings" panose="05000000000000000000" pitchFamily="2" charset="2"/>
+            </a:endParaRPr>
+          </a:p>
+          <a:p>
+            <a:pPr marL="285750" indent="-285750">
+              <a:buFont typeface="Wingdings" panose="05000000000000000000" pitchFamily="2" charset="2"/>
+              <a:buChar char="ß"/>
+            </a:pPr>
+            <a:endParaRPr lang="en-US" dirty="0">
+              <a:sym typeface="Wingdings" panose="05000000000000000000" pitchFamily="2" charset="2"/>
+            </a:endParaRPr>
+          </a:p>
+          <a:p>
+            <a:pPr marL="285750" indent="-285750">
+              <a:buFont typeface="Wingdings" panose="05000000000000000000" pitchFamily="2" charset="2"/>
+              <a:buChar char="ß"/>
+            </a:pPr>
+            <a:endParaRPr lang="en-US" dirty="0">
+              <a:sym typeface="Wingdings" panose="05000000000000000000" pitchFamily="2" charset="2"/>
+            </a:endParaRPr>
+          </a:p>
+          <a:p>
+            <a:pPr marL="285750" indent="-285750">
+              <a:buFont typeface="Wingdings" panose="05000000000000000000" pitchFamily="2" charset="2"/>
+              <a:buChar char="ß"/>
+            </a:pPr>
+            <a:endParaRPr lang="en-US" dirty="0">
+              <a:sym typeface="Wingdings" panose="05000000000000000000" pitchFamily="2" charset="2"/>
+            </a:endParaRPr>
+          </a:p>
+          <a:p>
+            <a:pPr marL="285750" indent="-285750">
+              <a:buFont typeface="Wingdings" panose="05000000000000000000" pitchFamily="2" charset="2"/>
+              <a:buChar char="ß"/>
+            </a:pPr>
+            <a:endParaRPr lang="en-US" dirty="0">
+              <a:sym typeface="Wingdings" panose="05000000000000000000" pitchFamily="2" charset="2"/>
+            </a:endParaRPr>
+          </a:p>
+          <a:p>
+            <a:pPr marL="285750" indent="-285750">
+              <a:buFont typeface="Wingdings" panose="05000000000000000000" pitchFamily="2" charset="2"/>
+              <a:buChar char="ß"/>
+            </a:pPr>
+            <a:endParaRPr lang="en-US" dirty="0">
+              <a:sym typeface="Wingdings" panose="05000000000000000000" pitchFamily="2" charset="2"/>
+            </a:endParaRPr>
+          </a:p>
+          <a:p>
+            <a:pPr marL="285750" indent="-285750">
+              <a:buFont typeface="Wingdings" panose="05000000000000000000" pitchFamily="2" charset="2"/>
+              <a:buChar char="ß"/>
+            </a:pPr>
+            <a:r>
+              <a:rPr lang="en-US" dirty="0">
+                <a:sym typeface="Wingdings" panose="05000000000000000000" pitchFamily="2" charset="2"/>
+              </a:rPr>
+              <a:t>Less </a:t>
+            </a:r>
+            <a:r>
+              <a:rPr lang="en-US" dirty="0" err="1">
+                <a:sym typeface="Wingdings" panose="05000000000000000000" pitchFamily="2" charset="2"/>
+              </a:rPr>
+              <a:t>absracted</a:t>
+            </a:r>
+            <a:endParaRPr lang="en-US" dirty="0">
+              <a:sym typeface="Wingdings" panose="05000000000000000000" pitchFamily="2" charset="2"/>
+            </a:endParaRPr>
+          </a:p>
+        </p:txBody>
+      </p:sp>
+    </p:spTree>
+    <p:extLst>
+      <p:ext uri="{BB962C8B-B14F-4D97-AF65-F5344CB8AC3E}">
+        <p14:creationId xmlns:p14="http://schemas.microsoft.com/office/powerpoint/2010/main" val="119419780"/>
+      </p:ext>
+    </p:extLst>
+  </p:cSld>
+  <p:clrMapOvr>
+    <a:masterClrMapping/>
+  </p:clrMapOvr>
+</p:sld>
+</file>
+
+<file path=ppt/slides/slide8.xml><?xml version="1.0" encoding="utf-8"?>
+<p:sld xmlns:a="http://schemas.openxmlformats.org/drawingml/2006/main" xmlns:r="http://schemas.openxmlformats.org/officeDocument/2006/relationships" xmlns:p="http://schemas.openxmlformats.org/presentationml/2006/main">
+  <p:cSld>
+    <p:spTree>
+      <p:nvGrpSpPr>
+        <p:cNvPr id="1" name=""/>
+        <p:cNvGrpSpPr/>
+        <p:nvPr/>
+      </p:nvGrpSpPr>
+      <p:grpSpPr>
+        <a:xfrm>
+          <a:off x="0" y="0"/>
+          <a:ext cx="0" cy="0"/>
+          <a:chOff x="0" y="0"/>
+          <a:chExt cx="0" cy="0"/>
+        </a:xfrm>
+      </p:grpSpPr>
+      <p:sp>
+        <p:nvSpPr>
+          <p:cNvPr id="2" name="Title 1">
+            <a:extLst>
+              <a:ext uri="{FF2B5EF4-FFF2-40B4-BE49-F238E27FC236}">
+                <a16:creationId xmlns:a16="http://schemas.microsoft.com/office/drawing/2014/main" id="{CFFBD6DA-8438-DEEE-713D-05684037D5CB}"/>
+              </a:ext>
+            </a:extLst>
+          </p:cNvPr>
+          <p:cNvSpPr>
+            <a:spLocks noGrp="1"/>
+          </p:cNvSpPr>
+          <p:nvPr>
+            <p:ph type="title"/>
+          </p:nvPr>
+        </p:nvSpPr>
+        <p:spPr/>
+        <p:txBody>
+          <a:bodyPr/>
+          <a:lstStyle/>
+          <a:p>
+            <a:r>
+              <a:rPr lang="en-US" dirty="0"/>
+              <a:t>JQPL</a:t>
+            </a:r>
+          </a:p>
+        </p:txBody>
+      </p:sp>
+      <p:sp>
+        <p:nvSpPr>
+          <p:cNvPr id="3" name="Content Placeholder 2">
+            <a:extLst>
+              <a:ext uri="{FF2B5EF4-FFF2-40B4-BE49-F238E27FC236}">
+                <a16:creationId xmlns:a16="http://schemas.microsoft.com/office/drawing/2014/main" id="{97FCE9EA-5AF7-3060-E641-8BBD651AA4E5}"/>
+              </a:ext>
+            </a:extLst>
+          </p:cNvPr>
+          <p:cNvSpPr>
+            <a:spLocks noGrp="1"/>
+          </p:cNvSpPr>
+          <p:nvPr>
+            <p:ph idx="1"/>
+          </p:nvPr>
+        </p:nvSpPr>
+        <p:spPr>
+          <a:xfrm>
+            <a:off x="474721" y="1967553"/>
+            <a:ext cx="11029615" cy="3678303"/>
+          </a:xfrm>
+        </p:spPr>
+        <p:txBody>
+          <a:bodyPr/>
+          <a:lstStyle/>
+          <a:p>
+            <a:r>
+              <a:rPr lang="en-US" dirty="0"/>
+              <a:t>In SQL you may write:</a:t>
+            </a:r>
+          </a:p>
+          <a:p>
+            <a:endParaRPr lang="en-US" dirty="0"/>
+          </a:p>
+          <a:p>
+            <a:endParaRPr lang="en-US" dirty="0"/>
+          </a:p>
+          <a:p>
+            <a:endParaRPr lang="en-US" dirty="0"/>
+          </a:p>
+          <a:p>
+            <a:r>
+              <a:rPr lang="en-US" dirty="0"/>
+              <a:t>In JPQL you may write:</a:t>
+            </a:r>
+          </a:p>
+        </p:txBody>
+      </p:sp>
+      <p:sp>
+        <p:nvSpPr>
+          <p:cNvPr id="5" name="TextBox 4">
+            <a:extLst>
+              <a:ext uri="{FF2B5EF4-FFF2-40B4-BE49-F238E27FC236}">
+                <a16:creationId xmlns:a16="http://schemas.microsoft.com/office/drawing/2014/main" id="{D5D44907-75B4-15C1-A760-D181236EFB25}"/>
+              </a:ext>
+            </a:extLst>
+          </p:cNvPr>
+          <p:cNvSpPr txBox="1"/>
+          <p:nvPr/>
+        </p:nvSpPr>
+        <p:spPr>
+          <a:xfrm>
+            <a:off x="1144566" y="3280486"/>
+            <a:ext cx="6097044" cy="923330"/>
+          </a:xfrm>
+          <a:prstGeom prst="rect">
+            <a:avLst/>
+          </a:prstGeom>
+          <a:noFill/>
+        </p:spPr>
+        <p:txBody>
+          <a:bodyPr wrap="square">
+            <a:spAutoFit/>
+          </a:bodyPr>
+          <a:lstStyle/>
+          <a:p>
+            <a:r>
+              <a:rPr lang="en-US" dirty="0"/>
+              <a:t>SELECT *</a:t>
+            </a:r>
+          </a:p>
+          <a:p>
+            <a:r>
+              <a:rPr lang="en-US" dirty="0"/>
+              <a:t>FROM students</a:t>
+            </a:r>
+          </a:p>
+          <a:p>
+            <a:r>
+              <a:rPr lang="en-US" dirty="0"/>
+              <a:t>ORDER BY id;</a:t>
+            </a:r>
+          </a:p>
+        </p:txBody>
+      </p:sp>
+      <p:sp>
+        <p:nvSpPr>
+          <p:cNvPr id="7" name="TextBox 6">
+            <a:extLst>
+              <a:ext uri="{FF2B5EF4-FFF2-40B4-BE49-F238E27FC236}">
+                <a16:creationId xmlns:a16="http://schemas.microsoft.com/office/drawing/2014/main" id="{BA6259CB-D72D-2B51-4143-5A4681E7F3BC}"/>
+              </a:ext>
+            </a:extLst>
+          </p:cNvPr>
+          <p:cNvSpPr txBox="1"/>
+          <p:nvPr/>
+        </p:nvSpPr>
+        <p:spPr>
+          <a:xfrm>
+            <a:off x="1144566" y="4858764"/>
+            <a:ext cx="6097044" cy="923330"/>
+          </a:xfrm>
+          <a:prstGeom prst="rect">
+            <a:avLst/>
+          </a:prstGeom>
+          <a:noFill/>
+        </p:spPr>
+        <p:txBody>
+          <a:bodyPr wrap="square">
+            <a:spAutoFit/>
+          </a:bodyPr>
+          <a:lstStyle/>
+          <a:p>
+            <a:r>
+              <a:rPr lang="en-US" dirty="0"/>
+              <a:t>SELECT student</a:t>
+            </a:r>
+          </a:p>
+          <a:p>
+            <a:r>
+              <a:rPr lang="en-US" dirty="0"/>
+              <a:t>FROM Student </a:t>
+            </a:r>
+            <a:r>
+              <a:rPr lang="en-US" dirty="0" err="1"/>
+              <a:t>student</a:t>
+            </a:r>
+            <a:endParaRPr lang="en-US" dirty="0"/>
+          </a:p>
+          <a:p>
+            <a:r>
+              <a:rPr lang="en-US" dirty="0"/>
+              <a:t>ORDER BY student.id</a:t>
+            </a:r>
+          </a:p>
+        </p:txBody>
+      </p:sp>
+      <p:sp>
+        <p:nvSpPr>
+          <p:cNvPr id="9" name="TextBox 8">
+            <a:extLst>
+              <a:ext uri="{FF2B5EF4-FFF2-40B4-BE49-F238E27FC236}">
+                <a16:creationId xmlns:a16="http://schemas.microsoft.com/office/drawing/2014/main" id="{E2AFC972-57DD-770B-89BF-DC0404323E02}"/>
+              </a:ext>
+            </a:extLst>
+          </p:cNvPr>
+          <p:cNvSpPr txBox="1"/>
+          <p:nvPr/>
+        </p:nvSpPr>
+        <p:spPr>
+          <a:xfrm>
+            <a:off x="6096000" y="2998776"/>
+            <a:ext cx="4817824" cy="2585323"/>
+          </a:xfrm>
+          <a:prstGeom prst="rect">
+            <a:avLst/>
+          </a:prstGeom>
+          <a:noFill/>
+        </p:spPr>
+        <p:txBody>
+          <a:bodyPr wrap="square">
+            <a:spAutoFit/>
+          </a:bodyPr>
+          <a:lstStyle/>
+          <a:p>
+            <a:r>
+              <a:rPr lang="en-US" dirty="0"/>
+              <a:t>Because we are querying against our entity!</a:t>
+            </a:r>
+          </a:p>
+          <a:p>
+            <a:endParaRPr lang="en-US" dirty="0"/>
+          </a:p>
+          <a:p>
+            <a:r>
+              <a:rPr lang="en-US" dirty="0"/>
+              <a:t>@Entity</a:t>
+            </a:r>
+          </a:p>
+          <a:p>
+            <a:r>
+              <a:rPr lang="en-US" dirty="0"/>
+              <a:t>public class Student {</a:t>
+            </a:r>
+          </a:p>
+          <a:p>
+            <a:r>
+              <a:rPr lang="en-US" dirty="0"/>
+              <a:t>    private int id;</a:t>
+            </a:r>
+          </a:p>
+          <a:p>
+            <a:r>
+              <a:rPr lang="en-US" dirty="0"/>
+              <a:t>    private String </a:t>
+            </a:r>
+            <a:r>
+              <a:rPr lang="en-US" dirty="0" err="1"/>
+              <a:t>firstName</a:t>
+            </a:r>
+            <a:r>
+              <a:rPr lang="en-US" dirty="0"/>
+              <a:t>;</a:t>
+            </a:r>
+          </a:p>
+          <a:p>
+            <a:r>
+              <a:rPr lang="en-US" dirty="0"/>
+              <a:t>    private String </a:t>
+            </a:r>
+            <a:r>
+              <a:rPr lang="en-US" dirty="0" err="1"/>
+              <a:t>lastName</a:t>
+            </a:r>
+            <a:r>
+              <a:rPr lang="en-US" dirty="0"/>
+              <a:t>;</a:t>
+            </a:r>
+          </a:p>
+          <a:p>
+            <a:r>
+              <a:rPr lang="en-US" dirty="0"/>
+              <a:t>    private String email;</a:t>
+            </a:r>
+          </a:p>
+          <a:p>
+            <a:r>
+              <a:rPr lang="en-US" dirty="0"/>
+              <a:t>}</a:t>
+            </a:r>
+          </a:p>
+        </p:txBody>
+      </p:sp>
+      <p:sp>
+        <p:nvSpPr>
+          <p:cNvPr id="10" name="TextBox 9">
+            <a:extLst>
+              <a:ext uri="{FF2B5EF4-FFF2-40B4-BE49-F238E27FC236}">
+                <a16:creationId xmlns:a16="http://schemas.microsoft.com/office/drawing/2014/main" id="{F2E60F99-8A55-89C3-00F9-C8298C4F6C28}"/>
+              </a:ext>
+            </a:extLst>
+          </p:cNvPr>
+          <p:cNvSpPr txBox="1"/>
+          <p:nvPr/>
+        </p:nvSpPr>
+        <p:spPr>
+          <a:xfrm>
+            <a:off x="4343083" y="1974496"/>
+            <a:ext cx="3292889" cy="369332"/>
+          </a:xfrm>
+          <a:prstGeom prst="rect">
+            <a:avLst/>
+          </a:prstGeom>
+          <a:noFill/>
+        </p:spPr>
+        <p:txBody>
+          <a:bodyPr wrap="none" rtlCol="0">
+            <a:spAutoFit/>
+          </a:bodyPr>
+          <a:lstStyle/>
+          <a:p>
+            <a:r>
+              <a:rPr lang="en-US" dirty="0">
+                <a:solidFill>
+                  <a:schemeClr val="accent2"/>
+                </a:solidFill>
+              </a:rPr>
+              <a:t>HQL is very similar conceptually!</a:t>
+            </a:r>
+          </a:p>
+        </p:txBody>
+      </p:sp>
+    </p:spTree>
+    <p:extLst>
+      <p:ext uri="{BB962C8B-B14F-4D97-AF65-F5344CB8AC3E}">
+        <p14:creationId xmlns:p14="http://schemas.microsoft.com/office/powerpoint/2010/main" val="1398246589"/>
+      </p:ext>
+    </p:extLst>
+  </p:cSld>
+  <p:clrMapOvr>
+    <a:masterClrMapping/>
+  </p:clrMapOvr>
+</p:sld>
+</file>
+
+<file path=ppt/slides/slide9.xml><?xml version="1.0" encoding="utf-8"?>
+<p:sld xmlns:a="http://schemas.openxmlformats.org/drawingml/2006/main" xmlns:r="http://schemas.openxmlformats.org/officeDocument/2006/relationships" xmlns:p="http://schemas.openxmlformats.org/presentationml/2006/main">
+  <p:cSld>
+    <p:spTree>
+      <p:nvGrpSpPr>
+        <p:cNvPr id="1" name=""/>
+        <p:cNvGrpSpPr/>
+        <p:nvPr/>
+      </p:nvGrpSpPr>
+      <p:grpSpPr>
+        <a:xfrm>
+          <a:off x="0" y="0"/>
+          <a:ext cx="0" cy="0"/>
+          <a:chOff x="0" y="0"/>
+          <a:chExt cx="0" cy="0"/>
+        </a:xfrm>
+      </p:grpSpPr>
+      <p:sp>
+        <p:nvSpPr>
+          <p:cNvPr id="2" name="Title 1">
+            <a:extLst>
+              <a:ext uri="{FF2B5EF4-FFF2-40B4-BE49-F238E27FC236}">
+                <a16:creationId xmlns:a16="http://schemas.microsoft.com/office/drawing/2014/main" id="{AF0C7421-26D0-C64F-F603-15F692B983E1}"/>
+              </a:ext>
+            </a:extLst>
+          </p:cNvPr>
+          <p:cNvSpPr>
+            <a:spLocks noGrp="1"/>
+          </p:cNvSpPr>
+          <p:nvPr>
+            <p:ph type="title"/>
+          </p:nvPr>
+        </p:nvSpPr>
+        <p:spPr/>
+        <p:txBody>
+          <a:bodyPr/>
+          <a:lstStyle/>
+          <a:p>
+            <a:r>
+              <a:rPr lang="en-US" dirty="0"/>
+              <a:t>Stereotype annotations</a:t>
+            </a:r>
+          </a:p>
+        </p:txBody>
+      </p:sp>
+      <p:sp>
+        <p:nvSpPr>
+          <p:cNvPr id="3" name="Content Placeholder 2">
+            <a:extLst>
+              <a:ext uri="{FF2B5EF4-FFF2-40B4-BE49-F238E27FC236}">
+                <a16:creationId xmlns:a16="http://schemas.microsoft.com/office/drawing/2014/main" id="{F6F5AB61-17F7-093B-D3FC-5E6D4784FA35}"/>
+              </a:ext>
+            </a:extLst>
+          </p:cNvPr>
+          <p:cNvSpPr>
+            <a:spLocks noGrp="1"/>
+          </p:cNvSpPr>
+          <p:nvPr>
+            <p:ph idx="1"/>
+          </p:nvPr>
+        </p:nvSpPr>
+        <p:spPr>
+          <a:xfrm>
+            <a:off x="581192" y="2180496"/>
+            <a:ext cx="11029615" cy="4157674"/>
+          </a:xfrm>
+        </p:spPr>
+        <p:txBody>
+          <a:bodyPr>
+            <a:normAutofit fontScale="92500" lnSpcReduction="10000"/>
+          </a:bodyPr>
+          <a:lstStyle/>
+          <a:p>
+            <a:r>
+              <a:rPr lang="en-US" b="1" dirty="0"/>
+              <a:t>@Component</a:t>
+            </a:r>
+            <a:endParaRPr lang="en-US" dirty="0"/>
+          </a:p>
+          <a:p>
+            <a:pPr lvl="1"/>
+            <a:r>
+              <a:rPr lang="en-US" dirty="0"/>
+              <a:t>@Component is the main stereotype annotation. It is a class-level annotation. @Component is used across the application to mark the beans as Spring's managed components.</a:t>
+            </a:r>
+          </a:p>
+          <a:p>
+            <a:r>
+              <a:rPr lang="en-US" b="1" dirty="0"/>
+              <a:t>@Service</a:t>
+            </a:r>
+            <a:endParaRPr lang="en-US" dirty="0"/>
+          </a:p>
+          <a:p>
+            <a:pPr lvl="1"/>
+            <a:r>
+              <a:rPr lang="en-US" dirty="0"/>
+              <a:t>It is a specialization of @Component. The business logic of an application exists in the service layer, and the @Service annotation is used to indicate that a class belongs to the service layer.</a:t>
+            </a:r>
+          </a:p>
+          <a:p>
+            <a:r>
+              <a:rPr lang="en-US" b="1" dirty="0"/>
+              <a:t>@Repository</a:t>
+            </a:r>
+            <a:endParaRPr lang="en-US" dirty="0"/>
+          </a:p>
+          <a:p>
+            <a:pPr lvl="1"/>
+            <a:r>
+              <a:rPr lang="en-US" dirty="0"/>
+              <a:t>It is a specialization of @Component and is very similar to the DAO pattern. DAO classes provide CRUD operations for database tables.</a:t>
+            </a:r>
+          </a:p>
+          <a:p>
+            <a:r>
+              <a:rPr lang="en-US" b="1" dirty="0"/>
+              <a:t>@RestController</a:t>
+            </a:r>
+            <a:endParaRPr lang="en-US" dirty="0"/>
+          </a:p>
+          <a:p>
+            <a:pPr lvl="1"/>
+            <a:r>
+              <a:rPr lang="en-US" dirty="0"/>
+              <a:t>It is a specialization of @Component. The @RestController annotation (which inherits @Controller) indicates that a particular class is a web service controller that returns data. It is mostly used with Spring MVC applications and is used in combination with @RequestMapping annotation. The dispatcher scans the class and detects methods with HTTP annotations:</a:t>
+            </a:r>
+          </a:p>
+          <a:p>
+            <a:pPr lvl="2"/>
+            <a:r>
+              <a:rPr lang="en-US" dirty="0"/>
+              <a:t>@GetMapping, @PostMapping, @PutMapping, &amp; @DeleteMapping</a:t>
+            </a:r>
+          </a:p>
+          <a:p>
+            <a:endParaRPr lang="en-US" dirty="0"/>
+          </a:p>
+        </p:txBody>
+      </p:sp>
+    </p:spTree>
+    <p:extLst>
+      <p:ext uri="{BB962C8B-B14F-4D97-AF65-F5344CB8AC3E}">
+        <p14:creationId xmlns:p14="http://schemas.microsoft.com/office/powerpoint/2010/main" val="1327387143"/>
       </p:ext>
     </p:extLst>
   </p:cSld>

--- a/Week_6/02_Hibernate_JPA_&_REST.pptx
+++ b/Week_6/02_Hibernate_JPA_&_REST.pptx
@@ -14,8 +14,12 @@
     <p:sldId id="321" r:id="rId8"/>
     <p:sldId id="319" r:id="rId9"/>
     <p:sldId id="320" r:id="rId10"/>
-    <p:sldId id="322" r:id="rId11"/>
-    <p:sldId id="313" r:id="rId12"/>
+    <p:sldId id="323" r:id="rId11"/>
+    <p:sldId id="324" r:id="rId12"/>
+    <p:sldId id="325" r:id="rId13"/>
+    <p:sldId id="326" r:id="rId14"/>
+    <p:sldId id="322" r:id="rId15"/>
+    <p:sldId id="313" r:id="rId16"/>
   </p:sldIdLst>
   <p:sldSz cx="12192000" cy="6858000"/>
   <p:notesSz cx="6858000" cy="9144000"/>
@@ -382,7 +386,7 @@
             <a:fld id="{B61BEF0D-F0BB-DE4B-95CE-6DB70DBA9567}" type="datetimeFigureOut">
               <a:rPr lang="en-US" dirty="0"/>
               <a:pPr/>
-              <a:t>9/29/2026</a:t>
+              <a:t>9/30/2026</a:t>
             </a:fld>
             <a:endParaRPr lang="en-US" dirty="0"/>
           </a:p>
@@ -644,7 +648,7 @@
             <a:fld id="{B61BEF0D-F0BB-DE4B-95CE-6DB70DBA9567}" type="datetimeFigureOut">
               <a:rPr lang="en-US" dirty="0"/>
               <a:pPr/>
-              <a:t>9/29/2026</a:t>
+              <a:t>9/30/2026</a:t>
             </a:fld>
             <a:endParaRPr lang="en-US" dirty="0"/>
           </a:p>
@@ -879,7 +883,7 @@
             <a:fld id="{B61BEF0D-F0BB-DE4B-95CE-6DB70DBA9567}" type="datetimeFigureOut">
               <a:rPr lang="en-US" dirty="0"/>
               <a:pPr/>
-              <a:t>9/29/2026</a:t>
+              <a:t>9/30/2026</a:t>
             </a:fld>
             <a:endParaRPr lang="en-US" dirty="0"/>
           </a:p>
@@ -1126,7 +1130,7 @@
             <a:fld id="{B61BEF0D-F0BB-DE4B-95CE-6DB70DBA9567}" type="datetimeFigureOut">
               <a:rPr lang="en-US" dirty="0"/>
               <a:pPr/>
-              <a:t>9/29/2026</a:t>
+              <a:t>9/30/2026</a:t>
             </a:fld>
             <a:endParaRPr lang="en-US" dirty="0"/>
           </a:p>
@@ -1434,7 +1438,7 @@
             <a:fld id="{B61BEF0D-F0BB-DE4B-95CE-6DB70DBA9567}" type="datetimeFigureOut">
               <a:rPr lang="en-US" dirty="0"/>
               <a:pPr/>
-              <a:t>9/29/2026</a:t>
+              <a:t>9/30/2026</a:t>
             </a:fld>
             <a:endParaRPr lang="en-US" dirty="0"/>
           </a:p>
@@ -1735,7 +1739,7 @@
             <a:fld id="{B61BEF0D-F0BB-DE4B-95CE-6DB70DBA9567}" type="datetimeFigureOut">
               <a:rPr lang="en-US" dirty="0"/>
               <a:pPr/>
-              <a:t>9/29/2026</a:t>
+              <a:t>9/30/2026</a:t>
             </a:fld>
             <a:endParaRPr lang="en-US" dirty="0"/>
           </a:p>
@@ -2156,7 +2160,7 @@
             <a:fld id="{B61BEF0D-F0BB-DE4B-95CE-6DB70DBA9567}" type="datetimeFigureOut">
               <a:rPr lang="en-US" dirty="0"/>
               <a:pPr/>
-              <a:t>9/29/2026</a:t>
+              <a:t>9/30/2026</a:t>
             </a:fld>
             <a:endParaRPr lang="en-US" dirty="0"/>
           </a:p>
@@ -2319,7 +2323,7 @@
             <a:fld id="{B61BEF0D-F0BB-DE4B-95CE-6DB70DBA9567}" type="datetimeFigureOut">
               <a:rPr lang="en-US" dirty="0"/>
               <a:pPr/>
-              <a:t>9/29/2026</a:t>
+              <a:t>9/30/2026</a:t>
             </a:fld>
             <a:endParaRPr lang="en-US" dirty="0"/>
           </a:p>
@@ -2416,7 +2420,7 @@
             <a:fld id="{B61BEF0D-F0BB-DE4B-95CE-6DB70DBA9567}" type="datetimeFigureOut">
               <a:rPr lang="en-US" dirty="0"/>
               <a:pPr/>
-              <a:t>9/29/2026</a:t>
+              <a:t>9/30/2026</a:t>
             </a:fld>
             <a:endParaRPr lang="en-US" dirty="0"/>
           </a:p>
@@ -2794,7 +2798,7 @@
             <a:fld id="{B61BEF0D-F0BB-DE4B-95CE-6DB70DBA9567}" type="datetimeFigureOut">
               <a:rPr lang="en-US" dirty="0"/>
               <a:pPr/>
-              <a:t>9/29/2026</a:t>
+              <a:t>9/30/2026</a:t>
             </a:fld>
             <a:endParaRPr lang="en-US" dirty="0"/>
           </a:p>
@@ -3080,7 +3084,7 @@
             <a:fld id="{B61BEF0D-F0BB-DE4B-95CE-6DB70DBA9567}" type="datetimeFigureOut">
               <a:rPr lang="en-US" dirty="0"/>
               <a:pPr/>
-              <a:t>9/29/2026</a:t>
+              <a:t>9/30/2026</a:t>
             </a:fld>
             <a:endParaRPr lang="en-US" dirty="0"/>
           </a:p>
@@ -3319,7 +3323,7 @@
             <a:fld id="{B61BEF0D-F0BB-DE4B-95CE-6DB70DBA9567}" type="datetimeFigureOut">
               <a:rPr lang="en-US" dirty="0"/>
               <a:pPr/>
-              <a:t>9/29/2026</a:t>
+              <a:t>9/30/2026</a:t>
             </a:fld>
             <a:endParaRPr lang="en-US" dirty="0"/>
           </a:p>
@@ -3999,6 +4003,795 @@
           <p:cNvPr id="2" name="Title 1">
             <a:extLst>
               <a:ext uri="{FF2B5EF4-FFF2-40B4-BE49-F238E27FC236}">
+                <a16:creationId xmlns:a16="http://schemas.microsoft.com/office/drawing/2014/main" id="{B8CD9D32-6DB3-28A5-5C74-390DEEA18B2D}"/>
+              </a:ext>
+            </a:extLst>
+          </p:cNvPr>
+          <p:cNvSpPr>
+            <a:spLocks noGrp="1"/>
+          </p:cNvSpPr>
+          <p:nvPr>
+            <p:ph type="title"/>
+          </p:nvPr>
+        </p:nvSpPr>
+        <p:spPr/>
+        <p:txBody>
+          <a:bodyPr/>
+          <a:lstStyle/>
+          <a:p>
+            <a:r>
+              <a:rPr lang="en-US" dirty="0"/>
+              <a:t>Jackson</a:t>
+            </a:r>
+          </a:p>
+        </p:txBody>
+      </p:sp>
+      <p:sp>
+        <p:nvSpPr>
+          <p:cNvPr id="3" name="Content Placeholder 2">
+            <a:extLst>
+              <a:ext uri="{FF2B5EF4-FFF2-40B4-BE49-F238E27FC236}">
+                <a16:creationId xmlns:a16="http://schemas.microsoft.com/office/drawing/2014/main" id="{89380D51-8FAC-7542-6BF1-B037460A8252}"/>
+              </a:ext>
+            </a:extLst>
+          </p:cNvPr>
+          <p:cNvSpPr>
+            <a:spLocks noGrp="1"/>
+          </p:cNvSpPr>
+          <p:nvPr>
+            <p:ph idx="1"/>
+          </p:nvPr>
+        </p:nvSpPr>
+        <p:spPr/>
+        <p:txBody>
+          <a:bodyPr>
+            <a:normAutofit fontScale="92500" lnSpcReduction="10000"/>
+          </a:bodyPr>
+          <a:lstStyle/>
+          <a:p>
+            <a:r>
+              <a:rPr lang="en-US" dirty="0"/>
+              <a:t>Java Library for converting between Java objects and JSON</a:t>
+            </a:r>
+          </a:p>
+          <a:p>
+            <a:r>
+              <a:rPr lang="en-US" dirty="0"/>
+              <a:t>Built right into Spring</a:t>
+            </a:r>
+          </a:p>
+          <a:p>
+            <a:endParaRPr lang="en-US" dirty="0"/>
+          </a:p>
+          <a:p>
+            <a:r>
+              <a:rPr lang="en-US" dirty="0"/>
+              <a:t>Java Object  ──────→  JSON</a:t>
+            </a:r>
+          </a:p>
+          <a:p>
+            <a:r>
+              <a:rPr lang="en-US" dirty="0"/>
+              <a:t>        serialization</a:t>
+            </a:r>
+          </a:p>
+          <a:p>
+            <a:r>
+              <a:rPr lang="en-US" dirty="0"/>
+              <a:t>JSON  ──────→  Java Object</a:t>
+            </a:r>
+          </a:p>
+          <a:p>
+            <a:r>
+              <a:rPr lang="en-US" dirty="0"/>
+              <a:t>        deserialization</a:t>
+            </a:r>
+          </a:p>
+          <a:p>
+            <a:r>
+              <a:rPr lang="en-US" dirty="0"/>
+              <a:t>It all happens under the hood for us! </a:t>
+            </a:r>
+          </a:p>
+          <a:p>
+            <a:r>
+              <a:rPr lang="en-US" dirty="0">
+                <a:sym typeface="Wingdings" panose="05000000000000000000" pitchFamily="2" charset="2"/>
+              </a:rPr>
+              <a:t>Request is made  we prepare a POJO (plain old java object)  Jackson coverts to JSON  client gets JSON</a:t>
+            </a:r>
+          </a:p>
+          <a:p>
+            <a:r>
+              <a:rPr lang="en-US" dirty="0"/>
+              <a:t>Request is made </a:t>
+            </a:r>
+            <a:r>
+              <a:rPr lang="en-US" dirty="0">
+                <a:sym typeface="Wingdings" panose="05000000000000000000" pitchFamily="2" charset="2"/>
+              </a:rPr>
+              <a:t> we receive JSON (e.g. record to be created)  Jackson converts to POJO  use POJO in app</a:t>
+            </a:r>
+            <a:endParaRPr lang="en-US" dirty="0"/>
+          </a:p>
+        </p:txBody>
+      </p:sp>
+    </p:spTree>
+    <p:extLst>
+      <p:ext uri="{BB962C8B-B14F-4D97-AF65-F5344CB8AC3E}">
+        <p14:creationId xmlns:p14="http://schemas.microsoft.com/office/powerpoint/2010/main" val="3041639908"/>
+      </p:ext>
+    </p:extLst>
+  </p:cSld>
+  <p:clrMapOvr>
+    <a:masterClrMapping/>
+  </p:clrMapOvr>
+</p:sld>
+</file>
+
+<file path=ppt/slides/slide11.xml><?xml version="1.0" encoding="utf-8"?>
+<p:sld xmlns:a="http://schemas.openxmlformats.org/drawingml/2006/main" xmlns:r="http://schemas.openxmlformats.org/officeDocument/2006/relationships" xmlns:p="http://schemas.openxmlformats.org/presentationml/2006/main">
+  <p:cSld>
+    <p:spTree>
+      <p:nvGrpSpPr>
+        <p:cNvPr id="1" name=""/>
+        <p:cNvGrpSpPr/>
+        <p:nvPr/>
+      </p:nvGrpSpPr>
+      <p:grpSpPr>
+        <a:xfrm>
+          <a:off x="0" y="0"/>
+          <a:ext cx="0" cy="0"/>
+          <a:chOff x="0" y="0"/>
+          <a:chExt cx="0" cy="0"/>
+        </a:xfrm>
+      </p:grpSpPr>
+      <p:sp>
+        <p:nvSpPr>
+          <p:cNvPr id="2" name="Title 1">
+            <a:extLst>
+              <a:ext uri="{FF2B5EF4-FFF2-40B4-BE49-F238E27FC236}">
+                <a16:creationId xmlns:a16="http://schemas.microsoft.com/office/drawing/2014/main" id="{B113CF08-5EB3-F45D-C2AE-5FB69B219887}"/>
+              </a:ext>
+            </a:extLst>
+          </p:cNvPr>
+          <p:cNvSpPr>
+            <a:spLocks noGrp="1"/>
+          </p:cNvSpPr>
+          <p:nvPr>
+            <p:ph type="title"/>
+          </p:nvPr>
+        </p:nvSpPr>
+        <p:spPr/>
+        <p:txBody>
+          <a:bodyPr/>
+          <a:lstStyle/>
+          <a:p>
+            <a:r>
+              <a:rPr lang="en-US" dirty="0"/>
+              <a:t>Request Validation &amp; schema enforcement</a:t>
+            </a:r>
+          </a:p>
+        </p:txBody>
+      </p:sp>
+      <p:sp>
+        <p:nvSpPr>
+          <p:cNvPr id="3" name="Content Placeholder 2">
+            <a:extLst>
+              <a:ext uri="{FF2B5EF4-FFF2-40B4-BE49-F238E27FC236}">
+                <a16:creationId xmlns:a16="http://schemas.microsoft.com/office/drawing/2014/main" id="{7BC70ACD-75CE-8193-CF54-E1B5A75DCF6F}"/>
+              </a:ext>
+            </a:extLst>
+          </p:cNvPr>
+          <p:cNvSpPr>
+            <a:spLocks noGrp="1"/>
+          </p:cNvSpPr>
+          <p:nvPr>
+            <p:ph idx="1"/>
+          </p:nvPr>
+        </p:nvSpPr>
+        <p:spPr/>
+        <p:txBody>
+          <a:bodyPr>
+            <a:normAutofit fontScale="92500" lnSpcReduction="10000"/>
+          </a:bodyPr>
+          <a:lstStyle/>
+          <a:p>
+            <a:r>
+              <a:rPr lang="en-US" dirty="0"/>
+              <a:t>@NotNull - not null</a:t>
+            </a:r>
+          </a:p>
+          <a:p>
+            <a:r>
+              <a:rPr lang="en-US" dirty="0"/>
+              <a:t>@NotEmpty - not null or empty such as ""</a:t>
+            </a:r>
+          </a:p>
+          <a:p>
+            <a:r>
+              <a:rPr lang="en-US" dirty="0"/>
+              <a:t>@NotBlank - not null, empty, or whitespace</a:t>
+            </a:r>
+          </a:p>
+          <a:p>
+            <a:r>
+              <a:rPr lang="en-US" dirty="0"/>
+              <a:t>@Size</a:t>
+            </a:r>
+          </a:p>
+          <a:p>
+            <a:r>
+              <a:rPr lang="en-US" dirty="0"/>
+              <a:t>@Min</a:t>
+            </a:r>
+          </a:p>
+          <a:p>
+            <a:r>
+              <a:rPr lang="en-US" dirty="0"/>
+              <a:t>@Max</a:t>
+            </a:r>
+          </a:p>
+          <a:p>
+            <a:r>
+              <a:rPr lang="en-US" dirty="0"/>
+              <a:t>@Positive</a:t>
+            </a:r>
+          </a:p>
+          <a:p>
+            <a:r>
+              <a:rPr lang="en-US" dirty="0"/>
+              <a:t>@PositiveOrZero</a:t>
+            </a:r>
+          </a:p>
+          <a:p>
+            <a:r>
+              <a:rPr lang="en-US" dirty="0"/>
+              <a:t>@Email</a:t>
+            </a:r>
+          </a:p>
+          <a:p>
+            <a:r>
+              <a:rPr lang="en-US" dirty="0"/>
+              <a:t>@Pattern</a:t>
+            </a:r>
+          </a:p>
+          <a:p>
+            <a:endParaRPr lang="en-US" dirty="0"/>
+          </a:p>
+        </p:txBody>
+      </p:sp>
+      <p:pic>
+        <p:nvPicPr>
+          <p:cNvPr id="5" name="Picture 4">
+            <a:extLst>
+              <a:ext uri="{FF2B5EF4-FFF2-40B4-BE49-F238E27FC236}">
+                <a16:creationId xmlns:a16="http://schemas.microsoft.com/office/drawing/2014/main" id="{12DDB36B-C7AC-7CC0-35BE-6E21CF0C4817}"/>
+              </a:ext>
+            </a:extLst>
+          </p:cNvPr>
+          <p:cNvPicPr>
+            <a:picLocks noChangeAspect="1"/>
+          </p:cNvPicPr>
+          <p:nvPr/>
+        </p:nvPicPr>
+        <p:blipFill>
+          <a:blip r:embed="rId2"/>
+          <a:stretch>
+            <a:fillRect/>
+          </a:stretch>
+        </p:blipFill>
+        <p:spPr>
+          <a:xfrm>
+            <a:off x="5851789" y="3221713"/>
+            <a:ext cx="5225633" cy="964109"/>
+          </a:xfrm>
+          <a:prstGeom prst="rect">
+            <a:avLst/>
+          </a:prstGeom>
+        </p:spPr>
+      </p:pic>
+      <p:pic>
+        <p:nvPicPr>
+          <p:cNvPr id="7" name="Picture 6">
+            <a:extLst>
+              <a:ext uri="{FF2B5EF4-FFF2-40B4-BE49-F238E27FC236}">
+                <a16:creationId xmlns:a16="http://schemas.microsoft.com/office/drawing/2014/main" id="{4F8BB4D3-2CA9-AC94-BA50-20F48602F7D3}"/>
+              </a:ext>
+            </a:extLst>
+          </p:cNvPr>
+          <p:cNvPicPr>
+            <a:picLocks noChangeAspect="1"/>
+          </p:cNvPicPr>
+          <p:nvPr/>
+        </p:nvPicPr>
+        <p:blipFill>
+          <a:blip r:embed="rId3"/>
+          <a:stretch>
+            <a:fillRect/>
+          </a:stretch>
+        </p:blipFill>
+        <p:spPr>
+          <a:xfrm>
+            <a:off x="2327563" y="5549330"/>
+            <a:ext cx="8749859" cy="606514"/>
+          </a:xfrm>
+          <a:prstGeom prst="rect">
+            <a:avLst/>
+          </a:prstGeom>
+        </p:spPr>
+      </p:pic>
+      <p:sp>
+        <p:nvSpPr>
+          <p:cNvPr id="8" name="TextBox 7">
+            <a:extLst>
+              <a:ext uri="{FF2B5EF4-FFF2-40B4-BE49-F238E27FC236}">
+                <a16:creationId xmlns:a16="http://schemas.microsoft.com/office/drawing/2014/main" id="{F01206C5-D9C8-B35D-7D13-60DF8129B6E6}"/>
+              </a:ext>
+            </a:extLst>
+          </p:cNvPr>
+          <p:cNvSpPr txBox="1"/>
+          <p:nvPr/>
+        </p:nvSpPr>
+        <p:spPr>
+          <a:xfrm>
+            <a:off x="3645724" y="4947728"/>
+            <a:ext cx="7491218" cy="369332"/>
+          </a:xfrm>
+          <a:prstGeom prst="rect">
+            <a:avLst/>
+          </a:prstGeom>
+          <a:noFill/>
+        </p:spPr>
+        <p:txBody>
+          <a:bodyPr wrap="none" rtlCol="0">
+            <a:spAutoFit/>
+          </a:bodyPr>
+          <a:lstStyle/>
+          <a:p>
+            <a:r>
+              <a:rPr lang="en-US" dirty="0"/>
+              <a:t>@Valid – ensure our endpoints enforce our validations on the application-level</a:t>
+            </a:r>
+          </a:p>
+        </p:txBody>
+      </p:sp>
+      <p:sp>
+        <p:nvSpPr>
+          <p:cNvPr id="9" name="TextBox 8">
+            <a:extLst>
+              <a:ext uri="{FF2B5EF4-FFF2-40B4-BE49-F238E27FC236}">
+                <a16:creationId xmlns:a16="http://schemas.microsoft.com/office/drawing/2014/main" id="{D20D327B-C978-F8B7-3164-0E45EA362820}"/>
+              </a:ext>
+            </a:extLst>
+          </p:cNvPr>
+          <p:cNvSpPr txBox="1"/>
+          <p:nvPr/>
+        </p:nvSpPr>
+        <p:spPr>
+          <a:xfrm>
+            <a:off x="5851789" y="2434007"/>
+            <a:ext cx="6093206" cy="646331"/>
+          </a:xfrm>
+          <a:prstGeom prst="rect">
+            <a:avLst/>
+          </a:prstGeom>
+          <a:noFill/>
+        </p:spPr>
+        <p:txBody>
+          <a:bodyPr wrap="none" rtlCol="0">
+            <a:spAutoFit/>
+          </a:bodyPr>
+          <a:lstStyle/>
+          <a:p>
+            <a:r>
+              <a:rPr lang="en-US" dirty="0"/>
+              <a:t>Nullable – enforces schema/</a:t>
+            </a:r>
+            <a:r>
+              <a:rPr lang="en-US" dirty="0" err="1"/>
+              <a:t>db</a:t>
+            </a:r>
+            <a:r>
+              <a:rPr lang="en-US" dirty="0"/>
+              <a:t> level validation</a:t>
+            </a:r>
+          </a:p>
+          <a:p>
+            <a:r>
+              <a:rPr lang="en-US" dirty="0"/>
+              <a:t>Often, we use nullable + annotations for maximum protection </a:t>
+            </a:r>
+          </a:p>
+        </p:txBody>
+      </p:sp>
+    </p:spTree>
+    <p:extLst>
+      <p:ext uri="{BB962C8B-B14F-4D97-AF65-F5344CB8AC3E}">
+        <p14:creationId xmlns:p14="http://schemas.microsoft.com/office/powerpoint/2010/main" val="1204682131"/>
+      </p:ext>
+    </p:extLst>
+  </p:cSld>
+  <p:clrMapOvr>
+    <a:masterClrMapping/>
+  </p:clrMapOvr>
+</p:sld>
+</file>
+
+<file path=ppt/slides/slide12.xml><?xml version="1.0" encoding="utf-8"?>
+<p:sld xmlns:a="http://schemas.openxmlformats.org/drawingml/2006/main" xmlns:r="http://schemas.openxmlformats.org/officeDocument/2006/relationships" xmlns:p="http://schemas.openxmlformats.org/presentationml/2006/main">
+  <p:cSld>
+    <p:spTree>
+      <p:nvGrpSpPr>
+        <p:cNvPr id="1" name=""/>
+        <p:cNvGrpSpPr/>
+        <p:nvPr/>
+      </p:nvGrpSpPr>
+      <p:grpSpPr>
+        <a:xfrm>
+          <a:off x="0" y="0"/>
+          <a:ext cx="0" cy="0"/>
+          <a:chOff x="0" y="0"/>
+          <a:chExt cx="0" cy="0"/>
+        </a:xfrm>
+      </p:grpSpPr>
+      <p:sp>
+        <p:nvSpPr>
+          <p:cNvPr id="2" name="Title 1">
+            <a:extLst>
+              <a:ext uri="{FF2B5EF4-FFF2-40B4-BE49-F238E27FC236}">
+                <a16:creationId xmlns:a16="http://schemas.microsoft.com/office/drawing/2014/main" id="{43F41AE0-F3C4-2C1A-EE1F-AB4C60B24629}"/>
+              </a:ext>
+            </a:extLst>
+          </p:cNvPr>
+          <p:cNvSpPr>
+            <a:spLocks noGrp="1"/>
+          </p:cNvSpPr>
+          <p:nvPr>
+            <p:ph type="title"/>
+          </p:nvPr>
+        </p:nvSpPr>
+        <p:spPr/>
+        <p:txBody>
+          <a:bodyPr/>
+          <a:lstStyle/>
+          <a:p>
+            <a:r>
+              <a:rPr lang="en-US" dirty="0"/>
+              <a:t>Exception handling</a:t>
+            </a:r>
+          </a:p>
+        </p:txBody>
+      </p:sp>
+      <p:pic>
+        <p:nvPicPr>
+          <p:cNvPr id="5" name="Content Placeholder 4">
+            <a:extLst>
+              <a:ext uri="{FF2B5EF4-FFF2-40B4-BE49-F238E27FC236}">
+                <a16:creationId xmlns:a16="http://schemas.microsoft.com/office/drawing/2014/main" id="{9FC717B8-5059-472F-B0F6-B3CFE4F05CF5}"/>
+              </a:ext>
+            </a:extLst>
+          </p:cNvPr>
+          <p:cNvPicPr>
+            <a:picLocks noGrp="1" noChangeAspect="1"/>
+          </p:cNvPicPr>
+          <p:nvPr>
+            <p:ph idx="1"/>
+          </p:nvPr>
+        </p:nvPicPr>
+        <p:blipFill>
+          <a:blip r:embed="rId2"/>
+          <a:stretch>
+            <a:fillRect/>
+          </a:stretch>
+        </p:blipFill>
+        <p:spPr>
+          <a:xfrm>
+            <a:off x="967475" y="3337292"/>
+            <a:ext cx="4298798" cy="2818552"/>
+          </a:xfrm>
+          <a:prstGeom prst="rect">
+            <a:avLst/>
+          </a:prstGeom>
+        </p:spPr>
+      </p:pic>
+      <p:pic>
+        <p:nvPicPr>
+          <p:cNvPr id="7" name="Picture 6">
+            <a:extLst>
+              <a:ext uri="{FF2B5EF4-FFF2-40B4-BE49-F238E27FC236}">
+                <a16:creationId xmlns:a16="http://schemas.microsoft.com/office/drawing/2014/main" id="{893D38BD-6E3E-FABA-1271-B15AA8DBA64E}"/>
+              </a:ext>
+            </a:extLst>
+          </p:cNvPr>
+          <p:cNvPicPr>
+            <a:picLocks noChangeAspect="1"/>
+          </p:cNvPicPr>
+          <p:nvPr/>
+        </p:nvPicPr>
+        <p:blipFill>
+          <a:blip r:embed="rId3"/>
+          <a:stretch>
+            <a:fillRect/>
+          </a:stretch>
+        </p:blipFill>
+        <p:spPr>
+          <a:xfrm>
+            <a:off x="6096000" y="2854670"/>
+            <a:ext cx="4601501" cy="3783795"/>
+          </a:xfrm>
+          <a:prstGeom prst="rect">
+            <a:avLst/>
+          </a:prstGeom>
+        </p:spPr>
+      </p:pic>
+      <p:sp>
+        <p:nvSpPr>
+          <p:cNvPr id="8" name="TextBox 7">
+            <a:extLst>
+              <a:ext uri="{FF2B5EF4-FFF2-40B4-BE49-F238E27FC236}">
+                <a16:creationId xmlns:a16="http://schemas.microsoft.com/office/drawing/2014/main" id="{D9068152-8FB2-1638-BDC5-524C96C96A3F}"/>
+              </a:ext>
+            </a:extLst>
+          </p:cNvPr>
+          <p:cNvSpPr txBox="1"/>
+          <p:nvPr/>
+        </p:nvSpPr>
+        <p:spPr>
+          <a:xfrm>
+            <a:off x="1341913" y="2161309"/>
+            <a:ext cx="3788228" cy="923330"/>
+          </a:xfrm>
+          <a:prstGeom prst="rect">
+            <a:avLst/>
+          </a:prstGeom>
+          <a:noFill/>
+        </p:spPr>
+        <p:txBody>
+          <a:bodyPr wrap="square" rtlCol="0">
+            <a:spAutoFit/>
+          </a:bodyPr>
+          <a:lstStyle/>
+          <a:p>
+            <a:r>
+              <a:rPr lang="en-US" dirty="0"/>
+              <a:t>This defines our custom exception, so we have full control to describe the issue:</a:t>
+            </a:r>
+          </a:p>
+        </p:txBody>
+      </p:sp>
+      <p:sp>
+        <p:nvSpPr>
+          <p:cNvPr id="9" name="TextBox 8">
+            <a:extLst>
+              <a:ext uri="{FF2B5EF4-FFF2-40B4-BE49-F238E27FC236}">
+                <a16:creationId xmlns:a16="http://schemas.microsoft.com/office/drawing/2014/main" id="{C4FDF15D-A437-3643-58C8-AAF98437E33E}"/>
+              </a:ext>
+            </a:extLst>
+          </p:cNvPr>
+          <p:cNvSpPr txBox="1"/>
+          <p:nvPr/>
+        </p:nvSpPr>
+        <p:spPr>
+          <a:xfrm>
+            <a:off x="5605153" y="2137558"/>
+            <a:ext cx="6298584" cy="646331"/>
+          </a:xfrm>
+          <a:prstGeom prst="rect">
+            <a:avLst/>
+          </a:prstGeom>
+          <a:noFill/>
+        </p:spPr>
+        <p:txBody>
+          <a:bodyPr wrap="none" rtlCol="0">
+            <a:spAutoFit/>
+          </a:bodyPr>
+          <a:lstStyle/>
+          <a:p>
+            <a:r>
+              <a:rPr lang="en-US" dirty="0"/>
+              <a:t>This defines what our error output should look like</a:t>
+            </a:r>
+            <a:br>
+              <a:rPr lang="en-US" dirty="0"/>
+            </a:br>
+            <a:r>
+              <a:rPr lang="en-US" dirty="0"/>
+              <a:t>i.e. we define a contract for what returned HTTP errors look like:</a:t>
+            </a:r>
+          </a:p>
+        </p:txBody>
+      </p:sp>
+    </p:spTree>
+    <p:extLst>
+      <p:ext uri="{BB962C8B-B14F-4D97-AF65-F5344CB8AC3E}">
+        <p14:creationId xmlns:p14="http://schemas.microsoft.com/office/powerpoint/2010/main" val="1592474361"/>
+      </p:ext>
+    </p:extLst>
+  </p:cSld>
+  <p:clrMapOvr>
+    <a:masterClrMapping/>
+  </p:clrMapOvr>
+</p:sld>
+</file>
+
+<file path=ppt/slides/slide13.xml><?xml version="1.0" encoding="utf-8"?>
+<p:sld xmlns:a="http://schemas.openxmlformats.org/drawingml/2006/main" xmlns:r="http://schemas.openxmlformats.org/officeDocument/2006/relationships" xmlns:p="http://schemas.openxmlformats.org/presentationml/2006/main">
+  <p:cSld>
+    <p:spTree>
+      <p:nvGrpSpPr>
+        <p:cNvPr id="1" name=""/>
+        <p:cNvGrpSpPr/>
+        <p:nvPr/>
+      </p:nvGrpSpPr>
+      <p:grpSpPr>
+        <a:xfrm>
+          <a:off x="0" y="0"/>
+          <a:ext cx="0" cy="0"/>
+          <a:chOff x="0" y="0"/>
+          <a:chExt cx="0" cy="0"/>
+        </a:xfrm>
+      </p:grpSpPr>
+      <p:sp>
+        <p:nvSpPr>
+          <p:cNvPr id="2" name="Title 1">
+            <a:extLst>
+              <a:ext uri="{FF2B5EF4-FFF2-40B4-BE49-F238E27FC236}">
+                <a16:creationId xmlns:a16="http://schemas.microsoft.com/office/drawing/2014/main" id="{C66D6ECB-5363-B255-4D5E-7CBFAE4305D4}"/>
+              </a:ext>
+            </a:extLst>
+          </p:cNvPr>
+          <p:cNvSpPr>
+            <a:spLocks noGrp="1"/>
+          </p:cNvSpPr>
+          <p:nvPr>
+            <p:ph type="title"/>
+          </p:nvPr>
+        </p:nvSpPr>
+        <p:spPr/>
+        <p:txBody>
+          <a:bodyPr/>
+          <a:lstStyle/>
+          <a:p>
+            <a:r>
+              <a:rPr lang="en-US" dirty="0"/>
+              <a:t>Exception Handling</a:t>
+            </a:r>
+          </a:p>
+        </p:txBody>
+      </p:sp>
+      <p:sp>
+        <p:nvSpPr>
+          <p:cNvPr id="3" name="Content Placeholder 2">
+            <a:extLst>
+              <a:ext uri="{FF2B5EF4-FFF2-40B4-BE49-F238E27FC236}">
+                <a16:creationId xmlns:a16="http://schemas.microsoft.com/office/drawing/2014/main" id="{B6E0D074-5577-A74C-6343-A914959DD982}"/>
+              </a:ext>
+            </a:extLst>
+          </p:cNvPr>
+          <p:cNvSpPr>
+            <a:spLocks noGrp="1"/>
+          </p:cNvSpPr>
+          <p:nvPr>
+            <p:ph idx="1"/>
+          </p:nvPr>
+        </p:nvSpPr>
+        <p:spPr>
+          <a:xfrm>
+            <a:off x="581192" y="2180496"/>
+            <a:ext cx="4085811" cy="4134066"/>
+          </a:xfrm>
+        </p:spPr>
+        <p:txBody>
+          <a:bodyPr>
+            <a:normAutofit lnSpcReduction="10000"/>
+          </a:bodyPr>
+          <a:lstStyle/>
+          <a:p>
+            <a:r>
+              <a:rPr lang="en-US" dirty="0"/>
+              <a:t>@RestControllerAdvice – let’s us setup a global handler for exceptions</a:t>
+            </a:r>
+          </a:p>
+          <a:p>
+            <a:r>
+              <a:rPr lang="en-US" dirty="0"/>
+              <a:t>@ExceptionHanlder – defines a single way to handle a particular exception </a:t>
+            </a:r>
+          </a:p>
+          <a:p>
+            <a:r>
+              <a:rPr lang="en-US" dirty="0"/>
+              <a:t>For web service applications, we typically want to return a </a:t>
+            </a:r>
+            <a:r>
+              <a:rPr lang="en-US" dirty="0" err="1"/>
+              <a:t>ResponseEntity</a:t>
+            </a:r>
+            <a:r>
+              <a:rPr lang="en-US" dirty="0"/>
+              <a:t> that includes the relevant error status code and body </a:t>
+            </a:r>
+          </a:p>
+          <a:p>
+            <a:r>
+              <a:rPr lang="en-US" dirty="0"/>
+              <a:t>We can have more than one @ExceptionHandler methods</a:t>
+            </a:r>
+          </a:p>
+          <a:p>
+            <a:r>
+              <a:rPr lang="en-US" dirty="0"/>
+              <a:t>This lets us handle/manage many types of exceptions, and their responses, in a single location</a:t>
+            </a:r>
+          </a:p>
+        </p:txBody>
+      </p:sp>
+      <p:pic>
+        <p:nvPicPr>
+          <p:cNvPr id="5" name="Picture 4">
+            <a:extLst>
+              <a:ext uri="{FF2B5EF4-FFF2-40B4-BE49-F238E27FC236}">
+                <a16:creationId xmlns:a16="http://schemas.microsoft.com/office/drawing/2014/main" id="{D3A40994-FC53-74BC-9DC8-E603A9ACC354}"/>
+              </a:ext>
+            </a:extLst>
+          </p:cNvPr>
+          <p:cNvPicPr>
+            <a:picLocks noChangeAspect="1"/>
+          </p:cNvPicPr>
+          <p:nvPr/>
+        </p:nvPicPr>
+        <p:blipFill>
+          <a:blip r:embed="rId2"/>
+          <a:stretch>
+            <a:fillRect/>
+          </a:stretch>
+        </p:blipFill>
+        <p:spPr>
+          <a:xfrm>
+            <a:off x="5272643" y="2033441"/>
+            <a:ext cx="5569035" cy="4281121"/>
+          </a:xfrm>
+          <a:prstGeom prst="rect">
+            <a:avLst/>
+          </a:prstGeom>
+        </p:spPr>
+      </p:pic>
+    </p:spTree>
+    <p:extLst>
+      <p:ext uri="{BB962C8B-B14F-4D97-AF65-F5344CB8AC3E}">
+        <p14:creationId xmlns:p14="http://schemas.microsoft.com/office/powerpoint/2010/main" val="1492447866"/>
+      </p:ext>
+    </p:extLst>
+  </p:cSld>
+  <p:clrMapOvr>
+    <a:masterClrMapping/>
+  </p:clrMapOvr>
+</p:sld>
+</file>
+
+<file path=ppt/slides/slide14.xml><?xml version="1.0" encoding="utf-8"?>
+<p:sld xmlns:a="http://schemas.openxmlformats.org/drawingml/2006/main" xmlns:r="http://schemas.openxmlformats.org/officeDocument/2006/relationships" xmlns:p="http://schemas.openxmlformats.org/presentationml/2006/main">
+  <p:cSld>
+    <p:spTree>
+      <p:nvGrpSpPr>
+        <p:cNvPr id="1" name=""/>
+        <p:cNvGrpSpPr/>
+        <p:nvPr/>
+      </p:nvGrpSpPr>
+      <p:grpSpPr>
+        <a:xfrm>
+          <a:off x="0" y="0"/>
+          <a:ext cx="0" cy="0"/>
+          <a:chOff x="0" y="0"/>
+          <a:chExt cx="0" cy="0"/>
+        </a:xfrm>
+      </p:grpSpPr>
+      <p:sp>
+        <p:nvSpPr>
+          <p:cNvPr id="2" name="Title 1">
+            <a:extLst>
+              <a:ext uri="{FF2B5EF4-FFF2-40B4-BE49-F238E27FC236}">
                 <a16:creationId xmlns:a16="http://schemas.microsoft.com/office/drawing/2014/main" id="{BB23CB1D-38E9-88B1-4DE6-3E50454DB880}"/>
               </a:ext>
             </a:extLst>
@@ -4088,7 +4881,7 @@
 </p:sld>
 </file>
 
-<file path=ppt/slides/slide11.xml><?xml version="1.0" encoding="utf-8"?>
+<file path=ppt/slides/slide15.xml><?xml version="1.0" encoding="utf-8"?>
 <p:sld xmlns:a="http://schemas.openxmlformats.org/drawingml/2006/main" xmlns:r="http://schemas.openxmlformats.org/officeDocument/2006/relationships" xmlns:p="http://schemas.openxmlformats.org/presentationml/2006/main" show="0">
   <p:cSld>
     <p:spTree>

--- a/Week_6/02_Hibernate_JPA_&_REST.pptx
+++ b/Week_6/02_Hibernate_JPA_&_REST.pptx
@@ -19,7 +19,26 @@
     <p:sldId id="325" r:id="rId13"/>
     <p:sldId id="326" r:id="rId14"/>
     <p:sldId id="322" r:id="rId15"/>
-    <p:sldId id="313" r:id="rId16"/>
+    <p:sldId id="339" r:id="rId16"/>
+    <p:sldId id="340" r:id="rId17"/>
+    <p:sldId id="341" r:id="rId18"/>
+    <p:sldId id="342" r:id="rId19"/>
+    <p:sldId id="327" r:id="rId20"/>
+    <p:sldId id="328" r:id="rId21"/>
+    <p:sldId id="337" r:id="rId22"/>
+    <p:sldId id="330" r:id="rId23"/>
+    <p:sldId id="329" r:id="rId24"/>
+    <p:sldId id="331" r:id="rId25"/>
+    <p:sldId id="332" r:id="rId26"/>
+    <p:sldId id="333" r:id="rId27"/>
+    <p:sldId id="334" r:id="rId28"/>
+    <p:sldId id="335" r:id="rId29"/>
+    <p:sldId id="336" r:id="rId30"/>
+    <p:sldId id="338" r:id="rId31"/>
+    <p:sldId id="343" r:id="rId32"/>
+    <p:sldId id="345" r:id="rId33"/>
+    <p:sldId id="344" r:id="rId34"/>
+    <p:sldId id="313" r:id="rId35"/>
   </p:sldIdLst>
   <p:sldSz cx="12192000" cy="6858000"/>
   <p:notesSz cx="6858000" cy="9144000"/>
@@ -386,7 +405,7 @@
             <a:fld id="{B61BEF0D-F0BB-DE4B-95CE-6DB70DBA9567}" type="datetimeFigureOut">
               <a:rPr lang="en-US" dirty="0"/>
               <a:pPr/>
-              <a:t>9/30/2026</a:t>
+              <a:t>10/1/2026</a:t>
             </a:fld>
             <a:endParaRPr lang="en-US" dirty="0"/>
           </a:p>
@@ -648,7 +667,7 @@
             <a:fld id="{B61BEF0D-F0BB-DE4B-95CE-6DB70DBA9567}" type="datetimeFigureOut">
               <a:rPr lang="en-US" dirty="0"/>
               <a:pPr/>
-              <a:t>9/30/2026</a:t>
+              <a:t>10/1/2026</a:t>
             </a:fld>
             <a:endParaRPr lang="en-US" dirty="0"/>
           </a:p>
@@ -883,7 +902,7 @@
             <a:fld id="{B61BEF0D-F0BB-DE4B-95CE-6DB70DBA9567}" type="datetimeFigureOut">
               <a:rPr lang="en-US" dirty="0"/>
               <a:pPr/>
-              <a:t>9/30/2026</a:t>
+              <a:t>10/1/2026</a:t>
             </a:fld>
             <a:endParaRPr lang="en-US" dirty="0"/>
           </a:p>
@@ -1130,7 +1149,7 @@
             <a:fld id="{B61BEF0D-F0BB-DE4B-95CE-6DB70DBA9567}" type="datetimeFigureOut">
               <a:rPr lang="en-US" dirty="0"/>
               <a:pPr/>
-              <a:t>9/30/2026</a:t>
+              <a:t>10/1/2026</a:t>
             </a:fld>
             <a:endParaRPr lang="en-US" dirty="0"/>
           </a:p>
@@ -1438,7 +1457,7 @@
             <a:fld id="{B61BEF0D-F0BB-DE4B-95CE-6DB70DBA9567}" type="datetimeFigureOut">
               <a:rPr lang="en-US" dirty="0"/>
               <a:pPr/>
-              <a:t>9/30/2026</a:t>
+              <a:t>10/1/2026</a:t>
             </a:fld>
             <a:endParaRPr lang="en-US" dirty="0"/>
           </a:p>
@@ -1739,7 +1758,7 @@
             <a:fld id="{B61BEF0D-F0BB-DE4B-95CE-6DB70DBA9567}" type="datetimeFigureOut">
               <a:rPr lang="en-US" dirty="0"/>
               <a:pPr/>
-              <a:t>9/30/2026</a:t>
+              <a:t>10/1/2026</a:t>
             </a:fld>
             <a:endParaRPr lang="en-US" dirty="0"/>
           </a:p>
@@ -2160,7 +2179,7 @@
             <a:fld id="{B61BEF0D-F0BB-DE4B-95CE-6DB70DBA9567}" type="datetimeFigureOut">
               <a:rPr lang="en-US" dirty="0"/>
               <a:pPr/>
-              <a:t>9/30/2026</a:t>
+              <a:t>10/1/2026</a:t>
             </a:fld>
             <a:endParaRPr lang="en-US" dirty="0"/>
           </a:p>
@@ -2323,7 +2342,7 @@
             <a:fld id="{B61BEF0D-F0BB-DE4B-95CE-6DB70DBA9567}" type="datetimeFigureOut">
               <a:rPr lang="en-US" dirty="0"/>
               <a:pPr/>
-              <a:t>9/30/2026</a:t>
+              <a:t>10/1/2026</a:t>
             </a:fld>
             <a:endParaRPr lang="en-US" dirty="0"/>
           </a:p>
@@ -2420,7 +2439,7 @@
             <a:fld id="{B61BEF0D-F0BB-DE4B-95CE-6DB70DBA9567}" type="datetimeFigureOut">
               <a:rPr lang="en-US" dirty="0"/>
               <a:pPr/>
-              <a:t>9/30/2026</a:t>
+              <a:t>10/1/2026</a:t>
             </a:fld>
             <a:endParaRPr lang="en-US" dirty="0"/>
           </a:p>
@@ -2798,7 +2817,7 @@
             <a:fld id="{B61BEF0D-F0BB-DE4B-95CE-6DB70DBA9567}" type="datetimeFigureOut">
               <a:rPr lang="en-US" dirty="0"/>
               <a:pPr/>
-              <a:t>9/30/2026</a:t>
+              <a:t>10/1/2026</a:t>
             </a:fld>
             <a:endParaRPr lang="en-US" dirty="0"/>
           </a:p>
@@ -3084,7 +3103,7 @@
             <a:fld id="{B61BEF0D-F0BB-DE4B-95CE-6DB70DBA9567}" type="datetimeFigureOut">
               <a:rPr lang="en-US" dirty="0"/>
               <a:pPr/>
-              <a:t>9/30/2026</a:t>
+              <a:t>10/1/2026</a:t>
             </a:fld>
             <a:endParaRPr lang="en-US" dirty="0"/>
           </a:p>
@@ -3323,7 +3342,7 @@
             <a:fld id="{B61BEF0D-F0BB-DE4B-95CE-6DB70DBA9567}" type="datetimeFigureOut">
               <a:rPr lang="en-US" dirty="0"/>
               <a:pPr/>
-              <a:t>9/30/2026</a:t>
+              <a:t>10/1/2026</a:t>
             </a:fld>
             <a:endParaRPr lang="en-US" dirty="0"/>
           </a:p>
@@ -4844,7 +4863,15 @@
           <a:p>
             <a:r>
               <a:rPr lang="en-US" dirty="0"/>
-              <a:t>After, you will see the completed CRUD app with code comments in your course materials</a:t>
+              <a:t>Please see the completed CRUD app “</a:t>
+            </a:r>
+            <a:r>
+              <a:rPr lang="en-US" dirty="0" err="1"/>
+              <a:t>EntityMangerApp</a:t>
+            </a:r>
+            <a:r>
+              <a:rPr lang="en-US" dirty="0"/>
+              <a:t>” with code comments in your course materials</a:t>
             </a:r>
           </a:p>
           <a:p>
@@ -4858,7 +4885,7 @@
             </a:r>
             <a:r>
               <a:rPr lang="en-US" dirty="0"/>
-              <a:t> for now, and later create another concretion for our repo/DAO layer that uses </a:t>
+              <a:t> for now, and later create other files in our DAO layer that uses </a:t>
             </a:r>
             <a:r>
               <a:rPr lang="en-US" dirty="0" err="1"/>
@@ -4882,6 +4909,5580 @@
 </file>
 
 <file path=ppt/slides/slide15.xml><?xml version="1.0" encoding="utf-8"?>
+<p:sld xmlns:a="http://schemas.openxmlformats.org/drawingml/2006/main" xmlns:r="http://schemas.openxmlformats.org/officeDocument/2006/relationships" xmlns:p="http://schemas.openxmlformats.org/presentationml/2006/main">
+  <p:cSld>
+    <p:spTree>
+      <p:nvGrpSpPr>
+        <p:cNvPr id="1" name=""/>
+        <p:cNvGrpSpPr/>
+        <p:nvPr/>
+      </p:nvGrpSpPr>
+      <p:grpSpPr>
+        <a:xfrm>
+          <a:off x="0" y="0"/>
+          <a:ext cx="0" cy="0"/>
+          <a:chOff x="0" y="0"/>
+          <a:chExt cx="0" cy="0"/>
+        </a:xfrm>
+      </p:grpSpPr>
+      <p:sp>
+        <p:nvSpPr>
+          <p:cNvPr id="2" name="Title 1">
+            <a:extLst>
+              <a:ext uri="{FF2B5EF4-FFF2-40B4-BE49-F238E27FC236}">
+                <a16:creationId xmlns:a16="http://schemas.microsoft.com/office/drawing/2014/main" id="{478023F1-3303-6F80-4FD5-4F2307C7F8F9}"/>
+              </a:ext>
+            </a:extLst>
+          </p:cNvPr>
+          <p:cNvSpPr>
+            <a:spLocks noGrp="1"/>
+          </p:cNvSpPr>
+          <p:nvPr>
+            <p:ph type="title"/>
+          </p:nvPr>
+        </p:nvSpPr>
+        <p:spPr/>
+        <p:txBody>
+          <a:bodyPr/>
+          <a:lstStyle/>
+          <a:p>
+            <a:r>
+              <a:rPr lang="en-US" dirty="0"/>
+              <a:t>Mapping JPA relationships</a:t>
+            </a:r>
+          </a:p>
+        </p:txBody>
+      </p:sp>
+      <p:sp>
+        <p:nvSpPr>
+          <p:cNvPr id="3" name="Content Placeholder 2">
+            <a:extLst>
+              <a:ext uri="{FF2B5EF4-FFF2-40B4-BE49-F238E27FC236}">
+                <a16:creationId xmlns:a16="http://schemas.microsoft.com/office/drawing/2014/main" id="{DFF75D48-3B9B-B113-A355-D8A96EB2273F}"/>
+              </a:ext>
+            </a:extLst>
+          </p:cNvPr>
+          <p:cNvSpPr>
+            <a:spLocks noGrp="1"/>
+          </p:cNvSpPr>
+          <p:nvPr>
+            <p:ph idx="1"/>
+          </p:nvPr>
+        </p:nvSpPr>
+        <p:spPr/>
+        <p:txBody>
+          <a:bodyPr/>
+          <a:lstStyle/>
+          <a:p>
+            <a:pPr lvl="0"/>
+            <a:r>
+              <a:rPr lang="en-US" dirty="0"/>
+              <a:t>We supply these on @Entity fields to map relationships between entities</a:t>
+            </a:r>
+          </a:p>
+          <a:p>
+            <a:pPr lvl="0"/>
+            <a:r>
+              <a:rPr lang="en-US" dirty="0"/>
+              <a:t>@OneToOne</a:t>
+            </a:r>
+          </a:p>
+          <a:p>
+            <a:pPr lvl="0"/>
+            <a:r>
+              <a:rPr lang="en-US" dirty="0"/>
+              <a:t>@OneToMany</a:t>
+            </a:r>
+          </a:p>
+          <a:p>
+            <a:pPr lvl="0"/>
+            <a:r>
+              <a:rPr lang="en-US" dirty="0"/>
+              <a:t>@ManyToOne</a:t>
+            </a:r>
+          </a:p>
+          <a:p>
+            <a:pPr lvl="0"/>
+            <a:r>
+              <a:rPr lang="en-US" dirty="0"/>
+              <a:t>@ManyToMany</a:t>
+            </a:r>
+          </a:p>
+        </p:txBody>
+      </p:sp>
+    </p:spTree>
+    <p:extLst>
+      <p:ext uri="{BB962C8B-B14F-4D97-AF65-F5344CB8AC3E}">
+        <p14:creationId xmlns:p14="http://schemas.microsoft.com/office/powerpoint/2010/main" val="372066090"/>
+      </p:ext>
+    </p:extLst>
+  </p:cSld>
+  <p:clrMapOvr>
+    <a:masterClrMapping/>
+  </p:clrMapOvr>
+</p:sld>
+</file>
+
+<file path=ppt/slides/slide16.xml><?xml version="1.0" encoding="utf-8"?>
+<p:sld xmlns:a="http://schemas.openxmlformats.org/drawingml/2006/main" xmlns:r="http://schemas.openxmlformats.org/officeDocument/2006/relationships" xmlns:p="http://schemas.openxmlformats.org/presentationml/2006/main">
+  <p:cSld>
+    <p:spTree>
+      <p:nvGrpSpPr>
+        <p:cNvPr id="1" name=""/>
+        <p:cNvGrpSpPr/>
+        <p:nvPr/>
+      </p:nvGrpSpPr>
+      <p:grpSpPr>
+        <a:xfrm>
+          <a:off x="0" y="0"/>
+          <a:ext cx="0" cy="0"/>
+          <a:chOff x="0" y="0"/>
+          <a:chExt cx="0" cy="0"/>
+        </a:xfrm>
+      </p:grpSpPr>
+      <p:sp>
+        <p:nvSpPr>
+          <p:cNvPr id="2" name="Title 1">
+            <a:extLst>
+              <a:ext uri="{FF2B5EF4-FFF2-40B4-BE49-F238E27FC236}">
+                <a16:creationId xmlns:a16="http://schemas.microsoft.com/office/drawing/2014/main" id="{6D76FF78-2086-074E-7655-10C6D953A8B4}"/>
+              </a:ext>
+            </a:extLst>
+          </p:cNvPr>
+          <p:cNvSpPr>
+            <a:spLocks noGrp="1"/>
+          </p:cNvSpPr>
+          <p:nvPr>
+            <p:ph type="title"/>
+          </p:nvPr>
+        </p:nvSpPr>
+        <p:spPr/>
+        <p:txBody>
+          <a:bodyPr/>
+          <a:lstStyle/>
+          <a:p>
+            <a:r>
+              <a:rPr lang="en-US" dirty="0"/>
+              <a:t>1-n relationship</a:t>
+            </a:r>
+          </a:p>
+        </p:txBody>
+      </p:sp>
+      <p:sp>
+        <p:nvSpPr>
+          <p:cNvPr id="3" name="Content Placeholder 2">
+            <a:extLst>
+              <a:ext uri="{FF2B5EF4-FFF2-40B4-BE49-F238E27FC236}">
+                <a16:creationId xmlns:a16="http://schemas.microsoft.com/office/drawing/2014/main" id="{8A577275-0D72-7CAF-63A5-BF79F99722B0}"/>
+              </a:ext>
+            </a:extLst>
+          </p:cNvPr>
+          <p:cNvSpPr>
+            <a:spLocks noGrp="1"/>
+          </p:cNvSpPr>
+          <p:nvPr>
+            <p:ph idx="1"/>
+          </p:nvPr>
+        </p:nvSpPr>
+        <p:spPr>
+          <a:xfrm>
+            <a:off x="581192" y="2180496"/>
+            <a:ext cx="11029615" cy="1976834"/>
+          </a:xfrm>
+        </p:spPr>
+        <p:txBody>
+          <a:bodyPr>
+            <a:normAutofit/>
+          </a:bodyPr>
+          <a:lstStyle/>
+          <a:p>
+            <a:r>
+              <a:rPr lang="en-US" dirty="0" err="1"/>
+              <a:t>mappedBy</a:t>
+            </a:r>
+            <a:r>
+              <a:rPr lang="en-US" dirty="0"/>
+              <a:t> – allows us to use dot notation to reach a student’s school. E.g. </a:t>
+            </a:r>
+            <a:r>
+              <a:rPr lang="en-US" dirty="0" err="1"/>
+              <a:t>someStudent.school</a:t>
+            </a:r>
+            <a:r>
+              <a:rPr lang="en-US" dirty="0"/>
+              <a:t> </a:t>
+            </a:r>
+          </a:p>
+          <a:p>
+            <a:r>
+              <a:rPr lang="en-US" dirty="0"/>
+              <a:t>A single school has many students, we don’t necessarily want to load all those into memory when we query a school, so we can fetch it lazily (only when needed/called for)</a:t>
+            </a:r>
+          </a:p>
+          <a:p>
+            <a:r>
+              <a:rPr lang="en-US" dirty="0"/>
+              <a:t>@JoinColumn + name – defines the database field to use to tie the primary key of the other table</a:t>
+            </a:r>
+          </a:p>
+          <a:p>
+            <a:r>
+              <a:rPr lang="en-US" dirty="0"/>
+              <a:t>We initialize @OneToMany collections with </a:t>
+            </a:r>
+            <a:r>
+              <a:rPr lang="en-US" dirty="0" err="1"/>
+              <a:t>ArrayList</a:t>
+            </a:r>
+            <a:r>
+              <a:rPr lang="en-US" dirty="0"/>
+              <a:t> so that it can never be null (best practice pattern)</a:t>
+            </a:r>
+          </a:p>
+        </p:txBody>
+      </p:sp>
+      <p:pic>
+        <p:nvPicPr>
+          <p:cNvPr id="7" name="Picture 6">
+            <a:extLst>
+              <a:ext uri="{FF2B5EF4-FFF2-40B4-BE49-F238E27FC236}">
+                <a16:creationId xmlns:a16="http://schemas.microsoft.com/office/drawing/2014/main" id="{28E61235-8186-CD0F-7D7B-48B9741E6541}"/>
+              </a:ext>
+            </a:extLst>
+          </p:cNvPr>
+          <p:cNvPicPr>
+            <a:picLocks noChangeAspect="1"/>
+          </p:cNvPicPr>
+          <p:nvPr/>
+        </p:nvPicPr>
+        <p:blipFill>
+          <a:blip r:embed="rId2"/>
+          <a:stretch>
+            <a:fillRect/>
+          </a:stretch>
+        </p:blipFill>
+        <p:spPr>
+          <a:xfrm>
+            <a:off x="7069277" y="4719298"/>
+            <a:ext cx="3526607" cy="1059109"/>
+          </a:xfrm>
+          <a:prstGeom prst="rect">
+            <a:avLst/>
+          </a:prstGeom>
+        </p:spPr>
+      </p:pic>
+      <p:pic>
+        <p:nvPicPr>
+          <p:cNvPr id="9" name="Picture 8">
+            <a:extLst>
+              <a:ext uri="{FF2B5EF4-FFF2-40B4-BE49-F238E27FC236}">
+                <a16:creationId xmlns:a16="http://schemas.microsoft.com/office/drawing/2014/main" id="{F4F7ED5A-A402-F945-F7AD-0ECC7A722169}"/>
+              </a:ext>
+            </a:extLst>
+          </p:cNvPr>
+          <p:cNvPicPr>
+            <a:picLocks noChangeAspect="1"/>
+          </p:cNvPicPr>
+          <p:nvPr/>
+        </p:nvPicPr>
+        <p:blipFill>
+          <a:blip r:embed="rId3"/>
+          <a:stretch>
+            <a:fillRect/>
+          </a:stretch>
+        </p:blipFill>
+        <p:spPr>
+          <a:xfrm>
+            <a:off x="846944" y="4719298"/>
+            <a:ext cx="4820323" cy="1771897"/>
+          </a:xfrm>
+          <a:prstGeom prst="rect">
+            <a:avLst/>
+          </a:prstGeom>
+        </p:spPr>
+      </p:pic>
+      <p:sp>
+        <p:nvSpPr>
+          <p:cNvPr id="10" name="TextBox 9">
+            <a:extLst>
+              <a:ext uri="{FF2B5EF4-FFF2-40B4-BE49-F238E27FC236}">
+                <a16:creationId xmlns:a16="http://schemas.microsoft.com/office/drawing/2014/main" id="{D5C0EED5-E212-26E9-E02C-FD81FDD9A71B}"/>
+              </a:ext>
+            </a:extLst>
+          </p:cNvPr>
+          <p:cNvSpPr txBox="1"/>
+          <p:nvPr/>
+        </p:nvSpPr>
+        <p:spPr>
+          <a:xfrm>
+            <a:off x="978195" y="4293995"/>
+            <a:ext cx="2008755" cy="369332"/>
+          </a:xfrm>
+          <a:prstGeom prst="rect">
+            <a:avLst/>
+          </a:prstGeom>
+          <a:noFill/>
+        </p:spPr>
+        <p:txBody>
+          <a:bodyPr wrap="none" rtlCol="0">
+            <a:spAutoFit/>
+          </a:bodyPr>
+          <a:lstStyle/>
+          <a:p>
+            <a:r>
+              <a:rPr lang="en-US" dirty="0"/>
+              <a:t>Domain/School.java</a:t>
+            </a:r>
+          </a:p>
+        </p:txBody>
+      </p:sp>
+      <p:sp>
+        <p:nvSpPr>
+          <p:cNvPr id="12" name="TextBox 11">
+            <a:extLst>
+              <a:ext uri="{FF2B5EF4-FFF2-40B4-BE49-F238E27FC236}">
+                <a16:creationId xmlns:a16="http://schemas.microsoft.com/office/drawing/2014/main" id="{32BA6FD6-70B6-9366-4EA8-65DACB52D3BB}"/>
+              </a:ext>
+            </a:extLst>
+          </p:cNvPr>
+          <p:cNvSpPr txBox="1"/>
+          <p:nvPr/>
+        </p:nvSpPr>
+        <p:spPr>
+          <a:xfrm>
+            <a:off x="7069277" y="4293995"/>
+            <a:ext cx="2100127" cy="369332"/>
+          </a:xfrm>
+          <a:prstGeom prst="rect">
+            <a:avLst/>
+          </a:prstGeom>
+          <a:noFill/>
+        </p:spPr>
+        <p:txBody>
+          <a:bodyPr wrap="none" rtlCol="0">
+            <a:spAutoFit/>
+          </a:bodyPr>
+          <a:lstStyle/>
+          <a:p>
+            <a:r>
+              <a:rPr lang="en-US" dirty="0"/>
+              <a:t>Domain/Student.java</a:t>
+            </a:r>
+          </a:p>
+        </p:txBody>
+      </p:sp>
+    </p:spTree>
+    <p:extLst>
+      <p:ext uri="{BB962C8B-B14F-4D97-AF65-F5344CB8AC3E}">
+        <p14:creationId xmlns:p14="http://schemas.microsoft.com/office/powerpoint/2010/main" val="1793672679"/>
+      </p:ext>
+    </p:extLst>
+  </p:cSld>
+  <p:clrMapOvr>
+    <a:masterClrMapping/>
+  </p:clrMapOvr>
+</p:sld>
+</file>
+
+<file path=ppt/slides/slide17.xml><?xml version="1.0" encoding="utf-8"?>
+<p:sld xmlns:a="http://schemas.openxmlformats.org/drawingml/2006/main" xmlns:r="http://schemas.openxmlformats.org/officeDocument/2006/relationships" xmlns:p="http://schemas.openxmlformats.org/presentationml/2006/main">
+  <p:cSld>
+    <p:spTree>
+      <p:nvGrpSpPr>
+        <p:cNvPr id="1" name=""/>
+        <p:cNvGrpSpPr/>
+        <p:nvPr/>
+      </p:nvGrpSpPr>
+      <p:grpSpPr>
+        <a:xfrm>
+          <a:off x="0" y="0"/>
+          <a:ext cx="0" cy="0"/>
+          <a:chOff x="0" y="0"/>
+          <a:chExt cx="0" cy="0"/>
+        </a:xfrm>
+      </p:grpSpPr>
+      <p:sp>
+        <p:nvSpPr>
+          <p:cNvPr id="2" name="Title 1">
+            <a:extLst>
+              <a:ext uri="{FF2B5EF4-FFF2-40B4-BE49-F238E27FC236}">
+                <a16:creationId xmlns:a16="http://schemas.microsoft.com/office/drawing/2014/main" id="{322C1BF6-CAFB-5F33-441E-AA6A1EA7C2EC}"/>
+              </a:ext>
+            </a:extLst>
+          </p:cNvPr>
+          <p:cNvSpPr>
+            <a:spLocks noGrp="1"/>
+          </p:cNvSpPr>
+          <p:nvPr>
+            <p:ph type="title"/>
+          </p:nvPr>
+        </p:nvSpPr>
+        <p:spPr/>
+        <p:txBody>
+          <a:bodyPr/>
+          <a:lstStyle/>
+          <a:p>
+            <a:r>
+              <a:rPr lang="en-US" dirty="0"/>
+              <a:t>N-M</a:t>
+            </a:r>
+          </a:p>
+        </p:txBody>
+      </p:sp>
+      <p:sp>
+        <p:nvSpPr>
+          <p:cNvPr id="3" name="Content Placeholder 2">
+            <a:extLst>
+              <a:ext uri="{FF2B5EF4-FFF2-40B4-BE49-F238E27FC236}">
+                <a16:creationId xmlns:a16="http://schemas.microsoft.com/office/drawing/2014/main" id="{2BDB8BCD-78A3-F7D1-7E1F-BD5545737778}"/>
+              </a:ext>
+            </a:extLst>
+          </p:cNvPr>
+          <p:cNvSpPr>
+            <a:spLocks noGrp="1"/>
+          </p:cNvSpPr>
+          <p:nvPr>
+            <p:ph idx="1"/>
+          </p:nvPr>
+        </p:nvSpPr>
+        <p:spPr>
+          <a:xfrm>
+            <a:off x="581193" y="1953491"/>
+            <a:ext cx="11029615" cy="2247764"/>
+          </a:xfrm>
+        </p:spPr>
+        <p:txBody>
+          <a:bodyPr>
+            <a:normAutofit fontScale="92500"/>
+          </a:bodyPr>
+          <a:lstStyle/>
+          <a:p>
+            <a:r>
+              <a:rPr lang="en-US" dirty="0"/>
+              <a:t>Many to many relationships may certainly be mapped with @ManyToMany</a:t>
+            </a:r>
+          </a:p>
+          <a:p>
+            <a:r>
+              <a:rPr lang="en-US" dirty="0"/>
+              <a:t>This doesn’t allow us to create fields on the underlying junction table however</a:t>
+            </a:r>
+          </a:p>
+          <a:p>
+            <a:r>
+              <a:rPr lang="en-US" dirty="0"/>
+              <a:t>For that reason, it is common to create a domain model for the junction object manually, and then use @ManyToOne and @OneToMany to tie all three tables together!</a:t>
+            </a:r>
+          </a:p>
+          <a:p>
+            <a:r>
+              <a:rPr lang="en-US" dirty="0" err="1"/>
+              <a:t>orphanRemoval</a:t>
+            </a:r>
+            <a:r>
+              <a:rPr lang="en-US" dirty="0"/>
+              <a:t> – Remove an enrollment from this collection -&gt; delete it from the database.</a:t>
+            </a:r>
+          </a:p>
+          <a:p>
+            <a:r>
+              <a:rPr lang="en-US" dirty="0" err="1"/>
+              <a:t>CascadeType.ALL</a:t>
+            </a:r>
+            <a:r>
+              <a:rPr lang="en-US" dirty="0"/>
+              <a:t> – if we add or remove an enrollment, then the change is also saved to the </a:t>
+            </a:r>
+            <a:r>
+              <a:rPr lang="en-US" dirty="0" err="1"/>
+              <a:t>db</a:t>
+            </a:r>
+            <a:r>
+              <a:rPr lang="en-US" dirty="0"/>
+              <a:t> for the parent record</a:t>
+            </a:r>
+          </a:p>
+        </p:txBody>
+      </p:sp>
+      <p:pic>
+        <p:nvPicPr>
+          <p:cNvPr id="5" name="Picture 4">
+            <a:extLst>
+              <a:ext uri="{FF2B5EF4-FFF2-40B4-BE49-F238E27FC236}">
+                <a16:creationId xmlns:a16="http://schemas.microsoft.com/office/drawing/2014/main" id="{B612311E-02ED-CEB0-DF23-5D078010398C}"/>
+              </a:ext>
+            </a:extLst>
+          </p:cNvPr>
+          <p:cNvPicPr>
+            <a:picLocks noChangeAspect="1"/>
+          </p:cNvPicPr>
+          <p:nvPr/>
+        </p:nvPicPr>
+        <p:blipFill>
+          <a:blip r:embed="rId2"/>
+          <a:stretch>
+            <a:fillRect/>
+          </a:stretch>
+        </p:blipFill>
+        <p:spPr>
+          <a:xfrm>
+            <a:off x="415934" y="4904509"/>
+            <a:ext cx="3730780" cy="1348317"/>
+          </a:xfrm>
+          <a:prstGeom prst="rect">
+            <a:avLst/>
+          </a:prstGeom>
+        </p:spPr>
+      </p:pic>
+      <p:pic>
+        <p:nvPicPr>
+          <p:cNvPr id="7" name="Picture 6">
+            <a:extLst>
+              <a:ext uri="{FF2B5EF4-FFF2-40B4-BE49-F238E27FC236}">
+                <a16:creationId xmlns:a16="http://schemas.microsoft.com/office/drawing/2014/main" id="{D09E6DDF-BD63-95D5-C383-61FDBCFCAB63}"/>
+              </a:ext>
+            </a:extLst>
+          </p:cNvPr>
+          <p:cNvPicPr>
+            <a:picLocks noChangeAspect="1"/>
+          </p:cNvPicPr>
+          <p:nvPr/>
+        </p:nvPicPr>
+        <p:blipFill>
+          <a:blip r:embed="rId3"/>
+          <a:stretch>
+            <a:fillRect/>
+          </a:stretch>
+        </p:blipFill>
+        <p:spPr>
+          <a:xfrm>
+            <a:off x="4370089" y="4753773"/>
+            <a:ext cx="3126926" cy="1596035"/>
+          </a:xfrm>
+          <a:prstGeom prst="rect">
+            <a:avLst/>
+          </a:prstGeom>
+        </p:spPr>
+      </p:pic>
+      <p:pic>
+        <p:nvPicPr>
+          <p:cNvPr id="9" name="Picture 8">
+            <a:extLst>
+              <a:ext uri="{FF2B5EF4-FFF2-40B4-BE49-F238E27FC236}">
+                <a16:creationId xmlns:a16="http://schemas.microsoft.com/office/drawing/2014/main" id="{6DEEA643-34CB-2A26-12E6-E38655BC4A21}"/>
+              </a:ext>
+            </a:extLst>
+          </p:cNvPr>
+          <p:cNvPicPr>
+            <a:picLocks noChangeAspect="1"/>
+          </p:cNvPicPr>
+          <p:nvPr/>
+        </p:nvPicPr>
+        <p:blipFill>
+          <a:blip r:embed="rId4"/>
+          <a:stretch>
+            <a:fillRect/>
+          </a:stretch>
+        </p:blipFill>
+        <p:spPr>
+          <a:xfrm>
+            <a:off x="7821912" y="4904509"/>
+            <a:ext cx="4095968" cy="1348317"/>
+          </a:xfrm>
+          <a:prstGeom prst="rect">
+            <a:avLst/>
+          </a:prstGeom>
+        </p:spPr>
+      </p:pic>
+      <p:sp>
+        <p:nvSpPr>
+          <p:cNvPr id="11" name="TextBox 10">
+            <a:extLst>
+              <a:ext uri="{FF2B5EF4-FFF2-40B4-BE49-F238E27FC236}">
+                <a16:creationId xmlns:a16="http://schemas.microsoft.com/office/drawing/2014/main" id="{E0EF4441-6DF4-BEE9-9701-74374EB1A6F7}"/>
+              </a:ext>
+            </a:extLst>
+          </p:cNvPr>
+          <p:cNvSpPr txBox="1"/>
+          <p:nvPr/>
+        </p:nvSpPr>
+        <p:spPr>
+          <a:xfrm>
+            <a:off x="7821912" y="4319672"/>
+            <a:ext cx="2100127" cy="369332"/>
+          </a:xfrm>
+          <a:prstGeom prst="rect">
+            <a:avLst/>
+          </a:prstGeom>
+          <a:noFill/>
+        </p:spPr>
+        <p:txBody>
+          <a:bodyPr wrap="none" rtlCol="0">
+            <a:spAutoFit/>
+          </a:bodyPr>
+          <a:lstStyle/>
+          <a:p>
+            <a:r>
+              <a:rPr lang="en-US" dirty="0"/>
+              <a:t>Domain/Student.java</a:t>
+            </a:r>
+          </a:p>
+        </p:txBody>
+      </p:sp>
+      <p:sp>
+        <p:nvSpPr>
+          <p:cNvPr id="13" name="TextBox 12">
+            <a:extLst>
+              <a:ext uri="{FF2B5EF4-FFF2-40B4-BE49-F238E27FC236}">
+                <a16:creationId xmlns:a16="http://schemas.microsoft.com/office/drawing/2014/main" id="{8BF60BFB-7D28-55C0-7C23-F83F7D0698AF}"/>
+              </a:ext>
+            </a:extLst>
+          </p:cNvPr>
+          <p:cNvSpPr txBox="1"/>
+          <p:nvPr/>
+        </p:nvSpPr>
+        <p:spPr>
+          <a:xfrm>
+            <a:off x="416996" y="4266024"/>
+            <a:ext cx="2082301" cy="369332"/>
+          </a:xfrm>
+          <a:prstGeom prst="rect">
+            <a:avLst/>
+          </a:prstGeom>
+          <a:noFill/>
+        </p:spPr>
+        <p:txBody>
+          <a:bodyPr wrap="none" rtlCol="0">
+            <a:spAutoFit/>
+          </a:bodyPr>
+          <a:lstStyle/>
+          <a:p>
+            <a:r>
+              <a:rPr lang="en-US" dirty="0"/>
+              <a:t>Domain/Course.java</a:t>
+            </a:r>
+          </a:p>
+        </p:txBody>
+      </p:sp>
+      <p:sp>
+        <p:nvSpPr>
+          <p:cNvPr id="15" name="TextBox 14">
+            <a:extLst>
+              <a:ext uri="{FF2B5EF4-FFF2-40B4-BE49-F238E27FC236}">
+                <a16:creationId xmlns:a16="http://schemas.microsoft.com/office/drawing/2014/main" id="{7DDE4BFF-6CA1-7C4E-507D-EF5EB3FF3069}"/>
+              </a:ext>
+            </a:extLst>
+          </p:cNvPr>
+          <p:cNvSpPr txBox="1"/>
+          <p:nvPr/>
+        </p:nvSpPr>
+        <p:spPr>
+          <a:xfrm>
+            <a:off x="4370089" y="4319672"/>
+            <a:ext cx="2408544" cy="369332"/>
+          </a:xfrm>
+          <a:prstGeom prst="rect">
+            <a:avLst/>
+          </a:prstGeom>
+          <a:noFill/>
+        </p:spPr>
+        <p:txBody>
+          <a:bodyPr wrap="none" rtlCol="0">
+            <a:spAutoFit/>
+          </a:bodyPr>
+          <a:lstStyle/>
+          <a:p>
+            <a:r>
+              <a:rPr lang="en-US" dirty="0"/>
+              <a:t>Domain/Enrollment.java</a:t>
+            </a:r>
+          </a:p>
+        </p:txBody>
+      </p:sp>
+    </p:spTree>
+    <p:extLst>
+      <p:ext uri="{BB962C8B-B14F-4D97-AF65-F5344CB8AC3E}">
+        <p14:creationId xmlns:p14="http://schemas.microsoft.com/office/powerpoint/2010/main" val="928550159"/>
+      </p:ext>
+    </p:extLst>
+  </p:cSld>
+  <p:clrMapOvr>
+    <a:masterClrMapping/>
+  </p:clrMapOvr>
+</p:sld>
+</file>
+
+<file path=ppt/slides/slide18.xml><?xml version="1.0" encoding="utf-8"?>
+<p:sld xmlns:a="http://schemas.openxmlformats.org/drawingml/2006/main" xmlns:r="http://schemas.openxmlformats.org/officeDocument/2006/relationships" xmlns:p="http://schemas.openxmlformats.org/presentationml/2006/main">
+  <p:cSld>
+    <p:spTree>
+      <p:nvGrpSpPr>
+        <p:cNvPr id="1" name=""/>
+        <p:cNvGrpSpPr/>
+        <p:nvPr/>
+      </p:nvGrpSpPr>
+      <p:grpSpPr>
+        <a:xfrm>
+          <a:off x="0" y="0"/>
+          <a:ext cx="0" cy="0"/>
+          <a:chOff x="0" y="0"/>
+          <a:chExt cx="0" cy="0"/>
+        </a:xfrm>
+      </p:grpSpPr>
+      <p:sp>
+        <p:nvSpPr>
+          <p:cNvPr id="2" name="Title 1">
+            <a:extLst>
+              <a:ext uri="{FF2B5EF4-FFF2-40B4-BE49-F238E27FC236}">
+                <a16:creationId xmlns:a16="http://schemas.microsoft.com/office/drawing/2014/main" id="{654BC21E-30C8-BA69-3B69-F12F236BBB5C}"/>
+              </a:ext>
+            </a:extLst>
+          </p:cNvPr>
+          <p:cNvSpPr>
+            <a:spLocks noGrp="1"/>
+          </p:cNvSpPr>
+          <p:nvPr>
+            <p:ph type="title"/>
+          </p:nvPr>
+        </p:nvSpPr>
+        <p:spPr/>
+        <p:txBody>
+          <a:bodyPr/>
+          <a:lstStyle/>
+          <a:p>
+            <a:r>
+              <a:rPr lang="en-US" dirty="0"/>
+              <a:t>Using </a:t>
+            </a:r>
+            <a:r>
+              <a:rPr lang="en-US" dirty="0" err="1"/>
+              <a:t>entitymanager</a:t>
+            </a:r>
+            <a:r>
+              <a:rPr lang="en-US" dirty="0"/>
+              <a:t> to traverse relationships</a:t>
+            </a:r>
+          </a:p>
+        </p:txBody>
+      </p:sp>
+      <p:pic>
+        <p:nvPicPr>
+          <p:cNvPr id="5" name="Picture 4">
+            <a:extLst>
+              <a:ext uri="{FF2B5EF4-FFF2-40B4-BE49-F238E27FC236}">
+                <a16:creationId xmlns:a16="http://schemas.microsoft.com/office/drawing/2014/main" id="{8D45A9C3-052E-607A-0E70-86FCE65A2488}"/>
+              </a:ext>
+            </a:extLst>
+          </p:cNvPr>
+          <p:cNvPicPr>
+            <a:picLocks noChangeAspect="1"/>
+          </p:cNvPicPr>
+          <p:nvPr/>
+        </p:nvPicPr>
+        <p:blipFill>
+          <a:blip r:embed="rId2"/>
+          <a:stretch>
+            <a:fillRect/>
+          </a:stretch>
+        </p:blipFill>
+        <p:spPr>
+          <a:xfrm>
+            <a:off x="5787656" y="2905335"/>
+            <a:ext cx="5628222" cy="2536993"/>
+          </a:xfrm>
+          <a:prstGeom prst="rect">
+            <a:avLst/>
+          </a:prstGeom>
+        </p:spPr>
+      </p:pic>
+      <p:sp>
+        <p:nvSpPr>
+          <p:cNvPr id="6" name="TextBox 5">
+            <a:extLst>
+              <a:ext uri="{FF2B5EF4-FFF2-40B4-BE49-F238E27FC236}">
+                <a16:creationId xmlns:a16="http://schemas.microsoft.com/office/drawing/2014/main" id="{65CDB6C4-71F8-7D34-4062-F7C921D04E96}"/>
+              </a:ext>
+            </a:extLst>
+          </p:cNvPr>
+          <p:cNvSpPr txBox="1"/>
+          <p:nvPr/>
+        </p:nvSpPr>
+        <p:spPr>
+          <a:xfrm>
+            <a:off x="5982942" y="2314837"/>
+            <a:ext cx="1396053" cy="369332"/>
+          </a:xfrm>
+          <a:prstGeom prst="rect">
+            <a:avLst/>
+          </a:prstGeom>
+          <a:noFill/>
+        </p:spPr>
+        <p:txBody>
+          <a:bodyPr wrap="square" rtlCol="0">
+            <a:spAutoFit/>
+          </a:bodyPr>
+          <a:lstStyle/>
+          <a:p>
+            <a:r>
+              <a:rPr lang="en-US" dirty="0"/>
+              <a:t>DAO class:</a:t>
+            </a:r>
+          </a:p>
+        </p:txBody>
+      </p:sp>
+      <p:pic>
+        <p:nvPicPr>
+          <p:cNvPr id="10" name="Picture 9">
+            <a:extLst>
+              <a:ext uri="{FF2B5EF4-FFF2-40B4-BE49-F238E27FC236}">
+                <a16:creationId xmlns:a16="http://schemas.microsoft.com/office/drawing/2014/main" id="{172DE95A-6DFC-3BE5-C068-E28E3F303199}"/>
+              </a:ext>
+            </a:extLst>
+          </p:cNvPr>
+          <p:cNvPicPr>
+            <a:picLocks noChangeAspect="1"/>
+          </p:cNvPicPr>
+          <p:nvPr/>
+        </p:nvPicPr>
+        <p:blipFill>
+          <a:blip r:embed="rId3"/>
+          <a:stretch>
+            <a:fillRect/>
+          </a:stretch>
+        </p:blipFill>
+        <p:spPr>
+          <a:xfrm>
+            <a:off x="648792" y="2992820"/>
+            <a:ext cx="4735663" cy="872359"/>
+          </a:xfrm>
+          <a:prstGeom prst="rect">
+            <a:avLst/>
+          </a:prstGeom>
+        </p:spPr>
+      </p:pic>
+      <p:pic>
+        <p:nvPicPr>
+          <p:cNvPr id="12" name="Picture 11">
+            <a:extLst>
+              <a:ext uri="{FF2B5EF4-FFF2-40B4-BE49-F238E27FC236}">
+                <a16:creationId xmlns:a16="http://schemas.microsoft.com/office/drawing/2014/main" id="{92567DAF-0E18-5AC1-6C23-23908C85AEAA}"/>
+              </a:ext>
+            </a:extLst>
+          </p:cNvPr>
+          <p:cNvPicPr>
+            <a:picLocks noChangeAspect="1"/>
+          </p:cNvPicPr>
+          <p:nvPr/>
+        </p:nvPicPr>
+        <p:blipFill>
+          <a:blip r:embed="rId4"/>
+          <a:stretch>
+            <a:fillRect/>
+          </a:stretch>
+        </p:blipFill>
+        <p:spPr>
+          <a:xfrm>
+            <a:off x="667467" y="4927906"/>
+            <a:ext cx="4563112" cy="1028844"/>
+          </a:xfrm>
+          <a:prstGeom prst="rect">
+            <a:avLst/>
+          </a:prstGeom>
+        </p:spPr>
+      </p:pic>
+      <p:sp>
+        <p:nvSpPr>
+          <p:cNvPr id="14" name="TextBox 13">
+            <a:extLst>
+              <a:ext uri="{FF2B5EF4-FFF2-40B4-BE49-F238E27FC236}">
+                <a16:creationId xmlns:a16="http://schemas.microsoft.com/office/drawing/2014/main" id="{E6DB08A0-2D4B-4D57-3ECE-002872783D54}"/>
+              </a:ext>
+            </a:extLst>
+          </p:cNvPr>
+          <p:cNvSpPr txBox="1"/>
+          <p:nvPr/>
+        </p:nvSpPr>
+        <p:spPr>
+          <a:xfrm>
+            <a:off x="648792" y="2409351"/>
+            <a:ext cx="1924287" cy="369332"/>
+          </a:xfrm>
+          <a:prstGeom prst="rect">
+            <a:avLst/>
+          </a:prstGeom>
+          <a:noFill/>
+        </p:spPr>
+        <p:txBody>
+          <a:bodyPr wrap="square" rtlCol="0">
+            <a:spAutoFit/>
+          </a:bodyPr>
+          <a:lstStyle/>
+          <a:p>
+            <a:r>
+              <a:rPr lang="en-US" dirty="0"/>
+              <a:t>Controller class:</a:t>
+            </a:r>
+          </a:p>
+        </p:txBody>
+      </p:sp>
+      <p:sp>
+        <p:nvSpPr>
+          <p:cNvPr id="16" name="TextBox 15">
+            <a:extLst>
+              <a:ext uri="{FF2B5EF4-FFF2-40B4-BE49-F238E27FC236}">
+                <a16:creationId xmlns:a16="http://schemas.microsoft.com/office/drawing/2014/main" id="{C293371D-2B70-A91B-82FE-17E9C52A2074}"/>
+              </a:ext>
+            </a:extLst>
+          </p:cNvPr>
+          <p:cNvSpPr txBox="1"/>
+          <p:nvPr/>
+        </p:nvSpPr>
+        <p:spPr>
+          <a:xfrm>
+            <a:off x="581192" y="4390551"/>
+            <a:ext cx="1924287" cy="369332"/>
+          </a:xfrm>
+          <a:prstGeom prst="rect">
+            <a:avLst/>
+          </a:prstGeom>
+          <a:noFill/>
+        </p:spPr>
+        <p:txBody>
+          <a:bodyPr wrap="square" rtlCol="0">
+            <a:spAutoFit/>
+          </a:bodyPr>
+          <a:lstStyle/>
+          <a:p>
+            <a:r>
+              <a:rPr lang="en-US" dirty="0"/>
+              <a:t>Service class:</a:t>
+            </a:r>
+          </a:p>
+        </p:txBody>
+      </p:sp>
+    </p:spTree>
+    <p:extLst>
+      <p:ext uri="{BB962C8B-B14F-4D97-AF65-F5344CB8AC3E}">
+        <p14:creationId xmlns:p14="http://schemas.microsoft.com/office/powerpoint/2010/main" val="4278710765"/>
+      </p:ext>
+    </p:extLst>
+  </p:cSld>
+  <p:clrMapOvr>
+    <a:masterClrMapping/>
+  </p:clrMapOvr>
+</p:sld>
+</file>
+
+<file path=ppt/slides/slide19.xml><?xml version="1.0" encoding="utf-8"?>
+<p:sld xmlns:a="http://schemas.openxmlformats.org/drawingml/2006/main" xmlns:r="http://schemas.openxmlformats.org/officeDocument/2006/relationships" xmlns:p="http://schemas.openxmlformats.org/presentationml/2006/main">
+  <p:cSld>
+    <p:spTree>
+      <p:nvGrpSpPr>
+        <p:cNvPr id="1" name=""/>
+        <p:cNvGrpSpPr/>
+        <p:nvPr/>
+      </p:nvGrpSpPr>
+      <p:grpSpPr>
+        <a:xfrm>
+          <a:off x="0" y="0"/>
+          <a:ext cx="0" cy="0"/>
+          <a:chOff x="0" y="0"/>
+          <a:chExt cx="0" cy="0"/>
+        </a:xfrm>
+      </p:grpSpPr>
+      <p:sp>
+        <p:nvSpPr>
+          <p:cNvPr id="2" name="Title 1">
+            <a:extLst>
+              <a:ext uri="{FF2B5EF4-FFF2-40B4-BE49-F238E27FC236}">
+                <a16:creationId xmlns:a16="http://schemas.microsoft.com/office/drawing/2014/main" id="{EB1DDCDF-55CB-C62E-6939-77DDD93BFA14}"/>
+              </a:ext>
+            </a:extLst>
+          </p:cNvPr>
+          <p:cNvSpPr>
+            <a:spLocks noGrp="1"/>
+          </p:cNvSpPr>
+          <p:nvPr>
+            <p:ph type="title"/>
+          </p:nvPr>
+        </p:nvSpPr>
+        <p:spPr/>
+        <p:txBody>
+          <a:bodyPr/>
+          <a:lstStyle/>
+          <a:p>
+            <a:r>
+              <a:rPr lang="en-US" dirty="0" err="1"/>
+              <a:t>JpaRepository</a:t>
+            </a:r>
+            <a:endParaRPr lang="en-US" dirty="0"/>
+          </a:p>
+        </p:txBody>
+      </p:sp>
+      <p:sp>
+        <p:nvSpPr>
+          <p:cNvPr id="3" name="Content Placeholder 2">
+            <a:extLst>
+              <a:ext uri="{FF2B5EF4-FFF2-40B4-BE49-F238E27FC236}">
+                <a16:creationId xmlns:a16="http://schemas.microsoft.com/office/drawing/2014/main" id="{3D594618-54E1-D55F-6C53-13C346075163}"/>
+              </a:ext>
+            </a:extLst>
+          </p:cNvPr>
+          <p:cNvSpPr>
+            <a:spLocks noGrp="1"/>
+          </p:cNvSpPr>
+          <p:nvPr>
+            <p:ph idx="1"/>
+          </p:nvPr>
+        </p:nvSpPr>
+        <p:spPr/>
+        <p:txBody>
+          <a:bodyPr/>
+          <a:lstStyle/>
+          <a:p>
+            <a:r>
+              <a:rPr lang="en-US" dirty="0"/>
+              <a:t>Recap: </a:t>
+            </a:r>
+          </a:p>
+          <a:p>
+            <a:pPr lvl="1"/>
+            <a:r>
+              <a:rPr lang="en-US" dirty="0" err="1"/>
+              <a:t>EntityManager</a:t>
+            </a:r>
+            <a:r>
+              <a:rPr lang="en-US" dirty="0"/>
+              <a:t> is one API to interact with our database, it has a lower level of abstraction and thus, more control</a:t>
+            </a:r>
+          </a:p>
+          <a:p>
+            <a:pPr lvl="1"/>
+            <a:r>
+              <a:rPr lang="en-US" dirty="0" err="1"/>
+              <a:t>JpaRepositry</a:t>
+            </a:r>
+            <a:r>
+              <a:rPr lang="en-US" dirty="0"/>
+              <a:t> is another API to interact with our database, it has a higher level of abstraction and thus, less control</a:t>
+            </a:r>
+          </a:p>
+          <a:p>
+            <a:endParaRPr lang="en-US" dirty="0"/>
+          </a:p>
+          <a:p>
+            <a:r>
+              <a:rPr lang="en-US" dirty="0"/>
+              <a:t>Benefits of </a:t>
+            </a:r>
+            <a:r>
+              <a:rPr lang="en-US" dirty="0" err="1"/>
+              <a:t>JpaRepository</a:t>
+            </a:r>
+            <a:r>
+              <a:rPr lang="en-US" dirty="0"/>
+              <a:t>:</a:t>
+            </a:r>
+          </a:p>
+          <a:p>
+            <a:pPr lvl="1"/>
+            <a:r>
+              <a:rPr lang="en-US" dirty="0"/>
+              <a:t>We simply create an interface that extends </a:t>
+            </a:r>
+            <a:r>
+              <a:rPr lang="en-US" dirty="0" err="1"/>
+              <a:t>JpaRepository</a:t>
+            </a:r>
+            <a:r>
+              <a:rPr lang="en-US" dirty="0"/>
+              <a:t>, and then we get CRUD methods out of the box</a:t>
+            </a:r>
+          </a:p>
+          <a:p>
+            <a:pPr lvl="1"/>
+            <a:r>
+              <a:rPr lang="en-US" dirty="0"/>
+              <a:t>E.g. before we had: Service </a:t>
+            </a:r>
+            <a:r>
+              <a:rPr lang="en-US" dirty="0">
+                <a:sym typeface="Wingdings" panose="05000000000000000000" pitchFamily="2" charset="2"/>
+              </a:rPr>
+              <a:t></a:t>
+            </a:r>
+            <a:r>
+              <a:rPr lang="en-US" dirty="0"/>
+              <a:t> </a:t>
+            </a:r>
+            <a:r>
+              <a:rPr lang="en-US" dirty="0" err="1"/>
+              <a:t>DAOInterface</a:t>
+            </a:r>
+            <a:r>
+              <a:rPr lang="en-US" dirty="0"/>
+              <a:t> </a:t>
+            </a:r>
+            <a:r>
+              <a:rPr lang="en-US" dirty="0">
+                <a:sym typeface="Wingdings" panose="05000000000000000000" pitchFamily="2" charset="2"/>
+              </a:rPr>
+              <a:t> Concretion (We had to write boilerplate here for CRUD)</a:t>
+            </a:r>
+          </a:p>
+          <a:p>
+            <a:pPr lvl="1"/>
+            <a:r>
+              <a:rPr lang="en-US" dirty="0">
+                <a:sym typeface="Wingdings" panose="05000000000000000000" pitchFamily="2" charset="2"/>
+              </a:rPr>
+              <a:t>Now we will have: Service  </a:t>
+            </a:r>
+            <a:r>
+              <a:rPr lang="en-US" dirty="0" err="1">
+                <a:sym typeface="Wingdings" panose="05000000000000000000" pitchFamily="2" charset="2"/>
+              </a:rPr>
+              <a:t>RepoInterface</a:t>
+            </a:r>
+            <a:r>
+              <a:rPr lang="en-US" dirty="0">
+                <a:sym typeface="Wingdings" panose="05000000000000000000" pitchFamily="2" charset="2"/>
+              </a:rPr>
+              <a:t> that extends </a:t>
+            </a:r>
+            <a:r>
+              <a:rPr lang="en-US" dirty="0" err="1">
+                <a:sym typeface="Wingdings" panose="05000000000000000000" pitchFamily="2" charset="2"/>
+              </a:rPr>
+              <a:t>JpaRepository</a:t>
+            </a:r>
+            <a:r>
+              <a:rPr lang="en-US" dirty="0">
+                <a:sym typeface="Wingdings" panose="05000000000000000000" pitchFamily="2" charset="2"/>
+              </a:rPr>
+              <a:t> </a:t>
+            </a:r>
+          </a:p>
+          <a:p>
+            <a:pPr lvl="1"/>
+            <a:r>
+              <a:rPr lang="en-US" dirty="0">
+                <a:sym typeface="Wingdings" panose="05000000000000000000" pitchFamily="2" charset="2"/>
+              </a:rPr>
+              <a:t>No extra code required for common CRUD tasks! </a:t>
+            </a:r>
+            <a:endParaRPr lang="en-US" dirty="0"/>
+          </a:p>
+        </p:txBody>
+      </p:sp>
+    </p:spTree>
+    <p:extLst>
+      <p:ext uri="{BB962C8B-B14F-4D97-AF65-F5344CB8AC3E}">
+        <p14:creationId xmlns:p14="http://schemas.microsoft.com/office/powerpoint/2010/main" val="277777434"/>
+      </p:ext>
+    </p:extLst>
+  </p:cSld>
+  <p:clrMapOvr>
+    <a:masterClrMapping/>
+  </p:clrMapOvr>
+</p:sld>
+</file>
+
+<file path=ppt/slides/slide2.xml><?xml version="1.0" encoding="utf-8"?>
+<p:sld xmlns:a="http://schemas.openxmlformats.org/drawingml/2006/main" xmlns:r="http://schemas.openxmlformats.org/officeDocument/2006/relationships" xmlns:p="http://schemas.openxmlformats.org/presentationml/2006/main">
+  <p:cSld>
+    <p:spTree>
+      <p:nvGrpSpPr>
+        <p:cNvPr id="1" name=""/>
+        <p:cNvGrpSpPr/>
+        <p:nvPr/>
+      </p:nvGrpSpPr>
+      <p:grpSpPr>
+        <a:xfrm>
+          <a:off x="0" y="0"/>
+          <a:ext cx="0" cy="0"/>
+          <a:chOff x="0" y="0"/>
+          <a:chExt cx="0" cy="0"/>
+        </a:xfrm>
+      </p:grpSpPr>
+      <p:sp>
+        <p:nvSpPr>
+          <p:cNvPr id="2" name="Title 1">
+            <a:extLst>
+              <a:ext uri="{FF2B5EF4-FFF2-40B4-BE49-F238E27FC236}">
+                <a16:creationId xmlns:a16="http://schemas.microsoft.com/office/drawing/2014/main" id="{41E12A36-4588-5F59-79E8-D52E4D63C35F}"/>
+              </a:ext>
+            </a:extLst>
+          </p:cNvPr>
+          <p:cNvSpPr>
+            <a:spLocks noGrp="1"/>
+          </p:cNvSpPr>
+          <p:nvPr>
+            <p:ph type="title"/>
+          </p:nvPr>
+        </p:nvSpPr>
+        <p:spPr/>
+        <p:txBody>
+          <a:bodyPr/>
+          <a:lstStyle/>
+          <a:p>
+            <a:r>
+              <a:rPr lang="en-US" dirty="0"/>
+              <a:t>What is hibernate?</a:t>
+            </a:r>
+          </a:p>
+        </p:txBody>
+      </p:sp>
+      <p:sp>
+        <p:nvSpPr>
+          <p:cNvPr id="3" name="Content Placeholder 2">
+            <a:extLst>
+              <a:ext uri="{FF2B5EF4-FFF2-40B4-BE49-F238E27FC236}">
+                <a16:creationId xmlns:a16="http://schemas.microsoft.com/office/drawing/2014/main" id="{27AFFFA9-069D-DDF5-94A0-23E98E258204}"/>
+              </a:ext>
+            </a:extLst>
+          </p:cNvPr>
+          <p:cNvSpPr>
+            <a:spLocks noGrp="1"/>
+          </p:cNvSpPr>
+          <p:nvPr>
+            <p:ph idx="1"/>
+          </p:nvPr>
+        </p:nvSpPr>
+        <p:spPr>
+          <a:xfrm>
+            <a:off x="581192" y="2180496"/>
+            <a:ext cx="11029615" cy="2859337"/>
+          </a:xfrm>
+        </p:spPr>
+        <p:txBody>
+          <a:bodyPr>
+            <a:normAutofit fontScale="92500" lnSpcReduction="20000"/>
+          </a:bodyPr>
+          <a:lstStyle/>
+          <a:p>
+            <a:r>
+              <a:rPr lang="en-US" dirty="0"/>
+              <a:t>A framework for saving /persisting java objects in a database</a:t>
+            </a:r>
+          </a:p>
+          <a:p>
+            <a:r>
+              <a:rPr lang="en-US" b="1" dirty="0"/>
+              <a:t>Object-Relational Mapping (ORM):</a:t>
+            </a:r>
+            <a:r>
+              <a:rPr lang="en-US" dirty="0"/>
+              <a:t> Bridges the gap between the object-oriented world of Java and the relational world of SQL databases. It allows developers to store and retrieve Java objects directly as database tables and rows without writing complex, boilerplate SQL queries.</a:t>
+            </a:r>
+          </a:p>
+          <a:p>
+            <a:pPr lvl="1"/>
+            <a:r>
+              <a:rPr lang="en-US" b="1" dirty="0"/>
+              <a:t>Productivity Boost:</a:t>
+            </a:r>
+            <a:r>
+              <a:rPr lang="en-US" dirty="0"/>
+              <a:t> Eliminates massive amounts of tedious JDBC code, connection management, and manual result-set mapping.</a:t>
+            </a:r>
+          </a:p>
+          <a:p>
+            <a:pPr lvl="1"/>
+            <a:r>
+              <a:rPr lang="en-US" b="1" dirty="0"/>
+              <a:t>Database Independence:</a:t>
+            </a:r>
+            <a:r>
+              <a:rPr lang="en-US" dirty="0"/>
+              <a:t> By abstracting SQL dialects, Hibernate allows your application to switch underlying databases with minimal configuration changes.</a:t>
+            </a:r>
+          </a:p>
+          <a:p>
+            <a:pPr lvl="1"/>
+            <a:r>
+              <a:rPr lang="en-US" b="1" dirty="0"/>
+              <a:t>Built-in Caching:</a:t>
+            </a:r>
+            <a:r>
+              <a:rPr lang="en-US" dirty="0"/>
+              <a:t> Features a first-level cache (associated with the Session) and an optional second-level cache (shared across sessions) to significantly reduce database round-trips and improve performance.</a:t>
+            </a:r>
+          </a:p>
+          <a:p>
+            <a:pPr lvl="1"/>
+            <a:r>
+              <a:rPr lang="en-US" b="1" dirty="0"/>
+              <a:t>Automatic Transaction Management:</a:t>
+            </a:r>
+            <a:r>
+              <a:rPr lang="en-US" dirty="0"/>
+              <a:t> Handles database transactions and connection pooling efficiently, ensuring data integrity.</a:t>
+            </a:r>
+          </a:p>
+          <a:p>
+            <a:endParaRPr lang="en-US" dirty="0"/>
+          </a:p>
+        </p:txBody>
+      </p:sp>
+      <p:pic>
+        <p:nvPicPr>
+          <p:cNvPr id="7" name="Picture 6">
+            <a:extLst>
+              <a:ext uri="{FF2B5EF4-FFF2-40B4-BE49-F238E27FC236}">
+                <a16:creationId xmlns:a16="http://schemas.microsoft.com/office/drawing/2014/main" id="{DA5C0503-D2A8-4E1B-DA9A-63E949012BEB}"/>
+              </a:ext>
+            </a:extLst>
+          </p:cNvPr>
+          <p:cNvPicPr>
+            <a:picLocks noChangeAspect="1"/>
+          </p:cNvPicPr>
+          <p:nvPr/>
+        </p:nvPicPr>
+        <p:blipFill>
+          <a:blip r:embed="rId2"/>
+          <a:stretch>
+            <a:fillRect/>
+          </a:stretch>
+        </p:blipFill>
+        <p:spPr>
+          <a:xfrm>
+            <a:off x="2375967" y="4868462"/>
+            <a:ext cx="7440063" cy="1609950"/>
+          </a:xfrm>
+          <a:prstGeom prst="rect">
+            <a:avLst/>
+          </a:prstGeom>
+        </p:spPr>
+      </p:pic>
+    </p:spTree>
+    <p:extLst>
+      <p:ext uri="{BB962C8B-B14F-4D97-AF65-F5344CB8AC3E}">
+        <p14:creationId xmlns:p14="http://schemas.microsoft.com/office/powerpoint/2010/main" val="1508837499"/>
+      </p:ext>
+    </p:extLst>
+  </p:cSld>
+  <p:clrMapOvr>
+    <a:masterClrMapping/>
+  </p:clrMapOvr>
+</p:sld>
+</file>
+
+<file path=ppt/slides/slide20.xml><?xml version="1.0" encoding="utf-8"?>
+<p:sld xmlns:a="http://schemas.openxmlformats.org/drawingml/2006/main" xmlns:r="http://schemas.openxmlformats.org/officeDocument/2006/relationships" xmlns:p="http://schemas.openxmlformats.org/presentationml/2006/main">
+  <p:cSld>
+    <p:spTree>
+      <p:nvGrpSpPr>
+        <p:cNvPr id="1" name=""/>
+        <p:cNvGrpSpPr/>
+        <p:nvPr/>
+      </p:nvGrpSpPr>
+      <p:grpSpPr>
+        <a:xfrm>
+          <a:off x="0" y="0"/>
+          <a:ext cx="0" cy="0"/>
+          <a:chOff x="0" y="0"/>
+          <a:chExt cx="0" cy="0"/>
+        </a:xfrm>
+      </p:grpSpPr>
+      <p:sp>
+        <p:nvSpPr>
+          <p:cNvPr id="2" name="Title 1">
+            <a:extLst>
+              <a:ext uri="{FF2B5EF4-FFF2-40B4-BE49-F238E27FC236}">
+                <a16:creationId xmlns:a16="http://schemas.microsoft.com/office/drawing/2014/main" id="{6A08D4C1-7990-05A1-CF4B-E74922DFDDD9}"/>
+              </a:ext>
+            </a:extLst>
+          </p:cNvPr>
+          <p:cNvSpPr>
+            <a:spLocks noGrp="1"/>
+          </p:cNvSpPr>
+          <p:nvPr>
+            <p:ph type="title"/>
+          </p:nvPr>
+        </p:nvSpPr>
+        <p:spPr/>
+        <p:txBody>
+          <a:bodyPr/>
+          <a:lstStyle/>
+          <a:p>
+            <a:r>
+              <a:rPr lang="en-US" dirty="0" err="1"/>
+              <a:t>Jparepository</a:t>
+            </a:r>
+            <a:r>
+              <a:rPr lang="en-US" dirty="0"/>
+              <a:t> – out-of-the-box methods</a:t>
+            </a:r>
+          </a:p>
+        </p:txBody>
+      </p:sp>
+      <p:graphicFrame>
+        <p:nvGraphicFramePr>
+          <p:cNvPr id="8" name="Table 7">
+            <a:extLst>
+              <a:ext uri="{FF2B5EF4-FFF2-40B4-BE49-F238E27FC236}">
+                <a16:creationId xmlns:a16="http://schemas.microsoft.com/office/drawing/2014/main" id="{6B5095AD-186A-4927-6C4E-7CDEBB977511}"/>
+              </a:ext>
+            </a:extLst>
+          </p:cNvPr>
+          <p:cNvGraphicFramePr>
+            <a:graphicFrameLocks noGrp="1"/>
+          </p:cNvGraphicFramePr>
+          <p:nvPr>
+            <p:extLst>
+              <p:ext uri="{D42A27DB-BD31-4B8C-83A1-F6EECF244321}">
+                <p14:modId xmlns:p14="http://schemas.microsoft.com/office/powerpoint/2010/main" val="2946580001"/>
+              </p:ext>
+            </p:extLst>
+          </p:nvPr>
+        </p:nvGraphicFramePr>
+        <p:xfrm>
+          <a:off x="1458322" y="2104836"/>
+          <a:ext cx="9275356" cy="4180016"/>
+        </p:xfrm>
+        <a:graphic>
+          <a:graphicData uri="http://schemas.openxmlformats.org/drawingml/2006/table">
+            <a:tbl>
+              <a:tblPr>
+                <a:tableStyleId>{5C22544A-7EE6-4342-B048-85BDC9FD1C3A}</a:tableStyleId>
+              </a:tblPr>
+              <a:tblGrid>
+                <a:gridCol w="2318839">
+                  <a:extLst>
+                    <a:ext uri="{9D8B030D-6E8A-4147-A177-3AD203B41FA5}">
+                      <a16:colId xmlns:a16="http://schemas.microsoft.com/office/drawing/2014/main" val="3938241541"/>
+                    </a:ext>
+                  </a:extLst>
+                </a:gridCol>
+                <a:gridCol w="2318839">
+                  <a:extLst>
+                    <a:ext uri="{9D8B030D-6E8A-4147-A177-3AD203B41FA5}">
+                      <a16:colId xmlns:a16="http://schemas.microsoft.com/office/drawing/2014/main" val="457960114"/>
+                    </a:ext>
+                  </a:extLst>
+                </a:gridCol>
+                <a:gridCol w="2318839">
+                  <a:extLst>
+                    <a:ext uri="{9D8B030D-6E8A-4147-A177-3AD203B41FA5}">
+                      <a16:colId xmlns:a16="http://schemas.microsoft.com/office/drawing/2014/main" val="2275564418"/>
+                    </a:ext>
+                  </a:extLst>
+                </a:gridCol>
+                <a:gridCol w="2318839">
+                  <a:extLst>
+                    <a:ext uri="{9D8B030D-6E8A-4147-A177-3AD203B41FA5}">
+                      <a16:colId xmlns:a16="http://schemas.microsoft.com/office/drawing/2014/main" val="2627583357"/>
+                    </a:ext>
+                  </a:extLst>
+                </a:gridCol>
+              </a:tblGrid>
+              <a:tr h="450112">
+                <a:tc>
+                  <a:txBody>
+                    <a:bodyPr/>
+                    <a:lstStyle/>
+                    <a:p>
+                      <a:pPr marL="0" marR="0" algn="l">
+                        <a:buNone/>
+                      </a:pPr>
+                      <a:r>
+                        <a:rPr lang="en-US" sz="1600" b="1" dirty="0">
+                          <a:effectLst/>
+                        </a:rPr>
+                        <a:t>Method</a:t>
+                      </a:r>
+                      <a:endParaRPr lang="en-US" sz="1600" b="1" i="0" dirty="0">
+                        <a:solidFill>
+                          <a:srgbClr val="FFFFFF"/>
+                        </a:solidFill>
+                        <a:effectLst/>
+                        <a:latin typeface="-apple-system-body"/>
+                      </a:endParaRPr>
+                    </a:p>
+                  </a:txBody>
+                  <a:tcPr anchor="ctr"/>
+                </a:tc>
+                <a:tc>
+                  <a:txBody>
+                    <a:bodyPr/>
+                    <a:lstStyle/>
+                    <a:p>
+                      <a:pPr marL="0" marR="0" algn="l">
+                        <a:buNone/>
+                      </a:pPr>
+                      <a:r>
+                        <a:rPr lang="en-US" sz="1600" b="1">
+                          <a:effectLst/>
+                        </a:rPr>
+                        <a:t>Parameters</a:t>
+                      </a:r>
+                      <a:endParaRPr lang="en-US" sz="1600" b="1" i="0">
+                        <a:solidFill>
+                          <a:srgbClr val="FFFFFF"/>
+                        </a:solidFill>
+                        <a:effectLst/>
+                        <a:latin typeface="-apple-system-body"/>
+                      </a:endParaRPr>
+                    </a:p>
+                  </a:txBody>
+                  <a:tcPr anchor="ctr"/>
+                </a:tc>
+                <a:tc>
+                  <a:txBody>
+                    <a:bodyPr/>
+                    <a:lstStyle/>
+                    <a:p>
+                      <a:pPr marL="0" marR="0" algn="l">
+                        <a:buNone/>
+                      </a:pPr>
+                      <a:r>
+                        <a:rPr lang="en-US" sz="1600" b="1">
+                          <a:effectLst/>
+                        </a:rPr>
+                        <a:t>Return type</a:t>
+                      </a:r>
+                      <a:endParaRPr lang="en-US" sz="1600" b="1" i="0">
+                        <a:solidFill>
+                          <a:srgbClr val="FFFFFF"/>
+                        </a:solidFill>
+                        <a:effectLst/>
+                        <a:latin typeface="-apple-system-body"/>
+                      </a:endParaRPr>
+                    </a:p>
+                  </a:txBody>
+                  <a:tcPr anchor="ctr"/>
+                </a:tc>
+                <a:tc>
+                  <a:txBody>
+                    <a:bodyPr/>
+                    <a:lstStyle/>
+                    <a:p>
+                      <a:pPr marL="0" marR="0" algn="l">
+                        <a:buNone/>
+                      </a:pPr>
+                      <a:r>
+                        <a:rPr lang="en-US" sz="1600" b="1" dirty="0">
+                          <a:effectLst/>
+                        </a:rPr>
+                        <a:t>What it does</a:t>
+                      </a:r>
+                      <a:endParaRPr lang="en-US" sz="1600" b="1" i="0" dirty="0">
+                        <a:solidFill>
+                          <a:srgbClr val="FFFFFF"/>
+                        </a:solidFill>
+                        <a:effectLst/>
+                        <a:latin typeface="-apple-system-body"/>
+                      </a:endParaRPr>
+                    </a:p>
+                  </a:txBody>
+                  <a:tcPr anchor="ctr"/>
+                </a:tc>
+                <a:extLst>
+                  <a:ext uri="{0D108BD9-81ED-4DB2-BD59-A6C34878D82A}">
+                    <a16:rowId xmlns:a16="http://schemas.microsoft.com/office/drawing/2014/main" val="507458088"/>
+                  </a:ext>
+                </a:extLst>
+              </a:tr>
+              <a:tr h="450112">
+                <a:tc>
+                  <a:txBody>
+                    <a:bodyPr/>
+                    <a:lstStyle/>
+                    <a:p>
+                      <a:pPr marL="0" marR="0" algn="l">
+                        <a:buNone/>
+                      </a:pPr>
+                      <a:r>
+                        <a:rPr lang="en-US" sz="1600" dirty="0" err="1">
+                          <a:effectLst/>
+                        </a:rPr>
+                        <a:t>existsById</a:t>
+                      </a:r>
+                      <a:r>
+                        <a:rPr lang="en-US" sz="1600" dirty="0">
+                          <a:effectLst/>
+                        </a:rPr>
+                        <a:t>(123)</a:t>
+                      </a:r>
+                      <a:endParaRPr lang="en-US" sz="1600" b="0" i="0" dirty="0">
+                        <a:solidFill>
+                          <a:srgbClr val="FFFFFF"/>
+                        </a:solidFill>
+                        <a:effectLst/>
+                        <a:latin typeface="-apple-system-body"/>
+                      </a:endParaRPr>
+                    </a:p>
+                  </a:txBody>
+                  <a:tcPr anchor="ctr"/>
+                </a:tc>
+                <a:tc>
+                  <a:txBody>
+                    <a:bodyPr/>
+                    <a:lstStyle/>
+                    <a:p>
+                      <a:pPr marL="0" marR="0" algn="l">
+                        <a:buNone/>
+                      </a:pPr>
+                      <a:r>
+                        <a:rPr lang="en-US" sz="1600">
+                          <a:effectLst/>
+                        </a:rPr>
+                        <a:t>Integer id</a:t>
+                      </a:r>
+                      <a:endParaRPr lang="en-US" sz="1600" b="0" i="0">
+                        <a:solidFill>
+                          <a:srgbClr val="FFFFFF"/>
+                        </a:solidFill>
+                        <a:effectLst/>
+                        <a:latin typeface="-apple-system-body"/>
+                      </a:endParaRPr>
+                    </a:p>
+                  </a:txBody>
+                  <a:tcPr anchor="ctr"/>
+                </a:tc>
+                <a:tc>
+                  <a:txBody>
+                    <a:bodyPr/>
+                    <a:lstStyle/>
+                    <a:p>
+                      <a:pPr marL="0" marR="0" algn="l">
+                        <a:buNone/>
+                      </a:pPr>
+                      <a:r>
+                        <a:rPr lang="en-US" sz="1600">
+                          <a:effectLst/>
+                        </a:rPr>
+                        <a:t>boolean</a:t>
+                      </a:r>
+                      <a:endParaRPr lang="en-US" sz="1600" b="0" i="0">
+                        <a:solidFill>
+                          <a:srgbClr val="FFFFFF"/>
+                        </a:solidFill>
+                        <a:effectLst/>
+                        <a:latin typeface="-apple-system-body"/>
+                      </a:endParaRPr>
+                    </a:p>
+                  </a:txBody>
+                  <a:tcPr anchor="ctr"/>
+                </a:tc>
+                <a:tc>
+                  <a:txBody>
+                    <a:bodyPr/>
+                    <a:lstStyle/>
+                    <a:p>
+                      <a:pPr marL="0" marR="0" algn="l">
+                        <a:buNone/>
+                      </a:pPr>
+                      <a:r>
+                        <a:rPr lang="en-US" sz="1600">
+                          <a:effectLst/>
+                        </a:rPr>
+                        <a:t>Checks whether a record exists</a:t>
+                      </a:r>
+                      <a:endParaRPr lang="en-US" sz="1600" b="0" i="0">
+                        <a:solidFill>
+                          <a:srgbClr val="FFFFFF"/>
+                        </a:solidFill>
+                        <a:effectLst/>
+                        <a:latin typeface="-apple-system-body"/>
+                      </a:endParaRPr>
+                    </a:p>
+                  </a:txBody>
+                  <a:tcPr anchor="ctr"/>
+                </a:tc>
+                <a:extLst>
+                  <a:ext uri="{0D108BD9-81ED-4DB2-BD59-A6C34878D82A}">
+                    <a16:rowId xmlns:a16="http://schemas.microsoft.com/office/drawing/2014/main" val="2324117081"/>
+                  </a:ext>
+                </a:extLst>
+              </a:tr>
+              <a:tr h="450112">
+                <a:tc>
+                  <a:txBody>
+                    <a:bodyPr/>
+                    <a:lstStyle/>
+                    <a:p>
+                      <a:pPr marL="0" marR="0" algn="l">
+                        <a:buNone/>
+                      </a:pPr>
+                      <a:r>
+                        <a:rPr lang="en-US" sz="1600" dirty="0">
+                          <a:effectLst/>
+                        </a:rPr>
+                        <a:t>count()</a:t>
+                      </a:r>
+                      <a:endParaRPr lang="en-US" sz="1600" b="0" i="0" dirty="0">
+                        <a:solidFill>
+                          <a:srgbClr val="FFFFFF"/>
+                        </a:solidFill>
+                        <a:effectLst/>
+                        <a:latin typeface="-apple-system-body"/>
+                      </a:endParaRPr>
+                    </a:p>
+                  </a:txBody>
+                  <a:tcPr anchor="ctr"/>
+                </a:tc>
+                <a:tc>
+                  <a:txBody>
+                    <a:bodyPr/>
+                    <a:lstStyle/>
+                    <a:p>
+                      <a:pPr marL="0" marR="0" algn="l">
+                        <a:buNone/>
+                      </a:pPr>
+                      <a:r>
+                        <a:rPr lang="en-US" sz="1600">
+                          <a:effectLst/>
+                        </a:rPr>
+                        <a:t>none</a:t>
+                      </a:r>
+                      <a:endParaRPr lang="en-US" sz="1600" b="0" i="0">
+                        <a:solidFill>
+                          <a:srgbClr val="FFFFFF"/>
+                        </a:solidFill>
+                        <a:effectLst/>
+                        <a:latin typeface="-apple-system-body"/>
+                      </a:endParaRPr>
+                    </a:p>
+                  </a:txBody>
+                  <a:tcPr anchor="ctr"/>
+                </a:tc>
+                <a:tc>
+                  <a:txBody>
+                    <a:bodyPr/>
+                    <a:lstStyle/>
+                    <a:p>
+                      <a:pPr marL="0" marR="0" algn="l">
+                        <a:buNone/>
+                      </a:pPr>
+                      <a:r>
+                        <a:rPr lang="en-US" sz="1600">
+                          <a:effectLst/>
+                        </a:rPr>
+                        <a:t>long</a:t>
+                      </a:r>
+                      <a:endParaRPr lang="en-US" sz="1600" b="0" i="0">
+                        <a:solidFill>
+                          <a:srgbClr val="FFFFFF"/>
+                        </a:solidFill>
+                        <a:effectLst/>
+                        <a:latin typeface="-apple-system-body"/>
+                      </a:endParaRPr>
+                    </a:p>
+                  </a:txBody>
+                  <a:tcPr anchor="ctr"/>
+                </a:tc>
+                <a:tc>
+                  <a:txBody>
+                    <a:bodyPr/>
+                    <a:lstStyle/>
+                    <a:p>
+                      <a:pPr marL="0" marR="0" algn="l">
+                        <a:buNone/>
+                      </a:pPr>
+                      <a:r>
+                        <a:rPr lang="en-US" sz="1600">
+                          <a:effectLst/>
+                        </a:rPr>
+                        <a:t>Counts all records</a:t>
+                      </a:r>
+                      <a:endParaRPr lang="en-US" sz="1600" b="0" i="0">
+                        <a:solidFill>
+                          <a:srgbClr val="FFFFFF"/>
+                        </a:solidFill>
+                        <a:effectLst/>
+                        <a:latin typeface="-apple-system-body"/>
+                      </a:endParaRPr>
+                    </a:p>
+                  </a:txBody>
+                  <a:tcPr anchor="ctr"/>
+                </a:tc>
+                <a:extLst>
+                  <a:ext uri="{0D108BD9-81ED-4DB2-BD59-A6C34878D82A}">
+                    <a16:rowId xmlns:a16="http://schemas.microsoft.com/office/drawing/2014/main" val="3966564883"/>
+                  </a:ext>
+                </a:extLst>
+              </a:tr>
+              <a:tr h="450112">
+                <a:tc>
+                  <a:txBody>
+                    <a:bodyPr/>
+                    <a:lstStyle/>
+                    <a:p>
+                      <a:pPr marL="0" marR="0" algn="l">
+                        <a:buNone/>
+                      </a:pPr>
+                      <a:r>
+                        <a:rPr lang="en-US" sz="1600" dirty="0" err="1">
+                          <a:effectLst/>
+                        </a:rPr>
+                        <a:t>findAll</a:t>
+                      </a:r>
+                      <a:r>
+                        <a:rPr lang="en-US" sz="1600" dirty="0">
+                          <a:effectLst/>
+                        </a:rPr>
+                        <a:t>()</a:t>
+                      </a:r>
+                      <a:endParaRPr lang="en-US" sz="1600" b="0" i="0" dirty="0">
+                        <a:solidFill>
+                          <a:srgbClr val="FFFFFF"/>
+                        </a:solidFill>
+                        <a:effectLst/>
+                        <a:latin typeface="-apple-system-body"/>
+                      </a:endParaRPr>
+                    </a:p>
+                  </a:txBody>
+                  <a:tcPr anchor="ctr"/>
+                </a:tc>
+                <a:tc>
+                  <a:txBody>
+                    <a:bodyPr/>
+                    <a:lstStyle/>
+                    <a:p>
+                      <a:pPr marL="0" marR="0" algn="l">
+                        <a:buNone/>
+                      </a:pPr>
+                      <a:r>
+                        <a:rPr lang="en-US" sz="1600">
+                          <a:effectLst/>
+                        </a:rPr>
+                        <a:t>none</a:t>
+                      </a:r>
+                      <a:endParaRPr lang="en-US" sz="1600" b="0" i="0">
+                        <a:solidFill>
+                          <a:srgbClr val="FFFFFF"/>
+                        </a:solidFill>
+                        <a:effectLst/>
+                        <a:latin typeface="-apple-system-body"/>
+                      </a:endParaRPr>
+                    </a:p>
+                  </a:txBody>
+                  <a:tcPr anchor="ctr"/>
+                </a:tc>
+                <a:tc>
+                  <a:txBody>
+                    <a:bodyPr/>
+                    <a:lstStyle/>
+                    <a:p>
+                      <a:pPr marL="0" marR="0" algn="l">
+                        <a:buNone/>
+                      </a:pPr>
+                      <a:r>
+                        <a:rPr lang="en-US" sz="1600">
+                          <a:effectLst/>
+                        </a:rPr>
+                        <a:t>List&lt;Student&gt;</a:t>
+                      </a:r>
+                      <a:endParaRPr lang="en-US" sz="1600" b="0" i="0">
+                        <a:solidFill>
+                          <a:srgbClr val="FFFFFF"/>
+                        </a:solidFill>
+                        <a:effectLst/>
+                        <a:latin typeface="-apple-system-body"/>
+                      </a:endParaRPr>
+                    </a:p>
+                  </a:txBody>
+                  <a:tcPr anchor="ctr"/>
+                </a:tc>
+                <a:tc>
+                  <a:txBody>
+                    <a:bodyPr/>
+                    <a:lstStyle/>
+                    <a:p>
+                      <a:pPr marL="0" marR="0" algn="l">
+                        <a:buNone/>
+                      </a:pPr>
+                      <a:r>
+                        <a:rPr lang="en-US" sz="1600">
+                          <a:effectLst/>
+                        </a:rPr>
+                        <a:t>Gets all students</a:t>
+                      </a:r>
+                      <a:endParaRPr lang="en-US" sz="1600" b="0" i="0">
+                        <a:solidFill>
+                          <a:srgbClr val="FFFFFF"/>
+                        </a:solidFill>
+                        <a:effectLst/>
+                        <a:latin typeface="-apple-system-body"/>
+                      </a:endParaRPr>
+                    </a:p>
+                  </a:txBody>
+                  <a:tcPr anchor="ctr"/>
+                </a:tc>
+                <a:extLst>
+                  <a:ext uri="{0D108BD9-81ED-4DB2-BD59-A6C34878D82A}">
+                    <a16:rowId xmlns:a16="http://schemas.microsoft.com/office/drawing/2014/main" val="4290804774"/>
+                  </a:ext>
+                </a:extLst>
+              </a:tr>
+              <a:tr h="450112">
+                <a:tc>
+                  <a:txBody>
+                    <a:bodyPr/>
+                    <a:lstStyle/>
+                    <a:p>
+                      <a:pPr marL="0" marR="0" algn="l">
+                        <a:buNone/>
+                      </a:pPr>
+                      <a:r>
+                        <a:rPr lang="en-US" sz="1600" dirty="0" err="1">
+                          <a:effectLst/>
+                        </a:rPr>
+                        <a:t>findById</a:t>
+                      </a:r>
+                      <a:r>
+                        <a:rPr lang="en-US" sz="1600" dirty="0">
+                          <a:effectLst/>
+                        </a:rPr>
+                        <a:t>(123)</a:t>
+                      </a:r>
+                      <a:endParaRPr lang="en-US" sz="1600" b="0" i="0" dirty="0">
+                        <a:solidFill>
+                          <a:srgbClr val="FFFFFF"/>
+                        </a:solidFill>
+                        <a:effectLst/>
+                        <a:latin typeface="-apple-system-body"/>
+                      </a:endParaRPr>
+                    </a:p>
+                  </a:txBody>
+                  <a:tcPr anchor="ctr"/>
+                </a:tc>
+                <a:tc>
+                  <a:txBody>
+                    <a:bodyPr/>
+                    <a:lstStyle/>
+                    <a:p>
+                      <a:pPr marL="0" marR="0" algn="l">
+                        <a:buNone/>
+                      </a:pPr>
+                      <a:r>
+                        <a:rPr lang="en-US" sz="1600">
+                          <a:effectLst/>
+                        </a:rPr>
+                        <a:t>Integer id</a:t>
+                      </a:r>
+                      <a:endParaRPr lang="en-US" sz="1600" b="0" i="0">
+                        <a:solidFill>
+                          <a:srgbClr val="FFFFFF"/>
+                        </a:solidFill>
+                        <a:effectLst/>
+                        <a:latin typeface="-apple-system-body"/>
+                      </a:endParaRPr>
+                    </a:p>
+                  </a:txBody>
+                  <a:tcPr anchor="ctr"/>
+                </a:tc>
+                <a:tc>
+                  <a:txBody>
+                    <a:bodyPr/>
+                    <a:lstStyle/>
+                    <a:p>
+                      <a:pPr marL="0" marR="0" algn="l">
+                        <a:buNone/>
+                      </a:pPr>
+                      <a:r>
+                        <a:rPr lang="en-US" sz="1600">
+                          <a:effectLst/>
+                        </a:rPr>
+                        <a:t>Optional&lt;Student&gt;</a:t>
+                      </a:r>
+                      <a:endParaRPr lang="en-US" sz="1600" b="0" i="0">
+                        <a:solidFill>
+                          <a:srgbClr val="FFFFFF"/>
+                        </a:solidFill>
+                        <a:effectLst/>
+                        <a:latin typeface="-apple-system-body"/>
+                      </a:endParaRPr>
+                    </a:p>
+                  </a:txBody>
+                  <a:tcPr anchor="ctr"/>
+                </a:tc>
+                <a:tc>
+                  <a:txBody>
+                    <a:bodyPr/>
+                    <a:lstStyle/>
+                    <a:p>
+                      <a:pPr marL="0" marR="0" algn="l">
+                        <a:buNone/>
+                      </a:pPr>
+                      <a:r>
+                        <a:rPr lang="en-US" sz="1600">
+                          <a:effectLst/>
+                        </a:rPr>
+                        <a:t>Gets one student by ID</a:t>
+                      </a:r>
+                      <a:endParaRPr lang="en-US" sz="1600" b="0" i="0">
+                        <a:solidFill>
+                          <a:srgbClr val="FFFFFF"/>
+                        </a:solidFill>
+                        <a:effectLst/>
+                        <a:latin typeface="-apple-system-body"/>
+                      </a:endParaRPr>
+                    </a:p>
+                  </a:txBody>
+                  <a:tcPr anchor="ctr"/>
+                </a:tc>
+                <a:extLst>
+                  <a:ext uri="{0D108BD9-81ED-4DB2-BD59-A6C34878D82A}">
+                    <a16:rowId xmlns:a16="http://schemas.microsoft.com/office/drawing/2014/main" val="3632717524"/>
+                  </a:ext>
+                </a:extLst>
+              </a:tr>
+              <a:tr h="450112">
+                <a:tc>
+                  <a:txBody>
+                    <a:bodyPr/>
+                    <a:lstStyle/>
+                    <a:p>
+                      <a:pPr marL="0" marR="0" algn="l">
+                        <a:buNone/>
+                      </a:pPr>
+                      <a:r>
+                        <a:rPr lang="en-US" sz="1600" dirty="0">
+                          <a:effectLst/>
+                        </a:rPr>
+                        <a:t>save(student)</a:t>
+                      </a:r>
+                      <a:endParaRPr lang="en-US" sz="1600" b="0" i="0" dirty="0">
+                        <a:solidFill>
+                          <a:srgbClr val="FFFFFF"/>
+                        </a:solidFill>
+                        <a:effectLst/>
+                        <a:latin typeface="-apple-system-body"/>
+                      </a:endParaRPr>
+                    </a:p>
+                  </a:txBody>
+                  <a:tcPr anchor="ctr"/>
+                </a:tc>
+                <a:tc>
+                  <a:txBody>
+                    <a:bodyPr/>
+                    <a:lstStyle/>
+                    <a:p>
+                      <a:pPr marL="0" marR="0" algn="l">
+                        <a:buNone/>
+                      </a:pPr>
+                      <a:r>
+                        <a:rPr lang="en-US" sz="1600" dirty="0">
+                          <a:effectLst/>
+                        </a:rPr>
+                        <a:t>Object: Student student</a:t>
+                      </a:r>
+                      <a:endParaRPr lang="en-US" sz="1600" b="0" i="0" dirty="0">
+                        <a:solidFill>
+                          <a:srgbClr val="FFFFFF"/>
+                        </a:solidFill>
+                        <a:effectLst/>
+                        <a:latin typeface="-apple-system-body"/>
+                      </a:endParaRPr>
+                    </a:p>
+                  </a:txBody>
+                  <a:tcPr anchor="ctr"/>
+                </a:tc>
+                <a:tc>
+                  <a:txBody>
+                    <a:bodyPr/>
+                    <a:lstStyle/>
+                    <a:p>
+                      <a:pPr marL="0" marR="0" algn="l">
+                        <a:buNone/>
+                      </a:pPr>
+                      <a:r>
+                        <a:rPr lang="en-US" sz="1600">
+                          <a:effectLst/>
+                        </a:rPr>
+                        <a:t>Student</a:t>
+                      </a:r>
+                      <a:endParaRPr lang="en-US" sz="1600" b="0" i="0">
+                        <a:solidFill>
+                          <a:srgbClr val="FFFFFF"/>
+                        </a:solidFill>
+                        <a:effectLst/>
+                        <a:latin typeface="-apple-system-body"/>
+                      </a:endParaRPr>
+                    </a:p>
+                  </a:txBody>
+                  <a:tcPr anchor="ctr"/>
+                </a:tc>
+                <a:tc>
+                  <a:txBody>
+                    <a:bodyPr/>
+                    <a:lstStyle/>
+                    <a:p>
+                      <a:pPr marL="0" marR="0" algn="l">
+                        <a:buNone/>
+                      </a:pPr>
+                      <a:r>
+                        <a:rPr lang="en-US" sz="1600">
+                          <a:effectLst/>
+                        </a:rPr>
+                        <a:t>Inserts or updates</a:t>
+                      </a:r>
+                      <a:endParaRPr lang="en-US" sz="1600" b="0" i="0">
+                        <a:solidFill>
+                          <a:srgbClr val="FFFFFF"/>
+                        </a:solidFill>
+                        <a:effectLst/>
+                        <a:latin typeface="-apple-system-body"/>
+                      </a:endParaRPr>
+                    </a:p>
+                  </a:txBody>
+                  <a:tcPr anchor="ctr"/>
+                </a:tc>
+                <a:extLst>
+                  <a:ext uri="{0D108BD9-81ED-4DB2-BD59-A6C34878D82A}">
+                    <a16:rowId xmlns:a16="http://schemas.microsoft.com/office/drawing/2014/main" val="818211999"/>
+                  </a:ext>
+                </a:extLst>
+              </a:tr>
+              <a:tr h="450112">
+                <a:tc>
+                  <a:txBody>
+                    <a:bodyPr/>
+                    <a:lstStyle/>
+                    <a:p>
+                      <a:pPr marL="0" marR="0" algn="l">
+                        <a:buNone/>
+                      </a:pPr>
+                      <a:r>
+                        <a:rPr lang="en-US" sz="1600" dirty="0">
+                          <a:effectLst/>
+                        </a:rPr>
+                        <a:t>delete(student)</a:t>
+                      </a:r>
+                      <a:endParaRPr lang="en-US" sz="1600" b="0" i="0" dirty="0">
+                        <a:solidFill>
+                          <a:srgbClr val="FFFFFF"/>
+                        </a:solidFill>
+                        <a:effectLst/>
+                        <a:latin typeface="-apple-system-body"/>
+                      </a:endParaRPr>
+                    </a:p>
+                  </a:txBody>
+                  <a:tcPr anchor="ctr"/>
+                </a:tc>
+                <a:tc>
+                  <a:txBody>
+                    <a:bodyPr/>
+                    <a:lstStyle/>
+                    <a:p>
+                      <a:pPr marL="0" marR="0" algn="l">
+                        <a:buNone/>
+                      </a:pPr>
+                      <a:r>
+                        <a:rPr lang="en-US" sz="1600" dirty="0">
+                          <a:effectLst/>
+                        </a:rPr>
+                        <a:t>Object: Student student</a:t>
+                      </a:r>
+                      <a:endParaRPr lang="en-US" sz="1600" b="0" i="0" dirty="0">
+                        <a:solidFill>
+                          <a:srgbClr val="FFFFFF"/>
+                        </a:solidFill>
+                        <a:effectLst/>
+                        <a:latin typeface="-apple-system-body"/>
+                      </a:endParaRPr>
+                    </a:p>
+                  </a:txBody>
+                  <a:tcPr anchor="ctr"/>
+                </a:tc>
+                <a:tc>
+                  <a:txBody>
+                    <a:bodyPr/>
+                    <a:lstStyle/>
+                    <a:p>
+                      <a:pPr marL="0" marR="0" algn="l">
+                        <a:buNone/>
+                      </a:pPr>
+                      <a:r>
+                        <a:rPr lang="en-US" sz="1600">
+                          <a:effectLst/>
+                        </a:rPr>
+                        <a:t>void</a:t>
+                      </a:r>
+                      <a:endParaRPr lang="en-US" sz="1600" b="0" i="0">
+                        <a:solidFill>
+                          <a:srgbClr val="FFFFFF"/>
+                        </a:solidFill>
+                        <a:effectLst/>
+                        <a:latin typeface="-apple-system-body"/>
+                      </a:endParaRPr>
+                    </a:p>
+                  </a:txBody>
+                  <a:tcPr anchor="ctr"/>
+                </a:tc>
+                <a:tc>
+                  <a:txBody>
+                    <a:bodyPr/>
+                    <a:lstStyle/>
+                    <a:p>
+                      <a:pPr marL="0" marR="0" algn="l">
+                        <a:buNone/>
+                      </a:pPr>
+                      <a:r>
+                        <a:rPr lang="en-US" sz="1600">
+                          <a:effectLst/>
+                        </a:rPr>
+                        <a:t>Deletes a student</a:t>
+                      </a:r>
+                      <a:endParaRPr lang="en-US" sz="1600" b="0" i="0">
+                        <a:solidFill>
+                          <a:srgbClr val="FFFFFF"/>
+                        </a:solidFill>
+                        <a:effectLst/>
+                        <a:latin typeface="-apple-system-body"/>
+                      </a:endParaRPr>
+                    </a:p>
+                  </a:txBody>
+                  <a:tcPr anchor="ctr"/>
+                </a:tc>
+                <a:extLst>
+                  <a:ext uri="{0D108BD9-81ED-4DB2-BD59-A6C34878D82A}">
+                    <a16:rowId xmlns:a16="http://schemas.microsoft.com/office/drawing/2014/main" val="1492185488"/>
+                  </a:ext>
+                </a:extLst>
+              </a:tr>
+              <a:tr h="450112">
+                <a:tc>
+                  <a:txBody>
+                    <a:bodyPr/>
+                    <a:lstStyle/>
+                    <a:p>
+                      <a:pPr marL="0" marR="0" algn="l">
+                        <a:buNone/>
+                      </a:pPr>
+                      <a:r>
+                        <a:rPr lang="en-US" sz="1600" dirty="0" err="1">
+                          <a:effectLst/>
+                        </a:rPr>
+                        <a:t>deleteById</a:t>
+                      </a:r>
+                      <a:r>
+                        <a:rPr lang="en-US" sz="1600" dirty="0">
+                          <a:effectLst/>
+                        </a:rPr>
+                        <a:t>(123)</a:t>
+                      </a:r>
+                      <a:endParaRPr lang="en-US" sz="1600" b="0" i="0" dirty="0">
+                        <a:solidFill>
+                          <a:srgbClr val="FFFFFF"/>
+                        </a:solidFill>
+                        <a:effectLst/>
+                        <a:latin typeface="-apple-system-body"/>
+                      </a:endParaRPr>
+                    </a:p>
+                  </a:txBody>
+                  <a:tcPr anchor="ctr"/>
+                </a:tc>
+                <a:tc>
+                  <a:txBody>
+                    <a:bodyPr/>
+                    <a:lstStyle/>
+                    <a:p>
+                      <a:pPr marL="0" marR="0" algn="l">
+                        <a:buNone/>
+                      </a:pPr>
+                      <a:r>
+                        <a:rPr lang="en-US" sz="1600">
+                          <a:effectLst/>
+                        </a:rPr>
+                        <a:t>Integer id</a:t>
+                      </a:r>
+                      <a:endParaRPr lang="en-US" sz="1600" b="0" i="0">
+                        <a:solidFill>
+                          <a:srgbClr val="FFFFFF"/>
+                        </a:solidFill>
+                        <a:effectLst/>
+                        <a:latin typeface="-apple-system-body"/>
+                      </a:endParaRPr>
+                    </a:p>
+                  </a:txBody>
+                  <a:tcPr anchor="ctr"/>
+                </a:tc>
+                <a:tc>
+                  <a:txBody>
+                    <a:bodyPr/>
+                    <a:lstStyle/>
+                    <a:p>
+                      <a:pPr marL="0" marR="0" algn="l">
+                        <a:buNone/>
+                      </a:pPr>
+                      <a:r>
+                        <a:rPr lang="en-US" sz="1600">
+                          <a:effectLst/>
+                        </a:rPr>
+                        <a:t>void</a:t>
+                      </a:r>
+                      <a:endParaRPr lang="en-US" sz="1600" b="0" i="0">
+                        <a:solidFill>
+                          <a:srgbClr val="FFFFFF"/>
+                        </a:solidFill>
+                        <a:effectLst/>
+                        <a:latin typeface="-apple-system-body"/>
+                      </a:endParaRPr>
+                    </a:p>
+                  </a:txBody>
+                  <a:tcPr anchor="ctr"/>
+                </a:tc>
+                <a:tc>
+                  <a:txBody>
+                    <a:bodyPr/>
+                    <a:lstStyle/>
+                    <a:p>
+                      <a:pPr marL="0" marR="0" algn="l">
+                        <a:buNone/>
+                      </a:pPr>
+                      <a:r>
+                        <a:rPr lang="en-US" sz="1600">
+                          <a:effectLst/>
+                        </a:rPr>
+                        <a:t>Deletes by primary key</a:t>
+                      </a:r>
+                      <a:endParaRPr lang="en-US" sz="1600" b="0" i="0">
+                        <a:solidFill>
+                          <a:srgbClr val="FFFFFF"/>
+                        </a:solidFill>
+                        <a:effectLst/>
+                        <a:latin typeface="-apple-system-body"/>
+                      </a:endParaRPr>
+                    </a:p>
+                  </a:txBody>
+                  <a:tcPr anchor="ctr"/>
+                </a:tc>
+                <a:extLst>
+                  <a:ext uri="{0D108BD9-81ED-4DB2-BD59-A6C34878D82A}">
+                    <a16:rowId xmlns:a16="http://schemas.microsoft.com/office/drawing/2014/main" val="2680659024"/>
+                  </a:ext>
+                </a:extLst>
+              </a:tr>
+              <a:tr h="450112">
+                <a:tc>
+                  <a:txBody>
+                    <a:bodyPr/>
+                    <a:lstStyle/>
+                    <a:p>
+                      <a:pPr marL="0" marR="0" algn="l">
+                        <a:buNone/>
+                      </a:pPr>
+                      <a:r>
+                        <a:rPr lang="en-US" sz="1600">
+                          <a:effectLst/>
+                        </a:rPr>
+                        <a:t>deleteAll()</a:t>
+                      </a:r>
+                      <a:endParaRPr lang="en-US" sz="1600" b="0" i="0">
+                        <a:solidFill>
+                          <a:srgbClr val="FFFFFF"/>
+                        </a:solidFill>
+                        <a:effectLst/>
+                        <a:latin typeface="-apple-system-body"/>
+                      </a:endParaRPr>
+                    </a:p>
+                  </a:txBody>
+                  <a:tcPr anchor="ctr"/>
+                </a:tc>
+                <a:tc>
+                  <a:txBody>
+                    <a:bodyPr/>
+                    <a:lstStyle/>
+                    <a:p>
+                      <a:pPr marL="0" marR="0" algn="l">
+                        <a:buNone/>
+                      </a:pPr>
+                      <a:r>
+                        <a:rPr lang="en-US" sz="1600">
+                          <a:effectLst/>
+                        </a:rPr>
+                        <a:t>none</a:t>
+                      </a:r>
+                      <a:endParaRPr lang="en-US" sz="1600" b="0" i="0">
+                        <a:solidFill>
+                          <a:srgbClr val="FFFFFF"/>
+                        </a:solidFill>
+                        <a:effectLst/>
+                        <a:latin typeface="-apple-system-body"/>
+                      </a:endParaRPr>
+                    </a:p>
+                  </a:txBody>
+                  <a:tcPr anchor="ctr"/>
+                </a:tc>
+                <a:tc>
+                  <a:txBody>
+                    <a:bodyPr/>
+                    <a:lstStyle/>
+                    <a:p>
+                      <a:pPr marL="0" marR="0" algn="l">
+                        <a:buNone/>
+                      </a:pPr>
+                      <a:r>
+                        <a:rPr lang="en-US" sz="1600">
+                          <a:effectLst/>
+                        </a:rPr>
+                        <a:t>void</a:t>
+                      </a:r>
+                      <a:endParaRPr lang="en-US" sz="1600" b="0" i="0">
+                        <a:solidFill>
+                          <a:srgbClr val="FFFFFF"/>
+                        </a:solidFill>
+                        <a:effectLst/>
+                        <a:latin typeface="-apple-system-body"/>
+                      </a:endParaRPr>
+                    </a:p>
+                  </a:txBody>
+                  <a:tcPr anchor="ctr"/>
+                </a:tc>
+                <a:tc>
+                  <a:txBody>
+                    <a:bodyPr/>
+                    <a:lstStyle/>
+                    <a:p>
+                      <a:pPr marL="0" marR="0" algn="l">
+                        <a:buNone/>
+                      </a:pPr>
+                      <a:r>
+                        <a:rPr lang="en-US" sz="1600" dirty="0">
+                          <a:effectLst/>
+                        </a:rPr>
+                        <a:t>Deletes all students</a:t>
+                      </a:r>
+                      <a:endParaRPr lang="en-US" sz="1600" b="0" i="0" dirty="0">
+                        <a:solidFill>
+                          <a:srgbClr val="FFFFFF"/>
+                        </a:solidFill>
+                        <a:effectLst/>
+                        <a:latin typeface="-apple-system-body"/>
+                      </a:endParaRPr>
+                    </a:p>
+                  </a:txBody>
+                  <a:tcPr anchor="ctr"/>
+                </a:tc>
+                <a:extLst>
+                  <a:ext uri="{0D108BD9-81ED-4DB2-BD59-A6C34878D82A}">
+                    <a16:rowId xmlns:a16="http://schemas.microsoft.com/office/drawing/2014/main" val="4028241582"/>
+                  </a:ext>
+                </a:extLst>
+              </a:tr>
+            </a:tbl>
+          </a:graphicData>
+        </a:graphic>
+      </p:graphicFrame>
+    </p:spTree>
+    <p:extLst>
+      <p:ext uri="{BB962C8B-B14F-4D97-AF65-F5344CB8AC3E}">
+        <p14:creationId xmlns:p14="http://schemas.microsoft.com/office/powerpoint/2010/main" val="430456566"/>
+      </p:ext>
+    </p:extLst>
+  </p:cSld>
+  <p:clrMapOvr>
+    <a:masterClrMapping/>
+  </p:clrMapOvr>
+</p:sld>
+</file>
+
+<file path=ppt/slides/slide21.xml><?xml version="1.0" encoding="utf-8"?>
+<p:sld xmlns:a="http://schemas.openxmlformats.org/drawingml/2006/main" xmlns:r="http://schemas.openxmlformats.org/officeDocument/2006/relationships" xmlns:p="http://schemas.openxmlformats.org/presentationml/2006/main">
+  <p:cSld>
+    <p:spTree>
+      <p:nvGrpSpPr>
+        <p:cNvPr id="1" name=""/>
+        <p:cNvGrpSpPr/>
+        <p:nvPr/>
+      </p:nvGrpSpPr>
+      <p:grpSpPr>
+        <a:xfrm>
+          <a:off x="0" y="0"/>
+          <a:ext cx="0" cy="0"/>
+          <a:chOff x="0" y="0"/>
+          <a:chExt cx="0" cy="0"/>
+        </a:xfrm>
+      </p:grpSpPr>
+      <p:sp>
+        <p:nvSpPr>
+          <p:cNvPr id="2" name="Title 1">
+            <a:extLst>
+              <a:ext uri="{FF2B5EF4-FFF2-40B4-BE49-F238E27FC236}">
+                <a16:creationId xmlns:a16="http://schemas.microsoft.com/office/drawing/2014/main" id="{278A0C0C-E778-92FD-4583-7D149A13D0B3}"/>
+              </a:ext>
+            </a:extLst>
+          </p:cNvPr>
+          <p:cNvSpPr>
+            <a:spLocks noGrp="1"/>
+          </p:cNvSpPr>
+          <p:nvPr>
+            <p:ph type="title"/>
+          </p:nvPr>
+        </p:nvSpPr>
+        <p:spPr/>
+        <p:txBody>
+          <a:bodyPr/>
+          <a:lstStyle/>
+          <a:p>
+            <a:r>
+              <a:rPr lang="en-US" dirty="0"/>
+              <a:t>Creating a </a:t>
+            </a:r>
+            <a:r>
+              <a:rPr lang="en-US" dirty="0" err="1"/>
+              <a:t>jparepository</a:t>
+            </a:r>
+            <a:endParaRPr lang="en-US" dirty="0"/>
+          </a:p>
+        </p:txBody>
+      </p:sp>
+      <p:sp>
+        <p:nvSpPr>
+          <p:cNvPr id="3" name="Content Placeholder 2">
+            <a:extLst>
+              <a:ext uri="{FF2B5EF4-FFF2-40B4-BE49-F238E27FC236}">
+                <a16:creationId xmlns:a16="http://schemas.microsoft.com/office/drawing/2014/main" id="{31137AE7-317D-E69B-2F2F-E6056C62DCA9}"/>
+              </a:ext>
+            </a:extLst>
+          </p:cNvPr>
+          <p:cNvSpPr>
+            <a:spLocks noGrp="1"/>
+          </p:cNvSpPr>
+          <p:nvPr>
+            <p:ph idx="1"/>
+          </p:nvPr>
+        </p:nvSpPr>
+        <p:spPr>
+          <a:xfrm>
+            <a:off x="581191" y="2180496"/>
+            <a:ext cx="11029615" cy="1248504"/>
+          </a:xfrm>
+        </p:spPr>
+        <p:txBody>
+          <a:bodyPr/>
+          <a:lstStyle/>
+          <a:p>
+            <a:r>
+              <a:rPr lang="en-US" dirty="0"/>
+              <a:t>We create an interface that extends </a:t>
+            </a:r>
+            <a:r>
+              <a:rPr lang="en-US" dirty="0" err="1"/>
+              <a:t>JpaRepository</a:t>
+            </a:r>
+            <a:endParaRPr lang="en-US" dirty="0"/>
+          </a:p>
+          <a:p>
+            <a:r>
+              <a:rPr lang="en-US" dirty="0"/>
+              <a:t>The type provided is: &lt;Entity, </a:t>
+            </a:r>
+            <a:r>
+              <a:rPr lang="en-US" dirty="0" err="1"/>
+              <a:t>EntityIdDataType</a:t>
+            </a:r>
+            <a:r>
+              <a:rPr lang="en-US" dirty="0"/>
+              <a:t>&gt;</a:t>
+            </a:r>
+          </a:p>
+          <a:p>
+            <a:r>
+              <a:rPr lang="en-US" dirty="0"/>
+              <a:t>Now our service can simply make calls to this interface!</a:t>
+            </a:r>
+          </a:p>
+        </p:txBody>
+      </p:sp>
+      <p:pic>
+        <p:nvPicPr>
+          <p:cNvPr id="5" name="Picture 4">
+            <a:extLst>
+              <a:ext uri="{FF2B5EF4-FFF2-40B4-BE49-F238E27FC236}">
+                <a16:creationId xmlns:a16="http://schemas.microsoft.com/office/drawing/2014/main" id="{47461D70-B8A1-E090-1DBC-BC2FF94504E9}"/>
+              </a:ext>
+            </a:extLst>
+          </p:cNvPr>
+          <p:cNvPicPr>
+            <a:picLocks noChangeAspect="1"/>
+          </p:cNvPicPr>
+          <p:nvPr/>
+        </p:nvPicPr>
+        <p:blipFill>
+          <a:blip r:embed="rId2"/>
+          <a:stretch>
+            <a:fillRect/>
+          </a:stretch>
+        </p:blipFill>
+        <p:spPr>
+          <a:xfrm>
+            <a:off x="2504573" y="3762752"/>
+            <a:ext cx="7182852" cy="2543530"/>
+          </a:xfrm>
+          <a:prstGeom prst="rect">
+            <a:avLst/>
+          </a:prstGeom>
+        </p:spPr>
+      </p:pic>
+    </p:spTree>
+    <p:extLst>
+      <p:ext uri="{BB962C8B-B14F-4D97-AF65-F5344CB8AC3E}">
+        <p14:creationId xmlns:p14="http://schemas.microsoft.com/office/powerpoint/2010/main" val="120874348"/>
+      </p:ext>
+    </p:extLst>
+  </p:cSld>
+  <p:clrMapOvr>
+    <a:masterClrMapping/>
+  </p:clrMapOvr>
+</p:sld>
+</file>
+
+<file path=ppt/slides/slide22.xml><?xml version="1.0" encoding="utf-8"?>
+<p:sld xmlns:a="http://schemas.openxmlformats.org/drawingml/2006/main" xmlns:r="http://schemas.openxmlformats.org/officeDocument/2006/relationships" xmlns:p="http://schemas.openxmlformats.org/presentationml/2006/main">
+  <p:cSld>
+    <p:spTree>
+      <p:nvGrpSpPr>
+        <p:cNvPr id="1" name=""/>
+        <p:cNvGrpSpPr/>
+        <p:nvPr/>
+      </p:nvGrpSpPr>
+      <p:grpSpPr>
+        <a:xfrm>
+          <a:off x="0" y="0"/>
+          <a:ext cx="0" cy="0"/>
+          <a:chOff x="0" y="0"/>
+          <a:chExt cx="0" cy="0"/>
+        </a:xfrm>
+      </p:grpSpPr>
+      <p:sp>
+        <p:nvSpPr>
+          <p:cNvPr id="2" name="Title 1">
+            <a:extLst>
+              <a:ext uri="{FF2B5EF4-FFF2-40B4-BE49-F238E27FC236}">
+                <a16:creationId xmlns:a16="http://schemas.microsoft.com/office/drawing/2014/main" id="{60EC6536-3C19-070B-48E1-3374C6CD34A0}"/>
+              </a:ext>
+            </a:extLst>
+          </p:cNvPr>
+          <p:cNvSpPr>
+            <a:spLocks noGrp="1"/>
+          </p:cNvSpPr>
+          <p:nvPr>
+            <p:ph type="title"/>
+          </p:nvPr>
+        </p:nvSpPr>
+        <p:spPr/>
+        <p:txBody>
+          <a:bodyPr/>
+          <a:lstStyle/>
+          <a:p>
+            <a:r>
+              <a:rPr lang="en-US" dirty="0" err="1"/>
+              <a:t>Jparepository</a:t>
+            </a:r>
+            <a:r>
+              <a:rPr lang="en-US" dirty="0"/>
+              <a:t> – Optional&lt;T&gt;</a:t>
+            </a:r>
+          </a:p>
+        </p:txBody>
+      </p:sp>
+      <p:sp>
+        <p:nvSpPr>
+          <p:cNvPr id="3" name="Content Placeholder 2">
+            <a:extLst>
+              <a:ext uri="{FF2B5EF4-FFF2-40B4-BE49-F238E27FC236}">
+                <a16:creationId xmlns:a16="http://schemas.microsoft.com/office/drawing/2014/main" id="{23A7AB55-C113-B99A-FE9E-9D2688C97C3E}"/>
+              </a:ext>
+            </a:extLst>
+          </p:cNvPr>
+          <p:cNvSpPr>
+            <a:spLocks noGrp="1"/>
+          </p:cNvSpPr>
+          <p:nvPr>
+            <p:ph idx="1"/>
+          </p:nvPr>
+        </p:nvSpPr>
+        <p:spPr>
+          <a:xfrm>
+            <a:off x="581193" y="2148598"/>
+            <a:ext cx="4905207" cy="4007245"/>
+          </a:xfrm>
+        </p:spPr>
+        <p:txBody>
+          <a:bodyPr/>
+          <a:lstStyle/>
+          <a:p>
+            <a:r>
+              <a:rPr lang="en-US" dirty="0"/>
+              <a:t>The following shows our service layer, now calling a </a:t>
+            </a:r>
+            <a:r>
+              <a:rPr lang="en-US" dirty="0" err="1"/>
+              <a:t>JpaRepository</a:t>
+            </a:r>
+            <a:r>
+              <a:rPr lang="en-US" dirty="0"/>
+              <a:t> </a:t>
+            </a:r>
+          </a:p>
+          <a:p>
+            <a:r>
+              <a:rPr lang="en-US" dirty="0"/>
+              <a:t>Not that some OOB methods return a type of Optional&lt;T&gt; </a:t>
+            </a:r>
+          </a:p>
+          <a:p>
+            <a:r>
+              <a:rPr lang="en-US" dirty="0"/>
+              <a:t>That’s because it may or may not find the record</a:t>
+            </a:r>
+          </a:p>
+          <a:p>
+            <a:r>
+              <a:rPr lang="en-US" dirty="0"/>
+              <a:t>We commonly handle this with: </a:t>
+            </a:r>
+            <a:r>
+              <a:rPr lang="en-US" dirty="0" err="1"/>
+              <a:t>orElseThrow</a:t>
+            </a:r>
+            <a:r>
+              <a:rPr lang="en-US" dirty="0"/>
+              <a:t>()</a:t>
+            </a:r>
+          </a:p>
+          <a:p>
+            <a:r>
+              <a:rPr lang="en-US" dirty="0"/>
+              <a:t>We could throw a </a:t>
+            </a:r>
+            <a:r>
+              <a:rPr lang="en-US" dirty="0" err="1"/>
+              <a:t>RuntimeException</a:t>
+            </a:r>
+            <a:r>
+              <a:rPr lang="en-US" dirty="0"/>
+              <a:t>, or a custom one!</a:t>
+            </a:r>
+          </a:p>
+        </p:txBody>
+      </p:sp>
+      <p:pic>
+        <p:nvPicPr>
+          <p:cNvPr id="5" name="Picture 4">
+            <a:extLst>
+              <a:ext uri="{FF2B5EF4-FFF2-40B4-BE49-F238E27FC236}">
+                <a16:creationId xmlns:a16="http://schemas.microsoft.com/office/drawing/2014/main" id="{A38884F3-2208-4720-DCEF-4DDCBC277F3A}"/>
+              </a:ext>
+            </a:extLst>
+          </p:cNvPr>
+          <p:cNvPicPr>
+            <a:picLocks noChangeAspect="1"/>
+          </p:cNvPicPr>
+          <p:nvPr/>
+        </p:nvPicPr>
+        <p:blipFill>
+          <a:blip r:embed="rId2"/>
+          <a:stretch>
+            <a:fillRect/>
+          </a:stretch>
+        </p:blipFill>
+        <p:spPr>
+          <a:xfrm>
+            <a:off x="5877617" y="2175180"/>
+            <a:ext cx="5275936" cy="4303608"/>
+          </a:xfrm>
+          <a:prstGeom prst="rect">
+            <a:avLst/>
+          </a:prstGeom>
+        </p:spPr>
+      </p:pic>
+    </p:spTree>
+    <p:extLst>
+      <p:ext uri="{BB962C8B-B14F-4D97-AF65-F5344CB8AC3E}">
+        <p14:creationId xmlns:p14="http://schemas.microsoft.com/office/powerpoint/2010/main" val="858683052"/>
+      </p:ext>
+    </p:extLst>
+  </p:cSld>
+  <p:clrMapOvr>
+    <a:masterClrMapping/>
+  </p:clrMapOvr>
+</p:sld>
+</file>
+
+<file path=ppt/slides/slide23.xml><?xml version="1.0" encoding="utf-8"?>
+<p:sld xmlns:a="http://schemas.openxmlformats.org/drawingml/2006/main" xmlns:r="http://schemas.openxmlformats.org/officeDocument/2006/relationships" xmlns:p="http://schemas.openxmlformats.org/presentationml/2006/main">
+  <p:cSld>
+    <p:spTree>
+      <p:nvGrpSpPr>
+        <p:cNvPr id="1" name=""/>
+        <p:cNvGrpSpPr/>
+        <p:nvPr/>
+      </p:nvGrpSpPr>
+      <p:grpSpPr>
+        <a:xfrm>
+          <a:off x="0" y="0"/>
+          <a:ext cx="0" cy="0"/>
+          <a:chOff x="0" y="0"/>
+          <a:chExt cx="0" cy="0"/>
+        </a:xfrm>
+      </p:grpSpPr>
+      <p:sp>
+        <p:nvSpPr>
+          <p:cNvPr id="2" name="Title 1">
+            <a:extLst>
+              <a:ext uri="{FF2B5EF4-FFF2-40B4-BE49-F238E27FC236}">
+                <a16:creationId xmlns:a16="http://schemas.microsoft.com/office/drawing/2014/main" id="{2F6C5CAB-E80B-E170-5AFC-D84E87CB424B}"/>
+              </a:ext>
+            </a:extLst>
+          </p:cNvPr>
+          <p:cNvSpPr>
+            <a:spLocks noGrp="1"/>
+          </p:cNvSpPr>
+          <p:nvPr>
+            <p:ph type="title"/>
+          </p:nvPr>
+        </p:nvSpPr>
+        <p:spPr/>
+        <p:txBody>
+          <a:bodyPr/>
+          <a:lstStyle/>
+          <a:p>
+            <a:r>
+              <a:rPr lang="en-US" dirty="0" err="1"/>
+              <a:t>Jparepository</a:t>
+            </a:r>
+            <a:r>
+              <a:rPr lang="en-US" dirty="0"/>
+              <a:t> – derived query methods</a:t>
+            </a:r>
+          </a:p>
+        </p:txBody>
+      </p:sp>
+      <p:sp>
+        <p:nvSpPr>
+          <p:cNvPr id="3" name="Content Placeholder 2">
+            <a:extLst>
+              <a:ext uri="{FF2B5EF4-FFF2-40B4-BE49-F238E27FC236}">
+                <a16:creationId xmlns:a16="http://schemas.microsoft.com/office/drawing/2014/main" id="{64F4F643-3BA9-6360-566F-4715DB61D0A4}"/>
+              </a:ext>
+            </a:extLst>
+          </p:cNvPr>
+          <p:cNvSpPr>
+            <a:spLocks noGrp="1"/>
+          </p:cNvSpPr>
+          <p:nvPr>
+            <p:ph idx="1"/>
+          </p:nvPr>
+        </p:nvSpPr>
+        <p:spPr>
+          <a:xfrm>
+            <a:off x="581192" y="2180497"/>
+            <a:ext cx="11029615" cy="1248503"/>
+          </a:xfrm>
+        </p:spPr>
+        <p:txBody>
+          <a:bodyPr/>
+          <a:lstStyle/>
+          <a:p>
+            <a:r>
+              <a:rPr lang="en-US" dirty="0">
+                <a:solidFill>
+                  <a:srgbClr val="92D050"/>
+                </a:solidFill>
+              </a:rPr>
+              <a:t>Derived Query Methods </a:t>
+            </a:r>
+            <a:r>
+              <a:rPr lang="en-US" dirty="0"/>
+              <a:t>- Spring Data JPA parses the method name according to strict naming conventions and automatically generates the underlying JPQL (Java Persistence Query Language) and SQL at runtime.</a:t>
+            </a:r>
+          </a:p>
+          <a:p>
+            <a:r>
+              <a:rPr lang="en-US" dirty="0"/>
+              <a:t>We simply need to create the method in our Repo interface:</a:t>
+            </a:r>
+          </a:p>
+        </p:txBody>
+      </p:sp>
+      <p:pic>
+        <p:nvPicPr>
+          <p:cNvPr id="5" name="Picture 4">
+            <a:extLst>
+              <a:ext uri="{FF2B5EF4-FFF2-40B4-BE49-F238E27FC236}">
+                <a16:creationId xmlns:a16="http://schemas.microsoft.com/office/drawing/2014/main" id="{4C0C3C59-EE6A-1D49-CA01-34830DD17ADD}"/>
+              </a:ext>
+            </a:extLst>
+          </p:cNvPr>
+          <p:cNvPicPr>
+            <a:picLocks noChangeAspect="1"/>
+          </p:cNvPicPr>
+          <p:nvPr/>
+        </p:nvPicPr>
+        <p:blipFill>
+          <a:blip r:embed="rId2"/>
+          <a:stretch>
+            <a:fillRect/>
+          </a:stretch>
+        </p:blipFill>
+        <p:spPr>
+          <a:xfrm>
+            <a:off x="2758622" y="3429000"/>
+            <a:ext cx="6674754" cy="3075186"/>
+          </a:xfrm>
+          <a:prstGeom prst="rect">
+            <a:avLst/>
+          </a:prstGeom>
+        </p:spPr>
+      </p:pic>
+    </p:spTree>
+    <p:extLst>
+      <p:ext uri="{BB962C8B-B14F-4D97-AF65-F5344CB8AC3E}">
+        <p14:creationId xmlns:p14="http://schemas.microsoft.com/office/powerpoint/2010/main" val="2092199828"/>
+      </p:ext>
+    </p:extLst>
+  </p:cSld>
+  <p:clrMapOvr>
+    <a:masterClrMapping/>
+  </p:clrMapOvr>
+</p:sld>
+</file>
+
+<file path=ppt/slides/slide24.xml><?xml version="1.0" encoding="utf-8"?>
+<p:sld xmlns:a="http://schemas.openxmlformats.org/drawingml/2006/main" xmlns:r="http://schemas.openxmlformats.org/officeDocument/2006/relationships" xmlns:p="http://schemas.openxmlformats.org/presentationml/2006/main">
+  <p:cSld>
+    <p:spTree>
+      <p:nvGrpSpPr>
+        <p:cNvPr id="1" name=""/>
+        <p:cNvGrpSpPr/>
+        <p:nvPr/>
+      </p:nvGrpSpPr>
+      <p:grpSpPr>
+        <a:xfrm>
+          <a:off x="0" y="0"/>
+          <a:ext cx="0" cy="0"/>
+          <a:chOff x="0" y="0"/>
+          <a:chExt cx="0" cy="0"/>
+        </a:xfrm>
+      </p:grpSpPr>
+      <p:sp>
+        <p:nvSpPr>
+          <p:cNvPr id="2" name="Title 1">
+            <a:extLst>
+              <a:ext uri="{FF2B5EF4-FFF2-40B4-BE49-F238E27FC236}">
+                <a16:creationId xmlns:a16="http://schemas.microsoft.com/office/drawing/2014/main" id="{07CCAF72-B79C-8500-2B6D-DAB53D5BE76D}"/>
+              </a:ext>
+            </a:extLst>
+          </p:cNvPr>
+          <p:cNvSpPr>
+            <a:spLocks noGrp="1"/>
+          </p:cNvSpPr>
+          <p:nvPr>
+            <p:ph type="title"/>
+          </p:nvPr>
+        </p:nvSpPr>
+        <p:spPr/>
+        <p:txBody>
+          <a:bodyPr/>
+          <a:lstStyle/>
+          <a:p>
+            <a:r>
+              <a:rPr lang="en-US" dirty="0" err="1"/>
+              <a:t>Jparepository</a:t>
+            </a:r>
+            <a:r>
+              <a:rPr lang="en-US" dirty="0"/>
+              <a:t> – derived query methods</a:t>
+            </a:r>
+          </a:p>
+        </p:txBody>
+      </p:sp>
+      <p:sp>
+        <p:nvSpPr>
+          <p:cNvPr id="3" name="Content Placeholder 2">
+            <a:extLst>
+              <a:ext uri="{FF2B5EF4-FFF2-40B4-BE49-F238E27FC236}">
+                <a16:creationId xmlns:a16="http://schemas.microsoft.com/office/drawing/2014/main" id="{C5A7BA42-E203-9CE9-FACA-E03062F60A5A}"/>
+              </a:ext>
+            </a:extLst>
+          </p:cNvPr>
+          <p:cNvSpPr>
+            <a:spLocks noGrp="1"/>
+          </p:cNvSpPr>
+          <p:nvPr>
+            <p:ph idx="1"/>
+          </p:nvPr>
+        </p:nvSpPr>
+        <p:spPr>
+          <a:xfrm>
+            <a:off x="581193" y="2685543"/>
+            <a:ext cx="11029615" cy="743457"/>
+          </a:xfrm>
+        </p:spPr>
+        <p:txBody>
+          <a:bodyPr/>
+          <a:lstStyle/>
+          <a:p>
+            <a:r>
+              <a:rPr lang="en-US" dirty="0"/>
+              <a:t>Every derived query method is split into two major parts: the </a:t>
+            </a:r>
+            <a:r>
+              <a:rPr lang="en-US" b="1" dirty="0"/>
+              <a:t>Subject</a:t>
+            </a:r>
+            <a:r>
+              <a:rPr lang="en-US" dirty="0"/>
+              <a:t> (what the query does) and the </a:t>
+            </a:r>
+            <a:r>
+              <a:rPr lang="en-US" b="1" dirty="0"/>
+              <a:t>Predicate</a:t>
+            </a:r>
+            <a:r>
+              <a:rPr lang="en-US" dirty="0"/>
+              <a:t> (the criteria/filters)</a:t>
+            </a:r>
+          </a:p>
+        </p:txBody>
+      </p:sp>
+      <p:pic>
+        <p:nvPicPr>
+          <p:cNvPr id="5" name="Picture 4">
+            <a:extLst>
+              <a:ext uri="{FF2B5EF4-FFF2-40B4-BE49-F238E27FC236}">
+                <a16:creationId xmlns:a16="http://schemas.microsoft.com/office/drawing/2014/main" id="{0D5A52F3-6B3D-A73C-C23F-26ACEDEB55ED}"/>
+              </a:ext>
+            </a:extLst>
+          </p:cNvPr>
+          <p:cNvPicPr>
+            <a:picLocks noChangeAspect="1"/>
+          </p:cNvPicPr>
+          <p:nvPr/>
+        </p:nvPicPr>
+        <p:blipFill>
+          <a:blip r:embed="rId2"/>
+          <a:stretch>
+            <a:fillRect/>
+          </a:stretch>
+        </p:blipFill>
+        <p:spPr>
+          <a:xfrm>
+            <a:off x="2061598" y="4212088"/>
+            <a:ext cx="8068801" cy="943107"/>
+          </a:xfrm>
+          <a:prstGeom prst="rect">
+            <a:avLst/>
+          </a:prstGeom>
+        </p:spPr>
+      </p:pic>
+    </p:spTree>
+    <p:extLst>
+      <p:ext uri="{BB962C8B-B14F-4D97-AF65-F5344CB8AC3E}">
+        <p14:creationId xmlns:p14="http://schemas.microsoft.com/office/powerpoint/2010/main" val="2780343028"/>
+      </p:ext>
+    </p:extLst>
+  </p:cSld>
+  <p:clrMapOvr>
+    <a:masterClrMapping/>
+  </p:clrMapOvr>
+</p:sld>
+</file>
+
+<file path=ppt/slides/slide25.xml><?xml version="1.0" encoding="utf-8"?>
+<p:sld xmlns:a="http://schemas.openxmlformats.org/drawingml/2006/main" xmlns:r="http://schemas.openxmlformats.org/officeDocument/2006/relationships" xmlns:p="http://schemas.openxmlformats.org/presentationml/2006/main">
+  <p:cSld>
+    <p:spTree>
+      <p:nvGrpSpPr>
+        <p:cNvPr id="1" name=""/>
+        <p:cNvGrpSpPr/>
+        <p:nvPr/>
+      </p:nvGrpSpPr>
+      <p:grpSpPr>
+        <a:xfrm>
+          <a:off x="0" y="0"/>
+          <a:ext cx="0" cy="0"/>
+          <a:chOff x="0" y="0"/>
+          <a:chExt cx="0" cy="0"/>
+        </a:xfrm>
+      </p:grpSpPr>
+      <p:sp>
+        <p:nvSpPr>
+          <p:cNvPr id="2" name="Title 1">
+            <a:extLst>
+              <a:ext uri="{FF2B5EF4-FFF2-40B4-BE49-F238E27FC236}">
+                <a16:creationId xmlns:a16="http://schemas.microsoft.com/office/drawing/2014/main" id="{17FD8757-575A-A915-86E5-D725BA017F16}"/>
+              </a:ext>
+            </a:extLst>
+          </p:cNvPr>
+          <p:cNvSpPr>
+            <a:spLocks noGrp="1"/>
+          </p:cNvSpPr>
+          <p:nvPr>
+            <p:ph type="title"/>
+          </p:nvPr>
+        </p:nvSpPr>
+        <p:spPr/>
+        <p:txBody>
+          <a:bodyPr/>
+          <a:lstStyle/>
+          <a:p>
+            <a:r>
+              <a:rPr lang="en-US" dirty="0" err="1"/>
+              <a:t>Jparepository</a:t>
+            </a:r>
+            <a:r>
+              <a:rPr lang="en-US" dirty="0"/>
+              <a:t> – derived query methods</a:t>
+            </a:r>
+          </a:p>
+        </p:txBody>
+      </p:sp>
+      <p:sp>
+        <p:nvSpPr>
+          <p:cNvPr id="5" name="Content Placeholder 4">
+            <a:extLst>
+              <a:ext uri="{FF2B5EF4-FFF2-40B4-BE49-F238E27FC236}">
+                <a16:creationId xmlns:a16="http://schemas.microsoft.com/office/drawing/2014/main" id="{DF0FBB46-61C8-55CB-3F4C-22E477873F56}"/>
+              </a:ext>
+            </a:extLst>
+          </p:cNvPr>
+          <p:cNvSpPr txBox="1">
+            <a:spLocks noGrp="1"/>
+          </p:cNvSpPr>
+          <p:nvPr>
+            <p:ph idx="1"/>
+          </p:nvPr>
+        </p:nvSpPr>
+        <p:spPr>
+          <a:xfrm>
+            <a:off x="581193" y="2163736"/>
+            <a:ext cx="11029615" cy="2308324"/>
+          </a:xfrm>
+          <a:prstGeom prst="rect">
+            <a:avLst/>
+          </a:prstGeom>
+          <a:noFill/>
+        </p:spPr>
+        <p:txBody>
+          <a:bodyPr wrap="square">
+            <a:spAutoFit/>
+          </a:bodyPr>
+          <a:lstStyle/>
+          <a:p>
+            <a:pPr marL="342900" marR="0" lvl="0" indent="-342900">
+              <a:spcBef>
+                <a:spcPts val="900"/>
+              </a:spcBef>
+              <a:spcAft>
+                <a:spcPts val="900"/>
+              </a:spcAft>
+              <a:buFont typeface="Arial" panose="020B0604020202020204" pitchFamily="34" charset="0"/>
+              <a:buChar char="•"/>
+            </a:pPr>
+            <a:r>
+              <a:rPr lang="en-US" sz="1800" b="1" u="none" strike="noStrike" dirty="0">
+                <a:effectLst/>
+                <a:latin typeface="+mn-lt"/>
+              </a:rPr>
+              <a:t>Introducer modifiers:</a:t>
+            </a:r>
+          </a:p>
+          <a:p>
+            <a:pPr marL="666900" lvl="1" indent="-342900">
+              <a:spcBef>
+                <a:spcPts val="900"/>
+              </a:spcBef>
+              <a:spcAft>
+                <a:spcPts val="900"/>
+              </a:spcAft>
+              <a:buFont typeface="Arial" panose="020B0604020202020204" pitchFamily="34" charset="0"/>
+              <a:buChar char="•"/>
+            </a:pPr>
+            <a:r>
+              <a:rPr lang="en-US" b="1" u="none" strike="noStrike" dirty="0">
+                <a:effectLst/>
+                <a:latin typeface="+mn-lt"/>
+              </a:rPr>
+              <a:t>Data Retrieval:</a:t>
+            </a:r>
+            <a:r>
+              <a:rPr lang="en-US" b="0" u="none" strike="noStrike" dirty="0">
+                <a:effectLst/>
+                <a:latin typeface="+mn-lt"/>
+              </a:rPr>
+              <a:t> find...By, read...By, query...By, get...By</a:t>
+            </a:r>
+          </a:p>
+          <a:p>
+            <a:pPr marL="666900" lvl="1" indent="-342900">
+              <a:spcBef>
+                <a:spcPts val="900"/>
+              </a:spcBef>
+              <a:spcAft>
+                <a:spcPts val="900"/>
+              </a:spcAft>
+              <a:buFont typeface="Arial" panose="020B0604020202020204" pitchFamily="34" charset="0"/>
+              <a:buChar char="•"/>
+            </a:pPr>
+            <a:r>
+              <a:rPr lang="en-US" b="1" u="none" strike="noStrike" dirty="0">
+                <a:effectLst/>
+                <a:latin typeface="+mn-lt"/>
+              </a:rPr>
+              <a:t>Counting:</a:t>
+            </a:r>
+            <a:r>
+              <a:rPr lang="en-US" b="0" u="none" strike="noStrike" dirty="0">
+                <a:effectLst/>
+                <a:latin typeface="+mn-lt"/>
+              </a:rPr>
+              <a:t> count...By (returns a long)</a:t>
+            </a:r>
+          </a:p>
+          <a:p>
+            <a:pPr marL="666900" lvl="1" indent="-342900">
+              <a:spcBef>
+                <a:spcPts val="900"/>
+              </a:spcBef>
+              <a:spcAft>
+                <a:spcPts val="900"/>
+              </a:spcAft>
+              <a:buFont typeface="Arial" panose="020B0604020202020204" pitchFamily="34" charset="0"/>
+              <a:buChar char="•"/>
+            </a:pPr>
+            <a:r>
+              <a:rPr lang="en-US" b="1" u="none" strike="noStrike" dirty="0">
+                <a:effectLst/>
+                <a:latin typeface="+mn-lt"/>
+              </a:rPr>
+              <a:t>Existence Checks:</a:t>
+            </a:r>
+            <a:r>
+              <a:rPr lang="en-US" b="0" u="none" strike="noStrike" dirty="0">
+                <a:effectLst/>
+                <a:latin typeface="+mn-lt"/>
+              </a:rPr>
+              <a:t> exists...By (returns a </a:t>
+            </a:r>
+            <a:r>
+              <a:rPr lang="en-US" b="0" u="none" strike="noStrike" dirty="0" err="1">
+                <a:effectLst/>
+                <a:latin typeface="+mn-lt"/>
+              </a:rPr>
+              <a:t>boolean</a:t>
+            </a:r>
+            <a:r>
+              <a:rPr lang="en-US" b="0" u="none" strike="noStrike" dirty="0">
+                <a:effectLst/>
+                <a:latin typeface="+mn-lt"/>
+              </a:rPr>
+              <a:t>)</a:t>
+            </a:r>
+          </a:p>
+          <a:p>
+            <a:pPr marL="666900" lvl="1" indent="-342900">
+              <a:spcBef>
+                <a:spcPts val="900"/>
+              </a:spcBef>
+              <a:spcAft>
+                <a:spcPts val="900"/>
+              </a:spcAft>
+              <a:buFont typeface="Arial" panose="020B0604020202020204" pitchFamily="34" charset="0"/>
+              <a:buChar char="•"/>
+            </a:pPr>
+            <a:r>
+              <a:rPr lang="en-US" b="1" u="none" strike="noStrike" dirty="0">
+                <a:effectLst/>
+                <a:latin typeface="+mn-lt"/>
+              </a:rPr>
+              <a:t>Result Limiting Modifiers:</a:t>
+            </a:r>
+            <a:r>
+              <a:rPr lang="en-US" b="0" u="none" strike="noStrike" dirty="0">
+                <a:effectLst/>
+                <a:latin typeface="+mn-lt"/>
+              </a:rPr>
+              <a:t> You can inject First or Top to limit records</a:t>
+            </a:r>
+            <a:endParaRPr lang="en-US" sz="1000" b="0" u="none" strike="noStrike" dirty="0">
+              <a:effectLst/>
+              <a:latin typeface="Google Sans"/>
+            </a:endParaRPr>
+          </a:p>
+        </p:txBody>
+      </p:sp>
+      <p:sp>
+        <p:nvSpPr>
+          <p:cNvPr id="7" name="TextBox 6">
+            <a:extLst>
+              <a:ext uri="{FF2B5EF4-FFF2-40B4-BE49-F238E27FC236}">
+                <a16:creationId xmlns:a16="http://schemas.microsoft.com/office/drawing/2014/main" id="{1A3BCE50-A94D-9D05-5DEF-91B504CA83C7}"/>
+              </a:ext>
+            </a:extLst>
+          </p:cNvPr>
+          <p:cNvSpPr txBox="1"/>
+          <p:nvPr/>
+        </p:nvSpPr>
+        <p:spPr>
+          <a:xfrm>
+            <a:off x="3047114" y="5147286"/>
+            <a:ext cx="6097772" cy="646331"/>
+          </a:xfrm>
+          <a:prstGeom prst="rect">
+            <a:avLst/>
+          </a:prstGeom>
+          <a:noFill/>
+        </p:spPr>
+        <p:txBody>
+          <a:bodyPr wrap="square">
+            <a:spAutoFit/>
+          </a:bodyPr>
+          <a:lstStyle/>
+          <a:p>
+            <a:r>
+              <a:rPr lang="en-US" dirty="0"/>
+              <a:t>User </a:t>
+            </a:r>
+            <a:r>
+              <a:rPr lang="en-US" dirty="0" err="1"/>
+              <a:t>findFirstByOrderByRegistrationDateDesc</a:t>
+            </a:r>
+            <a:r>
+              <a:rPr lang="en-US" dirty="0"/>
+              <a:t>(); </a:t>
+            </a:r>
+          </a:p>
+          <a:p>
+            <a:r>
+              <a:rPr lang="en-US" dirty="0"/>
+              <a:t>List&lt;User&gt; findTop5ByStatus(String status);</a:t>
+            </a:r>
+          </a:p>
+        </p:txBody>
+      </p:sp>
+    </p:spTree>
+    <p:extLst>
+      <p:ext uri="{BB962C8B-B14F-4D97-AF65-F5344CB8AC3E}">
+        <p14:creationId xmlns:p14="http://schemas.microsoft.com/office/powerpoint/2010/main" val="2040570512"/>
+      </p:ext>
+    </p:extLst>
+  </p:cSld>
+  <p:clrMapOvr>
+    <a:masterClrMapping/>
+  </p:clrMapOvr>
+</p:sld>
+</file>
+
+<file path=ppt/slides/slide26.xml><?xml version="1.0" encoding="utf-8"?>
+<p:sld xmlns:a="http://schemas.openxmlformats.org/drawingml/2006/main" xmlns:r="http://schemas.openxmlformats.org/officeDocument/2006/relationships" xmlns:p="http://schemas.openxmlformats.org/presentationml/2006/main">
+  <p:cSld>
+    <p:spTree>
+      <p:nvGrpSpPr>
+        <p:cNvPr id="1" name=""/>
+        <p:cNvGrpSpPr/>
+        <p:nvPr/>
+      </p:nvGrpSpPr>
+      <p:grpSpPr>
+        <a:xfrm>
+          <a:off x="0" y="0"/>
+          <a:ext cx="0" cy="0"/>
+          <a:chOff x="0" y="0"/>
+          <a:chExt cx="0" cy="0"/>
+        </a:xfrm>
+      </p:grpSpPr>
+      <p:sp>
+        <p:nvSpPr>
+          <p:cNvPr id="2" name="Title 1">
+            <a:extLst>
+              <a:ext uri="{FF2B5EF4-FFF2-40B4-BE49-F238E27FC236}">
+                <a16:creationId xmlns:a16="http://schemas.microsoft.com/office/drawing/2014/main" id="{C5ECA39C-881B-9846-CDA6-07DAB32A2262}"/>
+              </a:ext>
+            </a:extLst>
+          </p:cNvPr>
+          <p:cNvSpPr>
+            <a:spLocks noGrp="1"/>
+          </p:cNvSpPr>
+          <p:nvPr>
+            <p:ph type="title"/>
+          </p:nvPr>
+        </p:nvSpPr>
+        <p:spPr/>
+        <p:txBody>
+          <a:bodyPr/>
+          <a:lstStyle/>
+          <a:p>
+            <a:r>
+              <a:rPr lang="en-US" dirty="0" err="1"/>
+              <a:t>Jparepository</a:t>
+            </a:r>
+            <a:r>
+              <a:rPr lang="en-US" dirty="0"/>
+              <a:t> – derived query methods</a:t>
+            </a:r>
+          </a:p>
+        </p:txBody>
+      </p:sp>
+      <p:sp>
+        <p:nvSpPr>
+          <p:cNvPr id="3" name="Content Placeholder 2">
+            <a:extLst>
+              <a:ext uri="{FF2B5EF4-FFF2-40B4-BE49-F238E27FC236}">
+                <a16:creationId xmlns:a16="http://schemas.microsoft.com/office/drawing/2014/main" id="{A33F0A92-7421-69EF-EE75-789791E6C9AE}"/>
+              </a:ext>
+            </a:extLst>
+          </p:cNvPr>
+          <p:cNvSpPr>
+            <a:spLocks noGrp="1"/>
+          </p:cNvSpPr>
+          <p:nvPr>
+            <p:ph idx="1"/>
+          </p:nvPr>
+        </p:nvSpPr>
+        <p:spPr/>
+        <p:txBody>
+          <a:bodyPr/>
+          <a:lstStyle/>
+          <a:p>
+            <a:r>
+              <a:rPr lang="en-US" dirty="0"/>
+              <a:t>Everything after the keyword </a:t>
+            </a:r>
+            <a:r>
+              <a:rPr lang="en-US" b="1" dirty="0"/>
+              <a:t>By</a:t>
+            </a:r>
+            <a:r>
+              <a:rPr lang="en-US" dirty="0"/>
+              <a:t> maps directly to the entity's properties and filtering criteria. </a:t>
+            </a:r>
+          </a:p>
+          <a:p>
+            <a:pPr lvl="1"/>
+            <a:r>
+              <a:rPr lang="en-US" b="1" dirty="0"/>
+              <a:t>Equality (Default):</a:t>
+            </a:r>
+            <a:r>
+              <a:rPr lang="en-US" dirty="0"/>
+              <a:t> If you just name a field, Spring assumes an exact match comparison.</a:t>
+            </a:r>
+          </a:p>
+          <a:p>
+            <a:pPr lvl="1"/>
+            <a:r>
+              <a:rPr lang="en-US" b="1" dirty="0"/>
+              <a:t>Logical Operators:</a:t>
+            </a:r>
+            <a:r>
+              <a:rPr lang="en-US" dirty="0"/>
+              <a:t> Combine multiple fields using And or </a:t>
+            </a:r>
+            <a:r>
+              <a:rPr lang="en-US" dirty="0" err="1"/>
+              <a:t>Or</a:t>
+            </a:r>
+            <a:r>
+              <a:rPr lang="en-US" dirty="0"/>
+              <a:t>.</a:t>
+            </a:r>
+          </a:p>
+          <a:p>
+            <a:pPr lvl="1"/>
+            <a:r>
+              <a:rPr lang="en-US" b="1" dirty="0"/>
+              <a:t>Property Expressions:</a:t>
+            </a:r>
+            <a:r>
+              <a:rPr lang="en-US" dirty="0"/>
+              <a:t> Keywords that change the comparison type (e.g., </a:t>
+            </a:r>
+            <a:r>
+              <a:rPr lang="en-US" dirty="0" err="1"/>
+              <a:t>LessThan</a:t>
+            </a:r>
+            <a:r>
+              <a:rPr lang="en-US" dirty="0"/>
+              <a:t>, Like, Containing).</a:t>
+            </a:r>
+          </a:p>
+        </p:txBody>
+      </p:sp>
+    </p:spTree>
+    <p:extLst>
+      <p:ext uri="{BB962C8B-B14F-4D97-AF65-F5344CB8AC3E}">
+        <p14:creationId xmlns:p14="http://schemas.microsoft.com/office/powerpoint/2010/main" val="642515417"/>
+      </p:ext>
+    </p:extLst>
+  </p:cSld>
+  <p:clrMapOvr>
+    <a:masterClrMapping/>
+  </p:clrMapOvr>
+</p:sld>
+</file>
+
+<file path=ppt/slides/slide27.xml><?xml version="1.0" encoding="utf-8"?>
+<p:sld xmlns:a="http://schemas.openxmlformats.org/drawingml/2006/main" xmlns:r="http://schemas.openxmlformats.org/officeDocument/2006/relationships" xmlns:p="http://schemas.openxmlformats.org/presentationml/2006/main">
+  <p:cSld>
+    <p:spTree>
+      <p:nvGrpSpPr>
+        <p:cNvPr id="1" name=""/>
+        <p:cNvGrpSpPr/>
+        <p:nvPr/>
+      </p:nvGrpSpPr>
+      <p:grpSpPr>
+        <a:xfrm>
+          <a:off x="0" y="0"/>
+          <a:ext cx="0" cy="0"/>
+          <a:chOff x="0" y="0"/>
+          <a:chExt cx="0" cy="0"/>
+        </a:xfrm>
+      </p:grpSpPr>
+      <p:sp>
+        <p:nvSpPr>
+          <p:cNvPr id="2" name="Title 1">
+            <a:extLst>
+              <a:ext uri="{FF2B5EF4-FFF2-40B4-BE49-F238E27FC236}">
+                <a16:creationId xmlns:a16="http://schemas.microsoft.com/office/drawing/2014/main" id="{E88F4552-598E-8F2A-5499-FC3C754EEE6D}"/>
+              </a:ext>
+            </a:extLst>
+          </p:cNvPr>
+          <p:cNvSpPr>
+            <a:spLocks noGrp="1"/>
+          </p:cNvSpPr>
+          <p:nvPr>
+            <p:ph type="title"/>
+          </p:nvPr>
+        </p:nvSpPr>
+        <p:spPr/>
+        <p:txBody>
+          <a:bodyPr/>
+          <a:lstStyle/>
+          <a:p>
+            <a:r>
+              <a:rPr lang="en-US" dirty="0" err="1"/>
+              <a:t>Jparepository</a:t>
+            </a:r>
+            <a:r>
+              <a:rPr lang="en-US" dirty="0"/>
+              <a:t> – derived query methods</a:t>
+            </a:r>
+          </a:p>
+        </p:txBody>
+      </p:sp>
+      <p:graphicFrame>
+        <p:nvGraphicFramePr>
+          <p:cNvPr id="6" name="Table 5">
+            <a:extLst>
+              <a:ext uri="{FF2B5EF4-FFF2-40B4-BE49-F238E27FC236}">
+                <a16:creationId xmlns:a16="http://schemas.microsoft.com/office/drawing/2014/main" id="{20A4EBB9-BE4D-0D68-6A0F-B7DEFB8C5057}"/>
+              </a:ext>
+            </a:extLst>
+          </p:cNvPr>
+          <p:cNvGraphicFramePr>
+            <a:graphicFrameLocks noGrp="1"/>
+          </p:cNvGraphicFramePr>
+          <p:nvPr>
+            <p:extLst>
+              <p:ext uri="{D42A27DB-BD31-4B8C-83A1-F6EECF244321}">
+                <p14:modId xmlns:p14="http://schemas.microsoft.com/office/powerpoint/2010/main" val="598996642"/>
+              </p:ext>
+            </p:extLst>
+          </p:nvPr>
+        </p:nvGraphicFramePr>
+        <p:xfrm>
+          <a:off x="1798647" y="2156624"/>
+          <a:ext cx="8594706" cy="3999220"/>
+        </p:xfrm>
+        <a:graphic>
+          <a:graphicData uri="http://schemas.openxmlformats.org/drawingml/2006/table">
+            <a:tbl>
+              <a:tblPr>
+                <a:tableStyleId>{5C22544A-7EE6-4342-B048-85BDC9FD1C3A}</a:tableStyleId>
+              </a:tblPr>
+              <a:tblGrid>
+                <a:gridCol w="4297353">
+                  <a:extLst>
+                    <a:ext uri="{9D8B030D-6E8A-4147-A177-3AD203B41FA5}">
+                      <a16:colId xmlns:a16="http://schemas.microsoft.com/office/drawing/2014/main" val="3800346186"/>
+                    </a:ext>
+                  </a:extLst>
+                </a:gridCol>
+                <a:gridCol w="4297353">
+                  <a:extLst>
+                    <a:ext uri="{9D8B030D-6E8A-4147-A177-3AD203B41FA5}">
+                      <a16:colId xmlns:a16="http://schemas.microsoft.com/office/drawing/2014/main" val="1906749517"/>
+                    </a:ext>
+                  </a:extLst>
+                </a:gridCol>
+              </a:tblGrid>
+              <a:tr h="399922">
+                <a:tc>
+                  <a:txBody>
+                    <a:bodyPr/>
+                    <a:lstStyle/>
+                    <a:p>
+                      <a:pPr marL="0" marR="0" algn="l">
+                        <a:buNone/>
+                      </a:pPr>
+                      <a:r>
+                        <a:rPr lang="en-US" sz="1600" b="1" dirty="0">
+                          <a:effectLst/>
+                        </a:rPr>
+                        <a:t>Keyword / Condition</a:t>
+                      </a:r>
+                      <a:endParaRPr lang="en-US" sz="1600" b="1" i="0" dirty="0">
+                        <a:solidFill>
+                          <a:srgbClr val="FFFFFF"/>
+                        </a:solidFill>
+                        <a:effectLst/>
+                        <a:latin typeface="-apple-system-body"/>
+                      </a:endParaRPr>
+                    </a:p>
+                  </a:txBody>
+                  <a:tcPr anchor="ctr"/>
+                </a:tc>
+                <a:tc>
+                  <a:txBody>
+                    <a:bodyPr/>
+                    <a:lstStyle/>
+                    <a:p>
+                      <a:pPr marL="0" marR="0" algn="l">
+                        <a:buNone/>
+                      </a:pPr>
+                      <a:r>
+                        <a:rPr lang="en-US" sz="1600" b="1" dirty="0">
+                          <a:effectLst/>
+                        </a:rPr>
+                        <a:t>Method Example</a:t>
+                      </a:r>
+                      <a:endParaRPr lang="en-US" sz="1600" b="1" i="0" dirty="0">
+                        <a:solidFill>
+                          <a:srgbClr val="FFFFFF"/>
+                        </a:solidFill>
+                        <a:effectLst/>
+                        <a:latin typeface="-apple-system-body"/>
+                      </a:endParaRPr>
+                    </a:p>
+                  </a:txBody>
+                  <a:tcPr anchor="ctr"/>
+                </a:tc>
+                <a:extLst>
+                  <a:ext uri="{0D108BD9-81ED-4DB2-BD59-A6C34878D82A}">
+                    <a16:rowId xmlns:a16="http://schemas.microsoft.com/office/drawing/2014/main" val="2522902549"/>
+                  </a:ext>
+                </a:extLst>
+              </a:tr>
+              <a:tr h="399922">
+                <a:tc>
+                  <a:txBody>
+                    <a:bodyPr/>
+                    <a:lstStyle/>
+                    <a:p>
+                      <a:pPr marL="0" marR="0" algn="l">
+                        <a:buNone/>
+                      </a:pPr>
+                      <a:r>
+                        <a:rPr lang="en-US" sz="1600">
+                          <a:effectLst/>
+                        </a:rPr>
+                        <a:t>Equality</a:t>
+                      </a:r>
+                      <a:endParaRPr lang="en-US" sz="1600" b="0" i="0">
+                        <a:solidFill>
+                          <a:srgbClr val="FFFFFF"/>
+                        </a:solidFill>
+                        <a:effectLst/>
+                        <a:latin typeface="-apple-system-body"/>
+                      </a:endParaRPr>
+                    </a:p>
+                  </a:txBody>
+                  <a:tcPr anchor="ctr"/>
+                </a:tc>
+                <a:tc>
+                  <a:txBody>
+                    <a:bodyPr/>
+                    <a:lstStyle/>
+                    <a:p>
+                      <a:pPr marL="0" marR="0" algn="l">
+                        <a:buNone/>
+                      </a:pPr>
+                      <a:r>
+                        <a:rPr lang="en-US" sz="1600">
+                          <a:effectLst/>
+                        </a:rPr>
+                        <a:t>findByEmail(String email)</a:t>
+                      </a:r>
+                      <a:endParaRPr lang="en-US" sz="1600" b="0" i="0">
+                        <a:solidFill>
+                          <a:srgbClr val="FFFFFF"/>
+                        </a:solidFill>
+                        <a:effectLst/>
+                        <a:latin typeface="-apple-system-body"/>
+                      </a:endParaRPr>
+                    </a:p>
+                  </a:txBody>
+                  <a:tcPr anchor="ctr"/>
+                </a:tc>
+                <a:extLst>
+                  <a:ext uri="{0D108BD9-81ED-4DB2-BD59-A6C34878D82A}">
+                    <a16:rowId xmlns:a16="http://schemas.microsoft.com/office/drawing/2014/main" val="2872420302"/>
+                  </a:ext>
+                </a:extLst>
+              </a:tr>
+              <a:tr h="399922">
+                <a:tc>
+                  <a:txBody>
+                    <a:bodyPr/>
+                    <a:lstStyle/>
+                    <a:p>
+                      <a:pPr marL="0" marR="0" algn="l">
+                        <a:buNone/>
+                      </a:pPr>
+                      <a:r>
+                        <a:rPr lang="en-US" sz="1600">
+                          <a:effectLst/>
+                        </a:rPr>
+                        <a:t>And</a:t>
+                      </a:r>
+                      <a:endParaRPr lang="en-US" sz="1600" b="0" i="0">
+                        <a:solidFill>
+                          <a:srgbClr val="FFFFFF"/>
+                        </a:solidFill>
+                        <a:effectLst/>
+                        <a:latin typeface="-apple-system-body"/>
+                      </a:endParaRPr>
+                    </a:p>
+                  </a:txBody>
+                  <a:tcPr anchor="ctr"/>
+                </a:tc>
+                <a:tc>
+                  <a:txBody>
+                    <a:bodyPr/>
+                    <a:lstStyle/>
+                    <a:p>
+                      <a:pPr marL="0" marR="0" algn="l">
+                        <a:buNone/>
+                      </a:pPr>
+                      <a:r>
+                        <a:rPr lang="en-US" sz="1600">
+                          <a:effectLst/>
+                        </a:rPr>
+                        <a:t>findByFirstNameAndLastName(String f, String l)</a:t>
+                      </a:r>
+                      <a:endParaRPr lang="en-US" sz="1600" b="0" i="0">
+                        <a:solidFill>
+                          <a:srgbClr val="FFFFFF"/>
+                        </a:solidFill>
+                        <a:effectLst/>
+                        <a:latin typeface="-apple-system-body"/>
+                      </a:endParaRPr>
+                    </a:p>
+                  </a:txBody>
+                  <a:tcPr anchor="ctr"/>
+                </a:tc>
+                <a:extLst>
+                  <a:ext uri="{0D108BD9-81ED-4DB2-BD59-A6C34878D82A}">
+                    <a16:rowId xmlns:a16="http://schemas.microsoft.com/office/drawing/2014/main" val="416762696"/>
+                  </a:ext>
+                </a:extLst>
+              </a:tr>
+              <a:tr h="399922">
+                <a:tc>
+                  <a:txBody>
+                    <a:bodyPr/>
+                    <a:lstStyle/>
+                    <a:p>
+                      <a:pPr marL="0" marR="0" algn="l">
+                        <a:buNone/>
+                      </a:pPr>
+                      <a:r>
+                        <a:rPr lang="en-US" sz="1600">
+                          <a:effectLst/>
+                        </a:rPr>
+                        <a:t>Or</a:t>
+                      </a:r>
+                      <a:endParaRPr lang="en-US" sz="1600" b="0" i="0">
+                        <a:solidFill>
+                          <a:srgbClr val="FFFFFF"/>
+                        </a:solidFill>
+                        <a:effectLst/>
+                        <a:latin typeface="-apple-system-body"/>
+                      </a:endParaRPr>
+                    </a:p>
+                  </a:txBody>
+                  <a:tcPr anchor="ctr"/>
+                </a:tc>
+                <a:tc>
+                  <a:txBody>
+                    <a:bodyPr/>
+                    <a:lstStyle/>
+                    <a:p>
+                      <a:pPr marL="0" marR="0" algn="l">
+                        <a:buNone/>
+                      </a:pPr>
+                      <a:r>
+                        <a:rPr lang="en-US" sz="1600">
+                          <a:effectLst/>
+                        </a:rPr>
+                        <a:t>findByStatusOrRole(String s, String r)</a:t>
+                      </a:r>
+                      <a:endParaRPr lang="en-US" sz="1600" b="0" i="0">
+                        <a:solidFill>
+                          <a:srgbClr val="FFFFFF"/>
+                        </a:solidFill>
+                        <a:effectLst/>
+                        <a:latin typeface="-apple-system-body"/>
+                      </a:endParaRPr>
+                    </a:p>
+                  </a:txBody>
+                  <a:tcPr anchor="ctr"/>
+                </a:tc>
+                <a:extLst>
+                  <a:ext uri="{0D108BD9-81ED-4DB2-BD59-A6C34878D82A}">
+                    <a16:rowId xmlns:a16="http://schemas.microsoft.com/office/drawing/2014/main" val="1221828974"/>
+                  </a:ext>
+                </a:extLst>
+              </a:tr>
+              <a:tr h="399922">
+                <a:tc>
+                  <a:txBody>
+                    <a:bodyPr/>
+                    <a:lstStyle/>
+                    <a:p>
+                      <a:pPr marL="0" marR="0" algn="l">
+                        <a:buNone/>
+                      </a:pPr>
+                      <a:r>
+                        <a:rPr lang="en-US" sz="1600">
+                          <a:effectLst/>
+                        </a:rPr>
+                        <a:t>Between</a:t>
+                      </a:r>
+                      <a:endParaRPr lang="en-US" sz="1600" b="0" i="0">
+                        <a:solidFill>
+                          <a:srgbClr val="FFFFFF"/>
+                        </a:solidFill>
+                        <a:effectLst/>
+                        <a:latin typeface="-apple-system-body"/>
+                      </a:endParaRPr>
+                    </a:p>
+                  </a:txBody>
+                  <a:tcPr anchor="ctr"/>
+                </a:tc>
+                <a:tc>
+                  <a:txBody>
+                    <a:bodyPr/>
+                    <a:lstStyle/>
+                    <a:p>
+                      <a:pPr marL="0" marR="0" algn="l">
+                        <a:buNone/>
+                      </a:pPr>
+                      <a:r>
+                        <a:rPr lang="en-US" sz="1600">
+                          <a:effectLst/>
+                        </a:rPr>
+                        <a:t>findByAgeBetween(int start, int end)</a:t>
+                      </a:r>
+                      <a:endParaRPr lang="en-US" sz="1600" b="0" i="0">
+                        <a:solidFill>
+                          <a:srgbClr val="FFFFFF"/>
+                        </a:solidFill>
+                        <a:effectLst/>
+                        <a:latin typeface="-apple-system-body"/>
+                      </a:endParaRPr>
+                    </a:p>
+                  </a:txBody>
+                  <a:tcPr anchor="ctr"/>
+                </a:tc>
+                <a:extLst>
+                  <a:ext uri="{0D108BD9-81ED-4DB2-BD59-A6C34878D82A}">
+                    <a16:rowId xmlns:a16="http://schemas.microsoft.com/office/drawing/2014/main" val="173934656"/>
+                  </a:ext>
+                </a:extLst>
+              </a:tr>
+              <a:tr h="399922">
+                <a:tc>
+                  <a:txBody>
+                    <a:bodyPr/>
+                    <a:lstStyle/>
+                    <a:p>
+                      <a:pPr marL="0" marR="0" algn="l">
+                        <a:buNone/>
+                      </a:pPr>
+                      <a:r>
+                        <a:rPr lang="en-US" sz="1600">
+                          <a:effectLst/>
+                        </a:rPr>
+                        <a:t>LessThan / GreaterThan</a:t>
+                      </a:r>
+                      <a:endParaRPr lang="en-US" sz="1600" b="0" i="0">
+                        <a:solidFill>
+                          <a:srgbClr val="FFFFFF"/>
+                        </a:solidFill>
+                        <a:effectLst/>
+                        <a:latin typeface="-apple-system-body"/>
+                      </a:endParaRPr>
+                    </a:p>
+                  </a:txBody>
+                  <a:tcPr anchor="ctr"/>
+                </a:tc>
+                <a:tc>
+                  <a:txBody>
+                    <a:bodyPr/>
+                    <a:lstStyle/>
+                    <a:p>
+                      <a:pPr marL="0" marR="0" algn="l">
+                        <a:buNone/>
+                      </a:pPr>
+                      <a:r>
+                        <a:rPr lang="en-US" sz="1600">
+                          <a:effectLst/>
+                        </a:rPr>
+                        <a:t>findByPriceLessThan(double price)</a:t>
+                      </a:r>
+                      <a:endParaRPr lang="en-US" sz="1600" b="0" i="0">
+                        <a:solidFill>
+                          <a:srgbClr val="FFFFFF"/>
+                        </a:solidFill>
+                        <a:effectLst/>
+                        <a:latin typeface="-apple-system-body"/>
+                      </a:endParaRPr>
+                    </a:p>
+                  </a:txBody>
+                  <a:tcPr anchor="ctr"/>
+                </a:tc>
+                <a:extLst>
+                  <a:ext uri="{0D108BD9-81ED-4DB2-BD59-A6C34878D82A}">
+                    <a16:rowId xmlns:a16="http://schemas.microsoft.com/office/drawing/2014/main" val="1127594058"/>
+                  </a:ext>
+                </a:extLst>
+              </a:tr>
+              <a:tr h="399922">
+                <a:tc>
+                  <a:txBody>
+                    <a:bodyPr/>
+                    <a:lstStyle/>
+                    <a:p>
+                      <a:pPr marL="0" marR="0" algn="l">
+                        <a:buNone/>
+                      </a:pPr>
+                      <a:r>
+                        <a:rPr lang="en-US" sz="1600">
+                          <a:effectLst/>
+                        </a:rPr>
+                        <a:t>Like / Containing / In</a:t>
+                      </a:r>
+                      <a:endParaRPr lang="en-US" sz="1600" b="0" i="0">
+                        <a:solidFill>
+                          <a:srgbClr val="FFFFFF"/>
+                        </a:solidFill>
+                        <a:effectLst/>
+                        <a:latin typeface="-apple-system-body"/>
+                      </a:endParaRPr>
+                    </a:p>
+                  </a:txBody>
+                  <a:tcPr anchor="ctr"/>
+                </a:tc>
+                <a:tc>
+                  <a:txBody>
+                    <a:bodyPr/>
+                    <a:lstStyle/>
+                    <a:p>
+                      <a:pPr marL="0" marR="0" algn="l">
+                        <a:buNone/>
+                      </a:pPr>
+                      <a:r>
+                        <a:rPr lang="en-US" sz="1600">
+                          <a:effectLst/>
+                        </a:rPr>
+                        <a:t>findByTitleContaining(String keyword)</a:t>
+                      </a:r>
+                      <a:endParaRPr lang="en-US" sz="1600" b="0" i="0">
+                        <a:solidFill>
+                          <a:srgbClr val="FFFFFF"/>
+                        </a:solidFill>
+                        <a:effectLst/>
+                        <a:latin typeface="-apple-system-body"/>
+                      </a:endParaRPr>
+                    </a:p>
+                  </a:txBody>
+                  <a:tcPr anchor="ctr"/>
+                </a:tc>
+                <a:extLst>
+                  <a:ext uri="{0D108BD9-81ED-4DB2-BD59-A6C34878D82A}">
+                    <a16:rowId xmlns:a16="http://schemas.microsoft.com/office/drawing/2014/main" val="2666326254"/>
+                  </a:ext>
+                </a:extLst>
+              </a:tr>
+              <a:tr h="399922">
+                <a:tc>
+                  <a:txBody>
+                    <a:bodyPr/>
+                    <a:lstStyle/>
+                    <a:p>
+                      <a:pPr marL="0" marR="0" algn="l">
+                        <a:buNone/>
+                      </a:pPr>
+                      <a:r>
+                        <a:rPr lang="en-US" sz="1600">
+                          <a:effectLst/>
+                        </a:rPr>
+                        <a:t>Null Checks</a:t>
+                      </a:r>
+                      <a:endParaRPr lang="en-US" sz="1600" b="0" i="0">
+                        <a:solidFill>
+                          <a:srgbClr val="FFFFFF"/>
+                        </a:solidFill>
+                        <a:effectLst/>
+                        <a:latin typeface="-apple-system-body"/>
+                      </a:endParaRPr>
+                    </a:p>
+                  </a:txBody>
+                  <a:tcPr anchor="ctr"/>
+                </a:tc>
+                <a:tc>
+                  <a:txBody>
+                    <a:bodyPr/>
+                    <a:lstStyle/>
+                    <a:p>
+                      <a:pPr marL="0" marR="0" algn="l">
+                        <a:buNone/>
+                      </a:pPr>
+                      <a:r>
+                        <a:rPr lang="en-US" sz="1600">
+                          <a:effectLst/>
+                        </a:rPr>
+                        <a:t>findByDeletedAtIsNull()</a:t>
+                      </a:r>
+                      <a:endParaRPr lang="en-US" sz="1600" b="0" i="0">
+                        <a:solidFill>
+                          <a:srgbClr val="FFFFFF"/>
+                        </a:solidFill>
+                        <a:effectLst/>
+                        <a:latin typeface="-apple-system-body"/>
+                      </a:endParaRPr>
+                    </a:p>
+                  </a:txBody>
+                  <a:tcPr anchor="ctr"/>
+                </a:tc>
+                <a:extLst>
+                  <a:ext uri="{0D108BD9-81ED-4DB2-BD59-A6C34878D82A}">
+                    <a16:rowId xmlns:a16="http://schemas.microsoft.com/office/drawing/2014/main" val="3630076533"/>
+                  </a:ext>
+                </a:extLst>
+              </a:tr>
+              <a:tr h="399922">
+                <a:tc>
+                  <a:txBody>
+                    <a:bodyPr/>
+                    <a:lstStyle/>
+                    <a:p>
+                      <a:pPr marL="0" marR="0" algn="l">
+                        <a:buNone/>
+                      </a:pPr>
+                      <a:r>
+                        <a:rPr lang="en-US" sz="1600">
+                          <a:effectLst/>
+                        </a:rPr>
+                        <a:t>IgnoreCase</a:t>
+                      </a:r>
+                      <a:endParaRPr lang="en-US" sz="1600" b="0" i="0">
+                        <a:solidFill>
+                          <a:srgbClr val="FFFFFF"/>
+                        </a:solidFill>
+                        <a:effectLst/>
+                        <a:latin typeface="-apple-system-body"/>
+                      </a:endParaRPr>
+                    </a:p>
+                  </a:txBody>
+                  <a:tcPr anchor="ctr"/>
+                </a:tc>
+                <a:tc>
+                  <a:txBody>
+                    <a:bodyPr/>
+                    <a:lstStyle/>
+                    <a:p>
+                      <a:pPr marL="0" marR="0" algn="l">
+                        <a:buNone/>
+                      </a:pPr>
+                      <a:r>
+                        <a:rPr lang="en-US" sz="1600">
+                          <a:effectLst/>
+                        </a:rPr>
+                        <a:t>findByUsernameIgnoreCase(String user)</a:t>
+                      </a:r>
+                      <a:endParaRPr lang="en-US" sz="1600" b="0" i="0">
+                        <a:solidFill>
+                          <a:srgbClr val="FFFFFF"/>
+                        </a:solidFill>
+                        <a:effectLst/>
+                        <a:latin typeface="-apple-system-body"/>
+                      </a:endParaRPr>
+                    </a:p>
+                  </a:txBody>
+                  <a:tcPr anchor="ctr"/>
+                </a:tc>
+                <a:extLst>
+                  <a:ext uri="{0D108BD9-81ED-4DB2-BD59-A6C34878D82A}">
+                    <a16:rowId xmlns:a16="http://schemas.microsoft.com/office/drawing/2014/main" val="959836801"/>
+                  </a:ext>
+                </a:extLst>
+              </a:tr>
+              <a:tr h="399922">
+                <a:tc>
+                  <a:txBody>
+                    <a:bodyPr/>
+                    <a:lstStyle/>
+                    <a:p>
+                      <a:pPr marL="0" marR="0" algn="l">
+                        <a:buNone/>
+                      </a:pPr>
+                      <a:r>
+                        <a:rPr lang="en-US" sz="1600">
+                          <a:effectLst/>
+                        </a:rPr>
+                        <a:t>Sorting</a:t>
+                      </a:r>
+                      <a:endParaRPr lang="en-US" sz="1600" b="0" i="0">
+                        <a:solidFill>
+                          <a:srgbClr val="FFFFFF"/>
+                        </a:solidFill>
+                        <a:effectLst/>
+                        <a:latin typeface="-apple-system-body"/>
+                      </a:endParaRPr>
+                    </a:p>
+                  </a:txBody>
+                  <a:tcPr anchor="ctr"/>
+                </a:tc>
+                <a:tc>
+                  <a:txBody>
+                    <a:bodyPr/>
+                    <a:lstStyle/>
+                    <a:p>
+                      <a:pPr marL="0" marR="0" algn="l">
+                        <a:buNone/>
+                      </a:pPr>
+                      <a:r>
+                        <a:rPr lang="en-US" sz="1600" dirty="0" err="1">
+                          <a:effectLst/>
+                        </a:rPr>
+                        <a:t>findByStatusOrderByLastNameAsc</a:t>
+                      </a:r>
+                      <a:r>
+                        <a:rPr lang="en-US" sz="1600" dirty="0">
+                          <a:effectLst/>
+                        </a:rPr>
+                        <a:t>(String s)</a:t>
+                      </a:r>
+                      <a:endParaRPr lang="en-US" sz="1600" b="0" i="0" dirty="0">
+                        <a:solidFill>
+                          <a:srgbClr val="FFFFFF"/>
+                        </a:solidFill>
+                        <a:effectLst/>
+                        <a:latin typeface="-apple-system-body"/>
+                      </a:endParaRPr>
+                    </a:p>
+                  </a:txBody>
+                  <a:tcPr anchor="ctr"/>
+                </a:tc>
+                <a:extLst>
+                  <a:ext uri="{0D108BD9-81ED-4DB2-BD59-A6C34878D82A}">
+                    <a16:rowId xmlns:a16="http://schemas.microsoft.com/office/drawing/2014/main" val="4177346045"/>
+                  </a:ext>
+                </a:extLst>
+              </a:tr>
+            </a:tbl>
+          </a:graphicData>
+        </a:graphic>
+      </p:graphicFrame>
+    </p:spTree>
+    <p:extLst>
+      <p:ext uri="{BB962C8B-B14F-4D97-AF65-F5344CB8AC3E}">
+        <p14:creationId xmlns:p14="http://schemas.microsoft.com/office/powerpoint/2010/main" val="3005442554"/>
+      </p:ext>
+    </p:extLst>
+  </p:cSld>
+  <p:clrMapOvr>
+    <a:masterClrMapping/>
+  </p:clrMapOvr>
+</p:sld>
+</file>
+
+<file path=ppt/slides/slide28.xml><?xml version="1.0" encoding="utf-8"?>
+<p:sld xmlns:a="http://schemas.openxmlformats.org/drawingml/2006/main" xmlns:r="http://schemas.openxmlformats.org/officeDocument/2006/relationships" xmlns:p="http://schemas.openxmlformats.org/presentationml/2006/main">
+  <p:cSld>
+    <p:spTree>
+      <p:nvGrpSpPr>
+        <p:cNvPr id="1" name=""/>
+        <p:cNvGrpSpPr/>
+        <p:nvPr/>
+      </p:nvGrpSpPr>
+      <p:grpSpPr>
+        <a:xfrm>
+          <a:off x="0" y="0"/>
+          <a:ext cx="0" cy="0"/>
+          <a:chOff x="0" y="0"/>
+          <a:chExt cx="0" cy="0"/>
+        </a:xfrm>
+      </p:grpSpPr>
+      <p:sp>
+        <p:nvSpPr>
+          <p:cNvPr id="2" name="Title 1">
+            <a:extLst>
+              <a:ext uri="{FF2B5EF4-FFF2-40B4-BE49-F238E27FC236}">
+                <a16:creationId xmlns:a16="http://schemas.microsoft.com/office/drawing/2014/main" id="{3774C515-2606-6CE2-FF29-D4F22C1CE375}"/>
+              </a:ext>
+            </a:extLst>
+          </p:cNvPr>
+          <p:cNvSpPr>
+            <a:spLocks noGrp="1"/>
+          </p:cNvSpPr>
+          <p:nvPr>
+            <p:ph type="title"/>
+          </p:nvPr>
+        </p:nvSpPr>
+        <p:spPr/>
+        <p:txBody>
+          <a:bodyPr/>
+          <a:lstStyle/>
+          <a:p>
+            <a:r>
+              <a:rPr lang="en-US" dirty="0"/>
+              <a:t>Pitfalls of Derived Query methods</a:t>
+            </a:r>
+          </a:p>
+        </p:txBody>
+      </p:sp>
+      <p:sp>
+        <p:nvSpPr>
+          <p:cNvPr id="3" name="Content Placeholder 2">
+            <a:extLst>
+              <a:ext uri="{FF2B5EF4-FFF2-40B4-BE49-F238E27FC236}">
+                <a16:creationId xmlns:a16="http://schemas.microsoft.com/office/drawing/2014/main" id="{63EDFDF8-7F02-093C-8DEB-39290696C378}"/>
+              </a:ext>
+            </a:extLst>
+          </p:cNvPr>
+          <p:cNvSpPr>
+            <a:spLocks noGrp="1"/>
+          </p:cNvSpPr>
+          <p:nvPr>
+            <p:ph idx="1"/>
+          </p:nvPr>
+        </p:nvSpPr>
+        <p:spPr>
+          <a:xfrm>
+            <a:off x="581192" y="1869926"/>
+            <a:ext cx="11029615" cy="3552679"/>
+          </a:xfrm>
+        </p:spPr>
+        <p:txBody>
+          <a:bodyPr>
+            <a:normAutofit lnSpcReduction="10000"/>
+          </a:bodyPr>
+          <a:lstStyle/>
+          <a:p>
+            <a:r>
+              <a:rPr lang="en-US" dirty="0"/>
+              <a:t>Avoid complex relationship traversal</a:t>
+            </a:r>
+          </a:p>
+          <a:p>
+            <a:r>
+              <a:rPr lang="en-US" dirty="0"/>
+              <a:t>Avoid long method names:</a:t>
+            </a:r>
+          </a:p>
+          <a:p>
+            <a:pPr lvl="1"/>
+            <a:r>
+              <a:rPr lang="en-US" dirty="0"/>
+              <a:t>Instead of this (in repo):</a:t>
+            </a:r>
+          </a:p>
+          <a:p>
+            <a:pPr marL="324000" lvl="1" indent="0">
+              <a:buNone/>
+            </a:pPr>
+            <a:endParaRPr lang="en-US" dirty="0"/>
+          </a:p>
+          <a:p>
+            <a:pPr marL="324000" lvl="1" indent="0">
+              <a:buNone/>
+            </a:pPr>
+            <a:endParaRPr lang="en-US" dirty="0"/>
+          </a:p>
+          <a:p>
+            <a:pPr lvl="1"/>
+            <a:r>
+              <a:rPr lang="en-US" dirty="0"/>
+              <a:t>We could do this (in repo):</a:t>
+            </a:r>
+          </a:p>
+          <a:p>
+            <a:pPr lvl="1"/>
+            <a:endParaRPr lang="en-US" dirty="0"/>
+          </a:p>
+          <a:p>
+            <a:pPr lvl="1"/>
+            <a:endParaRPr lang="en-US" dirty="0"/>
+          </a:p>
+          <a:p>
+            <a:pPr lvl="1"/>
+            <a:endParaRPr lang="en-US" dirty="0"/>
+          </a:p>
+          <a:p>
+            <a:pPr lvl="1"/>
+            <a:r>
+              <a:rPr lang="en-US" dirty="0"/>
+              <a:t>Then our service can:</a:t>
+            </a:r>
+          </a:p>
+        </p:txBody>
+      </p:sp>
+      <p:sp>
+        <p:nvSpPr>
+          <p:cNvPr id="5" name="TextBox 4">
+            <a:extLst>
+              <a:ext uri="{FF2B5EF4-FFF2-40B4-BE49-F238E27FC236}">
+                <a16:creationId xmlns:a16="http://schemas.microsoft.com/office/drawing/2014/main" id="{6D868B76-CA5F-8226-7DF0-245E153A851B}"/>
+              </a:ext>
+            </a:extLst>
+          </p:cNvPr>
+          <p:cNvSpPr txBox="1"/>
+          <p:nvPr/>
+        </p:nvSpPr>
+        <p:spPr>
+          <a:xfrm>
+            <a:off x="2400301" y="3029130"/>
+            <a:ext cx="6097772" cy="369332"/>
+          </a:xfrm>
+          <a:prstGeom prst="rect">
+            <a:avLst/>
+          </a:prstGeom>
+          <a:noFill/>
+        </p:spPr>
+        <p:txBody>
+          <a:bodyPr wrap="square">
+            <a:spAutoFit/>
+          </a:bodyPr>
+          <a:lstStyle/>
+          <a:p>
+            <a:r>
+              <a:rPr lang="en-US" dirty="0"/>
+              <a:t>List&lt;Student&gt; </a:t>
+            </a:r>
+            <a:r>
+              <a:rPr lang="en-US" dirty="0" err="1"/>
+              <a:t>findByLastNameOrderByFirstNameAsc</a:t>
+            </a:r>
+            <a:r>
+              <a:rPr lang="en-US" dirty="0"/>
+              <a:t>();</a:t>
+            </a:r>
+          </a:p>
+        </p:txBody>
+      </p:sp>
+      <p:sp>
+        <p:nvSpPr>
+          <p:cNvPr id="7" name="TextBox 6">
+            <a:extLst>
+              <a:ext uri="{FF2B5EF4-FFF2-40B4-BE49-F238E27FC236}">
+                <a16:creationId xmlns:a16="http://schemas.microsoft.com/office/drawing/2014/main" id="{6DB5B9AA-7714-16D1-DB39-58521C9A7484}"/>
+              </a:ext>
+            </a:extLst>
+          </p:cNvPr>
+          <p:cNvSpPr txBox="1"/>
+          <p:nvPr/>
+        </p:nvSpPr>
+        <p:spPr>
+          <a:xfrm>
+            <a:off x="2400301" y="3957501"/>
+            <a:ext cx="6097772" cy="1200329"/>
+          </a:xfrm>
+          <a:prstGeom prst="rect">
+            <a:avLst/>
+          </a:prstGeom>
+          <a:noFill/>
+        </p:spPr>
+        <p:txBody>
+          <a:bodyPr wrap="square">
+            <a:spAutoFit/>
+          </a:bodyPr>
+          <a:lstStyle/>
+          <a:p>
+            <a:r>
+              <a:rPr lang="en-US" dirty="0"/>
+              <a:t>List&lt;Student&gt; </a:t>
+            </a:r>
+            <a:r>
+              <a:rPr lang="en-US" dirty="0" err="1"/>
+              <a:t>findByLastName</a:t>
+            </a:r>
+            <a:r>
+              <a:rPr lang="en-US" dirty="0"/>
+              <a:t>(</a:t>
+            </a:r>
+          </a:p>
+          <a:p>
+            <a:r>
+              <a:rPr lang="en-US" dirty="0"/>
+              <a:t>    String </a:t>
+            </a:r>
+            <a:r>
+              <a:rPr lang="en-US" dirty="0" err="1"/>
+              <a:t>lastName</a:t>
+            </a:r>
+            <a:r>
+              <a:rPr lang="en-US" dirty="0"/>
+              <a:t>,</a:t>
+            </a:r>
+          </a:p>
+          <a:p>
+            <a:r>
+              <a:rPr lang="en-US" dirty="0"/>
+              <a:t>    Sort </a:t>
+            </a:r>
+            <a:r>
+              <a:rPr lang="en-US" dirty="0" err="1"/>
+              <a:t>sort</a:t>
+            </a:r>
+            <a:endParaRPr lang="en-US" dirty="0"/>
+          </a:p>
+          <a:p>
+            <a:r>
+              <a:rPr lang="en-US" dirty="0"/>
+              <a:t>);</a:t>
+            </a:r>
+          </a:p>
+        </p:txBody>
+      </p:sp>
+      <p:sp>
+        <p:nvSpPr>
+          <p:cNvPr id="9" name="TextBox 8">
+            <a:extLst>
+              <a:ext uri="{FF2B5EF4-FFF2-40B4-BE49-F238E27FC236}">
+                <a16:creationId xmlns:a16="http://schemas.microsoft.com/office/drawing/2014/main" id="{6C223FF4-22E7-0B5F-3103-16860ACD5A16}"/>
+              </a:ext>
+            </a:extLst>
+          </p:cNvPr>
+          <p:cNvSpPr txBox="1"/>
+          <p:nvPr/>
+        </p:nvSpPr>
+        <p:spPr>
+          <a:xfrm>
+            <a:off x="2400301" y="5422605"/>
+            <a:ext cx="6097772" cy="1200329"/>
+          </a:xfrm>
+          <a:prstGeom prst="rect">
+            <a:avLst/>
+          </a:prstGeom>
+          <a:noFill/>
+        </p:spPr>
+        <p:txBody>
+          <a:bodyPr wrap="square">
+            <a:spAutoFit/>
+          </a:bodyPr>
+          <a:lstStyle/>
+          <a:p>
+            <a:r>
+              <a:rPr lang="en-US" dirty="0" err="1"/>
+              <a:t>studentRepository.findByLastName</a:t>
+            </a:r>
+            <a:r>
+              <a:rPr lang="en-US" dirty="0"/>
+              <a:t>(</a:t>
+            </a:r>
+          </a:p>
+          <a:p>
+            <a:r>
+              <a:rPr lang="en-US" dirty="0"/>
+              <a:t>    "Smith",</a:t>
+            </a:r>
+          </a:p>
+          <a:p>
+            <a:r>
+              <a:rPr lang="en-US" dirty="0"/>
+              <a:t>    Sort.by("</a:t>
+            </a:r>
+            <a:r>
+              <a:rPr lang="en-US" dirty="0" err="1"/>
+              <a:t>firstName</a:t>
+            </a:r>
+            <a:r>
+              <a:rPr lang="en-US" dirty="0"/>
+              <a:t>").ascending()</a:t>
+            </a:r>
+          </a:p>
+          <a:p>
+            <a:r>
+              <a:rPr lang="en-US" dirty="0"/>
+              <a:t>);</a:t>
+            </a:r>
+          </a:p>
+        </p:txBody>
+      </p:sp>
+    </p:spTree>
+    <p:extLst>
+      <p:ext uri="{BB962C8B-B14F-4D97-AF65-F5344CB8AC3E}">
+        <p14:creationId xmlns:p14="http://schemas.microsoft.com/office/powerpoint/2010/main" val="2242450303"/>
+      </p:ext>
+    </p:extLst>
+  </p:cSld>
+  <p:clrMapOvr>
+    <a:masterClrMapping/>
+  </p:clrMapOvr>
+</p:sld>
+</file>
+
+<file path=ppt/slides/slide29.xml><?xml version="1.0" encoding="utf-8"?>
+<p:sld xmlns:a="http://schemas.openxmlformats.org/drawingml/2006/main" xmlns:r="http://schemas.openxmlformats.org/officeDocument/2006/relationships" xmlns:p="http://schemas.openxmlformats.org/presentationml/2006/main">
+  <p:cSld>
+    <p:spTree>
+      <p:nvGrpSpPr>
+        <p:cNvPr id="1" name=""/>
+        <p:cNvGrpSpPr/>
+        <p:nvPr/>
+      </p:nvGrpSpPr>
+      <p:grpSpPr>
+        <a:xfrm>
+          <a:off x="0" y="0"/>
+          <a:ext cx="0" cy="0"/>
+          <a:chOff x="0" y="0"/>
+          <a:chExt cx="0" cy="0"/>
+        </a:xfrm>
+      </p:grpSpPr>
+      <p:sp>
+        <p:nvSpPr>
+          <p:cNvPr id="2" name="Title 1">
+            <a:extLst>
+              <a:ext uri="{FF2B5EF4-FFF2-40B4-BE49-F238E27FC236}">
+                <a16:creationId xmlns:a16="http://schemas.microsoft.com/office/drawing/2014/main" id="{38D6A8ED-86B2-9064-A873-C69510159503}"/>
+              </a:ext>
+            </a:extLst>
+          </p:cNvPr>
+          <p:cNvSpPr>
+            <a:spLocks noGrp="1"/>
+          </p:cNvSpPr>
+          <p:nvPr>
+            <p:ph type="title"/>
+          </p:nvPr>
+        </p:nvSpPr>
+        <p:spPr/>
+        <p:txBody>
+          <a:bodyPr/>
+          <a:lstStyle/>
+          <a:p>
+            <a:r>
+              <a:rPr lang="en-US" dirty="0"/>
+              <a:t>@query</a:t>
+            </a:r>
+          </a:p>
+        </p:txBody>
+      </p:sp>
+      <p:sp>
+        <p:nvSpPr>
+          <p:cNvPr id="3" name="Content Placeholder 2">
+            <a:extLst>
+              <a:ext uri="{FF2B5EF4-FFF2-40B4-BE49-F238E27FC236}">
+                <a16:creationId xmlns:a16="http://schemas.microsoft.com/office/drawing/2014/main" id="{B912218D-C0F2-DF6F-0637-747A3320794D}"/>
+              </a:ext>
+            </a:extLst>
+          </p:cNvPr>
+          <p:cNvSpPr>
+            <a:spLocks noGrp="1"/>
+          </p:cNvSpPr>
+          <p:nvPr>
+            <p:ph idx="1"/>
+          </p:nvPr>
+        </p:nvSpPr>
+        <p:spPr>
+          <a:xfrm>
+            <a:off x="581192" y="2180497"/>
+            <a:ext cx="11029615" cy="1013800"/>
+          </a:xfrm>
+        </p:spPr>
+        <p:txBody>
+          <a:bodyPr/>
+          <a:lstStyle/>
+          <a:p>
+            <a:r>
+              <a:rPr lang="en-US" dirty="0"/>
+              <a:t>When derived query methods aren’t enough, we can always use @Query to write JPQL</a:t>
+            </a:r>
+          </a:p>
+          <a:p>
+            <a:r>
+              <a:rPr lang="en-US" dirty="0"/>
+              <a:t>This is great for more complex queries</a:t>
+            </a:r>
+          </a:p>
+        </p:txBody>
+      </p:sp>
+      <p:pic>
+        <p:nvPicPr>
+          <p:cNvPr id="7" name="Picture 6">
+            <a:extLst>
+              <a:ext uri="{FF2B5EF4-FFF2-40B4-BE49-F238E27FC236}">
+                <a16:creationId xmlns:a16="http://schemas.microsoft.com/office/drawing/2014/main" id="{EBB29642-FA19-9307-B40A-E185ECA80D8E}"/>
+              </a:ext>
+            </a:extLst>
+          </p:cNvPr>
+          <p:cNvPicPr>
+            <a:picLocks noChangeAspect="1"/>
+          </p:cNvPicPr>
+          <p:nvPr/>
+        </p:nvPicPr>
+        <p:blipFill>
+          <a:blip r:embed="rId2"/>
+          <a:stretch>
+            <a:fillRect/>
+          </a:stretch>
+        </p:blipFill>
+        <p:spPr>
+          <a:xfrm>
+            <a:off x="2599836" y="3476060"/>
+            <a:ext cx="6992326" cy="2429214"/>
+          </a:xfrm>
+          <a:prstGeom prst="rect">
+            <a:avLst/>
+          </a:prstGeom>
+        </p:spPr>
+      </p:pic>
+    </p:spTree>
+    <p:extLst>
+      <p:ext uri="{BB962C8B-B14F-4D97-AF65-F5344CB8AC3E}">
+        <p14:creationId xmlns:p14="http://schemas.microsoft.com/office/powerpoint/2010/main" val="3892297375"/>
+      </p:ext>
+    </p:extLst>
+  </p:cSld>
+  <p:clrMapOvr>
+    <a:masterClrMapping/>
+  </p:clrMapOvr>
+</p:sld>
+</file>
+
+<file path=ppt/slides/slide3.xml><?xml version="1.0" encoding="utf-8"?>
+<p:sld xmlns:a="http://schemas.openxmlformats.org/drawingml/2006/main" xmlns:r="http://schemas.openxmlformats.org/officeDocument/2006/relationships" xmlns:p="http://schemas.openxmlformats.org/presentationml/2006/main">
+  <p:cSld>
+    <p:spTree>
+      <p:nvGrpSpPr>
+        <p:cNvPr id="1" name=""/>
+        <p:cNvGrpSpPr/>
+        <p:nvPr/>
+      </p:nvGrpSpPr>
+      <p:grpSpPr>
+        <a:xfrm>
+          <a:off x="0" y="0"/>
+          <a:ext cx="0" cy="0"/>
+          <a:chOff x="0" y="0"/>
+          <a:chExt cx="0" cy="0"/>
+        </a:xfrm>
+      </p:grpSpPr>
+      <p:sp>
+        <p:nvSpPr>
+          <p:cNvPr id="2" name="Title 1">
+            <a:extLst>
+              <a:ext uri="{FF2B5EF4-FFF2-40B4-BE49-F238E27FC236}">
+                <a16:creationId xmlns:a16="http://schemas.microsoft.com/office/drawing/2014/main" id="{B6E07699-A587-AD13-366E-8CC5FF4CEEF7}"/>
+              </a:ext>
+            </a:extLst>
+          </p:cNvPr>
+          <p:cNvSpPr>
+            <a:spLocks noGrp="1"/>
+          </p:cNvSpPr>
+          <p:nvPr>
+            <p:ph type="title"/>
+          </p:nvPr>
+        </p:nvSpPr>
+        <p:spPr/>
+        <p:txBody>
+          <a:bodyPr/>
+          <a:lstStyle/>
+          <a:p>
+            <a:r>
+              <a:rPr lang="en-US" dirty="0"/>
+              <a:t>What is JPA?</a:t>
+            </a:r>
+          </a:p>
+        </p:txBody>
+      </p:sp>
+      <p:sp>
+        <p:nvSpPr>
+          <p:cNvPr id="3" name="Content Placeholder 2">
+            <a:extLst>
+              <a:ext uri="{FF2B5EF4-FFF2-40B4-BE49-F238E27FC236}">
+                <a16:creationId xmlns:a16="http://schemas.microsoft.com/office/drawing/2014/main" id="{D64CCE71-301C-D88A-5A4C-8AD9189506E6}"/>
+              </a:ext>
+            </a:extLst>
+          </p:cNvPr>
+          <p:cNvSpPr>
+            <a:spLocks noGrp="1"/>
+          </p:cNvSpPr>
+          <p:nvPr>
+            <p:ph idx="1"/>
+          </p:nvPr>
+        </p:nvSpPr>
+        <p:spPr>
+          <a:xfrm>
+            <a:off x="581193" y="2180496"/>
+            <a:ext cx="5096586" cy="4092713"/>
+          </a:xfrm>
+        </p:spPr>
+        <p:txBody>
+          <a:bodyPr/>
+          <a:lstStyle/>
+          <a:p>
+            <a:r>
+              <a:rPr lang="en-US" dirty="0"/>
+              <a:t>Jakarta Persistence API (JPA) – previously known as Java Persistence API</a:t>
+            </a:r>
+          </a:p>
+          <a:p>
+            <a:pPr lvl="1"/>
+            <a:r>
+              <a:rPr lang="en-US" dirty="0"/>
+              <a:t>Standard API for Object Relational Mapping</a:t>
+            </a:r>
+          </a:p>
+          <a:p>
+            <a:pPr lvl="1"/>
+            <a:r>
+              <a:rPr lang="en-US" dirty="0"/>
+              <a:t>Is a specification</a:t>
+            </a:r>
+          </a:p>
+          <a:p>
+            <a:pPr lvl="1"/>
+            <a:r>
+              <a:rPr lang="en-US" dirty="0"/>
+              <a:t>Includes interfaces</a:t>
+            </a:r>
+          </a:p>
+          <a:p>
+            <a:pPr lvl="1"/>
+            <a:r>
+              <a:rPr lang="en-US" dirty="0"/>
+              <a:t>Requires implementations to use</a:t>
+            </a:r>
+          </a:p>
+          <a:p>
+            <a:pPr lvl="1"/>
+            <a:r>
+              <a:rPr lang="en-US" dirty="0"/>
+              <a:t>Hibernate is one way we can implement JPA </a:t>
+            </a:r>
+          </a:p>
+        </p:txBody>
+      </p:sp>
+      <p:pic>
+        <p:nvPicPr>
+          <p:cNvPr id="5" name="Picture 4">
+            <a:extLst>
+              <a:ext uri="{FF2B5EF4-FFF2-40B4-BE49-F238E27FC236}">
+                <a16:creationId xmlns:a16="http://schemas.microsoft.com/office/drawing/2014/main" id="{88D308B2-5C8A-3D8B-DC61-D9EEB618683C}"/>
+              </a:ext>
+            </a:extLst>
+          </p:cNvPr>
+          <p:cNvPicPr>
+            <a:picLocks noChangeAspect="1"/>
+          </p:cNvPicPr>
+          <p:nvPr/>
+        </p:nvPicPr>
+        <p:blipFill>
+          <a:blip r:embed="rId2"/>
+          <a:stretch>
+            <a:fillRect/>
+          </a:stretch>
+        </p:blipFill>
+        <p:spPr>
+          <a:xfrm>
+            <a:off x="6096000" y="3212298"/>
+            <a:ext cx="5096586" cy="2029108"/>
+          </a:xfrm>
+          <a:prstGeom prst="rect">
+            <a:avLst/>
+          </a:prstGeom>
+        </p:spPr>
+      </p:pic>
+    </p:spTree>
+    <p:extLst>
+      <p:ext uri="{BB962C8B-B14F-4D97-AF65-F5344CB8AC3E}">
+        <p14:creationId xmlns:p14="http://schemas.microsoft.com/office/powerpoint/2010/main" val="989935227"/>
+      </p:ext>
+    </p:extLst>
+  </p:cSld>
+  <p:clrMapOvr>
+    <a:masterClrMapping/>
+  </p:clrMapOvr>
+</p:sld>
+</file>
+
+<file path=ppt/slides/slide30.xml><?xml version="1.0" encoding="utf-8"?>
+<p:sld xmlns:a="http://schemas.openxmlformats.org/drawingml/2006/main" xmlns:r="http://schemas.openxmlformats.org/officeDocument/2006/relationships" xmlns:p="http://schemas.openxmlformats.org/presentationml/2006/main">
+  <p:cSld>
+    <p:spTree>
+      <p:nvGrpSpPr>
+        <p:cNvPr id="1" name=""/>
+        <p:cNvGrpSpPr/>
+        <p:nvPr/>
+      </p:nvGrpSpPr>
+      <p:grpSpPr>
+        <a:xfrm>
+          <a:off x="0" y="0"/>
+          <a:ext cx="0" cy="0"/>
+          <a:chOff x="0" y="0"/>
+          <a:chExt cx="0" cy="0"/>
+        </a:xfrm>
+      </p:grpSpPr>
+      <p:sp>
+        <p:nvSpPr>
+          <p:cNvPr id="2" name="Title 1">
+            <a:extLst>
+              <a:ext uri="{FF2B5EF4-FFF2-40B4-BE49-F238E27FC236}">
+                <a16:creationId xmlns:a16="http://schemas.microsoft.com/office/drawing/2014/main" id="{C7DCDC7B-9684-F29E-D68A-31D02B63B820}"/>
+              </a:ext>
+            </a:extLst>
+          </p:cNvPr>
+          <p:cNvSpPr>
+            <a:spLocks noGrp="1"/>
+          </p:cNvSpPr>
+          <p:nvPr>
+            <p:ph type="title"/>
+          </p:nvPr>
+        </p:nvSpPr>
+        <p:spPr/>
+        <p:txBody>
+          <a:bodyPr/>
+          <a:lstStyle/>
+          <a:p>
+            <a:r>
+              <a:rPr lang="en-US" dirty="0"/>
+              <a:t>Pagination</a:t>
+            </a:r>
+          </a:p>
+        </p:txBody>
+      </p:sp>
+      <p:sp>
+        <p:nvSpPr>
+          <p:cNvPr id="3" name="Content Placeholder 2">
+            <a:extLst>
+              <a:ext uri="{FF2B5EF4-FFF2-40B4-BE49-F238E27FC236}">
+                <a16:creationId xmlns:a16="http://schemas.microsoft.com/office/drawing/2014/main" id="{CC9715A5-7941-E64D-5F8E-EDF0DAC1AC3F}"/>
+              </a:ext>
+            </a:extLst>
+          </p:cNvPr>
+          <p:cNvSpPr>
+            <a:spLocks noGrp="1"/>
+          </p:cNvSpPr>
+          <p:nvPr>
+            <p:ph idx="1"/>
+          </p:nvPr>
+        </p:nvSpPr>
+        <p:spPr>
+          <a:xfrm>
+            <a:off x="1703410" y="1715956"/>
+            <a:ext cx="11029615" cy="3678303"/>
+          </a:xfrm>
+        </p:spPr>
+        <p:txBody>
+          <a:bodyPr/>
+          <a:lstStyle/>
+          <a:p>
+            <a:r>
+              <a:rPr lang="en-US" dirty="0"/>
+              <a:t>Imports:</a:t>
+            </a:r>
+          </a:p>
+          <a:p>
+            <a:endParaRPr lang="en-US" dirty="0"/>
+          </a:p>
+          <a:p>
+            <a:r>
+              <a:rPr lang="en-US" dirty="0"/>
+              <a:t>In our repo interface:</a:t>
+            </a:r>
+          </a:p>
+          <a:p>
+            <a:endParaRPr lang="en-US" dirty="0"/>
+          </a:p>
+          <a:p>
+            <a:endParaRPr lang="en-US" dirty="0"/>
+          </a:p>
+          <a:p>
+            <a:endParaRPr lang="en-US" dirty="0"/>
+          </a:p>
+          <a:p>
+            <a:r>
+              <a:rPr lang="en-US" dirty="0"/>
+              <a:t>In our service:</a:t>
+            </a:r>
+          </a:p>
+        </p:txBody>
+      </p:sp>
+      <p:pic>
+        <p:nvPicPr>
+          <p:cNvPr id="5" name="Picture 4">
+            <a:extLst>
+              <a:ext uri="{FF2B5EF4-FFF2-40B4-BE49-F238E27FC236}">
+                <a16:creationId xmlns:a16="http://schemas.microsoft.com/office/drawing/2014/main" id="{8DE3FA36-433C-CB0B-4FAB-CFA490F9D18D}"/>
+              </a:ext>
+            </a:extLst>
+          </p:cNvPr>
+          <p:cNvPicPr>
+            <a:picLocks noChangeAspect="1"/>
+          </p:cNvPicPr>
+          <p:nvPr/>
+        </p:nvPicPr>
+        <p:blipFill>
+          <a:blip r:embed="rId2"/>
+          <a:stretch>
+            <a:fillRect/>
+          </a:stretch>
+        </p:blipFill>
+        <p:spPr>
+          <a:xfrm>
+            <a:off x="3929676" y="3516433"/>
+            <a:ext cx="3886742" cy="457264"/>
+          </a:xfrm>
+          <a:prstGeom prst="rect">
+            <a:avLst/>
+          </a:prstGeom>
+        </p:spPr>
+      </p:pic>
+      <p:pic>
+        <p:nvPicPr>
+          <p:cNvPr id="9" name="Picture 8">
+            <a:extLst>
+              <a:ext uri="{FF2B5EF4-FFF2-40B4-BE49-F238E27FC236}">
+                <a16:creationId xmlns:a16="http://schemas.microsoft.com/office/drawing/2014/main" id="{5E0994A5-DE36-DDE4-58F6-8F7B019ED6B3}"/>
+              </a:ext>
+            </a:extLst>
+          </p:cNvPr>
+          <p:cNvPicPr>
+            <a:picLocks noChangeAspect="1"/>
+          </p:cNvPicPr>
+          <p:nvPr/>
+        </p:nvPicPr>
+        <p:blipFill>
+          <a:blip r:embed="rId3"/>
+          <a:stretch>
+            <a:fillRect/>
+          </a:stretch>
+        </p:blipFill>
+        <p:spPr>
+          <a:xfrm>
+            <a:off x="3929676" y="2082460"/>
+            <a:ext cx="4763165" cy="724001"/>
+          </a:xfrm>
+          <a:prstGeom prst="rect">
+            <a:avLst/>
+          </a:prstGeom>
+        </p:spPr>
+      </p:pic>
+      <p:pic>
+        <p:nvPicPr>
+          <p:cNvPr id="11" name="Picture 10">
+            <a:extLst>
+              <a:ext uri="{FF2B5EF4-FFF2-40B4-BE49-F238E27FC236}">
+                <a16:creationId xmlns:a16="http://schemas.microsoft.com/office/drawing/2014/main" id="{2FBE1B84-2786-16AD-264E-420B61341EB2}"/>
+              </a:ext>
+            </a:extLst>
+          </p:cNvPr>
+          <p:cNvPicPr>
+            <a:picLocks noChangeAspect="1"/>
+          </p:cNvPicPr>
+          <p:nvPr/>
+        </p:nvPicPr>
+        <p:blipFill>
+          <a:blip r:embed="rId4"/>
+          <a:stretch>
+            <a:fillRect/>
+          </a:stretch>
+        </p:blipFill>
+        <p:spPr>
+          <a:xfrm>
+            <a:off x="3929676" y="4228936"/>
+            <a:ext cx="4945046" cy="2442527"/>
+          </a:xfrm>
+          <a:prstGeom prst="rect">
+            <a:avLst/>
+          </a:prstGeom>
+        </p:spPr>
+      </p:pic>
+    </p:spTree>
+    <p:extLst>
+      <p:ext uri="{BB962C8B-B14F-4D97-AF65-F5344CB8AC3E}">
+        <p14:creationId xmlns:p14="http://schemas.microsoft.com/office/powerpoint/2010/main" val="2159620187"/>
+      </p:ext>
+    </p:extLst>
+  </p:cSld>
+  <p:clrMapOvr>
+    <a:masterClrMapping/>
+  </p:clrMapOvr>
+</p:sld>
+</file>
+
+<file path=ppt/slides/slide31.xml><?xml version="1.0" encoding="utf-8"?>
+<p:sld xmlns:a="http://schemas.openxmlformats.org/drawingml/2006/main" xmlns:r="http://schemas.openxmlformats.org/officeDocument/2006/relationships" xmlns:p="http://schemas.openxmlformats.org/presentationml/2006/main">
+  <p:cSld>
+    <p:spTree>
+      <p:nvGrpSpPr>
+        <p:cNvPr id="1" name=""/>
+        <p:cNvGrpSpPr/>
+        <p:nvPr/>
+      </p:nvGrpSpPr>
+      <p:grpSpPr>
+        <a:xfrm>
+          <a:off x="0" y="0"/>
+          <a:ext cx="0" cy="0"/>
+          <a:chOff x="0" y="0"/>
+          <a:chExt cx="0" cy="0"/>
+        </a:xfrm>
+      </p:grpSpPr>
+      <p:sp>
+        <p:nvSpPr>
+          <p:cNvPr id="2" name="Title 1">
+            <a:extLst>
+              <a:ext uri="{FF2B5EF4-FFF2-40B4-BE49-F238E27FC236}">
+                <a16:creationId xmlns:a16="http://schemas.microsoft.com/office/drawing/2014/main" id="{486B609F-15E4-7135-F66D-C5F2FEDCFA4C}"/>
+              </a:ext>
+            </a:extLst>
+          </p:cNvPr>
+          <p:cNvSpPr>
+            <a:spLocks noGrp="1"/>
+          </p:cNvSpPr>
+          <p:nvPr>
+            <p:ph type="title"/>
+          </p:nvPr>
+        </p:nvSpPr>
+        <p:spPr/>
+        <p:txBody>
+          <a:bodyPr/>
+          <a:lstStyle/>
+          <a:p>
+            <a:r>
+              <a:rPr lang="en-US" dirty="0"/>
+              <a:t>DTO – data transfer objects</a:t>
+            </a:r>
+          </a:p>
+        </p:txBody>
+      </p:sp>
+      <p:sp>
+        <p:nvSpPr>
+          <p:cNvPr id="3" name="Content Placeholder 2">
+            <a:extLst>
+              <a:ext uri="{FF2B5EF4-FFF2-40B4-BE49-F238E27FC236}">
+                <a16:creationId xmlns:a16="http://schemas.microsoft.com/office/drawing/2014/main" id="{89F24D4D-8499-5A69-05D7-C720494738EC}"/>
+              </a:ext>
+            </a:extLst>
+          </p:cNvPr>
+          <p:cNvSpPr>
+            <a:spLocks noGrp="1"/>
+          </p:cNvSpPr>
+          <p:nvPr>
+            <p:ph idx="1"/>
+          </p:nvPr>
+        </p:nvSpPr>
+        <p:spPr>
+          <a:xfrm>
+            <a:off x="581192" y="2180496"/>
+            <a:ext cx="3852263" cy="3975347"/>
+          </a:xfrm>
+        </p:spPr>
+        <p:txBody>
+          <a:bodyPr/>
+          <a:lstStyle/>
+          <a:p>
+            <a:r>
+              <a:rPr lang="en-US" dirty="0"/>
+              <a:t>DTOs allow us to format the requests and response as they enter/leave our web service </a:t>
+            </a:r>
+          </a:p>
+          <a:p>
+            <a:r>
+              <a:rPr lang="en-US" dirty="0"/>
+              <a:t>Example: Student Enrollments</a:t>
+            </a:r>
+          </a:p>
+          <a:p>
+            <a:pPr lvl="1"/>
+            <a:r>
+              <a:rPr lang="en-US" dirty="0"/>
+              <a:t>We need to assign a course + a student to an enrollment record</a:t>
+            </a:r>
+          </a:p>
+          <a:p>
+            <a:pPr lvl="1"/>
+            <a:r>
+              <a:rPr lang="en-US" dirty="0"/>
+              <a:t>We shouldn’t send an entire course or student record nested inside an enrollment insert</a:t>
+            </a:r>
+          </a:p>
+          <a:p>
+            <a:pPr lvl="1"/>
+            <a:r>
+              <a:rPr lang="en-US" dirty="0"/>
+              <a:t>Instead, our DTO formats the request, and we can use the provided IDs to retrieve and persist the records dynamically</a:t>
+            </a:r>
+          </a:p>
+        </p:txBody>
+      </p:sp>
+      <p:pic>
+        <p:nvPicPr>
+          <p:cNvPr id="5" name="Picture 4">
+            <a:extLst>
+              <a:ext uri="{FF2B5EF4-FFF2-40B4-BE49-F238E27FC236}">
+                <a16:creationId xmlns:a16="http://schemas.microsoft.com/office/drawing/2014/main" id="{A2CE75CB-CF91-56B2-244C-EBA478BC64A4}"/>
+              </a:ext>
+            </a:extLst>
+          </p:cNvPr>
+          <p:cNvPicPr>
+            <a:picLocks noChangeAspect="1"/>
+          </p:cNvPicPr>
+          <p:nvPr/>
+        </p:nvPicPr>
+        <p:blipFill>
+          <a:blip r:embed="rId2"/>
+          <a:stretch>
+            <a:fillRect/>
+          </a:stretch>
+        </p:blipFill>
+        <p:spPr>
+          <a:xfrm>
+            <a:off x="4668982" y="2356504"/>
+            <a:ext cx="7149643" cy="3542999"/>
+          </a:xfrm>
+          <a:prstGeom prst="rect">
+            <a:avLst/>
+          </a:prstGeom>
+        </p:spPr>
+      </p:pic>
+    </p:spTree>
+    <p:extLst>
+      <p:ext uri="{BB962C8B-B14F-4D97-AF65-F5344CB8AC3E}">
+        <p14:creationId xmlns:p14="http://schemas.microsoft.com/office/powerpoint/2010/main" val="1119056757"/>
+      </p:ext>
+    </p:extLst>
+  </p:cSld>
+  <p:clrMapOvr>
+    <a:masterClrMapping/>
+  </p:clrMapOvr>
+</p:sld>
+</file>
+
+<file path=ppt/slides/slide32.xml><?xml version="1.0" encoding="utf-8"?>
+<p:sld xmlns:a="http://schemas.openxmlformats.org/drawingml/2006/main" xmlns:r="http://schemas.openxmlformats.org/officeDocument/2006/relationships" xmlns:p="http://schemas.openxmlformats.org/presentationml/2006/main">
+  <p:cSld>
+    <p:spTree>
+      <p:nvGrpSpPr>
+        <p:cNvPr id="1" name=""/>
+        <p:cNvGrpSpPr/>
+        <p:nvPr/>
+      </p:nvGrpSpPr>
+      <p:grpSpPr>
+        <a:xfrm>
+          <a:off x="0" y="0"/>
+          <a:ext cx="0" cy="0"/>
+          <a:chOff x="0" y="0"/>
+          <a:chExt cx="0" cy="0"/>
+        </a:xfrm>
+      </p:grpSpPr>
+      <p:sp>
+        <p:nvSpPr>
+          <p:cNvPr id="2" name="Title 1">
+            <a:extLst>
+              <a:ext uri="{FF2B5EF4-FFF2-40B4-BE49-F238E27FC236}">
+                <a16:creationId xmlns:a16="http://schemas.microsoft.com/office/drawing/2014/main" id="{76ECDE26-79DF-4039-A4ED-DCD5176B38EE}"/>
+              </a:ext>
+            </a:extLst>
+          </p:cNvPr>
+          <p:cNvSpPr>
+            <a:spLocks noGrp="1"/>
+          </p:cNvSpPr>
+          <p:nvPr>
+            <p:ph type="title"/>
+          </p:nvPr>
+        </p:nvSpPr>
+        <p:spPr/>
+        <p:txBody>
+          <a:bodyPr/>
+          <a:lstStyle/>
+          <a:p>
+            <a:r>
+              <a:rPr lang="en-US" dirty="0"/>
+              <a:t>Using </a:t>
+            </a:r>
+            <a:r>
+              <a:rPr lang="en-US" dirty="0" err="1"/>
+              <a:t>jparepository</a:t>
+            </a:r>
+            <a:r>
+              <a:rPr lang="en-US" dirty="0"/>
+              <a:t> to traverse relationships</a:t>
+            </a:r>
+          </a:p>
+        </p:txBody>
+      </p:sp>
+      <p:sp>
+        <p:nvSpPr>
+          <p:cNvPr id="3" name="Content Placeholder 2">
+            <a:extLst>
+              <a:ext uri="{FF2B5EF4-FFF2-40B4-BE49-F238E27FC236}">
+                <a16:creationId xmlns:a16="http://schemas.microsoft.com/office/drawing/2014/main" id="{46656ED8-D42F-642B-F6A3-19EC53ED85CF}"/>
+              </a:ext>
+            </a:extLst>
+          </p:cNvPr>
+          <p:cNvSpPr>
+            <a:spLocks noGrp="1"/>
+          </p:cNvSpPr>
+          <p:nvPr>
+            <p:ph idx="1"/>
+          </p:nvPr>
+        </p:nvSpPr>
+        <p:spPr>
+          <a:xfrm>
+            <a:off x="581192" y="3042699"/>
+            <a:ext cx="4641972" cy="3113145"/>
+          </a:xfrm>
+        </p:spPr>
+        <p:txBody>
+          <a:bodyPr/>
+          <a:lstStyle/>
+          <a:p>
+            <a:r>
+              <a:rPr lang="en-US" dirty="0"/>
+              <a:t>Underscores allow us to traverse relationships</a:t>
+            </a:r>
+          </a:p>
+          <a:p>
+            <a:r>
+              <a:rPr lang="en-US" dirty="0"/>
+              <a:t>You can traverse through multiple levels of relationships</a:t>
+            </a:r>
+          </a:p>
+          <a:p>
+            <a:r>
+              <a:rPr lang="en-US" dirty="0"/>
+              <a:t>Remember, we can always use @Query to create custom solutions when relationship traversal gets too complicated via derived query methods</a:t>
+            </a:r>
+          </a:p>
+          <a:p>
+            <a:endParaRPr lang="en-US" dirty="0"/>
+          </a:p>
+        </p:txBody>
+      </p:sp>
+      <p:pic>
+        <p:nvPicPr>
+          <p:cNvPr id="5" name="Picture 4">
+            <a:extLst>
+              <a:ext uri="{FF2B5EF4-FFF2-40B4-BE49-F238E27FC236}">
+                <a16:creationId xmlns:a16="http://schemas.microsoft.com/office/drawing/2014/main" id="{C731FCA0-A496-6EBF-B567-053E888AEB43}"/>
+              </a:ext>
+            </a:extLst>
+          </p:cNvPr>
+          <p:cNvPicPr>
+            <a:picLocks noChangeAspect="1"/>
+          </p:cNvPicPr>
+          <p:nvPr/>
+        </p:nvPicPr>
+        <p:blipFill>
+          <a:blip r:embed="rId2"/>
+          <a:stretch>
+            <a:fillRect/>
+          </a:stretch>
+        </p:blipFill>
+        <p:spPr>
+          <a:xfrm>
+            <a:off x="4494639" y="5481573"/>
+            <a:ext cx="7116168" cy="924054"/>
+          </a:xfrm>
+          <a:prstGeom prst="rect">
+            <a:avLst/>
+          </a:prstGeom>
+        </p:spPr>
+      </p:pic>
+      <p:pic>
+        <p:nvPicPr>
+          <p:cNvPr id="7" name="Picture 6">
+            <a:extLst>
+              <a:ext uri="{FF2B5EF4-FFF2-40B4-BE49-F238E27FC236}">
+                <a16:creationId xmlns:a16="http://schemas.microsoft.com/office/drawing/2014/main" id="{73806EC4-2E7C-6792-9278-6366B484BF3F}"/>
+              </a:ext>
+            </a:extLst>
+          </p:cNvPr>
+          <p:cNvPicPr>
+            <a:picLocks noChangeAspect="1"/>
+          </p:cNvPicPr>
+          <p:nvPr/>
+        </p:nvPicPr>
+        <p:blipFill>
+          <a:blip r:embed="rId3"/>
+          <a:stretch>
+            <a:fillRect/>
+          </a:stretch>
+        </p:blipFill>
+        <p:spPr>
+          <a:xfrm>
+            <a:off x="5875957" y="3944847"/>
+            <a:ext cx="5734850" cy="1076475"/>
+          </a:xfrm>
+          <a:prstGeom prst="rect">
+            <a:avLst/>
+          </a:prstGeom>
+        </p:spPr>
+      </p:pic>
+      <p:sp>
+        <p:nvSpPr>
+          <p:cNvPr id="8" name="TextBox 7">
+            <a:extLst>
+              <a:ext uri="{FF2B5EF4-FFF2-40B4-BE49-F238E27FC236}">
+                <a16:creationId xmlns:a16="http://schemas.microsoft.com/office/drawing/2014/main" id="{3BF4BB9A-66E3-7586-8430-24597A288740}"/>
+              </a:ext>
+            </a:extLst>
+          </p:cNvPr>
+          <p:cNvSpPr txBox="1"/>
+          <p:nvPr/>
+        </p:nvSpPr>
+        <p:spPr>
+          <a:xfrm>
+            <a:off x="5875957" y="3522541"/>
+            <a:ext cx="1907317" cy="369332"/>
+          </a:xfrm>
+          <a:prstGeom prst="rect">
+            <a:avLst/>
+          </a:prstGeom>
+          <a:noFill/>
+        </p:spPr>
+        <p:txBody>
+          <a:bodyPr wrap="none" rtlCol="0">
+            <a:spAutoFit/>
+          </a:bodyPr>
+          <a:lstStyle/>
+          <a:p>
+            <a:r>
+              <a:rPr lang="en-US" dirty="0"/>
+              <a:t>Service layer class:</a:t>
+            </a:r>
+          </a:p>
+        </p:txBody>
+      </p:sp>
+      <p:sp>
+        <p:nvSpPr>
+          <p:cNvPr id="9" name="TextBox 8">
+            <a:extLst>
+              <a:ext uri="{FF2B5EF4-FFF2-40B4-BE49-F238E27FC236}">
+                <a16:creationId xmlns:a16="http://schemas.microsoft.com/office/drawing/2014/main" id="{50F39B0F-FE76-669B-8DF9-95B8E0EEE329}"/>
+              </a:ext>
+            </a:extLst>
+          </p:cNvPr>
+          <p:cNvSpPr txBox="1"/>
+          <p:nvPr/>
+        </p:nvSpPr>
+        <p:spPr>
+          <a:xfrm>
+            <a:off x="5613294" y="5066781"/>
+            <a:ext cx="2073773" cy="369332"/>
+          </a:xfrm>
+          <a:prstGeom prst="rect">
+            <a:avLst/>
+          </a:prstGeom>
+          <a:noFill/>
+        </p:spPr>
+        <p:txBody>
+          <a:bodyPr wrap="none" rtlCol="0">
+            <a:spAutoFit/>
+          </a:bodyPr>
+          <a:lstStyle/>
+          <a:p>
+            <a:r>
+              <a:rPr lang="en-US" dirty="0"/>
+              <a:t>dao/repo layer class:</a:t>
+            </a:r>
+          </a:p>
+        </p:txBody>
+      </p:sp>
+      <p:pic>
+        <p:nvPicPr>
+          <p:cNvPr id="11" name="Picture 10">
+            <a:extLst>
+              <a:ext uri="{FF2B5EF4-FFF2-40B4-BE49-F238E27FC236}">
+                <a16:creationId xmlns:a16="http://schemas.microsoft.com/office/drawing/2014/main" id="{CD4546CC-64D9-7615-1E56-6ADCF29E796D}"/>
+              </a:ext>
+            </a:extLst>
+          </p:cNvPr>
+          <p:cNvPicPr>
+            <a:picLocks noChangeAspect="1"/>
+          </p:cNvPicPr>
+          <p:nvPr/>
+        </p:nvPicPr>
+        <p:blipFill>
+          <a:blip r:embed="rId4"/>
+          <a:stretch>
+            <a:fillRect/>
+          </a:stretch>
+        </p:blipFill>
+        <p:spPr>
+          <a:xfrm>
+            <a:off x="4361270" y="2286758"/>
+            <a:ext cx="7382905" cy="1038370"/>
+          </a:xfrm>
+          <a:prstGeom prst="rect">
+            <a:avLst/>
+          </a:prstGeom>
+        </p:spPr>
+      </p:pic>
+      <p:sp>
+        <p:nvSpPr>
+          <p:cNvPr id="12" name="TextBox 11">
+            <a:extLst>
+              <a:ext uri="{FF2B5EF4-FFF2-40B4-BE49-F238E27FC236}">
+                <a16:creationId xmlns:a16="http://schemas.microsoft.com/office/drawing/2014/main" id="{392874CE-37A7-87AC-695F-ECF9F03FE67D}"/>
+              </a:ext>
+            </a:extLst>
+          </p:cNvPr>
+          <p:cNvSpPr txBox="1"/>
+          <p:nvPr/>
+        </p:nvSpPr>
+        <p:spPr>
+          <a:xfrm>
+            <a:off x="4781656" y="1890321"/>
+            <a:ext cx="1663276" cy="369332"/>
+          </a:xfrm>
+          <a:prstGeom prst="rect">
+            <a:avLst/>
+          </a:prstGeom>
+          <a:noFill/>
+        </p:spPr>
+        <p:txBody>
+          <a:bodyPr wrap="none" rtlCol="0">
+            <a:spAutoFit/>
+          </a:bodyPr>
+          <a:lstStyle/>
+          <a:p>
+            <a:r>
+              <a:rPr lang="en-US" dirty="0"/>
+              <a:t>controller class:</a:t>
+            </a:r>
+          </a:p>
+        </p:txBody>
+      </p:sp>
+    </p:spTree>
+    <p:extLst>
+      <p:ext uri="{BB962C8B-B14F-4D97-AF65-F5344CB8AC3E}">
+        <p14:creationId xmlns:p14="http://schemas.microsoft.com/office/powerpoint/2010/main" val="3440213862"/>
+      </p:ext>
+    </p:extLst>
+  </p:cSld>
+  <p:clrMapOvr>
+    <a:masterClrMapping/>
+  </p:clrMapOvr>
+</p:sld>
+</file>
+
+<file path=ppt/slides/slide33.xml><?xml version="1.0" encoding="utf-8"?>
+<p:sld xmlns:a="http://schemas.openxmlformats.org/drawingml/2006/main" xmlns:r="http://schemas.openxmlformats.org/officeDocument/2006/relationships" xmlns:p="http://schemas.openxmlformats.org/presentationml/2006/main">
+  <p:cSld>
+    <p:spTree>
+      <p:nvGrpSpPr>
+        <p:cNvPr id="1" name="">
+          <a:extLst>
+            <a:ext uri="{FF2B5EF4-FFF2-40B4-BE49-F238E27FC236}">
+              <a16:creationId xmlns:a16="http://schemas.microsoft.com/office/drawing/2014/main" id="{89B0382C-EA62-7C8D-62AD-7CAE8E8CE354}"/>
+            </a:ext>
+          </a:extLst>
+        </p:cNvPr>
+        <p:cNvGrpSpPr/>
+        <p:nvPr/>
+      </p:nvGrpSpPr>
+      <p:grpSpPr>
+        <a:xfrm>
+          <a:off x="0" y="0"/>
+          <a:ext cx="0" cy="0"/>
+          <a:chOff x="0" y="0"/>
+          <a:chExt cx="0" cy="0"/>
+        </a:xfrm>
+      </p:grpSpPr>
+      <p:sp>
+        <p:nvSpPr>
+          <p:cNvPr id="2" name="Title 1">
+            <a:extLst>
+              <a:ext uri="{FF2B5EF4-FFF2-40B4-BE49-F238E27FC236}">
+                <a16:creationId xmlns:a16="http://schemas.microsoft.com/office/drawing/2014/main" id="{EC801B5B-810B-232B-4D0F-82D6CC0C32C9}"/>
+              </a:ext>
+            </a:extLst>
+          </p:cNvPr>
+          <p:cNvSpPr>
+            <a:spLocks noGrp="1"/>
+          </p:cNvSpPr>
+          <p:nvPr>
+            <p:ph type="title"/>
+          </p:nvPr>
+        </p:nvSpPr>
+        <p:spPr/>
+        <p:txBody>
+          <a:bodyPr/>
+          <a:lstStyle/>
+          <a:p>
+            <a:r>
+              <a:rPr lang="en-US" dirty="0"/>
+              <a:t>STOP</a:t>
+            </a:r>
+          </a:p>
+        </p:txBody>
+      </p:sp>
+      <p:sp>
+        <p:nvSpPr>
+          <p:cNvPr id="3" name="Content Placeholder 2">
+            <a:extLst>
+              <a:ext uri="{FF2B5EF4-FFF2-40B4-BE49-F238E27FC236}">
+                <a16:creationId xmlns:a16="http://schemas.microsoft.com/office/drawing/2014/main" id="{69135469-9722-9AD0-B065-911208CA7FE9}"/>
+              </a:ext>
+            </a:extLst>
+          </p:cNvPr>
+          <p:cNvSpPr>
+            <a:spLocks noGrp="1"/>
+          </p:cNvSpPr>
+          <p:nvPr>
+            <p:ph idx="1"/>
+          </p:nvPr>
+        </p:nvSpPr>
+        <p:spPr/>
+        <p:txBody>
+          <a:bodyPr/>
+          <a:lstStyle/>
+          <a:p>
+            <a:r>
+              <a:rPr lang="en-US" dirty="0"/>
+              <a:t>Let’s put theory into practice with a code-along</a:t>
+            </a:r>
+          </a:p>
+          <a:p>
+            <a:r>
+              <a:rPr lang="en-US" dirty="0"/>
+              <a:t>Please see the completed CRUD app “</a:t>
+            </a:r>
+            <a:r>
+              <a:rPr lang="en-US" dirty="0" err="1"/>
+              <a:t>JpaRepoApp</a:t>
+            </a:r>
+            <a:r>
+              <a:rPr lang="en-US" dirty="0"/>
+              <a:t>” with code comments in your course materials</a:t>
+            </a:r>
+          </a:p>
+        </p:txBody>
+      </p:sp>
+    </p:spTree>
+    <p:extLst>
+      <p:ext uri="{BB962C8B-B14F-4D97-AF65-F5344CB8AC3E}">
+        <p14:creationId xmlns:p14="http://schemas.microsoft.com/office/powerpoint/2010/main" val="4051011273"/>
+      </p:ext>
+    </p:extLst>
+  </p:cSld>
+  <p:clrMapOvr>
+    <a:masterClrMapping/>
+  </p:clrMapOvr>
+</p:sld>
+</file>
+
+<file path=ppt/slides/slide34.xml><?xml version="1.0" encoding="utf-8"?>
 <p:sld xmlns:a="http://schemas.openxmlformats.org/drawingml/2006/main" xmlns:r="http://schemas.openxmlformats.org/officeDocument/2006/relationships" xmlns:p="http://schemas.openxmlformats.org/presentationml/2006/main" show="0">
   <p:cSld>
     <p:spTree>
@@ -5302,342 +10903,6 @@
     <p:extLst>
       <p:ext uri="{BB962C8B-B14F-4D97-AF65-F5344CB8AC3E}">
         <p14:creationId xmlns:p14="http://schemas.microsoft.com/office/powerpoint/2010/main" val="2532014160"/>
-      </p:ext>
-    </p:extLst>
-  </p:cSld>
-  <p:clrMapOvr>
-    <a:masterClrMapping/>
-  </p:clrMapOvr>
-</p:sld>
-</file>
-
-<file path=ppt/slides/slide2.xml><?xml version="1.0" encoding="utf-8"?>
-<p:sld xmlns:a="http://schemas.openxmlformats.org/drawingml/2006/main" xmlns:r="http://schemas.openxmlformats.org/officeDocument/2006/relationships" xmlns:p="http://schemas.openxmlformats.org/presentationml/2006/main">
-  <p:cSld>
-    <p:spTree>
-      <p:nvGrpSpPr>
-        <p:cNvPr id="1" name=""/>
-        <p:cNvGrpSpPr/>
-        <p:nvPr/>
-      </p:nvGrpSpPr>
-      <p:grpSpPr>
-        <a:xfrm>
-          <a:off x="0" y="0"/>
-          <a:ext cx="0" cy="0"/>
-          <a:chOff x="0" y="0"/>
-          <a:chExt cx="0" cy="0"/>
-        </a:xfrm>
-      </p:grpSpPr>
-      <p:sp>
-        <p:nvSpPr>
-          <p:cNvPr id="2" name="Title 1">
-            <a:extLst>
-              <a:ext uri="{FF2B5EF4-FFF2-40B4-BE49-F238E27FC236}">
-                <a16:creationId xmlns:a16="http://schemas.microsoft.com/office/drawing/2014/main" id="{41E12A36-4588-5F59-79E8-D52E4D63C35F}"/>
-              </a:ext>
-            </a:extLst>
-          </p:cNvPr>
-          <p:cNvSpPr>
-            <a:spLocks noGrp="1"/>
-          </p:cNvSpPr>
-          <p:nvPr>
-            <p:ph type="title"/>
-          </p:nvPr>
-        </p:nvSpPr>
-        <p:spPr/>
-        <p:txBody>
-          <a:bodyPr/>
-          <a:lstStyle/>
-          <a:p>
-            <a:r>
-              <a:rPr lang="en-US" dirty="0"/>
-              <a:t>What is hibernate?</a:t>
-            </a:r>
-          </a:p>
-        </p:txBody>
-      </p:sp>
-      <p:sp>
-        <p:nvSpPr>
-          <p:cNvPr id="3" name="Content Placeholder 2">
-            <a:extLst>
-              <a:ext uri="{FF2B5EF4-FFF2-40B4-BE49-F238E27FC236}">
-                <a16:creationId xmlns:a16="http://schemas.microsoft.com/office/drawing/2014/main" id="{27AFFFA9-069D-DDF5-94A0-23E98E258204}"/>
-              </a:ext>
-            </a:extLst>
-          </p:cNvPr>
-          <p:cNvSpPr>
-            <a:spLocks noGrp="1"/>
-          </p:cNvSpPr>
-          <p:nvPr>
-            <p:ph idx="1"/>
-          </p:nvPr>
-        </p:nvSpPr>
-        <p:spPr>
-          <a:xfrm>
-            <a:off x="581192" y="2180496"/>
-            <a:ext cx="11029615" cy="2859337"/>
-          </a:xfrm>
-        </p:spPr>
-        <p:txBody>
-          <a:bodyPr>
-            <a:normAutofit fontScale="92500" lnSpcReduction="20000"/>
-          </a:bodyPr>
-          <a:lstStyle/>
-          <a:p>
-            <a:r>
-              <a:rPr lang="en-US" dirty="0"/>
-              <a:t>A framework for saving /persisting java objects in a database</a:t>
-            </a:r>
-          </a:p>
-          <a:p>
-            <a:r>
-              <a:rPr lang="en-US" b="1" dirty="0"/>
-              <a:t>Object-Relational Mapping (ORM):</a:t>
-            </a:r>
-            <a:r>
-              <a:rPr lang="en-US" dirty="0"/>
-              <a:t> Bridges the gap between the object-oriented world of Java and the relational world of SQL databases. It allows developers to store and retrieve Java objects directly as database tables and rows without writing complex, boilerplate SQL queries.</a:t>
-            </a:r>
-          </a:p>
-          <a:p>
-            <a:pPr lvl="1"/>
-            <a:r>
-              <a:rPr lang="en-US" b="1" dirty="0"/>
-              <a:t>Productivity Boost:</a:t>
-            </a:r>
-            <a:r>
-              <a:rPr lang="en-US" dirty="0"/>
-              <a:t> Eliminates massive amounts of tedious JDBC code, connection management, and manual result-set mapping.</a:t>
-            </a:r>
-          </a:p>
-          <a:p>
-            <a:pPr lvl="1"/>
-            <a:r>
-              <a:rPr lang="en-US" b="1" dirty="0"/>
-              <a:t>Database Independence:</a:t>
-            </a:r>
-            <a:r>
-              <a:rPr lang="en-US" dirty="0"/>
-              <a:t> By abstracting SQL dialects, Hibernate allows your application to switch underlying databases with minimal configuration changes.</a:t>
-            </a:r>
-          </a:p>
-          <a:p>
-            <a:pPr lvl="1"/>
-            <a:r>
-              <a:rPr lang="en-US" b="1" dirty="0"/>
-              <a:t>Built-in Caching:</a:t>
-            </a:r>
-            <a:r>
-              <a:rPr lang="en-US" dirty="0"/>
-              <a:t> Features a first-level cache (associated with the Session) and an optional second-level cache (shared across sessions) to significantly reduce database round-trips and improve performance.</a:t>
-            </a:r>
-          </a:p>
-          <a:p>
-            <a:pPr lvl="1"/>
-            <a:r>
-              <a:rPr lang="en-US" b="1" dirty="0"/>
-              <a:t>Automatic Transaction Management:</a:t>
-            </a:r>
-            <a:r>
-              <a:rPr lang="en-US" dirty="0"/>
-              <a:t> Handles database transactions and connection pooling efficiently, ensuring data integrity.</a:t>
-            </a:r>
-          </a:p>
-          <a:p>
-            <a:endParaRPr lang="en-US" dirty="0"/>
-          </a:p>
-        </p:txBody>
-      </p:sp>
-      <p:pic>
-        <p:nvPicPr>
-          <p:cNvPr id="7" name="Picture 6">
-            <a:extLst>
-              <a:ext uri="{FF2B5EF4-FFF2-40B4-BE49-F238E27FC236}">
-                <a16:creationId xmlns:a16="http://schemas.microsoft.com/office/drawing/2014/main" id="{DA5C0503-D2A8-4E1B-DA9A-63E949012BEB}"/>
-              </a:ext>
-            </a:extLst>
-          </p:cNvPr>
-          <p:cNvPicPr>
-            <a:picLocks noChangeAspect="1"/>
-          </p:cNvPicPr>
-          <p:nvPr/>
-        </p:nvPicPr>
-        <p:blipFill>
-          <a:blip r:embed="rId2"/>
-          <a:stretch>
-            <a:fillRect/>
-          </a:stretch>
-        </p:blipFill>
-        <p:spPr>
-          <a:xfrm>
-            <a:off x="2375967" y="4868462"/>
-            <a:ext cx="7440063" cy="1609950"/>
-          </a:xfrm>
-          <a:prstGeom prst="rect">
-            <a:avLst/>
-          </a:prstGeom>
-        </p:spPr>
-      </p:pic>
-    </p:spTree>
-    <p:extLst>
-      <p:ext uri="{BB962C8B-B14F-4D97-AF65-F5344CB8AC3E}">
-        <p14:creationId xmlns:p14="http://schemas.microsoft.com/office/powerpoint/2010/main" val="1508837499"/>
-      </p:ext>
-    </p:extLst>
-  </p:cSld>
-  <p:clrMapOvr>
-    <a:masterClrMapping/>
-  </p:clrMapOvr>
-</p:sld>
-</file>
-
-<file path=ppt/slides/slide3.xml><?xml version="1.0" encoding="utf-8"?>
-<p:sld xmlns:a="http://schemas.openxmlformats.org/drawingml/2006/main" xmlns:r="http://schemas.openxmlformats.org/officeDocument/2006/relationships" xmlns:p="http://schemas.openxmlformats.org/presentationml/2006/main">
-  <p:cSld>
-    <p:spTree>
-      <p:nvGrpSpPr>
-        <p:cNvPr id="1" name=""/>
-        <p:cNvGrpSpPr/>
-        <p:nvPr/>
-      </p:nvGrpSpPr>
-      <p:grpSpPr>
-        <a:xfrm>
-          <a:off x="0" y="0"/>
-          <a:ext cx="0" cy="0"/>
-          <a:chOff x="0" y="0"/>
-          <a:chExt cx="0" cy="0"/>
-        </a:xfrm>
-      </p:grpSpPr>
-      <p:sp>
-        <p:nvSpPr>
-          <p:cNvPr id="2" name="Title 1">
-            <a:extLst>
-              <a:ext uri="{FF2B5EF4-FFF2-40B4-BE49-F238E27FC236}">
-                <a16:creationId xmlns:a16="http://schemas.microsoft.com/office/drawing/2014/main" id="{B6E07699-A587-AD13-366E-8CC5FF4CEEF7}"/>
-              </a:ext>
-            </a:extLst>
-          </p:cNvPr>
-          <p:cNvSpPr>
-            <a:spLocks noGrp="1"/>
-          </p:cNvSpPr>
-          <p:nvPr>
-            <p:ph type="title"/>
-          </p:nvPr>
-        </p:nvSpPr>
-        <p:spPr/>
-        <p:txBody>
-          <a:bodyPr/>
-          <a:lstStyle/>
-          <a:p>
-            <a:r>
-              <a:rPr lang="en-US" dirty="0"/>
-              <a:t>What is JPA?</a:t>
-            </a:r>
-          </a:p>
-        </p:txBody>
-      </p:sp>
-      <p:sp>
-        <p:nvSpPr>
-          <p:cNvPr id="3" name="Content Placeholder 2">
-            <a:extLst>
-              <a:ext uri="{FF2B5EF4-FFF2-40B4-BE49-F238E27FC236}">
-                <a16:creationId xmlns:a16="http://schemas.microsoft.com/office/drawing/2014/main" id="{D64CCE71-301C-D88A-5A4C-8AD9189506E6}"/>
-              </a:ext>
-            </a:extLst>
-          </p:cNvPr>
-          <p:cNvSpPr>
-            <a:spLocks noGrp="1"/>
-          </p:cNvSpPr>
-          <p:nvPr>
-            <p:ph idx="1"/>
-          </p:nvPr>
-        </p:nvSpPr>
-        <p:spPr>
-          <a:xfrm>
-            <a:off x="581193" y="2180496"/>
-            <a:ext cx="5096586" cy="4092713"/>
-          </a:xfrm>
-        </p:spPr>
-        <p:txBody>
-          <a:bodyPr/>
-          <a:lstStyle/>
-          <a:p>
-            <a:r>
-              <a:rPr lang="en-US" dirty="0"/>
-              <a:t>Jakarta Persistence API (JPA) – previously known as Java Persistence API</a:t>
-            </a:r>
-          </a:p>
-          <a:p>
-            <a:pPr lvl="1"/>
-            <a:r>
-              <a:rPr lang="en-US" dirty="0"/>
-              <a:t>Standard API for Object Relational Mapping</a:t>
-            </a:r>
-          </a:p>
-          <a:p>
-            <a:pPr lvl="1"/>
-            <a:r>
-              <a:rPr lang="en-US" dirty="0"/>
-              <a:t>Is a specification</a:t>
-            </a:r>
-          </a:p>
-          <a:p>
-            <a:pPr lvl="1"/>
-            <a:r>
-              <a:rPr lang="en-US" dirty="0"/>
-              <a:t>Includes interfaces</a:t>
-            </a:r>
-          </a:p>
-          <a:p>
-            <a:pPr lvl="1"/>
-            <a:r>
-              <a:rPr lang="en-US" dirty="0"/>
-              <a:t>Requires implementations to use</a:t>
-            </a:r>
-          </a:p>
-          <a:p>
-            <a:pPr lvl="1"/>
-            <a:r>
-              <a:rPr lang="en-US" dirty="0"/>
-              <a:t>Hibernate is one way we can implement JPA </a:t>
-            </a:r>
-          </a:p>
-        </p:txBody>
-      </p:sp>
-      <p:pic>
-        <p:nvPicPr>
-          <p:cNvPr id="5" name="Picture 4">
-            <a:extLst>
-              <a:ext uri="{FF2B5EF4-FFF2-40B4-BE49-F238E27FC236}">
-                <a16:creationId xmlns:a16="http://schemas.microsoft.com/office/drawing/2014/main" id="{88D308B2-5C8A-3D8B-DC61-D9EEB618683C}"/>
-              </a:ext>
-            </a:extLst>
-          </p:cNvPr>
-          <p:cNvPicPr>
-            <a:picLocks noChangeAspect="1"/>
-          </p:cNvPicPr>
-          <p:nvPr/>
-        </p:nvPicPr>
-        <p:blipFill>
-          <a:blip r:embed="rId2"/>
-          <a:stretch>
-            <a:fillRect/>
-          </a:stretch>
-        </p:blipFill>
-        <p:spPr>
-          <a:xfrm>
-            <a:off x="6096000" y="3212298"/>
-            <a:ext cx="5096586" cy="2029108"/>
-          </a:xfrm>
-          <a:prstGeom prst="rect">
-            <a:avLst/>
-          </a:prstGeom>
-        </p:spPr>
-      </p:pic>
-    </p:spTree>
-    <p:extLst>
-      <p:ext uri="{BB962C8B-B14F-4D97-AF65-F5344CB8AC3E}">
-        <p14:creationId xmlns:p14="http://schemas.microsoft.com/office/powerpoint/2010/main" val="989935227"/>
       </p:ext>
     </p:extLst>
   </p:cSld>

--- a/Week_6/02_Hibernate_JPA_&_REST.pptx
+++ b/Week_6/02_Hibernate_JPA_&_REST.pptx
@@ -405,7 +405,7 @@
             <a:fld id="{B61BEF0D-F0BB-DE4B-95CE-6DB70DBA9567}" type="datetimeFigureOut">
               <a:rPr lang="en-US" dirty="0"/>
               <a:pPr/>
-              <a:t>10/1/2026</a:t>
+              <a:t>10/2/2026</a:t>
             </a:fld>
             <a:endParaRPr lang="en-US" dirty="0"/>
           </a:p>
@@ -667,7 +667,7 @@
             <a:fld id="{B61BEF0D-F0BB-DE4B-95CE-6DB70DBA9567}" type="datetimeFigureOut">
               <a:rPr lang="en-US" dirty="0"/>
               <a:pPr/>
-              <a:t>10/1/2026</a:t>
+              <a:t>10/2/2026</a:t>
             </a:fld>
             <a:endParaRPr lang="en-US" dirty="0"/>
           </a:p>
@@ -902,7 +902,7 @@
             <a:fld id="{B61BEF0D-F0BB-DE4B-95CE-6DB70DBA9567}" type="datetimeFigureOut">
               <a:rPr lang="en-US" dirty="0"/>
               <a:pPr/>
-              <a:t>10/1/2026</a:t>
+              <a:t>10/2/2026</a:t>
             </a:fld>
             <a:endParaRPr lang="en-US" dirty="0"/>
           </a:p>
@@ -1149,7 +1149,7 @@
             <a:fld id="{B61BEF0D-F0BB-DE4B-95CE-6DB70DBA9567}" type="datetimeFigureOut">
               <a:rPr lang="en-US" dirty="0"/>
               <a:pPr/>
-              <a:t>10/1/2026</a:t>
+              <a:t>10/2/2026</a:t>
             </a:fld>
             <a:endParaRPr lang="en-US" dirty="0"/>
           </a:p>
@@ -1457,7 +1457,7 @@
             <a:fld id="{B61BEF0D-F0BB-DE4B-95CE-6DB70DBA9567}" type="datetimeFigureOut">
               <a:rPr lang="en-US" dirty="0"/>
               <a:pPr/>
-              <a:t>10/1/2026</a:t>
+              <a:t>10/2/2026</a:t>
             </a:fld>
             <a:endParaRPr lang="en-US" dirty="0"/>
           </a:p>
@@ -1758,7 +1758,7 @@
             <a:fld id="{B61BEF0D-F0BB-DE4B-95CE-6DB70DBA9567}" type="datetimeFigureOut">
               <a:rPr lang="en-US" dirty="0"/>
               <a:pPr/>
-              <a:t>10/1/2026</a:t>
+              <a:t>10/2/2026</a:t>
             </a:fld>
             <a:endParaRPr lang="en-US" dirty="0"/>
           </a:p>
@@ -2179,7 +2179,7 @@
             <a:fld id="{B61BEF0D-F0BB-DE4B-95CE-6DB70DBA9567}" type="datetimeFigureOut">
               <a:rPr lang="en-US" dirty="0"/>
               <a:pPr/>
-              <a:t>10/1/2026</a:t>
+              <a:t>10/2/2026</a:t>
             </a:fld>
             <a:endParaRPr lang="en-US" dirty="0"/>
           </a:p>
@@ -2342,7 +2342,7 @@
             <a:fld id="{B61BEF0D-F0BB-DE4B-95CE-6DB70DBA9567}" type="datetimeFigureOut">
               <a:rPr lang="en-US" dirty="0"/>
               <a:pPr/>
-              <a:t>10/1/2026</a:t>
+              <a:t>10/2/2026</a:t>
             </a:fld>
             <a:endParaRPr lang="en-US" dirty="0"/>
           </a:p>
@@ -2439,7 +2439,7 @@
             <a:fld id="{B61BEF0D-F0BB-DE4B-95CE-6DB70DBA9567}" type="datetimeFigureOut">
               <a:rPr lang="en-US" dirty="0"/>
               <a:pPr/>
-              <a:t>10/1/2026</a:t>
+              <a:t>10/2/2026</a:t>
             </a:fld>
             <a:endParaRPr lang="en-US" dirty="0"/>
           </a:p>
@@ -2817,7 +2817,7 @@
             <a:fld id="{B61BEF0D-F0BB-DE4B-95CE-6DB70DBA9567}" type="datetimeFigureOut">
               <a:rPr lang="en-US" dirty="0"/>
               <a:pPr/>
-              <a:t>10/1/2026</a:t>
+              <a:t>10/2/2026</a:t>
             </a:fld>
             <a:endParaRPr lang="en-US" dirty="0"/>
           </a:p>
@@ -3103,7 +3103,7 @@
             <a:fld id="{B61BEF0D-F0BB-DE4B-95CE-6DB70DBA9567}" type="datetimeFigureOut">
               <a:rPr lang="en-US" dirty="0"/>
               <a:pPr/>
-              <a:t>10/1/2026</a:t>
+              <a:t>10/2/2026</a:t>
             </a:fld>
             <a:endParaRPr lang="en-US" dirty="0"/>
           </a:p>
@@ -3342,7 +3342,7 @@
             <a:fld id="{B61BEF0D-F0BB-DE4B-95CE-6DB70DBA9567}" type="datetimeFigureOut">
               <a:rPr lang="en-US" dirty="0"/>
               <a:pPr/>
-              <a:t>10/1/2026</a:t>
+              <a:t>10/2/2026</a:t>
             </a:fld>
             <a:endParaRPr lang="en-US" dirty="0"/>
           </a:p>
@@ -9878,10 +9878,10 @@
       </p:pic>
       <p:pic>
         <p:nvPicPr>
-          <p:cNvPr id="11" name="Picture 10">
+          <p:cNvPr id="6" name="Picture 5">
             <a:extLst>
               <a:ext uri="{FF2B5EF4-FFF2-40B4-BE49-F238E27FC236}">
-                <a16:creationId xmlns:a16="http://schemas.microsoft.com/office/drawing/2014/main" id="{2FBE1B84-2786-16AD-264E-420B61341EB2}"/>
+                <a16:creationId xmlns:a16="http://schemas.microsoft.com/office/drawing/2014/main" id="{BDA0392F-AFA2-448A-B82A-4F5211153AB1}"/>
               </a:ext>
             </a:extLst>
           </p:cNvPr>
@@ -9898,8 +9898,8 @@
         </p:blipFill>
         <p:spPr>
           <a:xfrm>
-            <a:off x="3929676" y="4228936"/>
-            <a:ext cx="4945046" cy="2442527"/>
+            <a:off x="3842163" y="4271738"/>
+            <a:ext cx="4507674" cy="2416419"/>
           </a:xfrm>
           <a:prstGeom prst="rect">
             <a:avLst/>

--- a/Week_6/02_Hibernate_JPA_&_REST.pptx
+++ b/Week_6/02_Hibernate_JPA_&_REST.pptx
@@ -4482,21 +4482,96 @@
           </a:p>
         </p:txBody>
       </p:sp>
+      <p:sp>
+        <p:nvSpPr>
+          <p:cNvPr id="8" name="TextBox 7">
+            <a:extLst>
+              <a:ext uri="{FF2B5EF4-FFF2-40B4-BE49-F238E27FC236}">
+                <a16:creationId xmlns:a16="http://schemas.microsoft.com/office/drawing/2014/main" id="{D9068152-8FB2-1638-BDC5-524C96C96A3F}"/>
+              </a:ext>
+            </a:extLst>
+          </p:cNvPr>
+          <p:cNvSpPr txBox="1"/>
+          <p:nvPr/>
+        </p:nvSpPr>
+        <p:spPr>
+          <a:xfrm>
+            <a:off x="1341913" y="2161309"/>
+            <a:ext cx="3788228" cy="923330"/>
+          </a:xfrm>
+          <a:prstGeom prst="rect">
+            <a:avLst/>
+          </a:prstGeom>
+          <a:noFill/>
+        </p:spPr>
+        <p:txBody>
+          <a:bodyPr wrap="square" rtlCol="0">
+            <a:spAutoFit/>
+          </a:bodyPr>
+          <a:lstStyle/>
+          <a:p>
+            <a:r>
+              <a:rPr lang="en-US" dirty="0"/>
+              <a:t>This defines our custom exception, so we have full control to describe the issue:</a:t>
+            </a:r>
+          </a:p>
+        </p:txBody>
+      </p:sp>
+      <p:sp>
+        <p:nvSpPr>
+          <p:cNvPr id="9" name="TextBox 8">
+            <a:extLst>
+              <a:ext uri="{FF2B5EF4-FFF2-40B4-BE49-F238E27FC236}">
+                <a16:creationId xmlns:a16="http://schemas.microsoft.com/office/drawing/2014/main" id="{C4FDF15D-A437-3643-58C8-AAF98437E33E}"/>
+              </a:ext>
+            </a:extLst>
+          </p:cNvPr>
+          <p:cNvSpPr txBox="1"/>
+          <p:nvPr/>
+        </p:nvSpPr>
+        <p:spPr>
+          <a:xfrm>
+            <a:off x="5605153" y="2137558"/>
+            <a:ext cx="6298584" cy="646331"/>
+          </a:xfrm>
+          <a:prstGeom prst="rect">
+            <a:avLst/>
+          </a:prstGeom>
+          <a:noFill/>
+        </p:spPr>
+        <p:txBody>
+          <a:bodyPr wrap="none" rtlCol="0">
+            <a:spAutoFit/>
+          </a:bodyPr>
+          <a:lstStyle/>
+          <a:p>
+            <a:r>
+              <a:rPr lang="en-US" dirty="0"/>
+              <a:t>This defines what our error output should look like</a:t>
+            </a:r>
+            <a:br>
+              <a:rPr lang="en-US" dirty="0"/>
+            </a:br>
+            <a:r>
+              <a:rPr lang="en-US" dirty="0"/>
+              <a:t>i.e. we define a contract for what returned HTTP errors look like:</a:t>
+            </a:r>
+          </a:p>
+        </p:txBody>
+      </p:sp>
       <p:pic>
         <p:nvPicPr>
-          <p:cNvPr id="5" name="Content Placeholder 4">
+          <p:cNvPr id="10" name="Picture 9">
             <a:extLst>
               <a:ext uri="{FF2B5EF4-FFF2-40B4-BE49-F238E27FC236}">
-                <a16:creationId xmlns:a16="http://schemas.microsoft.com/office/drawing/2014/main" id="{9FC717B8-5059-472F-B0F6-B3CFE4F05CF5}"/>
+                <a16:creationId xmlns:a16="http://schemas.microsoft.com/office/drawing/2014/main" id="{539AB847-B076-C55C-A8DC-321A5DDEE497}"/>
               </a:ext>
             </a:extLst>
           </p:cNvPr>
           <p:cNvPicPr>
-            <a:picLocks noGrp="1" noChangeAspect="1"/>
+            <a:picLocks noChangeAspect="1"/>
           </p:cNvPicPr>
-          <p:nvPr>
-            <p:ph idx="1"/>
-          </p:nvPr>
+          <p:nvPr/>
         </p:nvPicPr>
         <p:blipFill>
           <a:blip r:embed="rId2"/>
@@ -4506,8 +4581,8 @@
         </p:blipFill>
         <p:spPr>
           <a:xfrm>
-            <a:off x="967475" y="3337292"/>
-            <a:ext cx="4298798" cy="2818552"/>
+            <a:off x="652219" y="3429000"/>
+            <a:ext cx="4963709" cy="3097763"/>
           </a:xfrm>
           <a:prstGeom prst="rect">
             <a:avLst/>
@@ -4516,10 +4591,10 @@
       </p:pic>
       <p:pic>
         <p:nvPicPr>
-          <p:cNvPr id="7" name="Picture 6">
+          <p:cNvPr id="12" name="Picture 11">
             <a:extLst>
               <a:ext uri="{FF2B5EF4-FFF2-40B4-BE49-F238E27FC236}">
-                <a16:creationId xmlns:a16="http://schemas.microsoft.com/office/drawing/2014/main" id="{893D38BD-6E3E-FABA-1271-B15AA8DBA64E}"/>
+                <a16:creationId xmlns:a16="http://schemas.microsoft.com/office/drawing/2014/main" id="{90794AEA-0982-9A40-4CAA-5CADF26C6467}"/>
               </a:ext>
             </a:extLst>
           </p:cNvPr>
@@ -4536,91 +4611,14 @@
         </p:blipFill>
         <p:spPr>
           <a:xfrm>
-            <a:off x="6096000" y="2854670"/>
-            <a:ext cx="4601501" cy="3783795"/>
+            <a:off x="6576073" y="2783889"/>
+            <a:ext cx="4274014" cy="3967040"/>
           </a:xfrm>
           <a:prstGeom prst="rect">
             <a:avLst/>
           </a:prstGeom>
         </p:spPr>
       </p:pic>
-      <p:sp>
-        <p:nvSpPr>
-          <p:cNvPr id="8" name="TextBox 7">
-            <a:extLst>
-              <a:ext uri="{FF2B5EF4-FFF2-40B4-BE49-F238E27FC236}">
-                <a16:creationId xmlns:a16="http://schemas.microsoft.com/office/drawing/2014/main" id="{D9068152-8FB2-1638-BDC5-524C96C96A3F}"/>
-              </a:ext>
-            </a:extLst>
-          </p:cNvPr>
-          <p:cNvSpPr txBox="1"/>
-          <p:nvPr/>
-        </p:nvSpPr>
-        <p:spPr>
-          <a:xfrm>
-            <a:off x="1341913" y="2161309"/>
-            <a:ext cx="3788228" cy="923330"/>
-          </a:xfrm>
-          <a:prstGeom prst="rect">
-            <a:avLst/>
-          </a:prstGeom>
-          <a:noFill/>
-        </p:spPr>
-        <p:txBody>
-          <a:bodyPr wrap="square" rtlCol="0">
-            <a:spAutoFit/>
-          </a:bodyPr>
-          <a:lstStyle/>
-          <a:p>
-            <a:r>
-              <a:rPr lang="en-US" dirty="0"/>
-              <a:t>This defines our custom exception, so we have full control to describe the issue:</a:t>
-            </a:r>
-          </a:p>
-        </p:txBody>
-      </p:sp>
-      <p:sp>
-        <p:nvSpPr>
-          <p:cNvPr id="9" name="TextBox 8">
-            <a:extLst>
-              <a:ext uri="{FF2B5EF4-FFF2-40B4-BE49-F238E27FC236}">
-                <a16:creationId xmlns:a16="http://schemas.microsoft.com/office/drawing/2014/main" id="{C4FDF15D-A437-3643-58C8-AAF98437E33E}"/>
-              </a:ext>
-            </a:extLst>
-          </p:cNvPr>
-          <p:cNvSpPr txBox="1"/>
-          <p:nvPr/>
-        </p:nvSpPr>
-        <p:spPr>
-          <a:xfrm>
-            <a:off x="5605153" y="2137558"/>
-            <a:ext cx="6298584" cy="646331"/>
-          </a:xfrm>
-          <a:prstGeom prst="rect">
-            <a:avLst/>
-          </a:prstGeom>
-          <a:noFill/>
-        </p:spPr>
-        <p:txBody>
-          <a:bodyPr wrap="none" rtlCol="0">
-            <a:spAutoFit/>
-          </a:bodyPr>
-          <a:lstStyle/>
-          <a:p>
-            <a:r>
-              <a:rPr lang="en-US" dirty="0"/>
-              <a:t>This defines what our error output should look like</a:t>
-            </a:r>
-            <a:br>
-              <a:rPr lang="en-US" dirty="0"/>
-            </a:br>
-            <a:r>
-              <a:rPr lang="en-US" dirty="0"/>
-              <a:t>i.e. we define a contract for what returned HTTP errors look like:</a:t>
-            </a:r>
-          </a:p>
-        </p:txBody>
-      </p:sp>
     </p:spTree>
     <p:extLst>
       <p:ext uri="{BB962C8B-B14F-4D97-AF65-F5344CB8AC3E}">
@@ -4748,10 +4746,10 @@
       </p:sp>
       <p:pic>
         <p:nvPicPr>
-          <p:cNvPr id="5" name="Picture 4">
+          <p:cNvPr id="6" name="Picture 5">
             <a:extLst>
               <a:ext uri="{FF2B5EF4-FFF2-40B4-BE49-F238E27FC236}">
-                <a16:creationId xmlns:a16="http://schemas.microsoft.com/office/drawing/2014/main" id="{D3A40994-FC53-74BC-9DC8-E603A9ACC354}"/>
+                <a16:creationId xmlns:a16="http://schemas.microsoft.com/office/drawing/2014/main" id="{8340305E-C977-4F17-4BF0-58ED44A0B4AA}"/>
               </a:ext>
             </a:extLst>
           </p:cNvPr>
@@ -4768,8 +4766,8 @@
         </p:blipFill>
         <p:spPr>
           <a:xfrm>
-            <a:off x="5272643" y="2033441"/>
-            <a:ext cx="5569035" cy="4281121"/>
+            <a:off x="5220586" y="2082148"/>
+            <a:ext cx="5944041" cy="4330761"/>
           </a:xfrm>
           <a:prstGeom prst="rect">
             <a:avLst/>
@@ -9777,12 +9775,14 @@
         </p:nvSpPr>
         <p:spPr>
           <a:xfrm>
-            <a:off x="1703410" y="1715956"/>
-            <a:ext cx="11029615" cy="3678303"/>
+            <a:off x="751313" y="1984856"/>
+            <a:ext cx="11029615" cy="4554167"/>
           </a:xfrm>
         </p:spPr>
         <p:txBody>
-          <a:bodyPr/>
+          <a:bodyPr anchor="t">
+            <a:normAutofit/>
+          </a:bodyPr>
           <a:lstStyle/>
           <a:p>
             <a:r>
@@ -9794,15 +9794,18 @@
             <a:endParaRPr lang="en-US" dirty="0"/>
           </a:p>
           <a:p>
-            <a:r>
-              <a:rPr lang="en-US" dirty="0"/>
-              <a:t>In our repo interface:</a:t>
-            </a:r>
-          </a:p>
-          <a:p>
             <a:endParaRPr lang="en-US" dirty="0"/>
           </a:p>
           <a:p>
+            <a:r>
+              <a:rPr lang="en-US" dirty="0"/>
+              <a:t>In our controller:</a:t>
+            </a:r>
+          </a:p>
+          <a:p>
+            <a:pPr marL="0" indent="0">
+              <a:buNone/>
+            </a:pPr>
             <a:endParaRPr lang="en-US" dirty="0"/>
           </a:p>
           <a:p>
@@ -9812,16 +9815,34 @@
             <a:r>
               <a:rPr lang="en-US" dirty="0"/>
               <a:t>In our service:</a:t>
+            </a:r>
+          </a:p>
+          <a:p>
+            <a:pPr marL="0" indent="0">
+              <a:buNone/>
+            </a:pPr>
+            <a:endParaRPr lang="en-US" dirty="0"/>
+          </a:p>
+          <a:p>
+            <a:pPr marL="0" indent="0">
+              <a:buNone/>
+            </a:pPr>
+            <a:endParaRPr lang="en-US" dirty="0"/>
+          </a:p>
+          <a:p>
+            <a:r>
+              <a:rPr lang="en-US" dirty="0"/>
+              <a:t>Query Params example:</a:t>
             </a:r>
           </a:p>
         </p:txBody>
       </p:sp>
       <p:pic>
         <p:nvPicPr>
-          <p:cNvPr id="5" name="Picture 4">
+          <p:cNvPr id="9" name="Picture 8">
             <a:extLst>
               <a:ext uri="{FF2B5EF4-FFF2-40B4-BE49-F238E27FC236}">
-                <a16:creationId xmlns:a16="http://schemas.microsoft.com/office/drawing/2014/main" id="{8DE3FA36-433C-CB0B-4FAB-CFA490F9D18D}"/>
+                <a16:creationId xmlns:a16="http://schemas.microsoft.com/office/drawing/2014/main" id="{5E0994A5-DE36-DDE4-58F6-8F7B019ED6B3}"/>
               </a:ext>
             </a:extLst>
           </p:cNvPr>
@@ -9838,8 +9859,8 @@
         </p:blipFill>
         <p:spPr>
           <a:xfrm>
-            <a:off x="3929676" y="3516433"/>
-            <a:ext cx="3886742" cy="457264"/>
+            <a:off x="2207201" y="1984856"/>
+            <a:ext cx="4763165" cy="724001"/>
           </a:xfrm>
           <a:prstGeom prst="rect">
             <a:avLst/>
@@ -9848,10 +9869,10 @@
       </p:pic>
       <p:pic>
         <p:nvPicPr>
-          <p:cNvPr id="9" name="Picture 8">
+          <p:cNvPr id="7" name="Picture 6">
             <a:extLst>
               <a:ext uri="{FF2B5EF4-FFF2-40B4-BE49-F238E27FC236}">
-                <a16:creationId xmlns:a16="http://schemas.microsoft.com/office/drawing/2014/main" id="{5E0994A5-DE36-DDE4-58F6-8F7B019ED6B3}"/>
+                <a16:creationId xmlns:a16="http://schemas.microsoft.com/office/drawing/2014/main" id="{60AA4BC3-5FF9-6C9E-6A46-414B7452BEB3}"/>
               </a:ext>
             </a:extLst>
           </p:cNvPr>
@@ -9868,8 +9889,8 @@
         </p:blipFill>
         <p:spPr>
           <a:xfrm>
-            <a:off x="3929676" y="2082460"/>
-            <a:ext cx="4763165" cy="724001"/>
+            <a:off x="2816273" y="2881236"/>
+            <a:ext cx="5134692" cy="1095528"/>
           </a:xfrm>
           <a:prstGeom prst="rect">
             <a:avLst/>
@@ -9878,10 +9899,10 @@
       </p:pic>
       <p:pic>
         <p:nvPicPr>
-          <p:cNvPr id="6" name="Picture 5">
+          <p:cNvPr id="10" name="Picture 9">
             <a:extLst>
               <a:ext uri="{FF2B5EF4-FFF2-40B4-BE49-F238E27FC236}">
-                <a16:creationId xmlns:a16="http://schemas.microsoft.com/office/drawing/2014/main" id="{BDA0392F-AFA2-448A-B82A-4F5211153AB1}"/>
+                <a16:creationId xmlns:a16="http://schemas.microsoft.com/office/drawing/2014/main" id="{A8C83676-8DAC-ED66-7355-9FEC06F44B38}"/>
               </a:ext>
             </a:extLst>
           </p:cNvPr>
@@ -9898,8 +9919,38 @@
         </p:blipFill>
         <p:spPr>
           <a:xfrm>
-            <a:off x="3842163" y="4271738"/>
-            <a:ext cx="4507674" cy="2416419"/>
+            <a:off x="2816273" y="4127849"/>
+            <a:ext cx="5249008" cy="1095528"/>
+          </a:xfrm>
+          <a:prstGeom prst="rect">
+            <a:avLst/>
+          </a:prstGeom>
+        </p:spPr>
+      </p:pic>
+      <p:pic>
+        <p:nvPicPr>
+          <p:cNvPr id="12" name="Picture 11">
+            <a:extLst>
+              <a:ext uri="{FF2B5EF4-FFF2-40B4-BE49-F238E27FC236}">
+                <a16:creationId xmlns:a16="http://schemas.microsoft.com/office/drawing/2014/main" id="{5018EE62-E00B-B900-A90C-1D9253C86960}"/>
+              </a:ext>
+            </a:extLst>
+          </p:cNvPr>
+          <p:cNvPicPr>
+            <a:picLocks noChangeAspect="1"/>
+          </p:cNvPicPr>
+          <p:nvPr/>
+        </p:nvPicPr>
+        <p:blipFill>
+          <a:blip r:embed="rId5"/>
+          <a:stretch>
+            <a:fillRect/>
+          </a:stretch>
+        </p:blipFill>
+        <p:spPr>
+          <a:xfrm>
+            <a:off x="3574932" y="5492277"/>
+            <a:ext cx="5382376" cy="457264"/>
           </a:xfrm>
           <a:prstGeom prst="rect">
             <a:avLst/>

--- a/Week_6/02_Hibernate_JPA_&_REST.pptx
+++ b/Week_6/02_Hibernate_JPA_&_REST.pptx
@@ -18,27 +18,33 @@
     <p:sldId id="324" r:id="rId12"/>
     <p:sldId id="325" r:id="rId13"/>
     <p:sldId id="326" r:id="rId14"/>
-    <p:sldId id="322" r:id="rId15"/>
-    <p:sldId id="339" r:id="rId16"/>
-    <p:sldId id="340" r:id="rId17"/>
-    <p:sldId id="341" r:id="rId18"/>
-    <p:sldId id="342" r:id="rId19"/>
-    <p:sldId id="327" r:id="rId20"/>
-    <p:sldId id="328" r:id="rId21"/>
-    <p:sldId id="337" r:id="rId22"/>
-    <p:sldId id="330" r:id="rId23"/>
-    <p:sldId id="329" r:id="rId24"/>
-    <p:sldId id="331" r:id="rId25"/>
-    <p:sldId id="332" r:id="rId26"/>
-    <p:sldId id="333" r:id="rId27"/>
-    <p:sldId id="334" r:id="rId28"/>
-    <p:sldId id="335" r:id="rId29"/>
-    <p:sldId id="336" r:id="rId30"/>
-    <p:sldId id="338" r:id="rId31"/>
-    <p:sldId id="343" r:id="rId32"/>
-    <p:sldId id="345" r:id="rId33"/>
-    <p:sldId id="344" r:id="rId34"/>
-    <p:sldId id="313" r:id="rId35"/>
+    <p:sldId id="349" r:id="rId15"/>
+    <p:sldId id="350" r:id="rId16"/>
+    <p:sldId id="351" r:id="rId17"/>
+    <p:sldId id="322" r:id="rId18"/>
+    <p:sldId id="339" r:id="rId19"/>
+    <p:sldId id="340" r:id="rId20"/>
+    <p:sldId id="341" r:id="rId21"/>
+    <p:sldId id="342" r:id="rId22"/>
+    <p:sldId id="327" r:id="rId23"/>
+    <p:sldId id="328" r:id="rId24"/>
+    <p:sldId id="337" r:id="rId25"/>
+    <p:sldId id="330" r:id="rId26"/>
+    <p:sldId id="329" r:id="rId27"/>
+    <p:sldId id="331" r:id="rId28"/>
+    <p:sldId id="332" r:id="rId29"/>
+    <p:sldId id="333" r:id="rId30"/>
+    <p:sldId id="334" r:id="rId31"/>
+    <p:sldId id="335" r:id="rId32"/>
+    <p:sldId id="336" r:id="rId33"/>
+    <p:sldId id="338" r:id="rId34"/>
+    <p:sldId id="343" r:id="rId35"/>
+    <p:sldId id="345" r:id="rId36"/>
+    <p:sldId id="344" r:id="rId37"/>
+    <p:sldId id="346" r:id="rId38"/>
+    <p:sldId id="347" r:id="rId39"/>
+    <p:sldId id="348" r:id="rId40"/>
+    <p:sldId id="313" r:id="rId41"/>
   </p:sldIdLst>
   <p:sldSz cx="12192000" cy="6858000"/>
   <p:notesSz cx="6858000" cy="9144000"/>
@@ -405,7 +411,7 @@
             <a:fld id="{B61BEF0D-F0BB-DE4B-95CE-6DB70DBA9567}" type="datetimeFigureOut">
               <a:rPr lang="en-US" dirty="0"/>
               <a:pPr/>
-              <a:t>10/2/2026</a:t>
+              <a:t>10/11/2026</a:t>
             </a:fld>
             <a:endParaRPr lang="en-US" dirty="0"/>
           </a:p>
@@ -667,7 +673,7 @@
             <a:fld id="{B61BEF0D-F0BB-DE4B-95CE-6DB70DBA9567}" type="datetimeFigureOut">
               <a:rPr lang="en-US" dirty="0"/>
               <a:pPr/>
-              <a:t>10/2/2026</a:t>
+              <a:t>10/11/2026</a:t>
             </a:fld>
             <a:endParaRPr lang="en-US" dirty="0"/>
           </a:p>
@@ -902,7 +908,7 @@
             <a:fld id="{B61BEF0D-F0BB-DE4B-95CE-6DB70DBA9567}" type="datetimeFigureOut">
               <a:rPr lang="en-US" dirty="0"/>
               <a:pPr/>
-              <a:t>10/2/2026</a:t>
+              <a:t>10/11/2026</a:t>
             </a:fld>
             <a:endParaRPr lang="en-US" dirty="0"/>
           </a:p>
@@ -1149,7 +1155,7 @@
             <a:fld id="{B61BEF0D-F0BB-DE4B-95CE-6DB70DBA9567}" type="datetimeFigureOut">
               <a:rPr lang="en-US" dirty="0"/>
               <a:pPr/>
-              <a:t>10/2/2026</a:t>
+              <a:t>10/11/2026</a:t>
             </a:fld>
             <a:endParaRPr lang="en-US" dirty="0"/>
           </a:p>
@@ -1457,7 +1463,7 @@
             <a:fld id="{B61BEF0D-F0BB-DE4B-95CE-6DB70DBA9567}" type="datetimeFigureOut">
               <a:rPr lang="en-US" dirty="0"/>
               <a:pPr/>
-              <a:t>10/2/2026</a:t>
+              <a:t>10/11/2026</a:t>
             </a:fld>
             <a:endParaRPr lang="en-US" dirty="0"/>
           </a:p>
@@ -1758,7 +1764,7 @@
             <a:fld id="{B61BEF0D-F0BB-DE4B-95CE-6DB70DBA9567}" type="datetimeFigureOut">
               <a:rPr lang="en-US" dirty="0"/>
               <a:pPr/>
-              <a:t>10/2/2026</a:t>
+              <a:t>10/11/2026</a:t>
             </a:fld>
             <a:endParaRPr lang="en-US" dirty="0"/>
           </a:p>
@@ -2179,7 +2185,7 @@
             <a:fld id="{B61BEF0D-F0BB-DE4B-95CE-6DB70DBA9567}" type="datetimeFigureOut">
               <a:rPr lang="en-US" dirty="0"/>
               <a:pPr/>
-              <a:t>10/2/2026</a:t>
+              <a:t>10/11/2026</a:t>
             </a:fld>
             <a:endParaRPr lang="en-US" dirty="0"/>
           </a:p>
@@ -2342,7 +2348,7 @@
             <a:fld id="{B61BEF0D-F0BB-DE4B-95CE-6DB70DBA9567}" type="datetimeFigureOut">
               <a:rPr lang="en-US" dirty="0"/>
               <a:pPr/>
-              <a:t>10/2/2026</a:t>
+              <a:t>10/11/2026</a:t>
             </a:fld>
             <a:endParaRPr lang="en-US" dirty="0"/>
           </a:p>
@@ -2439,7 +2445,7 @@
             <a:fld id="{B61BEF0D-F0BB-DE4B-95CE-6DB70DBA9567}" type="datetimeFigureOut">
               <a:rPr lang="en-US" dirty="0"/>
               <a:pPr/>
-              <a:t>10/2/2026</a:t>
+              <a:t>10/11/2026</a:t>
             </a:fld>
             <a:endParaRPr lang="en-US" dirty="0"/>
           </a:p>
@@ -2817,7 +2823,7 @@
             <a:fld id="{B61BEF0D-F0BB-DE4B-95CE-6DB70DBA9567}" type="datetimeFigureOut">
               <a:rPr lang="en-US" dirty="0"/>
               <a:pPr/>
-              <a:t>10/2/2026</a:t>
+              <a:t>10/11/2026</a:t>
             </a:fld>
             <a:endParaRPr lang="en-US" dirty="0"/>
           </a:p>
@@ -3103,7 +3109,7 @@
             <a:fld id="{B61BEF0D-F0BB-DE4B-95CE-6DB70DBA9567}" type="datetimeFigureOut">
               <a:rPr lang="en-US" dirty="0"/>
               <a:pPr/>
-              <a:t>10/2/2026</a:t>
+              <a:t>10/11/2026</a:t>
             </a:fld>
             <a:endParaRPr lang="en-US" dirty="0"/>
           </a:p>
@@ -3342,7 +3348,7 @@
             <a:fld id="{B61BEF0D-F0BB-DE4B-95CE-6DB70DBA9567}" type="datetimeFigureOut">
               <a:rPr lang="en-US" dirty="0"/>
               <a:pPr/>
-              <a:t>10/2/2026</a:t>
+              <a:t>10/11/2026</a:t>
             </a:fld>
             <a:endParaRPr lang="en-US" dirty="0"/>
           </a:p>
@@ -4809,7 +4815,7 @@
           <p:cNvPr id="2" name="Title 1">
             <a:extLst>
               <a:ext uri="{FF2B5EF4-FFF2-40B4-BE49-F238E27FC236}">
-                <a16:creationId xmlns:a16="http://schemas.microsoft.com/office/drawing/2014/main" id="{BB23CB1D-38E9-88B1-4DE6-3E50454DB880}"/>
+                <a16:creationId xmlns:a16="http://schemas.microsoft.com/office/drawing/2014/main" id="{419C9E93-23C7-840B-2FAD-5B87979DE1A1}"/>
               </a:ext>
             </a:extLst>
           </p:cNvPr>
@@ -4827,7 +4833,7 @@
           <a:p>
             <a:r>
               <a:rPr lang="en-US" dirty="0"/>
-              <a:t>STOP</a:t>
+              <a:t>@transactional</a:t>
             </a:r>
           </a:p>
         </p:txBody>
@@ -4837,7 +4843,7 @@
           <p:cNvPr id="3" name="Content Placeholder 2">
             <a:extLst>
               <a:ext uri="{FF2B5EF4-FFF2-40B4-BE49-F238E27FC236}">
-                <a16:creationId xmlns:a16="http://schemas.microsoft.com/office/drawing/2014/main" id="{CF5BF0EC-9B89-4A87-A203-4B32191C1C9C}"/>
+                <a16:creationId xmlns:a16="http://schemas.microsoft.com/office/drawing/2014/main" id="{79312368-F0AA-6282-CBF7-440C6ED258BC}"/>
               </a:ext>
             </a:extLst>
           </p:cNvPr>
@@ -4848,47 +4854,107 @@
             <p:ph idx="1"/>
           </p:nvPr>
         </p:nvSpPr>
-        <p:spPr/>
-        <p:txBody>
-          <a:bodyPr/>
+        <p:spPr>
+          <a:xfrm>
+            <a:off x="581192" y="2180496"/>
+            <a:ext cx="11029615" cy="4103346"/>
+          </a:xfrm>
+        </p:spPr>
+        <p:txBody>
+          <a:bodyPr>
+            <a:normAutofit/>
+          </a:bodyPr>
           <a:lstStyle/>
           <a:p>
             <a:r>
               <a:rPr lang="en-US" dirty="0"/>
-              <a:t>Let’s put theory into practice with a code-along</a:t>
-            </a:r>
-          </a:p>
-          <a:p>
-            <a:r>
-              <a:rPr lang="en-US" dirty="0"/>
-              <a:t>Please see the completed CRUD app “</a:t>
+              <a:t>What is a transaction?</a:t>
+            </a:r>
+          </a:p>
+          <a:p>
+            <a:r>
+              <a:rPr lang="en-US" dirty="0"/>
+              <a:t>The @Transactional annotation provides declarative transaction management in Spring, simplifying the process. When you apply it to a method or class, it instructs Spring to manage the transaction automatically:</a:t>
+            </a:r>
+          </a:p>
+          <a:p>
+            <a:pPr lvl="1"/>
+            <a:r>
+              <a:rPr lang="en-US" b="1" dirty="0"/>
+              <a:t>Method-level</a:t>
+            </a:r>
+            <a:r>
+              <a:rPr lang="en-US" dirty="0"/>
+              <a:t>: Runs only the annotated method within a transactional context.</a:t>
+            </a:r>
+          </a:p>
+          <a:p>
+            <a:pPr lvl="1"/>
+            <a:r>
+              <a:rPr lang="en-US" b="1" dirty="0"/>
+              <a:t>Class-level</a:t>
+            </a:r>
+            <a:r>
+              <a:rPr lang="en-US" dirty="0"/>
+              <a:t>: Runs all public methods within the class in a transactional context.</a:t>
+            </a:r>
+          </a:p>
+          <a:p>
+            <a:r>
+              <a:rPr lang="en-US" dirty="0"/>
+              <a:t>You can customize @Transactional to control aspects of transaction behavior:	</a:t>
+            </a:r>
+          </a:p>
+          <a:p>
+            <a:pPr lvl="1"/>
+            <a:r>
+              <a:rPr lang="en-US" b="1" dirty="0"/>
+              <a:t>Propagation</a:t>
+            </a:r>
+            <a:r>
+              <a:rPr lang="en-US" dirty="0"/>
+              <a:t>: Defines how transactions behave when a method calls another transactional method. The propagation attribute supports values such as REQUIRED, REQUIRES_NEW, and NESTED.</a:t>
+            </a:r>
+          </a:p>
+          <a:p>
+            <a:pPr lvl="1"/>
+            <a:r>
+              <a:rPr lang="en-US" b="1" dirty="0"/>
+              <a:t>Isolation Level</a:t>
+            </a:r>
+            <a:r>
+              <a:rPr lang="en-US" dirty="0"/>
+              <a:t>: Sets how isolated a transaction is from other concurrent transactions. The isolation attribute supports values such as READ_COMMITTED, REPEATABLE_READ, and SERIALIZABLE.</a:t>
+            </a:r>
+          </a:p>
+          <a:p>
+            <a:pPr lvl="1"/>
+            <a:r>
+              <a:rPr lang="en-US" b="1" dirty="0"/>
+              <a:t>Rollback Rules</a:t>
+            </a:r>
+            <a:r>
+              <a:rPr lang="en-US" dirty="0"/>
+              <a:t>: Define the conditions under which the system rolls back a transaction. The </a:t>
             </a:r>
             <a:r>
               <a:rPr lang="en-US" dirty="0" err="1"/>
-              <a:t>EntityMangerApp</a:t>
-            </a:r>
-            <a:r>
-              <a:rPr lang="en-US" dirty="0"/>
-              <a:t>” with code comments in your course materials</a:t>
-            </a:r>
-          </a:p>
-          <a:p>
-            <a:r>
-              <a:rPr lang="en-US" dirty="0"/>
-              <a:t>We will stick with </a:t>
+              <a:t>rollbackFor</a:t>
+            </a:r>
+            <a:r>
+              <a:rPr lang="en-US" dirty="0"/>
+              <a:t> and </a:t>
             </a:r>
             <a:r>
               <a:rPr lang="en-US" dirty="0" err="1"/>
-              <a:t>EntityManager</a:t>
-            </a:r>
-            <a:r>
-              <a:rPr lang="en-US" dirty="0"/>
-              <a:t> for now, and later create other files in our DAO layer that uses </a:t>
-            </a:r>
-            <a:r>
-              <a:rPr lang="en-US" dirty="0" err="1"/>
-              <a:t>JpaRepository</a:t>
-            </a:r>
+              <a:t>noRollbackFor</a:t>
+            </a:r>
+            <a:r>
+              <a:rPr lang="en-US" dirty="0"/>
+              <a:t> attributes specify which exception types trigger or skip a rollback.</a:t>
+            </a:r>
+          </a:p>
+          <a:p>
             <a:endParaRPr lang="en-US" dirty="0"/>
           </a:p>
         </p:txBody>
@@ -4896,7 +4962,7 @@
     </p:spTree>
     <p:extLst>
       <p:ext uri="{BB962C8B-B14F-4D97-AF65-F5344CB8AC3E}">
-        <p14:creationId xmlns:p14="http://schemas.microsoft.com/office/powerpoint/2010/main" val="4118949446"/>
+        <p14:creationId xmlns:p14="http://schemas.microsoft.com/office/powerpoint/2010/main" val="107184730"/>
       </p:ext>
     </p:extLst>
   </p:cSld>
@@ -4928,6 +4994,811 @@
           <p:cNvPr id="2" name="Title 1">
             <a:extLst>
               <a:ext uri="{FF2B5EF4-FFF2-40B4-BE49-F238E27FC236}">
+                <a16:creationId xmlns:a16="http://schemas.microsoft.com/office/drawing/2014/main" id="{A804A4F0-B0B2-4F3B-3F8D-333D7117DEA6}"/>
+              </a:ext>
+            </a:extLst>
+          </p:cNvPr>
+          <p:cNvSpPr>
+            <a:spLocks noGrp="1"/>
+          </p:cNvSpPr>
+          <p:nvPr>
+            <p:ph type="title"/>
+          </p:nvPr>
+        </p:nvSpPr>
+        <p:spPr/>
+        <p:txBody>
+          <a:bodyPr/>
+          <a:lstStyle/>
+          <a:p>
+            <a:r>
+              <a:rPr lang="en-US" dirty="0"/>
+              <a:t>@transactional propagation strategies</a:t>
+            </a:r>
+          </a:p>
+        </p:txBody>
+      </p:sp>
+      <p:sp>
+        <p:nvSpPr>
+          <p:cNvPr id="3" name="Content Placeholder 2">
+            <a:extLst>
+              <a:ext uri="{FF2B5EF4-FFF2-40B4-BE49-F238E27FC236}">
+                <a16:creationId xmlns:a16="http://schemas.microsoft.com/office/drawing/2014/main" id="{3CC720DC-15C9-FD58-A4F3-AFF5BBEB7DC5}"/>
+              </a:ext>
+            </a:extLst>
+          </p:cNvPr>
+          <p:cNvSpPr>
+            <a:spLocks noGrp="1"/>
+          </p:cNvSpPr>
+          <p:nvPr>
+            <p:ph idx="1"/>
+          </p:nvPr>
+        </p:nvSpPr>
+        <p:spPr>
+          <a:xfrm>
+            <a:off x="581192" y="2180496"/>
+            <a:ext cx="11029615" cy="2961549"/>
+          </a:xfrm>
+        </p:spPr>
+        <p:txBody>
+          <a:bodyPr>
+            <a:normAutofit fontScale="92500" lnSpcReduction="20000"/>
+          </a:bodyPr>
+          <a:lstStyle/>
+          <a:p>
+            <a:pPr lvl="0"/>
+            <a:r>
+              <a:rPr lang="en-US" b="1" dirty="0"/>
+              <a:t>REQUIRED</a:t>
+            </a:r>
+            <a:r>
+              <a:rPr lang="en-US" dirty="0"/>
+              <a:t> – Joins an active transaction if one exists, otherwise starts a new one. </a:t>
+            </a:r>
+            <a:r>
+              <a:rPr lang="en-US" i="1" dirty="0"/>
+              <a:t>(Default behavior)</a:t>
+            </a:r>
+            <a:endParaRPr lang="en-US" dirty="0"/>
+          </a:p>
+          <a:p>
+            <a:pPr lvl="0"/>
+            <a:r>
+              <a:rPr lang="en-US" b="1" dirty="0"/>
+              <a:t>SUPPORTS</a:t>
+            </a:r>
+            <a:r>
+              <a:rPr lang="en-US" dirty="0"/>
+              <a:t> – Joins an active transaction if one exists; runs without a transaction otherwise.</a:t>
+            </a:r>
+          </a:p>
+          <a:p>
+            <a:pPr lvl="0"/>
+            <a:r>
+              <a:rPr lang="en-US" b="1" dirty="0"/>
+              <a:t>MANDATORY</a:t>
+            </a:r>
+            <a:r>
+              <a:rPr lang="en-US" dirty="0"/>
+              <a:t> – Joins an active transaction if one exists; throws an exception if there is none.</a:t>
+            </a:r>
+          </a:p>
+          <a:p>
+            <a:pPr lvl="0"/>
+            <a:r>
+              <a:rPr lang="en-US" b="1" dirty="0"/>
+              <a:t>NEVER</a:t>
+            </a:r>
+            <a:r>
+              <a:rPr lang="en-US" dirty="0"/>
+              <a:t> – Throws an exception if an active transaction exists.</a:t>
+            </a:r>
+          </a:p>
+          <a:p>
+            <a:pPr lvl="0"/>
+            <a:r>
+              <a:rPr lang="en-US" b="1" dirty="0"/>
+              <a:t>NOT_SUPPORTED</a:t>
+            </a:r>
+            <a:r>
+              <a:rPr lang="en-US" dirty="0"/>
+              <a:t> – Pauses any active transaction and runs without a transactional context.</a:t>
+            </a:r>
+          </a:p>
+          <a:p>
+            <a:pPr lvl="0"/>
+            <a:r>
+              <a:rPr lang="en-US" b="1" dirty="0"/>
+              <a:t>REQUIRES_NEW</a:t>
+            </a:r>
+            <a:r>
+              <a:rPr lang="en-US" dirty="0"/>
+              <a:t> – Always starts a new transaction. If an active transaction exists, Spring suspends it until this method completes.</a:t>
+            </a:r>
+          </a:p>
+          <a:p>
+            <a:pPr lvl="0"/>
+            <a:r>
+              <a:rPr lang="en-US" b="1" dirty="0"/>
+              <a:t>NESTED</a:t>
+            </a:r>
+            <a:r>
+              <a:rPr lang="en-US" dirty="0"/>
+              <a:t> – Starts a new transaction if none exists. If one exists, Spring creates a </a:t>
+            </a:r>
+            <a:r>
+              <a:rPr lang="en-US" dirty="0" err="1"/>
+              <a:t>savepoint</a:t>
+            </a:r>
+            <a:r>
+              <a:rPr lang="en-US" dirty="0"/>
+              <a:t> and can roll back to that </a:t>
+            </a:r>
+            <a:r>
+              <a:rPr lang="en-US" dirty="0" err="1"/>
+              <a:t>savepoint</a:t>
+            </a:r>
+            <a:r>
+              <a:rPr lang="en-US" dirty="0"/>
+              <a:t> if an exception occurs.</a:t>
+            </a:r>
+          </a:p>
+          <a:p>
+            <a:endParaRPr lang="en-US" dirty="0"/>
+          </a:p>
+        </p:txBody>
+      </p:sp>
+      <p:sp>
+        <p:nvSpPr>
+          <p:cNvPr id="5" name="TextBox 4">
+            <a:extLst>
+              <a:ext uri="{FF2B5EF4-FFF2-40B4-BE49-F238E27FC236}">
+                <a16:creationId xmlns:a16="http://schemas.microsoft.com/office/drawing/2014/main" id="{FB6AC3A0-871B-808A-AF6C-314EAF9DBEE2}"/>
+              </a:ext>
+            </a:extLst>
+          </p:cNvPr>
+          <p:cNvSpPr txBox="1"/>
+          <p:nvPr/>
+        </p:nvSpPr>
+        <p:spPr>
+          <a:xfrm>
+            <a:off x="4388589" y="4839108"/>
+            <a:ext cx="6097772" cy="1785104"/>
+          </a:xfrm>
+          <a:prstGeom prst="rect">
+            <a:avLst/>
+          </a:prstGeom>
+          <a:noFill/>
+        </p:spPr>
+        <p:txBody>
+          <a:bodyPr wrap="square">
+            <a:spAutoFit/>
+          </a:bodyPr>
+          <a:lstStyle/>
+          <a:p>
+            <a:pPr marL="0" marR="0" indent="0" algn="l" rtl="0" latinLnBrk="0">
+              <a:lnSpc>
+                <a:spcPct val="100000"/>
+              </a:lnSpc>
+              <a:spcAft>
+                <a:spcPts val="1500"/>
+              </a:spcAft>
+              <a:buNone/>
+            </a:pPr>
+            <a:r>
+              <a:rPr lang="en-US" sz="1200" b="0" i="0" dirty="0">
+                <a:solidFill>
+                  <a:schemeClr val="tx1"/>
+                </a:solidFill>
+                <a:effectLst/>
+                <a:latin typeface="+mn-lt"/>
+              </a:rPr>
+              <a:t>@Transactional(propagation = </a:t>
+            </a:r>
+            <a:r>
+              <a:rPr lang="en-US" sz="1200" b="1" i="0" dirty="0" err="1">
+                <a:solidFill>
+                  <a:schemeClr val="tx1"/>
+                </a:solidFill>
+                <a:effectLst/>
+                <a:latin typeface="+mn-lt"/>
+              </a:rPr>
+              <a:t>Propagation</a:t>
+            </a:r>
+            <a:r>
+              <a:rPr lang="en-US" sz="1200" b="0" i="0" dirty="0" err="1">
+                <a:solidFill>
+                  <a:schemeClr val="tx1"/>
+                </a:solidFill>
+                <a:effectLst/>
+                <a:latin typeface="+mn-lt"/>
+              </a:rPr>
+              <a:t>.REQUIRES_NEW</a:t>
+            </a:r>
+            <a:r>
+              <a:rPr lang="en-US" sz="1200" b="0" i="0" dirty="0">
+                <a:solidFill>
+                  <a:schemeClr val="tx1"/>
+                </a:solidFill>
+                <a:effectLst/>
+                <a:latin typeface="+mn-lt"/>
+              </a:rPr>
+              <a:t>)</a:t>
+            </a:r>
+          </a:p>
+          <a:p>
+            <a:pPr marL="0" marR="0" indent="0" algn="l" rtl="0" latinLnBrk="0">
+              <a:lnSpc>
+                <a:spcPct val="100000"/>
+              </a:lnSpc>
+              <a:spcAft>
+                <a:spcPts val="1500"/>
+              </a:spcAft>
+              <a:buNone/>
+            </a:pPr>
+            <a:r>
+              <a:rPr lang="en-US" sz="1200" b="0" i="0" dirty="0">
+                <a:solidFill>
+                  <a:schemeClr val="tx1"/>
+                </a:solidFill>
+                <a:effectLst/>
+                <a:latin typeface="+mn-lt"/>
+              </a:rPr>
+              <a:t>    </a:t>
+            </a:r>
+            <a:r>
+              <a:rPr lang="en-US" sz="1200" b="1" i="0" dirty="0">
+                <a:solidFill>
+                  <a:schemeClr val="tx1"/>
+                </a:solidFill>
+                <a:effectLst/>
+                <a:latin typeface="+mn-lt"/>
+              </a:rPr>
+              <a:t>public</a:t>
+            </a:r>
+            <a:r>
+              <a:rPr lang="en-US" sz="1200" b="0" i="0" dirty="0">
+                <a:solidFill>
+                  <a:schemeClr val="tx1"/>
+                </a:solidFill>
+                <a:effectLst/>
+                <a:latin typeface="+mn-lt"/>
+              </a:rPr>
+              <a:t> </a:t>
+            </a:r>
+            <a:r>
+              <a:rPr lang="en-US" sz="1200" b="1" i="0" dirty="0">
+                <a:solidFill>
+                  <a:schemeClr val="tx1"/>
+                </a:solidFill>
+                <a:effectLst/>
+                <a:latin typeface="+mn-lt"/>
+              </a:rPr>
+              <a:t>void</a:t>
+            </a:r>
+            <a:r>
+              <a:rPr lang="en-US" sz="1200" b="0" i="0" dirty="0">
+                <a:solidFill>
+                  <a:schemeClr val="tx1"/>
+                </a:solidFill>
+                <a:effectLst/>
+                <a:latin typeface="+mn-lt"/>
+              </a:rPr>
+              <a:t> </a:t>
+            </a:r>
+            <a:r>
+              <a:rPr lang="en-US" sz="1200" b="1" i="0" dirty="0" err="1">
+                <a:solidFill>
+                  <a:schemeClr val="tx1"/>
+                </a:solidFill>
+                <a:effectLst/>
+                <a:latin typeface="+mn-lt"/>
+              </a:rPr>
+              <a:t>updateAssociateNameTransaction</a:t>
+            </a:r>
+            <a:r>
+              <a:rPr lang="en-US" sz="1200" b="0" i="0" dirty="0">
+                <a:solidFill>
+                  <a:schemeClr val="tx1"/>
+                </a:solidFill>
+                <a:effectLst/>
+                <a:latin typeface="+mn-lt"/>
+              </a:rPr>
+              <a:t>() {</a:t>
+            </a:r>
+          </a:p>
+          <a:p>
+            <a:pPr marL="0" marR="0" indent="0" algn="l" rtl="0" latinLnBrk="0">
+              <a:lnSpc>
+                <a:spcPct val="100000"/>
+              </a:lnSpc>
+              <a:spcAft>
+                <a:spcPts val="1500"/>
+              </a:spcAft>
+              <a:buNone/>
+            </a:pPr>
+            <a:r>
+              <a:rPr lang="en-US" sz="1200" b="0" i="0" dirty="0">
+                <a:solidFill>
+                  <a:schemeClr val="tx1"/>
+                </a:solidFill>
+                <a:effectLst/>
+                <a:latin typeface="+mn-lt"/>
+              </a:rPr>
+              <a:t>        </a:t>
+            </a:r>
+            <a:r>
+              <a:rPr lang="en-US" sz="1200" b="1" i="0" dirty="0">
+                <a:solidFill>
+                  <a:schemeClr val="tx1"/>
+                </a:solidFill>
+                <a:effectLst/>
+                <a:latin typeface="+mn-lt"/>
+              </a:rPr>
+              <a:t>Associate</a:t>
+            </a:r>
+            <a:r>
+              <a:rPr lang="en-US" sz="1200" b="0" i="0" dirty="0">
+                <a:solidFill>
+                  <a:schemeClr val="tx1"/>
+                </a:solidFill>
+                <a:effectLst/>
+                <a:latin typeface="+mn-lt"/>
+              </a:rPr>
+              <a:t> </a:t>
+            </a:r>
+            <a:r>
+              <a:rPr lang="en-US" sz="1200" b="0" i="0" dirty="0" err="1">
+                <a:solidFill>
+                  <a:schemeClr val="tx1"/>
+                </a:solidFill>
+                <a:effectLst/>
+                <a:latin typeface="+mn-lt"/>
+              </a:rPr>
+              <a:t>associate</a:t>
+            </a:r>
+            <a:r>
+              <a:rPr lang="en-US" sz="1200" b="0" i="0" dirty="0">
+                <a:solidFill>
+                  <a:schemeClr val="tx1"/>
+                </a:solidFill>
+                <a:effectLst/>
+                <a:latin typeface="+mn-lt"/>
+              </a:rPr>
+              <a:t> = </a:t>
+            </a:r>
+            <a:r>
+              <a:rPr lang="en-US" sz="1200" b="0" i="0" dirty="0" err="1">
+                <a:solidFill>
+                  <a:schemeClr val="tx1"/>
+                </a:solidFill>
+                <a:effectLst/>
+                <a:latin typeface="+mn-lt"/>
+              </a:rPr>
+              <a:t>associateRepository.</a:t>
+            </a:r>
+            <a:r>
+              <a:rPr lang="en-US" sz="1200" b="1" i="0" dirty="0" err="1">
+                <a:solidFill>
+                  <a:schemeClr val="tx1"/>
+                </a:solidFill>
+                <a:effectLst/>
+                <a:latin typeface="+mn-lt"/>
+              </a:rPr>
+              <a:t>findById</a:t>
+            </a:r>
+            <a:r>
+              <a:rPr lang="en-US" sz="1200" b="0" i="0" dirty="0">
+                <a:solidFill>
+                  <a:schemeClr val="tx1"/>
+                </a:solidFill>
+                <a:effectLst/>
+                <a:latin typeface="+mn-lt"/>
+              </a:rPr>
+              <a:t>(10).</a:t>
+            </a:r>
+            <a:r>
+              <a:rPr lang="en-US" sz="1200" b="1" i="0" dirty="0">
+                <a:solidFill>
+                  <a:schemeClr val="tx1"/>
+                </a:solidFill>
+                <a:effectLst/>
+                <a:latin typeface="+mn-lt"/>
+              </a:rPr>
+              <a:t>get</a:t>
+            </a:r>
+            <a:r>
+              <a:rPr lang="en-US" sz="1200" b="0" i="0" dirty="0">
+                <a:solidFill>
+                  <a:schemeClr val="tx1"/>
+                </a:solidFill>
+                <a:effectLst/>
+                <a:latin typeface="+mn-lt"/>
+              </a:rPr>
+              <a:t>();</a:t>
+            </a:r>
+          </a:p>
+          <a:p>
+            <a:pPr marL="0" marR="0" indent="0" algn="l" rtl="0" latinLnBrk="0">
+              <a:lnSpc>
+                <a:spcPct val="100000"/>
+              </a:lnSpc>
+              <a:spcAft>
+                <a:spcPts val="1500"/>
+              </a:spcAft>
+              <a:buNone/>
+            </a:pPr>
+            <a:r>
+              <a:rPr lang="en-US" sz="1200" b="0" i="0" dirty="0">
+                <a:solidFill>
+                  <a:schemeClr val="tx1"/>
+                </a:solidFill>
+                <a:effectLst/>
+                <a:latin typeface="+mn-lt"/>
+              </a:rPr>
+              <a:t>        </a:t>
+            </a:r>
+            <a:r>
+              <a:rPr lang="en-US" sz="1200" b="0" i="0" dirty="0" err="1">
+                <a:solidFill>
+                  <a:schemeClr val="tx1"/>
+                </a:solidFill>
+                <a:effectLst/>
+                <a:latin typeface="+mn-lt"/>
+              </a:rPr>
+              <a:t>associate.</a:t>
+            </a:r>
+            <a:r>
+              <a:rPr lang="en-US" sz="1200" b="1" i="0" dirty="0" err="1">
+                <a:solidFill>
+                  <a:schemeClr val="tx1"/>
+                </a:solidFill>
+                <a:effectLst/>
+                <a:latin typeface="+mn-lt"/>
+              </a:rPr>
+              <a:t>setName</a:t>
+            </a:r>
+            <a:r>
+              <a:rPr lang="en-US" sz="1200" b="0" i="0" dirty="0">
+                <a:solidFill>
+                  <a:schemeClr val="tx1"/>
+                </a:solidFill>
+                <a:effectLst/>
+                <a:latin typeface="+mn-lt"/>
+              </a:rPr>
+              <a:t>("name");</a:t>
+            </a:r>
+          </a:p>
+          <a:p>
+            <a:pPr indent="0" algn="l" rtl="0">
+              <a:lnSpc>
+                <a:spcPct val="100000"/>
+              </a:lnSpc>
+              <a:spcAft>
+                <a:spcPts val="1500"/>
+              </a:spcAft>
+              <a:buNone/>
+            </a:pPr>
+            <a:r>
+              <a:rPr lang="en-US" sz="1200" b="0" i="0" dirty="0">
+                <a:solidFill>
+                  <a:schemeClr val="tx1"/>
+                </a:solidFill>
+                <a:effectLst/>
+                <a:latin typeface="+mn-lt"/>
+              </a:rPr>
+              <a:t>    }</a:t>
+            </a:r>
+            <a:endParaRPr lang="en-US" sz="700" b="0" i="0" dirty="0">
+              <a:solidFill>
+                <a:srgbClr val="333333"/>
+              </a:solidFill>
+              <a:effectLst/>
+              <a:latin typeface="Consolas" panose="020B0609020204030204" pitchFamily="49" charset="0"/>
+            </a:endParaRPr>
+          </a:p>
+        </p:txBody>
+      </p:sp>
+    </p:spTree>
+    <p:extLst>
+      <p:ext uri="{BB962C8B-B14F-4D97-AF65-F5344CB8AC3E}">
+        <p14:creationId xmlns:p14="http://schemas.microsoft.com/office/powerpoint/2010/main" val="3911263958"/>
+      </p:ext>
+    </p:extLst>
+  </p:cSld>
+  <p:clrMapOvr>
+    <a:masterClrMapping/>
+  </p:clrMapOvr>
+</p:sld>
+</file>
+
+<file path=ppt/slides/slide16.xml><?xml version="1.0" encoding="utf-8"?>
+<p:sld xmlns:a="http://schemas.openxmlformats.org/drawingml/2006/main" xmlns:r="http://schemas.openxmlformats.org/officeDocument/2006/relationships" xmlns:p="http://schemas.openxmlformats.org/presentationml/2006/main">
+  <p:cSld>
+    <p:spTree>
+      <p:nvGrpSpPr>
+        <p:cNvPr id="1" name=""/>
+        <p:cNvGrpSpPr/>
+        <p:nvPr/>
+      </p:nvGrpSpPr>
+      <p:grpSpPr>
+        <a:xfrm>
+          <a:off x="0" y="0"/>
+          <a:ext cx="0" cy="0"/>
+          <a:chOff x="0" y="0"/>
+          <a:chExt cx="0" cy="0"/>
+        </a:xfrm>
+      </p:grpSpPr>
+      <p:sp>
+        <p:nvSpPr>
+          <p:cNvPr id="2" name="Title 1">
+            <a:extLst>
+              <a:ext uri="{FF2B5EF4-FFF2-40B4-BE49-F238E27FC236}">
+                <a16:creationId xmlns:a16="http://schemas.microsoft.com/office/drawing/2014/main" id="{358BC83D-F4F0-784D-53F9-B7B772EE6819}"/>
+              </a:ext>
+            </a:extLst>
+          </p:cNvPr>
+          <p:cNvSpPr>
+            <a:spLocks noGrp="1"/>
+          </p:cNvSpPr>
+          <p:nvPr>
+            <p:ph type="title"/>
+          </p:nvPr>
+        </p:nvSpPr>
+        <p:spPr/>
+        <p:txBody>
+          <a:bodyPr/>
+          <a:lstStyle/>
+          <a:p>
+            <a:r>
+              <a:rPr lang="en-US" dirty="0"/>
+              <a:t>@transactional </a:t>
+            </a:r>
+          </a:p>
+        </p:txBody>
+      </p:sp>
+      <p:sp>
+        <p:nvSpPr>
+          <p:cNvPr id="3" name="Content Placeholder 2">
+            <a:extLst>
+              <a:ext uri="{FF2B5EF4-FFF2-40B4-BE49-F238E27FC236}">
+                <a16:creationId xmlns:a16="http://schemas.microsoft.com/office/drawing/2014/main" id="{687B032A-DF8B-36F1-5D06-14AA2E7EA7D3}"/>
+              </a:ext>
+            </a:extLst>
+          </p:cNvPr>
+          <p:cNvSpPr>
+            <a:spLocks noGrp="1"/>
+          </p:cNvSpPr>
+          <p:nvPr>
+            <p:ph idx="1"/>
+          </p:nvPr>
+        </p:nvSpPr>
+        <p:spPr>
+          <a:xfrm>
+            <a:off x="581192" y="2180496"/>
+            <a:ext cx="5072361" cy="3678303"/>
+          </a:xfrm>
+        </p:spPr>
+        <p:txBody>
+          <a:bodyPr/>
+          <a:lstStyle/>
+          <a:p>
+            <a:r>
+              <a:rPr lang="en-US" dirty="0"/>
+              <a:t>As you’ve seen, there are many options for @Transactional</a:t>
+            </a:r>
+          </a:p>
+          <a:p>
+            <a:r>
+              <a:rPr lang="en-US" dirty="0"/>
+              <a:t>We don’t commonly need all these options</a:t>
+            </a:r>
+          </a:p>
+          <a:p>
+            <a:r>
+              <a:rPr lang="en-US" dirty="0"/>
+              <a:t>It’s more common to just use ‘</a:t>
+            </a:r>
+            <a:r>
+              <a:rPr lang="en-US" dirty="0" err="1"/>
+              <a:t>readOnly</a:t>
+            </a:r>
+            <a:r>
+              <a:rPr lang="en-US" dirty="0"/>
+              <a:t>’</a:t>
+            </a:r>
+          </a:p>
+          <a:p>
+            <a:r>
+              <a:rPr lang="en-US" dirty="0"/>
+              <a:t>This disallows create, update, or delete operations and improves the performance of read-only transactions </a:t>
+            </a:r>
+          </a:p>
+        </p:txBody>
+      </p:sp>
+      <p:pic>
+        <p:nvPicPr>
+          <p:cNvPr id="5" name="Picture 4">
+            <a:extLst>
+              <a:ext uri="{FF2B5EF4-FFF2-40B4-BE49-F238E27FC236}">
+                <a16:creationId xmlns:a16="http://schemas.microsoft.com/office/drawing/2014/main" id="{A1E5825A-C3BA-AF9B-F3E3-738D01551826}"/>
+              </a:ext>
+            </a:extLst>
+          </p:cNvPr>
+          <p:cNvPicPr>
+            <a:picLocks noChangeAspect="1"/>
+          </p:cNvPicPr>
+          <p:nvPr/>
+        </p:nvPicPr>
+        <p:blipFill>
+          <a:blip r:embed="rId2"/>
+          <a:stretch>
+            <a:fillRect/>
+          </a:stretch>
+        </p:blipFill>
+        <p:spPr>
+          <a:xfrm>
+            <a:off x="6096000" y="2706316"/>
+            <a:ext cx="5072360" cy="2907933"/>
+          </a:xfrm>
+          <a:prstGeom prst="rect">
+            <a:avLst/>
+          </a:prstGeom>
+        </p:spPr>
+      </p:pic>
+    </p:spTree>
+    <p:extLst>
+      <p:ext uri="{BB962C8B-B14F-4D97-AF65-F5344CB8AC3E}">
+        <p14:creationId xmlns:p14="http://schemas.microsoft.com/office/powerpoint/2010/main" val="4270507984"/>
+      </p:ext>
+    </p:extLst>
+  </p:cSld>
+  <p:clrMapOvr>
+    <a:masterClrMapping/>
+  </p:clrMapOvr>
+</p:sld>
+</file>
+
+<file path=ppt/slides/slide17.xml><?xml version="1.0" encoding="utf-8"?>
+<p:sld xmlns:a="http://schemas.openxmlformats.org/drawingml/2006/main" xmlns:r="http://schemas.openxmlformats.org/officeDocument/2006/relationships" xmlns:p="http://schemas.openxmlformats.org/presentationml/2006/main">
+  <p:cSld>
+    <p:spTree>
+      <p:nvGrpSpPr>
+        <p:cNvPr id="1" name=""/>
+        <p:cNvGrpSpPr/>
+        <p:nvPr/>
+      </p:nvGrpSpPr>
+      <p:grpSpPr>
+        <a:xfrm>
+          <a:off x="0" y="0"/>
+          <a:ext cx="0" cy="0"/>
+          <a:chOff x="0" y="0"/>
+          <a:chExt cx="0" cy="0"/>
+        </a:xfrm>
+      </p:grpSpPr>
+      <p:sp>
+        <p:nvSpPr>
+          <p:cNvPr id="2" name="Title 1">
+            <a:extLst>
+              <a:ext uri="{FF2B5EF4-FFF2-40B4-BE49-F238E27FC236}">
+                <a16:creationId xmlns:a16="http://schemas.microsoft.com/office/drawing/2014/main" id="{BB23CB1D-38E9-88B1-4DE6-3E50454DB880}"/>
+              </a:ext>
+            </a:extLst>
+          </p:cNvPr>
+          <p:cNvSpPr>
+            <a:spLocks noGrp="1"/>
+          </p:cNvSpPr>
+          <p:nvPr>
+            <p:ph type="title"/>
+          </p:nvPr>
+        </p:nvSpPr>
+        <p:spPr/>
+        <p:txBody>
+          <a:bodyPr/>
+          <a:lstStyle/>
+          <a:p>
+            <a:r>
+              <a:rPr lang="en-US" dirty="0"/>
+              <a:t>STOP</a:t>
+            </a:r>
+          </a:p>
+        </p:txBody>
+      </p:sp>
+      <p:sp>
+        <p:nvSpPr>
+          <p:cNvPr id="3" name="Content Placeholder 2">
+            <a:extLst>
+              <a:ext uri="{FF2B5EF4-FFF2-40B4-BE49-F238E27FC236}">
+                <a16:creationId xmlns:a16="http://schemas.microsoft.com/office/drawing/2014/main" id="{CF5BF0EC-9B89-4A87-A203-4B32191C1C9C}"/>
+              </a:ext>
+            </a:extLst>
+          </p:cNvPr>
+          <p:cNvSpPr>
+            <a:spLocks noGrp="1"/>
+          </p:cNvSpPr>
+          <p:nvPr>
+            <p:ph idx="1"/>
+          </p:nvPr>
+        </p:nvSpPr>
+        <p:spPr/>
+        <p:txBody>
+          <a:bodyPr/>
+          <a:lstStyle/>
+          <a:p>
+            <a:r>
+              <a:rPr lang="en-US" dirty="0"/>
+              <a:t>Let’s put theory into practice with a code-along</a:t>
+            </a:r>
+          </a:p>
+          <a:p>
+            <a:r>
+              <a:rPr lang="en-US" dirty="0"/>
+              <a:t>Please see the completed CRUD app “</a:t>
+            </a:r>
+            <a:r>
+              <a:rPr lang="en-US" dirty="0" err="1"/>
+              <a:t>EntityMangerApp</a:t>
+            </a:r>
+            <a:r>
+              <a:rPr lang="en-US" dirty="0"/>
+              <a:t>” with code comments in your course materials</a:t>
+            </a:r>
+          </a:p>
+          <a:p>
+            <a:r>
+              <a:rPr lang="en-US" dirty="0"/>
+              <a:t>We will stick with </a:t>
+            </a:r>
+            <a:r>
+              <a:rPr lang="en-US" dirty="0" err="1"/>
+              <a:t>EntityManager</a:t>
+            </a:r>
+            <a:r>
+              <a:rPr lang="en-US" dirty="0"/>
+              <a:t> for now, and later create other files in our DAO layer that uses </a:t>
+            </a:r>
+            <a:r>
+              <a:rPr lang="en-US" dirty="0" err="1"/>
+              <a:t>JpaRepository</a:t>
+            </a:r>
+            <a:endParaRPr lang="en-US" dirty="0"/>
+          </a:p>
+        </p:txBody>
+      </p:sp>
+    </p:spTree>
+    <p:extLst>
+      <p:ext uri="{BB962C8B-B14F-4D97-AF65-F5344CB8AC3E}">
+        <p14:creationId xmlns:p14="http://schemas.microsoft.com/office/powerpoint/2010/main" val="4118949446"/>
+      </p:ext>
+    </p:extLst>
+  </p:cSld>
+  <p:clrMapOvr>
+    <a:masterClrMapping/>
+  </p:clrMapOvr>
+</p:sld>
+</file>
+
+<file path=ppt/slides/slide18.xml><?xml version="1.0" encoding="utf-8"?>
+<p:sld xmlns:a="http://schemas.openxmlformats.org/drawingml/2006/main" xmlns:r="http://schemas.openxmlformats.org/officeDocument/2006/relationships" xmlns:p="http://schemas.openxmlformats.org/presentationml/2006/main">
+  <p:cSld>
+    <p:spTree>
+      <p:nvGrpSpPr>
+        <p:cNvPr id="1" name=""/>
+        <p:cNvGrpSpPr/>
+        <p:nvPr/>
+      </p:nvGrpSpPr>
+      <p:grpSpPr>
+        <a:xfrm>
+          <a:off x="0" y="0"/>
+          <a:ext cx="0" cy="0"/>
+          <a:chOff x="0" y="0"/>
+          <a:chExt cx="0" cy="0"/>
+        </a:xfrm>
+      </p:grpSpPr>
+      <p:sp>
+        <p:nvSpPr>
+          <p:cNvPr id="2" name="Title 1">
+            <a:extLst>
+              <a:ext uri="{FF2B5EF4-FFF2-40B4-BE49-F238E27FC236}">
                 <a16:creationId xmlns:a16="http://schemas.microsoft.com/office/drawing/2014/main" id="{478023F1-3303-6F80-4FD5-4F2307C7F8F9}"/>
               </a:ext>
             </a:extLst>
@@ -5021,7 +5892,7 @@
 </p:sld>
 </file>
 
-<file path=ppt/slides/slide16.xml><?xml version="1.0" encoding="utf-8"?>
+<file path=ppt/slides/slide19.xml><?xml version="1.0" encoding="utf-8"?>
 <p:sld xmlns:a="http://schemas.openxmlformats.org/drawingml/2006/main" xmlns:r="http://schemas.openxmlformats.org/officeDocument/2006/relationships" xmlns:p="http://schemas.openxmlformats.org/presentationml/2006/main">
   <p:cSld>
     <p:spTree>
@@ -5282,7 +6153,187 @@
 </p:sld>
 </file>
 
-<file path=ppt/slides/slide17.xml><?xml version="1.0" encoding="utf-8"?>
+<file path=ppt/slides/slide2.xml><?xml version="1.0" encoding="utf-8"?>
+<p:sld xmlns:a="http://schemas.openxmlformats.org/drawingml/2006/main" xmlns:r="http://schemas.openxmlformats.org/officeDocument/2006/relationships" xmlns:p="http://schemas.openxmlformats.org/presentationml/2006/main">
+  <p:cSld>
+    <p:spTree>
+      <p:nvGrpSpPr>
+        <p:cNvPr id="1" name=""/>
+        <p:cNvGrpSpPr/>
+        <p:nvPr/>
+      </p:nvGrpSpPr>
+      <p:grpSpPr>
+        <a:xfrm>
+          <a:off x="0" y="0"/>
+          <a:ext cx="0" cy="0"/>
+          <a:chOff x="0" y="0"/>
+          <a:chExt cx="0" cy="0"/>
+        </a:xfrm>
+      </p:grpSpPr>
+      <p:sp>
+        <p:nvSpPr>
+          <p:cNvPr id="2" name="Title 1">
+            <a:extLst>
+              <a:ext uri="{FF2B5EF4-FFF2-40B4-BE49-F238E27FC236}">
+                <a16:creationId xmlns:a16="http://schemas.microsoft.com/office/drawing/2014/main" id="{41E12A36-4588-5F59-79E8-D52E4D63C35F}"/>
+              </a:ext>
+            </a:extLst>
+          </p:cNvPr>
+          <p:cNvSpPr>
+            <a:spLocks noGrp="1"/>
+          </p:cNvSpPr>
+          <p:nvPr>
+            <p:ph type="title"/>
+          </p:nvPr>
+        </p:nvSpPr>
+        <p:spPr/>
+        <p:txBody>
+          <a:bodyPr/>
+          <a:lstStyle/>
+          <a:p>
+            <a:r>
+              <a:rPr lang="en-US" dirty="0"/>
+              <a:t>What is hibernate?</a:t>
+            </a:r>
+          </a:p>
+        </p:txBody>
+      </p:sp>
+      <p:sp>
+        <p:nvSpPr>
+          <p:cNvPr id="3" name="Content Placeholder 2">
+            <a:extLst>
+              <a:ext uri="{FF2B5EF4-FFF2-40B4-BE49-F238E27FC236}">
+                <a16:creationId xmlns:a16="http://schemas.microsoft.com/office/drawing/2014/main" id="{27AFFFA9-069D-DDF5-94A0-23E98E258204}"/>
+              </a:ext>
+            </a:extLst>
+          </p:cNvPr>
+          <p:cNvSpPr>
+            <a:spLocks noGrp="1"/>
+          </p:cNvSpPr>
+          <p:nvPr>
+            <p:ph idx="1"/>
+          </p:nvPr>
+        </p:nvSpPr>
+        <p:spPr>
+          <a:xfrm>
+            <a:off x="581192" y="2180496"/>
+            <a:ext cx="11029615" cy="2859337"/>
+          </a:xfrm>
+        </p:spPr>
+        <p:txBody>
+          <a:bodyPr>
+            <a:normAutofit fontScale="92500" lnSpcReduction="20000"/>
+          </a:bodyPr>
+          <a:lstStyle/>
+          <a:p>
+            <a:r>
+              <a:rPr lang="en-US" dirty="0"/>
+              <a:t>A framework for saving /persisting java objects in a database</a:t>
+            </a:r>
+          </a:p>
+          <a:p>
+            <a:r>
+              <a:rPr lang="en-US" b="1" dirty="0"/>
+              <a:t>Object-Relational Mapping (ORM):</a:t>
+            </a:r>
+            <a:r>
+              <a:rPr lang="en-US" dirty="0"/>
+              <a:t> Bridges the gap between the object-oriented world of Java and the relational world of SQL databases. It allows developers to store and retrieve Java objects directly as database tables and rows without writing complex, boilerplate SQL queries.</a:t>
+            </a:r>
+          </a:p>
+          <a:p>
+            <a:pPr lvl="1"/>
+            <a:r>
+              <a:rPr lang="en-US" b="1" dirty="0"/>
+              <a:t>Productivity Boost:</a:t>
+            </a:r>
+            <a:r>
+              <a:rPr lang="en-US" dirty="0"/>
+              <a:t> Eliminates massive amounts of tedious JDBC code, connection management, and manual result-set mapping.</a:t>
+            </a:r>
+          </a:p>
+          <a:p>
+            <a:pPr lvl="1"/>
+            <a:r>
+              <a:rPr lang="en-US" b="1" dirty="0"/>
+              <a:t>Database Independence:</a:t>
+            </a:r>
+            <a:r>
+              <a:rPr lang="en-US" dirty="0"/>
+              <a:t> By abstracting SQL dialects, Hibernate allows your application to switch underlying databases with minimal configuration changes.</a:t>
+            </a:r>
+          </a:p>
+          <a:p>
+            <a:pPr lvl="1"/>
+            <a:r>
+              <a:rPr lang="en-US" b="1" dirty="0"/>
+              <a:t>Built-in Caching:</a:t>
+            </a:r>
+            <a:r>
+              <a:rPr lang="en-US" dirty="0"/>
+              <a:t> Features a first-level cache (associated with the Session) and an optional second-level cache (shared across sessions) to significantly reduce database round-trips and improve performance.</a:t>
+            </a:r>
+          </a:p>
+          <a:p>
+            <a:pPr lvl="1"/>
+            <a:r>
+              <a:rPr lang="en-US" b="1" dirty="0"/>
+              <a:t>Automatic Transaction Management:</a:t>
+            </a:r>
+            <a:r>
+              <a:rPr lang="en-US" dirty="0"/>
+              <a:t> Handles database transactions and connection pooling efficiently, ensuring data integrity.</a:t>
+            </a:r>
+          </a:p>
+          <a:p>
+            <a:endParaRPr lang="en-US" dirty="0"/>
+          </a:p>
+        </p:txBody>
+      </p:sp>
+      <p:pic>
+        <p:nvPicPr>
+          <p:cNvPr id="7" name="Picture 6">
+            <a:extLst>
+              <a:ext uri="{FF2B5EF4-FFF2-40B4-BE49-F238E27FC236}">
+                <a16:creationId xmlns:a16="http://schemas.microsoft.com/office/drawing/2014/main" id="{DA5C0503-D2A8-4E1B-DA9A-63E949012BEB}"/>
+              </a:ext>
+            </a:extLst>
+          </p:cNvPr>
+          <p:cNvPicPr>
+            <a:picLocks noChangeAspect="1"/>
+          </p:cNvPicPr>
+          <p:nvPr/>
+        </p:nvPicPr>
+        <p:blipFill>
+          <a:blip r:embed="rId2"/>
+          <a:stretch>
+            <a:fillRect/>
+          </a:stretch>
+        </p:blipFill>
+        <p:spPr>
+          <a:xfrm>
+            <a:off x="2375967" y="4868462"/>
+            <a:ext cx="7440063" cy="1609950"/>
+          </a:xfrm>
+          <a:prstGeom prst="rect">
+            <a:avLst/>
+          </a:prstGeom>
+        </p:spPr>
+      </p:pic>
+    </p:spTree>
+    <p:extLst>
+      <p:ext uri="{BB962C8B-B14F-4D97-AF65-F5344CB8AC3E}">
+        <p14:creationId xmlns:p14="http://schemas.microsoft.com/office/powerpoint/2010/main" val="1508837499"/>
+      </p:ext>
+    </p:extLst>
+  </p:cSld>
+  <p:clrMapOvr>
+    <a:masterClrMapping/>
+  </p:clrMapOvr>
+</p:sld>
+</file>
+
+<file path=ppt/slides/slide20.xml><?xml version="1.0" encoding="utf-8"?>
 <p:sld xmlns:a="http://schemas.openxmlformats.org/drawingml/2006/main" xmlns:r="http://schemas.openxmlformats.org/officeDocument/2006/relationships" xmlns:p="http://schemas.openxmlformats.org/presentationml/2006/main">
   <p:cSld>
     <p:spTree>
@@ -5610,7 +6661,7 @@
 </p:sld>
 </file>
 
-<file path=ppt/slides/slide18.xml><?xml version="1.0" encoding="utf-8"?>
+<file path=ppt/slides/slide21.xml><?xml version="1.0" encoding="utf-8"?>
 <p:sld xmlns:a="http://schemas.openxmlformats.org/drawingml/2006/main" xmlns:r="http://schemas.openxmlformats.org/officeDocument/2006/relationships" xmlns:p="http://schemas.openxmlformats.org/presentationml/2006/main">
   <p:cSld>
     <p:spTree>
@@ -5871,7 +6922,7 @@
 </p:sld>
 </file>
 
-<file path=ppt/slides/slide19.xml><?xml version="1.0" encoding="utf-8"?>
+<file path=ppt/slides/slide22.xml><?xml version="1.0" encoding="utf-8"?>
 <p:sld xmlns:a="http://schemas.openxmlformats.org/drawingml/2006/main" xmlns:r="http://schemas.openxmlformats.org/officeDocument/2006/relationships" xmlns:p="http://schemas.openxmlformats.org/presentationml/2006/main">
   <p:cSld>
     <p:spTree>
@@ -6086,187 +7137,7 @@
 </p:sld>
 </file>
 
-<file path=ppt/slides/slide2.xml><?xml version="1.0" encoding="utf-8"?>
-<p:sld xmlns:a="http://schemas.openxmlformats.org/drawingml/2006/main" xmlns:r="http://schemas.openxmlformats.org/officeDocument/2006/relationships" xmlns:p="http://schemas.openxmlformats.org/presentationml/2006/main">
-  <p:cSld>
-    <p:spTree>
-      <p:nvGrpSpPr>
-        <p:cNvPr id="1" name=""/>
-        <p:cNvGrpSpPr/>
-        <p:nvPr/>
-      </p:nvGrpSpPr>
-      <p:grpSpPr>
-        <a:xfrm>
-          <a:off x="0" y="0"/>
-          <a:ext cx="0" cy="0"/>
-          <a:chOff x="0" y="0"/>
-          <a:chExt cx="0" cy="0"/>
-        </a:xfrm>
-      </p:grpSpPr>
-      <p:sp>
-        <p:nvSpPr>
-          <p:cNvPr id="2" name="Title 1">
-            <a:extLst>
-              <a:ext uri="{FF2B5EF4-FFF2-40B4-BE49-F238E27FC236}">
-                <a16:creationId xmlns:a16="http://schemas.microsoft.com/office/drawing/2014/main" id="{41E12A36-4588-5F59-79E8-D52E4D63C35F}"/>
-              </a:ext>
-            </a:extLst>
-          </p:cNvPr>
-          <p:cNvSpPr>
-            <a:spLocks noGrp="1"/>
-          </p:cNvSpPr>
-          <p:nvPr>
-            <p:ph type="title"/>
-          </p:nvPr>
-        </p:nvSpPr>
-        <p:spPr/>
-        <p:txBody>
-          <a:bodyPr/>
-          <a:lstStyle/>
-          <a:p>
-            <a:r>
-              <a:rPr lang="en-US" dirty="0"/>
-              <a:t>What is hibernate?</a:t>
-            </a:r>
-          </a:p>
-        </p:txBody>
-      </p:sp>
-      <p:sp>
-        <p:nvSpPr>
-          <p:cNvPr id="3" name="Content Placeholder 2">
-            <a:extLst>
-              <a:ext uri="{FF2B5EF4-FFF2-40B4-BE49-F238E27FC236}">
-                <a16:creationId xmlns:a16="http://schemas.microsoft.com/office/drawing/2014/main" id="{27AFFFA9-069D-DDF5-94A0-23E98E258204}"/>
-              </a:ext>
-            </a:extLst>
-          </p:cNvPr>
-          <p:cNvSpPr>
-            <a:spLocks noGrp="1"/>
-          </p:cNvSpPr>
-          <p:nvPr>
-            <p:ph idx="1"/>
-          </p:nvPr>
-        </p:nvSpPr>
-        <p:spPr>
-          <a:xfrm>
-            <a:off x="581192" y="2180496"/>
-            <a:ext cx="11029615" cy="2859337"/>
-          </a:xfrm>
-        </p:spPr>
-        <p:txBody>
-          <a:bodyPr>
-            <a:normAutofit fontScale="92500" lnSpcReduction="20000"/>
-          </a:bodyPr>
-          <a:lstStyle/>
-          <a:p>
-            <a:r>
-              <a:rPr lang="en-US" dirty="0"/>
-              <a:t>A framework for saving /persisting java objects in a database</a:t>
-            </a:r>
-          </a:p>
-          <a:p>
-            <a:r>
-              <a:rPr lang="en-US" b="1" dirty="0"/>
-              <a:t>Object-Relational Mapping (ORM):</a:t>
-            </a:r>
-            <a:r>
-              <a:rPr lang="en-US" dirty="0"/>
-              <a:t> Bridges the gap between the object-oriented world of Java and the relational world of SQL databases. It allows developers to store and retrieve Java objects directly as database tables and rows without writing complex, boilerplate SQL queries.</a:t>
-            </a:r>
-          </a:p>
-          <a:p>
-            <a:pPr lvl="1"/>
-            <a:r>
-              <a:rPr lang="en-US" b="1" dirty="0"/>
-              <a:t>Productivity Boost:</a:t>
-            </a:r>
-            <a:r>
-              <a:rPr lang="en-US" dirty="0"/>
-              <a:t> Eliminates massive amounts of tedious JDBC code, connection management, and manual result-set mapping.</a:t>
-            </a:r>
-          </a:p>
-          <a:p>
-            <a:pPr lvl="1"/>
-            <a:r>
-              <a:rPr lang="en-US" b="1" dirty="0"/>
-              <a:t>Database Independence:</a:t>
-            </a:r>
-            <a:r>
-              <a:rPr lang="en-US" dirty="0"/>
-              <a:t> By abstracting SQL dialects, Hibernate allows your application to switch underlying databases with minimal configuration changes.</a:t>
-            </a:r>
-          </a:p>
-          <a:p>
-            <a:pPr lvl="1"/>
-            <a:r>
-              <a:rPr lang="en-US" b="1" dirty="0"/>
-              <a:t>Built-in Caching:</a:t>
-            </a:r>
-            <a:r>
-              <a:rPr lang="en-US" dirty="0"/>
-              <a:t> Features a first-level cache (associated with the Session) and an optional second-level cache (shared across sessions) to significantly reduce database round-trips and improve performance.</a:t>
-            </a:r>
-          </a:p>
-          <a:p>
-            <a:pPr lvl="1"/>
-            <a:r>
-              <a:rPr lang="en-US" b="1" dirty="0"/>
-              <a:t>Automatic Transaction Management:</a:t>
-            </a:r>
-            <a:r>
-              <a:rPr lang="en-US" dirty="0"/>
-              <a:t> Handles database transactions and connection pooling efficiently, ensuring data integrity.</a:t>
-            </a:r>
-          </a:p>
-          <a:p>
-            <a:endParaRPr lang="en-US" dirty="0"/>
-          </a:p>
-        </p:txBody>
-      </p:sp>
-      <p:pic>
-        <p:nvPicPr>
-          <p:cNvPr id="7" name="Picture 6">
-            <a:extLst>
-              <a:ext uri="{FF2B5EF4-FFF2-40B4-BE49-F238E27FC236}">
-                <a16:creationId xmlns:a16="http://schemas.microsoft.com/office/drawing/2014/main" id="{DA5C0503-D2A8-4E1B-DA9A-63E949012BEB}"/>
-              </a:ext>
-            </a:extLst>
-          </p:cNvPr>
-          <p:cNvPicPr>
-            <a:picLocks noChangeAspect="1"/>
-          </p:cNvPicPr>
-          <p:nvPr/>
-        </p:nvPicPr>
-        <p:blipFill>
-          <a:blip r:embed="rId2"/>
-          <a:stretch>
-            <a:fillRect/>
-          </a:stretch>
-        </p:blipFill>
-        <p:spPr>
-          <a:xfrm>
-            <a:off x="2375967" y="4868462"/>
-            <a:ext cx="7440063" cy="1609950"/>
-          </a:xfrm>
-          <a:prstGeom prst="rect">
-            <a:avLst/>
-          </a:prstGeom>
-        </p:spPr>
-      </p:pic>
-    </p:spTree>
-    <p:extLst>
-      <p:ext uri="{BB962C8B-B14F-4D97-AF65-F5344CB8AC3E}">
-        <p14:creationId xmlns:p14="http://schemas.microsoft.com/office/powerpoint/2010/main" val="1508837499"/>
-      </p:ext>
-    </p:extLst>
-  </p:cSld>
-  <p:clrMapOvr>
-    <a:masterClrMapping/>
-  </p:clrMapOvr>
-</p:sld>
-</file>
-
-<file path=ppt/slides/slide20.xml><?xml version="1.0" encoding="utf-8"?>
+<file path=ppt/slides/slide23.xml><?xml version="1.0" encoding="utf-8"?>
 <p:sld xmlns:a="http://schemas.openxmlformats.org/drawingml/2006/main" xmlns:r="http://schemas.openxmlformats.org/officeDocument/2006/relationships" xmlns:p="http://schemas.openxmlformats.org/presentationml/2006/main">
   <p:cSld>
     <p:spTree>
@@ -7379,7 +8250,7 @@
 </p:sld>
 </file>
 
-<file path=ppt/slides/slide21.xml><?xml version="1.0" encoding="utf-8"?>
+<file path=ppt/slides/slide24.xml><?xml version="1.0" encoding="utf-8"?>
 <p:sld xmlns:a="http://schemas.openxmlformats.org/drawingml/2006/main" xmlns:r="http://schemas.openxmlformats.org/officeDocument/2006/relationships" xmlns:p="http://schemas.openxmlformats.org/presentationml/2006/main">
   <p:cSld>
     <p:spTree>
@@ -7530,7 +8401,7 @@
 </p:sld>
 </file>
 
-<file path=ppt/slides/slide22.xml><?xml version="1.0" encoding="utf-8"?>
+<file path=ppt/slides/slide25.xml><?xml version="1.0" encoding="utf-8"?>
 <p:sld xmlns:a="http://schemas.openxmlformats.org/drawingml/2006/main" xmlns:r="http://schemas.openxmlformats.org/officeDocument/2006/relationships" xmlns:p="http://schemas.openxmlformats.org/presentationml/2006/main">
   <p:cSld>
     <p:spTree>
@@ -7703,7 +8574,7 @@
 </p:sld>
 </file>
 
-<file path=ppt/slides/slide23.xml><?xml version="1.0" encoding="utf-8"?>
+<file path=ppt/slides/slide26.xml><?xml version="1.0" encoding="utf-8"?>
 <p:sld xmlns:a="http://schemas.openxmlformats.org/drawingml/2006/main" xmlns:r="http://schemas.openxmlformats.org/officeDocument/2006/relationships" xmlns:p="http://schemas.openxmlformats.org/presentationml/2006/main">
   <p:cSld>
     <p:spTree>
@@ -7842,7 +8713,7 @@
 </p:sld>
 </file>
 
-<file path=ppt/slides/slide24.xml><?xml version="1.0" encoding="utf-8"?>
+<file path=ppt/slides/slide27.xml><?xml version="1.0" encoding="utf-8"?>
 <p:sld xmlns:a="http://schemas.openxmlformats.org/drawingml/2006/main" xmlns:r="http://schemas.openxmlformats.org/officeDocument/2006/relationships" xmlns:p="http://schemas.openxmlformats.org/presentationml/2006/main">
   <p:cSld>
     <p:spTree>
@@ -7983,7 +8854,7 @@
 </p:sld>
 </file>
 
-<file path=ppt/slides/slide25.xml><?xml version="1.0" encoding="utf-8"?>
+<file path=ppt/slides/slide28.xml><?xml version="1.0" encoding="utf-8"?>
 <p:sld xmlns:a="http://schemas.openxmlformats.org/drawingml/2006/main" xmlns:r="http://schemas.openxmlformats.org/officeDocument/2006/relationships" xmlns:p="http://schemas.openxmlformats.org/presentationml/2006/main">
   <p:cSld>
     <p:spTree>
@@ -8268,7 +9139,7 @@
 </p:sld>
 </file>
 
-<file path=ppt/slides/slide26.xml><?xml version="1.0" encoding="utf-8"?>
+<file path=ppt/slides/slide29.xml><?xml version="1.0" encoding="utf-8"?>
 <p:sld xmlns:a="http://schemas.openxmlformats.org/drawingml/2006/main" xmlns:r="http://schemas.openxmlformats.org/officeDocument/2006/relationships" xmlns:p="http://schemas.openxmlformats.org/presentationml/2006/main">
   <p:cSld>
     <p:spTree>
@@ -8415,7 +9286,163 @@
 </p:sld>
 </file>
 
-<file path=ppt/slides/slide27.xml><?xml version="1.0" encoding="utf-8"?>
+<file path=ppt/slides/slide3.xml><?xml version="1.0" encoding="utf-8"?>
+<p:sld xmlns:a="http://schemas.openxmlformats.org/drawingml/2006/main" xmlns:r="http://schemas.openxmlformats.org/officeDocument/2006/relationships" xmlns:p="http://schemas.openxmlformats.org/presentationml/2006/main">
+  <p:cSld>
+    <p:spTree>
+      <p:nvGrpSpPr>
+        <p:cNvPr id="1" name=""/>
+        <p:cNvGrpSpPr/>
+        <p:nvPr/>
+      </p:nvGrpSpPr>
+      <p:grpSpPr>
+        <a:xfrm>
+          <a:off x="0" y="0"/>
+          <a:ext cx="0" cy="0"/>
+          <a:chOff x="0" y="0"/>
+          <a:chExt cx="0" cy="0"/>
+        </a:xfrm>
+      </p:grpSpPr>
+      <p:sp>
+        <p:nvSpPr>
+          <p:cNvPr id="2" name="Title 1">
+            <a:extLst>
+              <a:ext uri="{FF2B5EF4-FFF2-40B4-BE49-F238E27FC236}">
+                <a16:creationId xmlns:a16="http://schemas.microsoft.com/office/drawing/2014/main" id="{B6E07699-A587-AD13-366E-8CC5FF4CEEF7}"/>
+              </a:ext>
+            </a:extLst>
+          </p:cNvPr>
+          <p:cNvSpPr>
+            <a:spLocks noGrp="1"/>
+          </p:cNvSpPr>
+          <p:nvPr>
+            <p:ph type="title"/>
+          </p:nvPr>
+        </p:nvSpPr>
+        <p:spPr/>
+        <p:txBody>
+          <a:bodyPr/>
+          <a:lstStyle/>
+          <a:p>
+            <a:r>
+              <a:rPr lang="en-US" dirty="0"/>
+              <a:t>What is JPA?</a:t>
+            </a:r>
+          </a:p>
+        </p:txBody>
+      </p:sp>
+      <p:sp>
+        <p:nvSpPr>
+          <p:cNvPr id="3" name="Content Placeholder 2">
+            <a:extLst>
+              <a:ext uri="{FF2B5EF4-FFF2-40B4-BE49-F238E27FC236}">
+                <a16:creationId xmlns:a16="http://schemas.microsoft.com/office/drawing/2014/main" id="{D64CCE71-301C-D88A-5A4C-8AD9189506E6}"/>
+              </a:ext>
+            </a:extLst>
+          </p:cNvPr>
+          <p:cNvSpPr>
+            <a:spLocks noGrp="1"/>
+          </p:cNvSpPr>
+          <p:nvPr>
+            <p:ph idx="1"/>
+          </p:nvPr>
+        </p:nvSpPr>
+        <p:spPr>
+          <a:xfrm>
+            <a:off x="581193" y="2180496"/>
+            <a:ext cx="5096586" cy="4092713"/>
+          </a:xfrm>
+        </p:spPr>
+        <p:txBody>
+          <a:bodyPr/>
+          <a:lstStyle/>
+          <a:p>
+            <a:r>
+              <a:rPr lang="en-US" dirty="0"/>
+              <a:t>Jakarta Persistence API (JPA) – previously known as Java Persistence API</a:t>
+            </a:r>
+          </a:p>
+          <a:p>
+            <a:pPr lvl="1"/>
+            <a:r>
+              <a:rPr lang="en-US" dirty="0"/>
+              <a:t>Standard API for Object Relational Mapping</a:t>
+            </a:r>
+          </a:p>
+          <a:p>
+            <a:pPr lvl="1"/>
+            <a:r>
+              <a:rPr lang="en-US" dirty="0"/>
+              <a:t>Is a specification</a:t>
+            </a:r>
+          </a:p>
+          <a:p>
+            <a:pPr lvl="1"/>
+            <a:r>
+              <a:rPr lang="en-US" dirty="0"/>
+              <a:t>Includes interfaces</a:t>
+            </a:r>
+          </a:p>
+          <a:p>
+            <a:pPr lvl="1"/>
+            <a:r>
+              <a:rPr lang="en-US" dirty="0"/>
+              <a:t>Requires implementations to use</a:t>
+            </a:r>
+          </a:p>
+          <a:p>
+            <a:pPr lvl="1"/>
+            <a:r>
+              <a:rPr lang="en-US" dirty="0"/>
+              <a:t>Hibernate is one way we can implement JPA </a:t>
+            </a:r>
+          </a:p>
+        </p:txBody>
+      </p:sp>
+      <p:pic>
+        <p:nvPicPr>
+          <p:cNvPr id="5" name="Picture 4">
+            <a:extLst>
+              <a:ext uri="{FF2B5EF4-FFF2-40B4-BE49-F238E27FC236}">
+                <a16:creationId xmlns:a16="http://schemas.microsoft.com/office/drawing/2014/main" id="{88D308B2-5C8A-3D8B-DC61-D9EEB618683C}"/>
+              </a:ext>
+            </a:extLst>
+          </p:cNvPr>
+          <p:cNvPicPr>
+            <a:picLocks noChangeAspect="1"/>
+          </p:cNvPicPr>
+          <p:nvPr/>
+        </p:nvPicPr>
+        <p:blipFill>
+          <a:blip r:embed="rId2"/>
+          <a:stretch>
+            <a:fillRect/>
+          </a:stretch>
+        </p:blipFill>
+        <p:spPr>
+          <a:xfrm>
+            <a:off x="6096000" y="3212298"/>
+            <a:ext cx="5096586" cy="2029108"/>
+          </a:xfrm>
+          <a:prstGeom prst="rect">
+            <a:avLst/>
+          </a:prstGeom>
+        </p:spPr>
+      </p:pic>
+    </p:spTree>
+    <p:extLst>
+      <p:ext uri="{BB962C8B-B14F-4D97-AF65-F5344CB8AC3E}">
+        <p14:creationId xmlns:p14="http://schemas.microsoft.com/office/powerpoint/2010/main" val="989935227"/>
+      </p:ext>
+    </p:extLst>
+  </p:cSld>
+  <p:clrMapOvr>
+    <a:masterClrMapping/>
+  </p:clrMapOvr>
+</p:sld>
+</file>
+
+<file path=ppt/slides/slide30.xml><?xml version="1.0" encoding="utf-8"?>
 <p:sld xmlns:a="http://schemas.openxmlformats.org/drawingml/2006/main" xmlns:r="http://schemas.openxmlformats.org/officeDocument/2006/relationships" xmlns:p="http://schemas.openxmlformats.org/presentationml/2006/main">
   <p:cSld>
     <p:spTree>
@@ -9103,7 +10130,7 @@
 </p:sld>
 </file>
 
-<file path=ppt/slides/slide28.xml><?xml version="1.0" encoding="utf-8"?>
+<file path=ppt/slides/slide31.xml><?xml version="1.0" encoding="utf-8"?>
 <p:sld xmlns:a="http://schemas.openxmlformats.org/drawingml/2006/main" xmlns:r="http://schemas.openxmlformats.org/officeDocument/2006/relationships" xmlns:p="http://schemas.openxmlformats.org/presentationml/2006/main">
   <p:cSld>
     <p:spTree>
@@ -9429,7 +10456,7 @@
 </p:sld>
 </file>
 
-<file path=ppt/slides/slide29.xml><?xml version="1.0" encoding="utf-8"?>
+<file path=ppt/slides/slide32.xml><?xml version="1.0" encoding="utf-8"?>
 <p:sld xmlns:a="http://schemas.openxmlformats.org/drawingml/2006/main" xmlns:r="http://schemas.openxmlformats.org/officeDocument/2006/relationships" xmlns:p="http://schemas.openxmlformats.org/presentationml/2006/main">
   <p:cSld>
     <p:spTree>
@@ -9556,163 +10583,7 @@
 </p:sld>
 </file>
 
-<file path=ppt/slides/slide3.xml><?xml version="1.0" encoding="utf-8"?>
-<p:sld xmlns:a="http://schemas.openxmlformats.org/drawingml/2006/main" xmlns:r="http://schemas.openxmlformats.org/officeDocument/2006/relationships" xmlns:p="http://schemas.openxmlformats.org/presentationml/2006/main">
-  <p:cSld>
-    <p:spTree>
-      <p:nvGrpSpPr>
-        <p:cNvPr id="1" name=""/>
-        <p:cNvGrpSpPr/>
-        <p:nvPr/>
-      </p:nvGrpSpPr>
-      <p:grpSpPr>
-        <a:xfrm>
-          <a:off x="0" y="0"/>
-          <a:ext cx="0" cy="0"/>
-          <a:chOff x="0" y="0"/>
-          <a:chExt cx="0" cy="0"/>
-        </a:xfrm>
-      </p:grpSpPr>
-      <p:sp>
-        <p:nvSpPr>
-          <p:cNvPr id="2" name="Title 1">
-            <a:extLst>
-              <a:ext uri="{FF2B5EF4-FFF2-40B4-BE49-F238E27FC236}">
-                <a16:creationId xmlns:a16="http://schemas.microsoft.com/office/drawing/2014/main" id="{B6E07699-A587-AD13-366E-8CC5FF4CEEF7}"/>
-              </a:ext>
-            </a:extLst>
-          </p:cNvPr>
-          <p:cNvSpPr>
-            <a:spLocks noGrp="1"/>
-          </p:cNvSpPr>
-          <p:nvPr>
-            <p:ph type="title"/>
-          </p:nvPr>
-        </p:nvSpPr>
-        <p:spPr/>
-        <p:txBody>
-          <a:bodyPr/>
-          <a:lstStyle/>
-          <a:p>
-            <a:r>
-              <a:rPr lang="en-US" dirty="0"/>
-              <a:t>What is JPA?</a:t>
-            </a:r>
-          </a:p>
-        </p:txBody>
-      </p:sp>
-      <p:sp>
-        <p:nvSpPr>
-          <p:cNvPr id="3" name="Content Placeholder 2">
-            <a:extLst>
-              <a:ext uri="{FF2B5EF4-FFF2-40B4-BE49-F238E27FC236}">
-                <a16:creationId xmlns:a16="http://schemas.microsoft.com/office/drawing/2014/main" id="{D64CCE71-301C-D88A-5A4C-8AD9189506E6}"/>
-              </a:ext>
-            </a:extLst>
-          </p:cNvPr>
-          <p:cNvSpPr>
-            <a:spLocks noGrp="1"/>
-          </p:cNvSpPr>
-          <p:nvPr>
-            <p:ph idx="1"/>
-          </p:nvPr>
-        </p:nvSpPr>
-        <p:spPr>
-          <a:xfrm>
-            <a:off x="581193" y="2180496"/>
-            <a:ext cx="5096586" cy="4092713"/>
-          </a:xfrm>
-        </p:spPr>
-        <p:txBody>
-          <a:bodyPr/>
-          <a:lstStyle/>
-          <a:p>
-            <a:r>
-              <a:rPr lang="en-US" dirty="0"/>
-              <a:t>Jakarta Persistence API (JPA) – previously known as Java Persistence API</a:t>
-            </a:r>
-          </a:p>
-          <a:p>
-            <a:pPr lvl="1"/>
-            <a:r>
-              <a:rPr lang="en-US" dirty="0"/>
-              <a:t>Standard API for Object Relational Mapping</a:t>
-            </a:r>
-          </a:p>
-          <a:p>
-            <a:pPr lvl="1"/>
-            <a:r>
-              <a:rPr lang="en-US" dirty="0"/>
-              <a:t>Is a specification</a:t>
-            </a:r>
-          </a:p>
-          <a:p>
-            <a:pPr lvl="1"/>
-            <a:r>
-              <a:rPr lang="en-US" dirty="0"/>
-              <a:t>Includes interfaces</a:t>
-            </a:r>
-          </a:p>
-          <a:p>
-            <a:pPr lvl="1"/>
-            <a:r>
-              <a:rPr lang="en-US" dirty="0"/>
-              <a:t>Requires implementations to use</a:t>
-            </a:r>
-          </a:p>
-          <a:p>
-            <a:pPr lvl="1"/>
-            <a:r>
-              <a:rPr lang="en-US" dirty="0"/>
-              <a:t>Hibernate is one way we can implement JPA </a:t>
-            </a:r>
-          </a:p>
-        </p:txBody>
-      </p:sp>
-      <p:pic>
-        <p:nvPicPr>
-          <p:cNvPr id="5" name="Picture 4">
-            <a:extLst>
-              <a:ext uri="{FF2B5EF4-FFF2-40B4-BE49-F238E27FC236}">
-                <a16:creationId xmlns:a16="http://schemas.microsoft.com/office/drawing/2014/main" id="{88D308B2-5C8A-3D8B-DC61-D9EEB618683C}"/>
-              </a:ext>
-            </a:extLst>
-          </p:cNvPr>
-          <p:cNvPicPr>
-            <a:picLocks noChangeAspect="1"/>
-          </p:cNvPicPr>
-          <p:nvPr/>
-        </p:nvPicPr>
-        <p:blipFill>
-          <a:blip r:embed="rId2"/>
-          <a:stretch>
-            <a:fillRect/>
-          </a:stretch>
-        </p:blipFill>
-        <p:spPr>
-          <a:xfrm>
-            <a:off x="6096000" y="3212298"/>
-            <a:ext cx="5096586" cy="2029108"/>
-          </a:xfrm>
-          <a:prstGeom prst="rect">
-            <a:avLst/>
-          </a:prstGeom>
-        </p:spPr>
-      </p:pic>
-    </p:spTree>
-    <p:extLst>
-      <p:ext uri="{BB962C8B-B14F-4D97-AF65-F5344CB8AC3E}">
-        <p14:creationId xmlns:p14="http://schemas.microsoft.com/office/powerpoint/2010/main" val="989935227"/>
-      </p:ext>
-    </p:extLst>
-  </p:cSld>
-  <p:clrMapOvr>
-    <a:masterClrMapping/>
-  </p:clrMapOvr>
-</p:sld>
-</file>
-
-<file path=ppt/slides/slide30.xml><?xml version="1.0" encoding="utf-8"?>
+<file path=ppt/slides/slide33.xml><?xml version="1.0" encoding="utf-8"?>
 <p:sld xmlns:a="http://schemas.openxmlformats.org/drawingml/2006/main" xmlns:r="http://schemas.openxmlformats.org/officeDocument/2006/relationships" xmlns:p="http://schemas.openxmlformats.org/presentationml/2006/main">
   <p:cSld>
     <p:spTree>
@@ -9970,7 +10841,7 @@
 </p:sld>
 </file>
 
-<file path=ppt/slides/slide31.xml><?xml version="1.0" encoding="utf-8"?>
+<file path=ppt/slides/slide34.xml><?xml version="1.0" encoding="utf-8"?>
 <p:sld xmlns:a="http://schemas.openxmlformats.org/drawingml/2006/main" xmlns:r="http://schemas.openxmlformats.org/officeDocument/2006/relationships" xmlns:p="http://schemas.openxmlformats.org/presentationml/2006/main">
   <p:cSld>
     <p:spTree>
@@ -10118,7 +10989,7 @@
 </p:sld>
 </file>
 
-<file path=ppt/slides/slide32.xml><?xml version="1.0" encoding="utf-8"?>
+<file path=ppt/slides/slide35.xml><?xml version="1.0" encoding="utf-8"?>
 <p:sld xmlns:a="http://schemas.openxmlformats.org/drawingml/2006/main" xmlns:r="http://schemas.openxmlformats.org/officeDocument/2006/relationships" xmlns:p="http://schemas.openxmlformats.org/presentationml/2006/main">
   <p:cSld>
     <p:spTree>
@@ -10427,7 +11298,7 @@
 </p:sld>
 </file>
 
-<file path=ppt/slides/slide33.xml><?xml version="1.0" encoding="utf-8"?>
+<file path=ppt/slides/slide36.xml><?xml version="1.0" encoding="utf-8"?>
 <p:sld xmlns:a="http://schemas.openxmlformats.org/drawingml/2006/main" xmlns:r="http://schemas.openxmlformats.org/officeDocument/2006/relationships" xmlns:p="http://schemas.openxmlformats.org/presentationml/2006/main">
   <p:cSld>
     <p:spTree>
@@ -10533,18 +11404,12 @@
 </p:sld>
 </file>
 
-<file path=ppt/slides/slide34.xml><?xml version="1.0" encoding="utf-8"?>
-<p:sld xmlns:a="http://schemas.openxmlformats.org/drawingml/2006/main" xmlns:r="http://schemas.openxmlformats.org/officeDocument/2006/relationships" xmlns:p="http://schemas.openxmlformats.org/presentationml/2006/main" show="0">
+<file path=ppt/slides/slide37.xml><?xml version="1.0" encoding="utf-8"?>
+<p:sld xmlns:a="http://schemas.openxmlformats.org/drawingml/2006/main" xmlns:r="http://schemas.openxmlformats.org/officeDocument/2006/relationships" xmlns:p="http://schemas.openxmlformats.org/presentationml/2006/main">
   <p:cSld>
     <p:spTree>
       <p:nvGrpSpPr>
-        <p:cNvPr id="1" name="">
-          <a:extLst>
-            <a:ext uri="{FF2B5EF4-FFF2-40B4-BE49-F238E27FC236}">
-              <a16:creationId xmlns:a16="http://schemas.microsoft.com/office/drawing/2014/main" id="{8695FB92-6A2A-D33A-9349-4B2FC8FB8D53}"/>
-            </a:ext>
-          </a:extLst>
-        </p:cNvPr>
+        <p:cNvPr id="1" name=""/>
         <p:cNvGrpSpPr/>
         <p:nvPr/>
       </p:nvGrpSpPr>
@@ -10561,7 +11426,7 @@
           <p:cNvPr id="2" name="Title 1">
             <a:extLst>
               <a:ext uri="{FF2B5EF4-FFF2-40B4-BE49-F238E27FC236}">
-                <a16:creationId xmlns:a16="http://schemas.microsoft.com/office/drawing/2014/main" id="{11F3D84A-B2A2-70EA-E959-F4AF070FDADF}"/>
+                <a16:creationId xmlns:a16="http://schemas.microsoft.com/office/drawing/2014/main" id="{D492AE20-87C3-8AE1-9FC4-F9455219B508}"/>
               </a:ext>
             </a:extLst>
           </p:cNvPr>
@@ -10579,17 +11444,703 @@
           <a:p>
             <a:r>
               <a:rPr lang="en-US" dirty="0"/>
-              <a:t>Challenge – let’s check our understanding</a:t>
-            </a:r>
-          </a:p>
-        </p:txBody>
-      </p:sp>
-      <p:sp>
-        <p:nvSpPr>
-          <p:cNvPr id="3" name="Content Placeholder 2">
+              <a:t>Overview/recap on database interactions </a:t>
+            </a:r>
+          </a:p>
+        </p:txBody>
+      </p:sp>
+      <p:graphicFrame>
+        <p:nvGraphicFramePr>
+          <p:cNvPr id="6" name="Table 5">
             <a:extLst>
               <a:ext uri="{FF2B5EF4-FFF2-40B4-BE49-F238E27FC236}">
-                <a16:creationId xmlns:a16="http://schemas.microsoft.com/office/drawing/2014/main" id="{D13E1DF8-36E0-1D6D-D9DB-C73571F53862}"/>
+                <a16:creationId xmlns:a16="http://schemas.microsoft.com/office/drawing/2014/main" id="{830A4196-9CBC-0998-9483-0374CECE6DB6}"/>
+              </a:ext>
+            </a:extLst>
+          </p:cNvPr>
+          <p:cNvGraphicFramePr>
+            <a:graphicFrameLocks noGrp="1"/>
+          </p:cNvGraphicFramePr>
+          <p:nvPr>
+            <p:extLst>
+              <p:ext uri="{D42A27DB-BD31-4B8C-83A1-F6EECF244321}">
+                <p14:modId xmlns:p14="http://schemas.microsoft.com/office/powerpoint/2010/main" val="2320013769"/>
+              </p:ext>
+            </p:extLst>
+          </p:nvPr>
+        </p:nvGraphicFramePr>
+        <p:xfrm>
+          <a:off x="402238" y="2073350"/>
+          <a:ext cx="11387524" cy="3944271"/>
+        </p:xfrm>
+        <a:graphic>
+          <a:graphicData uri="http://schemas.openxmlformats.org/drawingml/2006/table">
+            <a:tbl>
+              <a:tblPr>
+                <a:tableStyleId>{5C22544A-7EE6-4342-B048-85BDC9FD1C3A}</a:tableStyleId>
+              </a:tblPr>
+              <a:tblGrid>
+                <a:gridCol w="2846881">
+                  <a:extLst>
+                    <a:ext uri="{9D8B030D-6E8A-4147-A177-3AD203B41FA5}">
+                      <a16:colId xmlns:a16="http://schemas.microsoft.com/office/drawing/2014/main" val="1607982294"/>
+                    </a:ext>
+                  </a:extLst>
+                </a:gridCol>
+                <a:gridCol w="2846881">
+                  <a:extLst>
+                    <a:ext uri="{9D8B030D-6E8A-4147-A177-3AD203B41FA5}">
+                      <a16:colId xmlns:a16="http://schemas.microsoft.com/office/drawing/2014/main" val="344748459"/>
+                    </a:ext>
+                  </a:extLst>
+                </a:gridCol>
+                <a:gridCol w="2846881">
+                  <a:extLst>
+                    <a:ext uri="{9D8B030D-6E8A-4147-A177-3AD203B41FA5}">
+                      <a16:colId xmlns:a16="http://schemas.microsoft.com/office/drawing/2014/main" val="2071245589"/>
+                    </a:ext>
+                  </a:extLst>
+                </a:gridCol>
+                <a:gridCol w="2846881">
+                  <a:extLst>
+                    <a:ext uri="{9D8B030D-6E8A-4147-A177-3AD203B41FA5}">
+                      <a16:colId xmlns:a16="http://schemas.microsoft.com/office/drawing/2014/main" val="4283276085"/>
+                    </a:ext>
+                  </a:extLst>
+                </a:gridCol>
+              </a:tblGrid>
+              <a:tr h="627497">
+                <a:tc>
+                  <a:txBody>
+                    <a:bodyPr/>
+                    <a:lstStyle/>
+                    <a:p>
+                      <a:pPr marL="0" marR="0" algn="l" fontAlgn="t">
+                        <a:buNone/>
+                      </a:pPr>
+                      <a:r>
+                        <a:rPr lang="en-US" sz="1400" b="1" spc="0" dirty="0">
+                          <a:effectLst/>
+                        </a:rPr>
+                        <a:t>Approach</a:t>
+                      </a:r>
+                      <a:endParaRPr lang="en-US" sz="1400" b="1" i="0" spc="0" dirty="0">
+                        <a:solidFill>
+                          <a:srgbClr val="FFFFFF"/>
+                        </a:solidFill>
+                        <a:effectLst/>
+                        <a:latin typeface="-apple-system-body"/>
+                      </a:endParaRPr>
+                    </a:p>
+                  </a:txBody>
+                  <a:tcPr marT="50800" marB="50800"/>
+                </a:tc>
+                <a:tc>
+                  <a:txBody>
+                    <a:bodyPr/>
+                    <a:lstStyle/>
+                    <a:p>
+                      <a:pPr marL="0" marR="0" algn="l" fontAlgn="t">
+                        <a:buNone/>
+                      </a:pPr>
+                      <a:r>
+                        <a:rPr lang="en-US" sz="1400" b="1" spc="0">
+                          <a:effectLst/>
+                        </a:rPr>
+                        <a:t>Definition</a:t>
+                      </a:r>
+                      <a:endParaRPr lang="en-US" sz="1400" b="1" i="0" spc="0">
+                        <a:solidFill>
+                          <a:srgbClr val="FFFFFF"/>
+                        </a:solidFill>
+                        <a:effectLst/>
+                        <a:latin typeface="-apple-system-body"/>
+                      </a:endParaRPr>
+                    </a:p>
+                  </a:txBody>
+                  <a:tcPr marT="50800" marB="50800"/>
+                </a:tc>
+                <a:tc>
+                  <a:txBody>
+                    <a:bodyPr/>
+                    <a:lstStyle/>
+                    <a:p>
+                      <a:pPr marL="0" marR="0" algn="l" fontAlgn="t">
+                        <a:buNone/>
+                      </a:pPr>
+                      <a:r>
+                        <a:rPr lang="en-US" sz="1400" b="1" spc="0">
+                          <a:effectLst/>
+                        </a:rPr>
+                        <a:t>Common APIs in Spring</a:t>
+                      </a:r>
+                      <a:endParaRPr lang="en-US" sz="1400" b="1" i="0" spc="0">
+                        <a:solidFill>
+                          <a:srgbClr val="FFFFFF"/>
+                        </a:solidFill>
+                        <a:effectLst/>
+                        <a:latin typeface="-apple-system-body"/>
+                      </a:endParaRPr>
+                    </a:p>
+                  </a:txBody>
+                  <a:tcPr marT="50800" marB="50800"/>
+                </a:tc>
+                <a:tc>
+                  <a:txBody>
+                    <a:bodyPr/>
+                    <a:lstStyle/>
+                    <a:p>
+                      <a:pPr marL="0" marR="0" algn="l" fontAlgn="t">
+                        <a:buNone/>
+                      </a:pPr>
+                      <a:r>
+                        <a:rPr lang="en-US" sz="1400" b="1" spc="0" dirty="0">
+                          <a:effectLst/>
+                        </a:rPr>
+                        <a:t>Queries against</a:t>
+                      </a:r>
+                      <a:endParaRPr lang="en-US" sz="1400" b="1" i="0" spc="0" dirty="0">
+                        <a:solidFill>
+                          <a:srgbClr val="FFFFFF"/>
+                        </a:solidFill>
+                        <a:effectLst/>
+                        <a:latin typeface="-apple-system-body"/>
+                      </a:endParaRPr>
+                    </a:p>
+                  </a:txBody>
+                  <a:tcPr marT="50800" marB="50800"/>
+                </a:tc>
+                <a:extLst>
+                  <a:ext uri="{0D108BD9-81ED-4DB2-BD59-A6C34878D82A}">
+                    <a16:rowId xmlns:a16="http://schemas.microsoft.com/office/drawing/2014/main" val="3882636343"/>
+                  </a:ext>
+                </a:extLst>
+              </a:tr>
+              <a:tr h="627497">
+                <a:tc>
+                  <a:txBody>
+                    <a:bodyPr/>
+                    <a:lstStyle/>
+                    <a:p>
+                      <a:pPr marL="0" marR="0" algn="l" fontAlgn="t">
+                        <a:buNone/>
+                      </a:pPr>
+                      <a:r>
+                        <a:rPr lang="en-US" sz="1400" spc="0">
+                          <a:effectLst/>
+                        </a:rPr>
+                        <a:t>HQL</a:t>
+                      </a:r>
+                      <a:endParaRPr lang="en-US" sz="1400" b="0" i="0" spc="0">
+                        <a:solidFill>
+                          <a:srgbClr val="FFFFFF"/>
+                        </a:solidFill>
+                        <a:effectLst/>
+                        <a:latin typeface="-apple-system-body"/>
+                      </a:endParaRPr>
+                    </a:p>
+                  </a:txBody>
+                  <a:tcPr marT="50800" marB="50800"/>
+                </a:tc>
+                <a:tc>
+                  <a:txBody>
+                    <a:bodyPr/>
+                    <a:lstStyle/>
+                    <a:p>
+                      <a:pPr marL="0" marR="0" algn="l" fontAlgn="t">
+                        <a:buNone/>
+                      </a:pPr>
+                      <a:r>
+                        <a:rPr lang="en-US" sz="1400" spc="0">
+                          <a:effectLst/>
+                        </a:rPr>
+                        <a:t>Hibernate Query Language</a:t>
+                      </a:r>
+                      <a:endParaRPr lang="en-US" sz="1400" b="0" i="0" spc="0">
+                        <a:solidFill>
+                          <a:srgbClr val="FFFFFF"/>
+                        </a:solidFill>
+                        <a:effectLst/>
+                        <a:latin typeface="-apple-system-body"/>
+                      </a:endParaRPr>
+                    </a:p>
+                  </a:txBody>
+                  <a:tcPr marT="50800" marB="50800"/>
+                </a:tc>
+                <a:tc>
+                  <a:txBody>
+                    <a:bodyPr/>
+                    <a:lstStyle/>
+                    <a:p>
+                      <a:pPr marL="0" marR="0" algn="l" fontAlgn="t">
+                        <a:buNone/>
+                      </a:pPr>
+                      <a:r>
+                        <a:rPr lang="en-US" sz="1400" spc="0">
+                          <a:effectLst/>
+                        </a:rPr>
+                        <a:t>Session, EntityManager, @Query</a:t>
+                      </a:r>
+                      <a:endParaRPr lang="en-US" sz="1400" b="0" i="0" spc="0">
+                        <a:solidFill>
+                          <a:srgbClr val="FFFFFF"/>
+                        </a:solidFill>
+                        <a:effectLst/>
+                        <a:latin typeface="-apple-system-body"/>
+                      </a:endParaRPr>
+                    </a:p>
+                  </a:txBody>
+                  <a:tcPr marT="50800" marB="50800"/>
+                </a:tc>
+                <a:tc>
+                  <a:txBody>
+                    <a:bodyPr/>
+                    <a:lstStyle/>
+                    <a:p>
+                      <a:pPr marL="0" marR="0" algn="l" fontAlgn="t">
+                        <a:buNone/>
+                      </a:pPr>
+                      <a:r>
+                        <a:rPr lang="en-US" sz="1400" spc="0">
+                          <a:effectLst/>
+                        </a:rPr>
+                        <a:t>Entity classes and their properties</a:t>
+                      </a:r>
+                      <a:endParaRPr lang="en-US" sz="1400" b="0" i="0" spc="0">
+                        <a:solidFill>
+                          <a:srgbClr val="FFFFFF"/>
+                        </a:solidFill>
+                        <a:effectLst/>
+                        <a:latin typeface="-apple-system-body"/>
+                      </a:endParaRPr>
+                    </a:p>
+                  </a:txBody>
+                  <a:tcPr marT="50800" marB="50800"/>
+                </a:tc>
+                <a:extLst>
+                  <a:ext uri="{0D108BD9-81ED-4DB2-BD59-A6C34878D82A}">
+                    <a16:rowId xmlns:a16="http://schemas.microsoft.com/office/drawing/2014/main" val="1269669461"/>
+                  </a:ext>
+                </a:extLst>
+              </a:tr>
+              <a:tr h="627497">
+                <a:tc>
+                  <a:txBody>
+                    <a:bodyPr/>
+                    <a:lstStyle/>
+                    <a:p>
+                      <a:pPr marL="0" marR="0" algn="l" fontAlgn="t">
+                        <a:buNone/>
+                      </a:pPr>
+                      <a:r>
+                        <a:rPr lang="en-US" sz="1400" spc="0">
+                          <a:effectLst/>
+                        </a:rPr>
+                        <a:t>JPQL</a:t>
+                      </a:r>
+                      <a:endParaRPr lang="en-US" sz="1400" b="0" i="0" spc="0">
+                        <a:solidFill>
+                          <a:srgbClr val="FFFFFF"/>
+                        </a:solidFill>
+                        <a:effectLst/>
+                        <a:latin typeface="-apple-system-body"/>
+                      </a:endParaRPr>
+                    </a:p>
+                  </a:txBody>
+                  <a:tcPr marT="50800" marB="50800"/>
+                </a:tc>
+                <a:tc>
+                  <a:txBody>
+                    <a:bodyPr/>
+                    <a:lstStyle/>
+                    <a:p>
+                      <a:pPr marL="0" marR="0" algn="l" fontAlgn="t">
+                        <a:buNone/>
+                      </a:pPr>
+                      <a:r>
+                        <a:rPr lang="en-US" sz="1400" spc="0">
+                          <a:effectLst/>
+                        </a:rPr>
+                        <a:t>Jakarta Persistence Query Language</a:t>
+                      </a:r>
+                      <a:endParaRPr lang="en-US" sz="1400" b="0" i="0" spc="0">
+                        <a:solidFill>
+                          <a:srgbClr val="FFFFFF"/>
+                        </a:solidFill>
+                        <a:effectLst/>
+                        <a:latin typeface="-apple-system-body"/>
+                      </a:endParaRPr>
+                    </a:p>
+                  </a:txBody>
+                  <a:tcPr marT="50800" marB="50800"/>
+                </a:tc>
+                <a:tc>
+                  <a:txBody>
+                    <a:bodyPr/>
+                    <a:lstStyle/>
+                    <a:p>
+                      <a:pPr marL="0" marR="0" algn="l" fontAlgn="t">
+                        <a:buNone/>
+                      </a:pPr>
+                      <a:r>
+                        <a:rPr lang="en-US" sz="1400" spc="0">
+                          <a:effectLst/>
+                        </a:rPr>
+                        <a:t>EntityManager, @Query</a:t>
+                      </a:r>
+                      <a:endParaRPr lang="en-US" sz="1400" b="0" i="0" spc="0">
+                        <a:solidFill>
+                          <a:srgbClr val="FFFFFF"/>
+                        </a:solidFill>
+                        <a:effectLst/>
+                        <a:latin typeface="-apple-system-body"/>
+                      </a:endParaRPr>
+                    </a:p>
+                  </a:txBody>
+                  <a:tcPr marT="50800" marB="50800"/>
+                </a:tc>
+                <a:tc>
+                  <a:txBody>
+                    <a:bodyPr/>
+                    <a:lstStyle/>
+                    <a:p>
+                      <a:pPr marL="0" marR="0" algn="l" fontAlgn="t">
+                        <a:buNone/>
+                      </a:pPr>
+                      <a:r>
+                        <a:rPr lang="en-US" sz="1400" spc="0">
+                          <a:effectLst/>
+                        </a:rPr>
+                        <a:t>Entity classes and their properties</a:t>
+                      </a:r>
+                      <a:endParaRPr lang="en-US" sz="1400" b="0" i="0" spc="0">
+                        <a:solidFill>
+                          <a:srgbClr val="FFFFFF"/>
+                        </a:solidFill>
+                        <a:effectLst/>
+                        <a:latin typeface="-apple-system-body"/>
+                      </a:endParaRPr>
+                    </a:p>
+                  </a:txBody>
+                  <a:tcPr marT="50800" marB="50800"/>
+                </a:tc>
+                <a:extLst>
+                  <a:ext uri="{0D108BD9-81ED-4DB2-BD59-A6C34878D82A}">
+                    <a16:rowId xmlns:a16="http://schemas.microsoft.com/office/drawing/2014/main" val="3480527985"/>
+                  </a:ext>
+                </a:extLst>
+              </a:tr>
+              <a:tr h="1030890">
+                <a:tc>
+                  <a:txBody>
+                    <a:bodyPr/>
+                    <a:lstStyle/>
+                    <a:p>
+                      <a:pPr marL="0" marR="0" algn="l" fontAlgn="t">
+                        <a:buNone/>
+                      </a:pPr>
+                      <a:r>
+                        <a:rPr lang="en-US" sz="1400" spc="0">
+                          <a:effectLst/>
+                        </a:rPr>
+                        <a:t>Native SQL</a:t>
+                      </a:r>
+                      <a:endParaRPr lang="en-US" sz="1400" b="0" i="0" spc="0">
+                        <a:solidFill>
+                          <a:srgbClr val="FFFFFF"/>
+                        </a:solidFill>
+                        <a:effectLst/>
+                        <a:latin typeface="-apple-system-body"/>
+                      </a:endParaRPr>
+                    </a:p>
+                  </a:txBody>
+                  <a:tcPr marT="50800" marB="50800"/>
+                </a:tc>
+                <a:tc>
+                  <a:txBody>
+                    <a:bodyPr/>
+                    <a:lstStyle/>
+                    <a:p>
+                      <a:pPr marL="0" marR="0" algn="l" fontAlgn="t">
+                        <a:buNone/>
+                      </a:pPr>
+                      <a:r>
+                        <a:rPr lang="en-US" sz="1400" spc="0">
+                          <a:effectLst/>
+                        </a:rPr>
+                        <a:t>Database's actual SQL dialect</a:t>
+                      </a:r>
+                      <a:endParaRPr lang="en-US" sz="1400" b="0" i="0" spc="0">
+                        <a:solidFill>
+                          <a:srgbClr val="FFFFFF"/>
+                        </a:solidFill>
+                        <a:effectLst/>
+                        <a:latin typeface="-apple-system-body"/>
+                      </a:endParaRPr>
+                    </a:p>
+                  </a:txBody>
+                  <a:tcPr marT="50800" marB="50800"/>
+                </a:tc>
+                <a:tc>
+                  <a:txBody>
+                    <a:bodyPr/>
+                    <a:lstStyle/>
+                    <a:p>
+                      <a:pPr marL="0" marR="0" algn="l" fontAlgn="t">
+                        <a:buNone/>
+                      </a:pPr>
+                      <a:r>
+                        <a:rPr lang="en-US" sz="1400" spc="0" dirty="0" err="1">
+                          <a:effectLst/>
+                        </a:rPr>
+                        <a:t>EntityManager</a:t>
+                      </a:r>
+                      <a:r>
+                        <a:rPr lang="en-US" sz="1400" spc="0" dirty="0">
+                          <a:effectLst/>
+                        </a:rPr>
+                        <a:t>, Session, </a:t>
+                      </a:r>
+                    </a:p>
+                    <a:p>
+                      <a:pPr marL="0" marR="0" algn="l" fontAlgn="t">
+                        <a:buNone/>
+                      </a:pPr>
+                      <a:r>
+                        <a:rPr lang="en-US" sz="1400" spc="0" dirty="0">
+                          <a:effectLst/>
+                        </a:rPr>
+                        <a:t>@Query(nativeQuery = true)</a:t>
+                      </a:r>
+                      <a:endParaRPr lang="en-US" sz="1400" b="0" i="0" spc="0" dirty="0">
+                        <a:solidFill>
+                          <a:srgbClr val="FFFFFF"/>
+                        </a:solidFill>
+                        <a:effectLst/>
+                        <a:latin typeface="-apple-system-body"/>
+                      </a:endParaRPr>
+                    </a:p>
+                  </a:txBody>
+                  <a:tcPr marT="50800" marB="50800"/>
+                </a:tc>
+                <a:tc>
+                  <a:txBody>
+                    <a:bodyPr/>
+                    <a:lstStyle/>
+                    <a:p>
+                      <a:pPr marL="0" marR="0" algn="l" fontAlgn="t">
+                        <a:buNone/>
+                      </a:pPr>
+                      <a:r>
+                        <a:rPr lang="en-US" sz="1400" spc="0">
+                          <a:effectLst/>
+                        </a:rPr>
+                        <a:t>Database tables and columns</a:t>
+                      </a:r>
+                      <a:endParaRPr lang="en-US" sz="1400" b="0" i="0" spc="0">
+                        <a:solidFill>
+                          <a:srgbClr val="FFFFFF"/>
+                        </a:solidFill>
+                        <a:effectLst/>
+                        <a:latin typeface="-apple-system-body"/>
+                      </a:endParaRPr>
+                    </a:p>
+                  </a:txBody>
+                  <a:tcPr marT="50800" marB="50800"/>
+                </a:tc>
+                <a:extLst>
+                  <a:ext uri="{0D108BD9-81ED-4DB2-BD59-A6C34878D82A}">
+                    <a16:rowId xmlns:a16="http://schemas.microsoft.com/office/drawing/2014/main" val="699523948"/>
+                  </a:ext>
+                </a:extLst>
+              </a:tr>
+              <a:tr h="1030890">
+                <a:tc>
+                  <a:txBody>
+                    <a:bodyPr/>
+                    <a:lstStyle/>
+                    <a:p>
+                      <a:pPr marL="0" marR="0" algn="l" fontAlgn="t">
+                        <a:buNone/>
+                      </a:pPr>
+                      <a:r>
+                        <a:rPr lang="en-US" sz="1400" spc="0">
+                          <a:effectLst/>
+                        </a:rPr>
+                        <a:t>Criteria API</a:t>
+                      </a:r>
+                      <a:endParaRPr lang="en-US" sz="1400" b="0" i="0" spc="0">
+                        <a:solidFill>
+                          <a:srgbClr val="FFFFFF"/>
+                        </a:solidFill>
+                        <a:effectLst/>
+                        <a:latin typeface="-apple-system-body"/>
+                      </a:endParaRPr>
+                    </a:p>
+                  </a:txBody>
+                  <a:tcPr marT="50800" marB="50800"/>
+                </a:tc>
+                <a:tc>
+                  <a:txBody>
+                    <a:bodyPr/>
+                    <a:lstStyle/>
+                    <a:p>
+                      <a:pPr marL="0" marR="0" algn="l" fontAlgn="t">
+                        <a:buNone/>
+                      </a:pPr>
+                      <a:r>
+                        <a:rPr lang="en-US" sz="1400" spc="0" dirty="0">
+                          <a:effectLst/>
+                        </a:rPr>
+                        <a:t>Java API for building queries </a:t>
+                      </a:r>
+                    </a:p>
+                    <a:p>
+                      <a:pPr marL="0" marR="0" algn="l" fontAlgn="t">
+                        <a:buNone/>
+                      </a:pPr>
+                      <a:r>
+                        <a:rPr lang="en-US" sz="1400" spc="0" dirty="0">
+                          <a:effectLst/>
+                        </a:rPr>
+                        <a:t>programmatically</a:t>
+                      </a:r>
+                      <a:endParaRPr lang="en-US" sz="1400" b="0" i="0" spc="0" dirty="0">
+                        <a:solidFill>
+                          <a:srgbClr val="FFFFFF"/>
+                        </a:solidFill>
+                        <a:effectLst/>
+                        <a:latin typeface="-apple-system-body"/>
+                      </a:endParaRPr>
+                    </a:p>
+                  </a:txBody>
+                  <a:tcPr marT="50800" marB="50800"/>
+                </a:tc>
+                <a:tc>
+                  <a:txBody>
+                    <a:bodyPr/>
+                    <a:lstStyle/>
+                    <a:p>
+                      <a:pPr marL="0" marR="0" algn="l" fontAlgn="t">
+                        <a:buNone/>
+                      </a:pPr>
+                      <a:r>
+                        <a:rPr lang="en-US" sz="1400" spc="0" dirty="0" err="1">
+                          <a:effectLst/>
+                        </a:rPr>
+                        <a:t>EntityManager</a:t>
+                      </a:r>
+                      <a:r>
+                        <a:rPr lang="en-US" sz="1400" spc="0" dirty="0">
+                          <a:effectLst/>
+                        </a:rPr>
+                        <a:t>, </a:t>
+                      </a:r>
+                      <a:r>
+                        <a:rPr lang="en-US" sz="1400" spc="0" dirty="0" err="1">
+                          <a:effectLst/>
+                        </a:rPr>
+                        <a:t>CriteriaBuilder</a:t>
+                      </a:r>
+                      <a:r>
+                        <a:rPr lang="en-US" sz="1400" spc="0" dirty="0">
+                          <a:effectLst/>
+                        </a:rPr>
+                        <a:t>, </a:t>
+                      </a:r>
+                    </a:p>
+                    <a:p>
+                      <a:pPr marL="0" marR="0" algn="l" fontAlgn="t">
+                        <a:buNone/>
+                      </a:pPr>
+                      <a:r>
+                        <a:rPr lang="en-US" sz="1400" spc="0" dirty="0" err="1">
+                          <a:effectLst/>
+                        </a:rPr>
+                        <a:t>CriteriaQuery</a:t>
+                      </a:r>
+                      <a:endParaRPr lang="en-US" sz="1400" b="0" i="0" spc="0" dirty="0">
+                        <a:solidFill>
+                          <a:srgbClr val="FFFFFF"/>
+                        </a:solidFill>
+                        <a:effectLst/>
+                        <a:latin typeface="-apple-system-body"/>
+                      </a:endParaRPr>
+                    </a:p>
+                  </a:txBody>
+                  <a:tcPr marT="50800" marB="50800"/>
+                </a:tc>
+                <a:tc>
+                  <a:txBody>
+                    <a:bodyPr/>
+                    <a:lstStyle/>
+                    <a:p>
+                      <a:pPr marL="0" marR="0" algn="l" fontAlgn="t">
+                        <a:buNone/>
+                      </a:pPr>
+                      <a:r>
+                        <a:rPr lang="en-US" sz="1400" spc="0" dirty="0">
+                          <a:effectLst/>
+                        </a:rPr>
+                        <a:t>Entity classes and their properties</a:t>
+                      </a:r>
+                      <a:endParaRPr lang="en-US" sz="1400" b="0" i="0" spc="0" dirty="0">
+                        <a:solidFill>
+                          <a:srgbClr val="FFFFFF"/>
+                        </a:solidFill>
+                        <a:effectLst/>
+                        <a:latin typeface="-apple-system-body"/>
+                      </a:endParaRPr>
+                    </a:p>
+                  </a:txBody>
+                  <a:tcPr marT="50800" marB="50800"/>
+                </a:tc>
+                <a:extLst>
+                  <a:ext uri="{0D108BD9-81ED-4DB2-BD59-A6C34878D82A}">
+                    <a16:rowId xmlns:a16="http://schemas.microsoft.com/office/drawing/2014/main" val="3203570840"/>
+                  </a:ext>
+                </a:extLst>
+              </a:tr>
+            </a:tbl>
+          </a:graphicData>
+        </a:graphic>
+      </p:graphicFrame>
+    </p:spTree>
+    <p:extLst>
+      <p:ext uri="{BB962C8B-B14F-4D97-AF65-F5344CB8AC3E}">
+        <p14:creationId xmlns:p14="http://schemas.microsoft.com/office/powerpoint/2010/main" val="2516311531"/>
+      </p:ext>
+    </p:extLst>
+  </p:cSld>
+  <p:clrMapOvr>
+    <a:masterClrMapping/>
+  </p:clrMapOvr>
+</p:sld>
+</file>
+
+<file path=ppt/slides/slide38.xml><?xml version="1.0" encoding="utf-8"?>
+<p:sld xmlns:a="http://schemas.openxmlformats.org/drawingml/2006/main" xmlns:r="http://schemas.openxmlformats.org/officeDocument/2006/relationships" xmlns:p="http://schemas.openxmlformats.org/presentationml/2006/main">
+  <p:cSld>
+    <p:spTree>
+      <p:nvGrpSpPr>
+        <p:cNvPr id="1" name=""/>
+        <p:cNvGrpSpPr/>
+        <p:nvPr/>
+      </p:nvGrpSpPr>
+      <p:grpSpPr>
+        <a:xfrm>
+          <a:off x="0" y="0"/>
+          <a:ext cx="0" cy="0"/>
+          <a:chOff x="0" y="0"/>
+          <a:chExt cx="0" cy="0"/>
+        </a:xfrm>
+      </p:grpSpPr>
+      <p:sp>
+        <p:nvSpPr>
+          <p:cNvPr id="2" name="Title 1">
+            <a:extLst>
+              <a:ext uri="{FF2B5EF4-FFF2-40B4-BE49-F238E27FC236}">
+                <a16:creationId xmlns:a16="http://schemas.microsoft.com/office/drawing/2014/main" id="{A10330C4-2FB6-E923-2381-88C581132883}"/>
               </a:ext>
             </a:extLst>
           </p:cNvPr>
@@ -10597,32 +12148,27 @@
             <a:spLocks noGrp="1"/>
           </p:cNvSpPr>
           <p:nvPr>
-            <p:ph idx="1"/>
+            <p:ph type="title"/>
           </p:nvPr>
         </p:nvSpPr>
-        <p:spPr>
-          <a:xfrm>
-            <a:off x="581192" y="2475925"/>
-            <a:ext cx="5317584" cy="1681246"/>
-          </a:xfrm>
-        </p:spPr>
+        <p:spPr/>
         <p:txBody>
           <a:bodyPr/>
           <a:lstStyle/>
           <a:p>
             <a:r>
               <a:rPr lang="en-US" dirty="0"/>
-              <a:t>Create endpoints for different types of coaches</a:t>
-            </a:r>
-          </a:p>
-        </p:txBody>
-      </p:sp>
-      <p:sp>
-        <p:nvSpPr>
-          <p:cNvPr id="6" name="TextBox 5">
+              <a:t>Native SQL</a:t>
+            </a:r>
+          </a:p>
+        </p:txBody>
+      </p:sp>
+      <p:sp>
+        <p:nvSpPr>
+          <p:cNvPr id="5" name="TextBox 4">
             <a:extLst>
               <a:ext uri="{FF2B5EF4-FFF2-40B4-BE49-F238E27FC236}">
-                <a16:creationId xmlns:a16="http://schemas.microsoft.com/office/drawing/2014/main" id="{4711C103-16B8-599E-5739-2FDF5191F349}"/>
+                <a16:creationId xmlns:a16="http://schemas.microsoft.com/office/drawing/2014/main" id="{90DD531C-FE1F-03CA-F4CF-B2CFAD24C07A}"/>
               </a:ext>
             </a:extLst>
           </p:cNvPr>
@@ -10631,8 +12177,8 @@
         </p:nvSpPr>
         <p:spPr>
           <a:xfrm>
-            <a:off x="1228165" y="2402747"/>
-            <a:ext cx="756938" cy="369332"/>
+            <a:off x="762886" y="2906071"/>
+            <a:ext cx="4734147" cy="2862322"/>
           </a:xfrm>
           <a:prstGeom prst="rect">
             <a:avLst/>
@@ -10640,15 +12186,300 @@
           <a:noFill/>
         </p:spPr>
         <p:txBody>
-          <a:bodyPr wrap="none" rtlCol="0">
+          <a:bodyPr wrap="square">
             <a:spAutoFit/>
           </a:bodyPr>
           <a:lstStyle/>
           <a:p>
-            <a:r>
-              <a:rPr lang="en-US" b="1" dirty="0"/>
-              <a:t>Goal:</a:t>
-            </a:r>
+            <a:pPr indent="0" algn="l">
+              <a:buNone/>
+            </a:pPr>
+            <a:r>
+              <a:rPr lang="en-US" sz="1800" b="0" i="0" dirty="0">
+                <a:solidFill>
+                  <a:schemeClr val="tx1"/>
+                </a:solidFill>
+                <a:effectLst/>
+                <a:latin typeface="+mn-lt"/>
+              </a:rPr>
+              <a:t>String </a:t>
+            </a:r>
+            <a:r>
+              <a:rPr lang="en-US" sz="1800" b="0" i="0" dirty="0" err="1">
+                <a:solidFill>
+                  <a:schemeClr val="tx1"/>
+                </a:solidFill>
+                <a:effectLst/>
+                <a:latin typeface="+mn-lt"/>
+              </a:rPr>
+              <a:t>sql</a:t>
+            </a:r>
+            <a:r>
+              <a:rPr lang="en-US" sz="1800" b="0" i="0" dirty="0">
+                <a:solidFill>
+                  <a:schemeClr val="tx1"/>
+                </a:solidFill>
+                <a:effectLst/>
+                <a:latin typeface="+mn-lt"/>
+              </a:rPr>
+              <a:t> = """</a:t>
+            </a:r>
+          </a:p>
+          <a:p>
+            <a:pPr indent="0" algn="l">
+              <a:buNone/>
+            </a:pPr>
+            <a:r>
+              <a:rPr lang="en-US" sz="1800" b="0" i="0" dirty="0">
+                <a:solidFill>
+                  <a:schemeClr val="tx1"/>
+                </a:solidFill>
+                <a:effectLst/>
+                <a:latin typeface="+mn-lt"/>
+              </a:rPr>
+              <a:t>    SELECT *</a:t>
+            </a:r>
+          </a:p>
+          <a:p>
+            <a:pPr indent="0" algn="l">
+              <a:buNone/>
+            </a:pPr>
+            <a:r>
+              <a:rPr lang="en-US" sz="1800" b="0" i="0" dirty="0">
+                <a:solidFill>
+                  <a:schemeClr val="tx1"/>
+                </a:solidFill>
+                <a:effectLst/>
+                <a:latin typeface="+mn-lt"/>
+              </a:rPr>
+              <a:t>    FROM employees</a:t>
+            </a:r>
+          </a:p>
+          <a:p>
+            <a:pPr indent="0" algn="l">
+              <a:buNone/>
+            </a:pPr>
+            <a:r>
+              <a:rPr lang="en-US" sz="1800" b="0" i="0" dirty="0">
+                <a:solidFill>
+                  <a:schemeClr val="tx1"/>
+                </a:solidFill>
+                <a:effectLst/>
+                <a:latin typeface="+mn-lt"/>
+              </a:rPr>
+              <a:t>    WHERE salary &gt; :salary</a:t>
+            </a:r>
+          </a:p>
+          <a:p>
+            <a:pPr indent="0" algn="l">
+              <a:buNone/>
+            </a:pPr>
+            <a:r>
+              <a:rPr lang="en-US" sz="1800" b="0" i="0" dirty="0">
+                <a:solidFill>
+                  <a:schemeClr val="tx1"/>
+                </a:solidFill>
+                <a:effectLst/>
+                <a:latin typeface="+mn-lt"/>
+              </a:rPr>
+              <a:t>    """;</a:t>
+            </a:r>
+          </a:p>
+          <a:p>
+            <a:pPr indent="0" algn="l">
+              <a:buNone/>
+            </a:pPr>
+            <a:endParaRPr lang="en-US" sz="1800" b="0" i="0" dirty="0">
+              <a:solidFill>
+                <a:schemeClr val="tx1"/>
+              </a:solidFill>
+              <a:effectLst/>
+              <a:latin typeface="+mn-lt"/>
+            </a:endParaRPr>
+          </a:p>
+          <a:p>
+            <a:pPr indent="0" algn="l">
+              <a:buNone/>
+            </a:pPr>
+            <a:r>
+              <a:rPr lang="en-US" sz="1800" b="0" i="0" dirty="0">
+                <a:solidFill>
+                  <a:schemeClr val="tx1"/>
+                </a:solidFill>
+                <a:effectLst/>
+                <a:latin typeface="+mn-lt"/>
+              </a:rPr>
+              <a:t>List&lt;Employee&gt; employees = </a:t>
+            </a:r>
+            <a:r>
+              <a:rPr lang="en-US" sz="1800" b="0" i="0" dirty="0" err="1">
+                <a:solidFill>
+                  <a:schemeClr val="tx1"/>
+                </a:solidFill>
+                <a:effectLst/>
+                <a:latin typeface="+mn-lt"/>
+              </a:rPr>
+              <a:t>entityManager</a:t>
+            </a:r>
+            <a:endParaRPr lang="en-US" sz="1800" b="0" i="0" dirty="0">
+              <a:solidFill>
+                <a:schemeClr val="tx1"/>
+              </a:solidFill>
+              <a:effectLst/>
+              <a:latin typeface="+mn-lt"/>
+            </a:endParaRPr>
+          </a:p>
+          <a:p>
+            <a:pPr indent="0" algn="l">
+              <a:buNone/>
+            </a:pPr>
+            <a:r>
+              <a:rPr lang="en-US" sz="1800" b="0" i="0" dirty="0">
+                <a:solidFill>
+                  <a:schemeClr val="tx1"/>
+                </a:solidFill>
+                <a:effectLst/>
+                <a:latin typeface="+mn-lt"/>
+              </a:rPr>
+              <a:t>    .</a:t>
+            </a:r>
+            <a:r>
+              <a:rPr lang="en-US" sz="1800" b="0" i="0" dirty="0" err="1">
+                <a:solidFill>
+                  <a:schemeClr val="tx1"/>
+                </a:solidFill>
+                <a:effectLst/>
+                <a:latin typeface="+mn-lt"/>
+              </a:rPr>
+              <a:t>createNativeQuery</a:t>
+            </a:r>
+            <a:r>
+              <a:rPr lang="en-US" sz="1800" b="0" i="0" dirty="0">
+                <a:solidFill>
+                  <a:schemeClr val="tx1"/>
+                </a:solidFill>
+                <a:effectLst/>
+                <a:latin typeface="+mn-lt"/>
+              </a:rPr>
+              <a:t>(</a:t>
+            </a:r>
+            <a:r>
+              <a:rPr lang="en-US" sz="1800" b="0" i="0" dirty="0" err="1">
+                <a:solidFill>
+                  <a:schemeClr val="tx1"/>
+                </a:solidFill>
+                <a:effectLst/>
+                <a:latin typeface="+mn-lt"/>
+              </a:rPr>
+              <a:t>sql</a:t>
+            </a:r>
+            <a:r>
+              <a:rPr lang="en-US" sz="1800" b="0" i="0" dirty="0">
+                <a:solidFill>
+                  <a:schemeClr val="tx1"/>
+                </a:solidFill>
+                <a:effectLst/>
+                <a:latin typeface="+mn-lt"/>
+              </a:rPr>
+              <a:t>, </a:t>
+            </a:r>
+            <a:r>
+              <a:rPr lang="en-US" sz="1800" b="0" i="0" dirty="0" err="1">
+                <a:solidFill>
+                  <a:schemeClr val="tx1"/>
+                </a:solidFill>
+                <a:effectLst/>
+                <a:latin typeface="+mn-lt"/>
+              </a:rPr>
+              <a:t>Employee.class</a:t>
+            </a:r>
+            <a:r>
+              <a:rPr lang="en-US" sz="1800" b="0" i="0" dirty="0">
+                <a:solidFill>
+                  <a:schemeClr val="tx1"/>
+                </a:solidFill>
+                <a:effectLst/>
+                <a:latin typeface="+mn-lt"/>
+              </a:rPr>
+              <a:t>)</a:t>
+            </a:r>
+          </a:p>
+          <a:p>
+            <a:pPr indent="0" algn="l">
+              <a:buNone/>
+            </a:pPr>
+            <a:r>
+              <a:rPr lang="en-US" sz="1800" b="0" i="0" dirty="0">
+                <a:solidFill>
+                  <a:schemeClr val="tx1"/>
+                </a:solidFill>
+                <a:effectLst/>
+                <a:latin typeface="+mn-lt"/>
+              </a:rPr>
+              <a:t>    .</a:t>
+            </a:r>
+            <a:r>
+              <a:rPr lang="en-US" sz="1800" b="0" i="0" dirty="0" err="1">
+                <a:solidFill>
+                  <a:schemeClr val="tx1"/>
+                </a:solidFill>
+                <a:effectLst/>
+                <a:latin typeface="+mn-lt"/>
+              </a:rPr>
+              <a:t>setParameter</a:t>
+            </a:r>
+            <a:r>
+              <a:rPr lang="en-US" sz="1800" b="0" i="0" dirty="0">
+                <a:solidFill>
+                  <a:schemeClr val="tx1"/>
+                </a:solidFill>
+                <a:effectLst/>
+                <a:latin typeface="+mn-lt"/>
+              </a:rPr>
+              <a:t>("salary", 50000)</a:t>
+            </a:r>
+          </a:p>
+          <a:p>
+            <a:pPr indent="0" algn="l">
+              <a:buNone/>
+            </a:pPr>
+            <a:r>
+              <a:rPr lang="en-US" sz="1800" b="0" i="0" dirty="0">
+                <a:solidFill>
+                  <a:schemeClr val="tx1"/>
+                </a:solidFill>
+                <a:effectLst/>
+                <a:latin typeface="+mn-lt"/>
+              </a:rPr>
+              <a:t>    .</a:t>
+            </a:r>
+            <a:r>
+              <a:rPr lang="en-US" sz="1800" b="0" i="0" dirty="0" err="1">
+                <a:solidFill>
+                  <a:schemeClr val="tx1"/>
+                </a:solidFill>
+                <a:effectLst/>
+                <a:latin typeface="+mn-lt"/>
+              </a:rPr>
+              <a:t>getResultList</a:t>
+            </a:r>
+            <a:r>
+              <a:rPr lang="en-US" sz="1800" b="0" i="0" dirty="0">
+                <a:solidFill>
+                  <a:schemeClr val="tx1"/>
+                </a:solidFill>
+                <a:effectLst/>
+                <a:latin typeface="+mn-lt"/>
+              </a:rPr>
+              <a:t>();</a:t>
+            </a:r>
+            <a:endParaRPr lang="en-US" sz="1200" b="0" i="0" dirty="0">
+              <a:solidFill>
+                <a:srgbClr val="FFFFFF"/>
+              </a:solidFill>
+              <a:effectLst/>
+              <a:latin typeface="Courier New" panose="02070309020205020404" pitchFamily="49" charset="0"/>
+            </a:endParaRPr>
           </a:p>
         </p:txBody>
       </p:sp>
@@ -10657,7 +12488,7 @@
           <p:cNvPr id="7" name="TextBox 6">
             <a:extLst>
               <a:ext uri="{FF2B5EF4-FFF2-40B4-BE49-F238E27FC236}">
-                <a16:creationId xmlns:a16="http://schemas.microsoft.com/office/drawing/2014/main" id="{45AB5C3A-C77B-4B2B-5C19-A80BEA882757}"/>
+                <a16:creationId xmlns:a16="http://schemas.microsoft.com/office/drawing/2014/main" id="{62CDC5E5-D944-2B1D-6178-B19B2E7CD89E}"/>
               </a:ext>
             </a:extLst>
           </p:cNvPr>
@@ -10666,8 +12497,8 @@
         </p:nvSpPr>
         <p:spPr>
           <a:xfrm>
-            <a:off x="6949165" y="2402747"/>
-            <a:ext cx="4661643" cy="369332"/>
+            <a:off x="5513036" y="2906071"/>
+            <a:ext cx="6678964" cy="3139321"/>
           </a:xfrm>
           <a:prstGeom prst="rect">
             <a:avLst/>
@@ -10675,277 +12506,352 @@
           <a:noFill/>
         </p:spPr>
         <p:txBody>
-          <a:bodyPr wrap="square" rtlCol="0">
+          <a:bodyPr wrap="square">
             <a:spAutoFit/>
           </a:bodyPr>
           <a:lstStyle/>
           <a:p>
-            <a:r>
-              <a:rPr lang="en-US" b="1" dirty="0"/>
-              <a:t>Scenario:  			   5 min</a:t>
-            </a:r>
-          </a:p>
-        </p:txBody>
-      </p:sp>
-      <p:sp>
-        <p:nvSpPr>
-          <p:cNvPr id="8" name="Content Placeholder 2">
+            <a:pPr indent="0" algn="l">
+              <a:buNone/>
+            </a:pPr>
+            <a:r>
+              <a:rPr lang="en-US" sz="1800" b="0" i="0" dirty="0">
+                <a:solidFill>
+                  <a:schemeClr val="tx1"/>
+                </a:solidFill>
+                <a:effectLst/>
+                <a:latin typeface="+mn-lt"/>
+              </a:rPr>
+              <a:t>public interface </a:t>
+            </a:r>
+            <a:r>
+              <a:rPr lang="en-US" sz="1800" b="0" i="0" dirty="0" err="1">
+                <a:solidFill>
+                  <a:schemeClr val="tx1"/>
+                </a:solidFill>
+                <a:effectLst/>
+                <a:latin typeface="+mn-lt"/>
+              </a:rPr>
+              <a:t>EmployeeRepository</a:t>
+            </a:r>
+            <a:endParaRPr lang="en-US" sz="1800" b="0" i="0" dirty="0">
+              <a:solidFill>
+                <a:schemeClr val="tx1"/>
+              </a:solidFill>
+              <a:effectLst/>
+              <a:latin typeface="+mn-lt"/>
+            </a:endParaRPr>
+          </a:p>
+          <a:p>
+            <a:pPr indent="0" algn="l">
+              <a:buNone/>
+            </a:pPr>
+            <a:r>
+              <a:rPr lang="en-US" sz="1800" b="0" i="0" dirty="0">
+                <a:solidFill>
+                  <a:schemeClr val="tx1"/>
+                </a:solidFill>
+                <a:effectLst/>
+                <a:latin typeface="+mn-lt"/>
+              </a:rPr>
+              <a:t>        extends </a:t>
+            </a:r>
+            <a:r>
+              <a:rPr lang="en-US" sz="1800" b="0" i="0" dirty="0" err="1">
+                <a:solidFill>
+                  <a:schemeClr val="tx1"/>
+                </a:solidFill>
+                <a:effectLst/>
+                <a:latin typeface="+mn-lt"/>
+              </a:rPr>
+              <a:t>JpaRepository</a:t>
+            </a:r>
+            <a:r>
+              <a:rPr lang="en-US" sz="1800" b="0" i="0" dirty="0">
+                <a:solidFill>
+                  <a:schemeClr val="tx1"/>
+                </a:solidFill>
+                <a:effectLst/>
+                <a:latin typeface="+mn-lt"/>
+              </a:rPr>
+              <a:t>&lt;Employee, Long&gt; {</a:t>
+            </a:r>
+          </a:p>
+          <a:p>
+            <a:pPr indent="0" algn="l">
+              <a:buNone/>
+            </a:pPr>
+            <a:endParaRPr lang="en-US" sz="1800" b="0" i="0" dirty="0">
+              <a:solidFill>
+                <a:schemeClr val="tx1"/>
+              </a:solidFill>
+              <a:effectLst/>
+              <a:latin typeface="+mn-lt"/>
+            </a:endParaRPr>
+          </a:p>
+          <a:p>
+            <a:pPr indent="0" algn="l">
+              <a:buNone/>
+            </a:pPr>
+            <a:r>
+              <a:rPr lang="en-US" sz="1800" b="0" i="0" dirty="0">
+                <a:solidFill>
+                  <a:schemeClr val="tx1"/>
+                </a:solidFill>
+                <a:effectLst/>
+                <a:latin typeface="+mn-lt"/>
+              </a:rPr>
+              <a:t>    @Query(</a:t>
+            </a:r>
+          </a:p>
+          <a:p>
+            <a:pPr indent="0" algn="l">
+              <a:buNone/>
+            </a:pPr>
+            <a:r>
+              <a:rPr lang="en-US" sz="1800" b="0" i="0" dirty="0">
+                <a:solidFill>
+                  <a:schemeClr val="tx1"/>
+                </a:solidFill>
+                <a:effectLst/>
+                <a:latin typeface="+mn-lt"/>
+              </a:rPr>
+              <a:t>        value = "SELECT * FROM employees WHERE salary &gt; :salary",</a:t>
+            </a:r>
+          </a:p>
+          <a:p>
+            <a:pPr indent="0" algn="l">
+              <a:buNone/>
+            </a:pPr>
+            <a:r>
+              <a:rPr lang="en-US" sz="1800" b="0" i="0" dirty="0">
+                <a:solidFill>
+                  <a:schemeClr val="tx1"/>
+                </a:solidFill>
+                <a:effectLst/>
+                <a:latin typeface="+mn-lt"/>
+              </a:rPr>
+              <a:t>        </a:t>
+            </a:r>
+            <a:r>
+              <a:rPr lang="en-US" sz="1800" b="0" i="0" dirty="0" err="1">
+                <a:solidFill>
+                  <a:schemeClr val="tx1"/>
+                </a:solidFill>
+                <a:effectLst/>
+                <a:latin typeface="+mn-lt"/>
+              </a:rPr>
+              <a:t>nativeQuery</a:t>
+            </a:r>
+            <a:r>
+              <a:rPr lang="en-US" sz="1800" b="0" i="0" dirty="0">
+                <a:solidFill>
+                  <a:schemeClr val="tx1"/>
+                </a:solidFill>
+                <a:effectLst/>
+                <a:latin typeface="+mn-lt"/>
+              </a:rPr>
+              <a:t> = true</a:t>
+            </a:r>
+          </a:p>
+          <a:p>
+            <a:pPr indent="0" algn="l">
+              <a:buNone/>
+            </a:pPr>
+            <a:r>
+              <a:rPr lang="en-US" sz="1800" b="0" i="0" dirty="0">
+                <a:solidFill>
+                  <a:schemeClr val="tx1"/>
+                </a:solidFill>
+                <a:effectLst/>
+                <a:latin typeface="+mn-lt"/>
+              </a:rPr>
+              <a:t>    )</a:t>
+            </a:r>
+          </a:p>
+          <a:p>
+            <a:pPr indent="0" algn="l">
+              <a:buNone/>
+            </a:pPr>
+            <a:r>
+              <a:rPr lang="en-US" sz="1800" b="0" i="0" dirty="0">
+                <a:solidFill>
+                  <a:schemeClr val="tx1"/>
+                </a:solidFill>
+                <a:effectLst/>
+                <a:latin typeface="+mn-lt"/>
+              </a:rPr>
+              <a:t>    List&lt;Employee&gt; </a:t>
+            </a:r>
+            <a:r>
+              <a:rPr lang="en-US" sz="1800" b="0" i="0" dirty="0" err="1">
+                <a:solidFill>
+                  <a:schemeClr val="tx1"/>
+                </a:solidFill>
+                <a:effectLst/>
+                <a:latin typeface="+mn-lt"/>
+              </a:rPr>
+              <a:t>findHighEarners</a:t>
+            </a:r>
+            <a:r>
+              <a:rPr lang="en-US" sz="1800" b="0" i="0" dirty="0">
+                <a:solidFill>
+                  <a:schemeClr val="tx1"/>
+                </a:solidFill>
+                <a:effectLst/>
+                <a:latin typeface="+mn-lt"/>
+              </a:rPr>
+              <a:t>(</a:t>
+            </a:r>
+          </a:p>
+          <a:p>
+            <a:pPr indent="0" algn="l">
+              <a:buNone/>
+            </a:pPr>
+            <a:r>
+              <a:rPr lang="en-US" sz="1800" b="0" i="0" dirty="0">
+                <a:solidFill>
+                  <a:schemeClr val="tx1"/>
+                </a:solidFill>
+                <a:effectLst/>
+                <a:latin typeface="+mn-lt"/>
+              </a:rPr>
+              <a:t>        @Param("salary") </a:t>
+            </a:r>
+            <a:r>
+              <a:rPr lang="en-US" sz="1800" b="0" i="0" dirty="0" err="1">
+                <a:solidFill>
+                  <a:schemeClr val="tx1"/>
+                </a:solidFill>
+                <a:effectLst/>
+                <a:latin typeface="+mn-lt"/>
+              </a:rPr>
+              <a:t>BigDecimal</a:t>
+            </a:r>
+            <a:r>
+              <a:rPr lang="en-US" sz="1800" b="0" i="0" dirty="0">
+                <a:solidFill>
+                  <a:schemeClr val="tx1"/>
+                </a:solidFill>
+                <a:effectLst/>
+                <a:latin typeface="+mn-lt"/>
+              </a:rPr>
+              <a:t> salary</a:t>
+            </a:r>
+          </a:p>
+          <a:p>
+            <a:pPr indent="0" algn="l">
+              <a:buNone/>
+            </a:pPr>
+            <a:r>
+              <a:rPr lang="en-US" sz="1800" b="0" i="0" dirty="0">
+                <a:solidFill>
+                  <a:schemeClr val="tx1"/>
+                </a:solidFill>
+                <a:effectLst/>
+                <a:latin typeface="+mn-lt"/>
+              </a:rPr>
+              <a:t>    );</a:t>
+            </a:r>
+          </a:p>
+          <a:p>
+            <a:pPr indent="0" algn="l">
+              <a:buNone/>
+            </a:pPr>
+            <a:r>
+              <a:rPr lang="en-US" sz="1800" b="0" i="0" dirty="0">
+                <a:solidFill>
+                  <a:schemeClr val="tx1"/>
+                </a:solidFill>
+                <a:effectLst/>
+                <a:latin typeface="+mn-lt"/>
+              </a:rPr>
+              <a:t>}</a:t>
+            </a:r>
+            <a:endParaRPr lang="en-US" sz="1200" b="0" i="0" dirty="0">
+              <a:solidFill>
+                <a:srgbClr val="FFFFFF"/>
+              </a:solidFill>
+              <a:effectLst/>
+              <a:latin typeface="Courier New" panose="02070309020205020404" pitchFamily="49" charset="0"/>
+            </a:endParaRPr>
+          </a:p>
+        </p:txBody>
+      </p:sp>
+      <p:sp>
+        <p:nvSpPr>
+          <p:cNvPr id="8" name="TextBox 7">
             <a:extLst>
               <a:ext uri="{FF2B5EF4-FFF2-40B4-BE49-F238E27FC236}">
-                <a16:creationId xmlns:a16="http://schemas.microsoft.com/office/drawing/2014/main" id="{3861BE59-BFB8-9E75-6062-CCB3C6CEB3D5}"/>
+                <a16:creationId xmlns:a16="http://schemas.microsoft.com/office/drawing/2014/main" id="{82926CE7-D12A-C523-91DF-F96A6CF6E47A}"/>
               </a:ext>
             </a:extLst>
           </p:cNvPr>
-          <p:cNvSpPr txBox="1">
-            <a:spLocks/>
-          </p:cNvSpPr>
+          <p:cNvSpPr txBox="1"/>
           <p:nvPr/>
         </p:nvSpPr>
         <p:spPr>
           <a:xfrm>
-            <a:off x="6545749" y="2772078"/>
-            <a:ext cx="4661642" cy="2480405"/>
+            <a:off x="967563" y="2339163"/>
+            <a:ext cx="2894960" cy="369332"/>
           </a:xfrm>
           <a:prstGeom prst="rect">
             <a:avLst/>
           </a:prstGeom>
+          <a:noFill/>
         </p:spPr>
         <p:txBody>
-          <a:bodyPr vert="horz" lIns="91440" tIns="45720" rIns="91440" bIns="45720" rtlCol="0" anchor="ctr">
-            <a:normAutofit/>
+          <a:bodyPr wrap="none" rtlCol="0">
+            <a:spAutoFit/>
           </a:bodyPr>
-          <a:lstStyle>
-            <a:lvl1pPr marL="306000" indent="-306000" algn="l" defTabSz="457200" rtl="0" eaLnBrk="1" latinLnBrk="0" hangingPunct="1">
-              <a:spcBef>
-                <a:spcPct val="20000"/>
-              </a:spcBef>
-              <a:spcAft>
-                <a:spcPts val="600"/>
-              </a:spcAft>
-              <a:buClr>
-                <a:schemeClr val="accent2"/>
-              </a:buClr>
-              <a:buSzPct val="92000"/>
-              <a:buFont typeface="Wingdings 2" panose="05020102010507070707" pitchFamily="18" charset="2"/>
-              <a:buChar char=""/>
-              <a:defRPr sz="1800" kern="1200">
-                <a:solidFill>
-                  <a:schemeClr val="tx2"/>
-                </a:solidFill>
-                <a:latin typeface="+mn-lt"/>
-                <a:ea typeface="+mn-ea"/>
-                <a:cs typeface="+mn-cs"/>
-              </a:defRPr>
-            </a:lvl1pPr>
-            <a:lvl2pPr marL="630000" indent="-306000" algn="l" defTabSz="457200" rtl="0" eaLnBrk="1" latinLnBrk="0" hangingPunct="1">
-              <a:spcBef>
-                <a:spcPct val="20000"/>
-              </a:spcBef>
-              <a:spcAft>
-                <a:spcPts val="600"/>
-              </a:spcAft>
-              <a:buClr>
-                <a:schemeClr val="accent2"/>
-              </a:buClr>
-              <a:buSzPct val="92000"/>
-              <a:buFont typeface="Wingdings 2" panose="05020102010507070707" pitchFamily="18" charset="2"/>
-              <a:buChar char=""/>
-              <a:defRPr sz="1600" kern="1200">
-                <a:solidFill>
-                  <a:schemeClr val="tx2"/>
-                </a:solidFill>
-                <a:latin typeface="+mn-lt"/>
-                <a:ea typeface="+mn-ea"/>
-                <a:cs typeface="+mn-cs"/>
-              </a:defRPr>
-            </a:lvl2pPr>
-            <a:lvl3pPr marL="900000" indent="-270000" algn="l" defTabSz="457200" rtl="0" eaLnBrk="1" latinLnBrk="0" hangingPunct="1">
-              <a:spcBef>
-                <a:spcPct val="20000"/>
-              </a:spcBef>
-              <a:spcAft>
-                <a:spcPts val="600"/>
-              </a:spcAft>
-              <a:buClr>
-                <a:schemeClr val="accent2"/>
-              </a:buClr>
-              <a:buSzPct val="92000"/>
-              <a:buFont typeface="Wingdings 2" panose="05020102010507070707" pitchFamily="18" charset="2"/>
-              <a:buChar char=""/>
-              <a:defRPr sz="1400" kern="1200">
-                <a:solidFill>
-                  <a:schemeClr val="tx2"/>
-                </a:solidFill>
-                <a:latin typeface="+mn-lt"/>
-                <a:ea typeface="+mn-ea"/>
-                <a:cs typeface="+mn-cs"/>
-              </a:defRPr>
-            </a:lvl3pPr>
-            <a:lvl4pPr marL="1242000" indent="-234000" algn="l" defTabSz="457200" rtl="0" eaLnBrk="1" latinLnBrk="0" hangingPunct="1">
-              <a:spcBef>
-                <a:spcPct val="20000"/>
-              </a:spcBef>
-              <a:spcAft>
-                <a:spcPts val="600"/>
-              </a:spcAft>
-              <a:buClr>
-                <a:schemeClr val="accent2"/>
-              </a:buClr>
-              <a:buSzPct val="92000"/>
-              <a:buFont typeface="Wingdings 2" panose="05020102010507070707" pitchFamily="18" charset="2"/>
-              <a:buChar char=""/>
-              <a:defRPr sz="1200" kern="1200">
-                <a:solidFill>
-                  <a:schemeClr val="tx2"/>
-                </a:solidFill>
-                <a:latin typeface="+mn-lt"/>
-                <a:ea typeface="+mn-ea"/>
-                <a:cs typeface="+mn-cs"/>
-              </a:defRPr>
-            </a:lvl4pPr>
-            <a:lvl5pPr marL="1602000" indent="-234000" algn="l" defTabSz="457200" rtl="0" eaLnBrk="1" latinLnBrk="0" hangingPunct="1">
-              <a:spcBef>
-                <a:spcPct val="20000"/>
-              </a:spcBef>
-              <a:spcAft>
-                <a:spcPts val="600"/>
-              </a:spcAft>
-              <a:buClr>
-                <a:schemeClr val="accent2"/>
-              </a:buClr>
-              <a:buSzPct val="92000"/>
-              <a:buFont typeface="Wingdings 2" panose="05020102010507070707" pitchFamily="18" charset="2"/>
-              <a:buChar char=""/>
-              <a:defRPr sz="1200" kern="1200">
-                <a:solidFill>
-                  <a:schemeClr val="tx2"/>
-                </a:solidFill>
-                <a:latin typeface="+mn-lt"/>
-                <a:ea typeface="+mn-ea"/>
-                <a:cs typeface="+mn-cs"/>
-              </a:defRPr>
-            </a:lvl5pPr>
-            <a:lvl6pPr marL="1900000" indent="-228600" algn="l" defTabSz="457200" rtl="0" eaLnBrk="1" latinLnBrk="0" hangingPunct="1">
-              <a:spcBef>
-                <a:spcPct val="20000"/>
-              </a:spcBef>
-              <a:spcAft>
-                <a:spcPts val="600"/>
-              </a:spcAft>
-              <a:buClr>
-                <a:schemeClr val="accent2"/>
-              </a:buClr>
-              <a:buSzPct val="92000"/>
-              <a:buFont typeface="Wingdings 2" panose="05020102010507070707" pitchFamily="18" charset="2"/>
-              <a:buChar char=""/>
-              <a:defRPr sz="1200" kern="1200">
-                <a:solidFill>
-                  <a:schemeClr val="tx2"/>
-                </a:solidFill>
-                <a:latin typeface="+mn-lt"/>
-                <a:ea typeface="+mn-ea"/>
-                <a:cs typeface="+mn-cs"/>
-              </a:defRPr>
-            </a:lvl6pPr>
-            <a:lvl7pPr marL="2200000" indent="-228600" algn="l" defTabSz="457200" rtl="0" eaLnBrk="1" latinLnBrk="0" hangingPunct="1">
-              <a:spcBef>
-                <a:spcPct val="20000"/>
-              </a:spcBef>
-              <a:spcAft>
-                <a:spcPts val="600"/>
-              </a:spcAft>
-              <a:buClr>
-                <a:schemeClr val="accent2"/>
-              </a:buClr>
-              <a:buSzPct val="92000"/>
-              <a:buFont typeface="Wingdings 2" panose="05020102010507070707" pitchFamily="18" charset="2"/>
-              <a:buChar char=""/>
-              <a:defRPr sz="1200" kern="1200">
-                <a:solidFill>
-                  <a:schemeClr val="tx2"/>
-                </a:solidFill>
-                <a:latin typeface="+mn-lt"/>
-                <a:ea typeface="+mn-ea"/>
-                <a:cs typeface="+mn-cs"/>
-              </a:defRPr>
-            </a:lvl7pPr>
-            <a:lvl8pPr marL="2500000" indent="-228600" algn="l" defTabSz="457200" rtl="0" eaLnBrk="1" latinLnBrk="0" hangingPunct="1">
-              <a:spcBef>
-                <a:spcPct val="20000"/>
-              </a:spcBef>
-              <a:spcAft>
-                <a:spcPts val="600"/>
-              </a:spcAft>
-              <a:buClr>
-                <a:schemeClr val="accent2"/>
-              </a:buClr>
-              <a:buSzPct val="92000"/>
-              <a:buFont typeface="Wingdings 2" panose="05020102010507070707" pitchFamily="18" charset="2"/>
-              <a:buChar char=""/>
-              <a:defRPr sz="1200" kern="1200">
-                <a:solidFill>
-                  <a:schemeClr val="tx2"/>
-                </a:solidFill>
-                <a:latin typeface="+mn-lt"/>
-                <a:ea typeface="+mn-ea"/>
-                <a:cs typeface="+mn-cs"/>
-              </a:defRPr>
-            </a:lvl8pPr>
-            <a:lvl9pPr marL="2800000" indent="-228600" algn="l" defTabSz="457200" rtl="0" eaLnBrk="1" latinLnBrk="0" hangingPunct="1">
-              <a:spcBef>
-                <a:spcPct val="20000"/>
-              </a:spcBef>
-              <a:spcAft>
-                <a:spcPts val="600"/>
-              </a:spcAft>
-              <a:buClr>
-                <a:schemeClr val="accent2"/>
-              </a:buClr>
-              <a:buSzPct val="92000"/>
-              <a:buFont typeface="Wingdings 2" panose="05020102010507070707" pitchFamily="18" charset="2"/>
-              <a:buChar char=""/>
-              <a:defRPr sz="1200" kern="1200">
-                <a:solidFill>
-                  <a:schemeClr val="tx2"/>
-                </a:solidFill>
-                <a:latin typeface="+mn-lt"/>
-                <a:ea typeface="+mn-ea"/>
-                <a:cs typeface="+mn-cs"/>
-              </a:defRPr>
-            </a:lvl9pPr>
-          </a:lstStyle>
-          <a:p>
-            <a:r>
-              <a:rPr lang="en-US" dirty="0"/>
-              <a:t>Example: One endpoint uses a ‘</a:t>
+          <a:lstStyle/>
+          <a:p>
+            <a:r>
+              <a:rPr lang="en-US" dirty="0"/>
+              <a:t>Example with </a:t>
             </a:r>
             <a:r>
               <a:rPr lang="en-US" dirty="0" err="1"/>
-              <a:t>baseBallCoach</a:t>
-            </a:r>
-            <a:r>
-              <a:rPr lang="en-US" dirty="0"/>
-              <a:t>’ and prints ‘Practice Baseball’ </a:t>
-            </a:r>
-          </a:p>
-          <a:p>
-            <a:r>
-              <a:rPr lang="en-US" dirty="0"/>
-              <a:t>Another endpoint uses a ‘</a:t>
-            </a:r>
-            <a:r>
-              <a:rPr lang="en-US" dirty="0" err="1"/>
-              <a:t>basketballCoach</a:t>
-            </a:r>
-            <a:r>
-              <a:rPr lang="en-US" dirty="0"/>
-              <a:t>’ and prints ‘Practice Basketball’</a:t>
-            </a:r>
-          </a:p>
-          <a:p>
-            <a:r>
-              <a:rPr lang="en-US" dirty="0"/>
-              <a:t>Hint: You can inject more than one item, with multiple @Qualifier(s)!</a:t>
+              <a:t>EntityManager</a:t>
+            </a:r>
+            <a:r>
+              <a:rPr lang="en-US" dirty="0"/>
+              <a:t>:</a:t>
+            </a:r>
+          </a:p>
+        </p:txBody>
+      </p:sp>
+      <p:sp>
+        <p:nvSpPr>
+          <p:cNvPr id="9" name="TextBox 8">
+            <a:extLst>
+              <a:ext uri="{FF2B5EF4-FFF2-40B4-BE49-F238E27FC236}">
+                <a16:creationId xmlns:a16="http://schemas.microsoft.com/office/drawing/2014/main" id="{E3AE2135-F6C8-46E3-8C27-BB825F541F71}"/>
+              </a:ext>
+            </a:extLst>
+          </p:cNvPr>
+          <p:cNvSpPr txBox="1"/>
+          <p:nvPr/>
+        </p:nvSpPr>
+        <p:spPr>
+          <a:xfrm>
+            <a:off x="5521842" y="2349796"/>
+            <a:ext cx="3019545" cy="369332"/>
+          </a:xfrm>
+          <a:prstGeom prst="rect">
+            <a:avLst/>
+          </a:prstGeom>
+          <a:noFill/>
+        </p:spPr>
+        <p:txBody>
+          <a:bodyPr wrap="none" rtlCol="0">
+            <a:spAutoFit/>
+          </a:bodyPr>
+          <a:lstStyle/>
+          <a:p>
+            <a:r>
+              <a:rPr lang="en-US" dirty="0"/>
+              <a:t>Example with Spring Data JPA:</a:t>
             </a:r>
           </a:p>
         </p:txBody>
@@ -10953,7 +12859,658 @@
     </p:spTree>
     <p:extLst>
       <p:ext uri="{BB962C8B-B14F-4D97-AF65-F5344CB8AC3E}">
-        <p14:creationId xmlns:p14="http://schemas.microsoft.com/office/powerpoint/2010/main" val="2532014160"/>
+        <p14:creationId xmlns:p14="http://schemas.microsoft.com/office/powerpoint/2010/main" val="2260849072"/>
+      </p:ext>
+    </p:extLst>
+  </p:cSld>
+  <p:clrMapOvr>
+    <a:masterClrMapping/>
+  </p:clrMapOvr>
+</p:sld>
+</file>
+
+<file path=ppt/slides/slide39.xml><?xml version="1.0" encoding="utf-8"?>
+<p:sld xmlns:a="http://schemas.openxmlformats.org/drawingml/2006/main" xmlns:r="http://schemas.openxmlformats.org/officeDocument/2006/relationships" xmlns:p="http://schemas.openxmlformats.org/presentationml/2006/main">
+  <p:cSld>
+    <p:spTree>
+      <p:nvGrpSpPr>
+        <p:cNvPr id="1" name=""/>
+        <p:cNvGrpSpPr/>
+        <p:nvPr/>
+      </p:nvGrpSpPr>
+      <p:grpSpPr>
+        <a:xfrm>
+          <a:off x="0" y="0"/>
+          <a:ext cx="0" cy="0"/>
+          <a:chOff x="0" y="0"/>
+          <a:chExt cx="0" cy="0"/>
+        </a:xfrm>
+      </p:grpSpPr>
+      <p:sp>
+        <p:nvSpPr>
+          <p:cNvPr id="2" name="Title 1">
+            <a:extLst>
+              <a:ext uri="{FF2B5EF4-FFF2-40B4-BE49-F238E27FC236}">
+                <a16:creationId xmlns:a16="http://schemas.microsoft.com/office/drawing/2014/main" id="{C6CC9E7E-32E9-CA21-8A3D-55FCF70E8146}"/>
+              </a:ext>
+            </a:extLst>
+          </p:cNvPr>
+          <p:cNvSpPr>
+            <a:spLocks noGrp="1"/>
+          </p:cNvSpPr>
+          <p:nvPr>
+            <p:ph type="title"/>
+          </p:nvPr>
+        </p:nvSpPr>
+        <p:spPr/>
+        <p:txBody>
+          <a:bodyPr/>
+          <a:lstStyle/>
+          <a:p>
+            <a:r>
+              <a:rPr lang="en-US" dirty="0"/>
+              <a:t>Criteria API</a:t>
+            </a:r>
+          </a:p>
+        </p:txBody>
+      </p:sp>
+      <p:sp>
+        <p:nvSpPr>
+          <p:cNvPr id="5" name="TextBox 4">
+            <a:extLst>
+              <a:ext uri="{FF2B5EF4-FFF2-40B4-BE49-F238E27FC236}">
+                <a16:creationId xmlns:a16="http://schemas.microsoft.com/office/drawing/2014/main" id="{11F7504D-6C4E-BBE1-4796-4589558B7299}"/>
+              </a:ext>
+            </a:extLst>
+          </p:cNvPr>
+          <p:cNvSpPr txBox="1"/>
+          <p:nvPr/>
+        </p:nvSpPr>
+        <p:spPr>
+          <a:xfrm>
+            <a:off x="3377555" y="2095057"/>
+            <a:ext cx="6097772" cy="3046988"/>
+          </a:xfrm>
+          <a:prstGeom prst="rect">
+            <a:avLst/>
+          </a:prstGeom>
+          <a:noFill/>
+        </p:spPr>
+        <p:txBody>
+          <a:bodyPr wrap="square">
+            <a:spAutoFit/>
+          </a:bodyPr>
+          <a:lstStyle/>
+          <a:p>
+            <a:pPr indent="0" algn="l">
+              <a:buNone/>
+            </a:pPr>
+            <a:r>
+              <a:rPr lang="en-US" sz="1800" b="0" i="0" dirty="0" err="1">
+                <a:solidFill>
+                  <a:schemeClr val="tx1"/>
+                </a:solidFill>
+                <a:effectLst/>
+                <a:latin typeface="+mn-lt"/>
+              </a:rPr>
+              <a:t>CriteriaBuilder</a:t>
+            </a:r>
+            <a:r>
+              <a:rPr lang="en-US" sz="1800" b="0" i="0" dirty="0">
+                <a:solidFill>
+                  <a:schemeClr val="tx1"/>
+                </a:solidFill>
+                <a:effectLst/>
+                <a:latin typeface="+mn-lt"/>
+              </a:rPr>
+              <a:t> </a:t>
+            </a:r>
+            <a:r>
+              <a:rPr lang="en-US" sz="1800" b="0" i="0" dirty="0" err="1">
+                <a:solidFill>
+                  <a:schemeClr val="tx1"/>
+                </a:solidFill>
+                <a:effectLst/>
+                <a:latin typeface="+mn-lt"/>
+              </a:rPr>
+              <a:t>cb</a:t>
+            </a:r>
+            <a:r>
+              <a:rPr lang="en-US" sz="1800" b="0" i="0" dirty="0">
+                <a:solidFill>
+                  <a:schemeClr val="tx1"/>
+                </a:solidFill>
+                <a:effectLst/>
+                <a:latin typeface="+mn-lt"/>
+              </a:rPr>
+              <a:t> = </a:t>
+            </a:r>
+            <a:r>
+              <a:rPr lang="en-US" sz="1800" b="0" i="0" dirty="0" err="1">
+                <a:solidFill>
+                  <a:schemeClr val="tx1"/>
+                </a:solidFill>
+                <a:effectLst/>
+                <a:latin typeface="+mn-lt"/>
+              </a:rPr>
+              <a:t>entityManager.getCriteriaBuilder</a:t>
+            </a:r>
+            <a:r>
+              <a:rPr lang="en-US" sz="1800" b="0" i="0" dirty="0">
+                <a:solidFill>
+                  <a:schemeClr val="tx1"/>
+                </a:solidFill>
+                <a:effectLst/>
+                <a:latin typeface="+mn-lt"/>
+              </a:rPr>
+              <a:t>();</a:t>
+            </a:r>
+          </a:p>
+          <a:p>
+            <a:pPr indent="0" algn="l">
+              <a:buNone/>
+            </a:pPr>
+            <a:endParaRPr lang="en-US" sz="1800" b="0" i="0" dirty="0">
+              <a:solidFill>
+                <a:schemeClr val="tx1"/>
+              </a:solidFill>
+              <a:effectLst/>
+              <a:latin typeface="+mn-lt"/>
+            </a:endParaRPr>
+          </a:p>
+          <a:p>
+            <a:pPr indent="0" algn="l">
+              <a:buNone/>
+            </a:pPr>
+            <a:r>
+              <a:rPr lang="en-US" sz="1800" b="0" i="0" dirty="0" err="1">
+                <a:solidFill>
+                  <a:schemeClr val="tx1"/>
+                </a:solidFill>
+                <a:effectLst/>
+                <a:latin typeface="+mn-lt"/>
+              </a:rPr>
+              <a:t>CriteriaQuery</a:t>
+            </a:r>
+            <a:r>
+              <a:rPr lang="en-US" sz="1800" b="0" i="0" dirty="0">
+                <a:solidFill>
+                  <a:schemeClr val="tx1"/>
+                </a:solidFill>
+                <a:effectLst/>
+                <a:latin typeface="+mn-lt"/>
+              </a:rPr>
+              <a:t>&lt;Employee&gt; </a:t>
+            </a:r>
+            <a:r>
+              <a:rPr lang="en-US" sz="1800" b="0" i="0" dirty="0" err="1">
+                <a:solidFill>
+                  <a:schemeClr val="tx1"/>
+                </a:solidFill>
+                <a:effectLst/>
+                <a:latin typeface="+mn-lt"/>
+              </a:rPr>
+              <a:t>cq</a:t>
+            </a:r>
+            <a:r>
+              <a:rPr lang="en-US" sz="1800" b="0" i="0" dirty="0">
+                <a:solidFill>
+                  <a:schemeClr val="tx1"/>
+                </a:solidFill>
+                <a:effectLst/>
+                <a:latin typeface="+mn-lt"/>
+              </a:rPr>
+              <a:t> =</a:t>
+            </a:r>
+          </a:p>
+          <a:p>
+            <a:pPr indent="0" algn="l">
+              <a:buNone/>
+            </a:pPr>
+            <a:r>
+              <a:rPr lang="en-US" sz="1800" b="0" i="0" dirty="0">
+                <a:solidFill>
+                  <a:schemeClr val="tx1"/>
+                </a:solidFill>
+                <a:effectLst/>
+                <a:latin typeface="+mn-lt"/>
+              </a:rPr>
+              <a:t>    </a:t>
+            </a:r>
+            <a:r>
+              <a:rPr lang="en-US" sz="1800" b="0" i="0" dirty="0" err="1">
+                <a:solidFill>
+                  <a:schemeClr val="tx1"/>
+                </a:solidFill>
+                <a:effectLst/>
+                <a:latin typeface="+mn-lt"/>
+              </a:rPr>
+              <a:t>cb.createQuery</a:t>
+            </a:r>
+            <a:r>
+              <a:rPr lang="en-US" sz="1800" b="0" i="0" dirty="0">
+                <a:solidFill>
+                  <a:schemeClr val="tx1"/>
+                </a:solidFill>
+                <a:effectLst/>
+                <a:latin typeface="+mn-lt"/>
+              </a:rPr>
+              <a:t>(</a:t>
+            </a:r>
+            <a:r>
+              <a:rPr lang="en-US" sz="1800" b="0" i="0" dirty="0" err="1">
+                <a:solidFill>
+                  <a:schemeClr val="tx1"/>
+                </a:solidFill>
+                <a:effectLst/>
+                <a:latin typeface="+mn-lt"/>
+              </a:rPr>
+              <a:t>Employee.class</a:t>
+            </a:r>
+            <a:r>
+              <a:rPr lang="en-US" sz="1800" b="0" i="0" dirty="0">
+                <a:solidFill>
+                  <a:schemeClr val="tx1"/>
+                </a:solidFill>
+                <a:effectLst/>
+                <a:latin typeface="+mn-lt"/>
+              </a:rPr>
+              <a:t>);</a:t>
+            </a:r>
+          </a:p>
+          <a:p>
+            <a:pPr indent="0" algn="l">
+              <a:buNone/>
+            </a:pPr>
+            <a:endParaRPr lang="en-US" sz="1800" b="0" i="0" dirty="0">
+              <a:solidFill>
+                <a:schemeClr val="tx1"/>
+              </a:solidFill>
+              <a:effectLst/>
+              <a:latin typeface="+mn-lt"/>
+            </a:endParaRPr>
+          </a:p>
+          <a:p>
+            <a:pPr indent="0" algn="l">
+              <a:buNone/>
+            </a:pPr>
+            <a:r>
+              <a:rPr lang="en-US" sz="1800" b="0" i="0" dirty="0">
+                <a:solidFill>
+                  <a:schemeClr val="tx1"/>
+                </a:solidFill>
+                <a:effectLst/>
+                <a:latin typeface="+mn-lt"/>
+              </a:rPr>
+              <a:t>Root&lt;Employee&gt; employee = </a:t>
+            </a:r>
+            <a:r>
+              <a:rPr lang="en-US" sz="1800" b="0" i="0" dirty="0" err="1">
+                <a:solidFill>
+                  <a:schemeClr val="tx1"/>
+                </a:solidFill>
+                <a:effectLst/>
+                <a:latin typeface="+mn-lt"/>
+              </a:rPr>
+              <a:t>cq.from</a:t>
+            </a:r>
+            <a:r>
+              <a:rPr lang="en-US" sz="1800" b="0" i="0" dirty="0">
+                <a:solidFill>
+                  <a:schemeClr val="tx1"/>
+                </a:solidFill>
+                <a:effectLst/>
+                <a:latin typeface="+mn-lt"/>
+              </a:rPr>
+              <a:t>(</a:t>
+            </a:r>
+            <a:r>
+              <a:rPr lang="en-US" sz="1800" b="0" i="0" dirty="0" err="1">
+                <a:solidFill>
+                  <a:schemeClr val="tx1"/>
+                </a:solidFill>
+                <a:effectLst/>
+                <a:latin typeface="+mn-lt"/>
+              </a:rPr>
+              <a:t>Employee.class</a:t>
+            </a:r>
+            <a:r>
+              <a:rPr lang="en-US" sz="1800" b="0" i="0" dirty="0">
+                <a:solidFill>
+                  <a:schemeClr val="tx1"/>
+                </a:solidFill>
+                <a:effectLst/>
+                <a:latin typeface="+mn-lt"/>
+              </a:rPr>
+              <a:t>);</a:t>
+            </a:r>
+          </a:p>
+          <a:p>
+            <a:pPr indent="0" algn="l">
+              <a:buNone/>
+            </a:pPr>
+            <a:endParaRPr lang="en-US" sz="1800" b="0" i="0" dirty="0">
+              <a:solidFill>
+                <a:schemeClr val="tx1"/>
+              </a:solidFill>
+              <a:effectLst/>
+              <a:latin typeface="+mn-lt"/>
+            </a:endParaRPr>
+          </a:p>
+          <a:p>
+            <a:pPr indent="0" algn="l">
+              <a:buNone/>
+            </a:pPr>
+            <a:r>
+              <a:rPr lang="en-US" sz="1800" b="0" i="0" dirty="0">
+                <a:solidFill>
+                  <a:schemeClr val="tx1"/>
+                </a:solidFill>
+                <a:effectLst/>
+                <a:latin typeface="+mn-lt"/>
+              </a:rPr>
+              <a:t>Predicate </a:t>
+            </a:r>
+            <a:r>
+              <a:rPr lang="en-US" sz="1800" b="0" i="0" dirty="0" err="1">
+                <a:solidFill>
+                  <a:schemeClr val="tx1"/>
+                </a:solidFill>
+                <a:effectLst/>
+                <a:latin typeface="+mn-lt"/>
+              </a:rPr>
+              <a:t>salaryCondition</a:t>
+            </a:r>
+            <a:r>
+              <a:rPr lang="en-US" sz="1800" b="0" i="0" dirty="0">
+                <a:solidFill>
+                  <a:schemeClr val="tx1"/>
+                </a:solidFill>
+                <a:effectLst/>
+                <a:latin typeface="+mn-lt"/>
+              </a:rPr>
+              <a:t> =</a:t>
+            </a:r>
+          </a:p>
+          <a:p>
+            <a:pPr indent="0" algn="l">
+              <a:buNone/>
+            </a:pPr>
+            <a:r>
+              <a:rPr lang="en-US" sz="1800" b="0" i="0" dirty="0">
+                <a:solidFill>
+                  <a:schemeClr val="tx1"/>
+                </a:solidFill>
+                <a:effectLst/>
+                <a:latin typeface="+mn-lt"/>
+              </a:rPr>
+              <a:t>    </a:t>
+            </a:r>
+            <a:r>
+              <a:rPr lang="en-US" sz="1800" b="0" i="0" dirty="0" err="1">
+                <a:solidFill>
+                  <a:schemeClr val="tx1"/>
+                </a:solidFill>
+                <a:effectLst/>
+                <a:latin typeface="+mn-lt"/>
+              </a:rPr>
+              <a:t>cb.greaterThan</a:t>
+            </a:r>
+            <a:r>
+              <a:rPr lang="en-US" sz="1800" b="0" i="0" dirty="0">
+                <a:solidFill>
+                  <a:schemeClr val="tx1"/>
+                </a:solidFill>
+                <a:effectLst/>
+                <a:latin typeface="+mn-lt"/>
+              </a:rPr>
+              <a:t>(</a:t>
+            </a:r>
+            <a:r>
+              <a:rPr lang="en-US" sz="1800" b="0" i="0" dirty="0" err="1">
+                <a:solidFill>
+                  <a:schemeClr val="tx1"/>
+                </a:solidFill>
+                <a:effectLst/>
+                <a:latin typeface="+mn-lt"/>
+              </a:rPr>
+              <a:t>employee.get</a:t>
+            </a:r>
+            <a:r>
+              <a:rPr lang="en-US" sz="1800" b="0" i="0" dirty="0">
+                <a:solidFill>
+                  <a:schemeClr val="tx1"/>
+                </a:solidFill>
+                <a:effectLst/>
+                <a:latin typeface="+mn-lt"/>
+              </a:rPr>
+              <a:t>("salary"), new </a:t>
+            </a:r>
+            <a:r>
+              <a:rPr lang="en-US" sz="1800" b="0" i="0" dirty="0" err="1">
+                <a:solidFill>
+                  <a:schemeClr val="tx1"/>
+                </a:solidFill>
+                <a:effectLst/>
+                <a:latin typeface="+mn-lt"/>
+              </a:rPr>
+              <a:t>BigDecimal</a:t>
+            </a:r>
+            <a:r>
+              <a:rPr lang="en-US" sz="1800" b="0" i="0" dirty="0">
+                <a:solidFill>
+                  <a:schemeClr val="tx1"/>
+                </a:solidFill>
+                <a:effectLst/>
+                <a:latin typeface="+mn-lt"/>
+              </a:rPr>
+              <a:t>("50000"));</a:t>
+            </a:r>
+          </a:p>
+          <a:p>
+            <a:pPr indent="0" algn="l">
+              <a:buNone/>
+            </a:pPr>
+            <a:endParaRPr lang="en-US" sz="1800" b="0" i="0" dirty="0">
+              <a:solidFill>
+                <a:schemeClr val="tx1"/>
+              </a:solidFill>
+              <a:effectLst/>
+              <a:latin typeface="+mn-lt"/>
+            </a:endParaRPr>
+          </a:p>
+          <a:p>
+            <a:pPr indent="0" algn="l">
+              <a:buNone/>
+            </a:pPr>
+            <a:r>
+              <a:rPr lang="en-US" sz="1800" b="0" i="0" dirty="0" err="1">
+                <a:solidFill>
+                  <a:schemeClr val="tx1"/>
+                </a:solidFill>
+                <a:effectLst/>
+                <a:latin typeface="+mn-lt"/>
+              </a:rPr>
+              <a:t>cq.select</a:t>
+            </a:r>
+            <a:r>
+              <a:rPr lang="en-US" sz="1800" b="0" i="0" dirty="0">
+                <a:solidFill>
+                  <a:schemeClr val="tx1"/>
+                </a:solidFill>
+                <a:effectLst/>
+                <a:latin typeface="+mn-lt"/>
+              </a:rPr>
+              <a:t>(employee).where(</a:t>
+            </a:r>
+            <a:r>
+              <a:rPr lang="en-US" sz="1800" b="0" i="0" dirty="0" err="1">
+                <a:solidFill>
+                  <a:schemeClr val="tx1"/>
+                </a:solidFill>
+                <a:effectLst/>
+                <a:latin typeface="+mn-lt"/>
+              </a:rPr>
+              <a:t>salaryCondition</a:t>
+            </a:r>
+            <a:r>
+              <a:rPr lang="en-US" sz="1800" b="0" i="0" dirty="0">
+                <a:solidFill>
+                  <a:schemeClr val="tx1"/>
+                </a:solidFill>
+                <a:effectLst/>
+                <a:latin typeface="+mn-lt"/>
+              </a:rPr>
+              <a:t>);</a:t>
+            </a:r>
+          </a:p>
+          <a:p>
+            <a:pPr indent="0" algn="l">
+              <a:buNone/>
+            </a:pPr>
+            <a:endParaRPr lang="en-US" sz="1800" b="0" i="0" dirty="0">
+              <a:solidFill>
+                <a:schemeClr val="tx1"/>
+              </a:solidFill>
+              <a:effectLst/>
+              <a:latin typeface="+mn-lt"/>
+            </a:endParaRPr>
+          </a:p>
+          <a:p>
+            <a:pPr indent="0" algn="l">
+              <a:buNone/>
+            </a:pPr>
+            <a:r>
+              <a:rPr lang="en-US" sz="1800" b="0" i="0" dirty="0">
+                <a:solidFill>
+                  <a:schemeClr val="tx1"/>
+                </a:solidFill>
+                <a:effectLst/>
+                <a:latin typeface="+mn-lt"/>
+              </a:rPr>
+              <a:t>List&lt;Employee&gt; employees = </a:t>
+            </a:r>
+            <a:r>
+              <a:rPr lang="en-US" sz="1800" b="0" i="0" dirty="0" err="1">
+                <a:solidFill>
+                  <a:schemeClr val="tx1"/>
+                </a:solidFill>
+                <a:effectLst/>
+                <a:latin typeface="+mn-lt"/>
+              </a:rPr>
+              <a:t>entityManager</a:t>
+            </a:r>
+            <a:endParaRPr lang="en-US" sz="1800" b="0" i="0" dirty="0">
+              <a:solidFill>
+                <a:schemeClr val="tx1"/>
+              </a:solidFill>
+              <a:effectLst/>
+              <a:latin typeface="+mn-lt"/>
+            </a:endParaRPr>
+          </a:p>
+          <a:p>
+            <a:pPr indent="0" algn="l">
+              <a:buNone/>
+            </a:pPr>
+            <a:r>
+              <a:rPr lang="en-US" sz="1800" b="0" i="0" dirty="0">
+                <a:solidFill>
+                  <a:schemeClr val="tx1"/>
+                </a:solidFill>
+                <a:effectLst/>
+                <a:latin typeface="+mn-lt"/>
+              </a:rPr>
+              <a:t>    .</a:t>
+            </a:r>
+            <a:r>
+              <a:rPr lang="en-US" sz="1800" b="0" i="0" dirty="0" err="1">
+                <a:solidFill>
+                  <a:schemeClr val="tx1"/>
+                </a:solidFill>
+                <a:effectLst/>
+                <a:latin typeface="+mn-lt"/>
+              </a:rPr>
+              <a:t>createQuery</a:t>
+            </a:r>
+            <a:r>
+              <a:rPr lang="en-US" sz="1800" b="0" i="0" dirty="0">
+                <a:solidFill>
+                  <a:schemeClr val="tx1"/>
+                </a:solidFill>
+                <a:effectLst/>
+                <a:latin typeface="+mn-lt"/>
+              </a:rPr>
+              <a:t>(</a:t>
+            </a:r>
+            <a:r>
+              <a:rPr lang="en-US" sz="1800" b="0" i="0" dirty="0" err="1">
+                <a:solidFill>
+                  <a:schemeClr val="tx1"/>
+                </a:solidFill>
+                <a:effectLst/>
+                <a:latin typeface="+mn-lt"/>
+              </a:rPr>
+              <a:t>cq</a:t>
+            </a:r>
+            <a:r>
+              <a:rPr lang="en-US" sz="1800" b="0" i="0" dirty="0">
+                <a:solidFill>
+                  <a:schemeClr val="tx1"/>
+                </a:solidFill>
+                <a:effectLst/>
+                <a:latin typeface="+mn-lt"/>
+              </a:rPr>
+              <a:t>)</a:t>
+            </a:r>
+          </a:p>
+          <a:p>
+            <a:pPr indent="0" algn="l">
+              <a:buNone/>
+            </a:pPr>
+            <a:r>
+              <a:rPr lang="en-US" sz="1800" b="0" i="0" dirty="0">
+                <a:solidFill>
+                  <a:schemeClr val="tx1"/>
+                </a:solidFill>
+                <a:effectLst/>
+                <a:latin typeface="+mn-lt"/>
+              </a:rPr>
+              <a:t>    .</a:t>
+            </a:r>
+            <a:r>
+              <a:rPr lang="en-US" sz="1800" b="0" i="0" dirty="0" err="1">
+                <a:solidFill>
+                  <a:schemeClr val="tx1"/>
+                </a:solidFill>
+                <a:effectLst/>
+                <a:latin typeface="+mn-lt"/>
+              </a:rPr>
+              <a:t>getResultList</a:t>
+            </a:r>
+            <a:r>
+              <a:rPr lang="en-US" sz="1800" b="0" i="0" dirty="0">
+                <a:solidFill>
+                  <a:schemeClr val="tx1"/>
+                </a:solidFill>
+                <a:effectLst/>
+                <a:latin typeface="+mn-lt"/>
+              </a:rPr>
+              <a:t>();</a:t>
+            </a:r>
+            <a:endParaRPr lang="en-US" sz="1200" b="0" i="0" dirty="0">
+              <a:solidFill>
+                <a:srgbClr val="FFFFFF"/>
+              </a:solidFill>
+              <a:effectLst/>
+              <a:latin typeface="Courier New" panose="02070309020205020404" pitchFamily="49" charset="0"/>
+            </a:endParaRPr>
+          </a:p>
+        </p:txBody>
+      </p:sp>
+    </p:spTree>
+    <p:extLst>
+      <p:ext uri="{BB962C8B-B14F-4D97-AF65-F5344CB8AC3E}">
+        <p14:creationId xmlns:p14="http://schemas.microsoft.com/office/powerpoint/2010/main" val="401493052"/>
       </p:ext>
     </p:extLst>
   </p:cSld>
@@ -11109,6 +13666,436 @@
     <p:extLst>
       <p:ext uri="{BB962C8B-B14F-4D97-AF65-F5344CB8AC3E}">
         <p14:creationId xmlns:p14="http://schemas.microsoft.com/office/powerpoint/2010/main" val="1905037944"/>
+      </p:ext>
+    </p:extLst>
+  </p:cSld>
+  <p:clrMapOvr>
+    <a:masterClrMapping/>
+  </p:clrMapOvr>
+</p:sld>
+</file>
+
+<file path=ppt/slides/slide40.xml><?xml version="1.0" encoding="utf-8"?>
+<p:sld xmlns:a="http://schemas.openxmlformats.org/drawingml/2006/main" xmlns:r="http://schemas.openxmlformats.org/officeDocument/2006/relationships" xmlns:p="http://schemas.openxmlformats.org/presentationml/2006/main" show="0">
+  <p:cSld>
+    <p:spTree>
+      <p:nvGrpSpPr>
+        <p:cNvPr id="1" name="">
+          <a:extLst>
+            <a:ext uri="{FF2B5EF4-FFF2-40B4-BE49-F238E27FC236}">
+              <a16:creationId xmlns:a16="http://schemas.microsoft.com/office/drawing/2014/main" id="{8695FB92-6A2A-D33A-9349-4B2FC8FB8D53}"/>
+            </a:ext>
+          </a:extLst>
+        </p:cNvPr>
+        <p:cNvGrpSpPr/>
+        <p:nvPr/>
+      </p:nvGrpSpPr>
+      <p:grpSpPr>
+        <a:xfrm>
+          <a:off x="0" y="0"/>
+          <a:ext cx="0" cy="0"/>
+          <a:chOff x="0" y="0"/>
+          <a:chExt cx="0" cy="0"/>
+        </a:xfrm>
+      </p:grpSpPr>
+      <p:sp>
+        <p:nvSpPr>
+          <p:cNvPr id="2" name="Title 1">
+            <a:extLst>
+              <a:ext uri="{FF2B5EF4-FFF2-40B4-BE49-F238E27FC236}">
+                <a16:creationId xmlns:a16="http://schemas.microsoft.com/office/drawing/2014/main" id="{11F3D84A-B2A2-70EA-E959-F4AF070FDADF}"/>
+              </a:ext>
+            </a:extLst>
+          </p:cNvPr>
+          <p:cNvSpPr>
+            <a:spLocks noGrp="1"/>
+          </p:cNvSpPr>
+          <p:nvPr>
+            <p:ph type="title"/>
+          </p:nvPr>
+        </p:nvSpPr>
+        <p:spPr/>
+        <p:txBody>
+          <a:bodyPr/>
+          <a:lstStyle/>
+          <a:p>
+            <a:r>
+              <a:rPr lang="en-US" dirty="0"/>
+              <a:t>Challenge – let’s check our understanding</a:t>
+            </a:r>
+          </a:p>
+        </p:txBody>
+      </p:sp>
+      <p:sp>
+        <p:nvSpPr>
+          <p:cNvPr id="3" name="Content Placeholder 2">
+            <a:extLst>
+              <a:ext uri="{FF2B5EF4-FFF2-40B4-BE49-F238E27FC236}">
+                <a16:creationId xmlns:a16="http://schemas.microsoft.com/office/drawing/2014/main" id="{D13E1DF8-36E0-1D6D-D9DB-C73571F53862}"/>
+              </a:ext>
+            </a:extLst>
+          </p:cNvPr>
+          <p:cNvSpPr>
+            <a:spLocks noGrp="1"/>
+          </p:cNvSpPr>
+          <p:nvPr>
+            <p:ph idx="1"/>
+          </p:nvPr>
+        </p:nvSpPr>
+        <p:spPr>
+          <a:xfrm>
+            <a:off x="581192" y="2475925"/>
+            <a:ext cx="5317584" cy="1681246"/>
+          </a:xfrm>
+        </p:spPr>
+        <p:txBody>
+          <a:bodyPr/>
+          <a:lstStyle/>
+          <a:p>
+            <a:r>
+              <a:rPr lang="en-US" dirty="0"/>
+              <a:t>Create endpoints for different types of coaches</a:t>
+            </a:r>
+          </a:p>
+        </p:txBody>
+      </p:sp>
+      <p:sp>
+        <p:nvSpPr>
+          <p:cNvPr id="6" name="TextBox 5">
+            <a:extLst>
+              <a:ext uri="{FF2B5EF4-FFF2-40B4-BE49-F238E27FC236}">
+                <a16:creationId xmlns:a16="http://schemas.microsoft.com/office/drawing/2014/main" id="{4711C103-16B8-599E-5739-2FDF5191F349}"/>
+              </a:ext>
+            </a:extLst>
+          </p:cNvPr>
+          <p:cNvSpPr txBox="1"/>
+          <p:nvPr/>
+        </p:nvSpPr>
+        <p:spPr>
+          <a:xfrm>
+            <a:off x="1228165" y="2402747"/>
+            <a:ext cx="756938" cy="369332"/>
+          </a:xfrm>
+          <a:prstGeom prst="rect">
+            <a:avLst/>
+          </a:prstGeom>
+          <a:noFill/>
+        </p:spPr>
+        <p:txBody>
+          <a:bodyPr wrap="none" rtlCol="0">
+            <a:spAutoFit/>
+          </a:bodyPr>
+          <a:lstStyle/>
+          <a:p>
+            <a:r>
+              <a:rPr lang="en-US" b="1" dirty="0"/>
+              <a:t>Goal:</a:t>
+            </a:r>
+          </a:p>
+        </p:txBody>
+      </p:sp>
+      <p:sp>
+        <p:nvSpPr>
+          <p:cNvPr id="7" name="TextBox 6">
+            <a:extLst>
+              <a:ext uri="{FF2B5EF4-FFF2-40B4-BE49-F238E27FC236}">
+                <a16:creationId xmlns:a16="http://schemas.microsoft.com/office/drawing/2014/main" id="{45AB5C3A-C77B-4B2B-5C19-A80BEA882757}"/>
+              </a:ext>
+            </a:extLst>
+          </p:cNvPr>
+          <p:cNvSpPr txBox="1"/>
+          <p:nvPr/>
+        </p:nvSpPr>
+        <p:spPr>
+          <a:xfrm>
+            <a:off x="6949165" y="2402747"/>
+            <a:ext cx="4661643" cy="369332"/>
+          </a:xfrm>
+          <a:prstGeom prst="rect">
+            <a:avLst/>
+          </a:prstGeom>
+          <a:noFill/>
+        </p:spPr>
+        <p:txBody>
+          <a:bodyPr wrap="square" rtlCol="0">
+            <a:spAutoFit/>
+          </a:bodyPr>
+          <a:lstStyle/>
+          <a:p>
+            <a:r>
+              <a:rPr lang="en-US" b="1" dirty="0"/>
+              <a:t>Scenario:  			   5 min</a:t>
+            </a:r>
+          </a:p>
+        </p:txBody>
+      </p:sp>
+      <p:sp>
+        <p:nvSpPr>
+          <p:cNvPr id="8" name="Content Placeholder 2">
+            <a:extLst>
+              <a:ext uri="{FF2B5EF4-FFF2-40B4-BE49-F238E27FC236}">
+                <a16:creationId xmlns:a16="http://schemas.microsoft.com/office/drawing/2014/main" id="{3861BE59-BFB8-9E75-6062-CCB3C6CEB3D5}"/>
+              </a:ext>
+            </a:extLst>
+          </p:cNvPr>
+          <p:cNvSpPr txBox="1">
+            <a:spLocks/>
+          </p:cNvSpPr>
+          <p:nvPr/>
+        </p:nvSpPr>
+        <p:spPr>
+          <a:xfrm>
+            <a:off x="6545749" y="2772078"/>
+            <a:ext cx="4661642" cy="2480405"/>
+          </a:xfrm>
+          <a:prstGeom prst="rect">
+            <a:avLst/>
+          </a:prstGeom>
+        </p:spPr>
+        <p:txBody>
+          <a:bodyPr vert="horz" lIns="91440" tIns="45720" rIns="91440" bIns="45720" rtlCol="0" anchor="ctr">
+            <a:normAutofit/>
+          </a:bodyPr>
+          <a:lstStyle>
+            <a:lvl1pPr marL="306000" indent="-306000" algn="l" defTabSz="457200" rtl="0" eaLnBrk="1" latinLnBrk="0" hangingPunct="1">
+              <a:spcBef>
+                <a:spcPct val="20000"/>
+              </a:spcBef>
+              <a:spcAft>
+                <a:spcPts val="600"/>
+              </a:spcAft>
+              <a:buClr>
+                <a:schemeClr val="accent2"/>
+              </a:buClr>
+              <a:buSzPct val="92000"/>
+              <a:buFont typeface="Wingdings 2" panose="05020102010507070707" pitchFamily="18" charset="2"/>
+              <a:buChar char=""/>
+              <a:defRPr sz="1800" kern="1200">
+                <a:solidFill>
+                  <a:schemeClr val="tx2"/>
+                </a:solidFill>
+                <a:latin typeface="+mn-lt"/>
+                <a:ea typeface="+mn-ea"/>
+                <a:cs typeface="+mn-cs"/>
+              </a:defRPr>
+            </a:lvl1pPr>
+            <a:lvl2pPr marL="630000" indent="-306000" algn="l" defTabSz="457200" rtl="0" eaLnBrk="1" latinLnBrk="0" hangingPunct="1">
+              <a:spcBef>
+                <a:spcPct val="20000"/>
+              </a:spcBef>
+              <a:spcAft>
+                <a:spcPts val="600"/>
+              </a:spcAft>
+              <a:buClr>
+                <a:schemeClr val="accent2"/>
+              </a:buClr>
+              <a:buSzPct val="92000"/>
+              <a:buFont typeface="Wingdings 2" panose="05020102010507070707" pitchFamily="18" charset="2"/>
+              <a:buChar char=""/>
+              <a:defRPr sz="1600" kern="1200">
+                <a:solidFill>
+                  <a:schemeClr val="tx2"/>
+                </a:solidFill>
+                <a:latin typeface="+mn-lt"/>
+                <a:ea typeface="+mn-ea"/>
+                <a:cs typeface="+mn-cs"/>
+              </a:defRPr>
+            </a:lvl2pPr>
+            <a:lvl3pPr marL="900000" indent="-270000" algn="l" defTabSz="457200" rtl="0" eaLnBrk="1" latinLnBrk="0" hangingPunct="1">
+              <a:spcBef>
+                <a:spcPct val="20000"/>
+              </a:spcBef>
+              <a:spcAft>
+                <a:spcPts val="600"/>
+              </a:spcAft>
+              <a:buClr>
+                <a:schemeClr val="accent2"/>
+              </a:buClr>
+              <a:buSzPct val="92000"/>
+              <a:buFont typeface="Wingdings 2" panose="05020102010507070707" pitchFamily="18" charset="2"/>
+              <a:buChar char=""/>
+              <a:defRPr sz="1400" kern="1200">
+                <a:solidFill>
+                  <a:schemeClr val="tx2"/>
+                </a:solidFill>
+                <a:latin typeface="+mn-lt"/>
+                <a:ea typeface="+mn-ea"/>
+                <a:cs typeface="+mn-cs"/>
+              </a:defRPr>
+            </a:lvl3pPr>
+            <a:lvl4pPr marL="1242000" indent="-234000" algn="l" defTabSz="457200" rtl="0" eaLnBrk="1" latinLnBrk="0" hangingPunct="1">
+              <a:spcBef>
+                <a:spcPct val="20000"/>
+              </a:spcBef>
+              <a:spcAft>
+                <a:spcPts val="600"/>
+              </a:spcAft>
+              <a:buClr>
+                <a:schemeClr val="accent2"/>
+              </a:buClr>
+              <a:buSzPct val="92000"/>
+              <a:buFont typeface="Wingdings 2" panose="05020102010507070707" pitchFamily="18" charset="2"/>
+              <a:buChar char=""/>
+              <a:defRPr sz="1200" kern="1200">
+                <a:solidFill>
+                  <a:schemeClr val="tx2"/>
+                </a:solidFill>
+                <a:latin typeface="+mn-lt"/>
+                <a:ea typeface="+mn-ea"/>
+                <a:cs typeface="+mn-cs"/>
+              </a:defRPr>
+            </a:lvl4pPr>
+            <a:lvl5pPr marL="1602000" indent="-234000" algn="l" defTabSz="457200" rtl="0" eaLnBrk="1" latinLnBrk="0" hangingPunct="1">
+              <a:spcBef>
+                <a:spcPct val="20000"/>
+              </a:spcBef>
+              <a:spcAft>
+                <a:spcPts val="600"/>
+              </a:spcAft>
+              <a:buClr>
+                <a:schemeClr val="accent2"/>
+              </a:buClr>
+              <a:buSzPct val="92000"/>
+              <a:buFont typeface="Wingdings 2" panose="05020102010507070707" pitchFamily="18" charset="2"/>
+              <a:buChar char=""/>
+              <a:defRPr sz="1200" kern="1200">
+                <a:solidFill>
+                  <a:schemeClr val="tx2"/>
+                </a:solidFill>
+                <a:latin typeface="+mn-lt"/>
+                <a:ea typeface="+mn-ea"/>
+                <a:cs typeface="+mn-cs"/>
+              </a:defRPr>
+            </a:lvl5pPr>
+            <a:lvl6pPr marL="1900000" indent="-228600" algn="l" defTabSz="457200" rtl="0" eaLnBrk="1" latinLnBrk="0" hangingPunct="1">
+              <a:spcBef>
+                <a:spcPct val="20000"/>
+              </a:spcBef>
+              <a:spcAft>
+                <a:spcPts val="600"/>
+              </a:spcAft>
+              <a:buClr>
+                <a:schemeClr val="accent2"/>
+              </a:buClr>
+              <a:buSzPct val="92000"/>
+              <a:buFont typeface="Wingdings 2" panose="05020102010507070707" pitchFamily="18" charset="2"/>
+              <a:buChar char=""/>
+              <a:defRPr sz="1200" kern="1200">
+                <a:solidFill>
+                  <a:schemeClr val="tx2"/>
+                </a:solidFill>
+                <a:latin typeface="+mn-lt"/>
+                <a:ea typeface="+mn-ea"/>
+                <a:cs typeface="+mn-cs"/>
+              </a:defRPr>
+            </a:lvl6pPr>
+            <a:lvl7pPr marL="2200000" indent="-228600" algn="l" defTabSz="457200" rtl="0" eaLnBrk="1" latinLnBrk="0" hangingPunct="1">
+              <a:spcBef>
+                <a:spcPct val="20000"/>
+              </a:spcBef>
+              <a:spcAft>
+                <a:spcPts val="600"/>
+              </a:spcAft>
+              <a:buClr>
+                <a:schemeClr val="accent2"/>
+              </a:buClr>
+              <a:buSzPct val="92000"/>
+              <a:buFont typeface="Wingdings 2" panose="05020102010507070707" pitchFamily="18" charset="2"/>
+              <a:buChar char=""/>
+              <a:defRPr sz="1200" kern="1200">
+                <a:solidFill>
+                  <a:schemeClr val="tx2"/>
+                </a:solidFill>
+                <a:latin typeface="+mn-lt"/>
+                <a:ea typeface="+mn-ea"/>
+                <a:cs typeface="+mn-cs"/>
+              </a:defRPr>
+            </a:lvl7pPr>
+            <a:lvl8pPr marL="2500000" indent="-228600" algn="l" defTabSz="457200" rtl="0" eaLnBrk="1" latinLnBrk="0" hangingPunct="1">
+              <a:spcBef>
+                <a:spcPct val="20000"/>
+              </a:spcBef>
+              <a:spcAft>
+                <a:spcPts val="600"/>
+              </a:spcAft>
+              <a:buClr>
+                <a:schemeClr val="accent2"/>
+              </a:buClr>
+              <a:buSzPct val="92000"/>
+              <a:buFont typeface="Wingdings 2" panose="05020102010507070707" pitchFamily="18" charset="2"/>
+              <a:buChar char=""/>
+              <a:defRPr sz="1200" kern="1200">
+                <a:solidFill>
+                  <a:schemeClr val="tx2"/>
+                </a:solidFill>
+                <a:latin typeface="+mn-lt"/>
+                <a:ea typeface="+mn-ea"/>
+                <a:cs typeface="+mn-cs"/>
+              </a:defRPr>
+            </a:lvl8pPr>
+            <a:lvl9pPr marL="2800000" indent="-228600" algn="l" defTabSz="457200" rtl="0" eaLnBrk="1" latinLnBrk="0" hangingPunct="1">
+              <a:spcBef>
+                <a:spcPct val="20000"/>
+              </a:spcBef>
+              <a:spcAft>
+                <a:spcPts val="600"/>
+              </a:spcAft>
+              <a:buClr>
+                <a:schemeClr val="accent2"/>
+              </a:buClr>
+              <a:buSzPct val="92000"/>
+              <a:buFont typeface="Wingdings 2" panose="05020102010507070707" pitchFamily="18" charset="2"/>
+              <a:buChar char=""/>
+              <a:defRPr sz="1200" kern="1200">
+                <a:solidFill>
+                  <a:schemeClr val="tx2"/>
+                </a:solidFill>
+                <a:latin typeface="+mn-lt"/>
+                <a:ea typeface="+mn-ea"/>
+                <a:cs typeface="+mn-cs"/>
+              </a:defRPr>
+            </a:lvl9pPr>
+          </a:lstStyle>
+          <a:p>
+            <a:r>
+              <a:rPr lang="en-US" dirty="0"/>
+              <a:t>Example: One endpoint uses a ‘</a:t>
+            </a:r>
+            <a:r>
+              <a:rPr lang="en-US" dirty="0" err="1"/>
+              <a:t>baseBallCoach</a:t>
+            </a:r>
+            <a:r>
+              <a:rPr lang="en-US" dirty="0"/>
+              <a:t>’ and prints ‘Practice Baseball’ </a:t>
+            </a:r>
+          </a:p>
+          <a:p>
+            <a:r>
+              <a:rPr lang="en-US" dirty="0"/>
+              <a:t>Another endpoint uses a ‘</a:t>
+            </a:r>
+            <a:r>
+              <a:rPr lang="en-US" dirty="0" err="1"/>
+              <a:t>basketballCoach</a:t>
+            </a:r>
+            <a:r>
+              <a:rPr lang="en-US" dirty="0"/>
+              <a:t>’ and prints ‘Practice Basketball’</a:t>
+            </a:r>
+          </a:p>
+          <a:p>
+            <a:r>
+              <a:rPr lang="en-US" dirty="0"/>
+              <a:t>Hint: You can inject more than one item, with multiple @Qualifier(s)!</a:t>
+            </a:r>
+          </a:p>
+        </p:txBody>
+      </p:sp>
+    </p:spTree>
+    <p:extLst>
+      <p:ext uri="{BB962C8B-B14F-4D97-AF65-F5344CB8AC3E}">
+        <p14:creationId xmlns:p14="http://schemas.microsoft.com/office/powerpoint/2010/main" val="2532014160"/>
       </p:ext>
     </p:extLst>
   </p:cSld>

--- a/Week_6/02_Hibernate_JPA_&_REST.pptx
+++ b/Week_6/02_Hibernate_JPA_&_REST.pptx
@@ -44,7 +44,17 @@
     <p:sldId id="346" r:id="rId38"/>
     <p:sldId id="347" r:id="rId39"/>
     <p:sldId id="348" r:id="rId40"/>
-    <p:sldId id="313" r:id="rId41"/>
+    <p:sldId id="352" r:id="rId41"/>
+    <p:sldId id="353" r:id="rId42"/>
+    <p:sldId id="354" r:id="rId43"/>
+    <p:sldId id="355" r:id="rId44"/>
+    <p:sldId id="356" r:id="rId45"/>
+    <p:sldId id="357" r:id="rId46"/>
+    <p:sldId id="358" r:id="rId47"/>
+    <p:sldId id="359" r:id="rId48"/>
+    <p:sldId id="360" r:id="rId49"/>
+    <p:sldId id="361" r:id="rId50"/>
+    <p:sldId id="313" r:id="rId51"/>
   </p:sldIdLst>
   <p:sldSz cx="12192000" cy="6858000"/>
   <p:notesSz cx="6858000" cy="9144000"/>
@@ -411,7 +421,7 @@
             <a:fld id="{B61BEF0D-F0BB-DE4B-95CE-6DB70DBA9567}" type="datetimeFigureOut">
               <a:rPr lang="en-US" dirty="0"/>
               <a:pPr/>
-              <a:t>10/11/2026</a:t>
+              <a:t>10/12/2026</a:t>
             </a:fld>
             <a:endParaRPr lang="en-US" dirty="0"/>
           </a:p>
@@ -560,6 +570,13 @@
             <a:schemeClr val="lt1"/>
           </a:fontRef>
         </p:style>
+        <p:txBody>
+          <a:bodyPr/>
+          <a:lstStyle/>
+          <a:p>
+            <a:endParaRPr lang="en-US"/>
+          </a:p>
+        </p:txBody>
       </p:sp>
       <p:sp>
         <p:nvSpPr>
@@ -673,7 +690,7 @@
             <a:fld id="{B61BEF0D-F0BB-DE4B-95CE-6DB70DBA9567}" type="datetimeFigureOut">
               <a:rPr lang="en-US" dirty="0"/>
               <a:pPr/>
-              <a:t>10/11/2026</a:t>
+              <a:t>10/12/2026</a:t>
             </a:fld>
             <a:endParaRPr lang="en-US" dirty="0"/>
           </a:p>
@@ -790,6 +807,13 @@
             <a:schemeClr val="lt1"/>
           </a:fontRef>
         </p:style>
+        <p:txBody>
+          <a:bodyPr/>
+          <a:lstStyle/>
+          <a:p>
+            <a:endParaRPr lang="en-US"/>
+          </a:p>
+        </p:txBody>
       </p:sp>
       <p:sp>
         <p:nvSpPr>
@@ -908,7 +932,7 @@
             <a:fld id="{B61BEF0D-F0BB-DE4B-95CE-6DB70DBA9567}" type="datetimeFigureOut">
               <a:rPr lang="en-US" dirty="0"/>
               <a:pPr/>
-              <a:t>10/11/2026</a:t>
+              <a:t>10/12/2026</a:t>
             </a:fld>
             <a:endParaRPr lang="en-US" dirty="0"/>
           </a:p>
@@ -1155,7 +1179,7 @@
             <a:fld id="{B61BEF0D-F0BB-DE4B-95CE-6DB70DBA9567}" type="datetimeFigureOut">
               <a:rPr lang="en-US" dirty="0"/>
               <a:pPr/>
-              <a:t>10/11/2026</a:t>
+              <a:t>10/12/2026</a:t>
             </a:fld>
             <a:endParaRPr lang="en-US" dirty="0"/>
           </a:p>
@@ -1277,6 +1301,13 @@
             <a:schemeClr val="lt1"/>
           </a:fontRef>
         </p:style>
+        <p:txBody>
+          <a:bodyPr/>
+          <a:lstStyle/>
+          <a:p>
+            <a:endParaRPr lang="en-US"/>
+          </a:p>
+        </p:txBody>
       </p:sp>
       <p:sp>
         <p:nvSpPr>
@@ -1463,7 +1494,7 @@
             <a:fld id="{B61BEF0D-F0BB-DE4B-95CE-6DB70DBA9567}" type="datetimeFigureOut">
               <a:rPr lang="en-US" dirty="0"/>
               <a:pPr/>
-              <a:t>10/11/2026</a:t>
+              <a:t>10/12/2026</a:t>
             </a:fld>
             <a:endParaRPr lang="en-US" dirty="0"/>
           </a:p>
@@ -1602,6 +1633,13 @@
             <a:schemeClr val="lt1"/>
           </a:fontRef>
         </p:style>
+        <p:txBody>
+          <a:bodyPr/>
+          <a:lstStyle/>
+          <a:p>
+            <a:endParaRPr lang="en-US"/>
+          </a:p>
+        </p:txBody>
       </p:sp>
       <p:sp>
         <p:nvSpPr>
@@ -1764,7 +1802,7 @@
             <a:fld id="{B61BEF0D-F0BB-DE4B-95CE-6DB70DBA9567}" type="datetimeFigureOut">
               <a:rPr lang="en-US" dirty="0"/>
               <a:pPr/>
-              <a:t>10/11/2026</a:t>
+              <a:t>10/12/2026</a:t>
             </a:fld>
             <a:endParaRPr lang="en-US" dirty="0"/>
           </a:p>
@@ -1881,6 +1919,13 @@
             <a:schemeClr val="lt1"/>
           </a:fontRef>
         </p:style>
+        <p:txBody>
+          <a:bodyPr/>
+          <a:lstStyle/>
+          <a:p>
+            <a:endParaRPr lang="en-US"/>
+          </a:p>
+        </p:txBody>
       </p:sp>
       <p:sp>
         <p:nvSpPr>
@@ -2185,7 +2230,7 @@
             <a:fld id="{B61BEF0D-F0BB-DE4B-95CE-6DB70DBA9567}" type="datetimeFigureOut">
               <a:rPr lang="en-US" dirty="0"/>
               <a:pPr/>
-              <a:t>10/11/2026</a:t>
+              <a:t>10/12/2026</a:t>
             </a:fld>
             <a:endParaRPr lang="en-US" dirty="0"/>
           </a:p>
@@ -2302,6 +2347,13 @@
             <a:schemeClr val="lt1"/>
           </a:fontRef>
         </p:style>
+        <p:txBody>
+          <a:bodyPr/>
+          <a:lstStyle/>
+          <a:p>
+            <a:endParaRPr lang="en-US"/>
+          </a:p>
+        </p:txBody>
       </p:sp>
       <p:sp>
         <p:nvSpPr>
@@ -2348,7 +2400,7 @@
             <a:fld id="{B61BEF0D-F0BB-DE4B-95CE-6DB70DBA9567}" type="datetimeFigureOut">
               <a:rPr lang="en-US" dirty="0"/>
               <a:pPr/>
-              <a:t>10/11/2026</a:t>
+              <a:t>10/12/2026</a:t>
             </a:fld>
             <a:endParaRPr lang="en-US" dirty="0"/>
           </a:p>
@@ -2445,7 +2497,7 @@
             <a:fld id="{B61BEF0D-F0BB-DE4B-95CE-6DB70DBA9567}" type="datetimeFigureOut">
               <a:rPr lang="en-US" dirty="0"/>
               <a:pPr/>
-              <a:t>10/11/2026</a:t>
+              <a:t>10/12/2026</a:t>
             </a:fld>
             <a:endParaRPr lang="en-US" dirty="0"/>
           </a:p>
@@ -2562,6 +2614,13 @@
             <a:schemeClr val="lt1"/>
           </a:fontRef>
         </p:style>
+        <p:txBody>
+          <a:bodyPr/>
+          <a:lstStyle/>
+          <a:p>
+            <a:endParaRPr lang="en-US"/>
+          </a:p>
+        </p:txBody>
       </p:sp>
       <p:sp>
         <p:nvSpPr>
@@ -2823,7 +2882,7 @@
             <a:fld id="{B61BEF0D-F0BB-DE4B-95CE-6DB70DBA9567}" type="datetimeFigureOut">
               <a:rPr lang="en-US" dirty="0"/>
               <a:pPr/>
-              <a:t>10/11/2026</a:t>
+              <a:t>10/12/2026</a:t>
             </a:fld>
             <a:endParaRPr lang="en-US" dirty="0"/>
           </a:p>
@@ -3109,7 +3168,7 @@
             <a:fld id="{B61BEF0D-F0BB-DE4B-95CE-6DB70DBA9567}" type="datetimeFigureOut">
               <a:rPr lang="en-US" dirty="0"/>
               <a:pPr/>
-              <a:t>10/11/2026</a:t>
+              <a:t>10/12/2026</a:t>
             </a:fld>
             <a:endParaRPr lang="en-US" dirty="0"/>
           </a:p>
@@ -3348,7 +3407,7 @@
             <a:fld id="{B61BEF0D-F0BB-DE4B-95CE-6DB70DBA9567}" type="datetimeFigureOut">
               <a:rPr lang="en-US" dirty="0"/>
               <a:pPr/>
-              <a:t>10/11/2026</a:t>
+              <a:t>10/12/2026</a:t>
             </a:fld>
             <a:endParaRPr lang="en-US" dirty="0"/>
           </a:p>
@@ -13676,17 +13735,11 @@
 </file>
 
 <file path=ppt/slides/slide40.xml><?xml version="1.0" encoding="utf-8"?>
-<p:sld xmlns:a="http://schemas.openxmlformats.org/drawingml/2006/main" xmlns:r="http://schemas.openxmlformats.org/officeDocument/2006/relationships" xmlns:p="http://schemas.openxmlformats.org/presentationml/2006/main" show="0">
+<p:sld xmlns:a="http://schemas.openxmlformats.org/drawingml/2006/main" xmlns:r="http://schemas.openxmlformats.org/officeDocument/2006/relationships" xmlns:p="http://schemas.openxmlformats.org/presentationml/2006/main">
   <p:cSld>
     <p:spTree>
       <p:nvGrpSpPr>
-        <p:cNvPr id="1" name="">
-          <a:extLst>
-            <a:ext uri="{FF2B5EF4-FFF2-40B4-BE49-F238E27FC236}">
-              <a16:creationId xmlns:a16="http://schemas.microsoft.com/office/drawing/2014/main" id="{8695FB92-6A2A-D33A-9349-4B2FC8FB8D53}"/>
-            </a:ext>
-          </a:extLst>
-        </p:cNvPr>
+        <p:cNvPr id="1" name=""/>
         <p:cNvGrpSpPr/>
         <p:nvPr/>
       </p:nvGrpSpPr>
@@ -13703,7 +13756,7 @@
           <p:cNvPr id="2" name="Title 1">
             <a:extLst>
               <a:ext uri="{FF2B5EF4-FFF2-40B4-BE49-F238E27FC236}">
-                <a16:creationId xmlns:a16="http://schemas.microsoft.com/office/drawing/2014/main" id="{11F3D84A-B2A2-70EA-E959-F4AF070FDADF}"/>
+                <a16:creationId xmlns:a16="http://schemas.microsoft.com/office/drawing/2014/main" id="{3B8992CD-ABAF-35B1-24AA-C8F354E3BC1C}"/>
               </a:ext>
             </a:extLst>
           </p:cNvPr>
@@ -13721,7 +13774,7 @@
           <a:p>
             <a:r>
               <a:rPr lang="en-US" dirty="0"/>
-              <a:t>Challenge – let’s check our understanding</a:t>
+              <a:t>Caching</a:t>
             </a:r>
           </a:p>
         </p:txBody>
@@ -13731,7 +13784,7 @@
           <p:cNvPr id="3" name="Content Placeholder 2">
             <a:extLst>
               <a:ext uri="{FF2B5EF4-FFF2-40B4-BE49-F238E27FC236}">
-                <a16:creationId xmlns:a16="http://schemas.microsoft.com/office/drawing/2014/main" id="{D13E1DF8-36E0-1D6D-D9DB-C73571F53862}"/>
+                <a16:creationId xmlns:a16="http://schemas.microsoft.com/office/drawing/2014/main" id="{A8922F26-1211-B54A-EBCC-03BD1CD62921}"/>
               </a:ext>
             </a:extLst>
           </p:cNvPr>
@@ -13744,17 +13797,108 @@
         </p:nvSpPr>
         <p:spPr>
           <a:xfrm>
-            <a:off x="581192" y="2475925"/>
-            <a:ext cx="5317584" cy="1681246"/>
+            <a:off x="457200" y="1977656"/>
+            <a:ext cx="6171290" cy="4635795"/>
           </a:xfrm>
         </p:spPr>
         <p:txBody>
-          <a:bodyPr/>
+          <a:bodyPr>
+            <a:normAutofit fontScale="92500" lnSpcReduction="10000"/>
+          </a:bodyPr>
           <a:lstStyle/>
           <a:p>
             <a:r>
-              <a:rPr lang="en-US" dirty="0"/>
-              <a:t>Create endpoints for different types of coaches</a:t>
+              <a:rPr lang="en-US" b="1" dirty="0"/>
+              <a:t>Client / Browser Level</a:t>
+            </a:r>
+            <a:endParaRPr lang="en-US" dirty="0"/>
+          </a:p>
+          <a:p>
+            <a:pPr lvl="1"/>
+            <a:r>
+              <a:rPr lang="en-US" dirty="0"/>
+              <a:t>HTTP cache — may reuse an HTTP response</a:t>
+            </a:r>
+          </a:p>
+          <a:p>
+            <a:r>
+              <a:rPr lang="en-US" b="1" dirty="0"/>
+              <a:t>Spring Boot REST API</a:t>
+            </a:r>
+            <a:endParaRPr lang="en-US" dirty="0"/>
+          </a:p>
+          <a:p>
+            <a:pPr lvl="1"/>
+            <a:r>
+              <a:rPr lang="en-US" dirty="0"/>
+              <a:t>Controller → Service</a:t>
+            </a:r>
+          </a:p>
+          <a:p>
+            <a:pPr lvl="1"/>
+            <a:r>
+              <a:rPr lang="en-US" b="1" dirty="0"/>
+              <a:t>Spring Cache</a:t>
+            </a:r>
+            <a:endParaRPr lang="en-US" dirty="0"/>
+          </a:p>
+          <a:p>
+            <a:pPr lvl="2"/>
+            <a:r>
+              <a:rPr lang="en-US" dirty="0"/>
+              <a:t>Caffeine or Redis — can cache method results in memory with caffeine or externally with Redis</a:t>
+            </a:r>
+          </a:p>
+          <a:p>
+            <a:r>
+              <a:rPr lang="en-US" b="1" dirty="0"/>
+              <a:t>Hibernate / JPA</a:t>
+            </a:r>
+            <a:endParaRPr lang="en-US" dirty="0"/>
+          </a:p>
+          <a:p>
+            <a:pPr lvl="1"/>
+            <a:r>
+              <a:rPr lang="en-US" b="1" dirty="0"/>
+              <a:t>L1 cache</a:t>
+            </a:r>
+            <a:endParaRPr lang="en-US" dirty="0"/>
+          </a:p>
+          <a:p>
+            <a:pPr lvl="1"/>
+            <a:r>
+              <a:rPr lang="en-US" dirty="0"/>
+              <a:t>Managed entities in one persistence context (enabled by default)</a:t>
+            </a:r>
+          </a:p>
+          <a:p>
+            <a:pPr lvl="1"/>
+            <a:r>
+              <a:rPr lang="en-US" b="1" dirty="0"/>
+              <a:t>L2 cache</a:t>
+            </a:r>
+            <a:endParaRPr lang="en-US" dirty="0"/>
+          </a:p>
+          <a:p>
+            <a:pPr lvl="1"/>
+            <a:r>
+              <a:rPr lang="en-US" dirty="0"/>
+              <a:t>Optional entity state shared across persistence contexts/sessions</a:t>
+            </a:r>
+          </a:p>
+          <a:p>
+            <a:pPr lvl="1"/>
+            <a:r>
+              <a:rPr lang="en-US" b="1" dirty="0"/>
+              <a:t>Query cache</a:t>
+            </a:r>
+            <a:endParaRPr lang="en-US" dirty="0"/>
+          </a:p>
+          <a:p>
+            <a:pPr lvl="1"/>
+            <a:r>
+              <a:rPr lang="en-US" dirty="0"/>
+              <a:t>Optional cached results of selected Hibernate queries</a:t>
             </a:r>
           </a:p>
         </p:txBody>
@@ -13764,7 +13908,7 @@
           <p:cNvPr id="6" name="TextBox 5">
             <a:extLst>
               <a:ext uri="{FF2B5EF4-FFF2-40B4-BE49-F238E27FC236}">
-                <a16:creationId xmlns:a16="http://schemas.microsoft.com/office/drawing/2014/main" id="{4711C103-16B8-599E-5739-2FDF5191F349}"/>
+                <a16:creationId xmlns:a16="http://schemas.microsoft.com/office/drawing/2014/main" id="{4DE7B599-D708-01E9-0612-B3DE5F733BF2}"/>
               </a:ext>
             </a:extLst>
           </p:cNvPr>
@@ -13773,8 +13917,8 @@
         </p:nvSpPr>
         <p:spPr>
           <a:xfrm>
-            <a:off x="1228165" y="2402747"/>
-            <a:ext cx="756938" cy="369332"/>
+            <a:off x="5807543" y="2837655"/>
+            <a:ext cx="6047296" cy="369332"/>
           </a:xfrm>
           <a:prstGeom prst="rect">
             <a:avLst/>
@@ -13788,18 +13932,734 @@
           <a:lstStyle/>
           <a:p>
             <a:r>
-              <a:rPr lang="en-US" b="1" dirty="0"/>
-              <a:t>Goal:</a:t>
+              <a:rPr lang="en-US" dirty="0"/>
+              <a:t>Caching can happen at many levels, but this is the basic benefit: </a:t>
+            </a:r>
+          </a:p>
+        </p:txBody>
+      </p:sp>
+      <p:pic>
+        <p:nvPicPr>
+          <p:cNvPr id="8" name="Picture 7">
+            <a:extLst>
+              <a:ext uri="{FF2B5EF4-FFF2-40B4-BE49-F238E27FC236}">
+                <a16:creationId xmlns:a16="http://schemas.microsoft.com/office/drawing/2014/main" id="{3EAB2283-A792-5A07-2E76-0335E144BABD}"/>
+              </a:ext>
+            </a:extLst>
+          </p:cNvPr>
+          <p:cNvPicPr>
+            <a:picLocks noChangeAspect="1"/>
+          </p:cNvPicPr>
+          <p:nvPr/>
+        </p:nvPicPr>
+        <p:blipFill>
+          <a:blip r:embed="rId2"/>
+          <a:stretch>
+            <a:fillRect/>
+          </a:stretch>
+        </p:blipFill>
+        <p:spPr>
+          <a:xfrm>
+            <a:off x="6614840" y="3206987"/>
+            <a:ext cx="4432702" cy="2150249"/>
+          </a:xfrm>
+          <a:prstGeom prst="rect">
+            <a:avLst/>
+          </a:prstGeom>
+        </p:spPr>
+      </p:pic>
+    </p:spTree>
+    <p:extLst>
+      <p:ext uri="{BB962C8B-B14F-4D97-AF65-F5344CB8AC3E}">
+        <p14:creationId xmlns:p14="http://schemas.microsoft.com/office/powerpoint/2010/main" val="2026502064"/>
+      </p:ext>
+    </p:extLst>
+  </p:cSld>
+  <p:clrMapOvr>
+    <a:masterClrMapping/>
+  </p:clrMapOvr>
+</p:sld>
+</file>
+
+<file path=ppt/slides/slide41.xml><?xml version="1.0" encoding="utf-8"?>
+<p:sld xmlns:a="http://schemas.openxmlformats.org/drawingml/2006/main" xmlns:r="http://schemas.openxmlformats.org/officeDocument/2006/relationships" xmlns:p="http://schemas.openxmlformats.org/presentationml/2006/main">
+  <p:cSld>
+    <p:spTree>
+      <p:nvGrpSpPr>
+        <p:cNvPr id="1" name=""/>
+        <p:cNvGrpSpPr/>
+        <p:nvPr/>
+      </p:nvGrpSpPr>
+      <p:grpSpPr>
+        <a:xfrm>
+          <a:off x="0" y="0"/>
+          <a:ext cx="0" cy="0"/>
+          <a:chOff x="0" y="0"/>
+          <a:chExt cx="0" cy="0"/>
+        </a:xfrm>
+      </p:grpSpPr>
+      <p:sp>
+        <p:nvSpPr>
+          <p:cNvPr id="2" name="Title 1">
+            <a:extLst>
+              <a:ext uri="{FF2B5EF4-FFF2-40B4-BE49-F238E27FC236}">
+                <a16:creationId xmlns:a16="http://schemas.microsoft.com/office/drawing/2014/main" id="{C4F876C0-D059-9634-D894-DC63DB362F4A}"/>
+              </a:ext>
+            </a:extLst>
+          </p:cNvPr>
+          <p:cNvSpPr>
+            <a:spLocks noGrp="1"/>
+          </p:cNvSpPr>
+          <p:nvPr>
+            <p:ph type="title"/>
+          </p:nvPr>
+        </p:nvSpPr>
+        <p:spPr/>
+        <p:txBody>
+          <a:bodyPr/>
+          <a:lstStyle/>
+          <a:p>
+            <a:r>
+              <a:rPr lang="en-US" dirty="0"/>
+              <a:t>L2 vs Spring cache with caffeine</a:t>
+            </a:r>
+          </a:p>
+        </p:txBody>
+      </p:sp>
+      <p:graphicFrame>
+        <p:nvGraphicFramePr>
+          <p:cNvPr id="4" name="Content Placeholder 3">
+            <a:extLst>
+              <a:ext uri="{FF2B5EF4-FFF2-40B4-BE49-F238E27FC236}">
+                <a16:creationId xmlns:a16="http://schemas.microsoft.com/office/drawing/2014/main" id="{1F60042C-D4FB-EF68-8213-F264A1222C19}"/>
+              </a:ext>
+            </a:extLst>
+          </p:cNvPr>
+          <p:cNvGraphicFramePr>
+            <a:graphicFrameLocks noGrp="1"/>
+          </p:cNvGraphicFramePr>
+          <p:nvPr>
+            <p:ph idx="1"/>
+            <p:extLst>
+              <p:ext uri="{D42A27DB-BD31-4B8C-83A1-F6EECF244321}">
+                <p14:modId xmlns:p14="http://schemas.microsoft.com/office/powerpoint/2010/main" val="2404142375"/>
+              </p:ext>
+            </p:extLst>
+          </p:nvPr>
+        </p:nvGraphicFramePr>
+        <p:xfrm>
+          <a:off x="580691" y="2107179"/>
+          <a:ext cx="11029950" cy="3952968"/>
+        </p:xfrm>
+        <a:graphic>
+          <a:graphicData uri="http://schemas.openxmlformats.org/drawingml/2006/table">
+            <a:tbl>
+              <a:tblPr>
+                <a:tableStyleId>{5C22544A-7EE6-4342-B048-85BDC9FD1C3A}</a:tableStyleId>
+              </a:tblPr>
+              <a:tblGrid>
+                <a:gridCol w="5514975">
+                  <a:extLst>
+                    <a:ext uri="{9D8B030D-6E8A-4147-A177-3AD203B41FA5}">
+                      <a16:colId xmlns:a16="http://schemas.microsoft.com/office/drawing/2014/main" val="3679637023"/>
+                    </a:ext>
+                  </a:extLst>
+                </a:gridCol>
+                <a:gridCol w="5514975">
+                  <a:extLst>
+                    <a:ext uri="{9D8B030D-6E8A-4147-A177-3AD203B41FA5}">
+                      <a16:colId xmlns:a16="http://schemas.microsoft.com/office/drawing/2014/main" val="2471954725"/>
+                    </a:ext>
+                  </a:extLst>
+                </a:gridCol>
+              </a:tblGrid>
+              <a:tr h="494121">
+                <a:tc>
+                  <a:txBody>
+                    <a:bodyPr/>
+                    <a:lstStyle/>
+                    <a:p>
+                      <a:pPr marL="0" marR="0" algn="l" fontAlgn="t">
+                        <a:buNone/>
+                      </a:pPr>
+                      <a:r>
+                        <a:rPr lang="en-US" sz="1600" b="1" spc="0" dirty="0">
+                          <a:effectLst/>
+                        </a:rPr>
+                        <a:t>Your use case</a:t>
+                      </a:r>
+                      <a:endParaRPr lang="en-US" sz="1600" b="1" i="0" spc="0" dirty="0">
+                        <a:solidFill>
+                          <a:srgbClr val="FFFFFF"/>
+                        </a:solidFill>
+                        <a:effectLst/>
+                        <a:latin typeface="-apple-system-body"/>
+                      </a:endParaRPr>
+                    </a:p>
+                  </a:txBody>
+                  <a:tcPr marT="50800" marB="50800"/>
+                </a:tc>
+                <a:tc>
+                  <a:txBody>
+                    <a:bodyPr/>
+                    <a:lstStyle/>
+                    <a:p>
+                      <a:pPr marL="0" marR="0" algn="l" fontAlgn="t">
+                        <a:buNone/>
+                      </a:pPr>
+                      <a:r>
+                        <a:rPr lang="en-US" sz="1600" b="1" spc="0" dirty="0">
+                          <a:effectLst/>
+                        </a:rPr>
+                        <a:t>Recommendation</a:t>
+                      </a:r>
+                      <a:endParaRPr lang="en-US" sz="1600" b="1" i="0" spc="0" dirty="0">
+                        <a:solidFill>
+                          <a:srgbClr val="FFFFFF"/>
+                        </a:solidFill>
+                        <a:effectLst/>
+                        <a:latin typeface="-apple-system-body"/>
+                      </a:endParaRPr>
+                    </a:p>
+                  </a:txBody>
+                  <a:tcPr marT="50800" marB="50800"/>
+                </a:tc>
+                <a:extLst>
+                  <a:ext uri="{0D108BD9-81ED-4DB2-BD59-A6C34878D82A}">
+                    <a16:rowId xmlns:a16="http://schemas.microsoft.com/office/drawing/2014/main" val="1420346764"/>
+                  </a:ext>
+                </a:extLst>
+              </a:tr>
+              <a:tr h="494121">
+                <a:tc>
+                  <a:txBody>
+                    <a:bodyPr/>
+                    <a:lstStyle/>
+                    <a:p>
+                      <a:pPr marL="0" marR="0" algn="l" fontAlgn="t">
+                        <a:buNone/>
+                      </a:pPr>
+                      <a:r>
+                        <a:rPr lang="en-US" sz="1600" spc="0">
+                          <a:effectLst/>
+                        </a:rPr>
+                        <a:t>Repeated findById() calls for stable entities</a:t>
+                      </a:r>
+                      <a:endParaRPr lang="en-US" sz="1600" b="0" i="0" spc="0">
+                        <a:solidFill>
+                          <a:srgbClr val="FFFFFF"/>
+                        </a:solidFill>
+                        <a:effectLst/>
+                        <a:latin typeface="-apple-system-body"/>
+                      </a:endParaRPr>
+                    </a:p>
+                  </a:txBody>
+                  <a:tcPr marT="50800" marB="50800"/>
+                </a:tc>
+                <a:tc>
+                  <a:txBody>
+                    <a:bodyPr/>
+                    <a:lstStyle/>
+                    <a:p>
+                      <a:pPr marL="0" marR="0" algn="l" fontAlgn="t">
+                        <a:buNone/>
+                      </a:pPr>
+                      <a:r>
+                        <a:rPr lang="en-US" sz="1600" spc="0">
+                          <a:effectLst/>
+                        </a:rPr>
+                        <a:t>Hibernate L2</a:t>
+                      </a:r>
+                      <a:endParaRPr lang="en-US" sz="1600" b="0" i="0" spc="0">
+                        <a:solidFill>
+                          <a:srgbClr val="FFFFFF"/>
+                        </a:solidFill>
+                        <a:effectLst/>
+                        <a:latin typeface="-apple-system-body"/>
+                      </a:endParaRPr>
+                    </a:p>
+                  </a:txBody>
+                  <a:tcPr marT="50800" marB="50800"/>
+                </a:tc>
+                <a:extLst>
+                  <a:ext uri="{0D108BD9-81ED-4DB2-BD59-A6C34878D82A}">
+                    <a16:rowId xmlns:a16="http://schemas.microsoft.com/office/drawing/2014/main" val="3569321821"/>
+                  </a:ext>
+                </a:extLst>
+              </a:tr>
+              <a:tr h="494121">
+                <a:tc>
+                  <a:txBody>
+                    <a:bodyPr/>
+                    <a:lstStyle/>
+                    <a:p>
+                      <a:pPr marL="0" marR="0" algn="l" fontAlgn="t">
+                        <a:buNone/>
+                      </a:pPr>
+                      <a:r>
+                        <a:rPr lang="en-US" sz="1600" spc="0">
+                          <a:effectLst/>
+                        </a:rPr>
+                        <a:t>Frequently requested DTOs or projections</a:t>
+                      </a:r>
+                      <a:endParaRPr lang="en-US" sz="1600" b="0" i="0" spc="0">
+                        <a:solidFill>
+                          <a:srgbClr val="FFFFFF"/>
+                        </a:solidFill>
+                        <a:effectLst/>
+                        <a:latin typeface="-apple-system-body"/>
+                      </a:endParaRPr>
+                    </a:p>
+                  </a:txBody>
+                  <a:tcPr marT="50800" marB="50800"/>
+                </a:tc>
+                <a:tc>
+                  <a:txBody>
+                    <a:bodyPr/>
+                    <a:lstStyle/>
+                    <a:p>
+                      <a:pPr marL="0" marR="0" algn="l" fontAlgn="t">
+                        <a:buNone/>
+                      </a:pPr>
+                      <a:r>
+                        <a:rPr lang="en-US" sz="1600" spc="0">
+                          <a:effectLst/>
+                        </a:rPr>
+                        <a:t>Caffeine</a:t>
+                      </a:r>
+                      <a:endParaRPr lang="en-US" sz="1600" b="0" i="0" spc="0">
+                        <a:solidFill>
+                          <a:srgbClr val="FFFFFF"/>
+                        </a:solidFill>
+                        <a:effectLst/>
+                        <a:latin typeface="-apple-system-body"/>
+                      </a:endParaRPr>
+                    </a:p>
+                  </a:txBody>
+                  <a:tcPr marT="50800" marB="50800"/>
+                </a:tc>
+                <a:extLst>
+                  <a:ext uri="{0D108BD9-81ED-4DB2-BD59-A6C34878D82A}">
+                    <a16:rowId xmlns:a16="http://schemas.microsoft.com/office/drawing/2014/main" val="2068310309"/>
+                  </a:ext>
+                </a:extLst>
+              </a:tr>
+              <a:tr h="494121">
+                <a:tc>
+                  <a:txBody>
+                    <a:bodyPr/>
+                    <a:lstStyle/>
+                    <a:p>
+                      <a:pPr marL="0" marR="0" algn="l" fontAlgn="t">
+                        <a:buNone/>
+                      </a:pPr>
+                      <a:r>
+                        <a:rPr lang="en-US" sz="1600" spc="0">
+                          <a:effectLst/>
+                        </a:rPr>
+                        <a:t>Expensive service computations</a:t>
+                      </a:r>
+                      <a:endParaRPr lang="en-US" sz="1600" b="0" i="0" spc="0">
+                        <a:solidFill>
+                          <a:srgbClr val="FFFFFF"/>
+                        </a:solidFill>
+                        <a:effectLst/>
+                        <a:latin typeface="-apple-system-body"/>
+                      </a:endParaRPr>
+                    </a:p>
+                  </a:txBody>
+                  <a:tcPr marT="50800" marB="50800"/>
+                </a:tc>
+                <a:tc>
+                  <a:txBody>
+                    <a:bodyPr/>
+                    <a:lstStyle/>
+                    <a:p>
+                      <a:pPr marL="0" marR="0" algn="l" fontAlgn="t">
+                        <a:buNone/>
+                      </a:pPr>
+                      <a:r>
+                        <a:rPr lang="en-US" sz="1600" spc="0">
+                          <a:effectLst/>
+                        </a:rPr>
+                        <a:t>Caffeine</a:t>
+                      </a:r>
+                      <a:endParaRPr lang="en-US" sz="1600" b="0" i="0" spc="0">
+                        <a:solidFill>
+                          <a:srgbClr val="FFFFFF"/>
+                        </a:solidFill>
+                        <a:effectLst/>
+                        <a:latin typeface="-apple-system-body"/>
+                      </a:endParaRPr>
+                    </a:p>
+                  </a:txBody>
+                  <a:tcPr marT="50800" marB="50800"/>
+                </a:tc>
+                <a:extLst>
+                  <a:ext uri="{0D108BD9-81ED-4DB2-BD59-A6C34878D82A}">
+                    <a16:rowId xmlns:a16="http://schemas.microsoft.com/office/drawing/2014/main" val="470989942"/>
+                  </a:ext>
+                </a:extLst>
+              </a:tr>
+              <a:tr h="494121">
+                <a:tc>
+                  <a:txBody>
+                    <a:bodyPr/>
+                    <a:lstStyle/>
+                    <a:p>
+                      <a:pPr marL="0" marR="0" algn="l" fontAlgn="t">
+                        <a:buNone/>
+                      </a:pPr>
+                      <a:r>
+                        <a:rPr lang="en-US" sz="1600" spc="0">
+                          <a:effectLst/>
+                        </a:rPr>
+                        <a:t>Many application instances needing a shared cache</a:t>
+                      </a:r>
+                      <a:endParaRPr lang="en-US" sz="1600" b="0" i="0" spc="0">
+                        <a:solidFill>
+                          <a:srgbClr val="FFFFFF"/>
+                        </a:solidFill>
+                        <a:effectLst/>
+                        <a:latin typeface="-apple-system-body"/>
+                      </a:endParaRPr>
+                    </a:p>
+                  </a:txBody>
+                  <a:tcPr marT="50800" marB="50800"/>
+                </a:tc>
+                <a:tc>
+                  <a:txBody>
+                    <a:bodyPr/>
+                    <a:lstStyle/>
+                    <a:p>
+                      <a:pPr marL="0" marR="0" algn="l" fontAlgn="t">
+                        <a:buNone/>
+                      </a:pPr>
+                      <a:r>
+                        <a:rPr lang="en-US" sz="1600" spc="0">
+                          <a:effectLst/>
+                        </a:rPr>
+                        <a:t>Consider Redis or another distributed cache</a:t>
+                      </a:r>
+                      <a:endParaRPr lang="en-US" sz="1600" b="0" i="0" spc="0">
+                        <a:solidFill>
+                          <a:srgbClr val="FFFFFF"/>
+                        </a:solidFill>
+                        <a:effectLst/>
+                        <a:latin typeface="-apple-system-body"/>
+                      </a:endParaRPr>
+                    </a:p>
+                  </a:txBody>
+                  <a:tcPr marT="50800" marB="50800"/>
+                </a:tc>
+                <a:extLst>
+                  <a:ext uri="{0D108BD9-81ED-4DB2-BD59-A6C34878D82A}">
+                    <a16:rowId xmlns:a16="http://schemas.microsoft.com/office/drawing/2014/main" val="634936767"/>
+                  </a:ext>
+                </a:extLst>
+              </a:tr>
+              <a:tr h="494121">
+                <a:tc>
+                  <a:txBody>
+                    <a:bodyPr/>
+                    <a:lstStyle/>
+                    <a:p>
+                      <a:pPr marL="0" marR="0" algn="l" fontAlgn="t">
+                        <a:buNone/>
+                      </a:pPr>
+                      <a:r>
+                        <a:rPr lang="en-US" sz="1600" spc="0">
+                          <a:effectLst/>
+                        </a:rPr>
+                        <a:t>Reference entities reused across many sessions</a:t>
+                      </a:r>
+                      <a:endParaRPr lang="en-US" sz="1600" b="0" i="0" spc="0">
+                        <a:solidFill>
+                          <a:srgbClr val="FFFFFF"/>
+                        </a:solidFill>
+                        <a:effectLst/>
+                        <a:latin typeface="-apple-system-body"/>
+                      </a:endParaRPr>
+                    </a:p>
+                  </a:txBody>
+                  <a:tcPr marT="50800" marB="50800"/>
+                </a:tc>
+                <a:tc>
+                  <a:txBody>
+                    <a:bodyPr/>
+                    <a:lstStyle/>
+                    <a:p>
+                      <a:pPr marL="0" marR="0" algn="l" fontAlgn="t">
+                        <a:buNone/>
+                      </a:pPr>
+                      <a:r>
+                        <a:rPr lang="en-US" sz="1600" spc="0">
+                          <a:effectLst/>
+                        </a:rPr>
+                        <a:t>Hibernate L2</a:t>
+                      </a:r>
+                      <a:endParaRPr lang="en-US" sz="1600" b="0" i="0" spc="0">
+                        <a:solidFill>
+                          <a:srgbClr val="FFFFFF"/>
+                        </a:solidFill>
+                        <a:effectLst/>
+                        <a:latin typeface="-apple-system-body"/>
+                      </a:endParaRPr>
+                    </a:p>
+                  </a:txBody>
+                  <a:tcPr marT="50800" marB="50800"/>
+                </a:tc>
+                <a:extLst>
+                  <a:ext uri="{0D108BD9-81ED-4DB2-BD59-A6C34878D82A}">
+                    <a16:rowId xmlns:a16="http://schemas.microsoft.com/office/drawing/2014/main" val="1869721829"/>
+                  </a:ext>
+                </a:extLst>
+              </a:tr>
+              <a:tr h="494121">
+                <a:tc>
+                  <a:txBody>
+                    <a:bodyPr/>
+                    <a:lstStyle/>
+                    <a:p>
+                      <a:pPr marL="0" marR="0" algn="l" fontAlgn="t">
+                        <a:buNone/>
+                      </a:pPr>
+                      <a:r>
+                        <a:rPr lang="en-US" sz="1600" spc="0">
+                          <a:effectLst/>
+                        </a:rPr>
+                        <a:t>Need a quick cache for a specific service method</a:t>
+                      </a:r>
+                      <a:endParaRPr lang="en-US" sz="1600" b="0" i="0" spc="0">
+                        <a:solidFill>
+                          <a:srgbClr val="FFFFFF"/>
+                        </a:solidFill>
+                        <a:effectLst/>
+                        <a:latin typeface="-apple-system-body"/>
+                      </a:endParaRPr>
+                    </a:p>
+                  </a:txBody>
+                  <a:tcPr marT="50800" marB="50800"/>
+                </a:tc>
+                <a:tc>
+                  <a:txBody>
+                    <a:bodyPr/>
+                    <a:lstStyle/>
+                    <a:p>
+                      <a:pPr marL="0" marR="0" algn="l" fontAlgn="t">
+                        <a:buNone/>
+                      </a:pPr>
+                      <a:r>
+                        <a:rPr lang="en-US" sz="1600" spc="0">
+                          <a:effectLst/>
+                        </a:rPr>
+                        <a:t>Caffeine</a:t>
+                      </a:r>
+                      <a:endParaRPr lang="en-US" sz="1600" b="0" i="0" spc="0">
+                        <a:solidFill>
+                          <a:srgbClr val="FFFFFF"/>
+                        </a:solidFill>
+                        <a:effectLst/>
+                        <a:latin typeface="-apple-system-body"/>
+                      </a:endParaRPr>
+                    </a:p>
+                  </a:txBody>
+                  <a:tcPr marT="50800" marB="50800"/>
+                </a:tc>
+                <a:extLst>
+                  <a:ext uri="{0D108BD9-81ED-4DB2-BD59-A6C34878D82A}">
+                    <a16:rowId xmlns:a16="http://schemas.microsoft.com/office/drawing/2014/main" val="3075107708"/>
+                  </a:ext>
+                </a:extLst>
+              </a:tr>
+              <a:tr h="494121">
+                <a:tc>
+                  <a:txBody>
+                    <a:bodyPr/>
+                    <a:lstStyle/>
+                    <a:p>
+                      <a:pPr marL="0" marR="0" algn="l" fontAlgn="t">
+                        <a:buNone/>
+                      </a:pPr>
+                      <a:r>
+                        <a:rPr lang="en-US" sz="1600" spc="0">
+                          <a:effectLst/>
+                        </a:rPr>
+                        <a:t>Need to avoid both repeated SQL and repeated DTO mapping</a:t>
+                      </a:r>
+                      <a:endParaRPr lang="en-US" sz="1600" b="0" i="0" spc="0">
+                        <a:solidFill>
+                          <a:srgbClr val="FFFFFF"/>
+                        </a:solidFill>
+                        <a:effectLst/>
+                        <a:latin typeface="-apple-system-body"/>
+                      </a:endParaRPr>
+                    </a:p>
+                  </a:txBody>
+                  <a:tcPr marT="50800" marB="50800"/>
+                </a:tc>
+                <a:tc>
+                  <a:txBody>
+                    <a:bodyPr/>
+                    <a:lstStyle/>
+                    <a:p>
+                      <a:pPr marL="0" marR="0" algn="l" fontAlgn="t">
+                        <a:buNone/>
+                      </a:pPr>
+                      <a:r>
+                        <a:rPr lang="en-US" sz="1600" spc="0" dirty="0">
+                          <a:effectLst/>
+                        </a:rPr>
+                        <a:t>Caffeine, potentially alongside L2</a:t>
+                      </a:r>
+                      <a:endParaRPr lang="en-US" sz="1600" b="0" i="0" spc="0" dirty="0">
+                        <a:solidFill>
+                          <a:srgbClr val="FFFFFF"/>
+                        </a:solidFill>
+                        <a:effectLst/>
+                        <a:latin typeface="-apple-system-body"/>
+                      </a:endParaRPr>
+                    </a:p>
+                  </a:txBody>
+                  <a:tcPr marT="50800" marB="50800"/>
+                </a:tc>
+                <a:extLst>
+                  <a:ext uri="{0D108BD9-81ED-4DB2-BD59-A6C34878D82A}">
+                    <a16:rowId xmlns:a16="http://schemas.microsoft.com/office/drawing/2014/main" val="2098094301"/>
+                  </a:ext>
+                </a:extLst>
+              </a:tr>
+            </a:tbl>
+          </a:graphicData>
+        </a:graphic>
+      </p:graphicFrame>
+    </p:spTree>
+    <p:extLst>
+      <p:ext uri="{BB962C8B-B14F-4D97-AF65-F5344CB8AC3E}">
+        <p14:creationId xmlns:p14="http://schemas.microsoft.com/office/powerpoint/2010/main" val="3298043183"/>
+      </p:ext>
+    </p:extLst>
+  </p:cSld>
+  <p:clrMapOvr>
+    <a:masterClrMapping/>
+  </p:clrMapOvr>
+</p:sld>
+</file>
+
+<file path=ppt/slides/slide42.xml><?xml version="1.0" encoding="utf-8"?>
+<p:sld xmlns:a="http://schemas.openxmlformats.org/drawingml/2006/main" xmlns:r="http://schemas.openxmlformats.org/officeDocument/2006/relationships" xmlns:p="http://schemas.openxmlformats.org/presentationml/2006/main">
+  <p:cSld>
+    <p:spTree>
+      <p:nvGrpSpPr>
+        <p:cNvPr id="1" name=""/>
+        <p:cNvGrpSpPr/>
+        <p:nvPr/>
+      </p:nvGrpSpPr>
+      <p:grpSpPr>
+        <a:xfrm>
+          <a:off x="0" y="0"/>
+          <a:ext cx="0" cy="0"/>
+          <a:chOff x="0" y="0"/>
+          <a:chExt cx="0" cy="0"/>
+        </a:xfrm>
+      </p:grpSpPr>
+      <p:sp>
+        <p:nvSpPr>
+          <p:cNvPr id="2" name="Title 1">
+            <a:extLst>
+              <a:ext uri="{FF2B5EF4-FFF2-40B4-BE49-F238E27FC236}">
+                <a16:creationId xmlns:a16="http://schemas.microsoft.com/office/drawing/2014/main" id="{5C52759B-4083-7ADC-A294-EC6678DB3337}"/>
+              </a:ext>
+            </a:extLst>
+          </p:cNvPr>
+          <p:cNvSpPr>
+            <a:spLocks noGrp="1"/>
+          </p:cNvSpPr>
+          <p:nvPr>
+            <p:ph type="title"/>
+          </p:nvPr>
+        </p:nvSpPr>
+        <p:spPr/>
+        <p:txBody>
+          <a:bodyPr/>
+          <a:lstStyle/>
+          <a:p>
+            <a:r>
+              <a:rPr lang="en-US" dirty="0"/>
+              <a:t>Enabling l2 cache</a:t>
             </a:r>
           </a:p>
         </p:txBody>
       </p:sp>
       <p:sp>
         <p:nvSpPr>
-          <p:cNvPr id="7" name="TextBox 6">
+          <p:cNvPr id="3" name="Content Placeholder 2">
             <a:extLst>
               <a:ext uri="{FF2B5EF4-FFF2-40B4-BE49-F238E27FC236}">
-                <a16:creationId xmlns:a16="http://schemas.microsoft.com/office/drawing/2014/main" id="{45AB5C3A-C77B-4B2B-5C19-A80BEA882757}"/>
+                <a16:creationId xmlns:a16="http://schemas.microsoft.com/office/drawing/2014/main" id="{C56EEF95-2A17-B0A8-292E-DFED9907DE66}"/>
+              </a:ext>
+            </a:extLst>
+          </p:cNvPr>
+          <p:cNvSpPr>
+            <a:spLocks noGrp="1"/>
+          </p:cNvSpPr>
+          <p:nvPr>
+            <p:ph idx="1"/>
+          </p:nvPr>
+        </p:nvSpPr>
+        <p:spPr>
+          <a:xfrm>
+            <a:off x="581193" y="2180496"/>
+            <a:ext cx="4489652" cy="3678303"/>
+          </a:xfrm>
+        </p:spPr>
+        <p:txBody>
+          <a:bodyPr/>
+          <a:lstStyle/>
+          <a:p>
+            <a:r>
+              <a:rPr lang="en-US" dirty="0"/>
+              <a:t>Step 1: Bring in necessary dependencies</a:t>
+            </a:r>
+          </a:p>
+          <a:p>
+            <a:r>
+              <a:rPr lang="en-US" dirty="0"/>
+              <a:t>The hibernate-</a:t>
+            </a:r>
+            <a:r>
+              <a:rPr lang="en-US" dirty="0" err="1"/>
+              <a:t>jcache</a:t>
+            </a:r>
+            <a:r>
+              <a:rPr lang="en-US" dirty="0"/>
+              <a:t> dependency connects Hibernate to the </a:t>
+            </a:r>
+            <a:r>
+              <a:rPr lang="en-US" dirty="0" err="1"/>
+              <a:t>JCache</a:t>
+            </a:r>
+            <a:r>
+              <a:rPr lang="en-US" dirty="0"/>
+              <a:t> API, while </a:t>
+            </a:r>
+            <a:r>
+              <a:rPr lang="en-US" dirty="0" err="1"/>
+              <a:t>Ehcache</a:t>
+            </a:r>
+            <a:r>
+              <a:rPr lang="en-US" dirty="0"/>
+              <a:t> provides the actual cache implementation. </a:t>
+            </a:r>
+          </a:p>
+        </p:txBody>
+      </p:sp>
+      <p:sp>
+        <p:nvSpPr>
+          <p:cNvPr id="5" name="TextBox 4">
+            <a:extLst>
+              <a:ext uri="{FF2B5EF4-FFF2-40B4-BE49-F238E27FC236}">
+                <a16:creationId xmlns:a16="http://schemas.microsoft.com/office/drawing/2014/main" id="{22DA3989-7FE7-A467-262C-7C40CA2E8A6B}"/>
               </a:ext>
             </a:extLst>
           </p:cNvPr>
@@ -13808,8 +14668,8 @@
         </p:nvSpPr>
         <p:spPr>
           <a:xfrm>
-            <a:off x="6949165" y="2402747"/>
-            <a:ext cx="4661643" cy="369332"/>
+            <a:off x="5070845" y="2725318"/>
+            <a:ext cx="6097772" cy="1938992"/>
           </a:xfrm>
           <a:prstGeom prst="rect">
             <a:avLst/>
@@ -13817,285 +14677,3638 @@
           <a:noFill/>
         </p:spPr>
         <p:txBody>
-          <a:bodyPr wrap="square" rtlCol="0">
+          <a:bodyPr wrap="square">
             <a:spAutoFit/>
           </a:bodyPr>
           <a:lstStyle/>
           <a:p>
-            <a:r>
-              <a:rPr lang="en-US" b="1" dirty="0"/>
-              <a:t>Scenario:  			   5 min</a:t>
-            </a:r>
-          </a:p>
-        </p:txBody>
-      </p:sp>
-      <p:sp>
-        <p:nvSpPr>
-          <p:cNvPr id="8" name="Content Placeholder 2">
-            <a:extLst>
-              <a:ext uri="{FF2B5EF4-FFF2-40B4-BE49-F238E27FC236}">
-                <a16:creationId xmlns:a16="http://schemas.microsoft.com/office/drawing/2014/main" id="{3861BE59-BFB8-9E75-6062-CCB3C6CEB3D5}"/>
-              </a:ext>
-            </a:extLst>
-          </p:cNvPr>
-          <p:cNvSpPr txBox="1">
-            <a:spLocks/>
-          </p:cNvSpPr>
-          <p:nvPr/>
-        </p:nvSpPr>
-        <p:spPr>
-          <a:xfrm>
-            <a:off x="6545749" y="2772078"/>
-            <a:ext cx="4661642" cy="2480405"/>
-          </a:xfrm>
-          <a:prstGeom prst="rect">
-            <a:avLst/>
-          </a:prstGeom>
-        </p:spPr>
-        <p:txBody>
-          <a:bodyPr vert="horz" lIns="91440" tIns="45720" rIns="91440" bIns="45720" rtlCol="0" anchor="ctr">
-            <a:normAutofit/>
-          </a:bodyPr>
-          <a:lstStyle>
-            <a:lvl1pPr marL="306000" indent="-306000" algn="l" defTabSz="457200" rtl="0" eaLnBrk="1" latinLnBrk="0" hangingPunct="1">
-              <a:spcBef>
-                <a:spcPct val="20000"/>
-              </a:spcBef>
-              <a:spcAft>
-                <a:spcPts val="600"/>
-              </a:spcAft>
-              <a:buClr>
-                <a:schemeClr val="accent2"/>
-              </a:buClr>
-              <a:buSzPct val="92000"/>
-              <a:buFont typeface="Wingdings 2" panose="05020102010507070707" pitchFamily="18" charset="2"/>
-              <a:buChar char=""/>
-              <a:defRPr sz="1800" kern="1200">
-                <a:solidFill>
-                  <a:schemeClr val="tx2"/>
-                </a:solidFill>
-                <a:latin typeface="+mn-lt"/>
-                <a:ea typeface="+mn-ea"/>
-                <a:cs typeface="+mn-cs"/>
-              </a:defRPr>
-            </a:lvl1pPr>
-            <a:lvl2pPr marL="630000" indent="-306000" algn="l" defTabSz="457200" rtl="0" eaLnBrk="1" latinLnBrk="0" hangingPunct="1">
-              <a:spcBef>
-                <a:spcPct val="20000"/>
-              </a:spcBef>
-              <a:spcAft>
-                <a:spcPts val="600"/>
-              </a:spcAft>
-              <a:buClr>
-                <a:schemeClr val="accent2"/>
-              </a:buClr>
-              <a:buSzPct val="92000"/>
-              <a:buFont typeface="Wingdings 2" panose="05020102010507070707" pitchFamily="18" charset="2"/>
-              <a:buChar char=""/>
-              <a:defRPr sz="1600" kern="1200">
-                <a:solidFill>
-                  <a:schemeClr val="tx2"/>
-                </a:solidFill>
-                <a:latin typeface="+mn-lt"/>
-                <a:ea typeface="+mn-ea"/>
-                <a:cs typeface="+mn-cs"/>
-              </a:defRPr>
-            </a:lvl2pPr>
-            <a:lvl3pPr marL="900000" indent="-270000" algn="l" defTabSz="457200" rtl="0" eaLnBrk="1" latinLnBrk="0" hangingPunct="1">
-              <a:spcBef>
-                <a:spcPct val="20000"/>
-              </a:spcBef>
-              <a:spcAft>
-                <a:spcPts val="600"/>
-              </a:spcAft>
-              <a:buClr>
-                <a:schemeClr val="accent2"/>
-              </a:buClr>
-              <a:buSzPct val="92000"/>
-              <a:buFont typeface="Wingdings 2" panose="05020102010507070707" pitchFamily="18" charset="2"/>
-              <a:buChar char=""/>
-              <a:defRPr sz="1400" kern="1200">
-                <a:solidFill>
-                  <a:schemeClr val="tx2"/>
-                </a:solidFill>
-                <a:latin typeface="+mn-lt"/>
-                <a:ea typeface="+mn-ea"/>
-                <a:cs typeface="+mn-cs"/>
-              </a:defRPr>
-            </a:lvl3pPr>
-            <a:lvl4pPr marL="1242000" indent="-234000" algn="l" defTabSz="457200" rtl="0" eaLnBrk="1" latinLnBrk="0" hangingPunct="1">
-              <a:spcBef>
-                <a:spcPct val="20000"/>
-              </a:spcBef>
-              <a:spcAft>
-                <a:spcPts val="600"/>
-              </a:spcAft>
-              <a:buClr>
-                <a:schemeClr val="accent2"/>
-              </a:buClr>
-              <a:buSzPct val="92000"/>
-              <a:buFont typeface="Wingdings 2" panose="05020102010507070707" pitchFamily="18" charset="2"/>
-              <a:buChar char=""/>
-              <a:defRPr sz="1200" kern="1200">
-                <a:solidFill>
-                  <a:schemeClr val="tx2"/>
-                </a:solidFill>
-                <a:latin typeface="+mn-lt"/>
-                <a:ea typeface="+mn-ea"/>
-                <a:cs typeface="+mn-cs"/>
-              </a:defRPr>
-            </a:lvl4pPr>
-            <a:lvl5pPr marL="1602000" indent="-234000" algn="l" defTabSz="457200" rtl="0" eaLnBrk="1" latinLnBrk="0" hangingPunct="1">
-              <a:spcBef>
-                <a:spcPct val="20000"/>
-              </a:spcBef>
-              <a:spcAft>
-                <a:spcPts val="600"/>
-              </a:spcAft>
-              <a:buClr>
-                <a:schemeClr val="accent2"/>
-              </a:buClr>
-              <a:buSzPct val="92000"/>
-              <a:buFont typeface="Wingdings 2" panose="05020102010507070707" pitchFamily="18" charset="2"/>
-              <a:buChar char=""/>
-              <a:defRPr sz="1200" kern="1200">
-                <a:solidFill>
-                  <a:schemeClr val="tx2"/>
-                </a:solidFill>
-                <a:latin typeface="+mn-lt"/>
-                <a:ea typeface="+mn-ea"/>
-                <a:cs typeface="+mn-cs"/>
-              </a:defRPr>
-            </a:lvl5pPr>
-            <a:lvl6pPr marL="1900000" indent="-228600" algn="l" defTabSz="457200" rtl="0" eaLnBrk="1" latinLnBrk="0" hangingPunct="1">
-              <a:spcBef>
-                <a:spcPct val="20000"/>
-              </a:spcBef>
-              <a:spcAft>
-                <a:spcPts val="600"/>
-              </a:spcAft>
-              <a:buClr>
-                <a:schemeClr val="accent2"/>
-              </a:buClr>
-              <a:buSzPct val="92000"/>
-              <a:buFont typeface="Wingdings 2" panose="05020102010507070707" pitchFamily="18" charset="2"/>
-              <a:buChar char=""/>
-              <a:defRPr sz="1200" kern="1200">
-                <a:solidFill>
-                  <a:schemeClr val="tx2"/>
-                </a:solidFill>
-                <a:latin typeface="+mn-lt"/>
-                <a:ea typeface="+mn-ea"/>
-                <a:cs typeface="+mn-cs"/>
-              </a:defRPr>
-            </a:lvl6pPr>
-            <a:lvl7pPr marL="2200000" indent="-228600" algn="l" defTabSz="457200" rtl="0" eaLnBrk="1" latinLnBrk="0" hangingPunct="1">
-              <a:spcBef>
-                <a:spcPct val="20000"/>
-              </a:spcBef>
-              <a:spcAft>
-                <a:spcPts val="600"/>
-              </a:spcAft>
-              <a:buClr>
-                <a:schemeClr val="accent2"/>
-              </a:buClr>
-              <a:buSzPct val="92000"/>
-              <a:buFont typeface="Wingdings 2" panose="05020102010507070707" pitchFamily="18" charset="2"/>
-              <a:buChar char=""/>
-              <a:defRPr sz="1200" kern="1200">
-                <a:solidFill>
-                  <a:schemeClr val="tx2"/>
-                </a:solidFill>
-                <a:latin typeface="+mn-lt"/>
-                <a:ea typeface="+mn-ea"/>
-                <a:cs typeface="+mn-cs"/>
-              </a:defRPr>
-            </a:lvl7pPr>
-            <a:lvl8pPr marL="2500000" indent="-228600" algn="l" defTabSz="457200" rtl="0" eaLnBrk="1" latinLnBrk="0" hangingPunct="1">
-              <a:spcBef>
-                <a:spcPct val="20000"/>
-              </a:spcBef>
-              <a:spcAft>
-                <a:spcPts val="600"/>
-              </a:spcAft>
-              <a:buClr>
-                <a:schemeClr val="accent2"/>
-              </a:buClr>
-              <a:buSzPct val="92000"/>
-              <a:buFont typeface="Wingdings 2" panose="05020102010507070707" pitchFamily="18" charset="2"/>
-              <a:buChar char=""/>
-              <a:defRPr sz="1200" kern="1200">
-                <a:solidFill>
-                  <a:schemeClr val="tx2"/>
-                </a:solidFill>
-                <a:latin typeface="+mn-lt"/>
-                <a:ea typeface="+mn-ea"/>
-                <a:cs typeface="+mn-cs"/>
-              </a:defRPr>
-            </a:lvl8pPr>
-            <a:lvl9pPr marL="2800000" indent="-228600" algn="l" defTabSz="457200" rtl="0" eaLnBrk="1" latinLnBrk="0" hangingPunct="1">
-              <a:spcBef>
-                <a:spcPct val="20000"/>
-              </a:spcBef>
-              <a:spcAft>
-                <a:spcPts val="600"/>
-              </a:spcAft>
-              <a:buClr>
-                <a:schemeClr val="accent2"/>
-              </a:buClr>
-              <a:buSzPct val="92000"/>
-              <a:buFont typeface="Wingdings 2" panose="05020102010507070707" pitchFamily="18" charset="2"/>
-              <a:buChar char=""/>
-              <a:defRPr sz="1200" kern="1200">
-                <a:solidFill>
-                  <a:schemeClr val="tx2"/>
-                </a:solidFill>
-                <a:latin typeface="+mn-lt"/>
-                <a:ea typeface="+mn-ea"/>
-                <a:cs typeface="+mn-cs"/>
-              </a:defRPr>
-            </a:lvl9pPr>
-          </a:lstStyle>
-          <a:p>
-            <a:r>
-              <a:rPr lang="en-US" dirty="0"/>
-              <a:t>Example: One endpoint uses a ‘</a:t>
-            </a:r>
-            <a:r>
-              <a:rPr lang="en-US" dirty="0" err="1"/>
-              <a:t>baseBallCoach</a:t>
-            </a:r>
-            <a:r>
-              <a:rPr lang="en-US" dirty="0"/>
-              <a:t>’ and prints ‘Practice Baseball’ </a:t>
-            </a:r>
-          </a:p>
-          <a:p>
-            <a:r>
-              <a:rPr lang="en-US" dirty="0"/>
-              <a:t>Another endpoint uses a ‘</a:t>
-            </a:r>
-            <a:r>
-              <a:rPr lang="en-US" dirty="0" err="1"/>
-              <a:t>basketballCoach</a:t>
-            </a:r>
-            <a:r>
-              <a:rPr lang="en-US" dirty="0"/>
-              <a:t>’ and prints ‘Practice Basketball’</a:t>
-            </a:r>
-          </a:p>
-          <a:p>
-            <a:r>
-              <a:rPr lang="en-US" dirty="0"/>
-              <a:t>Hint: You can inject more than one item, with multiple @Qualifier(s)!</a:t>
-            </a:r>
+            <a:pPr indent="0" algn="l">
+              <a:buNone/>
+            </a:pPr>
+            <a:r>
+              <a:rPr lang="en-US" sz="1800" b="0" i="0" dirty="0">
+                <a:solidFill>
+                  <a:schemeClr val="tx1"/>
+                </a:solidFill>
+                <a:effectLst/>
+                <a:latin typeface="+mn-lt"/>
+              </a:rPr>
+              <a:t>&lt;dependency&gt;</a:t>
+            </a:r>
+          </a:p>
+          <a:p>
+            <a:pPr indent="0" algn="l">
+              <a:buNone/>
+            </a:pPr>
+            <a:r>
+              <a:rPr lang="en-US" sz="1800" b="0" i="0" dirty="0">
+                <a:solidFill>
+                  <a:schemeClr val="tx1"/>
+                </a:solidFill>
+                <a:effectLst/>
+                <a:latin typeface="+mn-lt"/>
+              </a:rPr>
+              <a:t>    &lt;</a:t>
+            </a:r>
+            <a:r>
+              <a:rPr lang="en-US" sz="1800" b="0" i="0" dirty="0" err="1">
+                <a:solidFill>
+                  <a:schemeClr val="tx1"/>
+                </a:solidFill>
+                <a:effectLst/>
+                <a:latin typeface="+mn-lt"/>
+              </a:rPr>
+              <a:t>groupId</a:t>
+            </a:r>
+            <a:r>
+              <a:rPr lang="en-US" sz="1800" b="0" i="0" dirty="0">
+                <a:solidFill>
+                  <a:schemeClr val="tx1"/>
+                </a:solidFill>
+                <a:effectLst/>
+                <a:latin typeface="+mn-lt"/>
+              </a:rPr>
+              <a:t>&gt;</a:t>
+            </a:r>
+            <a:r>
+              <a:rPr lang="en-US" sz="1800" b="0" i="0" dirty="0" err="1">
+                <a:solidFill>
+                  <a:schemeClr val="tx1"/>
+                </a:solidFill>
+                <a:effectLst/>
+                <a:latin typeface="+mn-lt"/>
+              </a:rPr>
+              <a:t>org.hibernate.orm</a:t>
+            </a:r>
+            <a:r>
+              <a:rPr lang="en-US" sz="1800" b="0" i="0" dirty="0">
+                <a:solidFill>
+                  <a:schemeClr val="tx1"/>
+                </a:solidFill>
+                <a:effectLst/>
+                <a:latin typeface="+mn-lt"/>
+              </a:rPr>
+              <a:t>&lt;/</a:t>
+            </a:r>
+            <a:r>
+              <a:rPr lang="en-US" sz="1800" b="0" i="0" dirty="0" err="1">
+                <a:solidFill>
+                  <a:schemeClr val="tx1"/>
+                </a:solidFill>
+                <a:effectLst/>
+                <a:latin typeface="+mn-lt"/>
+              </a:rPr>
+              <a:t>groupId</a:t>
+            </a:r>
+            <a:r>
+              <a:rPr lang="en-US" sz="1800" b="0" i="0" dirty="0">
+                <a:solidFill>
+                  <a:schemeClr val="tx1"/>
+                </a:solidFill>
+                <a:effectLst/>
+                <a:latin typeface="+mn-lt"/>
+              </a:rPr>
+              <a:t>&gt;</a:t>
+            </a:r>
+          </a:p>
+          <a:p>
+            <a:pPr indent="0" algn="l">
+              <a:buNone/>
+            </a:pPr>
+            <a:r>
+              <a:rPr lang="en-US" sz="1800" b="0" i="0" dirty="0">
+                <a:solidFill>
+                  <a:schemeClr val="tx1"/>
+                </a:solidFill>
+                <a:effectLst/>
+                <a:latin typeface="+mn-lt"/>
+              </a:rPr>
+              <a:t>    &lt;</a:t>
+            </a:r>
+            <a:r>
+              <a:rPr lang="en-US" sz="1800" b="0" i="0" dirty="0" err="1">
+                <a:solidFill>
+                  <a:schemeClr val="tx1"/>
+                </a:solidFill>
+                <a:effectLst/>
+                <a:latin typeface="+mn-lt"/>
+              </a:rPr>
+              <a:t>artifactId</a:t>
+            </a:r>
+            <a:r>
+              <a:rPr lang="en-US" sz="1800" b="0" i="0" dirty="0">
+                <a:solidFill>
+                  <a:schemeClr val="tx1"/>
+                </a:solidFill>
+                <a:effectLst/>
+                <a:latin typeface="+mn-lt"/>
+              </a:rPr>
+              <a:t>&gt;hibernate-</a:t>
+            </a:r>
+            <a:r>
+              <a:rPr lang="en-US" sz="1800" b="0" i="0" dirty="0" err="1">
+                <a:solidFill>
+                  <a:schemeClr val="tx1"/>
+                </a:solidFill>
+                <a:effectLst/>
+                <a:latin typeface="+mn-lt"/>
+              </a:rPr>
+              <a:t>jcache</a:t>
+            </a:r>
+            <a:r>
+              <a:rPr lang="en-US" sz="1800" b="0" i="0" dirty="0">
+                <a:solidFill>
+                  <a:schemeClr val="tx1"/>
+                </a:solidFill>
+                <a:effectLst/>
+                <a:latin typeface="+mn-lt"/>
+              </a:rPr>
+              <a:t>&lt;/</a:t>
+            </a:r>
+            <a:r>
+              <a:rPr lang="en-US" sz="1800" b="0" i="0" dirty="0" err="1">
+                <a:solidFill>
+                  <a:schemeClr val="tx1"/>
+                </a:solidFill>
+                <a:effectLst/>
+                <a:latin typeface="+mn-lt"/>
+              </a:rPr>
+              <a:t>artifactId</a:t>
+            </a:r>
+            <a:r>
+              <a:rPr lang="en-US" sz="1800" b="0" i="0" dirty="0">
+                <a:solidFill>
+                  <a:schemeClr val="tx1"/>
+                </a:solidFill>
+                <a:effectLst/>
+                <a:latin typeface="+mn-lt"/>
+              </a:rPr>
+              <a:t>&gt;</a:t>
+            </a:r>
+          </a:p>
+          <a:p>
+            <a:pPr indent="0" algn="l">
+              <a:buNone/>
+            </a:pPr>
+            <a:r>
+              <a:rPr lang="en-US" sz="1800" b="0" i="0" dirty="0">
+                <a:solidFill>
+                  <a:schemeClr val="tx1"/>
+                </a:solidFill>
+                <a:effectLst/>
+                <a:latin typeface="+mn-lt"/>
+              </a:rPr>
+              <a:t>&lt;/dependency&gt;</a:t>
+            </a:r>
+          </a:p>
+          <a:p>
+            <a:pPr indent="0" algn="l">
+              <a:buNone/>
+            </a:pPr>
+            <a:endParaRPr lang="en-US" sz="1800" b="0" i="0" dirty="0">
+              <a:solidFill>
+                <a:schemeClr val="tx1"/>
+              </a:solidFill>
+              <a:effectLst/>
+              <a:latin typeface="+mn-lt"/>
+            </a:endParaRPr>
+          </a:p>
+          <a:p>
+            <a:pPr indent="0" algn="l">
+              <a:buNone/>
+            </a:pPr>
+            <a:r>
+              <a:rPr lang="en-US" sz="1800" b="0" i="0" dirty="0">
+                <a:solidFill>
+                  <a:schemeClr val="tx1"/>
+                </a:solidFill>
+                <a:effectLst/>
+                <a:latin typeface="+mn-lt"/>
+              </a:rPr>
+              <a:t>&lt;dependency&gt;</a:t>
+            </a:r>
+          </a:p>
+          <a:p>
+            <a:pPr indent="0" algn="l">
+              <a:buNone/>
+            </a:pPr>
+            <a:r>
+              <a:rPr lang="en-US" sz="1800" b="0" i="0" dirty="0">
+                <a:solidFill>
+                  <a:schemeClr val="tx1"/>
+                </a:solidFill>
+                <a:effectLst/>
+                <a:latin typeface="+mn-lt"/>
+              </a:rPr>
+              <a:t>    &lt;</a:t>
+            </a:r>
+            <a:r>
+              <a:rPr lang="en-US" sz="1800" b="0" i="0" dirty="0" err="1">
+                <a:solidFill>
+                  <a:schemeClr val="tx1"/>
+                </a:solidFill>
+                <a:effectLst/>
+                <a:latin typeface="+mn-lt"/>
+              </a:rPr>
+              <a:t>groupId</a:t>
+            </a:r>
+            <a:r>
+              <a:rPr lang="en-US" sz="1800" b="0" i="0" dirty="0">
+                <a:solidFill>
+                  <a:schemeClr val="tx1"/>
+                </a:solidFill>
+                <a:effectLst/>
+                <a:latin typeface="+mn-lt"/>
+              </a:rPr>
+              <a:t>&gt;</a:t>
+            </a:r>
+            <a:r>
+              <a:rPr lang="en-US" sz="1800" b="0" i="0" dirty="0" err="1">
+                <a:solidFill>
+                  <a:schemeClr val="tx1"/>
+                </a:solidFill>
+                <a:effectLst/>
+                <a:latin typeface="+mn-lt"/>
+              </a:rPr>
+              <a:t>org.ehcache</a:t>
+            </a:r>
+            <a:r>
+              <a:rPr lang="en-US" sz="1800" b="0" i="0" dirty="0">
+                <a:solidFill>
+                  <a:schemeClr val="tx1"/>
+                </a:solidFill>
+                <a:effectLst/>
+                <a:latin typeface="+mn-lt"/>
+              </a:rPr>
+              <a:t>&lt;/</a:t>
+            </a:r>
+            <a:r>
+              <a:rPr lang="en-US" sz="1800" b="0" i="0" dirty="0" err="1">
+                <a:solidFill>
+                  <a:schemeClr val="tx1"/>
+                </a:solidFill>
+                <a:effectLst/>
+                <a:latin typeface="+mn-lt"/>
+              </a:rPr>
+              <a:t>groupId</a:t>
+            </a:r>
+            <a:r>
+              <a:rPr lang="en-US" sz="1800" b="0" i="0" dirty="0">
+                <a:solidFill>
+                  <a:schemeClr val="tx1"/>
+                </a:solidFill>
+                <a:effectLst/>
+                <a:latin typeface="+mn-lt"/>
+              </a:rPr>
+              <a:t>&gt;</a:t>
+            </a:r>
+          </a:p>
+          <a:p>
+            <a:pPr indent="0" algn="l">
+              <a:buNone/>
+            </a:pPr>
+            <a:r>
+              <a:rPr lang="en-US" sz="1800" b="0" i="0" dirty="0">
+                <a:solidFill>
+                  <a:schemeClr val="tx1"/>
+                </a:solidFill>
+                <a:effectLst/>
+                <a:latin typeface="+mn-lt"/>
+              </a:rPr>
+              <a:t>    &lt;</a:t>
+            </a:r>
+            <a:r>
+              <a:rPr lang="en-US" sz="1800" b="0" i="0" dirty="0" err="1">
+                <a:solidFill>
+                  <a:schemeClr val="tx1"/>
+                </a:solidFill>
+                <a:effectLst/>
+                <a:latin typeface="+mn-lt"/>
+              </a:rPr>
+              <a:t>artifactId</a:t>
+            </a:r>
+            <a:r>
+              <a:rPr lang="en-US" sz="1800" b="0" i="0" dirty="0">
+                <a:solidFill>
+                  <a:schemeClr val="tx1"/>
+                </a:solidFill>
+                <a:effectLst/>
+                <a:latin typeface="+mn-lt"/>
+              </a:rPr>
+              <a:t>&gt;</a:t>
+            </a:r>
+            <a:r>
+              <a:rPr lang="en-US" sz="1800" b="0" i="0" dirty="0" err="1">
+                <a:solidFill>
+                  <a:schemeClr val="tx1"/>
+                </a:solidFill>
+                <a:effectLst/>
+                <a:latin typeface="+mn-lt"/>
+              </a:rPr>
+              <a:t>ehcache</a:t>
+            </a:r>
+            <a:r>
+              <a:rPr lang="en-US" sz="1800" b="0" i="0" dirty="0">
+                <a:solidFill>
+                  <a:schemeClr val="tx1"/>
+                </a:solidFill>
+                <a:effectLst/>
+                <a:latin typeface="+mn-lt"/>
+              </a:rPr>
+              <a:t>&lt;/</a:t>
+            </a:r>
+            <a:r>
+              <a:rPr lang="en-US" sz="1800" b="0" i="0" dirty="0" err="1">
+                <a:solidFill>
+                  <a:schemeClr val="tx1"/>
+                </a:solidFill>
+                <a:effectLst/>
+                <a:latin typeface="+mn-lt"/>
+              </a:rPr>
+              <a:t>artifactId</a:t>
+            </a:r>
+            <a:r>
+              <a:rPr lang="en-US" sz="1800" b="0" i="0" dirty="0">
+                <a:solidFill>
+                  <a:schemeClr val="tx1"/>
+                </a:solidFill>
+                <a:effectLst/>
+                <a:latin typeface="+mn-lt"/>
+              </a:rPr>
+              <a:t>&gt;</a:t>
+            </a:r>
+          </a:p>
+          <a:p>
+            <a:pPr indent="0" algn="l">
+              <a:buNone/>
+            </a:pPr>
+            <a:r>
+              <a:rPr lang="en-US" sz="1800" b="0" i="0" dirty="0">
+                <a:solidFill>
+                  <a:schemeClr val="tx1"/>
+                </a:solidFill>
+                <a:effectLst/>
+                <a:latin typeface="+mn-lt"/>
+              </a:rPr>
+              <a:t>    &lt;classifier&gt;</a:t>
+            </a:r>
+            <a:r>
+              <a:rPr lang="en-US" sz="1800" b="0" i="0" dirty="0" err="1">
+                <a:solidFill>
+                  <a:schemeClr val="tx1"/>
+                </a:solidFill>
+                <a:effectLst/>
+                <a:latin typeface="+mn-lt"/>
+              </a:rPr>
+              <a:t>jakarta</a:t>
+            </a:r>
+            <a:r>
+              <a:rPr lang="en-US" sz="1800" b="0" i="0" dirty="0">
+                <a:solidFill>
+                  <a:schemeClr val="tx1"/>
+                </a:solidFill>
+                <a:effectLst/>
+                <a:latin typeface="+mn-lt"/>
+              </a:rPr>
+              <a:t>&lt;/classifier&gt;</a:t>
+            </a:r>
+          </a:p>
+          <a:p>
+            <a:pPr indent="0" algn="l">
+              <a:buNone/>
+            </a:pPr>
+            <a:r>
+              <a:rPr lang="en-US" sz="1800" b="0" i="0" dirty="0">
+                <a:solidFill>
+                  <a:schemeClr val="tx1"/>
+                </a:solidFill>
+                <a:effectLst/>
+                <a:latin typeface="+mn-lt"/>
+              </a:rPr>
+              <a:t>&lt;/dependency&gt;</a:t>
+            </a:r>
+            <a:endParaRPr lang="en-US" sz="1200" b="0" i="0" dirty="0">
+              <a:solidFill>
+                <a:srgbClr val="FFFFFF"/>
+              </a:solidFill>
+              <a:effectLst/>
+              <a:latin typeface="Courier New" panose="02070309020205020404" pitchFamily="49" charset="0"/>
+            </a:endParaRPr>
           </a:p>
         </p:txBody>
       </p:sp>
     </p:spTree>
     <p:extLst>
       <p:ext uri="{BB962C8B-B14F-4D97-AF65-F5344CB8AC3E}">
-        <p14:creationId xmlns:p14="http://schemas.microsoft.com/office/powerpoint/2010/main" val="2532014160"/>
+        <p14:creationId xmlns:p14="http://schemas.microsoft.com/office/powerpoint/2010/main" val="2509744328"/>
+      </p:ext>
+    </p:extLst>
+  </p:cSld>
+  <p:clrMapOvr>
+    <a:masterClrMapping/>
+  </p:clrMapOvr>
+</p:sld>
+</file>
+
+<file path=ppt/slides/slide43.xml><?xml version="1.0" encoding="utf-8"?>
+<p:sld xmlns:a="http://schemas.openxmlformats.org/drawingml/2006/main" xmlns:r="http://schemas.openxmlformats.org/officeDocument/2006/relationships" xmlns:p="http://schemas.openxmlformats.org/presentationml/2006/main">
+  <p:cSld>
+    <p:spTree>
+      <p:nvGrpSpPr>
+        <p:cNvPr id="1" name=""/>
+        <p:cNvGrpSpPr/>
+        <p:nvPr/>
+      </p:nvGrpSpPr>
+      <p:grpSpPr>
+        <a:xfrm>
+          <a:off x="0" y="0"/>
+          <a:ext cx="0" cy="0"/>
+          <a:chOff x="0" y="0"/>
+          <a:chExt cx="0" cy="0"/>
+        </a:xfrm>
+      </p:grpSpPr>
+      <p:sp>
+        <p:nvSpPr>
+          <p:cNvPr id="2" name="Title 1">
+            <a:extLst>
+              <a:ext uri="{FF2B5EF4-FFF2-40B4-BE49-F238E27FC236}">
+                <a16:creationId xmlns:a16="http://schemas.microsoft.com/office/drawing/2014/main" id="{5991A18C-0E1A-2911-D029-7E3D7EC84B04}"/>
+              </a:ext>
+            </a:extLst>
+          </p:cNvPr>
+          <p:cNvSpPr>
+            <a:spLocks noGrp="1"/>
+          </p:cNvSpPr>
+          <p:nvPr>
+            <p:ph type="title"/>
+          </p:nvPr>
+        </p:nvSpPr>
+        <p:spPr/>
+        <p:txBody>
+          <a:bodyPr/>
+          <a:lstStyle/>
+          <a:p>
+            <a:r>
+              <a:rPr lang="en-US" dirty="0"/>
+              <a:t>Enabling l2 cache</a:t>
+            </a:r>
+          </a:p>
+        </p:txBody>
+      </p:sp>
+      <p:sp>
+        <p:nvSpPr>
+          <p:cNvPr id="3" name="Content Placeholder 2">
+            <a:extLst>
+              <a:ext uri="{FF2B5EF4-FFF2-40B4-BE49-F238E27FC236}">
+                <a16:creationId xmlns:a16="http://schemas.microsoft.com/office/drawing/2014/main" id="{D61DC66D-43AE-5D92-FB20-F9DD0F8544F1}"/>
+              </a:ext>
+            </a:extLst>
+          </p:cNvPr>
+          <p:cNvSpPr>
+            <a:spLocks noGrp="1"/>
+          </p:cNvSpPr>
+          <p:nvPr>
+            <p:ph idx="1"/>
+          </p:nvPr>
+        </p:nvSpPr>
+        <p:spPr>
+          <a:xfrm>
+            <a:off x="692861" y="2063538"/>
+            <a:ext cx="10806278" cy="817885"/>
+          </a:xfrm>
+        </p:spPr>
+        <p:txBody>
+          <a:bodyPr/>
+          <a:lstStyle/>
+          <a:p>
+            <a:r>
+              <a:rPr lang="en-US" dirty="0"/>
+              <a:t>Step 2: Set configurations in </a:t>
+            </a:r>
+            <a:r>
+              <a:rPr lang="en-US" dirty="0" err="1"/>
+              <a:t>application.properties</a:t>
+            </a:r>
+            <a:r>
+              <a:rPr lang="en-US" dirty="0"/>
+              <a:t>:</a:t>
+            </a:r>
+          </a:p>
+        </p:txBody>
+      </p:sp>
+      <p:sp>
+        <p:nvSpPr>
+          <p:cNvPr id="5" name="TextBox 4">
+            <a:extLst>
+              <a:ext uri="{FF2B5EF4-FFF2-40B4-BE49-F238E27FC236}">
+                <a16:creationId xmlns:a16="http://schemas.microsoft.com/office/drawing/2014/main" id="{E2838A5A-7151-D04A-23FB-FFBCBB583596}"/>
+              </a:ext>
+            </a:extLst>
+          </p:cNvPr>
+          <p:cNvSpPr txBox="1"/>
+          <p:nvPr/>
+        </p:nvSpPr>
+        <p:spPr>
+          <a:xfrm>
+            <a:off x="1493210" y="3016523"/>
+            <a:ext cx="9205580" cy="3139321"/>
+          </a:xfrm>
+          <a:prstGeom prst="rect">
+            <a:avLst/>
+          </a:prstGeom>
+          <a:noFill/>
+        </p:spPr>
+        <p:txBody>
+          <a:bodyPr wrap="square">
+            <a:spAutoFit/>
+          </a:bodyPr>
+          <a:lstStyle/>
+          <a:p>
+            <a:pPr indent="0" algn="l">
+              <a:buNone/>
+            </a:pPr>
+            <a:r>
+              <a:rPr lang="en-US" sz="1800" b="0" i="0" dirty="0">
+                <a:solidFill>
+                  <a:schemeClr val="tx1"/>
+                </a:solidFill>
+                <a:effectLst/>
+                <a:latin typeface="+mn-lt"/>
+              </a:rPr>
+              <a:t># Enable Hibernate second-level cache</a:t>
+            </a:r>
+          </a:p>
+          <a:p>
+            <a:pPr indent="0" algn="l">
+              <a:buNone/>
+            </a:pPr>
+            <a:r>
+              <a:rPr lang="en-US" sz="1800" b="0" i="0" dirty="0" err="1">
+                <a:solidFill>
+                  <a:schemeClr val="tx1"/>
+                </a:solidFill>
+                <a:effectLst/>
+                <a:latin typeface="+mn-lt"/>
+              </a:rPr>
+              <a:t>spring.jpa.properties.hibernate.cache.use_second_level_cache</a:t>
+            </a:r>
+            <a:r>
+              <a:rPr lang="en-US" sz="1800" b="0" i="0" dirty="0">
+                <a:solidFill>
+                  <a:schemeClr val="tx1"/>
+                </a:solidFill>
+                <a:effectLst/>
+                <a:latin typeface="+mn-lt"/>
+              </a:rPr>
+              <a:t>=true</a:t>
+            </a:r>
+          </a:p>
+          <a:p>
+            <a:pPr indent="0" algn="l">
+              <a:buNone/>
+            </a:pPr>
+            <a:endParaRPr lang="en-US" sz="1800" b="0" i="0" dirty="0">
+              <a:solidFill>
+                <a:schemeClr val="tx1"/>
+              </a:solidFill>
+              <a:effectLst/>
+              <a:latin typeface="+mn-lt"/>
+            </a:endParaRPr>
+          </a:p>
+          <a:p>
+            <a:pPr indent="0" algn="l">
+              <a:buNone/>
+            </a:pPr>
+            <a:r>
+              <a:rPr lang="en-US" sz="1800" b="0" i="0" dirty="0">
+                <a:solidFill>
+                  <a:schemeClr val="tx1"/>
+                </a:solidFill>
+                <a:effectLst/>
+                <a:latin typeface="+mn-lt"/>
+              </a:rPr>
+              <a:t># Use </a:t>
+            </a:r>
+            <a:r>
+              <a:rPr lang="en-US" sz="1800" b="0" i="0" dirty="0" err="1">
+                <a:solidFill>
+                  <a:schemeClr val="tx1"/>
+                </a:solidFill>
+                <a:effectLst/>
+                <a:latin typeface="+mn-lt"/>
+              </a:rPr>
+              <a:t>JCache</a:t>
+            </a:r>
+            <a:r>
+              <a:rPr lang="en-US" sz="1800" b="0" i="0" dirty="0">
+                <a:solidFill>
+                  <a:schemeClr val="tx1"/>
+                </a:solidFill>
+                <a:effectLst/>
+                <a:latin typeface="+mn-lt"/>
+              </a:rPr>
+              <a:t> as the cache integration</a:t>
+            </a:r>
+          </a:p>
+          <a:p>
+            <a:pPr indent="0" algn="l">
+              <a:buNone/>
+            </a:pPr>
+            <a:r>
+              <a:rPr lang="en-US" sz="1800" b="0" i="0" dirty="0" err="1">
+                <a:solidFill>
+                  <a:schemeClr val="tx1"/>
+                </a:solidFill>
+                <a:effectLst/>
+                <a:latin typeface="+mn-lt"/>
+              </a:rPr>
+              <a:t>spring.jpa.properties.hibernate.cache.region.factory_class</a:t>
+            </a:r>
+            <a:r>
+              <a:rPr lang="en-US" sz="1800" b="0" i="0" dirty="0">
+                <a:solidFill>
+                  <a:schemeClr val="tx1"/>
+                </a:solidFill>
+                <a:effectLst/>
+                <a:latin typeface="+mn-lt"/>
+              </a:rPr>
+              <a:t>=</a:t>
+            </a:r>
+            <a:r>
+              <a:rPr lang="en-US" sz="1800" b="0" i="0" dirty="0" err="1">
+                <a:solidFill>
+                  <a:schemeClr val="tx1"/>
+                </a:solidFill>
+                <a:effectLst/>
+                <a:latin typeface="+mn-lt"/>
+              </a:rPr>
+              <a:t>jcache</a:t>
+            </a:r>
+            <a:endParaRPr lang="en-US" sz="1800" b="0" i="0" dirty="0">
+              <a:solidFill>
+                <a:schemeClr val="tx1"/>
+              </a:solidFill>
+              <a:effectLst/>
+              <a:latin typeface="+mn-lt"/>
+            </a:endParaRPr>
+          </a:p>
+          <a:p>
+            <a:pPr indent="0" algn="l">
+              <a:buNone/>
+            </a:pPr>
+            <a:endParaRPr lang="en-US" sz="1800" b="0" i="0" dirty="0">
+              <a:solidFill>
+                <a:schemeClr val="tx1"/>
+              </a:solidFill>
+              <a:effectLst/>
+              <a:latin typeface="+mn-lt"/>
+            </a:endParaRPr>
+          </a:p>
+          <a:p>
+            <a:pPr indent="0" algn="l">
+              <a:buNone/>
+            </a:pPr>
+            <a:r>
+              <a:rPr lang="en-US" sz="1800" b="0" i="0" dirty="0">
+                <a:solidFill>
+                  <a:schemeClr val="tx1"/>
+                </a:solidFill>
+                <a:effectLst/>
+                <a:latin typeface="+mn-lt"/>
+              </a:rPr>
+              <a:t># Specify the </a:t>
+            </a:r>
+            <a:r>
+              <a:rPr lang="en-US" sz="1800" b="0" i="0" dirty="0" err="1">
+                <a:solidFill>
+                  <a:schemeClr val="tx1"/>
+                </a:solidFill>
+                <a:effectLst/>
+                <a:latin typeface="+mn-lt"/>
+              </a:rPr>
+              <a:t>JCache</a:t>
+            </a:r>
+            <a:r>
+              <a:rPr lang="en-US" sz="1800" b="0" i="0" dirty="0">
+                <a:solidFill>
+                  <a:schemeClr val="tx1"/>
+                </a:solidFill>
+                <a:effectLst/>
+                <a:latin typeface="+mn-lt"/>
+              </a:rPr>
+              <a:t> provider configuration</a:t>
+            </a:r>
+          </a:p>
+          <a:p>
+            <a:pPr indent="0" algn="l">
+              <a:buNone/>
+            </a:pPr>
+            <a:r>
+              <a:rPr lang="en-US" sz="1800" b="0" i="0" dirty="0" err="1">
+                <a:solidFill>
+                  <a:schemeClr val="tx1"/>
+                </a:solidFill>
+                <a:effectLst/>
+                <a:latin typeface="+mn-lt"/>
+              </a:rPr>
+              <a:t>spring.jpa.properties.hibernate.javax.cache.provider</a:t>
+            </a:r>
+            <a:r>
+              <a:rPr lang="en-US" sz="1800" b="0" i="0" dirty="0">
+                <a:solidFill>
+                  <a:schemeClr val="tx1"/>
+                </a:solidFill>
+                <a:effectLst/>
+                <a:latin typeface="+mn-lt"/>
+              </a:rPr>
+              <a:t>=org.ehcache.jsr107.EhcacheCachingProvider</a:t>
+            </a:r>
+          </a:p>
+          <a:p>
+            <a:pPr indent="0" algn="l">
+              <a:buNone/>
+            </a:pPr>
+            <a:endParaRPr lang="en-US" sz="1800" b="0" i="0" dirty="0">
+              <a:solidFill>
+                <a:schemeClr val="tx1"/>
+              </a:solidFill>
+              <a:effectLst/>
+              <a:latin typeface="+mn-lt"/>
+            </a:endParaRPr>
+          </a:p>
+          <a:p>
+            <a:pPr indent="0" algn="l">
+              <a:buNone/>
+            </a:pPr>
+            <a:r>
+              <a:rPr lang="en-US" sz="1800" b="0" i="0" dirty="0">
+                <a:solidFill>
+                  <a:schemeClr val="tx1"/>
+                </a:solidFill>
+                <a:effectLst/>
+                <a:latin typeface="+mn-lt"/>
+              </a:rPr>
+              <a:t># Optional: enable query cache</a:t>
+            </a:r>
+          </a:p>
+          <a:p>
+            <a:pPr indent="0" algn="l">
+              <a:buNone/>
+            </a:pPr>
+            <a:r>
+              <a:rPr lang="en-US" sz="1800" b="0" i="0" dirty="0" err="1">
+                <a:solidFill>
+                  <a:schemeClr val="tx1"/>
+                </a:solidFill>
+                <a:effectLst/>
+                <a:latin typeface="+mn-lt"/>
+              </a:rPr>
+              <a:t>spring.jpa.properties.hibernate.cache.use_query_cache</a:t>
+            </a:r>
+            <a:r>
+              <a:rPr lang="en-US" sz="1800" b="0" i="0" dirty="0">
+                <a:solidFill>
+                  <a:schemeClr val="tx1"/>
+                </a:solidFill>
+                <a:effectLst/>
+                <a:latin typeface="+mn-lt"/>
+              </a:rPr>
+              <a:t>=true</a:t>
+            </a:r>
+            <a:endParaRPr lang="en-US" sz="1200" b="0" i="0" dirty="0">
+              <a:solidFill>
+                <a:srgbClr val="FFFFFF"/>
+              </a:solidFill>
+              <a:effectLst/>
+              <a:latin typeface="Courier New" panose="02070309020205020404" pitchFamily="49" charset="0"/>
+            </a:endParaRPr>
+          </a:p>
+        </p:txBody>
+      </p:sp>
+    </p:spTree>
+    <p:extLst>
+      <p:ext uri="{BB962C8B-B14F-4D97-AF65-F5344CB8AC3E}">
+        <p14:creationId xmlns:p14="http://schemas.microsoft.com/office/powerpoint/2010/main" val="2905551272"/>
+      </p:ext>
+    </p:extLst>
+  </p:cSld>
+  <p:clrMapOvr>
+    <a:masterClrMapping/>
+  </p:clrMapOvr>
+</p:sld>
+</file>
+
+<file path=ppt/slides/slide44.xml><?xml version="1.0" encoding="utf-8"?>
+<p:sld xmlns:a="http://schemas.openxmlformats.org/drawingml/2006/main" xmlns:r="http://schemas.openxmlformats.org/officeDocument/2006/relationships" xmlns:p="http://schemas.openxmlformats.org/presentationml/2006/main">
+  <p:cSld>
+    <p:spTree>
+      <p:nvGrpSpPr>
+        <p:cNvPr id="1" name=""/>
+        <p:cNvGrpSpPr/>
+        <p:nvPr/>
+      </p:nvGrpSpPr>
+      <p:grpSpPr>
+        <a:xfrm>
+          <a:off x="0" y="0"/>
+          <a:ext cx="0" cy="0"/>
+          <a:chOff x="0" y="0"/>
+          <a:chExt cx="0" cy="0"/>
+        </a:xfrm>
+      </p:grpSpPr>
+      <p:sp>
+        <p:nvSpPr>
+          <p:cNvPr id="2" name="Title 1">
+            <a:extLst>
+              <a:ext uri="{FF2B5EF4-FFF2-40B4-BE49-F238E27FC236}">
+                <a16:creationId xmlns:a16="http://schemas.microsoft.com/office/drawing/2014/main" id="{36A2C1FA-936C-1D85-5080-C28370130ECB}"/>
+              </a:ext>
+            </a:extLst>
+          </p:cNvPr>
+          <p:cNvSpPr>
+            <a:spLocks noGrp="1"/>
+          </p:cNvSpPr>
+          <p:nvPr>
+            <p:ph type="title"/>
+          </p:nvPr>
+        </p:nvSpPr>
+        <p:spPr/>
+        <p:txBody>
+          <a:bodyPr/>
+          <a:lstStyle/>
+          <a:p>
+            <a:r>
+              <a:rPr lang="en-US" dirty="0"/>
+              <a:t>Enabling l2 cache</a:t>
+            </a:r>
+          </a:p>
+        </p:txBody>
+      </p:sp>
+      <p:sp>
+        <p:nvSpPr>
+          <p:cNvPr id="3" name="Content Placeholder 2">
+            <a:extLst>
+              <a:ext uri="{FF2B5EF4-FFF2-40B4-BE49-F238E27FC236}">
+                <a16:creationId xmlns:a16="http://schemas.microsoft.com/office/drawing/2014/main" id="{0EEF90F2-01A3-086D-DA92-65EC60F17D87}"/>
+              </a:ext>
+            </a:extLst>
+          </p:cNvPr>
+          <p:cNvSpPr>
+            <a:spLocks noGrp="1"/>
+          </p:cNvSpPr>
+          <p:nvPr>
+            <p:ph idx="1"/>
+          </p:nvPr>
+        </p:nvSpPr>
+        <p:spPr>
+          <a:xfrm>
+            <a:off x="474867" y="2180497"/>
+            <a:ext cx="4320418" cy="2242648"/>
+          </a:xfrm>
+        </p:spPr>
+        <p:txBody>
+          <a:bodyPr>
+            <a:normAutofit/>
+          </a:bodyPr>
+          <a:lstStyle/>
+          <a:p>
+            <a:r>
+              <a:rPr lang="en-US" sz="1600" dirty="0"/>
+              <a:t>Step 3: Mark entities we’d like to cache</a:t>
+            </a:r>
+          </a:p>
+          <a:p>
+            <a:pPr lvl="0"/>
+            <a:r>
+              <a:rPr lang="en-US" sz="1600" dirty="0"/>
+              <a:t>@Cacheable — opts the entity into JPA shared-cache eligibility.</a:t>
+            </a:r>
+          </a:p>
+          <a:p>
+            <a:pPr lvl="0"/>
+            <a:r>
+              <a:rPr lang="en-US" sz="1600" dirty="0"/>
+              <a:t>@Cache(usage = </a:t>
+            </a:r>
+            <a:r>
+              <a:rPr lang="en-US" sz="1600" dirty="0" err="1"/>
+              <a:t>CacheConcurrencyStrategy.READ_WRITE</a:t>
+            </a:r>
+            <a:r>
+              <a:rPr lang="en-US" sz="1600" dirty="0"/>
+              <a:t>) — configures </a:t>
+            </a:r>
+            <a:r>
+              <a:rPr lang="en-US" sz="1600" dirty="0" err="1"/>
+              <a:t>Hibernate's</a:t>
+            </a:r>
+            <a:r>
+              <a:rPr lang="en-US" sz="1600" dirty="0"/>
+              <a:t> cache concurrency strategy.</a:t>
+            </a:r>
+          </a:p>
+          <a:p>
+            <a:endParaRPr lang="en-US" sz="1600" dirty="0"/>
+          </a:p>
+        </p:txBody>
+      </p:sp>
+      <p:sp>
+        <p:nvSpPr>
+          <p:cNvPr id="5" name="TextBox 4">
+            <a:extLst>
+              <a:ext uri="{FF2B5EF4-FFF2-40B4-BE49-F238E27FC236}">
+                <a16:creationId xmlns:a16="http://schemas.microsoft.com/office/drawing/2014/main" id="{E5B7AEA9-01C1-E675-BE33-69DEFD6D9715}"/>
+              </a:ext>
+            </a:extLst>
+          </p:cNvPr>
+          <p:cNvSpPr txBox="1"/>
+          <p:nvPr/>
+        </p:nvSpPr>
+        <p:spPr>
+          <a:xfrm>
+            <a:off x="6096000" y="2182505"/>
+            <a:ext cx="6097772" cy="2492990"/>
+          </a:xfrm>
+          <a:prstGeom prst="rect">
+            <a:avLst/>
+          </a:prstGeom>
+          <a:noFill/>
+        </p:spPr>
+        <p:txBody>
+          <a:bodyPr wrap="square">
+            <a:spAutoFit/>
+          </a:bodyPr>
+          <a:lstStyle/>
+          <a:p>
+            <a:pPr indent="0" algn="l">
+              <a:buNone/>
+            </a:pPr>
+            <a:r>
+              <a:rPr lang="en-US" sz="1800" b="0" i="0" dirty="0">
+                <a:solidFill>
+                  <a:schemeClr val="tx1"/>
+                </a:solidFill>
+                <a:effectLst/>
+                <a:latin typeface="+mn-lt"/>
+              </a:rPr>
+              <a:t>@Entity</a:t>
+            </a:r>
+          </a:p>
+          <a:p>
+            <a:pPr indent="0" algn="l">
+              <a:buNone/>
+            </a:pPr>
+            <a:r>
+              <a:rPr lang="en-US" sz="1800" b="0" i="0" dirty="0">
+                <a:solidFill>
+                  <a:schemeClr val="tx1"/>
+                </a:solidFill>
+                <a:effectLst/>
+                <a:latin typeface="+mn-lt"/>
+              </a:rPr>
+              <a:t>@Table(name = "products")</a:t>
+            </a:r>
+          </a:p>
+          <a:p>
+            <a:pPr indent="0" algn="l">
+              <a:buNone/>
+            </a:pPr>
+            <a:r>
+              <a:rPr lang="en-US" sz="1800" b="0" i="0" dirty="0">
+                <a:solidFill>
+                  <a:schemeClr val="tx1"/>
+                </a:solidFill>
+                <a:effectLst/>
+                <a:latin typeface="+mn-lt"/>
+              </a:rPr>
+              <a:t>@Cacheable</a:t>
+            </a:r>
+          </a:p>
+          <a:p>
+            <a:pPr indent="0" algn="l">
+              <a:buNone/>
+            </a:pPr>
+            <a:r>
+              <a:rPr lang="en-US" sz="1800" b="0" i="0" dirty="0">
+                <a:solidFill>
+                  <a:schemeClr val="tx1"/>
+                </a:solidFill>
+                <a:effectLst/>
+                <a:latin typeface="+mn-lt"/>
+              </a:rPr>
+              <a:t>@Cache(usage = </a:t>
+            </a:r>
+            <a:r>
+              <a:rPr lang="en-US" sz="1800" b="0" i="0" dirty="0" err="1">
+                <a:solidFill>
+                  <a:schemeClr val="tx1"/>
+                </a:solidFill>
+                <a:effectLst/>
+                <a:latin typeface="+mn-lt"/>
+              </a:rPr>
+              <a:t>CacheConcurrencyStrategy.READ_WRITE</a:t>
+            </a:r>
+            <a:r>
+              <a:rPr lang="en-US" sz="1800" b="0" i="0" dirty="0">
+                <a:solidFill>
+                  <a:schemeClr val="tx1"/>
+                </a:solidFill>
+                <a:effectLst/>
+                <a:latin typeface="+mn-lt"/>
+              </a:rPr>
+              <a:t>)</a:t>
+            </a:r>
+          </a:p>
+          <a:p>
+            <a:pPr indent="0" algn="l">
+              <a:buNone/>
+            </a:pPr>
+            <a:r>
+              <a:rPr lang="en-US" sz="1800" b="0" i="0" dirty="0">
+                <a:solidFill>
+                  <a:schemeClr val="tx1"/>
+                </a:solidFill>
+                <a:effectLst/>
+                <a:latin typeface="+mn-lt"/>
+              </a:rPr>
+              <a:t>public class Product {</a:t>
+            </a:r>
+          </a:p>
+          <a:p>
+            <a:pPr indent="0" algn="l">
+              <a:buNone/>
+            </a:pPr>
+            <a:endParaRPr lang="en-US" sz="1800" b="0" i="0" dirty="0">
+              <a:solidFill>
+                <a:schemeClr val="tx1"/>
+              </a:solidFill>
+              <a:effectLst/>
+              <a:latin typeface="+mn-lt"/>
+            </a:endParaRPr>
+          </a:p>
+          <a:p>
+            <a:pPr indent="0" algn="l">
+              <a:buNone/>
+            </a:pPr>
+            <a:r>
+              <a:rPr lang="en-US" sz="1800" b="0" i="0" dirty="0">
+                <a:solidFill>
+                  <a:schemeClr val="tx1"/>
+                </a:solidFill>
+                <a:effectLst/>
+                <a:latin typeface="+mn-lt"/>
+              </a:rPr>
+              <a:t>    @Id</a:t>
+            </a:r>
+          </a:p>
+          <a:p>
+            <a:pPr indent="0" algn="l">
+              <a:buNone/>
+            </a:pPr>
+            <a:r>
+              <a:rPr lang="en-US" sz="1800" b="0" i="0" dirty="0">
+                <a:solidFill>
+                  <a:schemeClr val="tx1"/>
+                </a:solidFill>
+                <a:effectLst/>
+                <a:latin typeface="+mn-lt"/>
+              </a:rPr>
+              <a:t>    private Long id;</a:t>
+            </a:r>
+          </a:p>
+          <a:p>
+            <a:pPr indent="0" algn="l">
+              <a:buNone/>
+            </a:pPr>
+            <a:endParaRPr lang="en-US" sz="1800" b="0" i="0" dirty="0">
+              <a:solidFill>
+                <a:schemeClr val="tx1"/>
+              </a:solidFill>
+              <a:effectLst/>
+              <a:latin typeface="+mn-lt"/>
+            </a:endParaRPr>
+          </a:p>
+          <a:p>
+            <a:pPr indent="0" algn="l">
+              <a:buNone/>
+            </a:pPr>
+            <a:r>
+              <a:rPr lang="en-US" sz="1800" b="0" i="0" dirty="0">
+                <a:solidFill>
+                  <a:schemeClr val="tx1"/>
+                </a:solidFill>
+                <a:effectLst/>
+                <a:latin typeface="+mn-lt"/>
+              </a:rPr>
+              <a:t>    private String name;</a:t>
+            </a:r>
+          </a:p>
+          <a:p>
+            <a:pPr indent="0" algn="l">
+              <a:buNone/>
+            </a:pPr>
+            <a:endParaRPr lang="en-US" sz="1800" b="0" i="0" dirty="0">
+              <a:solidFill>
+                <a:schemeClr val="tx1"/>
+              </a:solidFill>
+              <a:effectLst/>
+              <a:latin typeface="+mn-lt"/>
+            </a:endParaRPr>
+          </a:p>
+          <a:p>
+            <a:pPr indent="0" algn="l">
+              <a:buNone/>
+            </a:pPr>
+            <a:r>
+              <a:rPr lang="en-US" sz="1800" b="0" i="0" dirty="0">
+                <a:solidFill>
+                  <a:schemeClr val="tx1"/>
+                </a:solidFill>
+                <a:effectLst/>
+                <a:latin typeface="+mn-lt"/>
+              </a:rPr>
+              <a:t>    // Getters and setters</a:t>
+            </a:r>
+          </a:p>
+          <a:p>
+            <a:pPr indent="0" algn="l">
+              <a:buNone/>
+            </a:pPr>
+            <a:r>
+              <a:rPr lang="en-US" sz="1800" b="0" i="0" dirty="0">
+                <a:solidFill>
+                  <a:schemeClr val="tx1"/>
+                </a:solidFill>
+                <a:effectLst/>
+                <a:latin typeface="+mn-lt"/>
+              </a:rPr>
+              <a:t>}</a:t>
+            </a:r>
+            <a:endParaRPr lang="en-US" sz="1200" b="0" i="0" dirty="0">
+              <a:solidFill>
+                <a:srgbClr val="FFFFFF"/>
+              </a:solidFill>
+              <a:effectLst/>
+              <a:latin typeface="Courier New" panose="02070309020205020404" pitchFamily="49" charset="0"/>
+            </a:endParaRPr>
+          </a:p>
+        </p:txBody>
+      </p:sp>
+      <p:graphicFrame>
+        <p:nvGraphicFramePr>
+          <p:cNvPr id="6" name="Table 5">
+            <a:extLst>
+              <a:ext uri="{FF2B5EF4-FFF2-40B4-BE49-F238E27FC236}">
+                <a16:creationId xmlns:a16="http://schemas.microsoft.com/office/drawing/2014/main" id="{5043BD7C-2105-6D7C-905C-61D80D0D0380}"/>
+              </a:ext>
+            </a:extLst>
+          </p:cNvPr>
+          <p:cNvGraphicFramePr>
+            <a:graphicFrameLocks noGrp="1"/>
+          </p:cNvGraphicFramePr>
+          <p:nvPr>
+            <p:extLst>
+              <p:ext uri="{D42A27DB-BD31-4B8C-83A1-F6EECF244321}">
+                <p14:modId xmlns:p14="http://schemas.microsoft.com/office/powerpoint/2010/main" val="2397007252"/>
+              </p:ext>
+            </p:extLst>
+          </p:nvPr>
+        </p:nvGraphicFramePr>
+        <p:xfrm>
+          <a:off x="697983" y="4288891"/>
+          <a:ext cx="5054232" cy="2322992"/>
+        </p:xfrm>
+        <a:graphic>
+          <a:graphicData uri="http://schemas.openxmlformats.org/drawingml/2006/table">
+            <a:tbl>
+              <a:tblPr>
+                <a:tableStyleId>{5C22544A-7EE6-4342-B048-85BDC9FD1C3A}</a:tableStyleId>
+              </a:tblPr>
+              <a:tblGrid>
+                <a:gridCol w="2527116">
+                  <a:extLst>
+                    <a:ext uri="{9D8B030D-6E8A-4147-A177-3AD203B41FA5}">
+                      <a16:colId xmlns:a16="http://schemas.microsoft.com/office/drawing/2014/main" val="1250777446"/>
+                    </a:ext>
+                  </a:extLst>
+                </a:gridCol>
+                <a:gridCol w="2527116">
+                  <a:extLst>
+                    <a:ext uri="{9D8B030D-6E8A-4147-A177-3AD203B41FA5}">
+                      <a16:colId xmlns:a16="http://schemas.microsoft.com/office/drawing/2014/main" val="1199859608"/>
+                    </a:ext>
+                  </a:extLst>
+                </a:gridCol>
+              </a:tblGrid>
+              <a:tr h="369016">
+                <a:tc>
+                  <a:txBody>
+                    <a:bodyPr/>
+                    <a:lstStyle/>
+                    <a:p>
+                      <a:pPr marL="0" marR="0" algn="l" fontAlgn="t">
+                        <a:buNone/>
+                      </a:pPr>
+                      <a:r>
+                        <a:rPr lang="en-US" sz="1200" b="1" spc="0">
+                          <a:effectLst/>
+                        </a:rPr>
+                        <a:t>Strategy</a:t>
+                      </a:r>
+                      <a:endParaRPr lang="en-US" sz="1200" b="1" i="0" spc="0">
+                        <a:solidFill>
+                          <a:srgbClr val="FFFFFF"/>
+                        </a:solidFill>
+                        <a:effectLst/>
+                        <a:latin typeface="-apple-system-body"/>
+                      </a:endParaRPr>
+                    </a:p>
+                  </a:txBody>
+                  <a:tcPr marT="50800" marB="50800"/>
+                </a:tc>
+                <a:tc>
+                  <a:txBody>
+                    <a:bodyPr/>
+                    <a:lstStyle/>
+                    <a:p>
+                      <a:pPr marL="0" marR="0" algn="l" fontAlgn="t">
+                        <a:buNone/>
+                      </a:pPr>
+                      <a:r>
+                        <a:rPr lang="en-US" sz="1200" b="1" spc="0" dirty="0">
+                          <a:effectLst/>
+                        </a:rPr>
+                        <a:t>Best use case</a:t>
+                      </a:r>
+                      <a:endParaRPr lang="en-US" sz="1200" b="1" i="0" spc="0" dirty="0">
+                        <a:solidFill>
+                          <a:srgbClr val="FFFFFF"/>
+                        </a:solidFill>
+                        <a:effectLst/>
+                        <a:latin typeface="-apple-system-body"/>
+                      </a:endParaRPr>
+                    </a:p>
+                  </a:txBody>
+                  <a:tcPr marT="50800" marB="50800"/>
+                </a:tc>
+                <a:extLst>
+                  <a:ext uri="{0D108BD9-81ED-4DB2-BD59-A6C34878D82A}">
+                    <a16:rowId xmlns:a16="http://schemas.microsoft.com/office/drawing/2014/main" val="780414593"/>
+                  </a:ext>
+                </a:extLst>
+              </a:tr>
+              <a:tr h="369016">
+                <a:tc>
+                  <a:txBody>
+                    <a:bodyPr/>
+                    <a:lstStyle/>
+                    <a:p>
+                      <a:pPr marL="0" marR="0" algn="l" fontAlgn="t">
+                        <a:buNone/>
+                      </a:pPr>
+                      <a:r>
+                        <a:rPr lang="en-US" sz="1200" spc="0">
+                          <a:effectLst/>
+                        </a:rPr>
+                        <a:t>READ_ONLY</a:t>
+                      </a:r>
+                      <a:endParaRPr lang="en-US" sz="1200" b="0" i="0" spc="0">
+                        <a:solidFill>
+                          <a:srgbClr val="FFFFFF"/>
+                        </a:solidFill>
+                        <a:effectLst/>
+                        <a:latin typeface="-apple-system-body"/>
+                      </a:endParaRPr>
+                    </a:p>
+                  </a:txBody>
+                  <a:tcPr marT="50800" marB="50800"/>
+                </a:tc>
+                <a:tc>
+                  <a:txBody>
+                    <a:bodyPr/>
+                    <a:lstStyle/>
+                    <a:p>
+                      <a:pPr marL="0" marR="0" algn="l" fontAlgn="t">
+                        <a:buNone/>
+                      </a:pPr>
+                      <a:r>
+                        <a:rPr lang="en-US" sz="1200" spc="0" dirty="0">
+                          <a:effectLst/>
+                        </a:rPr>
+                        <a:t>Reference data that never changes</a:t>
+                      </a:r>
+                      <a:endParaRPr lang="en-US" sz="1200" b="0" i="0" spc="0" dirty="0">
+                        <a:solidFill>
+                          <a:srgbClr val="FFFFFF"/>
+                        </a:solidFill>
+                        <a:effectLst/>
+                        <a:latin typeface="-apple-system-body"/>
+                      </a:endParaRPr>
+                    </a:p>
+                  </a:txBody>
+                  <a:tcPr marT="50800" marB="50800"/>
+                </a:tc>
+                <a:extLst>
+                  <a:ext uri="{0D108BD9-81ED-4DB2-BD59-A6C34878D82A}">
+                    <a16:rowId xmlns:a16="http://schemas.microsoft.com/office/drawing/2014/main" val="111919716"/>
+                  </a:ext>
+                </a:extLst>
+              </a:tr>
+              <a:tr h="369016">
+                <a:tc>
+                  <a:txBody>
+                    <a:bodyPr/>
+                    <a:lstStyle/>
+                    <a:p>
+                      <a:pPr marL="0" marR="0" algn="l" fontAlgn="t">
+                        <a:buNone/>
+                      </a:pPr>
+                      <a:r>
+                        <a:rPr lang="en-US" sz="1200" spc="0">
+                          <a:effectLst/>
+                        </a:rPr>
+                        <a:t>READ_WRITE</a:t>
+                      </a:r>
+                      <a:endParaRPr lang="en-US" sz="1200" b="0" i="0" spc="0">
+                        <a:solidFill>
+                          <a:srgbClr val="FFFFFF"/>
+                        </a:solidFill>
+                        <a:effectLst/>
+                        <a:latin typeface="-apple-system-body"/>
+                      </a:endParaRPr>
+                    </a:p>
+                  </a:txBody>
+                  <a:tcPr marT="50800" marB="50800"/>
+                </a:tc>
+                <a:tc>
+                  <a:txBody>
+                    <a:bodyPr/>
+                    <a:lstStyle/>
+                    <a:p>
+                      <a:pPr marL="0" marR="0" algn="l" fontAlgn="t">
+                        <a:buNone/>
+                      </a:pPr>
+                      <a:r>
+                        <a:rPr lang="en-US" sz="1200" spc="0">
+                          <a:effectLst/>
+                        </a:rPr>
+                        <a:t>Data that changes occasionally and needs Hibernate-managed consistency</a:t>
+                      </a:r>
+                      <a:endParaRPr lang="en-US" sz="1200" b="0" i="0" spc="0">
+                        <a:solidFill>
+                          <a:srgbClr val="FFFFFF"/>
+                        </a:solidFill>
+                        <a:effectLst/>
+                        <a:latin typeface="-apple-system-body"/>
+                      </a:endParaRPr>
+                    </a:p>
+                  </a:txBody>
+                  <a:tcPr marT="50800" marB="50800"/>
+                </a:tc>
+                <a:extLst>
+                  <a:ext uri="{0D108BD9-81ED-4DB2-BD59-A6C34878D82A}">
+                    <a16:rowId xmlns:a16="http://schemas.microsoft.com/office/drawing/2014/main" val="909195843"/>
+                  </a:ext>
+                </a:extLst>
+              </a:tr>
+              <a:tr h="369016">
+                <a:tc>
+                  <a:txBody>
+                    <a:bodyPr/>
+                    <a:lstStyle/>
+                    <a:p>
+                      <a:pPr marL="0" marR="0" algn="l" fontAlgn="t">
+                        <a:buNone/>
+                      </a:pPr>
+                      <a:r>
+                        <a:rPr lang="en-US" sz="1200" spc="0">
+                          <a:effectLst/>
+                        </a:rPr>
+                        <a:t>NONSTRICT_READ_WRITE</a:t>
+                      </a:r>
+                      <a:endParaRPr lang="en-US" sz="1200" b="0" i="0" spc="0">
+                        <a:solidFill>
+                          <a:srgbClr val="FFFFFF"/>
+                        </a:solidFill>
+                        <a:effectLst/>
+                        <a:latin typeface="-apple-system-body"/>
+                      </a:endParaRPr>
+                    </a:p>
+                  </a:txBody>
+                  <a:tcPr marT="50800" marB="50800"/>
+                </a:tc>
+                <a:tc>
+                  <a:txBody>
+                    <a:bodyPr/>
+                    <a:lstStyle/>
+                    <a:p>
+                      <a:pPr marL="0" marR="0" algn="l" fontAlgn="t">
+                        <a:buNone/>
+                      </a:pPr>
+                      <a:r>
+                        <a:rPr lang="en-US" sz="1200" spc="0">
+                          <a:effectLst/>
+                        </a:rPr>
+                        <a:t>Data where occasional stale reads are acceptable</a:t>
+                      </a:r>
+                      <a:endParaRPr lang="en-US" sz="1200" b="0" i="0" spc="0">
+                        <a:solidFill>
+                          <a:srgbClr val="FFFFFF"/>
+                        </a:solidFill>
+                        <a:effectLst/>
+                        <a:latin typeface="-apple-system-body"/>
+                      </a:endParaRPr>
+                    </a:p>
+                  </a:txBody>
+                  <a:tcPr marT="50800" marB="50800"/>
+                </a:tc>
+                <a:extLst>
+                  <a:ext uri="{0D108BD9-81ED-4DB2-BD59-A6C34878D82A}">
+                    <a16:rowId xmlns:a16="http://schemas.microsoft.com/office/drawing/2014/main" val="656607354"/>
+                  </a:ext>
+                </a:extLst>
+              </a:tr>
+              <a:tr h="369016">
+                <a:tc>
+                  <a:txBody>
+                    <a:bodyPr/>
+                    <a:lstStyle/>
+                    <a:p>
+                      <a:pPr marL="0" marR="0" algn="l" fontAlgn="t">
+                        <a:buNone/>
+                      </a:pPr>
+                      <a:r>
+                        <a:rPr lang="en-US" sz="1200" spc="0">
+                          <a:effectLst/>
+                        </a:rPr>
+                        <a:t>TRANSACTIONAL</a:t>
+                      </a:r>
+                      <a:endParaRPr lang="en-US" sz="1200" b="0" i="0" spc="0">
+                        <a:solidFill>
+                          <a:srgbClr val="FFFFFF"/>
+                        </a:solidFill>
+                        <a:effectLst/>
+                        <a:latin typeface="-apple-system-body"/>
+                      </a:endParaRPr>
+                    </a:p>
+                  </a:txBody>
+                  <a:tcPr marT="50800" marB="50800"/>
+                </a:tc>
+                <a:tc>
+                  <a:txBody>
+                    <a:bodyPr/>
+                    <a:lstStyle/>
+                    <a:p>
+                      <a:pPr marL="0" marR="0" algn="l" fontAlgn="t">
+                        <a:buNone/>
+                      </a:pPr>
+                      <a:r>
+                        <a:rPr lang="en-US" sz="1200" spc="0" dirty="0">
+                          <a:effectLst/>
+                        </a:rPr>
+                        <a:t>Transactional caching supported by the chosen provider</a:t>
+                      </a:r>
+                      <a:endParaRPr lang="en-US" sz="1200" b="0" i="0" spc="0" dirty="0">
+                        <a:solidFill>
+                          <a:srgbClr val="FFFFFF"/>
+                        </a:solidFill>
+                        <a:effectLst/>
+                        <a:latin typeface="-apple-system-body"/>
+                      </a:endParaRPr>
+                    </a:p>
+                  </a:txBody>
+                  <a:tcPr marT="50800" marB="50800"/>
+                </a:tc>
+                <a:extLst>
+                  <a:ext uri="{0D108BD9-81ED-4DB2-BD59-A6C34878D82A}">
+                    <a16:rowId xmlns:a16="http://schemas.microsoft.com/office/drawing/2014/main" val="3349802421"/>
+                  </a:ext>
+                </a:extLst>
+              </a:tr>
+            </a:tbl>
+          </a:graphicData>
+        </a:graphic>
+      </p:graphicFrame>
+    </p:spTree>
+    <p:extLst>
+      <p:ext uri="{BB962C8B-B14F-4D97-AF65-F5344CB8AC3E}">
+        <p14:creationId xmlns:p14="http://schemas.microsoft.com/office/powerpoint/2010/main" val="147442879"/>
+      </p:ext>
+    </p:extLst>
+  </p:cSld>
+  <p:clrMapOvr>
+    <a:masterClrMapping/>
+  </p:clrMapOvr>
+</p:sld>
+</file>
+
+<file path=ppt/slides/slide45.xml><?xml version="1.0" encoding="utf-8"?>
+<p:sld xmlns:a="http://schemas.openxmlformats.org/drawingml/2006/main" xmlns:r="http://schemas.openxmlformats.org/officeDocument/2006/relationships" xmlns:p="http://schemas.openxmlformats.org/presentationml/2006/main">
+  <p:cSld>
+    <p:spTree>
+      <p:nvGrpSpPr>
+        <p:cNvPr id="1" name=""/>
+        <p:cNvGrpSpPr/>
+        <p:nvPr/>
+      </p:nvGrpSpPr>
+      <p:grpSpPr>
+        <a:xfrm>
+          <a:off x="0" y="0"/>
+          <a:ext cx="0" cy="0"/>
+          <a:chOff x="0" y="0"/>
+          <a:chExt cx="0" cy="0"/>
+        </a:xfrm>
+      </p:grpSpPr>
+      <p:sp>
+        <p:nvSpPr>
+          <p:cNvPr id="2" name="Title 1">
+            <a:extLst>
+              <a:ext uri="{FF2B5EF4-FFF2-40B4-BE49-F238E27FC236}">
+                <a16:creationId xmlns:a16="http://schemas.microsoft.com/office/drawing/2014/main" id="{67CD06FE-FDA3-9C05-3808-44A2794CC08C}"/>
+              </a:ext>
+            </a:extLst>
+          </p:cNvPr>
+          <p:cNvSpPr>
+            <a:spLocks noGrp="1"/>
+          </p:cNvSpPr>
+          <p:nvPr>
+            <p:ph type="title"/>
+          </p:nvPr>
+        </p:nvSpPr>
+        <p:spPr/>
+        <p:txBody>
+          <a:bodyPr>
+            <a:normAutofit/>
+          </a:bodyPr>
+          <a:lstStyle/>
+          <a:p>
+            <a:r>
+              <a:rPr lang="en-US" sz="2400" dirty="0"/>
+              <a:t>Enabling service-level caching (Spring cache) with caffeine</a:t>
+            </a:r>
+          </a:p>
+        </p:txBody>
+      </p:sp>
+      <p:sp>
+        <p:nvSpPr>
+          <p:cNvPr id="3" name="Content Placeholder 2">
+            <a:extLst>
+              <a:ext uri="{FF2B5EF4-FFF2-40B4-BE49-F238E27FC236}">
+                <a16:creationId xmlns:a16="http://schemas.microsoft.com/office/drawing/2014/main" id="{D9B12220-3158-51AB-196D-B449A760ED92}"/>
+              </a:ext>
+            </a:extLst>
+          </p:cNvPr>
+          <p:cNvSpPr>
+            <a:spLocks noGrp="1"/>
+          </p:cNvSpPr>
+          <p:nvPr>
+            <p:ph idx="1"/>
+          </p:nvPr>
+        </p:nvSpPr>
+        <p:spPr>
+          <a:xfrm>
+            <a:off x="581193" y="2180496"/>
+            <a:ext cx="4586230" cy="3678303"/>
+          </a:xfrm>
+        </p:spPr>
+        <p:txBody>
+          <a:bodyPr/>
+          <a:lstStyle/>
+          <a:p>
+            <a:r>
+              <a:rPr lang="en-US" dirty="0"/>
+              <a:t>Step 1: Add dependencies</a:t>
+            </a:r>
+          </a:p>
+        </p:txBody>
+      </p:sp>
+      <p:sp>
+        <p:nvSpPr>
+          <p:cNvPr id="5" name="TextBox 4">
+            <a:extLst>
+              <a:ext uri="{FF2B5EF4-FFF2-40B4-BE49-F238E27FC236}">
+                <a16:creationId xmlns:a16="http://schemas.microsoft.com/office/drawing/2014/main" id="{ED2445F5-EBD9-7C22-3A85-9F8AB4F81E33}"/>
+              </a:ext>
+            </a:extLst>
+          </p:cNvPr>
+          <p:cNvSpPr txBox="1"/>
+          <p:nvPr/>
+        </p:nvSpPr>
+        <p:spPr>
+          <a:xfrm>
+            <a:off x="5513035" y="2367171"/>
+            <a:ext cx="6097772" cy="2123658"/>
+          </a:xfrm>
+          <a:prstGeom prst="rect">
+            <a:avLst/>
+          </a:prstGeom>
+          <a:noFill/>
+        </p:spPr>
+        <p:txBody>
+          <a:bodyPr wrap="square">
+            <a:spAutoFit/>
+          </a:bodyPr>
+          <a:lstStyle/>
+          <a:p>
+            <a:pPr indent="0" algn="l">
+              <a:buNone/>
+            </a:pPr>
+            <a:r>
+              <a:rPr lang="en-US" sz="1800" b="0" i="0" dirty="0">
+                <a:solidFill>
+                  <a:schemeClr val="tx1"/>
+                </a:solidFill>
+                <a:effectLst/>
+                <a:latin typeface="+mn-lt"/>
+              </a:rPr>
+              <a:t>&lt;!-- Spring caching abstraction --&gt;</a:t>
+            </a:r>
+          </a:p>
+          <a:p>
+            <a:pPr indent="0" algn="l">
+              <a:buNone/>
+            </a:pPr>
+            <a:r>
+              <a:rPr lang="en-US" sz="1800" b="0" i="0" dirty="0">
+                <a:solidFill>
+                  <a:schemeClr val="tx1"/>
+                </a:solidFill>
+                <a:effectLst/>
+                <a:latin typeface="+mn-lt"/>
+              </a:rPr>
+              <a:t>    &lt;dependency&gt;</a:t>
+            </a:r>
+          </a:p>
+          <a:p>
+            <a:pPr indent="0" algn="l">
+              <a:buNone/>
+            </a:pPr>
+            <a:r>
+              <a:rPr lang="en-US" sz="1800" b="0" i="0" dirty="0">
+                <a:solidFill>
+                  <a:schemeClr val="tx1"/>
+                </a:solidFill>
+                <a:effectLst/>
+                <a:latin typeface="+mn-lt"/>
+              </a:rPr>
+              <a:t>        &lt;</a:t>
+            </a:r>
+            <a:r>
+              <a:rPr lang="en-US" sz="1800" b="0" i="0" dirty="0" err="1">
+                <a:solidFill>
+                  <a:schemeClr val="tx1"/>
+                </a:solidFill>
+                <a:effectLst/>
+                <a:latin typeface="+mn-lt"/>
+              </a:rPr>
+              <a:t>groupId</a:t>
+            </a:r>
+            <a:r>
+              <a:rPr lang="en-US" sz="1800" b="0" i="0" dirty="0">
+                <a:solidFill>
+                  <a:schemeClr val="tx1"/>
+                </a:solidFill>
+                <a:effectLst/>
+                <a:latin typeface="+mn-lt"/>
+              </a:rPr>
+              <a:t>&gt;</a:t>
+            </a:r>
+            <a:r>
+              <a:rPr lang="en-US" sz="1800" b="0" i="0" dirty="0" err="1">
+                <a:solidFill>
+                  <a:schemeClr val="tx1"/>
+                </a:solidFill>
+                <a:effectLst/>
+                <a:latin typeface="+mn-lt"/>
+              </a:rPr>
+              <a:t>org.springframework.boot</a:t>
+            </a:r>
+            <a:r>
+              <a:rPr lang="en-US" sz="1800" b="0" i="0" dirty="0">
+                <a:solidFill>
+                  <a:schemeClr val="tx1"/>
+                </a:solidFill>
+                <a:effectLst/>
+                <a:latin typeface="+mn-lt"/>
+              </a:rPr>
+              <a:t>&lt;/</a:t>
+            </a:r>
+            <a:r>
+              <a:rPr lang="en-US" sz="1800" b="0" i="0" dirty="0" err="1">
+                <a:solidFill>
+                  <a:schemeClr val="tx1"/>
+                </a:solidFill>
+                <a:effectLst/>
+                <a:latin typeface="+mn-lt"/>
+              </a:rPr>
+              <a:t>groupId</a:t>
+            </a:r>
+            <a:r>
+              <a:rPr lang="en-US" sz="1800" b="0" i="0" dirty="0">
+                <a:solidFill>
+                  <a:schemeClr val="tx1"/>
+                </a:solidFill>
+                <a:effectLst/>
+                <a:latin typeface="+mn-lt"/>
+              </a:rPr>
+              <a:t>&gt;</a:t>
+            </a:r>
+          </a:p>
+          <a:p>
+            <a:pPr indent="0" algn="l">
+              <a:buNone/>
+            </a:pPr>
+            <a:r>
+              <a:rPr lang="en-US" sz="1800" b="0" i="0" dirty="0">
+                <a:solidFill>
+                  <a:schemeClr val="tx1"/>
+                </a:solidFill>
+                <a:effectLst/>
+                <a:latin typeface="+mn-lt"/>
+              </a:rPr>
+              <a:t>        &lt;</a:t>
+            </a:r>
+            <a:r>
+              <a:rPr lang="en-US" sz="1800" b="0" i="0" dirty="0" err="1">
+                <a:solidFill>
+                  <a:schemeClr val="tx1"/>
+                </a:solidFill>
+                <a:effectLst/>
+                <a:latin typeface="+mn-lt"/>
+              </a:rPr>
+              <a:t>artifactId</a:t>
+            </a:r>
+            <a:r>
+              <a:rPr lang="en-US" sz="1800" b="0" i="0" dirty="0">
+                <a:solidFill>
+                  <a:schemeClr val="tx1"/>
+                </a:solidFill>
+                <a:effectLst/>
+                <a:latin typeface="+mn-lt"/>
+              </a:rPr>
+              <a:t>&gt;spring-boot-starter-cache&lt;/</a:t>
+            </a:r>
+            <a:r>
+              <a:rPr lang="en-US" sz="1800" b="0" i="0" dirty="0" err="1">
+                <a:solidFill>
+                  <a:schemeClr val="tx1"/>
+                </a:solidFill>
+                <a:effectLst/>
+                <a:latin typeface="+mn-lt"/>
+              </a:rPr>
+              <a:t>artifactId</a:t>
+            </a:r>
+            <a:r>
+              <a:rPr lang="en-US" sz="1800" b="0" i="0" dirty="0">
+                <a:solidFill>
+                  <a:schemeClr val="tx1"/>
+                </a:solidFill>
+                <a:effectLst/>
+                <a:latin typeface="+mn-lt"/>
+              </a:rPr>
+              <a:t>&gt;</a:t>
+            </a:r>
+          </a:p>
+          <a:p>
+            <a:pPr indent="0" algn="l">
+              <a:buNone/>
+            </a:pPr>
+            <a:r>
+              <a:rPr lang="en-US" sz="1800" b="0" i="0" dirty="0">
+                <a:solidFill>
+                  <a:schemeClr val="tx1"/>
+                </a:solidFill>
+                <a:effectLst/>
+                <a:latin typeface="+mn-lt"/>
+              </a:rPr>
+              <a:t>    &lt;/dependency&gt;</a:t>
+            </a:r>
+          </a:p>
+          <a:p>
+            <a:pPr indent="0" algn="l">
+              <a:buNone/>
+            </a:pPr>
+            <a:endParaRPr lang="en-US" sz="1800" b="0" i="0" dirty="0">
+              <a:solidFill>
+                <a:schemeClr val="tx1"/>
+              </a:solidFill>
+              <a:effectLst/>
+              <a:latin typeface="+mn-lt"/>
+            </a:endParaRPr>
+          </a:p>
+          <a:p>
+            <a:pPr indent="0" algn="l">
+              <a:buNone/>
+            </a:pPr>
+            <a:r>
+              <a:rPr lang="en-US" sz="1800" b="0" i="0" dirty="0">
+                <a:solidFill>
+                  <a:schemeClr val="tx1"/>
+                </a:solidFill>
+                <a:effectLst/>
+                <a:latin typeface="+mn-lt"/>
+              </a:rPr>
+              <a:t>    &lt;!-- Actual in-memory cache implementation --&gt;</a:t>
+            </a:r>
+          </a:p>
+          <a:p>
+            <a:pPr indent="0" algn="l">
+              <a:buNone/>
+            </a:pPr>
+            <a:r>
+              <a:rPr lang="en-US" sz="1800" b="0" i="0" dirty="0">
+                <a:solidFill>
+                  <a:schemeClr val="tx1"/>
+                </a:solidFill>
+                <a:effectLst/>
+                <a:latin typeface="+mn-lt"/>
+              </a:rPr>
+              <a:t>    &lt;dependency&gt;</a:t>
+            </a:r>
+          </a:p>
+          <a:p>
+            <a:pPr indent="0" algn="l">
+              <a:buNone/>
+            </a:pPr>
+            <a:r>
+              <a:rPr lang="en-US" sz="1800" b="0" i="0" dirty="0">
+                <a:solidFill>
+                  <a:schemeClr val="tx1"/>
+                </a:solidFill>
+                <a:effectLst/>
+                <a:latin typeface="+mn-lt"/>
+              </a:rPr>
+              <a:t>        &lt;</a:t>
+            </a:r>
+            <a:r>
+              <a:rPr lang="en-US" sz="1800" b="0" i="0" dirty="0" err="1">
+                <a:solidFill>
+                  <a:schemeClr val="tx1"/>
+                </a:solidFill>
+                <a:effectLst/>
+                <a:latin typeface="+mn-lt"/>
+              </a:rPr>
+              <a:t>groupId</a:t>
+            </a:r>
+            <a:r>
+              <a:rPr lang="en-US" sz="1800" b="0" i="0" dirty="0">
+                <a:solidFill>
+                  <a:schemeClr val="tx1"/>
+                </a:solidFill>
+                <a:effectLst/>
+                <a:latin typeface="+mn-lt"/>
+              </a:rPr>
+              <a:t>&gt;</a:t>
+            </a:r>
+            <a:r>
+              <a:rPr lang="en-US" sz="1800" b="0" i="0" dirty="0" err="1">
+                <a:solidFill>
+                  <a:schemeClr val="tx1"/>
+                </a:solidFill>
+                <a:effectLst/>
+                <a:latin typeface="+mn-lt"/>
+              </a:rPr>
+              <a:t>com.github.ben-manes.caffeine</a:t>
+            </a:r>
+            <a:r>
+              <a:rPr lang="en-US" sz="1800" b="0" i="0" dirty="0">
+                <a:solidFill>
+                  <a:schemeClr val="tx1"/>
+                </a:solidFill>
+                <a:effectLst/>
+                <a:latin typeface="+mn-lt"/>
+              </a:rPr>
+              <a:t>&lt;/</a:t>
+            </a:r>
+            <a:r>
+              <a:rPr lang="en-US" sz="1800" b="0" i="0" dirty="0" err="1">
+                <a:solidFill>
+                  <a:schemeClr val="tx1"/>
+                </a:solidFill>
+                <a:effectLst/>
+                <a:latin typeface="+mn-lt"/>
+              </a:rPr>
+              <a:t>groupId</a:t>
+            </a:r>
+            <a:r>
+              <a:rPr lang="en-US" sz="1800" b="0" i="0" dirty="0">
+                <a:solidFill>
+                  <a:schemeClr val="tx1"/>
+                </a:solidFill>
+                <a:effectLst/>
+                <a:latin typeface="+mn-lt"/>
+              </a:rPr>
+              <a:t>&gt;</a:t>
+            </a:r>
+          </a:p>
+          <a:p>
+            <a:pPr indent="0" algn="l">
+              <a:buNone/>
+            </a:pPr>
+            <a:r>
+              <a:rPr lang="en-US" sz="1800" b="0" i="0" dirty="0">
+                <a:solidFill>
+                  <a:schemeClr val="tx1"/>
+                </a:solidFill>
+                <a:effectLst/>
+                <a:latin typeface="+mn-lt"/>
+              </a:rPr>
+              <a:t>        &lt;</a:t>
+            </a:r>
+            <a:r>
+              <a:rPr lang="en-US" sz="1800" b="0" i="0" dirty="0" err="1">
+                <a:solidFill>
+                  <a:schemeClr val="tx1"/>
+                </a:solidFill>
+                <a:effectLst/>
+                <a:latin typeface="+mn-lt"/>
+              </a:rPr>
+              <a:t>artifactId</a:t>
+            </a:r>
+            <a:r>
+              <a:rPr lang="en-US" sz="1800" b="0" i="0" dirty="0">
+                <a:solidFill>
+                  <a:schemeClr val="tx1"/>
+                </a:solidFill>
+                <a:effectLst/>
+                <a:latin typeface="+mn-lt"/>
+              </a:rPr>
+              <a:t>&gt;caffeine&lt;/</a:t>
+            </a:r>
+            <a:r>
+              <a:rPr lang="en-US" sz="1800" b="0" i="0" dirty="0" err="1">
+                <a:solidFill>
+                  <a:schemeClr val="tx1"/>
+                </a:solidFill>
+                <a:effectLst/>
+                <a:latin typeface="+mn-lt"/>
+              </a:rPr>
+              <a:t>artifactId</a:t>
+            </a:r>
+            <a:r>
+              <a:rPr lang="en-US" sz="1800" b="0" i="0" dirty="0">
+                <a:solidFill>
+                  <a:schemeClr val="tx1"/>
+                </a:solidFill>
+                <a:effectLst/>
+                <a:latin typeface="+mn-lt"/>
+              </a:rPr>
+              <a:t>&gt;</a:t>
+            </a:r>
+          </a:p>
+          <a:p>
+            <a:pPr indent="0" algn="l">
+              <a:buNone/>
+            </a:pPr>
+            <a:r>
+              <a:rPr lang="en-US" sz="1800" b="0" i="0" dirty="0">
+                <a:solidFill>
+                  <a:schemeClr val="tx1"/>
+                </a:solidFill>
+                <a:effectLst/>
+                <a:latin typeface="+mn-lt"/>
+              </a:rPr>
+              <a:t>    &lt;/dependency&gt;</a:t>
+            </a:r>
+            <a:endParaRPr lang="en-US" sz="1200" b="0" i="0" dirty="0">
+              <a:solidFill>
+                <a:srgbClr val="FFFFFF"/>
+              </a:solidFill>
+              <a:effectLst/>
+              <a:latin typeface="Courier New" panose="02070309020205020404" pitchFamily="49" charset="0"/>
+            </a:endParaRPr>
+          </a:p>
+        </p:txBody>
+      </p:sp>
+    </p:spTree>
+    <p:extLst>
+      <p:ext uri="{BB962C8B-B14F-4D97-AF65-F5344CB8AC3E}">
+        <p14:creationId xmlns:p14="http://schemas.microsoft.com/office/powerpoint/2010/main" val="3931690034"/>
+      </p:ext>
+    </p:extLst>
+  </p:cSld>
+  <p:clrMapOvr>
+    <a:masterClrMapping/>
+  </p:clrMapOvr>
+</p:sld>
+</file>
+
+<file path=ppt/slides/slide46.xml><?xml version="1.0" encoding="utf-8"?>
+<p:sld xmlns:a="http://schemas.openxmlformats.org/drawingml/2006/main" xmlns:r="http://schemas.openxmlformats.org/officeDocument/2006/relationships" xmlns:p="http://schemas.openxmlformats.org/presentationml/2006/main">
+  <p:cSld>
+    <p:spTree>
+      <p:nvGrpSpPr>
+        <p:cNvPr id="1" name=""/>
+        <p:cNvGrpSpPr/>
+        <p:nvPr/>
+      </p:nvGrpSpPr>
+      <p:grpSpPr>
+        <a:xfrm>
+          <a:off x="0" y="0"/>
+          <a:ext cx="0" cy="0"/>
+          <a:chOff x="0" y="0"/>
+          <a:chExt cx="0" cy="0"/>
+        </a:xfrm>
+      </p:grpSpPr>
+      <p:sp>
+        <p:nvSpPr>
+          <p:cNvPr id="2" name="Title 1">
+            <a:extLst>
+              <a:ext uri="{FF2B5EF4-FFF2-40B4-BE49-F238E27FC236}">
+                <a16:creationId xmlns:a16="http://schemas.microsoft.com/office/drawing/2014/main" id="{FDF354A8-F7D3-F2EA-BC3E-95B22B372052}"/>
+              </a:ext>
+            </a:extLst>
+          </p:cNvPr>
+          <p:cNvSpPr>
+            <a:spLocks noGrp="1"/>
+          </p:cNvSpPr>
+          <p:nvPr>
+            <p:ph type="title"/>
+          </p:nvPr>
+        </p:nvSpPr>
+        <p:spPr/>
+        <p:txBody>
+          <a:bodyPr>
+            <a:normAutofit/>
+          </a:bodyPr>
+          <a:lstStyle/>
+          <a:p>
+            <a:r>
+              <a:rPr lang="en-US" sz="2400" dirty="0"/>
+              <a:t>Enabling service-level caching (Spring cache) with caffeine</a:t>
+            </a:r>
+          </a:p>
+        </p:txBody>
+      </p:sp>
+      <p:sp>
+        <p:nvSpPr>
+          <p:cNvPr id="3" name="Content Placeholder 2">
+            <a:extLst>
+              <a:ext uri="{FF2B5EF4-FFF2-40B4-BE49-F238E27FC236}">
+                <a16:creationId xmlns:a16="http://schemas.microsoft.com/office/drawing/2014/main" id="{4794E314-6D3E-43D8-3043-E637322C8738}"/>
+              </a:ext>
+            </a:extLst>
+          </p:cNvPr>
+          <p:cNvSpPr>
+            <a:spLocks noGrp="1"/>
+          </p:cNvSpPr>
+          <p:nvPr>
+            <p:ph idx="1"/>
+          </p:nvPr>
+        </p:nvSpPr>
+        <p:spPr>
+          <a:xfrm>
+            <a:off x="581192" y="2180496"/>
+            <a:ext cx="3863217" cy="3678303"/>
+          </a:xfrm>
+        </p:spPr>
+        <p:txBody>
+          <a:bodyPr/>
+          <a:lstStyle/>
+          <a:p>
+            <a:r>
+              <a:rPr lang="en-US" dirty="0"/>
+              <a:t>Step 2: Create a configuration class</a:t>
+            </a:r>
+          </a:p>
+          <a:p>
+            <a:r>
+              <a:rPr lang="en-US" dirty="0"/>
+              <a:t>@EnableCaching tells Spring to intercept calls to eligible methods and apply the caching annotations.</a:t>
+            </a:r>
+          </a:p>
+          <a:p>
+            <a:r>
+              <a:rPr lang="en-US" dirty="0"/>
+              <a:t>Without it, adding @Cacheable to a method does not activate the expected caching behavior.</a:t>
+            </a:r>
+          </a:p>
+          <a:p>
+            <a:endParaRPr lang="en-US" dirty="0"/>
+          </a:p>
+        </p:txBody>
+      </p:sp>
+      <p:sp>
+        <p:nvSpPr>
+          <p:cNvPr id="5" name="TextBox 4">
+            <a:extLst>
+              <a:ext uri="{FF2B5EF4-FFF2-40B4-BE49-F238E27FC236}">
+                <a16:creationId xmlns:a16="http://schemas.microsoft.com/office/drawing/2014/main" id="{F864F2D3-E9DA-57E2-3CF2-6FB4550808A1}"/>
+              </a:ext>
+            </a:extLst>
+          </p:cNvPr>
+          <p:cNvSpPr txBox="1"/>
+          <p:nvPr/>
+        </p:nvSpPr>
+        <p:spPr>
+          <a:xfrm>
+            <a:off x="4698707" y="2721958"/>
+            <a:ext cx="6097772" cy="1754326"/>
+          </a:xfrm>
+          <a:prstGeom prst="rect">
+            <a:avLst/>
+          </a:prstGeom>
+          <a:noFill/>
+        </p:spPr>
+        <p:txBody>
+          <a:bodyPr wrap="square">
+            <a:spAutoFit/>
+          </a:bodyPr>
+          <a:lstStyle/>
+          <a:p>
+            <a:pPr indent="0" algn="l">
+              <a:buNone/>
+            </a:pPr>
+            <a:r>
+              <a:rPr lang="en-US" sz="1800" b="0" i="0" dirty="0">
+                <a:solidFill>
+                  <a:schemeClr val="tx1"/>
+                </a:solidFill>
+                <a:effectLst/>
+                <a:latin typeface="+mn-lt"/>
+              </a:rPr>
+              <a:t>package </a:t>
+            </a:r>
+            <a:r>
+              <a:rPr lang="en-US" sz="1800" b="0" i="0" dirty="0" err="1">
+                <a:solidFill>
+                  <a:schemeClr val="tx1"/>
+                </a:solidFill>
+                <a:effectLst/>
+                <a:latin typeface="+mn-lt"/>
+              </a:rPr>
+              <a:t>com.example.demo.config</a:t>
+            </a:r>
+            <a:r>
+              <a:rPr lang="en-US" sz="1800" b="0" i="0" dirty="0">
+                <a:solidFill>
+                  <a:schemeClr val="tx1"/>
+                </a:solidFill>
+                <a:effectLst/>
+                <a:latin typeface="+mn-lt"/>
+              </a:rPr>
+              <a:t>;</a:t>
+            </a:r>
+          </a:p>
+          <a:p>
+            <a:pPr indent="0" algn="l">
+              <a:buNone/>
+            </a:pPr>
+            <a:endParaRPr lang="en-US" sz="1800" b="0" i="0" dirty="0">
+              <a:solidFill>
+                <a:schemeClr val="tx1"/>
+              </a:solidFill>
+              <a:effectLst/>
+              <a:latin typeface="+mn-lt"/>
+            </a:endParaRPr>
+          </a:p>
+          <a:p>
+            <a:pPr indent="0" algn="l">
+              <a:buNone/>
+            </a:pPr>
+            <a:r>
+              <a:rPr lang="en-US" sz="1800" b="0" i="0" dirty="0">
+                <a:solidFill>
+                  <a:schemeClr val="tx1"/>
+                </a:solidFill>
+                <a:effectLst/>
+                <a:latin typeface="+mn-lt"/>
+              </a:rPr>
+              <a:t>import </a:t>
+            </a:r>
+            <a:r>
+              <a:rPr lang="en-US" sz="1800" b="0" i="0" dirty="0" err="1">
+                <a:solidFill>
+                  <a:schemeClr val="tx1"/>
+                </a:solidFill>
+                <a:effectLst/>
+                <a:latin typeface="+mn-lt"/>
+              </a:rPr>
+              <a:t>org.springframework.cache.annotation.EnableCaching</a:t>
+            </a:r>
+            <a:r>
+              <a:rPr lang="en-US" sz="1800" b="0" i="0" dirty="0">
+                <a:solidFill>
+                  <a:schemeClr val="tx1"/>
+                </a:solidFill>
+                <a:effectLst/>
+                <a:latin typeface="+mn-lt"/>
+              </a:rPr>
+              <a:t>;</a:t>
+            </a:r>
+          </a:p>
+          <a:p>
+            <a:pPr indent="0" algn="l">
+              <a:buNone/>
+            </a:pPr>
+            <a:r>
+              <a:rPr lang="en-US" sz="1800" b="0" i="0" dirty="0">
+                <a:solidFill>
+                  <a:schemeClr val="tx1"/>
+                </a:solidFill>
+                <a:effectLst/>
+                <a:latin typeface="+mn-lt"/>
+              </a:rPr>
+              <a:t>import </a:t>
+            </a:r>
+            <a:r>
+              <a:rPr lang="en-US" sz="1800" b="0" i="0" dirty="0" err="1">
+                <a:solidFill>
+                  <a:schemeClr val="tx1"/>
+                </a:solidFill>
+                <a:effectLst/>
+                <a:latin typeface="+mn-lt"/>
+              </a:rPr>
+              <a:t>org.springframework.context.annotation.Configuration</a:t>
+            </a:r>
+            <a:r>
+              <a:rPr lang="en-US" sz="1800" b="0" i="0" dirty="0">
+                <a:solidFill>
+                  <a:schemeClr val="tx1"/>
+                </a:solidFill>
+                <a:effectLst/>
+                <a:latin typeface="+mn-lt"/>
+              </a:rPr>
+              <a:t>;</a:t>
+            </a:r>
+          </a:p>
+          <a:p>
+            <a:pPr indent="0" algn="l">
+              <a:buNone/>
+            </a:pPr>
+            <a:endParaRPr lang="en-US" sz="1800" b="0" i="0" dirty="0">
+              <a:solidFill>
+                <a:schemeClr val="tx1"/>
+              </a:solidFill>
+              <a:effectLst/>
+              <a:latin typeface="+mn-lt"/>
+            </a:endParaRPr>
+          </a:p>
+          <a:p>
+            <a:pPr indent="0" algn="l">
+              <a:buNone/>
+            </a:pPr>
+            <a:r>
+              <a:rPr lang="en-US" sz="1800" b="0" i="0" dirty="0">
+                <a:solidFill>
+                  <a:schemeClr val="tx1"/>
+                </a:solidFill>
+                <a:effectLst/>
+                <a:latin typeface="+mn-lt"/>
+              </a:rPr>
+              <a:t>@Configuration</a:t>
+            </a:r>
+          </a:p>
+          <a:p>
+            <a:pPr indent="0" algn="l">
+              <a:buNone/>
+            </a:pPr>
+            <a:r>
+              <a:rPr lang="en-US" sz="1800" b="0" i="0" dirty="0">
+                <a:solidFill>
+                  <a:schemeClr val="tx1"/>
+                </a:solidFill>
+                <a:effectLst/>
+                <a:latin typeface="+mn-lt"/>
+              </a:rPr>
+              <a:t>@EnableCaching</a:t>
+            </a:r>
+          </a:p>
+          <a:p>
+            <a:pPr indent="0" algn="l">
+              <a:buNone/>
+            </a:pPr>
+            <a:r>
+              <a:rPr lang="en-US" sz="1800" b="0" i="0" dirty="0">
+                <a:solidFill>
+                  <a:schemeClr val="tx1"/>
+                </a:solidFill>
+                <a:effectLst/>
+                <a:latin typeface="+mn-lt"/>
+              </a:rPr>
+              <a:t>public class </a:t>
+            </a:r>
+            <a:r>
+              <a:rPr lang="en-US" sz="1800" b="0" i="0" dirty="0" err="1">
+                <a:solidFill>
+                  <a:schemeClr val="tx1"/>
+                </a:solidFill>
+                <a:effectLst/>
+                <a:latin typeface="+mn-lt"/>
+              </a:rPr>
+              <a:t>CacheConfig</a:t>
+            </a:r>
+            <a:r>
+              <a:rPr lang="en-US" sz="1800" b="0" i="0" dirty="0">
+                <a:solidFill>
+                  <a:schemeClr val="tx1"/>
+                </a:solidFill>
+                <a:effectLst/>
+                <a:latin typeface="+mn-lt"/>
+              </a:rPr>
+              <a:t> {</a:t>
+            </a:r>
+          </a:p>
+          <a:p>
+            <a:pPr indent="0" algn="l">
+              <a:buNone/>
+            </a:pPr>
+            <a:r>
+              <a:rPr lang="en-US" sz="1800" b="0" i="0" dirty="0">
+                <a:solidFill>
+                  <a:schemeClr val="tx1"/>
+                </a:solidFill>
+                <a:effectLst/>
+                <a:latin typeface="+mn-lt"/>
+              </a:rPr>
+              <a:t>}</a:t>
+            </a:r>
+            <a:endParaRPr lang="en-US" sz="1200" b="0" i="0" dirty="0">
+              <a:solidFill>
+                <a:srgbClr val="FFFFFF"/>
+              </a:solidFill>
+              <a:effectLst/>
+              <a:latin typeface="Courier New" panose="02070309020205020404" pitchFamily="49" charset="0"/>
+            </a:endParaRPr>
+          </a:p>
+        </p:txBody>
+      </p:sp>
+    </p:spTree>
+    <p:extLst>
+      <p:ext uri="{BB962C8B-B14F-4D97-AF65-F5344CB8AC3E}">
+        <p14:creationId xmlns:p14="http://schemas.microsoft.com/office/powerpoint/2010/main" val="3470725240"/>
+      </p:ext>
+    </p:extLst>
+  </p:cSld>
+  <p:clrMapOvr>
+    <a:masterClrMapping/>
+  </p:clrMapOvr>
+</p:sld>
+</file>
+
+<file path=ppt/slides/slide47.xml><?xml version="1.0" encoding="utf-8"?>
+<p:sld xmlns:a="http://schemas.openxmlformats.org/drawingml/2006/main" xmlns:r="http://schemas.openxmlformats.org/officeDocument/2006/relationships" xmlns:p="http://schemas.openxmlformats.org/presentationml/2006/main">
+  <p:cSld>
+    <p:spTree>
+      <p:nvGrpSpPr>
+        <p:cNvPr id="1" name=""/>
+        <p:cNvGrpSpPr/>
+        <p:nvPr/>
+      </p:nvGrpSpPr>
+      <p:grpSpPr>
+        <a:xfrm>
+          <a:off x="0" y="0"/>
+          <a:ext cx="0" cy="0"/>
+          <a:chOff x="0" y="0"/>
+          <a:chExt cx="0" cy="0"/>
+        </a:xfrm>
+      </p:grpSpPr>
+      <p:sp>
+        <p:nvSpPr>
+          <p:cNvPr id="2" name="Title 1">
+            <a:extLst>
+              <a:ext uri="{FF2B5EF4-FFF2-40B4-BE49-F238E27FC236}">
+                <a16:creationId xmlns:a16="http://schemas.microsoft.com/office/drawing/2014/main" id="{D9DAE1B2-0B06-782F-D5CB-3C753CE04DB4}"/>
+              </a:ext>
+            </a:extLst>
+          </p:cNvPr>
+          <p:cNvSpPr>
+            <a:spLocks noGrp="1"/>
+          </p:cNvSpPr>
+          <p:nvPr>
+            <p:ph type="title"/>
+          </p:nvPr>
+        </p:nvSpPr>
+        <p:spPr/>
+        <p:txBody>
+          <a:bodyPr>
+            <a:normAutofit/>
+          </a:bodyPr>
+          <a:lstStyle/>
+          <a:p>
+            <a:r>
+              <a:rPr lang="en-US" sz="2400" dirty="0"/>
+              <a:t>Enabling service-level caching (Spring cache) with caffeine</a:t>
+            </a:r>
+          </a:p>
+        </p:txBody>
+      </p:sp>
+      <p:sp>
+        <p:nvSpPr>
+          <p:cNvPr id="3" name="Content Placeholder 2">
+            <a:extLst>
+              <a:ext uri="{FF2B5EF4-FFF2-40B4-BE49-F238E27FC236}">
+                <a16:creationId xmlns:a16="http://schemas.microsoft.com/office/drawing/2014/main" id="{739A48CB-73AF-8961-B257-A8572DBBEC57}"/>
+              </a:ext>
+            </a:extLst>
+          </p:cNvPr>
+          <p:cNvSpPr>
+            <a:spLocks noGrp="1"/>
+          </p:cNvSpPr>
+          <p:nvPr>
+            <p:ph idx="1"/>
+          </p:nvPr>
+        </p:nvSpPr>
+        <p:spPr>
+          <a:xfrm>
+            <a:off x="581193" y="2180496"/>
+            <a:ext cx="3746258" cy="3678303"/>
+          </a:xfrm>
+        </p:spPr>
+        <p:txBody>
+          <a:bodyPr>
+            <a:normAutofit lnSpcReduction="10000"/>
+          </a:bodyPr>
+          <a:lstStyle/>
+          <a:p>
+            <a:r>
+              <a:rPr lang="en-US" dirty="0"/>
+              <a:t>Step 3: Enable </a:t>
+            </a:r>
+            <a:r>
+              <a:rPr lang="en-US" dirty="0" err="1"/>
+              <a:t>application.properties</a:t>
+            </a:r>
+            <a:r>
+              <a:rPr lang="en-US" dirty="0"/>
+              <a:t> configuration</a:t>
+            </a:r>
+          </a:p>
+          <a:p>
+            <a:pPr lvl="1"/>
+            <a:r>
+              <a:rPr lang="en-US" dirty="0"/>
+              <a:t>products: stores individual products.</a:t>
+            </a:r>
+          </a:p>
+          <a:p>
+            <a:pPr lvl="1"/>
+            <a:r>
+              <a:rPr lang="en-US" dirty="0" err="1"/>
+              <a:t>productLists</a:t>
+            </a:r>
+            <a:r>
+              <a:rPr lang="en-US" dirty="0"/>
+              <a:t>: stores product list responses.</a:t>
+            </a:r>
+          </a:p>
+          <a:p>
+            <a:pPr lvl="1"/>
+            <a:r>
+              <a:rPr lang="en-US" dirty="0" err="1"/>
+              <a:t>maximumSize</a:t>
+            </a:r>
+            <a:r>
+              <a:rPr lang="en-US" dirty="0"/>
+              <a:t>=1000: limits each cache to 1,000 entries.</a:t>
+            </a:r>
+          </a:p>
+          <a:p>
+            <a:pPr lvl="1"/>
+            <a:r>
+              <a:rPr lang="en-US" dirty="0" err="1"/>
+              <a:t>expireAfterWrite</a:t>
+            </a:r>
+            <a:r>
+              <a:rPr lang="en-US" dirty="0"/>
+              <a:t>=300s: expires entries five minutes after they are written or refreshed.</a:t>
+            </a:r>
+          </a:p>
+          <a:p>
+            <a:endParaRPr lang="en-US" dirty="0"/>
+          </a:p>
+        </p:txBody>
+      </p:sp>
+      <p:sp>
+        <p:nvSpPr>
+          <p:cNvPr id="5" name="TextBox 4">
+            <a:extLst>
+              <a:ext uri="{FF2B5EF4-FFF2-40B4-BE49-F238E27FC236}">
+                <a16:creationId xmlns:a16="http://schemas.microsoft.com/office/drawing/2014/main" id="{83295963-3C3A-D02D-6F9F-4E3DEFA74395}"/>
+              </a:ext>
+            </a:extLst>
+          </p:cNvPr>
+          <p:cNvSpPr txBox="1"/>
+          <p:nvPr/>
+        </p:nvSpPr>
+        <p:spPr>
+          <a:xfrm>
+            <a:off x="4529914" y="3138295"/>
+            <a:ext cx="6796862" cy="1477328"/>
+          </a:xfrm>
+          <a:prstGeom prst="rect">
+            <a:avLst/>
+          </a:prstGeom>
+          <a:noFill/>
+        </p:spPr>
+        <p:txBody>
+          <a:bodyPr wrap="square">
+            <a:spAutoFit/>
+          </a:bodyPr>
+          <a:lstStyle/>
+          <a:p>
+            <a:pPr indent="0" algn="l">
+              <a:buNone/>
+            </a:pPr>
+            <a:r>
+              <a:rPr lang="en-US" sz="1800" b="0" i="0" dirty="0">
+                <a:solidFill>
+                  <a:schemeClr val="tx1"/>
+                </a:solidFill>
+                <a:effectLst/>
+                <a:latin typeface="+mn-lt"/>
+              </a:rPr>
+              <a:t># Names of caches used by the application</a:t>
+            </a:r>
+          </a:p>
+          <a:p>
+            <a:pPr indent="0" algn="l">
+              <a:buNone/>
+            </a:pPr>
+            <a:r>
+              <a:rPr lang="en-US" sz="1800" b="0" i="0" dirty="0" err="1">
+                <a:solidFill>
+                  <a:schemeClr val="tx1"/>
+                </a:solidFill>
+                <a:effectLst/>
+                <a:latin typeface="+mn-lt"/>
+              </a:rPr>
+              <a:t>spring.cache.cache</a:t>
+            </a:r>
+            <a:r>
+              <a:rPr lang="en-US" sz="1800" b="0" i="0" dirty="0">
+                <a:solidFill>
+                  <a:schemeClr val="tx1"/>
+                </a:solidFill>
+                <a:effectLst/>
+                <a:latin typeface="+mn-lt"/>
+              </a:rPr>
+              <a:t>-names=</a:t>
+            </a:r>
+            <a:r>
+              <a:rPr lang="en-US" sz="1800" b="0" i="0" dirty="0" err="1">
+                <a:solidFill>
+                  <a:schemeClr val="tx1"/>
+                </a:solidFill>
+                <a:effectLst/>
+                <a:latin typeface="+mn-lt"/>
+              </a:rPr>
+              <a:t>products,productLists</a:t>
+            </a:r>
+            <a:endParaRPr lang="en-US" sz="1800" b="0" i="0" dirty="0">
+              <a:solidFill>
+                <a:schemeClr val="tx1"/>
+              </a:solidFill>
+              <a:effectLst/>
+              <a:latin typeface="+mn-lt"/>
+            </a:endParaRPr>
+          </a:p>
+          <a:p>
+            <a:pPr indent="0" algn="l">
+              <a:buNone/>
+            </a:pPr>
+            <a:endParaRPr lang="en-US" sz="1800" b="0" i="0" dirty="0">
+              <a:solidFill>
+                <a:schemeClr val="tx1"/>
+              </a:solidFill>
+              <a:effectLst/>
+              <a:latin typeface="+mn-lt"/>
+            </a:endParaRPr>
+          </a:p>
+          <a:p>
+            <a:pPr indent="0" algn="l">
+              <a:buNone/>
+            </a:pPr>
+            <a:r>
+              <a:rPr lang="en-US" sz="1800" b="0" i="0" dirty="0">
+                <a:solidFill>
+                  <a:schemeClr val="tx1"/>
+                </a:solidFill>
+                <a:effectLst/>
+                <a:latin typeface="+mn-lt"/>
+              </a:rPr>
+              <a:t># Maximum number of entries and expiration policy</a:t>
+            </a:r>
+          </a:p>
+          <a:p>
+            <a:pPr indent="0" algn="l">
+              <a:buNone/>
+            </a:pPr>
+            <a:r>
+              <a:rPr lang="en-US" sz="1800" b="0" i="0" dirty="0" err="1">
+                <a:solidFill>
+                  <a:schemeClr val="tx1"/>
+                </a:solidFill>
+                <a:effectLst/>
+                <a:latin typeface="+mn-lt"/>
+              </a:rPr>
+              <a:t>spring.cache.caffeine.spec</a:t>
+            </a:r>
+            <a:r>
+              <a:rPr lang="en-US" sz="1800" b="0" i="0" dirty="0">
+                <a:solidFill>
+                  <a:schemeClr val="tx1"/>
+                </a:solidFill>
+                <a:effectLst/>
+                <a:latin typeface="+mn-lt"/>
+              </a:rPr>
+              <a:t>=</a:t>
+            </a:r>
+            <a:r>
+              <a:rPr lang="en-US" sz="1800" b="0" i="0" dirty="0" err="1">
+                <a:solidFill>
+                  <a:schemeClr val="tx1"/>
+                </a:solidFill>
+                <a:effectLst/>
+                <a:latin typeface="+mn-lt"/>
+              </a:rPr>
+              <a:t>maximumSize</a:t>
+            </a:r>
+            <a:r>
+              <a:rPr lang="en-US" sz="1800" b="0" i="0" dirty="0">
+                <a:solidFill>
+                  <a:schemeClr val="tx1"/>
+                </a:solidFill>
+                <a:effectLst/>
+                <a:latin typeface="+mn-lt"/>
+              </a:rPr>
+              <a:t>=1000,expireAfterWrite=300s</a:t>
+            </a:r>
+            <a:endParaRPr lang="en-US" sz="1200" b="0" i="0" dirty="0">
+              <a:solidFill>
+                <a:srgbClr val="FFFFFF"/>
+              </a:solidFill>
+              <a:effectLst/>
+              <a:latin typeface="Courier New" panose="02070309020205020404" pitchFamily="49" charset="0"/>
+            </a:endParaRPr>
+          </a:p>
+        </p:txBody>
+      </p:sp>
+    </p:spTree>
+    <p:extLst>
+      <p:ext uri="{BB962C8B-B14F-4D97-AF65-F5344CB8AC3E}">
+        <p14:creationId xmlns:p14="http://schemas.microsoft.com/office/powerpoint/2010/main" val="1344606952"/>
+      </p:ext>
+    </p:extLst>
+  </p:cSld>
+  <p:clrMapOvr>
+    <a:masterClrMapping/>
+  </p:clrMapOvr>
+</p:sld>
+</file>
+
+<file path=ppt/slides/slide48.xml><?xml version="1.0" encoding="utf-8"?>
+<p:sld xmlns:a="http://schemas.openxmlformats.org/drawingml/2006/main" xmlns:r="http://schemas.openxmlformats.org/officeDocument/2006/relationships" xmlns:p="http://schemas.openxmlformats.org/presentationml/2006/main">
+  <p:cSld>
+    <p:spTree>
+      <p:nvGrpSpPr>
+        <p:cNvPr id="1" name=""/>
+        <p:cNvGrpSpPr/>
+        <p:nvPr/>
+      </p:nvGrpSpPr>
+      <p:grpSpPr>
+        <a:xfrm>
+          <a:off x="0" y="0"/>
+          <a:ext cx="0" cy="0"/>
+          <a:chOff x="0" y="0"/>
+          <a:chExt cx="0" cy="0"/>
+        </a:xfrm>
+      </p:grpSpPr>
+      <p:sp>
+        <p:nvSpPr>
+          <p:cNvPr id="2" name="Title 1">
+            <a:extLst>
+              <a:ext uri="{FF2B5EF4-FFF2-40B4-BE49-F238E27FC236}">
+                <a16:creationId xmlns:a16="http://schemas.microsoft.com/office/drawing/2014/main" id="{A5209F3E-073B-186F-4E01-9E3FAA6E9581}"/>
+              </a:ext>
+            </a:extLst>
+          </p:cNvPr>
+          <p:cNvSpPr>
+            <a:spLocks noGrp="1"/>
+          </p:cNvSpPr>
+          <p:nvPr>
+            <p:ph type="title"/>
+          </p:nvPr>
+        </p:nvSpPr>
+        <p:spPr>
+          <a:xfrm>
+            <a:off x="581192" y="734054"/>
+            <a:ext cx="11029616" cy="1013800"/>
+          </a:xfrm>
+        </p:spPr>
+        <p:txBody>
+          <a:bodyPr>
+            <a:normAutofit/>
+          </a:bodyPr>
+          <a:lstStyle/>
+          <a:p>
+            <a:r>
+              <a:rPr lang="en-US" sz="2400" dirty="0"/>
+              <a:t>Enabling service-level caching (Spring cache) with caffeine</a:t>
+            </a:r>
+          </a:p>
+        </p:txBody>
+      </p:sp>
+      <p:sp>
+        <p:nvSpPr>
+          <p:cNvPr id="3" name="Content Placeholder 2">
+            <a:extLst>
+              <a:ext uri="{FF2B5EF4-FFF2-40B4-BE49-F238E27FC236}">
+                <a16:creationId xmlns:a16="http://schemas.microsoft.com/office/drawing/2014/main" id="{76411E97-D643-A3A8-A3D2-309EE5320B3B}"/>
+              </a:ext>
+            </a:extLst>
+          </p:cNvPr>
+          <p:cNvSpPr>
+            <a:spLocks noGrp="1"/>
+          </p:cNvSpPr>
+          <p:nvPr>
+            <p:ph idx="1"/>
+          </p:nvPr>
+        </p:nvSpPr>
+        <p:spPr>
+          <a:xfrm>
+            <a:off x="581192" y="2180496"/>
+            <a:ext cx="4331049" cy="3678303"/>
+          </a:xfrm>
+        </p:spPr>
+        <p:txBody>
+          <a:bodyPr>
+            <a:normAutofit lnSpcReduction="10000"/>
+          </a:bodyPr>
+          <a:lstStyle/>
+          <a:p>
+            <a:r>
+              <a:rPr lang="en-US" dirty="0"/>
+              <a:t>Step 4: annotate service method we’d like to cache</a:t>
+            </a:r>
+          </a:p>
+          <a:p>
+            <a:r>
+              <a:rPr lang="en-US" dirty="0"/>
+              <a:t>This example assumes we have a </a:t>
+            </a:r>
+            <a:r>
+              <a:rPr lang="en-US" dirty="0" err="1"/>
+              <a:t>JpaRepo</a:t>
+            </a:r>
+            <a:r>
+              <a:rPr lang="en-US" dirty="0"/>
+              <a:t> + Product domain model</a:t>
+            </a:r>
+          </a:p>
+          <a:p>
+            <a:pPr lvl="1"/>
+            <a:r>
+              <a:rPr lang="en-US" dirty="0" err="1"/>
+              <a:t>cacheNames</a:t>
+            </a:r>
+            <a:r>
+              <a:rPr lang="en-US" dirty="0"/>
+              <a:t> = "products" specifies which cache stores the result.</a:t>
+            </a:r>
+          </a:p>
+          <a:p>
+            <a:pPr lvl="1"/>
+            <a:r>
+              <a:rPr lang="en-US" dirty="0"/>
+              <a:t>key = "#id" uses the method's id argument as the cache key.</a:t>
+            </a:r>
+          </a:p>
+          <a:p>
+            <a:pPr lvl="1"/>
+            <a:r>
+              <a:rPr lang="en-US" dirty="0"/>
+              <a:t>unless = "#result == null" prevents a null result from being cached.</a:t>
+            </a:r>
+          </a:p>
+          <a:p>
+            <a:pPr lvl="1"/>
+            <a:r>
+              <a:rPr lang="en-US" dirty="0"/>
+              <a:t>The key expression is Spring Expression Language (</a:t>
+            </a:r>
+            <a:r>
+              <a:rPr lang="en-US" dirty="0" err="1"/>
+              <a:t>SpEL</a:t>
+            </a:r>
+            <a:r>
+              <a:rPr lang="en-US" dirty="0"/>
+              <a:t>).</a:t>
+            </a:r>
+          </a:p>
+          <a:p>
+            <a:endParaRPr lang="en-US" dirty="0"/>
+          </a:p>
+        </p:txBody>
+      </p:sp>
+      <p:sp>
+        <p:nvSpPr>
+          <p:cNvPr id="5" name="TextBox 4">
+            <a:extLst>
+              <a:ext uri="{FF2B5EF4-FFF2-40B4-BE49-F238E27FC236}">
+                <a16:creationId xmlns:a16="http://schemas.microsoft.com/office/drawing/2014/main" id="{5FB6AF92-DD16-9945-2495-8B5C68D73552}"/>
+              </a:ext>
+            </a:extLst>
+          </p:cNvPr>
+          <p:cNvSpPr txBox="1"/>
+          <p:nvPr/>
+        </p:nvSpPr>
+        <p:spPr>
+          <a:xfrm>
+            <a:off x="5513035" y="2618993"/>
+            <a:ext cx="6097772" cy="1938992"/>
+          </a:xfrm>
+          <a:prstGeom prst="rect">
+            <a:avLst/>
+          </a:prstGeom>
+          <a:noFill/>
+        </p:spPr>
+        <p:txBody>
+          <a:bodyPr wrap="square">
+            <a:spAutoFit/>
+          </a:bodyPr>
+          <a:lstStyle/>
+          <a:p>
+            <a:pPr indent="0" algn="l">
+              <a:buNone/>
+            </a:pPr>
+            <a:r>
+              <a:rPr lang="en-US" sz="1800" b="0" i="0" dirty="0">
+                <a:solidFill>
+                  <a:schemeClr val="tx1"/>
+                </a:solidFill>
+                <a:effectLst/>
+                <a:latin typeface="+mn-lt"/>
+              </a:rPr>
+              <a:t>@Cacheable(</a:t>
+            </a:r>
+          </a:p>
+          <a:p>
+            <a:pPr indent="0" algn="l">
+              <a:buNone/>
+            </a:pPr>
+            <a:r>
+              <a:rPr lang="en-US" sz="1800" b="0" i="0" dirty="0">
+                <a:solidFill>
+                  <a:schemeClr val="tx1"/>
+                </a:solidFill>
+                <a:effectLst/>
+                <a:latin typeface="+mn-lt"/>
+              </a:rPr>
+              <a:t>        </a:t>
+            </a:r>
+            <a:r>
+              <a:rPr lang="en-US" sz="1800" b="0" i="0" dirty="0" err="1">
+                <a:solidFill>
+                  <a:schemeClr val="tx1"/>
+                </a:solidFill>
+                <a:effectLst/>
+                <a:latin typeface="+mn-lt"/>
+              </a:rPr>
+              <a:t>cacheNames</a:t>
+            </a:r>
+            <a:r>
+              <a:rPr lang="en-US" sz="1800" b="0" i="0" dirty="0">
+                <a:solidFill>
+                  <a:schemeClr val="tx1"/>
+                </a:solidFill>
+                <a:effectLst/>
+                <a:latin typeface="+mn-lt"/>
+              </a:rPr>
+              <a:t> = "products",</a:t>
+            </a:r>
+          </a:p>
+          <a:p>
+            <a:pPr indent="0" algn="l">
+              <a:buNone/>
+            </a:pPr>
+            <a:r>
+              <a:rPr lang="en-US" sz="1800" b="0" i="0" dirty="0">
+                <a:solidFill>
+                  <a:schemeClr val="tx1"/>
+                </a:solidFill>
+                <a:effectLst/>
+                <a:latin typeface="+mn-lt"/>
+              </a:rPr>
+              <a:t>        key = "#id",</a:t>
+            </a:r>
+          </a:p>
+          <a:p>
+            <a:pPr indent="0" algn="l">
+              <a:buNone/>
+            </a:pPr>
+            <a:r>
+              <a:rPr lang="en-US" sz="1800" b="0" i="0" dirty="0">
+                <a:solidFill>
+                  <a:schemeClr val="tx1"/>
+                </a:solidFill>
+                <a:effectLst/>
+                <a:latin typeface="+mn-lt"/>
+              </a:rPr>
+              <a:t>        unless = "#result == null"</a:t>
+            </a:r>
+          </a:p>
+          <a:p>
+            <a:pPr indent="0" algn="l">
+              <a:buNone/>
+            </a:pPr>
+            <a:r>
+              <a:rPr lang="en-US" sz="1800" b="0" i="0" dirty="0">
+                <a:solidFill>
+                  <a:schemeClr val="tx1"/>
+                </a:solidFill>
+                <a:effectLst/>
+                <a:latin typeface="+mn-lt"/>
+              </a:rPr>
+              <a:t>    )</a:t>
+            </a:r>
+          </a:p>
+          <a:p>
+            <a:pPr indent="0" algn="l">
+              <a:buNone/>
+            </a:pPr>
+            <a:r>
+              <a:rPr lang="en-US" sz="1800" b="0" i="0" dirty="0">
+                <a:solidFill>
+                  <a:schemeClr val="tx1"/>
+                </a:solidFill>
+                <a:effectLst/>
+                <a:latin typeface="+mn-lt"/>
+              </a:rPr>
+              <a:t>    public Product </a:t>
+            </a:r>
+            <a:r>
+              <a:rPr lang="en-US" sz="1800" b="0" i="0" dirty="0" err="1">
+                <a:solidFill>
+                  <a:schemeClr val="tx1"/>
+                </a:solidFill>
+                <a:effectLst/>
+                <a:latin typeface="+mn-lt"/>
+              </a:rPr>
+              <a:t>getById</a:t>
+            </a:r>
+            <a:r>
+              <a:rPr lang="en-US" sz="1800" b="0" i="0" dirty="0">
+                <a:solidFill>
+                  <a:schemeClr val="tx1"/>
+                </a:solidFill>
+                <a:effectLst/>
+                <a:latin typeface="+mn-lt"/>
+              </a:rPr>
+              <a:t>(Long id) {</a:t>
+            </a:r>
+          </a:p>
+          <a:p>
+            <a:pPr indent="0" algn="l">
+              <a:buNone/>
+            </a:pPr>
+            <a:r>
+              <a:rPr lang="en-US" sz="1800" b="0" i="0" dirty="0">
+                <a:solidFill>
+                  <a:schemeClr val="tx1"/>
+                </a:solidFill>
+                <a:effectLst/>
+                <a:latin typeface="+mn-lt"/>
+              </a:rPr>
+              <a:t>        </a:t>
+            </a:r>
+            <a:r>
+              <a:rPr lang="en-US" sz="1800" b="0" i="0" dirty="0" err="1">
+                <a:solidFill>
+                  <a:schemeClr val="tx1"/>
+                </a:solidFill>
+                <a:effectLst/>
+                <a:latin typeface="+mn-lt"/>
+              </a:rPr>
+              <a:t>System.out.println</a:t>
+            </a:r>
+            <a:r>
+              <a:rPr lang="en-US" sz="1800" b="0" i="0" dirty="0">
+                <a:solidFill>
+                  <a:schemeClr val="tx1"/>
+                </a:solidFill>
+                <a:effectLst/>
+                <a:latin typeface="+mn-lt"/>
+              </a:rPr>
+              <a:t>("Fetching product from database");</a:t>
+            </a:r>
+          </a:p>
+          <a:p>
+            <a:pPr indent="0" algn="l">
+              <a:buNone/>
+            </a:pPr>
+            <a:endParaRPr lang="en-US" sz="1800" b="0" i="0" dirty="0">
+              <a:solidFill>
+                <a:schemeClr val="tx1"/>
+              </a:solidFill>
+              <a:effectLst/>
+              <a:latin typeface="+mn-lt"/>
+            </a:endParaRPr>
+          </a:p>
+          <a:p>
+            <a:pPr indent="0" algn="l">
+              <a:buNone/>
+            </a:pPr>
+            <a:r>
+              <a:rPr lang="en-US" sz="1800" b="0" i="0" dirty="0">
+                <a:solidFill>
+                  <a:schemeClr val="tx1"/>
+                </a:solidFill>
+                <a:effectLst/>
+                <a:latin typeface="+mn-lt"/>
+              </a:rPr>
+              <a:t>        return </a:t>
+            </a:r>
+            <a:r>
+              <a:rPr lang="en-US" sz="1800" b="0" i="0" dirty="0" err="1">
+                <a:solidFill>
+                  <a:schemeClr val="tx1"/>
+                </a:solidFill>
+                <a:effectLst/>
+                <a:latin typeface="+mn-lt"/>
+              </a:rPr>
+              <a:t>repository.findById</a:t>
+            </a:r>
+            <a:r>
+              <a:rPr lang="en-US" sz="1800" b="0" i="0" dirty="0">
+                <a:solidFill>
+                  <a:schemeClr val="tx1"/>
+                </a:solidFill>
+                <a:effectLst/>
+                <a:latin typeface="+mn-lt"/>
+              </a:rPr>
+              <a:t>(id).</a:t>
+            </a:r>
+            <a:r>
+              <a:rPr lang="en-US" sz="1800" b="0" i="0" dirty="0" err="1">
+                <a:solidFill>
+                  <a:schemeClr val="tx1"/>
+                </a:solidFill>
+                <a:effectLst/>
+                <a:latin typeface="+mn-lt"/>
+              </a:rPr>
+              <a:t>orElse</a:t>
+            </a:r>
+            <a:r>
+              <a:rPr lang="en-US" sz="1800" b="0" i="0" dirty="0">
+                <a:solidFill>
+                  <a:schemeClr val="tx1"/>
+                </a:solidFill>
+                <a:effectLst/>
+                <a:latin typeface="+mn-lt"/>
+              </a:rPr>
+              <a:t>(null);</a:t>
+            </a:r>
+          </a:p>
+          <a:p>
+            <a:pPr indent="0" algn="l">
+              <a:buNone/>
+            </a:pPr>
+            <a:r>
+              <a:rPr lang="en-US" sz="1800" b="0" i="0" dirty="0">
+                <a:solidFill>
+                  <a:schemeClr val="tx1"/>
+                </a:solidFill>
+                <a:effectLst/>
+                <a:latin typeface="+mn-lt"/>
+              </a:rPr>
+              <a:t>    }</a:t>
+            </a:r>
+            <a:endParaRPr lang="en-US" sz="1200" b="0" i="0" dirty="0">
+              <a:solidFill>
+                <a:srgbClr val="FFFFFF"/>
+              </a:solidFill>
+              <a:effectLst/>
+              <a:latin typeface="Courier New" panose="02070309020205020404" pitchFamily="49" charset="0"/>
+            </a:endParaRPr>
+          </a:p>
+        </p:txBody>
+      </p:sp>
+    </p:spTree>
+    <p:extLst>
+      <p:ext uri="{BB962C8B-B14F-4D97-AF65-F5344CB8AC3E}">
+        <p14:creationId xmlns:p14="http://schemas.microsoft.com/office/powerpoint/2010/main" val="2740318584"/>
+      </p:ext>
+    </p:extLst>
+  </p:cSld>
+  <p:clrMapOvr>
+    <a:masterClrMapping/>
+  </p:clrMapOvr>
+</p:sld>
+</file>
+
+<file path=ppt/slides/slide49.xml><?xml version="1.0" encoding="utf-8"?>
+<p:sld xmlns:a="http://schemas.openxmlformats.org/drawingml/2006/main" xmlns:r="http://schemas.openxmlformats.org/officeDocument/2006/relationships" xmlns:p="http://schemas.openxmlformats.org/presentationml/2006/main">
+  <p:cSld>
+    <p:spTree>
+      <p:nvGrpSpPr>
+        <p:cNvPr id="1" name=""/>
+        <p:cNvGrpSpPr/>
+        <p:nvPr/>
+      </p:nvGrpSpPr>
+      <p:grpSpPr>
+        <a:xfrm>
+          <a:off x="0" y="0"/>
+          <a:ext cx="0" cy="0"/>
+          <a:chOff x="0" y="0"/>
+          <a:chExt cx="0" cy="0"/>
+        </a:xfrm>
+      </p:grpSpPr>
+      <p:sp>
+        <p:nvSpPr>
+          <p:cNvPr id="2" name="Title 1">
+            <a:extLst>
+              <a:ext uri="{FF2B5EF4-FFF2-40B4-BE49-F238E27FC236}">
+                <a16:creationId xmlns:a16="http://schemas.microsoft.com/office/drawing/2014/main" id="{5BE2F728-0330-94AE-E896-AEB0D0CCDB98}"/>
+              </a:ext>
+            </a:extLst>
+          </p:cNvPr>
+          <p:cNvSpPr>
+            <a:spLocks noGrp="1"/>
+          </p:cNvSpPr>
+          <p:nvPr>
+            <p:ph type="title"/>
+          </p:nvPr>
+        </p:nvSpPr>
+        <p:spPr/>
+        <p:txBody>
+          <a:bodyPr/>
+          <a:lstStyle/>
+          <a:p>
+            <a:r>
+              <a:rPr lang="en-US" dirty="0"/>
+              <a:t>caffeine cache invalidation</a:t>
+            </a:r>
+          </a:p>
+        </p:txBody>
+      </p:sp>
+      <p:sp>
+        <p:nvSpPr>
+          <p:cNvPr id="3" name="Content Placeholder 2">
+            <a:extLst>
+              <a:ext uri="{FF2B5EF4-FFF2-40B4-BE49-F238E27FC236}">
+                <a16:creationId xmlns:a16="http://schemas.microsoft.com/office/drawing/2014/main" id="{F211FF4B-43F4-BF4F-FF6A-0A32E84C201B}"/>
+              </a:ext>
+            </a:extLst>
+          </p:cNvPr>
+          <p:cNvSpPr>
+            <a:spLocks noGrp="1"/>
+          </p:cNvSpPr>
+          <p:nvPr>
+            <p:ph idx="1"/>
+          </p:nvPr>
+        </p:nvSpPr>
+        <p:spPr>
+          <a:xfrm>
+            <a:off x="581193" y="2180496"/>
+            <a:ext cx="4479906" cy="4188406"/>
+          </a:xfrm>
+        </p:spPr>
+        <p:txBody>
+          <a:bodyPr>
+            <a:normAutofit fontScale="92500" lnSpcReduction="10000"/>
+          </a:bodyPr>
+          <a:lstStyle/>
+          <a:p>
+            <a:r>
+              <a:rPr lang="en-US" dirty="0"/>
+              <a:t>Suppose we update or delete a record, but our queries still return the old(stale) data</a:t>
+            </a:r>
+          </a:p>
+          <a:p>
+            <a:r>
+              <a:rPr lang="en-US" dirty="0"/>
+              <a:t>This is where we need to consider cache invalidation </a:t>
+            </a:r>
+          </a:p>
+          <a:p>
+            <a:r>
+              <a:rPr lang="en-US" dirty="0"/>
+              <a:t>This example showcases methods in a </a:t>
+            </a:r>
+            <a:r>
+              <a:rPr lang="en-US" dirty="0" err="1"/>
+              <a:t>ProductService</a:t>
+            </a:r>
+            <a:r>
+              <a:rPr lang="en-US" dirty="0"/>
+              <a:t> class</a:t>
+            </a:r>
+          </a:p>
+          <a:p>
+            <a:pPr lvl="1"/>
+            <a:r>
+              <a:rPr lang="en-US" dirty="0"/>
+              <a:t>@CachePut</a:t>
+            </a:r>
+          </a:p>
+          <a:p>
+            <a:pPr lvl="1"/>
+            <a:r>
+              <a:rPr lang="en-US" dirty="0"/>
+              <a:t>Always execute the method, then store its result under the specified key. Useful for successful updates.</a:t>
+            </a:r>
+          </a:p>
+          <a:p>
+            <a:pPr lvl="1"/>
+            <a:r>
+              <a:rPr lang="en-US" dirty="0"/>
+              <a:t>@CacheEvict</a:t>
+            </a:r>
+          </a:p>
+          <a:p>
+            <a:pPr lvl="1"/>
+            <a:r>
+              <a:rPr lang="en-US" dirty="0"/>
+              <a:t>Remove one cached entry or clear an entire cache, typically after a successful update or delete.</a:t>
+            </a:r>
+          </a:p>
+          <a:p>
+            <a:endParaRPr lang="en-US" dirty="0"/>
+          </a:p>
+        </p:txBody>
+      </p:sp>
+      <p:sp>
+        <p:nvSpPr>
+          <p:cNvPr id="5" name="TextBox 4">
+            <a:extLst>
+              <a:ext uri="{FF2B5EF4-FFF2-40B4-BE49-F238E27FC236}">
+                <a16:creationId xmlns:a16="http://schemas.microsoft.com/office/drawing/2014/main" id="{56117D06-9975-645B-8356-CC46521715A3}"/>
+              </a:ext>
+            </a:extLst>
+          </p:cNvPr>
+          <p:cNvSpPr txBox="1"/>
+          <p:nvPr/>
+        </p:nvSpPr>
+        <p:spPr>
+          <a:xfrm>
+            <a:off x="5292355" y="1997839"/>
+            <a:ext cx="6318452" cy="4247317"/>
+          </a:xfrm>
+          <a:prstGeom prst="rect">
+            <a:avLst/>
+          </a:prstGeom>
+          <a:noFill/>
+        </p:spPr>
+        <p:txBody>
+          <a:bodyPr wrap="square">
+            <a:spAutoFit/>
+          </a:bodyPr>
+          <a:lstStyle/>
+          <a:p>
+            <a:pPr indent="0" algn="l">
+              <a:buNone/>
+            </a:pPr>
+            <a:r>
+              <a:rPr lang="en-US" sz="1800" b="0" i="0" dirty="0">
+                <a:solidFill>
+                  <a:schemeClr val="tx1"/>
+                </a:solidFill>
+                <a:effectLst/>
+                <a:latin typeface="+mn-lt"/>
+              </a:rPr>
+              <a:t>@CachePut(cacheNames = "products", key = "#result.id")</a:t>
+            </a:r>
+          </a:p>
+          <a:p>
+            <a:pPr indent="0" algn="l">
+              <a:buNone/>
+            </a:pPr>
+            <a:r>
+              <a:rPr lang="en-US" sz="1800" b="0" i="0" dirty="0">
+                <a:solidFill>
+                  <a:schemeClr val="tx1"/>
+                </a:solidFill>
+                <a:effectLst/>
+                <a:latin typeface="+mn-lt"/>
+              </a:rPr>
+              <a:t>@CacheEvict(cacheNames = "</a:t>
+            </a:r>
+            <a:r>
+              <a:rPr lang="en-US" sz="1800" b="0" i="0" dirty="0" err="1">
+                <a:solidFill>
+                  <a:schemeClr val="tx1"/>
+                </a:solidFill>
+                <a:effectLst/>
+                <a:latin typeface="+mn-lt"/>
+              </a:rPr>
+              <a:t>productLists</a:t>
+            </a:r>
+            <a:r>
+              <a:rPr lang="en-US" sz="1800" b="0" i="0" dirty="0">
+                <a:solidFill>
+                  <a:schemeClr val="tx1"/>
+                </a:solidFill>
+                <a:effectLst/>
+                <a:latin typeface="+mn-lt"/>
+              </a:rPr>
+              <a:t>", </a:t>
+            </a:r>
+            <a:r>
+              <a:rPr lang="en-US" sz="1800" b="0" i="0" dirty="0" err="1">
+                <a:solidFill>
+                  <a:schemeClr val="tx1"/>
+                </a:solidFill>
+                <a:effectLst/>
+                <a:latin typeface="+mn-lt"/>
+              </a:rPr>
+              <a:t>allEntries</a:t>
+            </a:r>
+            <a:r>
+              <a:rPr lang="en-US" sz="1800" b="0" i="0" dirty="0">
+                <a:solidFill>
+                  <a:schemeClr val="tx1"/>
+                </a:solidFill>
+                <a:effectLst/>
+                <a:latin typeface="+mn-lt"/>
+              </a:rPr>
+              <a:t> = true)</a:t>
+            </a:r>
+          </a:p>
+          <a:p>
+            <a:pPr indent="0" algn="l">
+              <a:buNone/>
+            </a:pPr>
+            <a:r>
+              <a:rPr lang="en-US" sz="1800" b="0" i="0" dirty="0">
+                <a:solidFill>
+                  <a:schemeClr val="tx1"/>
+                </a:solidFill>
+                <a:effectLst/>
+                <a:latin typeface="+mn-lt"/>
+              </a:rPr>
+              <a:t>@Transactional</a:t>
+            </a:r>
+          </a:p>
+          <a:p>
+            <a:pPr indent="0" algn="l">
+              <a:buNone/>
+            </a:pPr>
+            <a:r>
+              <a:rPr lang="en-US" sz="1800" b="0" i="0" dirty="0">
+                <a:solidFill>
+                  <a:schemeClr val="tx1"/>
+                </a:solidFill>
+                <a:effectLst/>
+                <a:latin typeface="+mn-lt"/>
+              </a:rPr>
+              <a:t>public Product update(Product product) {</a:t>
+            </a:r>
+          </a:p>
+          <a:p>
+            <a:pPr indent="0" algn="l">
+              <a:buNone/>
+            </a:pPr>
+            <a:r>
+              <a:rPr lang="en-US" sz="1800" b="0" i="0" dirty="0">
+                <a:solidFill>
+                  <a:schemeClr val="tx1"/>
+                </a:solidFill>
+                <a:effectLst/>
+                <a:latin typeface="+mn-lt"/>
+              </a:rPr>
+              <a:t>    return </a:t>
+            </a:r>
+            <a:r>
+              <a:rPr lang="en-US" sz="1800" b="0" i="0" dirty="0" err="1">
+                <a:solidFill>
+                  <a:schemeClr val="tx1"/>
+                </a:solidFill>
+                <a:effectLst/>
+                <a:latin typeface="+mn-lt"/>
+              </a:rPr>
+              <a:t>repository.save</a:t>
+            </a:r>
+            <a:r>
+              <a:rPr lang="en-US" sz="1800" b="0" i="0" dirty="0">
+                <a:solidFill>
+                  <a:schemeClr val="tx1"/>
+                </a:solidFill>
+                <a:effectLst/>
+                <a:latin typeface="+mn-lt"/>
+              </a:rPr>
+              <a:t>(product);</a:t>
+            </a:r>
+          </a:p>
+          <a:p>
+            <a:pPr indent="0" algn="l">
+              <a:buNone/>
+            </a:pPr>
+            <a:r>
+              <a:rPr lang="en-US" sz="1800" b="0" i="0" dirty="0">
+                <a:solidFill>
+                  <a:schemeClr val="tx1"/>
+                </a:solidFill>
+                <a:effectLst/>
+                <a:latin typeface="+mn-lt"/>
+              </a:rPr>
+              <a:t>}</a:t>
+            </a:r>
+          </a:p>
+          <a:p>
+            <a:pPr indent="0" algn="l">
+              <a:buNone/>
+            </a:pPr>
+            <a:endParaRPr lang="en-US" sz="1800" b="0" i="0" dirty="0">
+              <a:solidFill>
+                <a:schemeClr val="tx1"/>
+              </a:solidFill>
+              <a:effectLst/>
+              <a:latin typeface="+mn-lt"/>
+            </a:endParaRPr>
+          </a:p>
+          <a:p>
+            <a:pPr indent="0" algn="l">
+              <a:buNone/>
+            </a:pPr>
+            <a:r>
+              <a:rPr lang="en-US" sz="1800" b="0" i="0" dirty="0">
+                <a:solidFill>
+                  <a:schemeClr val="tx1"/>
+                </a:solidFill>
+                <a:effectLst/>
+                <a:latin typeface="+mn-lt"/>
+              </a:rPr>
+              <a:t>@Caching(evict = {</a:t>
+            </a:r>
+          </a:p>
+          <a:p>
+            <a:pPr indent="0" algn="l">
+              <a:buNone/>
+            </a:pPr>
+            <a:r>
+              <a:rPr lang="en-US" sz="1800" b="0" i="0" dirty="0">
+                <a:solidFill>
+                  <a:schemeClr val="tx1"/>
+                </a:solidFill>
+                <a:effectLst/>
+                <a:latin typeface="+mn-lt"/>
+              </a:rPr>
+              <a:t>    @CacheEvict(cacheNames = "products", key = "#id"),</a:t>
+            </a:r>
+          </a:p>
+          <a:p>
+            <a:pPr indent="0" algn="l">
+              <a:buNone/>
+            </a:pPr>
+            <a:r>
+              <a:rPr lang="en-US" sz="1800" b="0" i="0" dirty="0">
+                <a:solidFill>
+                  <a:schemeClr val="tx1"/>
+                </a:solidFill>
+                <a:effectLst/>
+                <a:latin typeface="+mn-lt"/>
+              </a:rPr>
+              <a:t>    @CacheEvict(cacheNames = "</a:t>
+            </a:r>
+            <a:r>
+              <a:rPr lang="en-US" sz="1800" b="0" i="0" dirty="0" err="1">
+                <a:solidFill>
+                  <a:schemeClr val="tx1"/>
+                </a:solidFill>
+                <a:effectLst/>
+                <a:latin typeface="+mn-lt"/>
+              </a:rPr>
+              <a:t>productLists</a:t>
+            </a:r>
+            <a:r>
+              <a:rPr lang="en-US" sz="1800" b="0" i="0" dirty="0">
+                <a:solidFill>
+                  <a:schemeClr val="tx1"/>
+                </a:solidFill>
+                <a:effectLst/>
+                <a:latin typeface="+mn-lt"/>
+              </a:rPr>
+              <a:t>", </a:t>
+            </a:r>
+            <a:r>
+              <a:rPr lang="en-US" sz="1800" b="0" i="0" dirty="0" err="1">
+                <a:solidFill>
+                  <a:schemeClr val="tx1"/>
+                </a:solidFill>
+                <a:effectLst/>
+                <a:latin typeface="+mn-lt"/>
+              </a:rPr>
+              <a:t>allEntries</a:t>
+            </a:r>
+            <a:r>
+              <a:rPr lang="en-US" sz="1800" b="0" i="0" dirty="0">
+                <a:solidFill>
+                  <a:schemeClr val="tx1"/>
+                </a:solidFill>
+                <a:effectLst/>
+                <a:latin typeface="+mn-lt"/>
+              </a:rPr>
+              <a:t> = true)</a:t>
+            </a:r>
+          </a:p>
+          <a:p>
+            <a:pPr indent="0" algn="l">
+              <a:buNone/>
+            </a:pPr>
+            <a:r>
+              <a:rPr lang="en-US" sz="1800" b="0" i="0" dirty="0">
+                <a:solidFill>
+                  <a:schemeClr val="tx1"/>
+                </a:solidFill>
+                <a:effectLst/>
+                <a:latin typeface="+mn-lt"/>
+              </a:rPr>
+              <a:t>})</a:t>
+            </a:r>
+          </a:p>
+          <a:p>
+            <a:pPr indent="0" algn="l">
+              <a:buNone/>
+            </a:pPr>
+            <a:r>
+              <a:rPr lang="en-US" sz="1800" b="0" i="0" dirty="0">
+                <a:solidFill>
+                  <a:schemeClr val="tx1"/>
+                </a:solidFill>
+                <a:effectLst/>
+                <a:latin typeface="+mn-lt"/>
+              </a:rPr>
+              <a:t>@Transactional</a:t>
+            </a:r>
+          </a:p>
+          <a:p>
+            <a:pPr indent="0" algn="l">
+              <a:buNone/>
+            </a:pPr>
+            <a:r>
+              <a:rPr lang="en-US" sz="1800" b="0" i="0" dirty="0">
+                <a:solidFill>
+                  <a:schemeClr val="tx1"/>
+                </a:solidFill>
+                <a:effectLst/>
+                <a:latin typeface="+mn-lt"/>
+              </a:rPr>
+              <a:t>public void delete(Long id) {</a:t>
+            </a:r>
+          </a:p>
+          <a:p>
+            <a:pPr indent="0" algn="l">
+              <a:buNone/>
+            </a:pPr>
+            <a:r>
+              <a:rPr lang="en-US" sz="1800" b="0" i="0" dirty="0">
+                <a:solidFill>
+                  <a:schemeClr val="tx1"/>
+                </a:solidFill>
+                <a:effectLst/>
+                <a:latin typeface="+mn-lt"/>
+              </a:rPr>
+              <a:t>    </a:t>
+            </a:r>
+            <a:r>
+              <a:rPr lang="en-US" sz="1800" b="0" i="0" dirty="0" err="1">
+                <a:solidFill>
+                  <a:schemeClr val="tx1"/>
+                </a:solidFill>
+                <a:effectLst/>
+                <a:latin typeface="+mn-lt"/>
+              </a:rPr>
+              <a:t>repository.deleteById</a:t>
+            </a:r>
+            <a:r>
+              <a:rPr lang="en-US" sz="1800" b="0" i="0" dirty="0">
+                <a:solidFill>
+                  <a:schemeClr val="tx1"/>
+                </a:solidFill>
+                <a:effectLst/>
+                <a:latin typeface="+mn-lt"/>
+              </a:rPr>
+              <a:t>(id);</a:t>
+            </a:r>
+          </a:p>
+          <a:p>
+            <a:pPr indent="0" algn="l">
+              <a:buNone/>
+            </a:pPr>
+            <a:r>
+              <a:rPr lang="en-US" sz="1800" b="0" i="0" dirty="0">
+                <a:solidFill>
+                  <a:schemeClr val="tx1"/>
+                </a:solidFill>
+                <a:effectLst/>
+                <a:latin typeface="+mn-lt"/>
+              </a:rPr>
+              <a:t>}</a:t>
+            </a:r>
+            <a:endParaRPr lang="en-US" sz="1200" b="0" i="0" dirty="0">
+              <a:solidFill>
+                <a:srgbClr val="FFFFFF"/>
+              </a:solidFill>
+              <a:effectLst/>
+              <a:latin typeface="Courier New" panose="02070309020205020404" pitchFamily="49" charset="0"/>
+            </a:endParaRPr>
+          </a:p>
+        </p:txBody>
+      </p:sp>
+    </p:spTree>
+    <p:extLst>
+      <p:ext uri="{BB962C8B-B14F-4D97-AF65-F5344CB8AC3E}">
+        <p14:creationId xmlns:p14="http://schemas.microsoft.com/office/powerpoint/2010/main" val="1457669487"/>
       </p:ext>
     </p:extLst>
   </p:cSld>
@@ -14363,6 +18576,436 @@
     <p:extLst>
       <p:ext uri="{BB962C8B-B14F-4D97-AF65-F5344CB8AC3E}">
         <p14:creationId xmlns:p14="http://schemas.microsoft.com/office/powerpoint/2010/main" val="2860410399"/>
+      </p:ext>
+    </p:extLst>
+  </p:cSld>
+  <p:clrMapOvr>
+    <a:masterClrMapping/>
+  </p:clrMapOvr>
+</p:sld>
+</file>
+
+<file path=ppt/slides/slide50.xml><?xml version="1.0" encoding="utf-8"?>
+<p:sld xmlns:a="http://schemas.openxmlformats.org/drawingml/2006/main" xmlns:r="http://schemas.openxmlformats.org/officeDocument/2006/relationships" xmlns:p="http://schemas.openxmlformats.org/presentationml/2006/main" show="0">
+  <p:cSld>
+    <p:spTree>
+      <p:nvGrpSpPr>
+        <p:cNvPr id="1" name="">
+          <a:extLst>
+            <a:ext uri="{FF2B5EF4-FFF2-40B4-BE49-F238E27FC236}">
+              <a16:creationId xmlns:a16="http://schemas.microsoft.com/office/drawing/2014/main" id="{8695FB92-6A2A-D33A-9349-4B2FC8FB8D53}"/>
+            </a:ext>
+          </a:extLst>
+        </p:cNvPr>
+        <p:cNvGrpSpPr/>
+        <p:nvPr/>
+      </p:nvGrpSpPr>
+      <p:grpSpPr>
+        <a:xfrm>
+          <a:off x="0" y="0"/>
+          <a:ext cx="0" cy="0"/>
+          <a:chOff x="0" y="0"/>
+          <a:chExt cx="0" cy="0"/>
+        </a:xfrm>
+      </p:grpSpPr>
+      <p:sp>
+        <p:nvSpPr>
+          <p:cNvPr id="2" name="Title 1">
+            <a:extLst>
+              <a:ext uri="{FF2B5EF4-FFF2-40B4-BE49-F238E27FC236}">
+                <a16:creationId xmlns:a16="http://schemas.microsoft.com/office/drawing/2014/main" id="{11F3D84A-B2A2-70EA-E959-F4AF070FDADF}"/>
+              </a:ext>
+            </a:extLst>
+          </p:cNvPr>
+          <p:cNvSpPr>
+            <a:spLocks noGrp="1"/>
+          </p:cNvSpPr>
+          <p:nvPr>
+            <p:ph type="title"/>
+          </p:nvPr>
+        </p:nvSpPr>
+        <p:spPr/>
+        <p:txBody>
+          <a:bodyPr/>
+          <a:lstStyle/>
+          <a:p>
+            <a:r>
+              <a:rPr lang="en-US" dirty="0"/>
+              <a:t>Challenge – let’s check our understanding</a:t>
+            </a:r>
+          </a:p>
+        </p:txBody>
+      </p:sp>
+      <p:sp>
+        <p:nvSpPr>
+          <p:cNvPr id="3" name="Content Placeholder 2">
+            <a:extLst>
+              <a:ext uri="{FF2B5EF4-FFF2-40B4-BE49-F238E27FC236}">
+                <a16:creationId xmlns:a16="http://schemas.microsoft.com/office/drawing/2014/main" id="{D13E1DF8-36E0-1D6D-D9DB-C73571F53862}"/>
+              </a:ext>
+            </a:extLst>
+          </p:cNvPr>
+          <p:cNvSpPr>
+            <a:spLocks noGrp="1"/>
+          </p:cNvSpPr>
+          <p:nvPr>
+            <p:ph idx="1"/>
+          </p:nvPr>
+        </p:nvSpPr>
+        <p:spPr>
+          <a:xfrm>
+            <a:off x="581192" y="2475925"/>
+            <a:ext cx="5317584" cy="1681246"/>
+          </a:xfrm>
+        </p:spPr>
+        <p:txBody>
+          <a:bodyPr/>
+          <a:lstStyle/>
+          <a:p>
+            <a:r>
+              <a:rPr lang="en-US" dirty="0"/>
+              <a:t>Create endpoints for different types of coaches</a:t>
+            </a:r>
+          </a:p>
+        </p:txBody>
+      </p:sp>
+      <p:sp>
+        <p:nvSpPr>
+          <p:cNvPr id="6" name="TextBox 5">
+            <a:extLst>
+              <a:ext uri="{FF2B5EF4-FFF2-40B4-BE49-F238E27FC236}">
+                <a16:creationId xmlns:a16="http://schemas.microsoft.com/office/drawing/2014/main" id="{4711C103-16B8-599E-5739-2FDF5191F349}"/>
+              </a:ext>
+            </a:extLst>
+          </p:cNvPr>
+          <p:cNvSpPr txBox="1"/>
+          <p:nvPr/>
+        </p:nvSpPr>
+        <p:spPr>
+          <a:xfrm>
+            <a:off x="1228165" y="2402747"/>
+            <a:ext cx="756938" cy="369332"/>
+          </a:xfrm>
+          <a:prstGeom prst="rect">
+            <a:avLst/>
+          </a:prstGeom>
+          <a:noFill/>
+        </p:spPr>
+        <p:txBody>
+          <a:bodyPr wrap="none" rtlCol="0">
+            <a:spAutoFit/>
+          </a:bodyPr>
+          <a:lstStyle/>
+          <a:p>
+            <a:r>
+              <a:rPr lang="en-US" b="1" dirty="0"/>
+              <a:t>Goal:</a:t>
+            </a:r>
+          </a:p>
+        </p:txBody>
+      </p:sp>
+      <p:sp>
+        <p:nvSpPr>
+          <p:cNvPr id="7" name="TextBox 6">
+            <a:extLst>
+              <a:ext uri="{FF2B5EF4-FFF2-40B4-BE49-F238E27FC236}">
+                <a16:creationId xmlns:a16="http://schemas.microsoft.com/office/drawing/2014/main" id="{45AB5C3A-C77B-4B2B-5C19-A80BEA882757}"/>
+              </a:ext>
+            </a:extLst>
+          </p:cNvPr>
+          <p:cNvSpPr txBox="1"/>
+          <p:nvPr/>
+        </p:nvSpPr>
+        <p:spPr>
+          <a:xfrm>
+            <a:off x="6949165" y="2402747"/>
+            <a:ext cx="4661643" cy="369332"/>
+          </a:xfrm>
+          <a:prstGeom prst="rect">
+            <a:avLst/>
+          </a:prstGeom>
+          <a:noFill/>
+        </p:spPr>
+        <p:txBody>
+          <a:bodyPr wrap="square" rtlCol="0">
+            <a:spAutoFit/>
+          </a:bodyPr>
+          <a:lstStyle/>
+          <a:p>
+            <a:r>
+              <a:rPr lang="en-US" b="1" dirty="0"/>
+              <a:t>Scenario:  			   5 min</a:t>
+            </a:r>
+          </a:p>
+        </p:txBody>
+      </p:sp>
+      <p:sp>
+        <p:nvSpPr>
+          <p:cNvPr id="8" name="Content Placeholder 2">
+            <a:extLst>
+              <a:ext uri="{FF2B5EF4-FFF2-40B4-BE49-F238E27FC236}">
+                <a16:creationId xmlns:a16="http://schemas.microsoft.com/office/drawing/2014/main" id="{3861BE59-BFB8-9E75-6062-CCB3C6CEB3D5}"/>
+              </a:ext>
+            </a:extLst>
+          </p:cNvPr>
+          <p:cNvSpPr txBox="1">
+            <a:spLocks/>
+          </p:cNvSpPr>
+          <p:nvPr/>
+        </p:nvSpPr>
+        <p:spPr>
+          <a:xfrm>
+            <a:off x="6545749" y="2772078"/>
+            <a:ext cx="4661642" cy="2480405"/>
+          </a:xfrm>
+          <a:prstGeom prst="rect">
+            <a:avLst/>
+          </a:prstGeom>
+        </p:spPr>
+        <p:txBody>
+          <a:bodyPr vert="horz" lIns="91440" tIns="45720" rIns="91440" bIns="45720" rtlCol="0" anchor="ctr">
+            <a:normAutofit/>
+          </a:bodyPr>
+          <a:lstStyle>
+            <a:lvl1pPr marL="306000" indent="-306000" algn="l" defTabSz="457200" rtl="0" eaLnBrk="1" latinLnBrk="0" hangingPunct="1">
+              <a:spcBef>
+                <a:spcPct val="20000"/>
+              </a:spcBef>
+              <a:spcAft>
+                <a:spcPts val="600"/>
+              </a:spcAft>
+              <a:buClr>
+                <a:schemeClr val="accent2"/>
+              </a:buClr>
+              <a:buSzPct val="92000"/>
+              <a:buFont typeface="Wingdings 2" panose="05020102010507070707" pitchFamily="18" charset="2"/>
+              <a:buChar char=""/>
+              <a:defRPr sz="1800" kern="1200">
+                <a:solidFill>
+                  <a:schemeClr val="tx2"/>
+                </a:solidFill>
+                <a:latin typeface="+mn-lt"/>
+                <a:ea typeface="+mn-ea"/>
+                <a:cs typeface="+mn-cs"/>
+              </a:defRPr>
+            </a:lvl1pPr>
+            <a:lvl2pPr marL="630000" indent="-306000" algn="l" defTabSz="457200" rtl="0" eaLnBrk="1" latinLnBrk="0" hangingPunct="1">
+              <a:spcBef>
+                <a:spcPct val="20000"/>
+              </a:spcBef>
+              <a:spcAft>
+                <a:spcPts val="600"/>
+              </a:spcAft>
+              <a:buClr>
+                <a:schemeClr val="accent2"/>
+              </a:buClr>
+              <a:buSzPct val="92000"/>
+              <a:buFont typeface="Wingdings 2" panose="05020102010507070707" pitchFamily="18" charset="2"/>
+              <a:buChar char=""/>
+              <a:defRPr sz="1600" kern="1200">
+                <a:solidFill>
+                  <a:schemeClr val="tx2"/>
+                </a:solidFill>
+                <a:latin typeface="+mn-lt"/>
+                <a:ea typeface="+mn-ea"/>
+                <a:cs typeface="+mn-cs"/>
+              </a:defRPr>
+            </a:lvl2pPr>
+            <a:lvl3pPr marL="900000" indent="-270000" algn="l" defTabSz="457200" rtl="0" eaLnBrk="1" latinLnBrk="0" hangingPunct="1">
+              <a:spcBef>
+                <a:spcPct val="20000"/>
+              </a:spcBef>
+              <a:spcAft>
+                <a:spcPts val="600"/>
+              </a:spcAft>
+              <a:buClr>
+                <a:schemeClr val="accent2"/>
+              </a:buClr>
+              <a:buSzPct val="92000"/>
+              <a:buFont typeface="Wingdings 2" panose="05020102010507070707" pitchFamily="18" charset="2"/>
+              <a:buChar char=""/>
+              <a:defRPr sz="1400" kern="1200">
+                <a:solidFill>
+                  <a:schemeClr val="tx2"/>
+                </a:solidFill>
+                <a:latin typeface="+mn-lt"/>
+                <a:ea typeface="+mn-ea"/>
+                <a:cs typeface="+mn-cs"/>
+              </a:defRPr>
+            </a:lvl3pPr>
+            <a:lvl4pPr marL="1242000" indent="-234000" algn="l" defTabSz="457200" rtl="0" eaLnBrk="1" latinLnBrk="0" hangingPunct="1">
+              <a:spcBef>
+                <a:spcPct val="20000"/>
+              </a:spcBef>
+              <a:spcAft>
+                <a:spcPts val="600"/>
+              </a:spcAft>
+              <a:buClr>
+                <a:schemeClr val="accent2"/>
+              </a:buClr>
+              <a:buSzPct val="92000"/>
+              <a:buFont typeface="Wingdings 2" panose="05020102010507070707" pitchFamily="18" charset="2"/>
+              <a:buChar char=""/>
+              <a:defRPr sz="1200" kern="1200">
+                <a:solidFill>
+                  <a:schemeClr val="tx2"/>
+                </a:solidFill>
+                <a:latin typeface="+mn-lt"/>
+                <a:ea typeface="+mn-ea"/>
+                <a:cs typeface="+mn-cs"/>
+              </a:defRPr>
+            </a:lvl4pPr>
+            <a:lvl5pPr marL="1602000" indent="-234000" algn="l" defTabSz="457200" rtl="0" eaLnBrk="1" latinLnBrk="0" hangingPunct="1">
+              <a:spcBef>
+                <a:spcPct val="20000"/>
+              </a:spcBef>
+              <a:spcAft>
+                <a:spcPts val="600"/>
+              </a:spcAft>
+              <a:buClr>
+                <a:schemeClr val="accent2"/>
+              </a:buClr>
+              <a:buSzPct val="92000"/>
+              <a:buFont typeface="Wingdings 2" panose="05020102010507070707" pitchFamily="18" charset="2"/>
+              <a:buChar char=""/>
+              <a:defRPr sz="1200" kern="1200">
+                <a:solidFill>
+                  <a:schemeClr val="tx2"/>
+                </a:solidFill>
+                <a:latin typeface="+mn-lt"/>
+                <a:ea typeface="+mn-ea"/>
+                <a:cs typeface="+mn-cs"/>
+              </a:defRPr>
+            </a:lvl5pPr>
+            <a:lvl6pPr marL="1900000" indent="-228600" algn="l" defTabSz="457200" rtl="0" eaLnBrk="1" latinLnBrk="0" hangingPunct="1">
+              <a:spcBef>
+                <a:spcPct val="20000"/>
+              </a:spcBef>
+              <a:spcAft>
+                <a:spcPts val="600"/>
+              </a:spcAft>
+              <a:buClr>
+                <a:schemeClr val="accent2"/>
+              </a:buClr>
+              <a:buSzPct val="92000"/>
+              <a:buFont typeface="Wingdings 2" panose="05020102010507070707" pitchFamily="18" charset="2"/>
+              <a:buChar char=""/>
+              <a:defRPr sz="1200" kern="1200">
+                <a:solidFill>
+                  <a:schemeClr val="tx2"/>
+                </a:solidFill>
+                <a:latin typeface="+mn-lt"/>
+                <a:ea typeface="+mn-ea"/>
+                <a:cs typeface="+mn-cs"/>
+              </a:defRPr>
+            </a:lvl6pPr>
+            <a:lvl7pPr marL="2200000" indent="-228600" algn="l" defTabSz="457200" rtl="0" eaLnBrk="1" latinLnBrk="0" hangingPunct="1">
+              <a:spcBef>
+                <a:spcPct val="20000"/>
+              </a:spcBef>
+              <a:spcAft>
+                <a:spcPts val="600"/>
+              </a:spcAft>
+              <a:buClr>
+                <a:schemeClr val="accent2"/>
+              </a:buClr>
+              <a:buSzPct val="92000"/>
+              <a:buFont typeface="Wingdings 2" panose="05020102010507070707" pitchFamily="18" charset="2"/>
+              <a:buChar char=""/>
+              <a:defRPr sz="1200" kern="1200">
+                <a:solidFill>
+                  <a:schemeClr val="tx2"/>
+                </a:solidFill>
+                <a:latin typeface="+mn-lt"/>
+                <a:ea typeface="+mn-ea"/>
+                <a:cs typeface="+mn-cs"/>
+              </a:defRPr>
+            </a:lvl7pPr>
+            <a:lvl8pPr marL="2500000" indent="-228600" algn="l" defTabSz="457200" rtl="0" eaLnBrk="1" latinLnBrk="0" hangingPunct="1">
+              <a:spcBef>
+                <a:spcPct val="20000"/>
+              </a:spcBef>
+              <a:spcAft>
+                <a:spcPts val="600"/>
+              </a:spcAft>
+              <a:buClr>
+                <a:schemeClr val="accent2"/>
+              </a:buClr>
+              <a:buSzPct val="92000"/>
+              <a:buFont typeface="Wingdings 2" panose="05020102010507070707" pitchFamily="18" charset="2"/>
+              <a:buChar char=""/>
+              <a:defRPr sz="1200" kern="1200">
+                <a:solidFill>
+                  <a:schemeClr val="tx2"/>
+                </a:solidFill>
+                <a:latin typeface="+mn-lt"/>
+                <a:ea typeface="+mn-ea"/>
+                <a:cs typeface="+mn-cs"/>
+              </a:defRPr>
+            </a:lvl8pPr>
+            <a:lvl9pPr marL="2800000" indent="-228600" algn="l" defTabSz="457200" rtl="0" eaLnBrk="1" latinLnBrk="0" hangingPunct="1">
+              <a:spcBef>
+                <a:spcPct val="20000"/>
+              </a:spcBef>
+              <a:spcAft>
+                <a:spcPts val="600"/>
+              </a:spcAft>
+              <a:buClr>
+                <a:schemeClr val="accent2"/>
+              </a:buClr>
+              <a:buSzPct val="92000"/>
+              <a:buFont typeface="Wingdings 2" panose="05020102010507070707" pitchFamily="18" charset="2"/>
+              <a:buChar char=""/>
+              <a:defRPr sz="1200" kern="1200">
+                <a:solidFill>
+                  <a:schemeClr val="tx2"/>
+                </a:solidFill>
+                <a:latin typeface="+mn-lt"/>
+                <a:ea typeface="+mn-ea"/>
+                <a:cs typeface="+mn-cs"/>
+              </a:defRPr>
+            </a:lvl9pPr>
+          </a:lstStyle>
+          <a:p>
+            <a:r>
+              <a:rPr lang="en-US" dirty="0"/>
+              <a:t>Example: One endpoint uses a ‘</a:t>
+            </a:r>
+            <a:r>
+              <a:rPr lang="en-US" dirty="0" err="1"/>
+              <a:t>baseBallCoach</a:t>
+            </a:r>
+            <a:r>
+              <a:rPr lang="en-US" dirty="0"/>
+              <a:t>’ and prints ‘Practice Baseball’ </a:t>
+            </a:r>
+          </a:p>
+          <a:p>
+            <a:r>
+              <a:rPr lang="en-US" dirty="0"/>
+              <a:t>Another endpoint uses a ‘</a:t>
+            </a:r>
+            <a:r>
+              <a:rPr lang="en-US" dirty="0" err="1"/>
+              <a:t>basketballCoach</a:t>
+            </a:r>
+            <a:r>
+              <a:rPr lang="en-US" dirty="0"/>
+              <a:t>’ and prints ‘Practice Basketball’</a:t>
+            </a:r>
+          </a:p>
+          <a:p>
+            <a:r>
+              <a:rPr lang="en-US" dirty="0"/>
+              <a:t>Hint: You can inject more than one item, with multiple @Qualifier(s)!</a:t>
+            </a:r>
+          </a:p>
+        </p:txBody>
+      </p:sp>
+    </p:spTree>
+    <p:extLst>
+      <p:ext uri="{BB962C8B-B14F-4D97-AF65-F5344CB8AC3E}">
+        <p14:creationId xmlns:p14="http://schemas.microsoft.com/office/powerpoint/2010/main" val="2532014160"/>
       </p:ext>
     </p:extLst>
   </p:cSld>
